--- a/study/version-control/kafka-version-negotiation.pptx
+++ b/study/version-control/kafka-version-negotiation.pptx
@@ -20,7 +20,6 @@
     <p:sldId id="268" r:id="rId19"/>
     <p:sldId id="269" r:id="rId20"/>
     <p:sldId id="270" r:id="rId21"/>
-    <p:sldId id="271" r:id="rId22"/>
   </p:sldIdLst>
   <p:sldSz cx="12191695" cy="6858000" type="screen4x3"/>
   <p:notesSz cx="6858000" cy="9144000"/>
@@ -3329,7 +3328,7 @@
                 </a:solidFill>
                 <a:latin typeface="Calibri"/>
               </a:rPr>
-              <a:t>隨堂考 · 核心</a:t>
+              <a:t>隨堂考 · 核心　（正解）</a:t>
             </a:r>
           </a:p>
         </p:txBody>
@@ -3425,31 +3424,36 @@
           <a:prstGeom prst="rect">
             <a:avLst/>
           </a:prstGeom>
-          <a:noFill/>
-        </p:spPr>
-        <p:txBody>
-          <a:bodyPr wrap="square">
-            <a:noAutofit/>
-          </a:bodyPr>
-          <a:lstStyle/>
-          <a:p>
-            <a:r>
-              <a:rPr sz="1600" b="0">
-                <a:solidFill>
-                  <a:srgbClr val="1E2024"/>
+          <a:solidFill>
+            <a:srgbClr val="E9F3DE"/>
+          </a:solidFill>
+          <a:ln>
+            <a:noFill/>
+          </a:ln>
+        </p:spPr>
+        <p:txBody>
+          <a:bodyPr wrap="square" lIns="128016" tIns="54864">
+            <a:noAutofit/>
+          </a:bodyPr>
+          <a:lstStyle/>
+          <a:p>
+            <a:r>
+              <a:rPr sz="1600" b="1">
+                <a:solidFill>
+                  <a:srgbClr val="27500A"/>
                 </a:solidFill>
                 <a:latin typeface="Calibri"/>
               </a:rPr>
               <a:t>B.  </a:t>
             </a:r>
             <a:r>
-              <a:rPr sz="1600" b="0">
-                <a:solidFill>
-                  <a:srgbClr val="1E2024"/>
-                </a:solidFill>
-                <a:latin typeface="Calibri"/>
-              </a:rPr>
-              <a:t>由 finalized metadata.version 決定</a:t>
+              <a:rPr sz="1600" b="1">
+                <a:solidFill>
+                  <a:srgbClr val="27500A"/>
+                </a:solidFill>
+                <a:latin typeface="Calibri"/>
+              </a:rPr>
+              <a:t>由 finalized metadata.version 決定   ✓</a:t>
             </a:r>
           </a:p>
         </p:txBody>
@@ -3563,13 +3567,85 @@
           <a:lstStyle/>
           <a:p>
             <a:r>
+              <a:rPr sz="1400" b="1">
+                <a:solidFill>
+                  <a:srgbClr val="27500A"/>
+                </a:solidFill>
+                <a:latin typeface="Calibri"/>
+              </a:rPr>
+              <a:t>正解 B — </a:t>
+            </a:r>
+            <a:r>
               <a:rPr sz="1400" b="0">
                 <a:solidFill>
+                  <a:srgbClr val="1E2024"/>
+                </a:solidFill>
+                <a:latin typeface="Calibri"/>
+              </a:rPr>
+              <a:t>fetchRequestVersion(MV)：MV 是集中共識，不做 per-connection 協商。</a:t>
+            </a:r>
+          </a:p>
+        </p:txBody>
+      </p:sp>
+      <p:sp>
+        <p:nvSpPr>
+          <p:cNvPr id="9" name="TextBox 8"/>
+          <p:cNvSpPr txBox="1"/>
+          <p:nvPr/>
+        </p:nvSpPr>
+        <p:spPr>
+          <a:xfrm>
+            <a:off x="640080" y="6400800"/>
+            <a:ext cx="10972800" cy="384048"/>
+          </a:xfrm>
+          <a:prstGeom prst="rect">
+            <a:avLst/>
+          </a:prstGeom>
+          <a:noFill/>
+        </p:spPr>
+        <p:txBody>
+          <a:bodyPr wrap="square">
+            <a:noAutofit/>
+          </a:bodyPr>
+          <a:lstStyle/>
+          <a:p>
+            <a:r>
+              <a:rPr sz="1200" b="1">
+                <a:solidFill>
                   <a:srgbClr val="8A8A8A"/>
                 </a:solidFill>
                 <a:latin typeface="Calibri"/>
               </a:rPr>
-              <a:t>想一想 —— 下一頁公布答案</a:t>
+              <a:t>REF   </a:t>
+            </a:r>
+            <a:r>
+              <a:rPr sz="1200" b="0" u="sng">
+                <a:solidFill>
+                  <a:srgbClr val="185FA5"/>
+                </a:solidFill>
+                <a:latin typeface="Courier New"/>
+                <a:hlinkClick r:id="rId2"/>
+              </a:rPr>
+              <a:t>RemoteLeaderEndPoint.scala:215</a:t>
+            </a:r>
+            <a:r>
+              <a:rPr sz="1200" b="0">
+                <a:solidFill>
+                  <a:srgbClr val="8A8A8A"/>
+                </a:solidFill>
+                <a:latin typeface="Calibri"/>
+              </a:rPr>
+              <a:t>   ·   </a:t>
+            </a:r>
+            <a:r>
+              <a:rPr sz="1200" b="0" u="sng">
+                <a:solidFill>
+                  <a:srgbClr val="185FA5"/>
+                </a:solidFill>
+                <a:latin typeface="Courier New"/>
+                <a:hlinkClick r:id="rId3"/>
+              </a:rPr>
+              <a:t>MetadataVersion.java:273</a:t>
             </a:r>
           </a:p>
         </p:txBody>
@@ -3621,7 +3697,7 @@
                 </a:solidFill>
                 <a:latin typeface="Calibri"/>
               </a:rPr>
-              <a:t>隨堂考 · 核心　（正解）</a:t>
+              <a:t>Part 2 · 失敗訊息</a:t>
             </a:r>
           </a:p>
         </p:txBody>
@@ -3635,27 +3711,27 @@
         <p:spPr>
           <a:xfrm>
             <a:off x="640080" y="841248"/>
-            <a:ext cx="10972800" cy="1188720"/>
-          </a:xfrm>
-          <a:prstGeom prst="rect">
-            <a:avLst/>
-          </a:prstGeom>
-          <a:noFill/>
-        </p:spPr>
-        <p:txBody>
-          <a:bodyPr wrap="square">
-            <a:noAutofit/>
-          </a:bodyPr>
-          <a:lstStyle/>
-          <a:p>
-            <a:r>
-              <a:rPr sz="2600" b="1">
+            <a:ext cx="10972800" cy="1005840"/>
+          </a:xfrm>
+          <a:prstGeom prst="rect">
+            <a:avLst/>
+          </a:prstGeom>
+          <a:noFill/>
+        </p:spPr>
+        <p:txBody>
+          <a:bodyPr wrap="square">
+            <a:noAutofit/>
+          </a:bodyPr>
+          <a:lstStyle/>
+          <a:p>
+            <a:r>
+              <a:rPr sz="3200" b="1">
                 <a:solidFill>
                   <a:srgbClr val="1E2024"/>
                 </a:solidFill>
                 <a:latin typeface="Calibri"/>
               </a:rPr>
-              <a:t>replica fetch（broker↔broker）的 Fetch 版本怎麼決定？</a:t>
+              <a:t>通訊當下協商不出版本，會看到什麼</a:t>
             </a:r>
           </a:p>
         </p:txBody>
@@ -3668,7 +3744,94 @@
         </p:nvSpPr>
         <p:spPr>
           <a:xfrm>
-            <a:off x="822960" y="2331720"/>
+            <a:off x="640080" y="2148840"/>
+            <a:ext cx="10972800" cy="1371600"/>
+          </a:xfrm>
+          <a:prstGeom prst="rect">
+            <a:avLst/>
+          </a:prstGeom>
+          <a:solidFill>
+            <a:srgbClr val="F3F1EC"/>
+          </a:solidFill>
+          <a:ln w="6350">
+            <a:solidFill>
+              <a:srgbClr val="E3E0D8"/>
+            </a:solidFill>
+          </a:ln>
+        </p:spPr>
+        <p:txBody>
+          <a:bodyPr wrap="square" lIns="146304" tIns="91440" bIns="91440">
+            <a:noAutofit/>
+          </a:bodyPr>
+          <a:lstStyle/>
+          <a:p>
+            <a:r>
+              <a:rPr sz="1350" b="0">
+                <a:solidFill>
+                  <a:srgbClr val="2C2C2A"/>
+                </a:solidFill>
+                <a:latin typeface="Calibri"/>
+              </a:rPr>
+              <a:t>交集空        → client 端 UnsupportedVersionException（送出前 abort）</a:t>
+            </a:r>
+          </a:p>
+          <a:p>
+            <a:r>
+              <a:rPr sz="1350" b="0">
+                <a:solidFill>
+                  <a:srgbClr val="2C2C2A"/>
+                </a:solidFill>
+                <a:latin typeface="Calibri"/>
+              </a:rPr>
+              <a:t>繞過協商自刻  → broker 丟 UnsupportedVersionException + 關線</a:t>
+            </a:r>
+          </a:p>
+          <a:p>
+            <a:r>
+              <a:rPr sz="1350" b="0">
+                <a:solidFill>
+                  <a:srgbClr val="2C2C2A"/>
+                </a:solidFill>
+                <a:latin typeface="Calibri"/>
+              </a:rPr>
+              <a:t>（ApiVersions 例外：回 v0 + UNSUPPORTED_VERSION 錯誤碼）</a:t>
+            </a:r>
+          </a:p>
+        </p:txBody>
+      </p:sp>
+      <p:pic>
+        <p:nvPicPr>
+          <p:cNvPr id="5" name="Picture 4" descr="ban.png"/>
+          <p:cNvPicPr>
+            <a:picLocks noChangeAspect="1"/>
+          </p:cNvPicPr>
+          <p:nvPr/>
+        </p:nvPicPr>
+        <p:blipFill>
+          <a:blip r:embed="rId2"/>
+          <a:stretch>
+            <a:fillRect/>
+          </a:stretch>
+        </p:blipFill>
+        <p:spPr>
+          <a:xfrm>
+            <a:off x="658368" y="3749040"/>
+            <a:ext cx="274320" cy="274320"/>
+          </a:xfrm>
+          <a:prstGeom prst="rect">
+            <a:avLst/>
+          </a:prstGeom>
+        </p:spPr>
+      </p:pic>
+      <p:sp>
+        <p:nvSpPr>
+          <p:cNvPr id="6" name="TextBox 5"/>
+          <p:cNvSpPr txBox="1"/>
+          <p:nvPr/>
+        </p:nvSpPr>
+        <p:spPr>
+          <a:xfrm>
+            <a:off x="1078992" y="3721608"/>
             <a:ext cx="10515600" cy="493776"/>
           </a:xfrm>
           <a:prstGeom prst="rect">
@@ -3683,113 +3846,13 @@
           <a:lstStyle/>
           <a:p>
             <a:r>
-              <a:rPr sz="1600" b="0">
+              <a:rPr sz="1650" b="0">
                 <a:solidFill>
                   <a:srgbClr val="1E2024"/>
                 </a:solidFill>
                 <a:latin typeface="Calibri"/>
               </a:rPr>
-              <a:t>A.  </a:t>
-            </a:r>
-            <a:r>
-              <a:rPr sz="1600" b="0">
-                <a:solidFill>
-                  <a:srgbClr val="1E2024"/>
-                </a:solidFill>
-                <a:latin typeface="Calibri"/>
-              </a:rPr>
-              <a:t>兩 broker ApiVersions 協商取交集</a:t>
-            </a:r>
-          </a:p>
-        </p:txBody>
-      </p:sp>
-      <p:sp>
-        <p:nvSpPr>
-          <p:cNvPr id="5" name="TextBox 4"/>
-          <p:cNvSpPr txBox="1"/>
-          <p:nvPr/>
-        </p:nvSpPr>
-        <p:spPr>
-          <a:xfrm>
-            <a:off x="822960" y="2953512"/>
-            <a:ext cx="10515600" cy="493776"/>
-          </a:xfrm>
-          <a:prstGeom prst="rect">
-            <a:avLst/>
-          </a:prstGeom>
-          <a:solidFill>
-            <a:srgbClr val="E9F3DE"/>
-          </a:solidFill>
-          <a:ln>
-            <a:noFill/>
-          </a:ln>
-        </p:spPr>
-        <p:txBody>
-          <a:bodyPr wrap="square" lIns="128016" tIns="54864">
-            <a:noAutofit/>
-          </a:bodyPr>
-          <a:lstStyle/>
-          <a:p>
-            <a:r>
-              <a:rPr sz="1600" b="1">
-                <a:solidFill>
-                  <a:srgbClr val="27500A"/>
-                </a:solidFill>
-                <a:latin typeface="Calibri"/>
-              </a:rPr>
-              <a:t>B.  </a:t>
-            </a:r>
-            <a:r>
-              <a:rPr sz="1600" b="1">
-                <a:solidFill>
-                  <a:srgbClr val="27500A"/>
-                </a:solidFill>
-                <a:latin typeface="Calibri"/>
-              </a:rPr>
-              <a:t>由 finalized metadata.version 決定   ✓</a:t>
-            </a:r>
-          </a:p>
-        </p:txBody>
-      </p:sp>
-      <p:sp>
-        <p:nvSpPr>
-          <p:cNvPr id="6" name="TextBox 5"/>
-          <p:cNvSpPr txBox="1"/>
-          <p:nvPr/>
-        </p:nvSpPr>
-        <p:spPr>
-          <a:xfrm>
-            <a:off x="822960" y="3575304"/>
-            <a:ext cx="10515600" cy="493776"/>
-          </a:xfrm>
-          <a:prstGeom prst="rect">
-            <a:avLst/>
-          </a:prstGeom>
-          <a:noFill/>
-        </p:spPr>
-        <p:txBody>
-          <a:bodyPr wrap="square">
-            <a:noAutofit/>
-          </a:bodyPr>
-          <a:lstStyle/>
-          <a:p>
-            <a:r>
-              <a:rPr sz="1600" b="0">
-                <a:solidFill>
-                  <a:srgbClr val="1E2024"/>
-                </a:solidFill>
-                <a:latin typeface="Calibri"/>
-              </a:rPr>
-              <a:t>C.  </a:t>
-            </a:r>
-            <a:r>
-              <a:rPr sz="1600" b="0">
-                <a:solidFill>
-                  <a:srgbClr val="1E2024"/>
-                </a:solidFill>
-                <a:latin typeface="Calibri"/>
-              </a:rPr>
-              <a:t>永遠用最新版</a:t>
+              <a:t>多數情況 client 在送出前就本地中止，根本沒上網路</a:t>
             </a:r>
           </a:p>
         </p:txBody>
@@ -3797,92 +3860,6 @@
       <p:sp>
         <p:nvSpPr>
           <p:cNvPr id="7" name="TextBox 6"/>
-          <p:cNvSpPr txBox="1"/>
-          <p:nvPr/>
-        </p:nvSpPr>
-        <p:spPr>
-          <a:xfrm>
-            <a:off x="822960" y="4197096"/>
-            <a:ext cx="10515600" cy="493776"/>
-          </a:xfrm>
-          <a:prstGeom prst="rect">
-            <a:avLst/>
-          </a:prstGeom>
-          <a:noFill/>
-        </p:spPr>
-        <p:txBody>
-          <a:bodyPr wrap="square">
-            <a:noAutofit/>
-          </a:bodyPr>
-          <a:lstStyle/>
-          <a:p>
-            <a:r>
-              <a:rPr sz="1600" b="0">
-                <a:solidFill>
-                  <a:srgbClr val="1E2024"/>
-                </a:solidFill>
-                <a:latin typeface="Calibri"/>
-              </a:rPr>
-              <a:t>D.  </a:t>
-            </a:r>
-            <a:r>
-              <a:rPr sz="1600" b="0">
-                <a:solidFill>
-                  <a:srgbClr val="1E2024"/>
-                </a:solidFill>
-                <a:latin typeface="Calibri"/>
-              </a:rPr>
-              <a:t>controller 每次指定</a:t>
-            </a:r>
-          </a:p>
-        </p:txBody>
-      </p:sp>
-      <p:sp>
-        <p:nvSpPr>
-          <p:cNvPr id="8" name="TextBox 7"/>
-          <p:cNvSpPr txBox="1"/>
-          <p:nvPr/>
-        </p:nvSpPr>
-        <p:spPr>
-          <a:xfrm>
-            <a:off x="640080" y="4910327"/>
-            <a:ext cx="10972800" cy="914400"/>
-          </a:xfrm>
-          <a:prstGeom prst="rect">
-            <a:avLst/>
-          </a:prstGeom>
-          <a:noFill/>
-        </p:spPr>
-        <p:txBody>
-          <a:bodyPr wrap="square">
-            <a:noAutofit/>
-          </a:bodyPr>
-          <a:lstStyle/>
-          <a:p>
-            <a:r>
-              <a:rPr sz="1400" b="1">
-                <a:solidFill>
-                  <a:srgbClr val="27500A"/>
-                </a:solidFill>
-                <a:latin typeface="Calibri"/>
-              </a:rPr>
-              <a:t>正解 B — </a:t>
-            </a:r>
-            <a:r>
-              <a:rPr sz="1400" b="0">
-                <a:solidFill>
-                  <a:srgbClr val="1E2024"/>
-                </a:solidFill>
-                <a:latin typeface="Calibri"/>
-              </a:rPr>
-              <a:t>fetchRequestVersion(MV)：MV 是集中共識，不做 per-connection 協商。</a:t>
-            </a:r>
-          </a:p>
-        </p:txBody>
-      </p:sp>
-      <p:sp>
-        <p:nvSpPr>
-          <p:cNvPr id="9" name="TextBox 8"/>
           <p:cNvSpPr txBox="1"/>
           <p:nvPr/>
         </p:nvSpPr>
@@ -3917,9 +3894,9 @@
                   <a:srgbClr val="185FA5"/>
                 </a:solidFill>
                 <a:latin typeface="Courier New"/>
-                <a:hlinkClick r:id="rId2"/>
-              </a:rPr>
-              <a:t>RemoteLeaderEndPoint.scala:215</a:t>
+                <a:hlinkClick r:id="rId3"/>
+              </a:rPr>
+              <a:t>latestUsableVersion</a:t>
             </a:r>
             <a:r>
               <a:rPr sz="1200" b="0">
@@ -3936,9 +3913,28 @@
                   <a:srgbClr val="185FA5"/>
                 </a:solidFill>
                 <a:latin typeface="Courier New"/>
-                <a:hlinkClick r:id="rId3"/>
-              </a:rPr>
-              <a:t>MetadataVersion.java:273</a:t>
+                <a:hlinkClick r:id="rId4"/>
+              </a:rPr>
+              <a:t>NetworkClient</a:t>
+            </a:r>
+            <a:r>
+              <a:rPr sz="1200" b="0">
+                <a:solidFill>
+                  <a:srgbClr val="8A8A8A"/>
+                </a:solidFill>
+                <a:latin typeface="Calibri"/>
+              </a:rPr>
+              <a:t>   ·   </a:t>
+            </a:r>
+            <a:r>
+              <a:rPr sz="1200" b="0" u="sng">
+                <a:solidFill>
+                  <a:srgbClr val="185FA5"/>
+                </a:solidFill>
+                <a:latin typeface="Courier New"/>
+                <a:hlinkClick r:id="rId5"/>
+              </a:rPr>
+              <a:t>RequestContext</a:t>
             </a:r>
           </a:p>
         </p:txBody>
@@ -3990,7 +3986,7 @@
                 </a:solidFill>
                 <a:latin typeface="Calibri"/>
               </a:rPr>
-              <a:t>Part 3 · 失敗訊息</a:t>
+              <a:t>Part 2 · 失敗訊息</a:t>
             </a:r>
           </a:p>
         </p:txBody>
@@ -4024,7 +4020,7 @@
                 </a:solidFill>
                 <a:latin typeface="Calibri"/>
               </a:rPr>
-              <a:t>通訊當下協商不出版本，會看到什麼</a:t>
+              <a:t>版本截斷：為什麼「升一點點」不夠</a:t>
             </a:r>
           </a:p>
         </p:txBody>
@@ -4038,7 +4034,7 @@
         <p:spPr>
           <a:xfrm>
             <a:off x="640080" y="2148840"/>
-            <a:ext cx="10972800" cy="1371600"/>
+            <a:ext cx="10972800" cy="822959"/>
           </a:xfrm>
           <a:prstGeom prst="rect">
             <a:avLst/>
@@ -4065,7 +4061,7 @@
                 </a:solidFill>
                 <a:latin typeface="Calibri"/>
               </a:rPr>
-              <a:t>交集空        → client 端 UnsupportedVersionException（送出前 abort）</a:t>
+              <a:t>舊 wire API version 被整個移除，min 可 &gt; 0</a:t>
             </a:r>
           </a:p>
           <a:p>
@@ -4076,46 +4072,50 @@
                 </a:solidFill>
                 <a:latin typeface="Calibri"/>
               </a:rPr>
-              <a:t>繞過協商自刻  → broker 丟 UnsupportedVersionException + 關線</a:t>
-            </a:r>
-          </a:p>
-          <a:p>
-            <a:r>
-              <a:rPr sz="1350" b="0">
-                <a:solidFill>
-                  <a:srgbClr val="2C2C2A"/>
-                </a:solidFill>
-                <a:latin typeface="Calibri"/>
-              </a:rPr>
-              <a:t>（ApiVersions 例外：回 v0 + UNSUPPORTED_VERSION 錯誤碼）</a:t>
-            </a:r>
-          </a:p>
-        </p:txBody>
-      </p:sp>
-      <p:pic>
-        <p:nvPicPr>
-          <p:cNvPr id="5" name="Picture 4" descr="ban.png"/>
-          <p:cNvPicPr>
-            <a:picLocks noChangeAspect="1"/>
-          </p:cNvPicPr>
-          <p:nvPr/>
-        </p:nvPicPr>
-        <p:blipFill>
-          <a:blip r:embed="rId2"/>
-          <a:stretch>
-            <a:fillRect/>
-          </a:stretch>
-        </p:blipFill>
-        <p:spPr>
-          <a:xfrm>
-            <a:off x="658368" y="3749040"/>
-            <a:ext cx="274320" cy="274320"/>
-          </a:xfrm>
-          <a:prstGeom prst="rect">
-            <a:avLst/>
-          </a:prstGeom>
-        </p:spPr>
-      </p:pic>
+              <a:t>  Fetch：4–18（v0–3 在 4.0 移除）</a:t>
+            </a:r>
+          </a:p>
+        </p:txBody>
+      </p:sp>
+      <p:sp>
+        <p:nvSpPr>
+          <p:cNvPr id="5" name="TextBox 4"/>
+          <p:cNvSpPr txBox="1"/>
+          <p:nvPr/>
+        </p:nvSpPr>
+        <p:spPr>
+          <a:xfrm>
+            <a:off x="640080" y="3172968"/>
+            <a:ext cx="10972800" cy="566928"/>
+          </a:xfrm>
+          <a:prstGeom prst="rect">
+            <a:avLst/>
+          </a:prstGeom>
+          <a:solidFill>
+            <a:srgbClr val="E9F3DE"/>
+          </a:solidFill>
+          <a:ln>
+            <a:noFill/>
+          </a:ln>
+        </p:spPr>
+        <p:txBody>
+          <a:bodyPr wrap="square" lIns="146304" tIns="82296">
+            <a:noAutofit/>
+          </a:bodyPr>
+          <a:lstStyle/>
+          <a:p>
+            <a:r>
+              <a:rPr sz="1500" b="0">
+                <a:solidFill>
+                  <a:srgbClr val="27500A"/>
+                </a:solidFill>
+                <a:latin typeface="Calibri"/>
+              </a:rPr>
+              <a:t>解法：升級前確認兩端都跨過版本下限（升 4.0 需至少 2.1），否則協商結果沒有可用版本</a:t>
+            </a:r>
+          </a:p>
+        </p:txBody>
+      </p:sp>
       <p:sp>
         <p:nvSpPr>
           <p:cNvPr id="6" name="TextBox 5"/>
@@ -4124,28 +4124,28 @@
         </p:nvSpPr>
         <p:spPr>
           <a:xfrm>
-            <a:off x="1078992" y="3721608"/>
-            <a:ext cx="10515600" cy="493776"/>
-          </a:xfrm>
-          <a:prstGeom prst="rect">
-            <a:avLst/>
-          </a:prstGeom>
-          <a:noFill/>
-        </p:spPr>
-        <p:txBody>
-          <a:bodyPr wrap="square">
-            <a:noAutofit/>
-          </a:bodyPr>
-          <a:lstStyle/>
-          <a:p>
-            <a:r>
-              <a:rPr sz="1650" b="0">
-                <a:solidFill>
-                  <a:srgbClr val="1E2024"/>
-                </a:solidFill>
-                <a:latin typeface="Calibri"/>
-              </a:rPr>
-              <a:t>多數情況 client 在送出前就本地中止，根本沒上網路</a:t>
+            <a:off x="640080" y="3922776"/>
+            <a:ext cx="10972800" cy="731520"/>
+          </a:xfrm>
+          <a:prstGeom prst="rect">
+            <a:avLst/>
+          </a:prstGeom>
+          <a:noFill/>
+        </p:spPr>
+        <p:txBody>
+          <a:bodyPr wrap="square">
+            <a:noAutofit/>
+          </a:bodyPr>
+          <a:lstStyle/>
+          <a:p>
+            <a:r>
+              <a:rPr sz="1500" b="0">
+                <a:solidFill>
+                  <a:srgbClr val="5F5E5A"/>
+                </a:solidFill>
+                <a:latin typeface="Calibri"/>
+              </a:rPr>
+              <a:t>銜接（非本場）：finalize / 升降當下的錯誤（INVALID_UPDATE_VERSION 等）屬「運行時的版本升降」那場，本場不展開。</a:t>
             </a:r>
           </a:p>
         </p:txBody>
@@ -4187,47 +4187,28 @@
                   <a:srgbClr val="185FA5"/>
                 </a:solidFill>
                 <a:latin typeface="Courier New"/>
+                <a:hlinkClick r:id="rId2"/>
+              </a:rPr>
+              <a:t>upgrade.md:229</a:t>
+            </a:r>
+            <a:r>
+              <a:rPr sz="1200" b="0">
+                <a:solidFill>
+                  <a:srgbClr val="8A8A8A"/>
+                </a:solidFill>
+                <a:latin typeface="Calibri"/>
+              </a:rPr>
+              <a:t>   ·   </a:t>
+            </a:r>
+            <a:r>
+              <a:rPr sz="1200" b="0" u="sng">
+                <a:solidFill>
+                  <a:srgbClr val="185FA5"/>
+                </a:solidFill>
+                <a:latin typeface="Courier New"/>
                 <a:hlinkClick r:id="rId3"/>
               </a:rPr>
-              <a:t>latestUsableVersion</a:t>
-            </a:r>
-            <a:r>
-              <a:rPr sz="1200" b="0">
-                <a:solidFill>
-                  <a:srgbClr val="8A8A8A"/>
-                </a:solidFill>
-                <a:latin typeface="Calibri"/>
-              </a:rPr>
-              <a:t>   ·   </a:t>
-            </a:r>
-            <a:r>
-              <a:rPr sz="1200" b="0" u="sng">
-                <a:solidFill>
-                  <a:srgbClr val="185FA5"/>
-                </a:solidFill>
-                <a:latin typeface="Courier New"/>
-                <a:hlinkClick r:id="rId4"/>
-              </a:rPr>
-              <a:t>NetworkClient</a:t>
-            </a:r>
-            <a:r>
-              <a:rPr sz="1200" b="0">
-                <a:solidFill>
-                  <a:srgbClr val="8A8A8A"/>
-                </a:solidFill>
-                <a:latin typeface="Calibri"/>
-              </a:rPr>
-              <a:t>   ·   </a:t>
-            </a:r>
-            <a:r>
-              <a:rPr sz="1200" b="0" u="sng">
-                <a:solidFill>
-                  <a:srgbClr val="185FA5"/>
-                </a:solidFill>
-                <a:latin typeface="Courier New"/>
-                <a:hlinkClick r:id="rId5"/>
-              </a:rPr>
-              <a:t>RequestContext</a:t>
+              <a:t>FetchRequest.json validVersions</a:t>
             </a:r>
           </a:p>
         </p:txBody>
@@ -4279,7 +4260,7 @@
                 </a:solidFill>
                 <a:latin typeface="Calibri"/>
               </a:rPr>
-              <a:t>Part 3 · 失敗訊息</a:t>
+              <a:t>隨堂考 · 核心</a:t>
             </a:r>
           </a:p>
         </p:txBody>
@@ -4293,27 +4274,27 @@
         <p:spPr>
           <a:xfrm>
             <a:off x="640080" y="841248"/>
-            <a:ext cx="10972800" cy="1005840"/>
-          </a:xfrm>
-          <a:prstGeom prst="rect">
-            <a:avLst/>
-          </a:prstGeom>
-          <a:noFill/>
-        </p:spPr>
-        <p:txBody>
-          <a:bodyPr wrap="square">
-            <a:noAutofit/>
-          </a:bodyPr>
-          <a:lstStyle/>
-          <a:p>
-            <a:r>
-              <a:rPr sz="3200" b="1">
+            <a:ext cx="10972800" cy="1188720"/>
+          </a:xfrm>
+          <a:prstGeom prst="rect">
+            <a:avLst/>
+          </a:prstGeom>
+          <a:noFill/>
+        </p:spPr>
+        <p:txBody>
+          <a:bodyPr wrap="square">
+            <a:noAutofit/>
+          </a:bodyPr>
+          <a:lstStyle/>
+          <a:p>
+            <a:r>
+              <a:rPr sz="2600" b="1">
                 <a:solidFill>
                   <a:srgbClr val="1E2024"/>
                 </a:solidFill>
                 <a:latin typeface="Calibri"/>
               </a:rPr>
-              <a:t>版本截斷：為什麼「升一點點」不夠</a:t>
+              <a:t>自刻 client 送了不支援的 API version，會怎樣？</a:t>
             </a:r>
           </a:p>
         </p:txBody>
@@ -4326,46 +4307,37 @@
         </p:nvSpPr>
         <p:spPr>
           <a:xfrm>
-            <a:off x="640080" y="2148840"/>
-            <a:ext cx="10972800" cy="822959"/>
-          </a:xfrm>
-          <a:prstGeom prst="rect">
-            <a:avLst/>
-          </a:prstGeom>
-          <a:solidFill>
-            <a:srgbClr val="F3F1EC"/>
-          </a:solidFill>
-          <a:ln w="6350">
-            <a:solidFill>
-              <a:srgbClr val="E3E0D8"/>
-            </a:solidFill>
-          </a:ln>
-        </p:spPr>
-        <p:txBody>
-          <a:bodyPr wrap="square" lIns="146304" tIns="91440" bIns="91440">
-            <a:noAutofit/>
-          </a:bodyPr>
-          <a:lstStyle/>
-          <a:p>
-            <a:r>
-              <a:rPr sz="1350" b="0">
-                <a:solidFill>
-                  <a:srgbClr val="2C2C2A"/>
-                </a:solidFill>
-                <a:latin typeface="Calibri"/>
-              </a:rPr>
-              <a:t>舊 wire API version 被整個移除，min 可 &gt; 0</a:t>
-            </a:r>
-          </a:p>
-          <a:p>
-            <a:r>
-              <a:rPr sz="1350" b="0">
-                <a:solidFill>
-                  <a:srgbClr val="2C2C2A"/>
-                </a:solidFill>
-                <a:latin typeface="Calibri"/>
-              </a:rPr>
-              <a:t>  Fetch：4–18（v0–3 在 4.0 移除）</a:t>
+            <a:off x="822960" y="2331720"/>
+            <a:ext cx="10515600" cy="493776"/>
+          </a:xfrm>
+          <a:prstGeom prst="rect">
+            <a:avLst/>
+          </a:prstGeom>
+          <a:noFill/>
+        </p:spPr>
+        <p:txBody>
+          <a:bodyPr wrap="square">
+            <a:noAutofit/>
+          </a:bodyPr>
+          <a:lstStyle/>
+          <a:p>
+            <a:r>
+              <a:rPr sz="1600" b="0">
+                <a:solidFill>
+                  <a:srgbClr val="1E2024"/>
+                </a:solidFill>
+                <a:latin typeface="Calibri"/>
+              </a:rPr>
+              <a:t>A.  </a:t>
+            </a:r>
+            <a:r>
+              <a:rPr sz="1600" b="0">
+                <a:solidFill>
+                  <a:srgbClr val="1E2024"/>
+                </a:solidFill>
+                <a:latin typeface="Calibri"/>
+              </a:rPr>
+              <a:t>一律回 UNSUPPORTED_VERSION</a:t>
             </a:r>
           </a:p>
         </p:txBody>
@@ -4378,33 +4350,37 @@
         </p:nvSpPr>
         <p:spPr>
           <a:xfrm>
-            <a:off x="640080" y="3172968"/>
-            <a:ext cx="10972800" cy="566928"/>
-          </a:xfrm>
-          <a:prstGeom prst="rect">
-            <a:avLst/>
-          </a:prstGeom>
-          <a:solidFill>
-            <a:srgbClr val="E9F3DE"/>
-          </a:solidFill>
-          <a:ln>
-            <a:noFill/>
-          </a:ln>
-        </p:spPr>
-        <p:txBody>
-          <a:bodyPr wrap="square" lIns="146304" tIns="82296">
-            <a:noAutofit/>
-          </a:bodyPr>
-          <a:lstStyle/>
-          <a:p>
-            <a:r>
-              <a:rPr sz="1500" b="0">
-                <a:solidFill>
-                  <a:srgbClr val="27500A"/>
-                </a:solidFill>
-                <a:latin typeface="Calibri"/>
-              </a:rPr>
-              <a:t>解法：升級前確認兩端都跨過版本下限（升 4.0 需至少 2.1），否則協商結果沒有可用版本</a:t>
+            <a:off x="822960" y="2953512"/>
+            <a:ext cx="10515600" cy="493776"/>
+          </a:xfrm>
+          <a:prstGeom prst="rect">
+            <a:avLst/>
+          </a:prstGeom>
+          <a:noFill/>
+        </p:spPr>
+        <p:txBody>
+          <a:bodyPr wrap="square">
+            <a:noAutofit/>
+          </a:bodyPr>
+          <a:lstStyle/>
+          <a:p>
+            <a:r>
+              <a:rPr sz="1600" b="0">
+                <a:solidFill>
+                  <a:srgbClr val="1E2024"/>
+                </a:solidFill>
+                <a:latin typeface="Calibri"/>
+              </a:rPr>
+              <a:t>B.  </a:t>
+            </a:r>
+            <a:r>
+              <a:rPr sz="1600" b="0">
+                <a:solidFill>
+                  <a:srgbClr val="1E2024"/>
+                </a:solidFill>
+                <a:latin typeface="Calibri"/>
+              </a:rPr>
+              <a:t>只有 ApiVersions 例外回錯誤+範圍；其他 API 關線</a:t>
             </a:r>
           </a:p>
         </p:txBody>
@@ -4417,28 +4393,37 @@
         </p:nvSpPr>
         <p:spPr>
           <a:xfrm>
-            <a:off x="640080" y="3922776"/>
-            <a:ext cx="10972800" cy="731520"/>
-          </a:xfrm>
-          <a:prstGeom prst="rect">
-            <a:avLst/>
-          </a:prstGeom>
-          <a:noFill/>
-        </p:spPr>
-        <p:txBody>
-          <a:bodyPr wrap="square">
-            <a:noAutofit/>
-          </a:bodyPr>
-          <a:lstStyle/>
-          <a:p>
-            <a:r>
-              <a:rPr sz="1500" b="0">
-                <a:solidFill>
-                  <a:srgbClr val="5F5E5A"/>
-                </a:solidFill>
-                <a:latin typeface="Calibri"/>
-              </a:rPr>
-              <a:t>銜接（非本場）：finalize / 升降當下的錯誤（INVALID_UPDATE_VERSION 等）屬「運行時的版本升降」那場，本場不展開。</a:t>
+            <a:off x="822960" y="3575304"/>
+            <a:ext cx="10515600" cy="493776"/>
+          </a:xfrm>
+          <a:prstGeom prst="rect">
+            <a:avLst/>
+          </a:prstGeom>
+          <a:noFill/>
+        </p:spPr>
+        <p:txBody>
+          <a:bodyPr wrap="square">
+            <a:noAutofit/>
+          </a:bodyPr>
+          <a:lstStyle/>
+          <a:p>
+            <a:r>
+              <a:rPr sz="1600" b="0">
+                <a:solidFill>
+                  <a:srgbClr val="1E2024"/>
+                </a:solidFill>
+                <a:latin typeface="Calibri"/>
+              </a:rPr>
+              <a:t>C.  </a:t>
+            </a:r>
+            <a:r>
+              <a:rPr sz="1600" b="0">
+                <a:solidFill>
+                  <a:srgbClr val="1E2024"/>
+                </a:solidFill>
+                <a:latin typeface="Calibri"/>
+              </a:rPr>
+              <a:t>broker 自動降版</a:t>
             </a:r>
           </a:p>
         </p:txBody>
@@ -4451,57 +4436,71 @@
         </p:nvSpPr>
         <p:spPr>
           <a:xfrm>
-            <a:off x="640080" y="6400800"/>
-            <a:ext cx="10972800" cy="384048"/>
-          </a:xfrm>
-          <a:prstGeom prst="rect">
-            <a:avLst/>
-          </a:prstGeom>
-          <a:noFill/>
-        </p:spPr>
-        <p:txBody>
-          <a:bodyPr wrap="square">
-            <a:noAutofit/>
-          </a:bodyPr>
-          <a:lstStyle/>
-          <a:p>
-            <a:r>
-              <a:rPr sz="1200" b="1">
+            <a:off x="822960" y="4197096"/>
+            <a:ext cx="10515600" cy="493776"/>
+          </a:xfrm>
+          <a:prstGeom prst="rect">
+            <a:avLst/>
+          </a:prstGeom>
+          <a:noFill/>
+        </p:spPr>
+        <p:txBody>
+          <a:bodyPr wrap="square">
+            <a:noAutofit/>
+          </a:bodyPr>
+          <a:lstStyle/>
+          <a:p>
+            <a:r>
+              <a:rPr sz="1600" b="0">
+                <a:solidFill>
+                  <a:srgbClr val="1E2024"/>
+                </a:solidFill>
+                <a:latin typeface="Calibri"/>
+              </a:rPr>
+              <a:t>D.  </a:t>
+            </a:r>
+            <a:r>
+              <a:rPr sz="1600" b="0">
+                <a:solidFill>
+                  <a:srgbClr val="1E2024"/>
+                </a:solidFill>
+                <a:latin typeface="Calibri"/>
+              </a:rPr>
+              <a:t>忽略版本照跑</a:t>
+            </a:r>
+          </a:p>
+        </p:txBody>
+      </p:sp>
+      <p:sp>
+        <p:nvSpPr>
+          <p:cNvPr id="8" name="TextBox 7"/>
+          <p:cNvSpPr txBox="1"/>
+          <p:nvPr/>
+        </p:nvSpPr>
+        <p:spPr>
+          <a:xfrm>
+            <a:off x="640080" y="4910327"/>
+            <a:ext cx="10972800" cy="914400"/>
+          </a:xfrm>
+          <a:prstGeom prst="rect">
+            <a:avLst/>
+          </a:prstGeom>
+          <a:noFill/>
+        </p:spPr>
+        <p:txBody>
+          <a:bodyPr wrap="square">
+            <a:noAutofit/>
+          </a:bodyPr>
+          <a:lstStyle/>
+          <a:p>
+            <a:r>
+              <a:rPr sz="1400" b="0">
                 <a:solidFill>
                   <a:srgbClr val="8A8A8A"/>
                 </a:solidFill>
                 <a:latin typeface="Calibri"/>
               </a:rPr>
-              <a:t>REF   </a:t>
-            </a:r>
-            <a:r>
-              <a:rPr sz="1200" b="0" u="sng">
-                <a:solidFill>
-                  <a:srgbClr val="185FA5"/>
-                </a:solidFill>
-                <a:latin typeface="Courier New"/>
-                <a:hlinkClick r:id="rId2"/>
-              </a:rPr>
-              <a:t>upgrade.md:229</a:t>
-            </a:r>
-            <a:r>
-              <a:rPr sz="1200" b="0">
-                <a:solidFill>
-                  <a:srgbClr val="8A8A8A"/>
-                </a:solidFill>
-                <a:latin typeface="Calibri"/>
-              </a:rPr>
-              <a:t>   ·   </a:t>
-            </a:r>
-            <a:r>
-              <a:rPr sz="1200" b="0" u="sng">
-                <a:solidFill>
-                  <a:srgbClr val="185FA5"/>
-                </a:solidFill>
-                <a:latin typeface="Courier New"/>
-                <a:hlinkClick r:id="rId3"/>
-              </a:rPr>
-              <a:t>FetchRequest.json validVersions</a:t>
+              <a:t>想一想 —— 下一頁公布答案</a:t>
             </a:r>
           </a:p>
         </p:txBody>
@@ -4553,7 +4552,7 @@
                 </a:solidFill>
                 <a:latin typeface="Calibri"/>
               </a:rPr>
-              <a:t>隨堂考 · 核心</a:t>
+              <a:t>隨堂考 · 核心　（正解）</a:t>
             </a:r>
           </a:p>
         </p:txBody>
@@ -4649,31 +4648,36 @@
           <a:prstGeom prst="rect">
             <a:avLst/>
           </a:prstGeom>
-          <a:noFill/>
-        </p:spPr>
-        <p:txBody>
-          <a:bodyPr wrap="square">
-            <a:noAutofit/>
-          </a:bodyPr>
-          <a:lstStyle/>
-          <a:p>
-            <a:r>
-              <a:rPr sz="1600" b="0">
-                <a:solidFill>
-                  <a:srgbClr val="1E2024"/>
+          <a:solidFill>
+            <a:srgbClr val="E9F3DE"/>
+          </a:solidFill>
+          <a:ln>
+            <a:noFill/>
+          </a:ln>
+        </p:spPr>
+        <p:txBody>
+          <a:bodyPr wrap="square" lIns="128016" tIns="54864">
+            <a:noAutofit/>
+          </a:bodyPr>
+          <a:lstStyle/>
+          <a:p>
+            <a:r>
+              <a:rPr sz="1600" b="1">
+                <a:solidFill>
+                  <a:srgbClr val="27500A"/>
                 </a:solidFill>
                 <a:latin typeface="Calibri"/>
               </a:rPr>
               <a:t>B.  </a:t>
             </a:r>
             <a:r>
-              <a:rPr sz="1600" b="0">
-                <a:solidFill>
-                  <a:srgbClr val="1E2024"/>
-                </a:solidFill>
-                <a:latin typeface="Calibri"/>
-              </a:rPr>
-              <a:t>只有 ApiVersions 例外回錯誤+範圍；其他 API 關線</a:t>
+              <a:rPr sz="1600" b="1">
+                <a:solidFill>
+                  <a:srgbClr val="27500A"/>
+                </a:solidFill>
+                <a:latin typeface="Calibri"/>
+              </a:rPr>
+              <a:t>只有 ApiVersions 例外回錯誤+範圍；其他 API 關線   ✓</a:t>
             </a:r>
           </a:p>
         </p:txBody>
@@ -4787,13 +4791,66 @@
           <a:lstStyle/>
           <a:p>
             <a:r>
+              <a:rPr sz="1400" b="1">
+                <a:solidFill>
+                  <a:srgbClr val="27500A"/>
+                </a:solidFill>
+                <a:latin typeface="Calibri"/>
+              </a:rPr>
+              <a:t>正解 B — </a:t>
+            </a:r>
+            <a:r>
               <a:rPr sz="1400" b="0">
                 <a:solidFill>
+                  <a:srgbClr val="1E2024"/>
+                </a:solidFill>
+                <a:latin typeface="Calibri"/>
+              </a:rPr>
+              <a:t>ApiVersions 是 bootstrap 逃生口；其他 API → broker 丟 UnsupportedVersionException → 斷線。</a:t>
+            </a:r>
+          </a:p>
+        </p:txBody>
+      </p:sp>
+      <p:sp>
+        <p:nvSpPr>
+          <p:cNvPr id="9" name="TextBox 8"/>
+          <p:cNvSpPr txBox="1"/>
+          <p:nvPr/>
+        </p:nvSpPr>
+        <p:spPr>
+          <a:xfrm>
+            <a:off x="640080" y="6400800"/>
+            <a:ext cx="10972800" cy="384048"/>
+          </a:xfrm>
+          <a:prstGeom prst="rect">
+            <a:avLst/>
+          </a:prstGeom>
+          <a:noFill/>
+        </p:spPr>
+        <p:txBody>
+          <a:bodyPr wrap="square">
+            <a:noAutofit/>
+          </a:bodyPr>
+          <a:lstStyle/>
+          <a:p>
+            <a:r>
+              <a:rPr sz="1200" b="1">
+                <a:solidFill>
                   <a:srgbClr val="8A8A8A"/>
                 </a:solidFill>
                 <a:latin typeface="Calibri"/>
               </a:rPr>
-              <a:t>想一想 —— 下一頁公布答案</a:t>
+              <a:t>REF   </a:t>
+            </a:r>
+            <a:r>
+              <a:rPr sz="1200" b="0" u="sng">
+                <a:solidFill>
+                  <a:srgbClr val="185FA5"/>
+                </a:solidFill>
+                <a:latin typeface="Courier New"/>
+                <a:hlinkClick r:id="rId2"/>
+              </a:rPr>
+              <a:t>RequestContext.java:112</a:t>
             </a:r>
           </a:p>
         </p:txBody>
@@ -4845,356 +4902,6 @@
                 </a:solidFill>
                 <a:latin typeface="Calibri"/>
               </a:rPr>
-              <a:t>隨堂考 · 核心　（正解）</a:t>
-            </a:r>
-          </a:p>
-        </p:txBody>
-      </p:sp>
-      <p:sp>
-        <p:nvSpPr>
-          <p:cNvPr id="3" name="TextBox 2"/>
-          <p:cNvSpPr txBox="1"/>
-          <p:nvPr/>
-        </p:nvSpPr>
-        <p:spPr>
-          <a:xfrm>
-            <a:off x="640080" y="841248"/>
-            <a:ext cx="10972800" cy="1188720"/>
-          </a:xfrm>
-          <a:prstGeom prst="rect">
-            <a:avLst/>
-          </a:prstGeom>
-          <a:noFill/>
-        </p:spPr>
-        <p:txBody>
-          <a:bodyPr wrap="square">
-            <a:noAutofit/>
-          </a:bodyPr>
-          <a:lstStyle/>
-          <a:p>
-            <a:r>
-              <a:rPr sz="2600" b="1">
-                <a:solidFill>
-                  <a:srgbClr val="1E2024"/>
-                </a:solidFill>
-                <a:latin typeface="Calibri"/>
-              </a:rPr>
-              <a:t>自刻 client 送了不支援的 API version，會怎樣？</a:t>
-            </a:r>
-          </a:p>
-        </p:txBody>
-      </p:sp>
-      <p:sp>
-        <p:nvSpPr>
-          <p:cNvPr id="4" name="TextBox 3"/>
-          <p:cNvSpPr txBox="1"/>
-          <p:nvPr/>
-        </p:nvSpPr>
-        <p:spPr>
-          <a:xfrm>
-            <a:off x="822960" y="2331720"/>
-            <a:ext cx="10515600" cy="493776"/>
-          </a:xfrm>
-          <a:prstGeom prst="rect">
-            <a:avLst/>
-          </a:prstGeom>
-          <a:noFill/>
-        </p:spPr>
-        <p:txBody>
-          <a:bodyPr wrap="square">
-            <a:noAutofit/>
-          </a:bodyPr>
-          <a:lstStyle/>
-          <a:p>
-            <a:r>
-              <a:rPr sz="1600" b="0">
-                <a:solidFill>
-                  <a:srgbClr val="1E2024"/>
-                </a:solidFill>
-                <a:latin typeface="Calibri"/>
-              </a:rPr>
-              <a:t>A.  </a:t>
-            </a:r>
-            <a:r>
-              <a:rPr sz="1600" b="0">
-                <a:solidFill>
-                  <a:srgbClr val="1E2024"/>
-                </a:solidFill>
-                <a:latin typeface="Calibri"/>
-              </a:rPr>
-              <a:t>一律回 UNSUPPORTED_VERSION</a:t>
-            </a:r>
-          </a:p>
-        </p:txBody>
-      </p:sp>
-      <p:sp>
-        <p:nvSpPr>
-          <p:cNvPr id="5" name="TextBox 4"/>
-          <p:cNvSpPr txBox="1"/>
-          <p:nvPr/>
-        </p:nvSpPr>
-        <p:spPr>
-          <a:xfrm>
-            <a:off x="822960" y="2953512"/>
-            <a:ext cx="10515600" cy="493776"/>
-          </a:xfrm>
-          <a:prstGeom prst="rect">
-            <a:avLst/>
-          </a:prstGeom>
-          <a:solidFill>
-            <a:srgbClr val="E9F3DE"/>
-          </a:solidFill>
-          <a:ln>
-            <a:noFill/>
-          </a:ln>
-        </p:spPr>
-        <p:txBody>
-          <a:bodyPr wrap="square" lIns="128016" tIns="54864">
-            <a:noAutofit/>
-          </a:bodyPr>
-          <a:lstStyle/>
-          <a:p>
-            <a:r>
-              <a:rPr sz="1600" b="1">
-                <a:solidFill>
-                  <a:srgbClr val="27500A"/>
-                </a:solidFill>
-                <a:latin typeface="Calibri"/>
-              </a:rPr>
-              <a:t>B.  </a:t>
-            </a:r>
-            <a:r>
-              <a:rPr sz="1600" b="1">
-                <a:solidFill>
-                  <a:srgbClr val="27500A"/>
-                </a:solidFill>
-                <a:latin typeface="Calibri"/>
-              </a:rPr>
-              <a:t>只有 ApiVersions 例外回錯誤+範圍；其他 API 關線   ✓</a:t>
-            </a:r>
-          </a:p>
-        </p:txBody>
-      </p:sp>
-      <p:sp>
-        <p:nvSpPr>
-          <p:cNvPr id="6" name="TextBox 5"/>
-          <p:cNvSpPr txBox="1"/>
-          <p:nvPr/>
-        </p:nvSpPr>
-        <p:spPr>
-          <a:xfrm>
-            <a:off x="822960" y="3575304"/>
-            <a:ext cx="10515600" cy="493776"/>
-          </a:xfrm>
-          <a:prstGeom prst="rect">
-            <a:avLst/>
-          </a:prstGeom>
-          <a:noFill/>
-        </p:spPr>
-        <p:txBody>
-          <a:bodyPr wrap="square">
-            <a:noAutofit/>
-          </a:bodyPr>
-          <a:lstStyle/>
-          <a:p>
-            <a:r>
-              <a:rPr sz="1600" b="0">
-                <a:solidFill>
-                  <a:srgbClr val="1E2024"/>
-                </a:solidFill>
-                <a:latin typeface="Calibri"/>
-              </a:rPr>
-              <a:t>C.  </a:t>
-            </a:r>
-            <a:r>
-              <a:rPr sz="1600" b="0">
-                <a:solidFill>
-                  <a:srgbClr val="1E2024"/>
-                </a:solidFill>
-                <a:latin typeface="Calibri"/>
-              </a:rPr>
-              <a:t>broker 自動降版</a:t>
-            </a:r>
-          </a:p>
-        </p:txBody>
-      </p:sp>
-      <p:sp>
-        <p:nvSpPr>
-          <p:cNvPr id="7" name="TextBox 6"/>
-          <p:cNvSpPr txBox="1"/>
-          <p:nvPr/>
-        </p:nvSpPr>
-        <p:spPr>
-          <a:xfrm>
-            <a:off x="822960" y="4197096"/>
-            <a:ext cx="10515600" cy="493776"/>
-          </a:xfrm>
-          <a:prstGeom prst="rect">
-            <a:avLst/>
-          </a:prstGeom>
-          <a:noFill/>
-        </p:spPr>
-        <p:txBody>
-          <a:bodyPr wrap="square">
-            <a:noAutofit/>
-          </a:bodyPr>
-          <a:lstStyle/>
-          <a:p>
-            <a:r>
-              <a:rPr sz="1600" b="0">
-                <a:solidFill>
-                  <a:srgbClr val="1E2024"/>
-                </a:solidFill>
-                <a:latin typeface="Calibri"/>
-              </a:rPr>
-              <a:t>D.  </a:t>
-            </a:r>
-            <a:r>
-              <a:rPr sz="1600" b="0">
-                <a:solidFill>
-                  <a:srgbClr val="1E2024"/>
-                </a:solidFill>
-                <a:latin typeface="Calibri"/>
-              </a:rPr>
-              <a:t>忽略版本照跑</a:t>
-            </a:r>
-          </a:p>
-        </p:txBody>
-      </p:sp>
-      <p:sp>
-        <p:nvSpPr>
-          <p:cNvPr id="8" name="TextBox 7"/>
-          <p:cNvSpPr txBox="1"/>
-          <p:nvPr/>
-        </p:nvSpPr>
-        <p:spPr>
-          <a:xfrm>
-            <a:off x="640080" y="4910327"/>
-            <a:ext cx="10972800" cy="914400"/>
-          </a:xfrm>
-          <a:prstGeom prst="rect">
-            <a:avLst/>
-          </a:prstGeom>
-          <a:noFill/>
-        </p:spPr>
-        <p:txBody>
-          <a:bodyPr wrap="square">
-            <a:noAutofit/>
-          </a:bodyPr>
-          <a:lstStyle/>
-          <a:p>
-            <a:r>
-              <a:rPr sz="1400" b="1">
-                <a:solidFill>
-                  <a:srgbClr val="27500A"/>
-                </a:solidFill>
-                <a:latin typeface="Calibri"/>
-              </a:rPr>
-              <a:t>正解 B — </a:t>
-            </a:r>
-            <a:r>
-              <a:rPr sz="1400" b="0">
-                <a:solidFill>
-                  <a:srgbClr val="1E2024"/>
-                </a:solidFill>
-                <a:latin typeface="Calibri"/>
-              </a:rPr>
-              <a:t>ApiVersions 是 bootstrap 逃生口；其他 API → broker 丟 UnsupportedVersionException → 斷線。</a:t>
-            </a:r>
-          </a:p>
-        </p:txBody>
-      </p:sp>
-      <p:sp>
-        <p:nvSpPr>
-          <p:cNvPr id="9" name="TextBox 8"/>
-          <p:cNvSpPr txBox="1"/>
-          <p:nvPr/>
-        </p:nvSpPr>
-        <p:spPr>
-          <a:xfrm>
-            <a:off x="640080" y="6400800"/>
-            <a:ext cx="10972800" cy="384048"/>
-          </a:xfrm>
-          <a:prstGeom prst="rect">
-            <a:avLst/>
-          </a:prstGeom>
-          <a:noFill/>
-        </p:spPr>
-        <p:txBody>
-          <a:bodyPr wrap="square">
-            <a:noAutofit/>
-          </a:bodyPr>
-          <a:lstStyle/>
-          <a:p>
-            <a:r>
-              <a:rPr sz="1200" b="1">
-                <a:solidFill>
-                  <a:srgbClr val="8A8A8A"/>
-                </a:solidFill>
-                <a:latin typeface="Calibri"/>
-              </a:rPr>
-              <a:t>REF   </a:t>
-            </a:r>
-            <a:r>
-              <a:rPr sz="1200" b="0" u="sng">
-                <a:solidFill>
-                  <a:srgbClr val="185FA5"/>
-                </a:solidFill>
-                <a:latin typeface="Courier New"/>
-                <a:hlinkClick r:id="rId2"/>
-              </a:rPr>
-              <a:t>RequestContext.java:112</a:t>
-            </a:r>
-          </a:p>
-        </p:txBody>
-      </p:sp>
-    </p:spTree>
-  </p:cSld>
-  <p:clrMapOvr>
-    <a:masterClrMapping/>
-  </p:clrMapOvr>
-</p:sld>
-</file>
-
-<file path=ppt/slides/slide16.xml><?xml version="1.0" encoding="utf-8"?>
-<p:sld xmlns:a="http://schemas.openxmlformats.org/drawingml/2006/main" xmlns:p="http://schemas.openxmlformats.org/presentationml/2006/main" xmlns:r="http://schemas.openxmlformats.org/officeDocument/2006/relationships">
-  <p:cSld>
-    <p:spTree>
-      <p:nvGrpSpPr>
-        <p:cNvPr id="1" name=""/>
-        <p:cNvGrpSpPr/>
-        <p:nvPr/>
-      </p:nvGrpSpPr>
-      <p:grpSpPr/>
-      <p:sp>
-        <p:nvSpPr>
-          <p:cNvPr id="2" name="TextBox 1"/>
-          <p:cNvSpPr txBox="1"/>
-          <p:nvPr/>
-        </p:nvSpPr>
-        <p:spPr>
-          <a:xfrm>
-            <a:off x="640080" y="457200"/>
-            <a:ext cx="10972800" cy="365760"/>
-          </a:xfrm>
-          <a:prstGeom prst="rect">
-            <a:avLst/>
-          </a:prstGeom>
-          <a:noFill/>
-        </p:spPr>
-        <p:txBody>
-          <a:bodyPr wrap="square">
-            <a:noAutofit/>
-          </a:bodyPr>
-          <a:lstStyle/>
-          <a:p>
-            <a:r>
-              <a:rPr sz="1300" b="1">
-                <a:solidFill>
-                  <a:srgbClr val="185FA5"/>
-                </a:solidFill>
-                <a:latin typeface="Calibri"/>
-              </a:rPr>
               <a:t>Takeaways</a:t>
             </a:r>
           </a:p>
@@ -5267,7 +4974,7 @@
         <p:spPr>
           <a:xfrm>
             <a:off x="1078992" y="2148840"/>
-            <a:ext cx="10515600" cy="493776"/>
+            <a:ext cx="10515600" cy="841248"/>
           </a:xfrm>
           <a:prstGeom prst="rect">
             <a:avLst/>
@@ -5287,7 +4994,7 @@
                 </a:solidFill>
                 <a:latin typeface="Calibri"/>
               </a:rPr>
-              <a:t>無法「一個版本打天下」：client 長壽、又不能停機，版本只能在連線當下決定</a:t>
+              <a:t>叢集三種通訊：client↔broker、broker↔controller、broker↔broker——版本機制都掛在這三條線</a:t>
             </a:r>
           </a:p>
         </p:txBody>
@@ -5308,7 +5015,7 @@
         </p:blipFill>
         <p:spPr>
           <a:xfrm>
-            <a:off x="658368" y="2816352"/>
+            <a:off x="658368" y="3163824"/>
             <a:ext cx="274320" cy="274320"/>
           </a:xfrm>
           <a:prstGeom prst="rect">
@@ -5324,8 +5031,8 @@
         </p:nvSpPr>
         <p:spPr>
           <a:xfrm>
-            <a:off x="1078992" y="2788920"/>
-            <a:ext cx="10515600" cy="841248"/>
+            <a:off x="1078992" y="3136392"/>
+            <a:ext cx="10515600" cy="493776"/>
           </a:xfrm>
           <a:prstGeom prst="rect">
             <a:avLst/>
@@ -5345,7 +5052,7 @@
                 </a:solidFill>
                 <a:latin typeface="Calibri"/>
               </a:rPr>
-              <a:t>版本分三層（release / metadata.version / wire），各自獨立變動</a:t>
+              <a:t>無法「一個版本打天下」：client 長壽、broker 滾動升級，只能連線當下協商</a:t>
             </a:r>
           </a:p>
         </p:txBody>
@@ -5383,7 +5090,7 @@
         <p:spPr>
           <a:xfrm>
             <a:off x="1078992" y="3776472"/>
-            <a:ext cx="10515600" cy="493776"/>
+            <a:ext cx="10515600" cy="841248"/>
           </a:xfrm>
           <a:prstGeom prst="rect">
             <a:avLst/>
@@ -5403,7 +5110,7 @@
                 </a:solidFill>
                 <a:latin typeface="Calibri"/>
               </a:rPr>
-              <a:t>機制看 Builder 自由度：多數協商、複製面才由 MV 決定；三個角色各有分工</a:t>
+              <a:t>多數路徑靠 ApiVersions 協商；只有複製面由 finalized MV 決定</a:t>
             </a:r>
           </a:p>
         </p:txBody>
@@ -5424,7 +5131,7 @@
         </p:blipFill>
         <p:spPr>
           <a:xfrm>
-            <a:off x="658368" y="4443984"/>
+            <a:off x="658368" y="4791456"/>
             <a:ext cx="274320" cy="274320"/>
           </a:xfrm>
           <a:prstGeom prst="rect">
@@ -5440,7 +5147,7 @@
         </p:nvSpPr>
         <p:spPr>
           <a:xfrm>
-            <a:off x="1078992" y="4416552"/>
+            <a:off x="1078992" y="4764024"/>
             <a:ext cx="10515600" cy="841248"/>
           </a:xfrm>
           <a:prstGeom prst="rect">
@@ -5461,7 +5168,7 @@
                 </a:solidFill>
                 <a:latin typeface="Calibri"/>
               </a:rPr>
-              <a:t>通訊失敗多在送出前本地中止（UnsupportedVersionException）；finalize / 升降的錯誤交給運行時那場</a:t>
+              <a:t>協商不出版本 → UnsupportedVersionException（多在送出前中止）；升降錯誤交給運行時那場</a:t>
             </a:r>
           </a:p>
         </p:txBody>
@@ -5800,7 +5507,7 @@
                 </a:solidFill>
                 <a:latin typeface="Calibri"/>
               </a:rPr>
-              <a:t>Part 1 · 為什麼麻煩</a:t>
+              <a:t>Part 1 · 地圖</a:t>
             </a:r>
           </a:p>
         </p:txBody>
@@ -5834,7 +5541,7 @@
                 </a:solidFill>
                 <a:latin typeface="Calibri"/>
               </a:rPr>
-              <a:t>為什麼叢集裡版本總是對不齊</a:t>
+              <a:t>叢集裡有三種通訊，而且版本天生對不齊</a:t>
             </a:r>
           </a:p>
         </p:txBody>
@@ -5848,7 +5555,7 @@
         <p:spPr>
           <a:xfrm>
             <a:off x="640080" y="2148840"/>
-            <a:ext cx="10972800" cy="822959"/>
+            <a:ext cx="10972800" cy="1097280"/>
           </a:xfrm>
           <a:prstGeom prst="rect">
             <a:avLst/>
@@ -5875,7 +5582,7 @@
                 </a:solidFill>
                 <a:latin typeface="Calibri"/>
               </a:rPr>
-              <a:t>真實：  client v2.3 ── broker v4.1   （對不齊）</a:t>
+              <a:t>client ─▶ broker        讀寫資料</a:t>
             </a:r>
           </a:p>
           <a:p>
@@ -5886,7 +5593,18 @@
                 </a:solidFill>
                 <a:latin typeface="Calibri"/>
               </a:rPr>
-              <a:t>        client v3.6 ── broker v4.0</a:t>
+              <a:t>broker ─▶ controller    心跳 / 註冊</a:t>
+            </a:r>
+          </a:p>
+          <a:p>
+            <a:r>
+              <a:rPr sz="1350" b="0">
+                <a:solidFill>
+                  <a:srgbClr val="2C2C2A"/>
+                </a:solidFill>
+                <a:latin typeface="Calibri"/>
+              </a:rPr>
+              <a:t>broker ◀▶ broker        複製</a:t>
             </a:r>
           </a:p>
         </p:txBody>
@@ -5907,7 +5625,7 @@
         </p:blipFill>
         <p:spPr>
           <a:xfrm>
-            <a:off x="658368" y="3200399"/>
+            <a:off x="658368" y="3474720"/>
             <a:ext cx="274320" cy="274320"/>
           </a:xfrm>
           <a:prstGeom prst="rect">
@@ -5923,7 +5641,7 @@
         </p:nvSpPr>
         <p:spPr>
           <a:xfrm>
-            <a:off x="1078992" y="3172968"/>
+            <a:off x="1078992" y="3447288"/>
             <a:ext cx="10515600" cy="841248"/>
           </a:xfrm>
           <a:prstGeom prst="rect">
@@ -5944,7 +5662,7 @@
                 </a:solidFill>
                 <a:latin typeface="Calibri"/>
               </a:rPr>
-              <a:t>client 內嵌在各應用程式中，通常長期不更新；Kafka 也因此保留每個 protocol 版本達九年，4.0（KIP-896）才把下限提到 2.1</a:t>
+              <a:t>client 內嵌在各 app、長期不更新（Kafka 曾為舊 client 保留每個 protocol 版本近九年，4.0／KIP-896 才把下限提到 2.1）</a:t>
             </a:r>
           </a:p>
         </p:txBody>
@@ -5965,7 +5683,7 @@
         </p:blipFill>
         <p:spPr>
           <a:xfrm>
-            <a:off x="658368" y="4187952"/>
+            <a:off x="658368" y="4462272"/>
             <a:ext cx="274320" cy="274320"/>
           </a:xfrm>
           <a:prstGeom prst="rect">
@@ -5981,8 +5699,8 @@
         </p:nvSpPr>
         <p:spPr>
           <a:xfrm>
-            <a:off x="1078992" y="4160520"/>
-            <a:ext cx="10515600" cy="841248"/>
+            <a:off x="1078992" y="4434840"/>
+            <a:ext cx="10515600" cy="493776"/>
           </a:xfrm>
           <a:prstGeom prst="rect">
             <a:avLst/>
@@ -6002,78 +5720,20 @@
                 </a:solidFill>
                 <a:latin typeface="Calibri"/>
               </a:rPr>
-              <a:t>broker 本身也是逐台滾動升級，升級期間叢集必然新舊版本並存，連 broker 之間也會混版</a:t>
-            </a:r>
-          </a:p>
-        </p:txBody>
-      </p:sp>
-      <p:pic>
-        <p:nvPicPr>
-          <p:cNvPr id="9" name="Picture 8" descr="alert-triangle.png"/>
-          <p:cNvPicPr>
-            <a:picLocks noChangeAspect="1"/>
-          </p:cNvPicPr>
-          <p:nvPr/>
-        </p:nvPicPr>
-        <p:blipFill>
-          <a:blip r:embed="rId4"/>
-          <a:stretch>
-            <a:fillRect/>
-          </a:stretch>
-        </p:blipFill>
-        <p:spPr>
-          <a:xfrm>
-            <a:off x="658368" y="5175504"/>
-            <a:ext cx="274320" cy="274320"/>
-          </a:xfrm>
-          <a:prstGeom prst="rect">
-            <a:avLst/>
-          </a:prstGeom>
-        </p:spPr>
-      </p:pic>
-      <p:sp>
-        <p:nvSpPr>
-          <p:cNvPr id="10" name="TextBox 9"/>
-          <p:cNvSpPr txBox="1"/>
-          <p:nvPr/>
-        </p:nvSpPr>
-        <p:spPr>
-          <a:xfrm>
-            <a:off x="1078992" y="5148072"/>
-            <a:ext cx="10515600" cy="493776"/>
-          </a:xfrm>
-          <a:prstGeom prst="rect">
-            <a:avLst/>
-          </a:prstGeom>
-          <a:noFill/>
-        </p:spPr>
-        <p:txBody>
-          <a:bodyPr wrap="square">
-            <a:noAutofit/>
-          </a:bodyPr>
-          <a:lstStyle/>
-          <a:p>
-            <a:r>
-              <a:rPr sz="1650" b="0">
-                <a:solidFill>
-                  <a:srgbClr val="1E2024"/>
-                </a:solidFill>
-                <a:latin typeface="Calibri"/>
-              </a:rPr>
-              <a:t>若要求所有節點版本一致，就得整批停機升級</a:t>
-            </a:r>
-          </a:p>
-        </p:txBody>
-      </p:sp>
-      <p:sp>
-        <p:nvSpPr>
-          <p:cNvPr id="11" name="TextBox 10"/>
-          <p:cNvSpPr txBox="1"/>
-          <p:nvPr/>
-        </p:nvSpPr>
-        <p:spPr>
-          <a:xfrm>
-            <a:off x="640080" y="5788152"/>
+              <a:t>broker 逐台滾動升級，過程必然新舊並存；要不停機就不能要求全叢集同版</a:t>
+            </a:r>
+          </a:p>
+        </p:txBody>
+      </p:sp>
+      <p:sp>
+        <p:nvSpPr>
+          <p:cNvPr id="9" name="TextBox 8"/>
+          <p:cNvSpPr txBox="1"/>
+          <p:nvPr/>
+        </p:nvSpPr>
+        <p:spPr>
+          <a:xfrm>
+            <a:off x="640080" y="5074920"/>
             <a:ext cx="10972800" cy="566928"/>
           </a:xfrm>
           <a:prstGeom prst="rect">
@@ -6099,14 +5759,14 @@
                 </a:solidFill>
                 <a:latin typeface="Calibri"/>
               </a:rPr>
-              <a:t>因此改由每條連線各自協商版本，才能逐台滾動升級、過程中不需停機</a:t>
-            </a:r>
-          </a:p>
-        </p:txBody>
-      </p:sp>
-      <p:sp>
-        <p:nvSpPr>
-          <p:cNvPr id="12" name="TextBox 11"/>
+              <a:t>所以版本只能在連線當下協商——後面每個機制都掛在上面這三條線</a:t>
+            </a:r>
+          </a:p>
+        </p:txBody>
+      </p:sp>
+      <p:sp>
+        <p:nvSpPr>
+          <p:cNvPr id="10" name="TextBox 9"/>
           <p:cNvSpPr txBox="1"/>
           <p:nvPr/>
         </p:nvSpPr>
@@ -6141,9 +5801,28 @@
                   <a:srgbClr val="185FA5"/>
                 </a:solidFill>
                 <a:latin typeface="Calibri"/>
+                <a:hlinkClick r:id="rId4"/>
+              </a:rPr>
+              <a:t>KIP-896</a:t>
+            </a:r>
+            <a:r>
+              <a:rPr sz="1200" b="0">
+                <a:solidFill>
+                  <a:srgbClr val="8A8A8A"/>
+                </a:solidFill>
+                <a:latin typeface="Calibri"/>
+              </a:rPr>
+              <a:t>   ·   </a:t>
+            </a:r>
+            <a:r>
+              <a:rPr sz="1200" b="0" u="sng">
+                <a:solidFill>
+                  <a:srgbClr val="185FA5"/>
+                </a:solidFill>
+                <a:latin typeface="Courier New"/>
                 <a:hlinkClick r:id="rId5"/>
               </a:rPr>
-              <a:t>KIP-896</a:t>
+              <a:t>protocol.md:94</a:t>
             </a:r>
             <a:r>
               <a:rPr sz="1200" b="0">
@@ -6159,27 +5838,8 @@
                 <a:solidFill>
                   <a:srgbClr val="185FA5"/>
                 </a:solidFill>
-                <a:latin typeface="Courier New"/>
+                <a:latin typeface="Calibri"/>
                 <a:hlinkClick r:id="rId6"/>
-              </a:rPr>
-              <a:t>protocol.md:94</a:t>
-            </a:r>
-            <a:r>
-              <a:rPr sz="1200" b="0">
-                <a:solidFill>
-                  <a:srgbClr val="8A8A8A"/>
-                </a:solidFill>
-                <a:latin typeface="Calibri"/>
-              </a:rPr>
-              <a:t>   ·   </a:t>
-            </a:r>
-            <a:r>
-              <a:rPr sz="1200" b="0" u="sng">
-                <a:solidFill>
-                  <a:srgbClr val="185FA5"/>
-                </a:solidFill>
-                <a:latin typeface="Calibri"/>
-                <a:hlinkClick r:id="rId7"/>
               </a:rPr>
               <a:t>KIP-35</a:t>
             </a:r>
@@ -6233,7 +5893,7 @@
                 </a:solidFill>
                 <a:latin typeface="Calibri"/>
               </a:rPr>
-              <a:t>Part 1 · §2a</a:t>
+              <a:t>Part 1 · 三層 scope</a:t>
             </a:r>
           </a:p>
         </p:txBody>
@@ -6246,28 +5906,28 @@
         </p:nvSpPr>
         <p:spPr>
           <a:xfrm>
-            <a:off x="640080" y="822960"/>
-            <a:ext cx="10972800" cy="640080"/>
-          </a:xfrm>
-          <a:prstGeom prst="rect">
-            <a:avLst/>
-          </a:prstGeom>
-          <a:noFill/>
-        </p:spPr>
-        <p:txBody>
-          <a:bodyPr wrap="square">
-            <a:noAutofit/>
-          </a:bodyPr>
-          <a:lstStyle/>
-          <a:p>
-            <a:r>
-              <a:rPr sz="3000" b="1">
+            <a:off x="640080" y="841248"/>
+            <a:ext cx="10972800" cy="1005840"/>
+          </a:xfrm>
+          <a:prstGeom prst="rect">
+            <a:avLst/>
+          </a:prstGeom>
+          <a:noFill/>
+        </p:spPr>
+        <p:txBody>
+          <a:bodyPr wrap="square">
+            <a:noAutofit/>
+          </a:bodyPr>
+          <a:lstStyle/>
+          <a:p>
+            <a:r>
+              <a:rPr sz="3200" b="1">
                 <a:solidFill>
                   <a:srgbClr val="1E2024"/>
                 </a:solidFill>
                 <a:latin typeface="Calibri"/>
               </a:rPr>
-              <a:t>為什麼一個版本號不夠：同一支 Fetch，兩種選版</a:t>
+              <a:t>一個版本號不夠：三種 scope 互斥</a:t>
             </a:r>
           </a:p>
         </p:txBody>
@@ -6280,35 +5940,64 @@
         </p:nvSpPr>
         <p:spPr>
           <a:xfrm>
-            <a:off x="640080" y="1481328"/>
-            <a:ext cx="10972800" cy="365760"/>
-          </a:xfrm>
-          <a:prstGeom prst="rect">
-            <a:avLst/>
-          </a:prstGeom>
-          <a:noFill/>
-        </p:spPr>
-        <p:txBody>
-          <a:bodyPr wrap="square">
-            <a:noAutofit/>
-          </a:bodyPr>
-          <a:lstStyle/>
-          <a:p>
-            <a:r>
-              <a:rPr sz="1400" b="0">
-                <a:solidFill>
-                  <a:srgbClr val="5F5E5A"/>
-                </a:solidFill>
-                <a:latin typeface="Calibri"/>
-              </a:rPr>
-              <a:t>Fetch＝讀取 partition 資料的 RPC：consumer 拿來讀資料、follower（broker）拿來複製 log</a:t>
+            <a:off x="640080" y="2148840"/>
+            <a:ext cx="10972800" cy="1097280"/>
+          </a:xfrm>
+          <a:prstGeom prst="rect">
+            <a:avLst/>
+          </a:prstGeom>
+          <a:solidFill>
+            <a:srgbClr val="F3F1EC"/>
+          </a:solidFill>
+          <a:ln w="6350">
+            <a:solidFill>
+              <a:srgbClr val="E3E0D8"/>
+            </a:solidFill>
+          </a:ln>
+        </p:spPr>
+        <p:txBody>
+          <a:bodyPr wrap="square" lIns="146304" tIns="91440" bIns="91440">
+            <a:noAutofit/>
+          </a:bodyPr>
+          <a:lstStyle/>
+          <a:p>
+            <a:r>
+              <a:rPr sz="1350" b="0">
+                <a:solidFill>
+                  <a:srgbClr val="2C2C2A"/>
+                </a:solidFill>
+                <a:latin typeface="Calibri"/>
+              </a:rPr>
+              <a:t>release version   = 我裝了哪版 binary   (per-node)</a:t>
+            </a:r>
+          </a:p>
+          <a:p>
+            <a:r>
+              <a:rPr sz="1350" b="0">
+                <a:solidFill>
+                  <a:srgbClr val="2C2C2A"/>
+                </a:solidFill>
+                <a:latin typeface="Calibri"/>
+              </a:rPr>
+              <a:t>metadata.version  = 叢集一致的能力世代   (cluster-wide, finalize)</a:t>
+            </a:r>
+          </a:p>
+          <a:p>
+            <a:r>
+              <a:rPr sz="1350" b="0">
+                <a:solidFill>
+                  <a:srgbClr val="2C2C2A"/>
+                </a:solidFill>
+                <a:latin typeface="Calibri"/>
+              </a:rPr>
+              <a:t>wire API version  = 這條連線講第幾版     (per-connection)</a:t>
             </a:r>
           </a:p>
         </p:txBody>
       </p:sp>
       <p:pic>
         <p:nvPicPr>
-          <p:cNvPr id="5" name="Picture 4" descr="s2a-rangeline.png"/>
+          <p:cNvPr id="5" name="Picture 4" descr="arrows-split.png"/>
           <p:cNvPicPr>
             <a:picLocks noChangeAspect="1"/>
           </p:cNvPicPr>
@@ -6322,8 +6011,8 @@
         </p:blipFill>
         <p:spPr>
           <a:xfrm>
-            <a:off x="1664208" y="1965960"/>
-            <a:ext cx="8869680" cy="4093698"/>
+            <a:off x="658368" y="3474720"/>
+            <a:ext cx="274320" cy="274320"/>
           </a:xfrm>
           <a:prstGeom prst="rect">
             <a:avLst/>
@@ -6333,6 +6022,79 @@
       <p:sp>
         <p:nvSpPr>
           <p:cNvPr id="6" name="TextBox 5"/>
+          <p:cNvSpPr txBox="1"/>
+          <p:nvPr/>
+        </p:nvSpPr>
+        <p:spPr>
+          <a:xfrm>
+            <a:off x="1078992" y="3447288"/>
+            <a:ext cx="10515600" cy="493776"/>
+          </a:xfrm>
+          <a:prstGeom prst="rect">
+            <a:avLst/>
+          </a:prstGeom>
+          <a:noFill/>
+        </p:spPr>
+        <p:txBody>
+          <a:bodyPr wrap="square">
+            <a:noAutofit/>
+          </a:bodyPr>
+          <a:lstStyle/>
+          <a:p>
+            <a:r>
+              <a:rPr sz="1650" b="0">
+                <a:solidFill>
+                  <a:srgbClr val="1E2024"/>
+                </a:solidFill>
+                <a:latin typeface="Calibri"/>
+              </a:rPr>
+              <a:t>三層不會同步變動、scope 也不同，多數版本問題的根源都在於此</a:t>
+            </a:r>
+          </a:p>
+        </p:txBody>
+      </p:sp>
+      <p:sp>
+        <p:nvSpPr>
+          <p:cNvPr id="7" name="TextBox 6"/>
+          <p:cNvSpPr txBox="1"/>
+          <p:nvPr/>
+        </p:nvSpPr>
+        <p:spPr>
+          <a:xfrm>
+            <a:off x="640080" y="4087368"/>
+            <a:ext cx="10972800" cy="566928"/>
+          </a:xfrm>
+          <a:prstGeom prst="rect">
+            <a:avLst/>
+          </a:prstGeom>
+          <a:solidFill>
+            <a:srgbClr val="E9F3DE"/>
+          </a:solidFill>
+          <a:ln>
+            <a:noFill/>
+          </a:ln>
+        </p:spPr>
+        <p:txBody>
+          <a:bodyPr wrap="square" lIns="146304" tIns="82296">
+            <a:noAutofit/>
+          </a:bodyPr>
+          <a:lstStyle/>
+          <a:p>
+            <a:r>
+              <a:rPr sz="1500" b="0">
+                <a:solidFill>
+                  <a:srgbClr val="27500A"/>
+                </a:solidFill>
+                <a:latin typeface="Calibri"/>
+              </a:rPr>
+              <a:t>單一版本號無法同時表達三種 scope，只能拆成三層各自管</a:t>
+            </a:r>
+          </a:p>
+        </p:txBody>
+      </p:sp>
+      <p:sp>
+        <p:nvSpPr>
+          <p:cNvPr id="8" name="TextBox 7"/>
           <p:cNvSpPr txBox="1"/>
           <p:nvPr/>
         </p:nvSpPr>
@@ -6362,6 +6124,24 @@
               <a:t>REF   </a:t>
             </a:r>
             <a:r>
+              <a:rPr sz="1200" b="0">
+                <a:solidFill>
+                  <a:srgbClr val="8A8A8A"/>
+                </a:solidFill>
+                <a:latin typeface="Calibri"/>
+              </a:rPr>
+              <a:t>kafka-features describe</a:t>
+            </a:r>
+            <a:r>
+              <a:rPr sz="1200" b="0">
+                <a:solidFill>
+                  <a:srgbClr val="8A8A8A"/>
+                </a:solidFill>
+                <a:latin typeface="Calibri"/>
+              </a:rPr>
+              <a:t>   ·   </a:t>
+            </a:r>
+            <a:r>
               <a:rPr sz="1200" b="0" u="sng">
                 <a:solidFill>
                   <a:srgbClr val="185FA5"/>
@@ -6369,45 +6149,7 @@
                 <a:latin typeface="Courier New"/>
                 <a:hlinkClick r:id="rId3"/>
               </a:rPr>
-              <a:t>forConsumer/forReplica</a:t>
-            </a:r>
-            <a:r>
-              <a:rPr sz="1200" b="0">
-                <a:solidFill>
-                  <a:srgbClr val="8A8A8A"/>
-                </a:solidFill>
-                <a:latin typeface="Calibri"/>
-              </a:rPr>
-              <a:t>   ·   </a:t>
-            </a:r>
-            <a:r>
-              <a:rPr sz="1200" b="0" u="sng">
-                <a:solidFill>
-                  <a:srgbClr val="185FA5"/>
-                </a:solidFill>
-                <a:latin typeface="Courier New"/>
-                <a:hlinkClick r:id="rId4"/>
-              </a:rPr>
-              <a:t>fetchRequestVersion</a:t>
-            </a:r>
-            <a:r>
-              <a:rPr sz="1200" b="0">
-                <a:solidFill>
-                  <a:srgbClr val="8A8A8A"/>
-                </a:solidFill>
-                <a:latin typeface="Calibri"/>
-              </a:rPr>
-              <a:t>   ·   </a:t>
-            </a:r>
-            <a:r>
-              <a:rPr sz="1200" b="0" u="sng">
-                <a:solidFill>
-                  <a:srgbClr val="185FA5"/>
-                </a:solidFill>
-                <a:latin typeface="Courier New"/>
-                <a:hlinkClick r:id="rId5"/>
-              </a:rPr>
-              <a:t>validVersions</a:t>
+              <a:t>zk2kraft.md:71</a:t>
             </a:r>
           </a:p>
         </p:txBody>
@@ -6459,7 +6201,7 @@
                 </a:solidFill>
                 <a:latin typeface="Calibri"/>
               </a:rPr>
-              <a:t>Part 1 · §2b</a:t>
+              <a:t>Part 1 · 具體例子</a:t>
             </a:r>
           </a:p>
         </p:txBody>
@@ -6472,28 +6214,28 @@
         </p:nvSpPr>
         <p:spPr>
           <a:xfrm>
-            <a:off x="640080" y="841248"/>
-            <a:ext cx="10972800" cy="1005840"/>
-          </a:xfrm>
-          <a:prstGeom prst="rect">
-            <a:avLst/>
-          </a:prstGeom>
-          <a:noFill/>
-        </p:spPr>
-        <p:txBody>
-          <a:bodyPr wrap="square">
-            <a:noAutofit/>
-          </a:bodyPr>
-          <a:lstStyle/>
-          <a:p>
-            <a:r>
-              <a:rPr sz="3200" b="1">
+            <a:off x="640080" y="822960"/>
+            <a:ext cx="10972800" cy="640080"/>
+          </a:xfrm>
+          <a:prstGeom prst="rect">
+            <a:avLst/>
+          </a:prstGeom>
+          <a:noFill/>
+        </p:spPr>
+        <p:txBody>
+          <a:bodyPr wrap="square">
+            <a:noAutofit/>
+          </a:bodyPr>
+          <a:lstStyle/>
+          <a:p>
+            <a:r>
+              <a:rPr sz="3000" b="1">
                 <a:solidFill>
                   <a:srgbClr val="1E2024"/>
                 </a:solidFill>
                 <a:latin typeface="Calibri"/>
               </a:rPr>
-              <a:t>所以要分三層：三種 scope 互斥</a:t>
+              <a:t>為什麼一個版本號不夠：同一支 Fetch，兩種選版</a:t>
             </a:r>
           </a:p>
         </p:txBody>
@@ -6506,64 +6248,35 @@
         </p:nvSpPr>
         <p:spPr>
           <a:xfrm>
-            <a:off x="640080" y="2148840"/>
-            <a:ext cx="10972800" cy="1097280"/>
-          </a:xfrm>
-          <a:prstGeom prst="rect">
-            <a:avLst/>
-          </a:prstGeom>
-          <a:solidFill>
-            <a:srgbClr val="F3F1EC"/>
-          </a:solidFill>
-          <a:ln w="6350">
-            <a:solidFill>
-              <a:srgbClr val="E3E0D8"/>
-            </a:solidFill>
-          </a:ln>
-        </p:spPr>
-        <p:txBody>
-          <a:bodyPr wrap="square" lIns="146304" tIns="91440" bIns="91440">
-            <a:noAutofit/>
-          </a:bodyPr>
-          <a:lstStyle/>
-          <a:p>
-            <a:r>
-              <a:rPr sz="1350" b="0">
-                <a:solidFill>
-                  <a:srgbClr val="2C2C2A"/>
-                </a:solidFill>
-                <a:latin typeface="Calibri"/>
-              </a:rPr>
-              <a:t>release version   = 我裝了哪版 binary   (per-node)</a:t>
-            </a:r>
-          </a:p>
-          <a:p>
-            <a:r>
-              <a:rPr sz="1350" b="0">
-                <a:solidFill>
-                  <a:srgbClr val="2C2C2A"/>
-                </a:solidFill>
-                <a:latin typeface="Calibri"/>
-              </a:rPr>
-              <a:t>metadata.version  = 叢集一致的能力世代   (cluster-wide, finalize)</a:t>
-            </a:r>
-          </a:p>
-          <a:p>
-            <a:r>
-              <a:rPr sz="1350" b="0">
-                <a:solidFill>
-                  <a:srgbClr val="2C2C2A"/>
-                </a:solidFill>
-                <a:latin typeface="Calibri"/>
-              </a:rPr>
-              <a:t>wire API version  = 這條連線講第幾版     (per-connection)</a:t>
+            <a:off x="640080" y="1481328"/>
+            <a:ext cx="10972800" cy="365760"/>
+          </a:xfrm>
+          <a:prstGeom prst="rect">
+            <a:avLst/>
+          </a:prstGeom>
+          <a:noFill/>
+        </p:spPr>
+        <p:txBody>
+          <a:bodyPr wrap="square">
+            <a:noAutofit/>
+          </a:bodyPr>
+          <a:lstStyle/>
+          <a:p>
+            <a:r>
+              <a:rPr sz="1400" b="0">
+                <a:solidFill>
+                  <a:srgbClr val="5F5E5A"/>
+                </a:solidFill>
+                <a:latin typeface="Calibri"/>
+              </a:rPr>
+              <a:t>Fetch＝讀取 partition 資料的 RPC：consumer 拿來讀資料、follower（broker）拿來複製 log</a:t>
             </a:r>
           </a:p>
         </p:txBody>
       </p:sp>
       <p:pic>
         <p:nvPicPr>
-          <p:cNvPr id="5" name="Picture 4" descr="arrows-split.png"/>
+          <p:cNvPr id="5" name="Picture 4" descr="s2a-rangeline.png"/>
           <p:cNvPicPr>
             <a:picLocks noChangeAspect="1"/>
           </p:cNvPicPr>
@@ -6577,8 +6290,8 @@
         </p:blipFill>
         <p:spPr>
           <a:xfrm>
-            <a:off x="658368" y="3474720"/>
-            <a:ext cx="274320" cy="274320"/>
+            <a:off x="1664208" y="1965960"/>
+            <a:ext cx="8869680" cy="4093698"/>
           </a:xfrm>
           <a:prstGeom prst="rect">
             <a:avLst/>
@@ -6588,79 +6301,6 @@
       <p:sp>
         <p:nvSpPr>
           <p:cNvPr id="6" name="TextBox 5"/>
-          <p:cNvSpPr txBox="1"/>
-          <p:nvPr/>
-        </p:nvSpPr>
-        <p:spPr>
-          <a:xfrm>
-            <a:off x="1078992" y="3447288"/>
-            <a:ext cx="10515600" cy="493776"/>
-          </a:xfrm>
-          <a:prstGeom prst="rect">
-            <a:avLst/>
-          </a:prstGeom>
-          <a:noFill/>
-        </p:spPr>
-        <p:txBody>
-          <a:bodyPr wrap="square">
-            <a:noAutofit/>
-          </a:bodyPr>
-          <a:lstStyle/>
-          <a:p>
-            <a:r>
-              <a:rPr sz="1650" b="0">
-                <a:solidFill>
-                  <a:srgbClr val="1E2024"/>
-                </a:solidFill>
-                <a:latin typeface="Calibri"/>
-              </a:rPr>
-              <a:t>三層不會同步變動、scope 也不同，多數版本問題的根源都在於此</a:t>
-            </a:r>
-          </a:p>
-        </p:txBody>
-      </p:sp>
-      <p:sp>
-        <p:nvSpPr>
-          <p:cNvPr id="7" name="TextBox 6"/>
-          <p:cNvSpPr txBox="1"/>
-          <p:nvPr/>
-        </p:nvSpPr>
-        <p:spPr>
-          <a:xfrm>
-            <a:off x="640080" y="4087368"/>
-            <a:ext cx="10972800" cy="566928"/>
-          </a:xfrm>
-          <a:prstGeom prst="rect">
-            <a:avLst/>
-          </a:prstGeom>
-          <a:solidFill>
-            <a:srgbClr val="E9F3DE"/>
-          </a:solidFill>
-          <a:ln>
-            <a:noFill/>
-          </a:ln>
-        </p:spPr>
-        <p:txBody>
-          <a:bodyPr wrap="square" lIns="146304" tIns="82296">
-            <a:noAutofit/>
-          </a:bodyPr>
-          <a:lstStyle/>
-          <a:p>
-            <a:r>
-              <a:rPr sz="1500" b="0">
-                <a:solidFill>
-                  <a:srgbClr val="27500A"/>
-                </a:solidFill>
-                <a:latin typeface="Calibri"/>
-              </a:rPr>
-              <a:t>單一版本號無法同時表達三種 scope，只能拆成三層各自管</a:t>
-            </a:r>
-          </a:p>
-        </p:txBody>
-      </p:sp>
-      <p:sp>
-        <p:nvSpPr>
-          <p:cNvPr id="8" name="TextBox 7"/>
           <p:cNvSpPr txBox="1"/>
           <p:nvPr/>
         </p:nvSpPr>
@@ -6690,24 +6330,6 @@
               <a:t>REF   </a:t>
             </a:r>
             <a:r>
-              <a:rPr sz="1200" b="0">
-                <a:solidFill>
-                  <a:srgbClr val="8A8A8A"/>
-                </a:solidFill>
-                <a:latin typeface="Calibri"/>
-              </a:rPr>
-              <a:t>kafka-features describe</a:t>
-            </a:r>
-            <a:r>
-              <a:rPr sz="1200" b="0">
-                <a:solidFill>
-                  <a:srgbClr val="8A8A8A"/>
-                </a:solidFill>
-                <a:latin typeface="Calibri"/>
-              </a:rPr>
-              <a:t>   ·   </a:t>
-            </a:r>
-            <a:r>
               <a:rPr sz="1200" b="0" u="sng">
                 <a:solidFill>
                   <a:srgbClr val="185FA5"/>
@@ -6715,7 +6337,45 @@
                 <a:latin typeface="Courier New"/>
                 <a:hlinkClick r:id="rId3"/>
               </a:rPr>
-              <a:t>zk2kraft.md:71</a:t>
+              <a:t>forConsumer/forReplica</a:t>
+            </a:r>
+            <a:r>
+              <a:rPr sz="1200" b="0">
+                <a:solidFill>
+                  <a:srgbClr val="8A8A8A"/>
+                </a:solidFill>
+                <a:latin typeface="Calibri"/>
+              </a:rPr>
+              <a:t>   ·   </a:t>
+            </a:r>
+            <a:r>
+              <a:rPr sz="1200" b="0" u="sng">
+                <a:solidFill>
+                  <a:srgbClr val="185FA5"/>
+                </a:solidFill>
+                <a:latin typeface="Courier New"/>
+                <a:hlinkClick r:id="rId4"/>
+              </a:rPr>
+              <a:t>fetchRequestVersion</a:t>
+            </a:r>
+            <a:r>
+              <a:rPr sz="1200" b="0">
+                <a:solidFill>
+                  <a:srgbClr val="8A8A8A"/>
+                </a:solidFill>
+                <a:latin typeface="Calibri"/>
+              </a:rPr>
+              <a:t>   ·   </a:t>
+            </a:r>
+            <a:r>
+              <a:rPr sz="1200" b="0" u="sng">
+                <a:solidFill>
+                  <a:srgbClr val="185FA5"/>
+                </a:solidFill>
+                <a:latin typeface="Courier New"/>
+                <a:hlinkClick r:id="rId5"/>
+              </a:rPr>
+              <a:t>validVersions</a:t>
             </a:r>
           </a:p>
         </p:txBody>
@@ -6767,7 +6427,7 @@
                 </a:solidFill>
                 <a:latin typeface="Calibri"/>
               </a:rPr>
-              <a:t>隨堂考 · 暖身</a:t>
+              <a:t>Part 1 · 選版機制</a:t>
             </a:r>
           </a:p>
         </p:txBody>
@@ -6781,113 +6441,85 @@
         <p:spPr>
           <a:xfrm>
             <a:off x="640080" y="841248"/>
-            <a:ext cx="10972800" cy="1188720"/>
-          </a:xfrm>
-          <a:prstGeom prst="rect">
-            <a:avLst/>
-          </a:prstGeom>
-          <a:noFill/>
-        </p:spPr>
-        <p:txBody>
-          <a:bodyPr wrap="square">
-            <a:noAutofit/>
-          </a:bodyPr>
-          <a:lstStyle/>
-          <a:p>
-            <a:r>
-              <a:rPr sz="2600" b="1">
+            <a:ext cx="10972800" cy="1005840"/>
+          </a:xfrm>
+          <a:prstGeom prst="rect">
+            <a:avLst/>
+          </a:prstGeom>
+          <a:noFill/>
+        </p:spPr>
+        <p:txBody>
+          <a:bodyPr wrap="square">
+            <a:noAutofit/>
+          </a:bodyPr>
+          <a:lstStyle/>
+          <a:p>
+            <a:r>
+              <a:rPr sz="3200" b="1">
                 <a:solidFill>
                   <a:srgbClr val="1E2024"/>
                 </a:solidFill>
                 <a:latin typeface="Calibri"/>
               </a:rPr>
-              <a:t>可以「一個版本打天下」嗎？</a:t>
-            </a:r>
-          </a:p>
-        </p:txBody>
-      </p:sp>
-      <p:sp>
-        <p:nvSpPr>
-          <p:cNvPr id="4" name="TextBox 3"/>
-          <p:cNvSpPr txBox="1"/>
-          <p:nvPr/>
-        </p:nvSpPr>
-        <p:spPr>
-          <a:xfrm>
-            <a:off x="822960" y="2331720"/>
-            <a:ext cx="10515600" cy="493776"/>
-          </a:xfrm>
-          <a:prstGeom prst="rect">
-            <a:avLst/>
-          </a:prstGeom>
-          <a:noFill/>
-        </p:spPr>
-        <p:txBody>
-          <a:bodyPr wrap="square">
-            <a:noAutofit/>
-          </a:bodyPr>
-          <a:lstStyle/>
-          <a:p>
-            <a:r>
-              <a:rPr sz="1600" b="0">
+              <a:t>三個角色，各自怎麼選版</a:t>
+            </a:r>
+          </a:p>
+        </p:txBody>
+      </p:sp>
+      <p:pic>
+        <p:nvPicPr>
+          <p:cNvPr id="4" name="Picture 3" descr="arrows-split.png"/>
+          <p:cNvPicPr>
+            <a:picLocks noChangeAspect="1"/>
+          </p:cNvPicPr>
+          <p:nvPr/>
+        </p:nvPicPr>
+        <p:blipFill>
+          <a:blip r:embed="rId2"/>
+          <a:stretch>
+            <a:fillRect/>
+          </a:stretch>
+        </p:blipFill>
+        <p:spPr>
+          <a:xfrm>
+            <a:off x="658368" y="2176272"/>
+            <a:ext cx="274320" cy="274320"/>
+          </a:xfrm>
+          <a:prstGeom prst="rect">
+            <a:avLst/>
+          </a:prstGeom>
+        </p:spPr>
+      </p:pic>
+      <p:sp>
+        <p:nvSpPr>
+          <p:cNvPr id="5" name="TextBox 4"/>
+          <p:cNvSpPr txBox="1"/>
+          <p:nvPr/>
+        </p:nvSpPr>
+        <p:spPr>
+          <a:xfrm>
+            <a:off x="1078992" y="2148840"/>
+            <a:ext cx="10515600" cy="841248"/>
+          </a:xfrm>
+          <a:prstGeom prst="rect">
+            <a:avLst/>
+          </a:prstGeom>
+          <a:noFill/>
+        </p:spPr>
+        <p:txBody>
+          <a:bodyPr wrap="square">
+            <a:noAutofit/>
+          </a:bodyPr>
+          <a:lstStyle/>
+          <a:p>
+            <a:r>
+              <a:rPr sz="1650" b="0">
                 <a:solidFill>
                   <a:srgbClr val="1E2024"/>
                 </a:solidFill>
                 <a:latin typeface="Calibri"/>
               </a:rPr>
-              <a:t>A.  </a:t>
-            </a:r>
-            <a:r>
-              <a:rPr sz="1600" b="0">
-                <a:solidFill>
-                  <a:srgbClr val="1E2024"/>
-                </a:solidFill>
-                <a:latin typeface="Calibri"/>
-              </a:rPr>
-              <a:t>可以，大家同一版一起升</a:t>
-            </a:r>
-          </a:p>
-        </p:txBody>
-      </p:sp>
-      <p:sp>
-        <p:nvSpPr>
-          <p:cNvPr id="5" name="TextBox 4"/>
-          <p:cNvSpPr txBox="1"/>
-          <p:nvPr/>
-        </p:nvSpPr>
-        <p:spPr>
-          <a:xfrm>
-            <a:off x="822960" y="2953512"/>
-            <a:ext cx="10515600" cy="493776"/>
-          </a:xfrm>
-          <a:prstGeom prst="rect">
-            <a:avLst/>
-          </a:prstGeom>
-          <a:noFill/>
-        </p:spPr>
-        <p:txBody>
-          <a:bodyPr wrap="square">
-            <a:noAutofit/>
-          </a:bodyPr>
-          <a:lstStyle/>
-          <a:p>
-            <a:r>
-              <a:rPr sz="1600" b="0">
-                <a:solidFill>
-                  <a:srgbClr val="1E2024"/>
-                </a:solidFill>
-                <a:latin typeface="Calibri"/>
-              </a:rPr>
-              <a:t>B.  </a:t>
-            </a:r>
-            <a:r>
-              <a:rPr sz="1600" b="0">
-                <a:solidFill>
-                  <a:srgbClr val="1E2024"/>
-                </a:solidFill>
-                <a:latin typeface="Calibri"/>
-              </a:rPr>
-              <a:t>不行——client 長壽 + 要不停機，得溝通當下協商</a:t>
+              <a:t>底層都先做 ApiVersions 握手（共用同一顆 NetworkClient）；決定版本的是 request Builder 留多少空間</a:t>
             </a:r>
           </a:p>
         </p:txBody>
@@ -6900,37 +6532,57 @@
         </p:nvSpPr>
         <p:spPr>
           <a:xfrm>
-            <a:off x="822960" y="3575304"/>
-            <a:ext cx="10515600" cy="493776"/>
-          </a:xfrm>
-          <a:prstGeom prst="rect">
-            <a:avLst/>
-          </a:prstGeom>
-          <a:noFill/>
-        </p:spPr>
-        <p:txBody>
-          <a:bodyPr wrap="square">
-            <a:noAutofit/>
-          </a:bodyPr>
-          <a:lstStyle/>
-          <a:p>
-            <a:r>
-              <a:rPr sz="1600" b="0">
-                <a:solidFill>
-                  <a:srgbClr val="1E2024"/>
-                </a:solidFill>
-                <a:latin typeface="Calibri"/>
-              </a:rPr>
-              <a:t>C.  </a:t>
-            </a:r>
-            <a:r>
-              <a:rPr sz="1600" b="0">
-                <a:solidFill>
-                  <a:srgbClr val="1E2024"/>
-                </a:solidFill>
-                <a:latin typeface="Calibri"/>
-              </a:rPr>
-              <a:t>可以，只要都 4.x</a:t>
+            <a:off x="640080" y="3136392"/>
+            <a:ext cx="10972800" cy="1371600"/>
+          </a:xfrm>
+          <a:prstGeom prst="rect">
+            <a:avLst/>
+          </a:prstGeom>
+          <a:solidFill>
+            <a:srgbClr val="F3F1EC"/>
+          </a:solidFill>
+          <a:ln w="6350">
+            <a:solidFill>
+              <a:srgbClr val="E3E0D8"/>
+            </a:solidFill>
+          </a:ln>
+        </p:spPr>
+        <p:txBody>
+          <a:bodyPr wrap="square" lIns="146304" tIns="91440" bIns="91440">
+            <a:noAutofit/>
+          </a:bodyPr>
+          <a:lstStyle/>
+          <a:p>
+            <a:r>
+              <a:rPr sz="1350" b="0">
+                <a:solidFill>
+                  <a:srgbClr val="2C2C2A"/>
+                </a:solidFill>
+                <a:latin typeface="Calibri"/>
+              </a:rPr>
+              <a:t>client ↔ broker       協商，取交集最高</a:t>
+            </a:r>
+          </a:p>
+          <a:p>
+            <a:r>
+              <a:rPr sz="1350" b="0">
+                <a:solidFill>
+                  <a:srgbClr val="2C2C2A"/>
+                </a:solidFill>
+                <a:latin typeface="Calibri"/>
+              </a:rPr>
+              <a:t>broker ↔ controller   也協商（broker 當 client：heartbeat / registration）</a:t>
+            </a:r>
+          </a:p>
+          <a:p>
+            <a:r>
+              <a:rPr sz="1350" b="0">
+                <a:solidFill>
+                  <a:srgbClr val="2C2C2A"/>
+                </a:solidFill>
+                <a:latin typeface="Calibri"/>
+              </a:rPr>
+              <a:t>broker ↔ broker 複製   Fetch 由 MV 決定、ListOffsets 以 MV 為上限</a:t>
             </a:r>
           </a:p>
         </p:txBody>
@@ -6943,37 +6595,33 @@
         </p:nvSpPr>
         <p:spPr>
           <a:xfrm>
-            <a:off x="822960" y="4197096"/>
-            <a:ext cx="10515600" cy="493776"/>
-          </a:xfrm>
-          <a:prstGeom prst="rect">
-            <a:avLst/>
-          </a:prstGeom>
-          <a:noFill/>
-        </p:spPr>
-        <p:txBody>
-          <a:bodyPr wrap="square">
-            <a:noAutofit/>
-          </a:bodyPr>
-          <a:lstStyle/>
-          <a:p>
-            <a:r>
-              <a:rPr sz="1600" b="0">
-                <a:solidFill>
-                  <a:srgbClr val="1E2024"/>
-                </a:solidFill>
-                <a:latin typeface="Calibri"/>
-              </a:rPr>
-              <a:t>D.  </a:t>
-            </a:r>
-            <a:r>
-              <a:rPr sz="1600" b="0">
-                <a:solidFill>
-                  <a:srgbClr val="1E2024"/>
-                </a:solidFill>
-                <a:latin typeface="Calibri"/>
-              </a:rPr>
-              <a:t>看 broker 數量</a:t>
+            <a:off x="640080" y="4709160"/>
+            <a:ext cx="10972800" cy="877824"/>
+          </a:xfrm>
+          <a:prstGeom prst="rect">
+            <a:avLst/>
+          </a:prstGeom>
+          <a:solidFill>
+            <a:srgbClr val="E9F3DE"/>
+          </a:solidFill>
+          <a:ln>
+            <a:noFill/>
+          </a:ln>
+        </p:spPr>
+        <p:txBody>
+          <a:bodyPr wrap="square" lIns="146304" tIns="82296">
+            <a:noAutofit/>
+          </a:bodyPr>
+          <a:lstStyle/>
+          <a:p>
+            <a:r>
+              <a:rPr sz="1500" b="0">
+                <a:solidFill>
+                  <a:srgbClr val="27500A"/>
+                </a:solidFill>
+                <a:latin typeface="Calibri"/>
+              </a:rPr>
+              <a:t>MV 只影響複製用的 Fetch / ListOffsets；client、controller 那兩條都是協商</a:t>
             </a:r>
           </a:p>
         </p:txBody>
@@ -6986,28 +6634,76 @@
         </p:nvSpPr>
         <p:spPr>
           <a:xfrm>
-            <a:off x="640080" y="4910327"/>
-            <a:ext cx="10972800" cy="914400"/>
-          </a:xfrm>
-          <a:prstGeom prst="rect">
-            <a:avLst/>
-          </a:prstGeom>
-          <a:noFill/>
-        </p:spPr>
-        <p:txBody>
-          <a:bodyPr wrap="square">
-            <a:noAutofit/>
-          </a:bodyPr>
-          <a:lstStyle/>
-          <a:p>
-            <a:r>
-              <a:rPr sz="1400" b="0">
+            <a:off x="640080" y="6400800"/>
+            <a:ext cx="10972800" cy="384048"/>
+          </a:xfrm>
+          <a:prstGeom prst="rect">
+            <a:avLst/>
+          </a:prstGeom>
+          <a:noFill/>
+        </p:spPr>
+        <p:txBody>
+          <a:bodyPr wrap="square">
+            <a:noAutofit/>
+          </a:bodyPr>
+          <a:lstStyle/>
+          <a:p>
+            <a:r>
+              <a:rPr sz="1200" b="1">
                 <a:solidFill>
                   <a:srgbClr val="8A8A8A"/>
                 </a:solidFill>
                 <a:latin typeface="Calibri"/>
               </a:rPr>
-              <a:t>想一想 —— 下一頁公布答案</a:t>
+              <a:t>REF   </a:t>
+            </a:r>
+            <a:r>
+              <a:rPr sz="1200" b="0" u="sng">
+                <a:solidFill>
+                  <a:srgbClr val="185FA5"/>
+                </a:solidFill>
+                <a:latin typeface="Courier New"/>
+                <a:hlinkClick r:id="rId3"/>
+              </a:rPr>
+              <a:t>latestUsableVersion</a:t>
+            </a:r>
+            <a:r>
+              <a:rPr sz="1200" b="0">
+                <a:solidFill>
+                  <a:srgbClr val="8A8A8A"/>
+                </a:solidFill>
+                <a:latin typeface="Calibri"/>
+              </a:rPr>
+              <a:t>   ·   </a:t>
+            </a:r>
+            <a:r>
+              <a:rPr sz="1200" b="0" u="sng">
+                <a:solidFill>
+                  <a:srgbClr val="185FA5"/>
+                </a:solidFill>
+                <a:latin typeface="Courier New"/>
+                <a:hlinkClick r:id="rId4"/>
+              </a:rPr>
+              <a:t>fetchRequestVersion</a:t>
+            </a:r>
+            <a:r>
+              <a:rPr sz="1200" b="0">
+                <a:solidFill>
+                  <a:srgbClr val="8A8A8A"/>
+                </a:solidFill>
+                <a:latin typeface="Calibri"/>
+              </a:rPr>
+              <a:t>   ·   </a:t>
+            </a:r>
+            <a:r>
+              <a:rPr sz="1200" b="0" u="sng">
+                <a:solidFill>
+                  <a:srgbClr val="185FA5"/>
+                </a:solidFill>
+                <a:latin typeface="Courier New"/>
+                <a:hlinkClick r:id="rId5"/>
+              </a:rPr>
+              <a:t>javadoc</a:t>
             </a:r>
           </a:p>
         </p:txBody>
@@ -7059,7 +6755,7 @@
                 </a:solidFill>
                 <a:latin typeface="Calibri"/>
               </a:rPr>
-              <a:t>隨堂考 · 暖身　（正解）</a:t>
+              <a:t>隨堂考 · 暖身</a:t>
             </a:r>
           </a:p>
         </p:txBody>
@@ -7155,36 +6851,31 @@
           <a:prstGeom prst="rect">
             <a:avLst/>
           </a:prstGeom>
-          <a:solidFill>
-            <a:srgbClr val="E9F3DE"/>
-          </a:solidFill>
-          <a:ln>
-            <a:noFill/>
-          </a:ln>
-        </p:spPr>
-        <p:txBody>
-          <a:bodyPr wrap="square" lIns="128016" tIns="54864">
-            <a:noAutofit/>
-          </a:bodyPr>
-          <a:lstStyle/>
-          <a:p>
-            <a:r>
-              <a:rPr sz="1600" b="1">
-                <a:solidFill>
-                  <a:srgbClr val="27500A"/>
+          <a:noFill/>
+        </p:spPr>
+        <p:txBody>
+          <a:bodyPr wrap="square">
+            <a:noAutofit/>
+          </a:bodyPr>
+          <a:lstStyle/>
+          <a:p>
+            <a:r>
+              <a:rPr sz="1600" b="0">
+                <a:solidFill>
+                  <a:srgbClr val="1E2024"/>
                 </a:solidFill>
                 <a:latin typeface="Calibri"/>
               </a:rPr>
               <a:t>B.  </a:t>
             </a:r>
             <a:r>
-              <a:rPr sz="1600" b="1">
-                <a:solidFill>
-                  <a:srgbClr val="27500A"/>
-                </a:solidFill>
-                <a:latin typeface="Calibri"/>
-              </a:rPr>
-              <a:t>不行——client 長壽 + 要不停機，得溝通當下協商   ✓</a:t>
+              <a:rPr sz="1600" b="0">
+                <a:solidFill>
+                  <a:srgbClr val="1E2024"/>
+                </a:solidFill>
+                <a:latin typeface="Calibri"/>
+              </a:rPr>
+              <a:t>不行——client 長壽 + 要不停機，得溝通當下協商</a:t>
             </a:r>
           </a:p>
         </p:txBody>
@@ -7298,85 +6989,13 @@
           <a:lstStyle/>
           <a:p>
             <a:r>
-              <a:rPr sz="1400" b="1">
-                <a:solidFill>
-                  <a:srgbClr val="27500A"/>
-                </a:solidFill>
-                <a:latin typeface="Calibri"/>
-              </a:rPr>
-              <a:t>正解 B — </a:t>
-            </a:r>
-            <a:r>
               <a:rPr sz="1400" b="0">
                 <a:solidFill>
-                  <a:srgbClr val="1E2024"/>
-                </a:solidFill>
-                <a:latin typeface="Calibri"/>
-              </a:rPr>
-              <a:t>client 嵌在各 app、超長壽，混版是常態；要不停機升級就得每條連線各自選版本。</a:t>
-            </a:r>
-          </a:p>
-        </p:txBody>
-      </p:sp>
-      <p:sp>
-        <p:nvSpPr>
-          <p:cNvPr id="9" name="TextBox 8"/>
-          <p:cNvSpPr txBox="1"/>
-          <p:nvPr/>
-        </p:nvSpPr>
-        <p:spPr>
-          <a:xfrm>
-            <a:off x="640080" y="6400800"/>
-            <a:ext cx="10972800" cy="384048"/>
-          </a:xfrm>
-          <a:prstGeom prst="rect">
-            <a:avLst/>
-          </a:prstGeom>
-          <a:noFill/>
-        </p:spPr>
-        <p:txBody>
-          <a:bodyPr wrap="square">
-            <a:noAutofit/>
-          </a:bodyPr>
-          <a:lstStyle/>
-          <a:p>
-            <a:r>
-              <a:rPr sz="1200" b="1">
-                <a:solidFill>
                   <a:srgbClr val="8A8A8A"/>
                 </a:solidFill>
                 <a:latin typeface="Calibri"/>
               </a:rPr>
-              <a:t>REF   </a:t>
-            </a:r>
-            <a:r>
-              <a:rPr sz="1200" b="0" u="sng">
-                <a:solidFill>
-                  <a:srgbClr val="185FA5"/>
-                </a:solidFill>
-                <a:latin typeface="Courier New"/>
-                <a:hlinkClick r:id="rId2"/>
-              </a:rPr>
-              <a:t>protocol.md:94</a:t>
-            </a:r>
-            <a:r>
-              <a:rPr sz="1200" b="0">
-                <a:solidFill>
-                  <a:srgbClr val="8A8A8A"/>
-                </a:solidFill>
-                <a:latin typeface="Calibri"/>
-              </a:rPr>
-              <a:t>   ·   </a:t>
-            </a:r>
-            <a:r>
-              <a:rPr sz="1200" b="0" u="sng">
-                <a:solidFill>
-                  <a:srgbClr val="185FA5"/>
-                </a:solidFill>
-                <a:latin typeface="Calibri"/>
-                <a:hlinkClick r:id="rId3"/>
-              </a:rPr>
-              <a:t>KIP-896</a:t>
+              <a:t>想一想 —— 下一頁公布答案</a:t>
             </a:r>
           </a:p>
         </p:txBody>
@@ -7428,7 +7047,7 @@
                 </a:solidFill>
                 <a:latin typeface="Calibri"/>
               </a:rPr>
-              <a:t>Part 2 · 機制</a:t>
+              <a:t>隨堂考 · 暖身　（正解）</a:t>
             </a:r>
           </a:p>
         </p:txBody>
@@ -7442,55 +7061,74 @@
         <p:spPr>
           <a:xfrm>
             <a:off x="640080" y="841248"/>
-            <a:ext cx="10972800" cy="1005840"/>
-          </a:xfrm>
-          <a:prstGeom prst="rect">
-            <a:avLst/>
-          </a:prstGeom>
-          <a:noFill/>
-        </p:spPr>
-        <p:txBody>
-          <a:bodyPr wrap="square">
-            <a:noAutofit/>
-          </a:bodyPr>
-          <a:lstStyle/>
-          <a:p>
-            <a:r>
-              <a:rPr sz="3200" b="1">
+            <a:ext cx="10972800" cy="1188720"/>
+          </a:xfrm>
+          <a:prstGeom prst="rect">
+            <a:avLst/>
+          </a:prstGeom>
+          <a:noFill/>
+        </p:spPr>
+        <p:txBody>
+          <a:bodyPr wrap="square">
+            <a:noAutofit/>
+          </a:bodyPr>
+          <a:lstStyle/>
+          <a:p>
+            <a:r>
+              <a:rPr sz="2600" b="1">
                 <a:solidFill>
                   <a:srgbClr val="1E2024"/>
                 </a:solidFill>
                 <a:latin typeface="Calibri"/>
               </a:rPr>
-              <a:t>版本怎麼選：先握手，再看 Builder 留多少自由度</a:t>
-            </a:r>
-          </a:p>
-        </p:txBody>
-      </p:sp>
-      <p:pic>
-        <p:nvPicPr>
-          <p:cNvPr id="4" name="Picture 3" descr="arrows-split.png"/>
-          <p:cNvPicPr>
-            <a:picLocks noChangeAspect="1"/>
-          </p:cNvPicPr>
-          <p:nvPr/>
-        </p:nvPicPr>
-        <p:blipFill>
-          <a:blip r:embed="rId2"/>
-          <a:stretch>
-            <a:fillRect/>
-          </a:stretch>
-        </p:blipFill>
-        <p:spPr>
-          <a:xfrm>
-            <a:off x="658368" y="2176272"/>
-            <a:ext cx="274320" cy="274320"/>
-          </a:xfrm>
-          <a:prstGeom prst="rect">
-            <a:avLst/>
-          </a:prstGeom>
-        </p:spPr>
-      </p:pic>
+              <a:t>可以「一個版本打天下」嗎？</a:t>
+            </a:r>
+          </a:p>
+        </p:txBody>
+      </p:sp>
+      <p:sp>
+        <p:nvSpPr>
+          <p:cNvPr id="4" name="TextBox 3"/>
+          <p:cNvSpPr txBox="1"/>
+          <p:nvPr/>
+        </p:nvSpPr>
+        <p:spPr>
+          <a:xfrm>
+            <a:off x="822960" y="2331720"/>
+            <a:ext cx="10515600" cy="493776"/>
+          </a:xfrm>
+          <a:prstGeom prst="rect">
+            <a:avLst/>
+          </a:prstGeom>
+          <a:noFill/>
+        </p:spPr>
+        <p:txBody>
+          <a:bodyPr wrap="square">
+            <a:noAutofit/>
+          </a:bodyPr>
+          <a:lstStyle/>
+          <a:p>
+            <a:r>
+              <a:rPr sz="1600" b="0">
+                <a:solidFill>
+                  <a:srgbClr val="1E2024"/>
+                </a:solidFill>
+                <a:latin typeface="Calibri"/>
+              </a:rPr>
+              <a:t>A.  </a:t>
+            </a:r>
+            <a:r>
+              <a:rPr sz="1600" b="0">
+                <a:solidFill>
+                  <a:srgbClr val="1E2024"/>
+                </a:solidFill>
+                <a:latin typeface="Calibri"/>
+              </a:rPr>
+              <a:t>可以，大家同一版一起升</a:t>
+            </a:r>
+          </a:p>
+        </p:txBody>
+      </p:sp>
       <p:sp>
         <p:nvSpPr>
           <p:cNvPr id="5" name="TextBox 4"/>
@@ -7499,91 +7137,85 @@
         </p:nvSpPr>
         <p:spPr>
           <a:xfrm>
-            <a:off x="1078992" y="2148840"/>
+            <a:off x="822960" y="2953512"/>
             <a:ext cx="10515600" cy="493776"/>
           </a:xfrm>
           <a:prstGeom prst="rect">
             <a:avLst/>
           </a:prstGeom>
-          <a:noFill/>
-        </p:spPr>
-        <p:txBody>
-          <a:bodyPr wrap="square">
-            <a:noAutofit/>
-          </a:bodyPr>
-          <a:lstStyle/>
-          <a:p>
-            <a:r>
-              <a:rPr sz="1650" b="0">
+          <a:solidFill>
+            <a:srgbClr val="E9F3DE"/>
+          </a:solidFill>
+          <a:ln>
+            <a:noFill/>
+          </a:ln>
+        </p:spPr>
+        <p:txBody>
+          <a:bodyPr wrap="square" lIns="128016" tIns="54864">
+            <a:noAutofit/>
+          </a:bodyPr>
+          <a:lstStyle/>
+          <a:p>
+            <a:r>
+              <a:rPr sz="1600" b="1">
+                <a:solidFill>
+                  <a:srgbClr val="27500A"/>
+                </a:solidFill>
+                <a:latin typeface="Calibri"/>
+              </a:rPr>
+              <a:t>B.  </a:t>
+            </a:r>
+            <a:r>
+              <a:rPr sz="1600" b="1">
+                <a:solidFill>
+                  <a:srgbClr val="27500A"/>
+                </a:solidFill>
+                <a:latin typeface="Calibri"/>
+              </a:rPr>
+              <a:t>不行——client 長壽 + 要不停機，得溝通當下協商   ✓</a:t>
+            </a:r>
+          </a:p>
+        </p:txBody>
+      </p:sp>
+      <p:sp>
+        <p:nvSpPr>
+          <p:cNvPr id="6" name="TextBox 5"/>
+          <p:cNvSpPr txBox="1"/>
+          <p:nvPr/>
+        </p:nvSpPr>
+        <p:spPr>
+          <a:xfrm>
+            <a:off x="822960" y="3575304"/>
+            <a:ext cx="10515600" cy="493776"/>
+          </a:xfrm>
+          <a:prstGeom prst="rect">
+            <a:avLst/>
+          </a:prstGeom>
+          <a:noFill/>
+        </p:spPr>
+        <p:txBody>
+          <a:bodyPr wrap="square">
+            <a:noAutofit/>
+          </a:bodyPr>
+          <a:lstStyle/>
+          <a:p>
+            <a:r>
+              <a:rPr sz="1600" b="0">
                 <a:solidFill>
                   <a:srgbClr val="1E2024"/>
                 </a:solidFill>
                 <a:latin typeface="Calibri"/>
               </a:rPr>
-              <a:t>每條連線底層都先做 ApiVersions 握手，交換各自支援的版本範圍</a:t>
-            </a:r>
-          </a:p>
-        </p:txBody>
-      </p:sp>
-      <p:sp>
-        <p:nvSpPr>
-          <p:cNvPr id="6" name="TextBox 5"/>
-          <p:cNvSpPr txBox="1"/>
-          <p:nvPr/>
-        </p:nvSpPr>
-        <p:spPr>
-          <a:xfrm>
-            <a:off x="640080" y="2788920"/>
-            <a:ext cx="10972800" cy="1097280"/>
-          </a:xfrm>
-          <a:prstGeom prst="rect">
-            <a:avLst/>
-          </a:prstGeom>
-          <a:solidFill>
-            <a:srgbClr val="F3F1EC"/>
-          </a:solidFill>
-          <a:ln w="6350">
-            <a:solidFill>
-              <a:srgbClr val="E3E0D8"/>
-            </a:solidFill>
-          </a:ln>
-        </p:spPr>
-        <p:txBody>
-          <a:bodyPr wrap="square" lIns="146304" tIns="91440" bIns="91440">
-            <a:noAutofit/>
-          </a:bodyPr>
-          <a:lstStyle/>
-          <a:p>
-            <a:r>
-              <a:rPr sz="1350" b="0">
-                <a:solidFill>
-                  <a:srgbClr val="2C2C2A"/>
-                </a:solidFill>
-                <a:latin typeface="Calibri"/>
-              </a:rPr>
-              <a:t>Builder 全範圍   → 協商挑交集最高（多數 RPC）</a:t>
-            </a:r>
-          </a:p>
-          <a:p>
-            <a:r>
-              <a:rPr sz="1350" b="0">
-                <a:solidFill>
-                  <a:srgbClr val="2C2C2A"/>
-                </a:solidFill>
-                <a:latin typeface="Calibri"/>
-              </a:rPr>
-              <a:t>Builder pin 成 MV → MV 決定（複製用 Fetch）</a:t>
-            </a:r>
-          </a:p>
-          <a:p>
-            <a:r>
-              <a:rPr sz="1350" b="0">
-                <a:solidFill>
-                  <a:srgbClr val="2C2C2A"/>
-                </a:solidFill>
-                <a:latin typeface="Calibri"/>
-              </a:rPr>
-              <a:t>Builder 寫死常數  → 固定（OffsetsForLeaderEpoch）</a:t>
+              <a:t>C.  </a:t>
+            </a:r>
+            <a:r>
+              <a:rPr sz="1600" b="0">
+                <a:solidFill>
+                  <a:srgbClr val="1E2024"/>
+                </a:solidFill>
+                <a:latin typeface="Calibri"/>
+              </a:rPr>
+              <a:t>可以，只要都 4.x</a:t>
             </a:r>
           </a:p>
         </p:txBody>
@@ -7596,28 +7228,37 @@
         </p:nvSpPr>
         <p:spPr>
           <a:xfrm>
-            <a:off x="640080" y="4087368"/>
-            <a:ext cx="10972800" cy="438912"/>
-          </a:xfrm>
-          <a:prstGeom prst="rect">
-            <a:avLst/>
-          </a:prstGeom>
-          <a:noFill/>
-        </p:spPr>
-        <p:txBody>
-          <a:bodyPr wrap="square">
-            <a:noAutofit/>
-          </a:bodyPr>
-          <a:lstStyle/>
-          <a:p>
-            <a:r>
-              <a:rPr sz="1500" b="0">
-                <a:solidFill>
-                  <a:srgbClr val="5F5E5A"/>
-                </a:solidFill>
-                <a:latin typeface="Calibri"/>
-              </a:rPr>
-              <a:t>決定版本的不是「哪條路徑」，而是那支 request 的 Builder 給多少版本空間。</a:t>
+            <a:off x="822960" y="4197096"/>
+            <a:ext cx="10515600" cy="493776"/>
+          </a:xfrm>
+          <a:prstGeom prst="rect">
+            <a:avLst/>
+          </a:prstGeom>
+          <a:noFill/>
+        </p:spPr>
+        <p:txBody>
+          <a:bodyPr wrap="square">
+            <a:noAutofit/>
+          </a:bodyPr>
+          <a:lstStyle/>
+          <a:p>
+            <a:r>
+              <a:rPr sz="1600" b="0">
+                <a:solidFill>
+                  <a:srgbClr val="1E2024"/>
+                </a:solidFill>
+                <a:latin typeface="Calibri"/>
+              </a:rPr>
+              <a:t>D.  </a:t>
+            </a:r>
+            <a:r>
+              <a:rPr sz="1600" b="0">
+                <a:solidFill>
+                  <a:srgbClr val="1E2024"/>
+                </a:solidFill>
+                <a:latin typeface="Calibri"/>
+              </a:rPr>
+              <a:t>看 broker 數量</a:t>
             </a:r>
           </a:p>
         </p:txBody>
@@ -7625,6 +7266,49 @@
       <p:sp>
         <p:nvSpPr>
           <p:cNvPr id="8" name="TextBox 7"/>
+          <p:cNvSpPr txBox="1"/>
+          <p:nvPr/>
+        </p:nvSpPr>
+        <p:spPr>
+          <a:xfrm>
+            <a:off x="640080" y="4910327"/>
+            <a:ext cx="10972800" cy="914400"/>
+          </a:xfrm>
+          <a:prstGeom prst="rect">
+            <a:avLst/>
+          </a:prstGeom>
+          <a:noFill/>
+        </p:spPr>
+        <p:txBody>
+          <a:bodyPr wrap="square">
+            <a:noAutofit/>
+          </a:bodyPr>
+          <a:lstStyle/>
+          <a:p>
+            <a:r>
+              <a:rPr sz="1400" b="1">
+                <a:solidFill>
+                  <a:srgbClr val="27500A"/>
+                </a:solidFill>
+                <a:latin typeface="Calibri"/>
+              </a:rPr>
+              <a:t>正解 B — </a:t>
+            </a:r>
+            <a:r>
+              <a:rPr sz="1400" b="0">
+                <a:solidFill>
+                  <a:srgbClr val="1E2024"/>
+                </a:solidFill>
+                <a:latin typeface="Calibri"/>
+              </a:rPr>
+              <a:t>client 嵌在各 app、超長壽，混版是常態；要不停機升級就得每條連線各自選版本。</a:t>
+            </a:r>
+          </a:p>
+        </p:txBody>
+      </p:sp>
+      <p:sp>
+        <p:nvSpPr>
+          <p:cNvPr id="9" name="TextBox 8"/>
           <p:cNvSpPr txBox="1"/>
           <p:nvPr/>
         </p:nvSpPr>
@@ -7659,28 +7343,28 @@
                   <a:srgbClr val="185FA5"/>
                 </a:solidFill>
                 <a:latin typeface="Courier New"/>
+                <a:hlinkClick r:id="rId2"/>
+              </a:rPr>
+              <a:t>protocol.md:94</a:t>
+            </a:r>
+            <a:r>
+              <a:rPr sz="1200" b="0">
+                <a:solidFill>
+                  <a:srgbClr val="8A8A8A"/>
+                </a:solidFill>
+                <a:latin typeface="Calibri"/>
+              </a:rPr>
+              <a:t>   ·   </a:t>
+            </a:r>
+            <a:r>
+              <a:rPr sz="1200" b="0" u="sng">
+                <a:solidFill>
+                  <a:srgbClr val="185FA5"/>
+                </a:solidFill>
+                <a:latin typeface="Calibri"/>
                 <a:hlinkClick r:id="rId3"/>
               </a:rPr>
-              <a:t>NetworkClient</a:t>
-            </a:r>
-            <a:r>
-              <a:rPr sz="1200" b="0">
-                <a:solidFill>
-                  <a:srgbClr val="8A8A8A"/>
-                </a:solidFill>
-                <a:latin typeface="Calibri"/>
-              </a:rPr>
-              <a:t>   ·   </a:t>
-            </a:r>
-            <a:r>
-              <a:rPr sz="1200" b="0" u="sng">
-                <a:solidFill>
-                  <a:srgbClr val="185FA5"/>
-                </a:solidFill>
-                <a:latin typeface="Courier New"/>
-                <a:hlinkClick r:id="rId4"/>
-              </a:rPr>
-              <a:t>latestUsableVersion</a:t>
+              <a:t>KIP-896</a:t>
             </a:r>
           </a:p>
         </p:txBody>
@@ -7732,7 +7416,7 @@
                 </a:solidFill>
                 <a:latin typeface="Calibri"/>
               </a:rPr>
-              <a:t>Part 2 · 三個角色</a:t>
+              <a:t>隨堂考 · 核心</a:t>
             </a:r>
           </a:p>
         </p:txBody>
@@ -7746,55 +7430,74 @@
         <p:spPr>
           <a:xfrm>
             <a:off x="640080" y="841248"/>
-            <a:ext cx="10972800" cy="1005840"/>
-          </a:xfrm>
-          <a:prstGeom prst="rect">
-            <a:avLst/>
-          </a:prstGeom>
-          <a:noFill/>
-        </p:spPr>
-        <p:txBody>
-          <a:bodyPr wrap="square">
-            <a:noAutofit/>
-          </a:bodyPr>
-          <a:lstStyle/>
-          <a:p>
-            <a:r>
-              <a:rPr sz="3200" b="1">
+            <a:ext cx="10972800" cy="1188720"/>
+          </a:xfrm>
+          <a:prstGeom prst="rect">
+            <a:avLst/>
+          </a:prstGeom>
+          <a:noFill/>
+        </p:spPr>
+        <p:txBody>
+          <a:bodyPr wrap="square">
+            <a:noAutofit/>
+          </a:bodyPr>
+          <a:lstStyle/>
+          <a:p>
+            <a:r>
+              <a:rPr sz="2600" b="1">
                 <a:solidFill>
                   <a:srgbClr val="1E2024"/>
                 </a:solidFill>
                 <a:latin typeface="Calibri"/>
               </a:rPr>
-              <a:t>三個角色，版本機制不同</a:t>
-            </a:r>
-          </a:p>
-        </p:txBody>
-      </p:sp>
-      <p:pic>
-        <p:nvPicPr>
-          <p:cNvPr id="4" name="Picture 3" descr="arrows-split.png"/>
-          <p:cNvPicPr>
-            <a:picLocks noChangeAspect="1"/>
-          </p:cNvPicPr>
-          <p:nvPr/>
-        </p:nvPicPr>
-        <p:blipFill>
-          <a:blip r:embed="rId2"/>
-          <a:stretch>
-            <a:fillRect/>
-          </a:stretch>
-        </p:blipFill>
-        <p:spPr>
-          <a:xfrm>
-            <a:off x="658368" y="2176272"/>
-            <a:ext cx="274320" cy="274320"/>
-          </a:xfrm>
-          <a:prstGeom prst="rect">
-            <a:avLst/>
-          </a:prstGeom>
-        </p:spPr>
-      </p:pic>
+              <a:t>replica fetch（broker↔broker）的 Fetch 版本怎麼決定？</a:t>
+            </a:r>
+          </a:p>
+        </p:txBody>
+      </p:sp>
+      <p:sp>
+        <p:nvSpPr>
+          <p:cNvPr id="4" name="TextBox 3"/>
+          <p:cNvSpPr txBox="1"/>
+          <p:nvPr/>
+        </p:nvSpPr>
+        <p:spPr>
+          <a:xfrm>
+            <a:off x="822960" y="2331720"/>
+            <a:ext cx="10515600" cy="493776"/>
+          </a:xfrm>
+          <a:prstGeom prst="rect">
+            <a:avLst/>
+          </a:prstGeom>
+          <a:noFill/>
+        </p:spPr>
+        <p:txBody>
+          <a:bodyPr wrap="square">
+            <a:noAutofit/>
+          </a:bodyPr>
+          <a:lstStyle/>
+          <a:p>
+            <a:r>
+              <a:rPr sz="1600" b="0">
+                <a:solidFill>
+                  <a:srgbClr val="1E2024"/>
+                </a:solidFill>
+                <a:latin typeface="Calibri"/>
+              </a:rPr>
+              <a:t>A.  </a:t>
+            </a:r>
+            <a:r>
+              <a:rPr sz="1600" b="0">
+                <a:solidFill>
+                  <a:srgbClr val="1E2024"/>
+                </a:solidFill>
+                <a:latin typeface="Calibri"/>
+              </a:rPr>
+              <a:t>兩 broker ApiVersions 協商取交集</a:t>
+            </a:r>
+          </a:p>
+        </p:txBody>
+      </p:sp>
       <p:sp>
         <p:nvSpPr>
           <p:cNvPr id="5" name="TextBox 4"/>
@@ -7803,7 +7506,7 @@
         </p:nvSpPr>
         <p:spPr>
           <a:xfrm>
-            <a:off x="1078992" y="2148840"/>
+            <a:off x="822960" y="2953512"/>
             <a:ext cx="10515600" cy="493776"/>
           </a:xfrm>
           <a:prstGeom prst="rect">
@@ -7818,41 +7521,69 @@
           <a:lstStyle/>
           <a:p>
             <a:r>
-              <a:rPr sz="1650" b="0">
+              <a:rPr sz="1600" b="0">
                 <a:solidFill>
                   <a:srgbClr val="1E2024"/>
                 </a:solidFill>
                 <a:latin typeface="Calibri"/>
               </a:rPr>
-              <a:t>client ↔ broker：ApiVersions 協商，取交集最高</a:t>
-            </a:r>
-          </a:p>
-        </p:txBody>
-      </p:sp>
-      <p:pic>
-        <p:nvPicPr>
-          <p:cNvPr id="6" name="Picture 5" descr="server-2.png"/>
-          <p:cNvPicPr>
-            <a:picLocks noChangeAspect="1"/>
-          </p:cNvPicPr>
-          <p:nvPr/>
-        </p:nvPicPr>
-        <p:blipFill>
-          <a:blip r:embed="rId3"/>
-          <a:stretch>
-            <a:fillRect/>
-          </a:stretch>
-        </p:blipFill>
-        <p:spPr>
-          <a:xfrm>
-            <a:off x="658368" y="2816352"/>
-            <a:ext cx="274320" cy="274320"/>
-          </a:xfrm>
-          <a:prstGeom prst="rect">
-            <a:avLst/>
-          </a:prstGeom>
-        </p:spPr>
-      </p:pic>
+              <a:t>B.  </a:t>
+            </a:r>
+            <a:r>
+              <a:rPr sz="1600" b="0">
+                <a:solidFill>
+                  <a:srgbClr val="1E2024"/>
+                </a:solidFill>
+                <a:latin typeface="Calibri"/>
+              </a:rPr>
+              <a:t>由 finalized metadata.version 決定</a:t>
+            </a:r>
+          </a:p>
+        </p:txBody>
+      </p:sp>
+      <p:sp>
+        <p:nvSpPr>
+          <p:cNvPr id="6" name="TextBox 5"/>
+          <p:cNvSpPr txBox="1"/>
+          <p:nvPr/>
+        </p:nvSpPr>
+        <p:spPr>
+          <a:xfrm>
+            <a:off x="822960" y="3575304"/>
+            <a:ext cx="10515600" cy="493776"/>
+          </a:xfrm>
+          <a:prstGeom prst="rect">
+            <a:avLst/>
+          </a:prstGeom>
+          <a:noFill/>
+        </p:spPr>
+        <p:txBody>
+          <a:bodyPr wrap="square">
+            <a:noAutofit/>
+          </a:bodyPr>
+          <a:lstStyle/>
+          <a:p>
+            <a:r>
+              <a:rPr sz="1600" b="0">
+                <a:solidFill>
+                  <a:srgbClr val="1E2024"/>
+                </a:solidFill>
+                <a:latin typeface="Calibri"/>
+              </a:rPr>
+              <a:t>C.  </a:t>
+            </a:r>
+            <a:r>
+              <a:rPr sz="1600" b="0">
+                <a:solidFill>
+                  <a:srgbClr val="1E2024"/>
+                </a:solidFill>
+                <a:latin typeface="Calibri"/>
+              </a:rPr>
+              <a:t>永遠用最新版</a:t>
+            </a:r>
+          </a:p>
+        </p:txBody>
+      </p:sp>
       <p:sp>
         <p:nvSpPr>
           <p:cNvPr id="7" name="TextBox 6"/>
@@ -7861,207 +7592,71 @@
         </p:nvSpPr>
         <p:spPr>
           <a:xfrm>
-            <a:off x="1078992" y="2788920"/>
-            <a:ext cx="10515600" cy="841248"/>
-          </a:xfrm>
-          <a:prstGeom prst="rect">
-            <a:avLst/>
-          </a:prstGeom>
-          <a:noFill/>
-        </p:spPr>
-        <p:txBody>
-          <a:bodyPr wrap="square">
-            <a:noAutofit/>
-          </a:bodyPr>
-          <a:lstStyle/>
-          <a:p>
-            <a:r>
-              <a:rPr sz="1650" b="0">
+            <a:off x="822960" y="4197096"/>
+            <a:ext cx="10515600" cy="493776"/>
+          </a:xfrm>
+          <a:prstGeom prst="rect">
+            <a:avLst/>
+          </a:prstGeom>
+          <a:noFill/>
+        </p:spPr>
+        <p:txBody>
+          <a:bodyPr wrap="square">
+            <a:noAutofit/>
+          </a:bodyPr>
+          <a:lstStyle/>
+          <a:p>
+            <a:r>
+              <a:rPr sz="1600" b="0">
                 <a:solidFill>
                   <a:srgbClr val="1E2024"/>
                 </a:solidFill>
                 <a:latin typeface="Calibri"/>
               </a:rPr>
-              <a:t>broker ↔ controller：也是協商（broker 對 controller 當 client：heartbeat / registration）</a:t>
-            </a:r>
-          </a:p>
-        </p:txBody>
-      </p:sp>
-      <p:pic>
-        <p:nvPicPr>
-          <p:cNvPr id="8" name="Picture 7" descr="database.png"/>
-          <p:cNvPicPr>
-            <a:picLocks noChangeAspect="1"/>
-          </p:cNvPicPr>
-          <p:nvPr/>
-        </p:nvPicPr>
-        <p:blipFill>
-          <a:blip r:embed="rId4"/>
-          <a:stretch>
-            <a:fillRect/>
-          </a:stretch>
-        </p:blipFill>
-        <p:spPr>
-          <a:xfrm>
-            <a:off x="658368" y="3803904"/>
-            <a:ext cx="274320" cy="274320"/>
-          </a:xfrm>
-          <a:prstGeom prst="rect">
-            <a:avLst/>
-          </a:prstGeom>
-        </p:spPr>
-      </p:pic>
-      <p:sp>
-        <p:nvSpPr>
-          <p:cNvPr id="9" name="TextBox 8"/>
-          <p:cNvSpPr txBox="1"/>
-          <p:nvPr/>
-        </p:nvSpPr>
-        <p:spPr>
-          <a:xfrm>
-            <a:off x="1078992" y="3776472"/>
-            <a:ext cx="10515600" cy="1188720"/>
-          </a:xfrm>
-          <a:prstGeom prst="rect">
-            <a:avLst/>
-          </a:prstGeom>
-          <a:noFill/>
-        </p:spPr>
-        <p:txBody>
-          <a:bodyPr wrap="square">
-            <a:noAutofit/>
-          </a:bodyPr>
-          <a:lstStyle/>
-          <a:p>
-            <a:r>
-              <a:rPr sz="1650" b="0">
+              <a:t>D.  </a:t>
+            </a:r>
+            <a:r>
+              <a:rPr sz="1600" b="0">
                 <a:solidFill>
                   <a:srgbClr val="1E2024"/>
                 </a:solidFill>
                 <a:latin typeface="Calibri"/>
               </a:rPr>
-              <a:t>broker ↔ broker 複製：Fetch 由 MV 直接 pin、ListOffsets 以 MV 為上限、OffsetsForLeaderEpoch 寫死 v4</a:t>
-            </a:r>
-          </a:p>
-        </p:txBody>
-      </p:sp>
-      <p:sp>
-        <p:nvSpPr>
-          <p:cNvPr id="10" name="TextBox 9"/>
-          <p:cNvSpPr txBox="1"/>
-          <p:nvPr/>
-        </p:nvSpPr>
-        <p:spPr>
-          <a:xfrm>
-            <a:off x="640080" y="5111496"/>
-            <a:ext cx="10972800" cy="877824"/>
-          </a:xfrm>
-          <a:prstGeom prst="rect">
-            <a:avLst/>
-          </a:prstGeom>
-          <a:solidFill>
-            <a:srgbClr val="E9F3DE"/>
-          </a:solidFill>
-          <a:ln>
-            <a:noFill/>
-          </a:ln>
-        </p:spPr>
-        <p:txBody>
-          <a:bodyPr wrap="square" lIns="146304" tIns="82296">
-            <a:noAutofit/>
-          </a:bodyPr>
-          <a:lstStyle/>
-          <a:p>
-            <a:r>
-              <a:rPr sz="1500" b="0">
-                <a:solidFill>
-                  <a:srgbClr val="27500A"/>
-                </a:solidFill>
-                <a:latin typeface="Calibri"/>
-              </a:rPr>
-              <a:t>MV 角色其實很窄：只影響複製的 Fetch / ListOffsets（ListOffsets＝把時間戳／earliest/latest 換成 offset）；其餘多半是協商</a:t>
-            </a:r>
-          </a:p>
-        </p:txBody>
-      </p:sp>
-      <p:sp>
-        <p:nvSpPr>
-          <p:cNvPr id="11" name="TextBox 10"/>
-          <p:cNvSpPr txBox="1"/>
-          <p:nvPr/>
-        </p:nvSpPr>
-        <p:spPr>
-          <a:xfrm>
-            <a:off x="640080" y="6400800"/>
-            <a:ext cx="10972800" cy="384048"/>
-          </a:xfrm>
-          <a:prstGeom prst="rect">
-            <a:avLst/>
-          </a:prstGeom>
-          <a:noFill/>
-        </p:spPr>
-        <p:txBody>
-          <a:bodyPr wrap="square">
-            <a:noAutofit/>
-          </a:bodyPr>
-          <a:lstStyle/>
-          <a:p>
-            <a:r>
-              <a:rPr sz="1200" b="1">
+              <a:t>controller 每次指定</a:t>
+            </a:r>
+          </a:p>
+        </p:txBody>
+      </p:sp>
+      <p:sp>
+        <p:nvSpPr>
+          <p:cNvPr id="8" name="TextBox 7"/>
+          <p:cNvSpPr txBox="1"/>
+          <p:nvPr/>
+        </p:nvSpPr>
+        <p:spPr>
+          <a:xfrm>
+            <a:off x="640080" y="4910327"/>
+            <a:ext cx="10972800" cy="914400"/>
+          </a:xfrm>
+          <a:prstGeom prst="rect">
+            <a:avLst/>
+          </a:prstGeom>
+          <a:noFill/>
+        </p:spPr>
+        <p:txBody>
+          <a:bodyPr wrap="square">
+            <a:noAutofit/>
+          </a:bodyPr>
+          <a:lstStyle/>
+          <a:p>
+            <a:r>
+              <a:rPr sz="1400" b="0">
                 <a:solidFill>
                   <a:srgbClr val="8A8A8A"/>
                 </a:solidFill>
                 <a:latin typeface="Calibri"/>
               </a:rPr>
-              <a:t>REF   </a:t>
-            </a:r>
-            <a:r>
-              <a:rPr sz="1200" b="0" u="sng">
-                <a:solidFill>
-                  <a:srgbClr val="185FA5"/>
-                </a:solidFill>
-                <a:latin typeface="Courier New"/>
-                <a:hlinkClick r:id="rId5"/>
-              </a:rPr>
-              <a:t>MetadataVersion.java:31 javadoc</a:t>
-            </a:r>
-            <a:r>
-              <a:rPr sz="1200" b="0">
-                <a:solidFill>
-                  <a:srgbClr val="8A8A8A"/>
-                </a:solidFill>
-                <a:latin typeface="Calibri"/>
-              </a:rPr>
-              <a:t>   ·   </a:t>
-            </a:r>
-            <a:r>
-              <a:rPr sz="1200" b="0" u="sng">
-                <a:solidFill>
-                  <a:srgbClr val="185FA5"/>
-                </a:solidFill>
-                <a:latin typeface="Courier New"/>
-                <a:hlinkClick r:id="rId6"/>
-              </a:rPr>
-              <a:t>RemoteLeaderEndPoint.scala:215</a:t>
-            </a:r>
-            <a:r>
-              <a:rPr sz="1200" b="0">
-                <a:solidFill>
-                  <a:srgbClr val="8A8A8A"/>
-                </a:solidFill>
-                <a:latin typeface="Calibri"/>
-              </a:rPr>
-              <a:t>   ·   </a:t>
-            </a:r>
-            <a:r>
-              <a:rPr sz="1200" b="0" u="sng">
-                <a:solidFill>
-                  <a:srgbClr val="185FA5"/>
-                </a:solidFill>
-                <a:latin typeface="Courier New"/>
-                <a:hlinkClick r:id="rId7"/>
-              </a:rPr>
-              <a:t>SimpleBuilder</a:t>
+              <a:t>想一想 —— 下一頁公布答案</a:t>
             </a:r>
           </a:p>
         </p:txBody>

--- a/study/version-control/kafka-version-negotiation.pptx
+++ b/study/version-control/kafka-version-negotiation.pptx
@@ -6201,7 +6201,7 @@
                 </a:solidFill>
                 <a:latin typeface="Calibri"/>
               </a:rPr>
-              <a:t>Part 1 · 具體例子</a:t>
+              <a:t>Part 1 · 選版機制</a:t>
             </a:r>
           </a:p>
         </p:txBody>
@@ -6214,69 +6214,35 @@
         </p:nvSpPr>
         <p:spPr>
           <a:xfrm>
-            <a:off x="640080" y="822960"/>
-            <a:ext cx="10972800" cy="640080"/>
-          </a:xfrm>
-          <a:prstGeom prst="rect">
-            <a:avLst/>
-          </a:prstGeom>
-          <a:noFill/>
-        </p:spPr>
-        <p:txBody>
-          <a:bodyPr wrap="square">
-            <a:noAutofit/>
-          </a:bodyPr>
-          <a:lstStyle/>
-          <a:p>
-            <a:r>
-              <a:rPr sz="3000" b="1">
+            <a:off x="640080" y="841248"/>
+            <a:ext cx="10972800" cy="1005840"/>
+          </a:xfrm>
+          <a:prstGeom prst="rect">
+            <a:avLst/>
+          </a:prstGeom>
+          <a:noFill/>
+        </p:spPr>
+        <p:txBody>
+          <a:bodyPr wrap="square">
+            <a:noAutofit/>
+          </a:bodyPr>
+          <a:lstStyle/>
+          <a:p>
+            <a:r>
+              <a:rPr sz="3200" b="1">
                 <a:solidFill>
                   <a:srgbClr val="1E2024"/>
                 </a:solidFill>
                 <a:latin typeface="Calibri"/>
               </a:rPr>
-              <a:t>為什麼一個版本號不夠：同一支 Fetch，兩種選版</a:t>
-            </a:r>
-          </a:p>
-        </p:txBody>
-      </p:sp>
-      <p:sp>
-        <p:nvSpPr>
-          <p:cNvPr id="4" name="TextBox 3"/>
-          <p:cNvSpPr txBox="1"/>
-          <p:nvPr/>
-        </p:nvSpPr>
-        <p:spPr>
-          <a:xfrm>
-            <a:off x="640080" y="1481328"/>
-            <a:ext cx="10972800" cy="365760"/>
-          </a:xfrm>
-          <a:prstGeom prst="rect">
-            <a:avLst/>
-          </a:prstGeom>
-          <a:noFill/>
-        </p:spPr>
-        <p:txBody>
-          <a:bodyPr wrap="square">
-            <a:noAutofit/>
-          </a:bodyPr>
-          <a:lstStyle/>
-          <a:p>
-            <a:r>
-              <a:rPr sz="1400" b="0">
-                <a:solidFill>
-                  <a:srgbClr val="5F5E5A"/>
-                </a:solidFill>
-                <a:latin typeface="Calibri"/>
-              </a:rPr>
-              <a:t>Fetch＝讀取 partition 資料的 RPC：consumer 拿來讀資料、follower（broker）拿來複製 log</a:t>
+              <a:t>回到三個角色：各自怎麼選版</a:t>
             </a:r>
           </a:p>
         </p:txBody>
       </p:sp>
       <p:pic>
         <p:nvPicPr>
-          <p:cNvPr id="5" name="Picture 4" descr="s2a-rangeline.png"/>
+          <p:cNvPr id="4" name="Picture 3" descr="arrows-split.png"/>
           <p:cNvPicPr>
             <a:picLocks noChangeAspect="1"/>
           </p:cNvPicPr>
@@ -6290,8 +6256,8 @@
         </p:blipFill>
         <p:spPr>
           <a:xfrm>
-            <a:off x="1664208" y="1965960"/>
-            <a:ext cx="8869680" cy="4093698"/>
+            <a:off x="658368" y="2176272"/>
+            <a:ext cx="274320" cy="274320"/>
           </a:xfrm>
           <a:prstGeom prst="rect">
             <a:avLst/>
@@ -6300,7 +6266,143 @@
       </p:pic>
       <p:sp>
         <p:nvSpPr>
+          <p:cNvPr id="5" name="TextBox 4"/>
+          <p:cNvSpPr txBox="1"/>
+          <p:nvPr/>
+        </p:nvSpPr>
+        <p:spPr>
+          <a:xfrm>
+            <a:off x="1078992" y="2148840"/>
+            <a:ext cx="10515600" cy="841248"/>
+          </a:xfrm>
+          <a:prstGeom prst="rect">
+            <a:avLst/>
+          </a:prstGeom>
+          <a:noFill/>
+        </p:spPr>
+        <p:txBody>
+          <a:bodyPr wrap="square">
+            <a:noAutofit/>
+          </a:bodyPr>
+          <a:lstStyle/>
+          <a:p>
+            <a:r>
+              <a:rPr sz="1650" b="0">
+                <a:solidFill>
+                  <a:srgbClr val="1E2024"/>
+                </a:solidFill>
+                <a:latin typeface="Calibri"/>
+              </a:rPr>
+              <a:t>底層都先做 ApiVersions 握手（共用同一顆 NetworkClient）；決定版本的是 request Builder 留多少空間</a:t>
+            </a:r>
+          </a:p>
+        </p:txBody>
+      </p:sp>
+      <p:sp>
+        <p:nvSpPr>
           <p:cNvPr id="6" name="TextBox 5"/>
+          <p:cNvSpPr txBox="1"/>
+          <p:nvPr/>
+        </p:nvSpPr>
+        <p:spPr>
+          <a:xfrm>
+            <a:off x="640080" y="3136392"/>
+            <a:ext cx="10972800" cy="1371600"/>
+          </a:xfrm>
+          <a:prstGeom prst="rect">
+            <a:avLst/>
+          </a:prstGeom>
+          <a:solidFill>
+            <a:srgbClr val="F3F1EC"/>
+          </a:solidFill>
+          <a:ln w="6350">
+            <a:solidFill>
+              <a:srgbClr val="E3E0D8"/>
+            </a:solidFill>
+          </a:ln>
+        </p:spPr>
+        <p:txBody>
+          <a:bodyPr wrap="square" lIns="146304" tIns="91440" bIns="91440">
+            <a:noAutofit/>
+          </a:bodyPr>
+          <a:lstStyle/>
+          <a:p>
+            <a:r>
+              <a:rPr sz="1350" b="0">
+                <a:solidFill>
+                  <a:srgbClr val="2C2C2A"/>
+                </a:solidFill>
+                <a:latin typeface="Calibri"/>
+              </a:rPr>
+              <a:t>client ↔ broker       協商，取交集最高</a:t>
+            </a:r>
+          </a:p>
+          <a:p>
+            <a:r>
+              <a:rPr sz="1350" b="0">
+                <a:solidFill>
+                  <a:srgbClr val="2C2C2A"/>
+                </a:solidFill>
+                <a:latin typeface="Calibri"/>
+              </a:rPr>
+              <a:t>broker ↔ controller   也協商（broker 當 client：heartbeat / registration）</a:t>
+            </a:r>
+          </a:p>
+          <a:p>
+            <a:r>
+              <a:rPr sz="1350" b="0">
+                <a:solidFill>
+                  <a:srgbClr val="2C2C2A"/>
+                </a:solidFill>
+                <a:latin typeface="Calibri"/>
+              </a:rPr>
+              <a:t>broker ↔ broker 複製   Fetch 由 MV 決定、ListOffsets 以 MV 為上限</a:t>
+            </a:r>
+          </a:p>
+        </p:txBody>
+      </p:sp>
+      <p:sp>
+        <p:nvSpPr>
+          <p:cNvPr id="7" name="TextBox 6"/>
+          <p:cNvSpPr txBox="1"/>
+          <p:nvPr/>
+        </p:nvSpPr>
+        <p:spPr>
+          <a:xfrm>
+            <a:off x="640080" y="4709160"/>
+            <a:ext cx="10972800" cy="877824"/>
+          </a:xfrm>
+          <a:prstGeom prst="rect">
+            <a:avLst/>
+          </a:prstGeom>
+          <a:solidFill>
+            <a:srgbClr val="E9F3DE"/>
+          </a:solidFill>
+          <a:ln>
+            <a:noFill/>
+          </a:ln>
+        </p:spPr>
+        <p:txBody>
+          <a:bodyPr wrap="square" lIns="146304" tIns="82296">
+            <a:noAutofit/>
+          </a:bodyPr>
+          <a:lstStyle/>
+          <a:p>
+            <a:r>
+              <a:rPr sz="1500" b="0">
+                <a:solidFill>
+                  <a:srgbClr val="27500A"/>
+                </a:solidFill>
+                <a:latin typeface="Calibri"/>
+              </a:rPr>
+              <a:t>MV 只影響複製用的 Fetch / ListOffsets；client、controller 那兩條都是協商</a:t>
+            </a:r>
+          </a:p>
+        </p:txBody>
+      </p:sp>
+      <p:sp>
+        <p:nvSpPr>
+          <p:cNvPr id="8" name="TextBox 7"/>
           <p:cNvSpPr txBox="1"/>
           <p:nvPr/>
         </p:nvSpPr>
@@ -6337,7 +6439,7 @@
                 <a:latin typeface="Courier New"/>
                 <a:hlinkClick r:id="rId3"/>
               </a:rPr>
-              <a:t>forConsumer/forReplica</a:t>
+              <a:t>latestUsableVersion</a:t>
             </a:r>
             <a:r>
               <a:rPr sz="1200" b="0">
@@ -6375,7 +6477,7 @@
                 <a:latin typeface="Courier New"/>
                 <a:hlinkClick r:id="rId5"/>
               </a:rPr>
-              <a:t>validVersions</a:t>
+              <a:t>javadoc</a:t>
             </a:r>
           </a:p>
         </p:txBody>
@@ -6427,7 +6529,7 @@
                 </a:solidFill>
                 <a:latin typeface="Calibri"/>
               </a:rPr>
-              <a:t>Part 1 · 選版機制</a:t>
+              <a:t>Part 1 · 舉例</a:t>
             </a:r>
           </a:p>
         </p:txBody>
@@ -6440,35 +6542,69 @@
         </p:nvSpPr>
         <p:spPr>
           <a:xfrm>
-            <a:off x="640080" y="841248"/>
-            <a:ext cx="10972800" cy="1005840"/>
-          </a:xfrm>
-          <a:prstGeom prst="rect">
-            <a:avLst/>
-          </a:prstGeom>
-          <a:noFill/>
-        </p:spPr>
-        <p:txBody>
-          <a:bodyPr wrap="square">
-            <a:noAutofit/>
-          </a:bodyPr>
-          <a:lstStyle/>
-          <a:p>
-            <a:r>
-              <a:rPr sz="3200" b="1">
+            <a:off x="640080" y="822960"/>
+            <a:ext cx="10972800" cy="640080"/>
+          </a:xfrm>
+          <a:prstGeom prst="rect">
+            <a:avLst/>
+          </a:prstGeom>
+          <a:noFill/>
+        </p:spPr>
+        <p:txBody>
+          <a:bodyPr wrap="square">
+            <a:noAutofit/>
+          </a:bodyPr>
+          <a:lstStyle/>
+          <a:p>
+            <a:r>
+              <a:rPr sz="3000" b="1">
                 <a:solidFill>
                   <a:srgbClr val="1E2024"/>
                 </a:solidFill>
                 <a:latin typeface="Calibri"/>
               </a:rPr>
-              <a:t>三個角色，各自怎麼選版</a:t>
+              <a:t>以一支 Fetch 為例：cb 協商、bb 由 MV</a:t>
+            </a:r>
+          </a:p>
+        </p:txBody>
+      </p:sp>
+      <p:sp>
+        <p:nvSpPr>
+          <p:cNvPr id="4" name="TextBox 3"/>
+          <p:cNvSpPr txBox="1"/>
+          <p:nvPr/>
+        </p:nvSpPr>
+        <p:spPr>
+          <a:xfrm>
+            <a:off x="640080" y="1481328"/>
+            <a:ext cx="10972800" cy="365760"/>
+          </a:xfrm>
+          <a:prstGeom prst="rect">
+            <a:avLst/>
+          </a:prstGeom>
+          <a:noFill/>
+        </p:spPr>
+        <p:txBody>
+          <a:bodyPr wrap="square">
+            <a:noAutofit/>
+          </a:bodyPr>
+          <a:lstStyle/>
+          <a:p>
+            <a:r>
+              <a:rPr sz="1400" b="0">
+                <a:solidFill>
+                  <a:srgbClr val="5F5E5A"/>
+                </a:solidFill>
+                <a:latin typeface="Calibri"/>
+              </a:rPr>
+              <a:t>同一支 Fetch 兩條線都會走：consumer fetch 是 cb、replica fetch 是 bb</a:t>
             </a:r>
           </a:p>
         </p:txBody>
       </p:sp>
       <p:pic>
         <p:nvPicPr>
-          <p:cNvPr id="4" name="Picture 3" descr="arrows-split.png"/>
+          <p:cNvPr id="5" name="Picture 4" descr="s2a-rangeline.png"/>
           <p:cNvPicPr>
             <a:picLocks noChangeAspect="1"/>
           </p:cNvPicPr>
@@ -6482,8 +6618,8 @@
         </p:blipFill>
         <p:spPr>
           <a:xfrm>
-            <a:off x="658368" y="2176272"/>
-            <a:ext cx="274320" cy="274320"/>
+            <a:off x="1664208" y="1965960"/>
+            <a:ext cx="8869680" cy="4093698"/>
           </a:xfrm>
           <a:prstGeom prst="rect">
             <a:avLst/>
@@ -6492,143 +6628,7 @@
       </p:pic>
       <p:sp>
         <p:nvSpPr>
-          <p:cNvPr id="5" name="TextBox 4"/>
-          <p:cNvSpPr txBox="1"/>
-          <p:nvPr/>
-        </p:nvSpPr>
-        <p:spPr>
-          <a:xfrm>
-            <a:off x="1078992" y="2148840"/>
-            <a:ext cx="10515600" cy="841248"/>
-          </a:xfrm>
-          <a:prstGeom prst="rect">
-            <a:avLst/>
-          </a:prstGeom>
-          <a:noFill/>
-        </p:spPr>
-        <p:txBody>
-          <a:bodyPr wrap="square">
-            <a:noAutofit/>
-          </a:bodyPr>
-          <a:lstStyle/>
-          <a:p>
-            <a:r>
-              <a:rPr sz="1650" b="0">
-                <a:solidFill>
-                  <a:srgbClr val="1E2024"/>
-                </a:solidFill>
-                <a:latin typeface="Calibri"/>
-              </a:rPr>
-              <a:t>底層都先做 ApiVersions 握手（共用同一顆 NetworkClient）；決定版本的是 request Builder 留多少空間</a:t>
-            </a:r>
-          </a:p>
-        </p:txBody>
-      </p:sp>
-      <p:sp>
-        <p:nvSpPr>
           <p:cNvPr id="6" name="TextBox 5"/>
-          <p:cNvSpPr txBox="1"/>
-          <p:nvPr/>
-        </p:nvSpPr>
-        <p:spPr>
-          <a:xfrm>
-            <a:off x="640080" y="3136392"/>
-            <a:ext cx="10972800" cy="1371600"/>
-          </a:xfrm>
-          <a:prstGeom prst="rect">
-            <a:avLst/>
-          </a:prstGeom>
-          <a:solidFill>
-            <a:srgbClr val="F3F1EC"/>
-          </a:solidFill>
-          <a:ln w="6350">
-            <a:solidFill>
-              <a:srgbClr val="E3E0D8"/>
-            </a:solidFill>
-          </a:ln>
-        </p:spPr>
-        <p:txBody>
-          <a:bodyPr wrap="square" lIns="146304" tIns="91440" bIns="91440">
-            <a:noAutofit/>
-          </a:bodyPr>
-          <a:lstStyle/>
-          <a:p>
-            <a:r>
-              <a:rPr sz="1350" b="0">
-                <a:solidFill>
-                  <a:srgbClr val="2C2C2A"/>
-                </a:solidFill>
-                <a:latin typeface="Calibri"/>
-              </a:rPr>
-              <a:t>client ↔ broker       協商，取交集最高</a:t>
-            </a:r>
-          </a:p>
-          <a:p>
-            <a:r>
-              <a:rPr sz="1350" b="0">
-                <a:solidFill>
-                  <a:srgbClr val="2C2C2A"/>
-                </a:solidFill>
-                <a:latin typeface="Calibri"/>
-              </a:rPr>
-              <a:t>broker ↔ controller   也協商（broker 當 client：heartbeat / registration）</a:t>
-            </a:r>
-          </a:p>
-          <a:p>
-            <a:r>
-              <a:rPr sz="1350" b="0">
-                <a:solidFill>
-                  <a:srgbClr val="2C2C2A"/>
-                </a:solidFill>
-                <a:latin typeface="Calibri"/>
-              </a:rPr>
-              <a:t>broker ↔ broker 複製   Fetch 由 MV 決定、ListOffsets 以 MV 為上限</a:t>
-            </a:r>
-          </a:p>
-        </p:txBody>
-      </p:sp>
-      <p:sp>
-        <p:nvSpPr>
-          <p:cNvPr id="7" name="TextBox 6"/>
-          <p:cNvSpPr txBox="1"/>
-          <p:nvPr/>
-        </p:nvSpPr>
-        <p:spPr>
-          <a:xfrm>
-            <a:off x="640080" y="4709160"/>
-            <a:ext cx="10972800" cy="877824"/>
-          </a:xfrm>
-          <a:prstGeom prst="rect">
-            <a:avLst/>
-          </a:prstGeom>
-          <a:solidFill>
-            <a:srgbClr val="E9F3DE"/>
-          </a:solidFill>
-          <a:ln>
-            <a:noFill/>
-          </a:ln>
-        </p:spPr>
-        <p:txBody>
-          <a:bodyPr wrap="square" lIns="146304" tIns="82296">
-            <a:noAutofit/>
-          </a:bodyPr>
-          <a:lstStyle/>
-          <a:p>
-            <a:r>
-              <a:rPr sz="1500" b="0">
-                <a:solidFill>
-                  <a:srgbClr val="27500A"/>
-                </a:solidFill>
-                <a:latin typeface="Calibri"/>
-              </a:rPr>
-              <a:t>MV 只影響複製用的 Fetch / ListOffsets；client、controller 那兩條都是協商</a:t>
-            </a:r>
-          </a:p>
-        </p:txBody>
-      </p:sp>
-      <p:sp>
-        <p:nvSpPr>
-          <p:cNvPr id="8" name="TextBox 7"/>
           <p:cNvSpPr txBox="1"/>
           <p:nvPr/>
         </p:nvSpPr>
@@ -6665,7 +6665,7 @@
                 <a:latin typeface="Courier New"/>
                 <a:hlinkClick r:id="rId3"/>
               </a:rPr>
-              <a:t>latestUsableVersion</a:t>
+              <a:t>forConsumer/forReplica</a:t>
             </a:r>
             <a:r>
               <a:rPr sz="1200" b="0">
@@ -6703,7 +6703,7 @@
                 <a:latin typeface="Courier New"/>
                 <a:hlinkClick r:id="rId5"/>
               </a:rPr>
-              <a:t>javadoc</a:t>
+              <a:t>validVersions</a:t>
             </a:r>
           </a:p>
         </p:txBody>

--- a/study/version-control/kafka-version-negotiation.pptx
+++ b/study/version-control/kafka-version-negotiation.pptx
@@ -20,6 +20,7 @@
     <p:sldId id="268" r:id="rId19"/>
     <p:sldId id="269" r:id="rId20"/>
     <p:sldId id="270" r:id="rId21"/>
+    <p:sldId id="271" r:id="rId22"/>
   </p:sldIdLst>
   <p:sldSz cx="12191695" cy="6858000" type="screen4x3"/>
   <p:notesSz cx="6858000" cy="9144000"/>
@@ -3328,7 +3329,7 @@
                 </a:solidFill>
                 <a:latin typeface="Calibri"/>
               </a:rPr>
-              <a:t>隨堂考 · 核心　（正解）</a:t>
+              <a:t>隨堂考 · 核心</a:t>
             </a:r>
           </a:p>
         </p:txBody>
@@ -3424,36 +3425,31 @@
           <a:prstGeom prst="rect">
             <a:avLst/>
           </a:prstGeom>
-          <a:solidFill>
-            <a:srgbClr val="E9F3DE"/>
-          </a:solidFill>
-          <a:ln>
-            <a:noFill/>
-          </a:ln>
-        </p:spPr>
-        <p:txBody>
-          <a:bodyPr wrap="square" lIns="128016" tIns="54864">
-            <a:noAutofit/>
-          </a:bodyPr>
-          <a:lstStyle/>
-          <a:p>
-            <a:r>
-              <a:rPr sz="1600" b="1">
-                <a:solidFill>
-                  <a:srgbClr val="27500A"/>
+          <a:noFill/>
+        </p:spPr>
+        <p:txBody>
+          <a:bodyPr wrap="square">
+            <a:noAutofit/>
+          </a:bodyPr>
+          <a:lstStyle/>
+          <a:p>
+            <a:r>
+              <a:rPr sz="1600" b="0">
+                <a:solidFill>
+                  <a:srgbClr val="1E2024"/>
                 </a:solidFill>
                 <a:latin typeface="Calibri"/>
               </a:rPr>
               <a:t>B.  </a:t>
             </a:r>
             <a:r>
-              <a:rPr sz="1600" b="1">
-                <a:solidFill>
-                  <a:srgbClr val="27500A"/>
-                </a:solidFill>
-                <a:latin typeface="Calibri"/>
-              </a:rPr>
-              <a:t>由 finalized metadata.version 決定   ✓</a:t>
+              <a:rPr sz="1600" b="0">
+                <a:solidFill>
+                  <a:srgbClr val="1E2024"/>
+                </a:solidFill>
+                <a:latin typeface="Calibri"/>
+              </a:rPr>
+              <a:t>由 finalized metadata.version 決定</a:t>
             </a:r>
           </a:p>
         </p:txBody>
@@ -3567,85 +3563,13 @@
           <a:lstStyle/>
           <a:p>
             <a:r>
-              <a:rPr sz="1400" b="1">
-                <a:solidFill>
-                  <a:srgbClr val="27500A"/>
-                </a:solidFill>
-                <a:latin typeface="Calibri"/>
-              </a:rPr>
-              <a:t>正解 B — </a:t>
-            </a:r>
-            <a:r>
               <a:rPr sz="1400" b="0">
                 <a:solidFill>
-                  <a:srgbClr val="1E2024"/>
-                </a:solidFill>
-                <a:latin typeface="Calibri"/>
-              </a:rPr>
-              <a:t>fetchRequestVersion(MV)：MV 是集中共識，不做 per-connection 協商。</a:t>
-            </a:r>
-          </a:p>
-        </p:txBody>
-      </p:sp>
-      <p:sp>
-        <p:nvSpPr>
-          <p:cNvPr id="9" name="TextBox 8"/>
-          <p:cNvSpPr txBox="1"/>
-          <p:nvPr/>
-        </p:nvSpPr>
-        <p:spPr>
-          <a:xfrm>
-            <a:off x="640080" y="6400800"/>
-            <a:ext cx="10972800" cy="384048"/>
-          </a:xfrm>
-          <a:prstGeom prst="rect">
-            <a:avLst/>
-          </a:prstGeom>
-          <a:noFill/>
-        </p:spPr>
-        <p:txBody>
-          <a:bodyPr wrap="square">
-            <a:noAutofit/>
-          </a:bodyPr>
-          <a:lstStyle/>
-          <a:p>
-            <a:r>
-              <a:rPr sz="1200" b="1">
-                <a:solidFill>
                   <a:srgbClr val="8A8A8A"/>
                 </a:solidFill>
                 <a:latin typeface="Calibri"/>
               </a:rPr>
-              <a:t>REF   </a:t>
-            </a:r>
-            <a:r>
-              <a:rPr sz="1200" b="0" u="sng">
-                <a:solidFill>
-                  <a:srgbClr val="185FA5"/>
-                </a:solidFill>
-                <a:latin typeface="Courier New"/>
-                <a:hlinkClick r:id="rId2"/>
-              </a:rPr>
-              <a:t>RemoteLeaderEndPoint.scala:215</a:t>
-            </a:r>
-            <a:r>
-              <a:rPr sz="1200" b="0">
-                <a:solidFill>
-                  <a:srgbClr val="8A8A8A"/>
-                </a:solidFill>
-                <a:latin typeface="Calibri"/>
-              </a:rPr>
-              <a:t>   ·   </a:t>
-            </a:r>
-            <a:r>
-              <a:rPr sz="1200" b="0" u="sng">
-                <a:solidFill>
-                  <a:srgbClr val="185FA5"/>
-                </a:solidFill>
-                <a:latin typeface="Courier New"/>
-                <a:hlinkClick r:id="rId3"/>
-              </a:rPr>
-              <a:t>MetadataVersion.java:273</a:t>
+              <a:t>想一想 —— 下一頁公布答案</a:t>
             </a:r>
           </a:p>
         </p:txBody>
@@ -3697,7 +3621,7 @@
                 </a:solidFill>
                 <a:latin typeface="Calibri"/>
               </a:rPr>
-              <a:t>Part 2 · 失敗訊息</a:t>
+              <a:t>隨堂考 · 核心　（正解）</a:t>
             </a:r>
           </a:p>
         </p:txBody>
@@ -3711,27 +3635,27 @@
         <p:spPr>
           <a:xfrm>
             <a:off x="640080" y="841248"/>
-            <a:ext cx="10972800" cy="1005840"/>
-          </a:xfrm>
-          <a:prstGeom prst="rect">
-            <a:avLst/>
-          </a:prstGeom>
-          <a:noFill/>
-        </p:spPr>
-        <p:txBody>
-          <a:bodyPr wrap="square">
-            <a:noAutofit/>
-          </a:bodyPr>
-          <a:lstStyle/>
-          <a:p>
-            <a:r>
-              <a:rPr sz="3200" b="1">
+            <a:ext cx="10972800" cy="1188720"/>
+          </a:xfrm>
+          <a:prstGeom prst="rect">
+            <a:avLst/>
+          </a:prstGeom>
+          <a:noFill/>
+        </p:spPr>
+        <p:txBody>
+          <a:bodyPr wrap="square">
+            <a:noAutofit/>
+          </a:bodyPr>
+          <a:lstStyle/>
+          <a:p>
+            <a:r>
+              <a:rPr sz="2600" b="1">
                 <a:solidFill>
                   <a:srgbClr val="1E2024"/>
                 </a:solidFill>
                 <a:latin typeface="Calibri"/>
               </a:rPr>
-              <a:t>通訊當下協商不出版本，會看到什麼</a:t>
+              <a:t>replica fetch（broker↔broker）的 Fetch 版本怎麼決定？</a:t>
             </a:r>
           </a:p>
         </p:txBody>
@@ -3744,85 +3668,89 @@
         </p:nvSpPr>
         <p:spPr>
           <a:xfrm>
-            <a:off x="640080" y="2148840"/>
-            <a:ext cx="10972800" cy="1371600"/>
+            <a:off x="822960" y="2331720"/>
+            <a:ext cx="10515600" cy="493776"/>
+          </a:xfrm>
+          <a:prstGeom prst="rect">
+            <a:avLst/>
+          </a:prstGeom>
+          <a:noFill/>
+        </p:spPr>
+        <p:txBody>
+          <a:bodyPr wrap="square">
+            <a:noAutofit/>
+          </a:bodyPr>
+          <a:lstStyle/>
+          <a:p>
+            <a:r>
+              <a:rPr sz="1600" b="0">
+                <a:solidFill>
+                  <a:srgbClr val="1E2024"/>
+                </a:solidFill>
+                <a:latin typeface="Calibri"/>
+              </a:rPr>
+              <a:t>A.  </a:t>
+            </a:r>
+            <a:r>
+              <a:rPr sz="1600" b="0">
+                <a:solidFill>
+                  <a:srgbClr val="1E2024"/>
+                </a:solidFill>
+                <a:latin typeface="Calibri"/>
+              </a:rPr>
+              <a:t>兩 broker ApiVersions 協商取交集</a:t>
+            </a:r>
+          </a:p>
+        </p:txBody>
+      </p:sp>
+      <p:sp>
+        <p:nvSpPr>
+          <p:cNvPr id="5" name="TextBox 4"/>
+          <p:cNvSpPr txBox="1"/>
+          <p:nvPr/>
+        </p:nvSpPr>
+        <p:spPr>
+          <a:xfrm>
+            <a:off x="822960" y="2953512"/>
+            <a:ext cx="10515600" cy="493776"/>
           </a:xfrm>
           <a:prstGeom prst="rect">
             <a:avLst/>
           </a:prstGeom>
           <a:solidFill>
-            <a:srgbClr val="F3F1EC"/>
+            <a:srgbClr val="E9F3DE"/>
           </a:solidFill>
-          <a:ln w="6350">
-            <a:solidFill>
-              <a:srgbClr val="E3E0D8"/>
-            </a:solidFill>
+          <a:ln>
+            <a:noFill/>
           </a:ln>
         </p:spPr>
         <p:txBody>
-          <a:bodyPr wrap="square" lIns="146304" tIns="91440" bIns="91440">
-            <a:noAutofit/>
-          </a:bodyPr>
-          <a:lstStyle/>
-          <a:p>
-            <a:r>
-              <a:rPr sz="1350" b="0">
-                <a:solidFill>
-                  <a:srgbClr val="2C2C2A"/>
-                </a:solidFill>
-                <a:latin typeface="Calibri"/>
-              </a:rPr>
-              <a:t>交集空        → client 端 UnsupportedVersionException（送出前 abort）</a:t>
-            </a:r>
-          </a:p>
-          <a:p>
-            <a:r>
-              <a:rPr sz="1350" b="0">
-                <a:solidFill>
-                  <a:srgbClr val="2C2C2A"/>
-                </a:solidFill>
-                <a:latin typeface="Calibri"/>
-              </a:rPr>
-              <a:t>繞過協商自刻  → broker 丟 UnsupportedVersionException + 關線</a:t>
-            </a:r>
-          </a:p>
-          <a:p>
-            <a:r>
-              <a:rPr sz="1350" b="0">
-                <a:solidFill>
-                  <a:srgbClr val="2C2C2A"/>
-                </a:solidFill>
-                <a:latin typeface="Calibri"/>
-              </a:rPr>
-              <a:t>（ApiVersions 例外：回 v0 + UNSUPPORTED_VERSION 錯誤碼）</a:t>
-            </a:r>
-          </a:p>
-        </p:txBody>
-      </p:sp>
-      <p:pic>
-        <p:nvPicPr>
-          <p:cNvPr id="5" name="Picture 4" descr="ban.png"/>
-          <p:cNvPicPr>
-            <a:picLocks noChangeAspect="1"/>
-          </p:cNvPicPr>
-          <p:nvPr/>
-        </p:nvPicPr>
-        <p:blipFill>
-          <a:blip r:embed="rId2"/>
-          <a:stretch>
-            <a:fillRect/>
-          </a:stretch>
-        </p:blipFill>
-        <p:spPr>
-          <a:xfrm>
-            <a:off x="658368" y="3749040"/>
-            <a:ext cx="274320" cy="274320"/>
-          </a:xfrm>
-          <a:prstGeom prst="rect">
-            <a:avLst/>
-          </a:prstGeom>
-        </p:spPr>
-      </p:pic>
+          <a:bodyPr wrap="square" lIns="128016" tIns="54864">
+            <a:noAutofit/>
+          </a:bodyPr>
+          <a:lstStyle/>
+          <a:p>
+            <a:r>
+              <a:rPr sz="1600" b="1">
+                <a:solidFill>
+                  <a:srgbClr val="27500A"/>
+                </a:solidFill>
+                <a:latin typeface="Calibri"/>
+              </a:rPr>
+              <a:t>B.  </a:t>
+            </a:r>
+            <a:r>
+              <a:rPr sz="1600" b="1">
+                <a:solidFill>
+                  <a:srgbClr val="27500A"/>
+                </a:solidFill>
+                <a:latin typeface="Calibri"/>
+              </a:rPr>
+              <a:t>由 finalized metadata.version 決定   ✓</a:t>
+            </a:r>
+          </a:p>
+        </p:txBody>
+      </p:sp>
       <p:sp>
         <p:nvSpPr>
           <p:cNvPr id="6" name="TextBox 5"/>
@@ -3831,7 +3759,7 @@
         </p:nvSpPr>
         <p:spPr>
           <a:xfrm>
-            <a:off x="1078992" y="3721608"/>
+            <a:off x="822960" y="3575304"/>
             <a:ext cx="10515600" cy="493776"/>
           </a:xfrm>
           <a:prstGeom prst="rect">
@@ -3846,13 +3774,22 @@
           <a:lstStyle/>
           <a:p>
             <a:r>
-              <a:rPr sz="1650" b="0">
+              <a:rPr sz="1600" b="0">
                 <a:solidFill>
                   <a:srgbClr val="1E2024"/>
                 </a:solidFill>
                 <a:latin typeface="Calibri"/>
               </a:rPr>
-              <a:t>多數情況 client 在送出前就本地中止，根本沒上網路</a:t>
+              <a:t>C.  </a:t>
+            </a:r>
+            <a:r>
+              <a:rPr sz="1600" b="0">
+                <a:solidFill>
+                  <a:srgbClr val="1E2024"/>
+                </a:solidFill>
+                <a:latin typeface="Calibri"/>
+              </a:rPr>
+              <a:t>永遠用最新版</a:t>
             </a:r>
           </a:p>
         </p:txBody>
@@ -3860,6 +3797,92 @@
       <p:sp>
         <p:nvSpPr>
           <p:cNvPr id="7" name="TextBox 6"/>
+          <p:cNvSpPr txBox="1"/>
+          <p:nvPr/>
+        </p:nvSpPr>
+        <p:spPr>
+          <a:xfrm>
+            <a:off x="822960" y="4197096"/>
+            <a:ext cx="10515600" cy="493776"/>
+          </a:xfrm>
+          <a:prstGeom prst="rect">
+            <a:avLst/>
+          </a:prstGeom>
+          <a:noFill/>
+        </p:spPr>
+        <p:txBody>
+          <a:bodyPr wrap="square">
+            <a:noAutofit/>
+          </a:bodyPr>
+          <a:lstStyle/>
+          <a:p>
+            <a:r>
+              <a:rPr sz="1600" b="0">
+                <a:solidFill>
+                  <a:srgbClr val="1E2024"/>
+                </a:solidFill>
+                <a:latin typeface="Calibri"/>
+              </a:rPr>
+              <a:t>D.  </a:t>
+            </a:r>
+            <a:r>
+              <a:rPr sz="1600" b="0">
+                <a:solidFill>
+                  <a:srgbClr val="1E2024"/>
+                </a:solidFill>
+                <a:latin typeface="Calibri"/>
+              </a:rPr>
+              <a:t>controller 每次指定</a:t>
+            </a:r>
+          </a:p>
+        </p:txBody>
+      </p:sp>
+      <p:sp>
+        <p:nvSpPr>
+          <p:cNvPr id="8" name="TextBox 7"/>
+          <p:cNvSpPr txBox="1"/>
+          <p:nvPr/>
+        </p:nvSpPr>
+        <p:spPr>
+          <a:xfrm>
+            <a:off x="640080" y="4910327"/>
+            <a:ext cx="10972800" cy="914400"/>
+          </a:xfrm>
+          <a:prstGeom prst="rect">
+            <a:avLst/>
+          </a:prstGeom>
+          <a:noFill/>
+        </p:spPr>
+        <p:txBody>
+          <a:bodyPr wrap="square">
+            <a:noAutofit/>
+          </a:bodyPr>
+          <a:lstStyle/>
+          <a:p>
+            <a:r>
+              <a:rPr sz="1400" b="1">
+                <a:solidFill>
+                  <a:srgbClr val="27500A"/>
+                </a:solidFill>
+                <a:latin typeface="Calibri"/>
+              </a:rPr>
+              <a:t>正解 B — </a:t>
+            </a:r>
+            <a:r>
+              <a:rPr sz="1400" b="0">
+                <a:solidFill>
+                  <a:srgbClr val="1E2024"/>
+                </a:solidFill>
+                <a:latin typeface="Calibri"/>
+              </a:rPr>
+              <a:t>fetchRequestVersion(MV)：MV 是集中共識，不做 per-connection 協商。</a:t>
+            </a:r>
+          </a:p>
+        </p:txBody>
+      </p:sp>
+      <p:sp>
+        <p:nvSpPr>
+          <p:cNvPr id="9" name="TextBox 8"/>
           <p:cNvSpPr txBox="1"/>
           <p:nvPr/>
         </p:nvSpPr>
@@ -3894,47 +3917,28 @@
                   <a:srgbClr val="185FA5"/>
                 </a:solidFill>
                 <a:latin typeface="Courier New"/>
+                <a:hlinkClick r:id="rId2"/>
+              </a:rPr>
+              <a:t>RemoteLeaderEndPoint.scala:215</a:t>
+            </a:r>
+            <a:r>
+              <a:rPr sz="1200" b="0">
+                <a:solidFill>
+                  <a:srgbClr val="8A8A8A"/>
+                </a:solidFill>
+                <a:latin typeface="Calibri"/>
+              </a:rPr>
+              <a:t>   ·   </a:t>
+            </a:r>
+            <a:r>
+              <a:rPr sz="1200" b="0" u="sng">
+                <a:solidFill>
+                  <a:srgbClr val="185FA5"/>
+                </a:solidFill>
+                <a:latin typeface="Courier New"/>
                 <a:hlinkClick r:id="rId3"/>
               </a:rPr>
-              <a:t>latestUsableVersion</a:t>
-            </a:r>
-            <a:r>
-              <a:rPr sz="1200" b="0">
-                <a:solidFill>
-                  <a:srgbClr val="8A8A8A"/>
-                </a:solidFill>
-                <a:latin typeface="Calibri"/>
-              </a:rPr>
-              <a:t>   ·   </a:t>
-            </a:r>
-            <a:r>
-              <a:rPr sz="1200" b="0" u="sng">
-                <a:solidFill>
-                  <a:srgbClr val="185FA5"/>
-                </a:solidFill>
-                <a:latin typeface="Courier New"/>
-                <a:hlinkClick r:id="rId4"/>
-              </a:rPr>
-              <a:t>NetworkClient</a:t>
-            </a:r>
-            <a:r>
-              <a:rPr sz="1200" b="0">
-                <a:solidFill>
-                  <a:srgbClr val="8A8A8A"/>
-                </a:solidFill>
-                <a:latin typeface="Calibri"/>
-              </a:rPr>
-              <a:t>   ·   </a:t>
-            </a:r>
-            <a:r>
-              <a:rPr sz="1200" b="0" u="sng">
-                <a:solidFill>
-                  <a:srgbClr val="185FA5"/>
-                </a:solidFill>
-                <a:latin typeface="Courier New"/>
-                <a:hlinkClick r:id="rId5"/>
-              </a:rPr>
-              <a:t>RequestContext</a:t>
+              <a:t>MetadataVersion.java:273</a:t>
             </a:r>
           </a:p>
         </p:txBody>
@@ -4020,7 +4024,7 @@
                 </a:solidFill>
                 <a:latin typeface="Calibri"/>
               </a:rPr>
-              <a:t>版本截斷：為什麼「升一點點」不夠</a:t>
+              <a:t>通訊當下協商不出版本，會看到什麼</a:t>
             </a:r>
           </a:p>
         </p:txBody>
@@ -4034,7 +4038,7 @@
         <p:spPr>
           <a:xfrm>
             <a:off x="640080" y="2148840"/>
-            <a:ext cx="10972800" cy="822959"/>
+            <a:ext cx="10972800" cy="1371600"/>
           </a:xfrm>
           <a:prstGeom prst="rect">
             <a:avLst/>
@@ -4061,7 +4065,7 @@
                 </a:solidFill>
                 <a:latin typeface="Calibri"/>
               </a:rPr>
-              <a:t>舊 wire API version 被整個移除，min 可 &gt; 0</a:t>
+              <a:t>交集空        → client 端 UnsupportedVersionException（送出前 abort）</a:t>
             </a:r>
           </a:p>
           <a:p>
@@ -4072,50 +4076,46 @@
                 </a:solidFill>
                 <a:latin typeface="Calibri"/>
               </a:rPr>
-              <a:t>  Fetch：4–18（v0–3 在 4.0 移除）</a:t>
-            </a:r>
-          </a:p>
-        </p:txBody>
-      </p:sp>
-      <p:sp>
-        <p:nvSpPr>
-          <p:cNvPr id="5" name="TextBox 4"/>
-          <p:cNvSpPr txBox="1"/>
-          <p:nvPr/>
-        </p:nvSpPr>
-        <p:spPr>
-          <a:xfrm>
-            <a:off x="640080" y="3172968"/>
-            <a:ext cx="10972800" cy="566928"/>
-          </a:xfrm>
-          <a:prstGeom prst="rect">
-            <a:avLst/>
-          </a:prstGeom>
-          <a:solidFill>
-            <a:srgbClr val="E9F3DE"/>
-          </a:solidFill>
-          <a:ln>
-            <a:noFill/>
-          </a:ln>
-        </p:spPr>
-        <p:txBody>
-          <a:bodyPr wrap="square" lIns="146304" tIns="82296">
-            <a:noAutofit/>
-          </a:bodyPr>
-          <a:lstStyle/>
-          <a:p>
-            <a:r>
-              <a:rPr sz="1500" b="0">
-                <a:solidFill>
-                  <a:srgbClr val="27500A"/>
-                </a:solidFill>
-                <a:latin typeface="Calibri"/>
-              </a:rPr>
-              <a:t>解法：升級前確認兩端都跨過版本下限（升 4.0 需至少 2.1），否則協商結果沒有可用版本</a:t>
-            </a:r>
-          </a:p>
-        </p:txBody>
-      </p:sp>
+              <a:t>繞過協商自刻  → broker 丟 UnsupportedVersionException + 關線</a:t>
+            </a:r>
+          </a:p>
+          <a:p>
+            <a:r>
+              <a:rPr sz="1350" b="0">
+                <a:solidFill>
+                  <a:srgbClr val="2C2C2A"/>
+                </a:solidFill>
+                <a:latin typeface="Calibri"/>
+              </a:rPr>
+              <a:t>（ApiVersions 例外：回 v0 + UNSUPPORTED_VERSION 錯誤碼）</a:t>
+            </a:r>
+          </a:p>
+        </p:txBody>
+      </p:sp>
+      <p:pic>
+        <p:nvPicPr>
+          <p:cNvPr id="5" name="Picture 4" descr="ban.png"/>
+          <p:cNvPicPr>
+            <a:picLocks noChangeAspect="1"/>
+          </p:cNvPicPr>
+          <p:nvPr/>
+        </p:nvPicPr>
+        <p:blipFill>
+          <a:blip r:embed="rId2"/>
+          <a:stretch>
+            <a:fillRect/>
+          </a:stretch>
+        </p:blipFill>
+        <p:spPr>
+          <a:xfrm>
+            <a:off x="658368" y="3749040"/>
+            <a:ext cx="274320" cy="274320"/>
+          </a:xfrm>
+          <a:prstGeom prst="rect">
+            <a:avLst/>
+          </a:prstGeom>
+        </p:spPr>
+      </p:pic>
       <p:sp>
         <p:nvSpPr>
           <p:cNvPr id="6" name="TextBox 5"/>
@@ -4124,28 +4124,28 @@
         </p:nvSpPr>
         <p:spPr>
           <a:xfrm>
-            <a:off x="640080" y="3922776"/>
-            <a:ext cx="10972800" cy="731520"/>
-          </a:xfrm>
-          <a:prstGeom prst="rect">
-            <a:avLst/>
-          </a:prstGeom>
-          <a:noFill/>
-        </p:spPr>
-        <p:txBody>
-          <a:bodyPr wrap="square">
-            <a:noAutofit/>
-          </a:bodyPr>
-          <a:lstStyle/>
-          <a:p>
-            <a:r>
-              <a:rPr sz="1500" b="0">
-                <a:solidFill>
-                  <a:srgbClr val="5F5E5A"/>
-                </a:solidFill>
-                <a:latin typeface="Calibri"/>
-              </a:rPr>
-              <a:t>銜接（非本場）：finalize / 升降當下的錯誤（INVALID_UPDATE_VERSION 等）屬「運行時的版本升降」那場，本場不展開。</a:t>
+            <a:off x="1078992" y="3721608"/>
+            <a:ext cx="10515600" cy="493776"/>
+          </a:xfrm>
+          <a:prstGeom prst="rect">
+            <a:avLst/>
+          </a:prstGeom>
+          <a:noFill/>
+        </p:spPr>
+        <p:txBody>
+          <a:bodyPr wrap="square">
+            <a:noAutofit/>
+          </a:bodyPr>
+          <a:lstStyle/>
+          <a:p>
+            <a:r>
+              <a:rPr sz="1650" b="0">
+                <a:solidFill>
+                  <a:srgbClr val="1E2024"/>
+                </a:solidFill>
+                <a:latin typeface="Calibri"/>
+              </a:rPr>
+              <a:t>多數情況 client 在送出前就本地中止，根本沒上網路</a:t>
             </a:r>
           </a:p>
         </p:txBody>
@@ -4187,9 +4187,9 @@
                   <a:srgbClr val="185FA5"/>
                 </a:solidFill>
                 <a:latin typeface="Courier New"/>
-                <a:hlinkClick r:id="rId2"/>
-              </a:rPr>
-              <a:t>upgrade.md:229</a:t>
+                <a:hlinkClick r:id="rId3"/>
+              </a:rPr>
+              <a:t>latestUsableVersion</a:t>
             </a:r>
             <a:r>
               <a:rPr sz="1200" b="0">
@@ -4206,9 +4206,28 @@
                   <a:srgbClr val="185FA5"/>
                 </a:solidFill>
                 <a:latin typeface="Courier New"/>
-                <a:hlinkClick r:id="rId3"/>
-              </a:rPr>
-              <a:t>FetchRequest.json validVersions</a:t>
+                <a:hlinkClick r:id="rId4"/>
+              </a:rPr>
+              <a:t>NetworkClient</a:t>
+            </a:r>
+            <a:r>
+              <a:rPr sz="1200" b="0">
+                <a:solidFill>
+                  <a:srgbClr val="8A8A8A"/>
+                </a:solidFill>
+                <a:latin typeface="Calibri"/>
+              </a:rPr>
+              <a:t>   ·   </a:t>
+            </a:r>
+            <a:r>
+              <a:rPr sz="1200" b="0" u="sng">
+                <a:solidFill>
+                  <a:srgbClr val="185FA5"/>
+                </a:solidFill>
+                <a:latin typeface="Courier New"/>
+                <a:hlinkClick r:id="rId5"/>
+              </a:rPr>
+              <a:t>RequestContext</a:t>
             </a:r>
           </a:p>
         </p:txBody>
@@ -4260,7 +4279,7 @@
                 </a:solidFill>
                 <a:latin typeface="Calibri"/>
               </a:rPr>
-              <a:t>隨堂考 · 核心</a:t>
+              <a:t>Part 2 · 失敗訊息</a:t>
             </a:r>
           </a:p>
         </p:txBody>
@@ -4274,27 +4293,27 @@
         <p:spPr>
           <a:xfrm>
             <a:off x="640080" y="841248"/>
-            <a:ext cx="10972800" cy="1188720"/>
-          </a:xfrm>
-          <a:prstGeom prst="rect">
-            <a:avLst/>
-          </a:prstGeom>
-          <a:noFill/>
-        </p:spPr>
-        <p:txBody>
-          <a:bodyPr wrap="square">
-            <a:noAutofit/>
-          </a:bodyPr>
-          <a:lstStyle/>
-          <a:p>
-            <a:r>
-              <a:rPr sz="2600" b="1">
+            <a:ext cx="10972800" cy="1005840"/>
+          </a:xfrm>
+          <a:prstGeom prst="rect">
+            <a:avLst/>
+          </a:prstGeom>
+          <a:noFill/>
+        </p:spPr>
+        <p:txBody>
+          <a:bodyPr wrap="square">
+            <a:noAutofit/>
+          </a:bodyPr>
+          <a:lstStyle/>
+          <a:p>
+            <a:r>
+              <a:rPr sz="3200" b="1">
                 <a:solidFill>
                   <a:srgbClr val="1E2024"/>
                 </a:solidFill>
                 <a:latin typeface="Calibri"/>
               </a:rPr>
-              <a:t>自刻 client 送了不支援的 API version，會怎樣？</a:t>
+              <a:t>版本截斷：為什麼「升一點點」不夠</a:t>
             </a:r>
           </a:p>
         </p:txBody>
@@ -4307,37 +4326,46 @@
         </p:nvSpPr>
         <p:spPr>
           <a:xfrm>
-            <a:off x="822960" y="2331720"/>
-            <a:ext cx="10515600" cy="493776"/>
-          </a:xfrm>
-          <a:prstGeom prst="rect">
-            <a:avLst/>
-          </a:prstGeom>
-          <a:noFill/>
-        </p:spPr>
-        <p:txBody>
-          <a:bodyPr wrap="square">
-            <a:noAutofit/>
-          </a:bodyPr>
-          <a:lstStyle/>
-          <a:p>
-            <a:r>
-              <a:rPr sz="1600" b="0">
-                <a:solidFill>
-                  <a:srgbClr val="1E2024"/>
-                </a:solidFill>
-                <a:latin typeface="Calibri"/>
-              </a:rPr>
-              <a:t>A.  </a:t>
-            </a:r>
-            <a:r>
-              <a:rPr sz="1600" b="0">
-                <a:solidFill>
-                  <a:srgbClr val="1E2024"/>
-                </a:solidFill>
-                <a:latin typeface="Calibri"/>
-              </a:rPr>
-              <a:t>一律回 UNSUPPORTED_VERSION</a:t>
+            <a:off x="640080" y="2148840"/>
+            <a:ext cx="10972800" cy="822959"/>
+          </a:xfrm>
+          <a:prstGeom prst="rect">
+            <a:avLst/>
+          </a:prstGeom>
+          <a:solidFill>
+            <a:srgbClr val="F3F1EC"/>
+          </a:solidFill>
+          <a:ln w="6350">
+            <a:solidFill>
+              <a:srgbClr val="E3E0D8"/>
+            </a:solidFill>
+          </a:ln>
+        </p:spPr>
+        <p:txBody>
+          <a:bodyPr wrap="square" lIns="146304" tIns="91440" bIns="91440">
+            <a:noAutofit/>
+          </a:bodyPr>
+          <a:lstStyle/>
+          <a:p>
+            <a:r>
+              <a:rPr sz="1350" b="0">
+                <a:solidFill>
+                  <a:srgbClr val="2C2C2A"/>
+                </a:solidFill>
+                <a:latin typeface="Calibri"/>
+              </a:rPr>
+              <a:t>舊 wire API version 被整個移除，min 可 &gt; 0</a:t>
+            </a:r>
+          </a:p>
+          <a:p>
+            <a:r>
+              <a:rPr sz="1350" b="0">
+                <a:solidFill>
+                  <a:srgbClr val="2C2C2A"/>
+                </a:solidFill>
+                <a:latin typeface="Calibri"/>
+              </a:rPr>
+              <a:t>  Fetch：4–18（v0–3 在 4.0 移除）</a:t>
             </a:r>
           </a:p>
         </p:txBody>
@@ -4350,37 +4378,33 @@
         </p:nvSpPr>
         <p:spPr>
           <a:xfrm>
-            <a:off x="822960" y="2953512"/>
-            <a:ext cx="10515600" cy="493776"/>
-          </a:xfrm>
-          <a:prstGeom prst="rect">
-            <a:avLst/>
-          </a:prstGeom>
-          <a:noFill/>
-        </p:spPr>
-        <p:txBody>
-          <a:bodyPr wrap="square">
-            <a:noAutofit/>
-          </a:bodyPr>
-          <a:lstStyle/>
-          <a:p>
-            <a:r>
-              <a:rPr sz="1600" b="0">
-                <a:solidFill>
-                  <a:srgbClr val="1E2024"/>
-                </a:solidFill>
-                <a:latin typeface="Calibri"/>
-              </a:rPr>
-              <a:t>B.  </a:t>
-            </a:r>
-            <a:r>
-              <a:rPr sz="1600" b="0">
-                <a:solidFill>
-                  <a:srgbClr val="1E2024"/>
-                </a:solidFill>
-                <a:latin typeface="Calibri"/>
-              </a:rPr>
-              <a:t>只有 ApiVersions 例外回錯誤+範圍；其他 API 關線</a:t>
+            <a:off x="640080" y="3172968"/>
+            <a:ext cx="10972800" cy="566928"/>
+          </a:xfrm>
+          <a:prstGeom prst="rect">
+            <a:avLst/>
+          </a:prstGeom>
+          <a:solidFill>
+            <a:srgbClr val="E9F3DE"/>
+          </a:solidFill>
+          <a:ln>
+            <a:noFill/>
+          </a:ln>
+        </p:spPr>
+        <p:txBody>
+          <a:bodyPr wrap="square" lIns="146304" tIns="82296">
+            <a:noAutofit/>
+          </a:bodyPr>
+          <a:lstStyle/>
+          <a:p>
+            <a:r>
+              <a:rPr sz="1500" b="0">
+                <a:solidFill>
+                  <a:srgbClr val="27500A"/>
+                </a:solidFill>
+                <a:latin typeface="Calibri"/>
+              </a:rPr>
+              <a:t>解法：升級前確認兩端都跨過版本下限（升 4.0 需至少 2.1），否則協商結果沒有可用版本</a:t>
             </a:r>
           </a:p>
         </p:txBody>
@@ -4393,37 +4417,28 @@
         </p:nvSpPr>
         <p:spPr>
           <a:xfrm>
-            <a:off x="822960" y="3575304"/>
-            <a:ext cx="10515600" cy="493776"/>
-          </a:xfrm>
-          <a:prstGeom prst="rect">
-            <a:avLst/>
-          </a:prstGeom>
-          <a:noFill/>
-        </p:spPr>
-        <p:txBody>
-          <a:bodyPr wrap="square">
-            <a:noAutofit/>
-          </a:bodyPr>
-          <a:lstStyle/>
-          <a:p>
-            <a:r>
-              <a:rPr sz="1600" b="0">
-                <a:solidFill>
-                  <a:srgbClr val="1E2024"/>
-                </a:solidFill>
-                <a:latin typeface="Calibri"/>
-              </a:rPr>
-              <a:t>C.  </a:t>
-            </a:r>
-            <a:r>
-              <a:rPr sz="1600" b="0">
-                <a:solidFill>
-                  <a:srgbClr val="1E2024"/>
-                </a:solidFill>
-                <a:latin typeface="Calibri"/>
-              </a:rPr>
-              <a:t>broker 自動降版</a:t>
+            <a:off x="640080" y="3922776"/>
+            <a:ext cx="10972800" cy="731520"/>
+          </a:xfrm>
+          <a:prstGeom prst="rect">
+            <a:avLst/>
+          </a:prstGeom>
+          <a:noFill/>
+        </p:spPr>
+        <p:txBody>
+          <a:bodyPr wrap="square">
+            <a:noAutofit/>
+          </a:bodyPr>
+          <a:lstStyle/>
+          <a:p>
+            <a:r>
+              <a:rPr sz="1500" b="0">
+                <a:solidFill>
+                  <a:srgbClr val="5F5E5A"/>
+                </a:solidFill>
+                <a:latin typeface="Calibri"/>
+              </a:rPr>
+              <a:t>銜接（非本場）：finalize / 升降當下的錯誤（INVALID_UPDATE_VERSION 等）屬「運行時的版本升降」那場，本場不展開。</a:t>
             </a:r>
           </a:p>
         </p:txBody>
@@ -4436,71 +4451,57 @@
         </p:nvSpPr>
         <p:spPr>
           <a:xfrm>
-            <a:off x="822960" y="4197096"/>
-            <a:ext cx="10515600" cy="493776"/>
-          </a:xfrm>
-          <a:prstGeom prst="rect">
-            <a:avLst/>
-          </a:prstGeom>
-          <a:noFill/>
-        </p:spPr>
-        <p:txBody>
-          <a:bodyPr wrap="square">
-            <a:noAutofit/>
-          </a:bodyPr>
-          <a:lstStyle/>
-          <a:p>
-            <a:r>
-              <a:rPr sz="1600" b="0">
-                <a:solidFill>
-                  <a:srgbClr val="1E2024"/>
-                </a:solidFill>
-                <a:latin typeface="Calibri"/>
-              </a:rPr>
-              <a:t>D.  </a:t>
-            </a:r>
-            <a:r>
-              <a:rPr sz="1600" b="0">
-                <a:solidFill>
-                  <a:srgbClr val="1E2024"/>
-                </a:solidFill>
-                <a:latin typeface="Calibri"/>
-              </a:rPr>
-              <a:t>忽略版本照跑</a:t>
-            </a:r>
-          </a:p>
-        </p:txBody>
-      </p:sp>
-      <p:sp>
-        <p:nvSpPr>
-          <p:cNvPr id="8" name="TextBox 7"/>
-          <p:cNvSpPr txBox="1"/>
-          <p:nvPr/>
-        </p:nvSpPr>
-        <p:spPr>
-          <a:xfrm>
-            <a:off x="640080" y="4910327"/>
-            <a:ext cx="10972800" cy="914400"/>
-          </a:xfrm>
-          <a:prstGeom prst="rect">
-            <a:avLst/>
-          </a:prstGeom>
-          <a:noFill/>
-        </p:spPr>
-        <p:txBody>
-          <a:bodyPr wrap="square">
-            <a:noAutofit/>
-          </a:bodyPr>
-          <a:lstStyle/>
-          <a:p>
-            <a:r>
-              <a:rPr sz="1400" b="0">
+            <a:off x="640080" y="6400800"/>
+            <a:ext cx="10972800" cy="384048"/>
+          </a:xfrm>
+          <a:prstGeom prst="rect">
+            <a:avLst/>
+          </a:prstGeom>
+          <a:noFill/>
+        </p:spPr>
+        <p:txBody>
+          <a:bodyPr wrap="square">
+            <a:noAutofit/>
+          </a:bodyPr>
+          <a:lstStyle/>
+          <a:p>
+            <a:r>
+              <a:rPr sz="1200" b="1">
                 <a:solidFill>
                   <a:srgbClr val="8A8A8A"/>
                 </a:solidFill>
                 <a:latin typeface="Calibri"/>
               </a:rPr>
-              <a:t>想一想 —— 下一頁公布答案</a:t>
+              <a:t>REF   </a:t>
+            </a:r>
+            <a:r>
+              <a:rPr sz="1200" b="0" u="sng">
+                <a:solidFill>
+                  <a:srgbClr val="185FA5"/>
+                </a:solidFill>
+                <a:latin typeface="Courier New"/>
+                <a:hlinkClick r:id="rId2"/>
+              </a:rPr>
+              <a:t>upgrade.md:229</a:t>
+            </a:r>
+            <a:r>
+              <a:rPr sz="1200" b="0">
+                <a:solidFill>
+                  <a:srgbClr val="8A8A8A"/>
+                </a:solidFill>
+                <a:latin typeface="Calibri"/>
+              </a:rPr>
+              <a:t>   ·   </a:t>
+            </a:r>
+            <a:r>
+              <a:rPr sz="1200" b="0" u="sng">
+                <a:solidFill>
+                  <a:srgbClr val="185FA5"/>
+                </a:solidFill>
+                <a:latin typeface="Courier New"/>
+                <a:hlinkClick r:id="rId3"/>
+              </a:rPr>
+              <a:t>FetchRequest.json validVersions</a:t>
             </a:r>
           </a:p>
         </p:txBody>
@@ -4552,7 +4553,7 @@
                 </a:solidFill>
                 <a:latin typeface="Calibri"/>
               </a:rPr>
-              <a:t>隨堂考 · 核心　（正解）</a:t>
+              <a:t>隨堂考 · 核心</a:t>
             </a:r>
           </a:p>
         </p:txBody>
@@ -4648,36 +4649,31 @@
           <a:prstGeom prst="rect">
             <a:avLst/>
           </a:prstGeom>
-          <a:solidFill>
-            <a:srgbClr val="E9F3DE"/>
-          </a:solidFill>
-          <a:ln>
-            <a:noFill/>
-          </a:ln>
-        </p:spPr>
-        <p:txBody>
-          <a:bodyPr wrap="square" lIns="128016" tIns="54864">
-            <a:noAutofit/>
-          </a:bodyPr>
-          <a:lstStyle/>
-          <a:p>
-            <a:r>
-              <a:rPr sz="1600" b="1">
-                <a:solidFill>
-                  <a:srgbClr val="27500A"/>
+          <a:noFill/>
+        </p:spPr>
+        <p:txBody>
+          <a:bodyPr wrap="square">
+            <a:noAutofit/>
+          </a:bodyPr>
+          <a:lstStyle/>
+          <a:p>
+            <a:r>
+              <a:rPr sz="1600" b="0">
+                <a:solidFill>
+                  <a:srgbClr val="1E2024"/>
                 </a:solidFill>
                 <a:latin typeface="Calibri"/>
               </a:rPr>
               <a:t>B.  </a:t>
             </a:r>
             <a:r>
-              <a:rPr sz="1600" b="1">
-                <a:solidFill>
-                  <a:srgbClr val="27500A"/>
-                </a:solidFill>
-                <a:latin typeface="Calibri"/>
-              </a:rPr>
-              <a:t>只有 ApiVersions 例外回錯誤+範圍；其他 API 關線   ✓</a:t>
+              <a:rPr sz="1600" b="0">
+                <a:solidFill>
+                  <a:srgbClr val="1E2024"/>
+                </a:solidFill>
+                <a:latin typeface="Calibri"/>
+              </a:rPr>
+              <a:t>只有 ApiVersions 例外回錯誤+範圍；其他 API 關線</a:t>
             </a:r>
           </a:p>
         </p:txBody>
@@ -4791,66 +4787,13 @@
           <a:lstStyle/>
           <a:p>
             <a:r>
-              <a:rPr sz="1400" b="1">
-                <a:solidFill>
-                  <a:srgbClr val="27500A"/>
-                </a:solidFill>
-                <a:latin typeface="Calibri"/>
-              </a:rPr>
-              <a:t>正解 B — </a:t>
-            </a:r>
-            <a:r>
               <a:rPr sz="1400" b="0">
                 <a:solidFill>
-                  <a:srgbClr val="1E2024"/>
-                </a:solidFill>
-                <a:latin typeface="Calibri"/>
-              </a:rPr>
-              <a:t>ApiVersions 是 bootstrap 逃生口；其他 API → broker 丟 UnsupportedVersionException → 斷線。</a:t>
-            </a:r>
-          </a:p>
-        </p:txBody>
-      </p:sp>
-      <p:sp>
-        <p:nvSpPr>
-          <p:cNvPr id="9" name="TextBox 8"/>
-          <p:cNvSpPr txBox="1"/>
-          <p:nvPr/>
-        </p:nvSpPr>
-        <p:spPr>
-          <a:xfrm>
-            <a:off x="640080" y="6400800"/>
-            <a:ext cx="10972800" cy="384048"/>
-          </a:xfrm>
-          <a:prstGeom prst="rect">
-            <a:avLst/>
-          </a:prstGeom>
-          <a:noFill/>
-        </p:spPr>
-        <p:txBody>
-          <a:bodyPr wrap="square">
-            <a:noAutofit/>
-          </a:bodyPr>
-          <a:lstStyle/>
-          <a:p>
-            <a:r>
-              <a:rPr sz="1200" b="1">
-                <a:solidFill>
                   <a:srgbClr val="8A8A8A"/>
                 </a:solidFill>
                 <a:latin typeface="Calibri"/>
               </a:rPr>
-              <a:t>REF   </a:t>
-            </a:r>
-            <a:r>
-              <a:rPr sz="1200" b="0" u="sng">
-                <a:solidFill>
-                  <a:srgbClr val="185FA5"/>
-                </a:solidFill>
-                <a:latin typeface="Courier New"/>
-                <a:hlinkClick r:id="rId2"/>
-              </a:rPr>
-              <a:t>RequestContext.java:112</a:t>
+              <a:t>想一想 —— 下一頁公布答案</a:t>
             </a:r>
           </a:p>
         </p:txBody>
@@ -4902,7 +4845,357 @@
                 </a:solidFill>
                 <a:latin typeface="Calibri"/>
               </a:rPr>
-              <a:t>Takeaways</a:t>
+              <a:t>隨堂考 · 核心　（正解）</a:t>
+            </a:r>
+          </a:p>
+        </p:txBody>
+      </p:sp>
+      <p:sp>
+        <p:nvSpPr>
+          <p:cNvPr id="3" name="TextBox 2"/>
+          <p:cNvSpPr txBox="1"/>
+          <p:nvPr/>
+        </p:nvSpPr>
+        <p:spPr>
+          <a:xfrm>
+            <a:off x="640080" y="841248"/>
+            <a:ext cx="10972800" cy="1188720"/>
+          </a:xfrm>
+          <a:prstGeom prst="rect">
+            <a:avLst/>
+          </a:prstGeom>
+          <a:noFill/>
+        </p:spPr>
+        <p:txBody>
+          <a:bodyPr wrap="square">
+            <a:noAutofit/>
+          </a:bodyPr>
+          <a:lstStyle/>
+          <a:p>
+            <a:r>
+              <a:rPr sz="2600" b="1">
+                <a:solidFill>
+                  <a:srgbClr val="1E2024"/>
+                </a:solidFill>
+                <a:latin typeface="Calibri"/>
+              </a:rPr>
+              <a:t>自刻 client 送了不支援的 API version，會怎樣？</a:t>
+            </a:r>
+          </a:p>
+        </p:txBody>
+      </p:sp>
+      <p:sp>
+        <p:nvSpPr>
+          <p:cNvPr id="4" name="TextBox 3"/>
+          <p:cNvSpPr txBox="1"/>
+          <p:nvPr/>
+        </p:nvSpPr>
+        <p:spPr>
+          <a:xfrm>
+            <a:off x="822960" y="2331720"/>
+            <a:ext cx="10515600" cy="493776"/>
+          </a:xfrm>
+          <a:prstGeom prst="rect">
+            <a:avLst/>
+          </a:prstGeom>
+          <a:noFill/>
+        </p:spPr>
+        <p:txBody>
+          <a:bodyPr wrap="square">
+            <a:noAutofit/>
+          </a:bodyPr>
+          <a:lstStyle/>
+          <a:p>
+            <a:r>
+              <a:rPr sz="1600" b="0">
+                <a:solidFill>
+                  <a:srgbClr val="1E2024"/>
+                </a:solidFill>
+                <a:latin typeface="Calibri"/>
+              </a:rPr>
+              <a:t>A.  </a:t>
+            </a:r>
+            <a:r>
+              <a:rPr sz="1600" b="0">
+                <a:solidFill>
+                  <a:srgbClr val="1E2024"/>
+                </a:solidFill>
+                <a:latin typeface="Calibri"/>
+              </a:rPr>
+              <a:t>一律回 UNSUPPORTED_VERSION</a:t>
+            </a:r>
+          </a:p>
+        </p:txBody>
+      </p:sp>
+      <p:sp>
+        <p:nvSpPr>
+          <p:cNvPr id="5" name="TextBox 4"/>
+          <p:cNvSpPr txBox="1"/>
+          <p:nvPr/>
+        </p:nvSpPr>
+        <p:spPr>
+          <a:xfrm>
+            <a:off x="822960" y="2953512"/>
+            <a:ext cx="10515600" cy="493776"/>
+          </a:xfrm>
+          <a:prstGeom prst="rect">
+            <a:avLst/>
+          </a:prstGeom>
+          <a:solidFill>
+            <a:srgbClr val="E9F3DE"/>
+          </a:solidFill>
+          <a:ln>
+            <a:noFill/>
+          </a:ln>
+        </p:spPr>
+        <p:txBody>
+          <a:bodyPr wrap="square" lIns="128016" tIns="54864">
+            <a:noAutofit/>
+          </a:bodyPr>
+          <a:lstStyle/>
+          <a:p>
+            <a:r>
+              <a:rPr sz="1600" b="1">
+                <a:solidFill>
+                  <a:srgbClr val="27500A"/>
+                </a:solidFill>
+                <a:latin typeface="Calibri"/>
+              </a:rPr>
+              <a:t>B.  </a:t>
+            </a:r>
+            <a:r>
+              <a:rPr sz="1600" b="1">
+                <a:solidFill>
+                  <a:srgbClr val="27500A"/>
+                </a:solidFill>
+                <a:latin typeface="Calibri"/>
+              </a:rPr>
+              <a:t>只有 ApiVersions 例外回錯誤+範圍；其他 API 關線   ✓</a:t>
+            </a:r>
+          </a:p>
+        </p:txBody>
+      </p:sp>
+      <p:sp>
+        <p:nvSpPr>
+          <p:cNvPr id="6" name="TextBox 5"/>
+          <p:cNvSpPr txBox="1"/>
+          <p:nvPr/>
+        </p:nvSpPr>
+        <p:spPr>
+          <a:xfrm>
+            <a:off x="822960" y="3575304"/>
+            <a:ext cx="10515600" cy="493776"/>
+          </a:xfrm>
+          <a:prstGeom prst="rect">
+            <a:avLst/>
+          </a:prstGeom>
+          <a:noFill/>
+        </p:spPr>
+        <p:txBody>
+          <a:bodyPr wrap="square">
+            <a:noAutofit/>
+          </a:bodyPr>
+          <a:lstStyle/>
+          <a:p>
+            <a:r>
+              <a:rPr sz="1600" b="0">
+                <a:solidFill>
+                  <a:srgbClr val="1E2024"/>
+                </a:solidFill>
+                <a:latin typeface="Calibri"/>
+              </a:rPr>
+              <a:t>C.  </a:t>
+            </a:r>
+            <a:r>
+              <a:rPr sz="1600" b="0">
+                <a:solidFill>
+                  <a:srgbClr val="1E2024"/>
+                </a:solidFill>
+                <a:latin typeface="Calibri"/>
+              </a:rPr>
+              <a:t>broker 自動降版</a:t>
+            </a:r>
+          </a:p>
+        </p:txBody>
+      </p:sp>
+      <p:sp>
+        <p:nvSpPr>
+          <p:cNvPr id="7" name="TextBox 6"/>
+          <p:cNvSpPr txBox="1"/>
+          <p:nvPr/>
+        </p:nvSpPr>
+        <p:spPr>
+          <a:xfrm>
+            <a:off x="822960" y="4197096"/>
+            <a:ext cx="10515600" cy="493776"/>
+          </a:xfrm>
+          <a:prstGeom prst="rect">
+            <a:avLst/>
+          </a:prstGeom>
+          <a:noFill/>
+        </p:spPr>
+        <p:txBody>
+          <a:bodyPr wrap="square">
+            <a:noAutofit/>
+          </a:bodyPr>
+          <a:lstStyle/>
+          <a:p>
+            <a:r>
+              <a:rPr sz="1600" b="0">
+                <a:solidFill>
+                  <a:srgbClr val="1E2024"/>
+                </a:solidFill>
+                <a:latin typeface="Calibri"/>
+              </a:rPr>
+              <a:t>D.  </a:t>
+            </a:r>
+            <a:r>
+              <a:rPr sz="1600" b="0">
+                <a:solidFill>
+                  <a:srgbClr val="1E2024"/>
+                </a:solidFill>
+                <a:latin typeface="Calibri"/>
+              </a:rPr>
+              <a:t>忽略版本照跑</a:t>
+            </a:r>
+          </a:p>
+        </p:txBody>
+      </p:sp>
+      <p:sp>
+        <p:nvSpPr>
+          <p:cNvPr id="8" name="TextBox 7"/>
+          <p:cNvSpPr txBox="1"/>
+          <p:nvPr/>
+        </p:nvSpPr>
+        <p:spPr>
+          <a:xfrm>
+            <a:off x="640080" y="4910327"/>
+            <a:ext cx="10972800" cy="914400"/>
+          </a:xfrm>
+          <a:prstGeom prst="rect">
+            <a:avLst/>
+          </a:prstGeom>
+          <a:noFill/>
+        </p:spPr>
+        <p:txBody>
+          <a:bodyPr wrap="square">
+            <a:noAutofit/>
+          </a:bodyPr>
+          <a:lstStyle/>
+          <a:p>
+            <a:r>
+              <a:rPr sz="1400" b="1">
+                <a:solidFill>
+                  <a:srgbClr val="27500A"/>
+                </a:solidFill>
+                <a:latin typeface="Calibri"/>
+              </a:rPr>
+              <a:t>正解 B — </a:t>
+            </a:r>
+            <a:r>
+              <a:rPr sz="1400" b="0">
+                <a:solidFill>
+                  <a:srgbClr val="1E2024"/>
+                </a:solidFill>
+                <a:latin typeface="Calibri"/>
+              </a:rPr>
+              <a:t>ApiVersions 是 bootstrap 逃生口；其他 API → broker 丟 UnsupportedVersionException → 斷線。</a:t>
+            </a:r>
+          </a:p>
+        </p:txBody>
+      </p:sp>
+      <p:sp>
+        <p:nvSpPr>
+          <p:cNvPr id="9" name="TextBox 8"/>
+          <p:cNvSpPr txBox="1"/>
+          <p:nvPr/>
+        </p:nvSpPr>
+        <p:spPr>
+          <a:xfrm>
+            <a:off x="640080" y="6400800"/>
+            <a:ext cx="10972800" cy="384048"/>
+          </a:xfrm>
+          <a:prstGeom prst="rect">
+            <a:avLst/>
+          </a:prstGeom>
+          <a:noFill/>
+        </p:spPr>
+        <p:txBody>
+          <a:bodyPr wrap="square">
+            <a:noAutofit/>
+          </a:bodyPr>
+          <a:lstStyle/>
+          <a:p>
+            <a:r>
+              <a:rPr sz="1200" b="1">
+                <a:solidFill>
+                  <a:srgbClr val="8A8A8A"/>
+                </a:solidFill>
+                <a:latin typeface="Calibri"/>
+              </a:rPr>
+              <a:t>REF   </a:t>
+            </a:r>
+            <a:r>
+              <a:rPr sz="1200" b="0" u="sng">
+                <a:solidFill>
+                  <a:srgbClr val="185FA5"/>
+                </a:solidFill>
+                <a:latin typeface="Courier New"/>
+                <a:hlinkClick r:id="rId2"/>
+              </a:rPr>
+              <a:t>RequestContext.java:112</a:t>
+            </a:r>
+          </a:p>
+        </p:txBody>
+      </p:sp>
+    </p:spTree>
+  </p:cSld>
+  <p:clrMapOvr>
+    <a:masterClrMapping/>
+  </p:clrMapOvr>
+</p:sld>
+</file>
+
+<file path=ppt/slides/slide16.xml><?xml version="1.0" encoding="utf-8"?>
+<p:sld xmlns:a="http://schemas.openxmlformats.org/drawingml/2006/main" xmlns:p="http://schemas.openxmlformats.org/presentationml/2006/main" xmlns:r="http://schemas.openxmlformats.org/officeDocument/2006/relationships">
+  <p:cSld>
+    <p:spTree>
+      <p:nvGrpSpPr>
+        <p:cNvPr id="1" name=""/>
+        <p:cNvGrpSpPr/>
+        <p:nvPr/>
+      </p:nvGrpSpPr>
+      <p:grpSpPr/>
+      <p:sp>
+        <p:nvSpPr>
+          <p:cNvPr id="2" name="TextBox 1"/>
+          <p:cNvSpPr txBox="1"/>
+          <p:nvPr/>
+        </p:nvSpPr>
+        <p:spPr>
+          <a:xfrm>
+            <a:off x="640080" y="457200"/>
+            <a:ext cx="10972800" cy="365760"/>
+          </a:xfrm>
+          <a:prstGeom prst="rect">
+            <a:avLst/>
+          </a:prstGeom>
+          <a:noFill/>
+        </p:spPr>
+        <p:txBody>
+          <a:bodyPr wrap="square">
+            <a:noAutofit/>
+          </a:bodyPr>
+          <a:lstStyle/>
+          <a:p>
+            <a:r>
+              <a:rPr sz="1300" b="1">
+                <a:solidFill>
+                  <a:srgbClr val="185FA5"/>
+                </a:solidFill>
+                <a:latin typeface="Calibri"/>
+              </a:rPr>
+              <a:t>Recap</a:t>
             </a:r>
           </a:p>
         </p:txBody>
@@ -4994,7 +5287,7 @@
                 </a:solidFill>
                 <a:latin typeface="Calibri"/>
               </a:rPr>
-              <a:t>叢集三種通訊：client↔broker、broker↔controller、broker↔broker——版本機制都掛在這三條線</a:t>
+              <a:t>三種通訊：client↔broker、broker↔controller、broker↔broker——版本機制都掛在這三條線</a:t>
             </a:r>
           </a:p>
         </p:txBody>
@@ -5032,7 +5325,7 @@
         <p:spPr>
           <a:xfrm>
             <a:off x="1078992" y="3136392"/>
-            <a:ext cx="10515600" cy="493776"/>
+            <a:ext cx="10515600" cy="841248"/>
           </a:xfrm>
           <a:prstGeom prst="rect">
             <a:avLst/>
@@ -5052,7 +5345,7 @@
                 </a:solidFill>
                 <a:latin typeface="Calibri"/>
               </a:rPr>
-              <a:t>無法「一個版本打天下」：client 長壽、broker 滾動升級，只能連線當下協商</a:t>
+              <a:t>Part 1：不能「一個版本打天下」（client 長壽、broker 滾動升級）；多數路徑靠協商，只有複製面由 finalized MV 決定</a:t>
             </a:r>
           </a:p>
         </p:txBody>
@@ -5073,7 +5366,7 @@
         </p:blipFill>
         <p:spPr>
           <a:xfrm>
-            <a:off x="658368" y="3803904"/>
+            <a:off x="658368" y="4151376"/>
             <a:ext cx="274320" cy="274320"/>
           </a:xfrm>
           <a:prstGeom prst="rect">
@@ -5089,7 +5382,7 @@
         </p:nvSpPr>
         <p:spPr>
           <a:xfrm>
-            <a:off x="1078992" y="3776472"/>
+            <a:off x="1078992" y="4123944"/>
             <a:ext cx="10515600" cy="841248"/>
           </a:xfrm>
           <a:prstGeom prst="rect">
@@ -5110,65 +5403,7 @@
                 </a:solidFill>
                 <a:latin typeface="Calibri"/>
               </a:rPr>
-              <a:t>多數路徑靠 ApiVersions 協商；只有複製面由 finalized MV 決定</a:t>
-            </a:r>
-          </a:p>
-        </p:txBody>
-      </p:sp>
-      <p:pic>
-        <p:nvPicPr>
-          <p:cNvPr id="10" name="Picture 9" descr="point.png"/>
-          <p:cNvPicPr>
-            <a:picLocks noChangeAspect="1"/>
-          </p:cNvPicPr>
-          <p:nvPr/>
-        </p:nvPicPr>
-        <p:blipFill>
-          <a:blip r:embed="rId2"/>
-          <a:stretch>
-            <a:fillRect/>
-          </a:stretch>
-        </p:blipFill>
-        <p:spPr>
-          <a:xfrm>
-            <a:off x="658368" y="4791456"/>
-            <a:ext cx="274320" cy="274320"/>
-          </a:xfrm>
-          <a:prstGeom prst="rect">
-            <a:avLst/>
-          </a:prstGeom>
-        </p:spPr>
-      </p:pic>
-      <p:sp>
-        <p:nvSpPr>
-          <p:cNvPr id="11" name="TextBox 10"/>
-          <p:cNvSpPr txBox="1"/>
-          <p:nvPr/>
-        </p:nvSpPr>
-        <p:spPr>
-          <a:xfrm>
-            <a:off x="1078992" y="4764024"/>
-            <a:ext cx="10515600" cy="841248"/>
-          </a:xfrm>
-          <a:prstGeom prst="rect">
-            <a:avLst/>
-          </a:prstGeom>
-          <a:noFill/>
-        </p:spPr>
-        <p:txBody>
-          <a:bodyPr wrap="square">
-            <a:noAutofit/>
-          </a:bodyPr>
-          <a:lstStyle/>
-          <a:p>
-            <a:r>
-              <a:rPr sz="1650" b="0">
-                <a:solidFill>
-                  <a:srgbClr val="1E2024"/>
-                </a:solidFill>
-                <a:latin typeface="Calibri"/>
-              </a:rPr>
-              <a:t>協商不出版本 → UnsupportedVersionException（多在送出前中止）；升降錯誤交給運行時那場</a:t>
+              <a:t>Part 2：協商不出版本 → UnsupportedVersionException（多在送出前中止）；finalize／升降的錯誤交給運行時那場</a:t>
             </a:r>
           </a:p>
         </p:txBody>
@@ -5220,7 +5455,7 @@
                 </a:solidFill>
                 <a:latin typeface="Calibri"/>
               </a:rPr>
-              <a:t>點題</a:t>
+              <a:t>本場大綱</a:t>
             </a:r>
           </a:p>
         </p:txBody>
@@ -5254,14 +5489,14 @@
                 </a:solidFill>
                 <a:latin typeface="Calibri"/>
               </a:rPr>
-              <a:t>為什麼不「一個版本打天下」？</a:t>
+              <a:t>兩段，加 3 題隨堂考穿插</a:t>
             </a:r>
           </a:p>
         </p:txBody>
       </p:sp>
       <p:pic>
         <p:nvPicPr>
-          <p:cNvPr id="4" name="Picture 3" descr="bulb.png"/>
+          <p:cNvPr id="4" name="Picture 3" descr="point.png"/>
           <p:cNvPicPr>
             <a:picLocks noChangeAspect="1"/>
           </p:cNvPicPr>
@@ -5312,69 +5547,28 @@
                 </a:solidFill>
                 <a:latin typeface="Calibri"/>
               </a:rPr>
-              <a:t>初學者常有的直覺：client 與 broker 使用同一個版本，升級時一併更新</a:t>
-            </a:r>
-          </a:p>
-        </p:txBody>
-      </p:sp>
-      <p:sp>
-        <p:nvSpPr>
-          <p:cNvPr id="6" name="TextBox 5"/>
-          <p:cNvSpPr txBox="1"/>
-          <p:nvPr/>
-        </p:nvSpPr>
-        <p:spPr>
-          <a:xfrm>
-            <a:off x="640080" y="2788920"/>
-            <a:ext cx="10972800" cy="548640"/>
-          </a:xfrm>
-          <a:prstGeom prst="rect">
-            <a:avLst/>
-          </a:prstGeom>
-          <a:solidFill>
-            <a:srgbClr val="F3F1EC"/>
-          </a:solidFill>
-          <a:ln w="6350">
-            <a:solidFill>
-              <a:srgbClr val="E3E0D8"/>
-            </a:solidFill>
-          </a:ln>
-        </p:spPr>
-        <p:txBody>
-          <a:bodyPr wrap="square" lIns="146304" tIns="91440" bIns="91440">
-            <a:noAutofit/>
-          </a:bodyPr>
-          <a:lstStyle/>
-          <a:p>
-            <a:r>
-              <a:rPr sz="1350" b="0">
-                <a:solidFill>
-                  <a:srgbClr val="2C2C2A"/>
-                </a:solidFill>
-                <a:latin typeface="Calibri"/>
-              </a:rPr>
-              <a:t>想像中：  client v4.1 ─────── broker v4.1</a:t>
+              <a:t>Part 1 — 版本為何要在連線當下協商、又是怎麼選的</a:t>
             </a:r>
           </a:p>
         </p:txBody>
       </p:sp>
       <p:pic>
         <p:nvPicPr>
-          <p:cNvPr id="7" name="Picture 6" descr="help-circle.png"/>
+          <p:cNvPr id="6" name="Picture 5" descr="point.png"/>
           <p:cNvPicPr>
             <a:picLocks noChangeAspect="1"/>
           </p:cNvPicPr>
           <p:nvPr/>
         </p:nvPicPr>
         <p:blipFill>
-          <a:blip r:embed="rId3"/>
+          <a:blip r:embed="rId2"/>
           <a:stretch>
             <a:fillRect/>
           </a:stretch>
         </p:blipFill>
         <p:spPr>
           <a:xfrm>
-            <a:off x="658368" y="3566160"/>
+            <a:off x="658368" y="2816352"/>
             <a:ext cx="274320" cy="274320"/>
           </a:xfrm>
           <a:prstGeom prst="rect">
@@ -5384,78 +5578,68 @@
       </p:pic>
       <p:sp>
         <p:nvSpPr>
+          <p:cNvPr id="7" name="TextBox 6"/>
+          <p:cNvSpPr txBox="1"/>
+          <p:nvPr/>
+        </p:nvSpPr>
+        <p:spPr>
+          <a:xfrm>
+            <a:off x="1078992" y="2788920"/>
+            <a:ext cx="10515600" cy="493776"/>
+          </a:xfrm>
+          <a:prstGeom prst="rect">
+            <a:avLst/>
+          </a:prstGeom>
+          <a:noFill/>
+        </p:spPr>
+        <p:txBody>
+          <a:bodyPr wrap="square">
+            <a:noAutofit/>
+          </a:bodyPr>
+          <a:lstStyle/>
+          <a:p>
+            <a:r>
+              <a:rPr sz="1650" b="0">
+                <a:solidFill>
+                  <a:srgbClr val="1E2024"/>
+                </a:solidFill>
+                <a:latin typeface="Calibri"/>
+              </a:rPr>
+              <a:t>Part 2 — 協商失敗時，會看到什麼訊息</a:t>
+            </a:r>
+          </a:p>
+        </p:txBody>
+      </p:sp>
+      <p:sp>
+        <p:nvSpPr>
           <p:cNvPr id="8" name="TextBox 7"/>
           <p:cNvSpPr txBox="1"/>
           <p:nvPr/>
         </p:nvSpPr>
         <p:spPr>
           <a:xfrm>
-            <a:off x="1078992" y="3538728"/>
-            <a:ext cx="10515600" cy="493776"/>
-          </a:xfrm>
-          <a:prstGeom prst="rect">
-            <a:avLst/>
-          </a:prstGeom>
-          <a:noFill/>
-        </p:spPr>
-        <p:txBody>
-          <a:bodyPr wrap="square">
-            <a:noAutofit/>
-          </a:bodyPr>
-          <a:lstStyle/>
-          <a:p>
-            <a:r>
-              <a:rPr sz="1650" b="0">
-                <a:solidFill>
-                  <a:srgbClr val="1E2024"/>
-                </a:solidFill>
-                <a:latin typeface="Calibri"/>
-              </a:rPr>
-              <a:t>但只要叢集達到一定規模，這個假設就不再成立</a:t>
-            </a:r>
-          </a:p>
-        </p:txBody>
-      </p:sp>
-      <p:sp>
-        <p:nvSpPr>
-          <p:cNvPr id="9" name="TextBox 8"/>
-          <p:cNvSpPr txBox="1"/>
-          <p:nvPr/>
-        </p:nvSpPr>
-        <p:spPr>
-          <a:xfrm>
-            <a:off x="640080" y="6400800"/>
-            <a:ext cx="10972800" cy="384048"/>
-          </a:xfrm>
-          <a:prstGeom prst="rect">
-            <a:avLst/>
-          </a:prstGeom>
-          <a:noFill/>
-        </p:spPr>
-        <p:txBody>
-          <a:bodyPr wrap="square">
-            <a:noAutofit/>
-          </a:bodyPr>
-          <a:lstStyle/>
-          <a:p>
-            <a:r>
-              <a:rPr sz="1200" b="1">
-                <a:solidFill>
-                  <a:srgbClr val="8A8A8A"/>
-                </a:solidFill>
-                <a:latin typeface="Calibri"/>
-              </a:rPr>
-              <a:t>REF   </a:t>
-            </a:r>
-            <a:r>
-              <a:rPr sz="1200" b="0" u="sng">
-                <a:solidFill>
-                  <a:srgbClr val="185FA5"/>
-                </a:solidFill>
-                <a:latin typeface="Courier New"/>
-                <a:hlinkClick r:id="rId4"/>
-              </a:rPr>
-              <a:t>protocol.md:94</a:t>
+            <a:off x="640080" y="3429000"/>
+            <a:ext cx="10972800" cy="438912"/>
+          </a:xfrm>
+          <a:prstGeom prst="rect">
+            <a:avLst/>
+          </a:prstGeom>
+          <a:noFill/>
+        </p:spPr>
+        <p:txBody>
+          <a:bodyPr wrap="square">
+            <a:noAutofit/>
+          </a:bodyPr>
+          <a:lstStyle/>
+          <a:p>
+            <a:r>
+              <a:rPr sz="1500" b="0">
+                <a:solidFill>
+                  <a:srgbClr val="5F5E5A"/>
+                </a:solidFill>
+                <a:latin typeface="Calibri"/>
+              </a:rPr>
+              <a:t>結尾會用一頁 Recap 把兩段串回開場那個問題。</a:t>
             </a:r>
           </a:p>
         </p:txBody>
@@ -5507,7 +5691,7 @@
                 </a:solidFill>
                 <a:latin typeface="Calibri"/>
               </a:rPr>
-              <a:t>Part 1 · 地圖</a:t>
+              <a:t>點題</a:t>
             </a:r>
           </a:p>
         </p:txBody>
@@ -5541,21 +5725,79 @@
                 </a:solidFill>
                 <a:latin typeface="Calibri"/>
               </a:rPr>
-              <a:t>叢集裡有三種通訊，而且版本天生對不齊</a:t>
-            </a:r>
-          </a:p>
-        </p:txBody>
-      </p:sp>
-      <p:sp>
-        <p:nvSpPr>
-          <p:cNvPr id="4" name="TextBox 3"/>
-          <p:cNvSpPr txBox="1"/>
-          <p:nvPr/>
-        </p:nvSpPr>
-        <p:spPr>
-          <a:xfrm>
-            <a:off x="640080" y="2148840"/>
-            <a:ext cx="10972800" cy="1097280"/>
+              <a:t>為什麼不「一個版本打天下」？</a:t>
+            </a:r>
+          </a:p>
+        </p:txBody>
+      </p:sp>
+      <p:pic>
+        <p:nvPicPr>
+          <p:cNvPr id="4" name="Picture 3" descr="bulb.png"/>
+          <p:cNvPicPr>
+            <a:picLocks noChangeAspect="1"/>
+          </p:cNvPicPr>
+          <p:nvPr/>
+        </p:nvPicPr>
+        <p:blipFill>
+          <a:blip r:embed="rId2"/>
+          <a:stretch>
+            <a:fillRect/>
+          </a:stretch>
+        </p:blipFill>
+        <p:spPr>
+          <a:xfrm>
+            <a:off x="658368" y="2176272"/>
+            <a:ext cx="274320" cy="274320"/>
+          </a:xfrm>
+          <a:prstGeom prst="rect">
+            <a:avLst/>
+          </a:prstGeom>
+        </p:spPr>
+      </p:pic>
+      <p:sp>
+        <p:nvSpPr>
+          <p:cNvPr id="5" name="TextBox 4"/>
+          <p:cNvSpPr txBox="1"/>
+          <p:nvPr/>
+        </p:nvSpPr>
+        <p:spPr>
+          <a:xfrm>
+            <a:off x="1078992" y="2148840"/>
+            <a:ext cx="10515600" cy="493776"/>
+          </a:xfrm>
+          <a:prstGeom prst="rect">
+            <a:avLst/>
+          </a:prstGeom>
+          <a:noFill/>
+        </p:spPr>
+        <p:txBody>
+          <a:bodyPr wrap="square">
+            <a:noAutofit/>
+          </a:bodyPr>
+          <a:lstStyle/>
+          <a:p>
+            <a:r>
+              <a:rPr sz="1650" b="0">
+                <a:solidFill>
+                  <a:srgbClr val="1E2024"/>
+                </a:solidFill>
+                <a:latin typeface="Calibri"/>
+              </a:rPr>
+              <a:t>初學者常有的直覺：client 與 broker 使用同一個版本，升級時一併更新</a:t>
+            </a:r>
+          </a:p>
+        </p:txBody>
+      </p:sp>
+      <p:sp>
+        <p:nvSpPr>
+          <p:cNvPr id="6" name="TextBox 5"/>
+          <p:cNvSpPr txBox="1"/>
+          <p:nvPr/>
+        </p:nvSpPr>
+        <p:spPr>
+          <a:xfrm>
+            <a:off x="640080" y="2788920"/>
+            <a:ext cx="10972800" cy="548640"/>
           </a:xfrm>
           <a:prstGeom prst="rect">
             <a:avLst/>
@@ -5582,94 +5824,14 @@
                 </a:solidFill>
                 <a:latin typeface="Calibri"/>
               </a:rPr>
-              <a:t>client ─▶ broker        讀寫資料</a:t>
-            </a:r>
-          </a:p>
-          <a:p>
-            <a:r>
-              <a:rPr sz="1350" b="0">
-                <a:solidFill>
-                  <a:srgbClr val="2C2C2A"/>
-                </a:solidFill>
-                <a:latin typeface="Calibri"/>
-              </a:rPr>
-              <a:t>broker ─▶ controller    心跳 / 註冊</a:t>
-            </a:r>
-          </a:p>
-          <a:p>
-            <a:r>
-              <a:rPr sz="1350" b="0">
-                <a:solidFill>
-                  <a:srgbClr val="2C2C2A"/>
-                </a:solidFill>
-                <a:latin typeface="Calibri"/>
-              </a:rPr>
-              <a:t>broker ◀▶ broker        複製</a:t>
+              <a:t>想像中：  client v4.1 ─────── broker v4.1</a:t>
             </a:r>
           </a:p>
         </p:txBody>
       </p:sp>
       <p:pic>
         <p:nvPicPr>
-          <p:cNvPr id="5" name="Picture 4" descr="clock-hour-4.png"/>
-          <p:cNvPicPr>
-            <a:picLocks noChangeAspect="1"/>
-          </p:cNvPicPr>
-          <p:nvPr/>
-        </p:nvPicPr>
-        <p:blipFill>
-          <a:blip r:embed="rId2"/>
-          <a:stretch>
-            <a:fillRect/>
-          </a:stretch>
-        </p:blipFill>
-        <p:spPr>
-          <a:xfrm>
-            <a:off x="658368" y="3474720"/>
-            <a:ext cx="274320" cy="274320"/>
-          </a:xfrm>
-          <a:prstGeom prst="rect">
-            <a:avLst/>
-          </a:prstGeom>
-        </p:spPr>
-      </p:pic>
-      <p:sp>
-        <p:nvSpPr>
-          <p:cNvPr id="6" name="TextBox 5"/>
-          <p:cNvSpPr txBox="1"/>
-          <p:nvPr/>
-        </p:nvSpPr>
-        <p:spPr>
-          <a:xfrm>
-            <a:off x="1078992" y="3447288"/>
-            <a:ext cx="10515600" cy="841248"/>
-          </a:xfrm>
-          <a:prstGeom prst="rect">
-            <a:avLst/>
-          </a:prstGeom>
-          <a:noFill/>
-        </p:spPr>
-        <p:txBody>
-          <a:bodyPr wrap="square">
-            <a:noAutofit/>
-          </a:bodyPr>
-          <a:lstStyle/>
-          <a:p>
-            <a:r>
-              <a:rPr sz="1650" b="0">
-                <a:solidFill>
-                  <a:srgbClr val="1E2024"/>
-                </a:solidFill>
-                <a:latin typeface="Calibri"/>
-              </a:rPr>
-              <a:t>client 內嵌在各 app、長期不更新（Kafka 曾為舊 client 保留每個 protocol 版本近九年，4.0／KIP-896 才把下限提到 2.1）</a:t>
-            </a:r>
-          </a:p>
-        </p:txBody>
-      </p:sp>
-      <p:pic>
-        <p:nvPicPr>
-          <p:cNvPr id="7" name="Picture 6" descr="server-2.png"/>
+          <p:cNvPr id="7" name="Picture 6" descr="help-circle.png"/>
           <p:cNvPicPr>
             <a:picLocks noChangeAspect="1"/>
           </p:cNvPicPr>
@@ -5683,7 +5845,7 @@
         </p:blipFill>
         <p:spPr>
           <a:xfrm>
-            <a:off x="658368" y="4462272"/>
+            <a:off x="658368" y="3566160"/>
             <a:ext cx="274320" cy="274320"/>
           </a:xfrm>
           <a:prstGeom prst="rect">
@@ -5699,7 +5861,7 @@
         </p:nvSpPr>
         <p:spPr>
           <a:xfrm>
-            <a:off x="1078992" y="4434840"/>
+            <a:off x="1078992" y="3538728"/>
             <a:ext cx="10515600" cy="493776"/>
           </a:xfrm>
           <a:prstGeom prst="rect">
@@ -5720,7 +5882,7 @@
                 </a:solidFill>
                 <a:latin typeface="Calibri"/>
               </a:rPr>
-              <a:t>broker 逐台滾動升級，過程必然新舊並存；要不停機就不能要求全叢集同版</a:t>
+              <a:t>但只要叢集達到一定規模，這個假設就不再成立</a:t>
             </a:r>
           </a:p>
         </p:txBody>
@@ -5728,45 +5890,6 @@
       <p:sp>
         <p:nvSpPr>
           <p:cNvPr id="9" name="TextBox 8"/>
-          <p:cNvSpPr txBox="1"/>
-          <p:nvPr/>
-        </p:nvSpPr>
-        <p:spPr>
-          <a:xfrm>
-            <a:off x="640080" y="5074920"/>
-            <a:ext cx="10972800" cy="566928"/>
-          </a:xfrm>
-          <a:prstGeom prst="rect">
-            <a:avLst/>
-          </a:prstGeom>
-          <a:solidFill>
-            <a:srgbClr val="E9F3DE"/>
-          </a:solidFill>
-          <a:ln>
-            <a:noFill/>
-          </a:ln>
-        </p:spPr>
-        <p:txBody>
-          <a:bodyPr wrap="square" lIns="146304" tIns="82296">
-            <a:noAutofit/>
-          </a:bodyPr>
-          <a:lstStyle/>
-          <a:p>
-            <a:r>
-              <a:rPr sz="1500" b="0">
-                <a:solidFill>
-                  <a:srgbClr val="27500A"/>
-                </a:solidFill>
-                <a:latin typeface="Calibri"/>
-              </a:rPr>
-              <a:t>所以版本只能在連線當下協商——後面每個機制都掛在上面這三條線</a:t>
-            </a:r>
-          </a:p>
-        </p:txBody>
-      </p:sp>
-      <p:sp>
-        <p:nvSpPr>
-          <p:cNvPr id="10" name="TextBox 9"/>
           <p:cNvSpPr txBox="1"/>
           <p:nvPr/>
         </p:nvSpPr>
@@ -5800,48 +5923,10 @@
                 <a:solidFill>
                   <a:srgbClr val="185FA5"/>
                 </a:solidFill>
-                <a:latin typeface="Calibri"/>
+                <a:latin typeface="Courier New"/>
                 <a:hlinkClick r:id="rId4"/>
               </a:rPr>
-              <a:t>KIP-896</a:t>
-            </a:r>
-            <a:r>
-              <a:rPr sz="1200" b="0">
-                <a:solidFill>
-                  <a:srgbClr val="8A8A8A"/>
-                </a:solidFill>
-                <a:latin typeface="Calibri"/>
-              </a:rPr>
-              <a:t>   ·   </a:t>
-            </a:r>
-            <a:r>
-              <a:rPr sz="1200" b="0" u="sng">
-                <a:solidFill>
-                  <a:srgbClr val="185FA5"/>
-                </a:solidFill>
-                <a:latin typeface="Courier New"/>
-                <a:hlinkClick r:id="rId5"/>
-              </a:rPr>
               <a:t>protocol.md:94</a:t>
-            </a:r>
-            <a:r>
-              <a:rPr sz="1200" b="0">
-                <a:solidFill>
-                  <a:srgbClr val="8A8A8A"/>
-                </a:solidFill>
-                <a:latin typeface="Calibri"/>
-              </a:rPr>
-              <a:t>   ·   </a:t>
-            </a:r>
-            <a:r>
-              <a:rPr sz="1200" b="0" u="sng">
-                <a:solidFill>
-                  <a:srgbClr val="185FA5"/>
-                </a:solidFill>
-                <a:latin typeface="Calibri"/>
-                <a:hlinkClick r:id="rId6"/>
-              </a:rPr>
-              <a:t>KIP-35</a:t>
             </a:r>
           </a:p>
         </p:txBody>
@@ -5893,7 +5978,7 @@
                 </a:solidFill>
                 <a:latin typeface="Calibri"/>
               </a:rPr>
-              <a:t>Part 1 · 三層 scope</a:t>
+              <a:t>Part 1 · 地圖</a:t>
             </a:r>
           </a:p>
         </p:txBody>
@@ -5927,7 +6012,7 @@
                 </a:solidFill>
                 <a:latin typeface="Calibri"/>
               </a:rPr>
-              <a:t>一個版本號不夠：三種 scope 互斥</a:t>
+              <a:t>叢集裡有三種通訊，而且版本天生對不齊</a:t>
             </a:r>
           </a:p>
         </p:txBody>
@@ -5968,7 +6053,7 @@
                 </a:solidFill>
                 <a:latin typeface="Calibri"/>
               </a:rPr>
-              <a:t>release version   = 我裝了哪版 binary   (per-node)</a:t>
+              <a:t>client ─▶ broker        讀寫資料、查 metadata…</a:t>
             </a:r>
           </a:p>
           <a:p>
@@ -5979,7 +6064,7 @@
                 </a:solidFill>
                 <a:latin typeface="Calibri"/>
               </a:rPr>
-              <a:t>metadata.version  = 叢集一致的能力世代   (cluster-wide, finalize)</a:t>
+              <a:t>broker ─▶ controller    註冊、心跳、AlterPartition、轉發 admin…</a:t>
             </a:r>
           </a:p>
           <a:p>
@@ -5990,14 +6075,48 @@
                 </a:solidFill>
                 <a:latin typeface="Calibri"/>
               </a:rPr>
-              <a:t>wire API version  = 這條連線講第幾版     (per-connection)</a:t>
+              <a:t>broker ◀▶ broker        複製（follower 抓 leader）</a:t>
+            </a:r>
+          </a:p>
+        </p:txBody>
+      </p:sp>
+      <p:sp>
+        <p:nvSpPr>
+          <p:cNvPr id="5" name="TextBox 4"/>
+          <p:cNvSpPr txBox="1"/>
+          <p:nvPr/>
+        </p:nvSpPr>
+        <p:spPr>
+          <a:xfrm>
+            <a:off x="640080" y="3447288"/>
+            <a:ext cx="10972800" cy="438912"/>
+          </a:xfrm>
+          <a:prstGeom prst="rect">
+            <a:avLst/>
+          </a:prstGeom>
+          <a:noFill/>
+        </p:spPr>
+        <p:txBody>
+          <a:bodyPr wrap="square">
+            <a:noAutofit/>
+          </a:bodyPr>
+          <a:lstStyle/>
+          <a:p>
+            <a:r>
+              <a:rPr sz="1500" b="0">
+                <a:solidFill>
+                  <a:srgbClr val="5F5E5A"/>
+                </a:solidFill>
+                <a:latin typeface="Calibri"/>
+              </a:rPr>
+              <a:t>每列只列代表性的幾種、非窮舉；重點是「就這三條線」。</a:t>
             </a:r>
           </a:p>
         </p:txBody>
       </p:sp>
       <p:pic>
         <p:nvPicPr>
-          <p:cNvPr id="5" name="Picture 4" descr="arrows-split.png"/>
+          <p:cNvPr id="6" name="Picture 5" descr="clock-hour-4.png"/>
           <p:cNvPicPr>
             <a:picLocks noChangeAspect="1"/>
           </p:cNvPicPr>
@@ -6011,7 +6130,7 @@
         </p:blipFill>
         <p:spPr>
           <a:xfrm>
-            <a:off x="658368" y="3474720"/>
+            <a:off x="658368" y="4041648"/>
             <a:ext cx="274320" cy="274320"/>
           </a:xfrm>
           <a:prstGeom prst="rect">
@@ -6021,13 +6140,71 @@
       </p:pic>
       <p:sp>
         <p:nvSpPr>
-          <p:cNvPr id="6" name="TextBox 5"/>
-          <p:cNvSpPr txBox="1"/>
-          <p:nvPr/>
-        </p:nvSpPr>
-        <p:spPr>
-          <a:xfrm>
-            <a:off x="1078992" y="3447288"/>
+          <p:cNvPr id="7" name="TextBox 6"/>
+          <p:cNvSpPr txBox="1"/>
+          <p:nvPr/>
+        </p:nvSpPr>
+        <p:spPr>
+          <a:xfrm>
+            <a:off x="1078992" y="4014215"/>
+            <a:ext cx="10515600" cy="841248"/>
+          </a:xfrm>
+          <a:prstGeom prst="rect">
+            <a:avLst/>
+          </a:prstGeom>
+          <a:noFill/>
+        </p:spPr>
+        <p:txBody>
+          <a:bodyPr wrap="square">
+            <a:noAutofit/>
+          </a:bodyPr>
+          <a:lstStyle/>
+          <a:p>
+            <a:r>
+              <a:rPr sz="1650" b="0">
+                <a:solidFill>
+                  <a:srgbClr val="1E2024"/>
+                </a:solidFill>
+                <a:latin typeface="Calibri"/>
+              </a:rPr>
+              <a:t>client 內嵌在各 app、長期不更新（Kafka 曾為舊 client 保留每個 protocol 版本近九年，4.0／KIP-896 才把下限提到 2.1）</a:t>
+            </a:r>
+          </a:p>
+        </p:txBody>
+      </p:sp>
+      <p:pic>
+        <p:nvPicPr>
+          <p:cNvPr id="8" name="Picture 7" descr="server-2.png"/>
+          <p:cNvPicPr>
+            <a:picLocks noChangeAspect="1"/>
+          </p:cNvPicPr>
+          <p:nvPr/>
+        </p:nvPicPr>
+        <p:blipFill>
+          <a:blip r:embed="rId3"/>
+          <a:stretch>
+            <a:fillRect/>
+          </a:stretch>
+        </p:blipFill>
+        <p:spPr>
+          <a:xfrm>
+            <a:off x="658368" y="5029200"/>
+            <a:ext cx="274320" cy="274320"/>
+          </a:xfrm>
+          <a:prstGeom prst="rect">
+            <a:avLst/>
+          </a:prstGeom>
+        </p:spPr>
+      </p:pic>
+      <p:sp>
+        <p:nvSpPr>
+          <p:cNvPr id="9" name="TextBox 8"/>
+          <p:cNvSpPr txBox="1"/>
+          <p:nvPr/>
+        </p:nvSpPr>
+        <p:spPr>
+          <a:xfrm>
+            <a:off x="1078992" y="5001768"/>
             <a:ext cx="10515600" cy="493776"/>
           </a:xfrm>
           <a:prstGeom prst="rect">
@@ -6048,20 +6225,20 @@
                 </a:solidFill>
                 <a:latin typeface="Calibri"/>
               </a:rPr>
-              <a:t>三層不會同步變動、scope 也不同，多數版本問題的根源都在於此</a:t>
-            </a:r>
-          </a:p>
-        </p:txBody>
-      </p:sp>
-      <p:sp>
-        <p:nvSpPr>
-          <p:cNvPr id="7" name="TextBox 6"/>
-          <p:cNvSpPr txBox="1"/>
-          <p:nvPr/>
-        </p:nvSpPr>
-        <p:spPr>
-          <a:xfrm>
-            <a:off x="640080" y="4087368"/>
+              <a:t>broker 逐台滾動升級，過程必然新舊並存；要不停機就不能要求全叢集同版</a:t>
+            </a:r>
+          </a:p>
+        </p:txBody>
+      </p:sp>
+      <p:sp>
+        <p:nvSpPr>
+          <p:cNvPr id="10" name="TextBox 9"/>
+          <p:cNvSpPr txBox="1"/>
+          <p:nvPr/>
+        </p:nvSpPr>
+        <p:spPr>
+          <a:xfrm>
+            <a:off x="640080" y="5641848"/>
             <a:ext cx="10972800" cy="566928"/>
           </a:xfrm>
           <a:prstGeom prst="rect">
@@ -6087,14 +6264,14 @@
                 </a:solidFill>
                 <a:latin typeface="Calibri"/>
               </a:rPr>
-              <a:t>單一版本號無法同時表達三種 scope，只能拆成三層各自管</a:t>
-            </a:r>
-          </a:p>
-        </p:txBody>
-      </p:sp>
-      <p:sp>
-        <p:nvSpPr>
-          <p:cNvPr id="8" name="TextBox 7"/>
+              <a:t>所以版本只能在連線當下協商——後面每個機制都掛在上面這三條線</a:t>
+            </a:r>
+          </a:p>
+        </p:txBody>
+      </p:sp>
+      <p:sp>
+        <p:nvSpPr>
+          <p:cNvPr id="11" name="TextBox 10"/>
           <p:cNvSpPr txBox="1"/>
           <p:nvPr/>
         </p:nvSpPr>
@@ -6124,13 +6301,33 @@
               <a:t>REF   </a:t>
             </a:r>
             <a:r>
+              <a:rPr sz="1200" b="0" u="sng">
+                <a:solidFill>
+                  <a:srgbClr val="185FA5"/>
+                </a:solidFill>
+                <a:latin typeface="Calibri"/>
+                <a:hlinkClick r:id="rId4"/>
+              </a:rPr>
+              <a:t>KIP-896</a:t>
+            </a:r>
+            <a:r>
               <a:rPr sz="1200" b="0">
                 <a:solidFill>
                   <a:srgbClr val="8A8A8A"/>
                 </a:solidFill>
                 <a:latin typeface="Calibri"/>
               </a:rPr>
-              <a:t>kafka-features describe</a:t>
+              <a:t>   ·   </a:t>
+            </a:r>
+            <a:r>
+              <a:rPr sz="1200" b="0" u="sng">
+                <a:solidFill>
+                  <a:srgbClr val="185FA5"/>
+                </a:solidFill>
+                <a:latin typeface="Courier New"/>
+                <a:hlinkClick r:id="rId5"/>
+              </a:rPr>
+              <a:t>protocol.md:94</a:t>
             </a:r>
             <a:r>
               <a:rPr sz="1200" b="0">
@@ -6146,10 +6343,10 @@
                 <a:solidFill>
                   <a:srgbClr val="185FA5"/>
                 </a:solidFill>
-                <a:latin typeface="Courier New"/>
-                <a:hlinkClick r:id="rId3"/>
-              </a:rPr>
-              <a:t>zk2kraft.md:71</a:t>
+                <a:latin typeface="Calibri"/>
+                <a:hlinkClick r:id="rId6"/>
+              </a:rPr>
+              <a:t>KIP-35</a:t>
             </a:r>
           </a:p>
         </p:txBody>
@@ -6201,7 +6398,7 @@
                 </a:solidFill>
                 <a:latin typeface="Calibri"/>
               </a:rPr>
-              <a:t>Part 1 · 選版機制</a:t>
+              <a:t>Part 1 · 三層 scope</a:t>
             </a:r>
           </a:p>
         </p:txBody>
@@ -6235,79 +6432,21 @@
                 </a:solidFill>
                 <a:latin typeface="Calibri"/>
               </a:rPr>
-              <a:t>回到三個角色：各自怎麼選版</a:t>
-            </a:r>
-          </a:p>
-        </p:txBody>
-      </p:sp>
-      <p:pic>
-        <p:nvPicPr>
-          <p:cNvPr id="4" name="Picture 3" descr="arrows-split.png"/>
-          <p:cNvPicPr>
-            <a:picLocks noChangeAspect="1"/>
-          </p:cNvPicPr>
-          <p:nvPr/>
-        </p:nvPicPr>
-        <p:blipFill>
-          <a:blip r:embed="rId2"/>
-          <a:stretch>
-            <a:fillRect/>
-          </a:stretch>
-        </p:blipFill>
-        <p:spPr>
-          <a:xfrm>
-            <a:off x="658368" y="2176272"/>
-            <a:ext cx="274320" cy="274320"/>
-          </a:xfrm>
-          <a:prstGeom prst="rect">
-            <a:avLst/>
-          </a:prstGeom>
-        </p:spPr>
-      </p:pic>
-      <p:sp>
-        <p:nvSpPr>
-          <p:cNvPr id="5" name="TextBox 4"/>
-          <p:cNvSpPr txBox="1"/>
-          <p:nvPr/>
-        </p:nvSpPr>
-        <p:spPr>
-          <a:xfrm>
-            <a:off x="1078992" y="2148840"/>
-            <a:ext cx="10515600" cy="841248"/>
-          </a:xfrm>
-          <a:prstGeom prst="rect">
-            <a:avLst/>
-          </a:prstGeom>
-          <a:noFill/>
-        </p:spPr>
-        <p:txBody>
-          <a:bodyPr wrap="square">
-            <a:noAutofit/>
-          </a:bodyPr>
-          <a:lstStyle/>
-          <a:p>
-            <a:r>
-              <a:rPr sz="1650" b="0">
-                <a:solidFill>
-                  <a:srgbClr val="1E2024"/>
-                </a:solidFill>
-                <a:latin typeface="Calibri"/>
-              </a:rPr>
-              <a:t>底層都先做 ApiVersions 握手（共用同一顆 NetworkClient）；決定版本的是 request Builder 留多少空間</a:t>
-            </a:r>
-          </a:p>
-        </p:txBody>
-      </p:sp>
-      <p:sp>
-        <p:nvSpPr>
-          <p:cNvPr id="6" name="TextBox 5"/>
-          <p:cNvSpPr txBox="1"/>
-          <p:nvPr/>
-        </p:nvSpPr>
-        <p:spPr>
-          <a:xfrm>
-            <a:off x="640080" y="3136392"/>
-            <a:ext cx="10972800" cy="1371600"/>
+              <a:t>一個版本號不夠：三種 scope 互斥</a:t>
+            </a:r>
+          </a:p>
+        </p:txBody>
+      </p:sp>
+      <p:sp>
+        <p:nvSpPr>
+          <p:cNvPr id="4" name="TextBox 3"/>
+          <p:cNvSpPr txBox="1"/>
+          <p:nvPr/>
+        </p:nvSpPr>
+        <p:spPr>
+          <a:xfrm>
+            <a:off x="640080" y="2148840"/>
+            <a:ext cx="10972800" cy="1097280"/>
           </a:xfrm>
           <a:prstGeom prst="rect">
             <a:avLst/>
@@ -6334,7 +6473,7 @@
                 </a:solidFill>
                 <a:latin typeface="Calibri"/>
               </a:rPr>
-              <a:t>client ↔ broker       協商，取交集最高</a:t>
+              <a:t>release version   = 我裝了哪版 binary   (per-node)</a:t>
             </a:r>
           </a:p>
           <a:p>
@@ -6345,7 +6484,7 @@
                 </a:solidFill>
                 <a:latin typeface="Calibri"/>
               </a:rPr>
-              <a:t>broker ↔ controller   也協商（broker 當 client：heartbeat / registration）</a:t>
+              <a:t>metadata.version  = 叢集一致的能力世代   (cluster-wide, finalize)</a:t>
             </a:r>
           </a:p>
           <a:p>
@@ -6356,7 +6495,65 @@
                 </a:solidFill>
                 <a:latin typeface="Calibri"/>
               </a:rPr>
-              <a:t>broker ↔ broker 複製   Fetch 由 MV 決定、ListOffsets 以 MV 為上限</a:t>
+              <a:t>wire API version  = 這條連線講第幾版     (per-connection)</a:t>
+            </a:r>
+          </a:p>
+        </p:txBody>
+      </p:sp>
+      <p:pic>
+        <p:nvPicPr>
+          <p:cNvPr id="5" name="Picture 4" descr="arrows-split.png"/>
+          <p:cNvPicPr>
+            <a:picLocks noChangeAspect="1"/>
+          </p:cNvPicPr>
+          <p:nvPr/>
+        </p:nvPicPr>
+        <p:blipFill>
+          <a:blip r:embed="rId2"/>
+          <a:stretch>
+            <a:fillRect/>
+          </a:stretch>
+        </p:blipFill>
+        <p:spPr>
+          <a:xfrm>
+            <a:off x="658368" y="3474720"/>
+            <a:ext cx="274320" cy="274320"/>
+          </a:xfrm>
+          <a:prstGeom prst="rect">
+            <a:avLst/>
+          </a:prstGeom>
+        </p:spPr>
+      </p:pic>
+      <p:sp>
+        <p:nvSpPr>
+          <p:cNvPr id="6" name="TextBox 5"/>
+          <p:cNvSpPr txBox="1"/>
+          <p:nvPr/>
+        </p:nvSpPr>
+        <p:spPr>
+          <a:xfrm>
+            <a:off x="1078992" y="3447288"/>
+            <a:ext cx="10515600" cy="493776"/>
+          </a:xfrm>
+          <a:prstGeom prst="rect">
+            <a:avLst/>
+          </a:prstGeom>
+          <a:noFill/>
+        </p:spPr>
+        <p:txBody>
+          <a:bodyPr wrap="square">
+            <a:noAutofit/>
+          </a:bodyPr>
+          <a:lstStyle/>
+          <a:p>
+            <a:r>
+              <a:rPr sz="1650" b="0">
+                <a:solidFill>
+                  <a:srgbClr val="1E2024"/>
+                </a:solidFill>
+                <a:latin typeface="Calibri"/>
+              </a:rPr>
+              <a:t>三層不會同步變動、scope 也不同，多數版本問題的根源都在於此</a:t>
             </a:r>
           </a:p>
         </p:txBody>
@@ -6369,8 +6566,8 @@
         </p:nvSpPr>
         <p:spPr>
           <a:xfrm>
-            <a:off x="640080" y="4709160"/>
-            <a:ext cx="10972800" cy="877824"/>
+            <a:off x="640080" y="4087368"/>
+            <a:ext cx="10972800" cy="566928"/>
           </a:xfrm>
           <a:prstGeom prst="rect">
             <a:avLst/>
@@ -6395,7 +6592,7 @@
                 </a:solidFill>
                 <a:latin typeface="Calibri"/>
               </a:rPr>
-              <a:t>MV 只影響複製用的 Fetch / ListOffsets；client、controller 那兩條都是協商</a:t>
+              <a:t>單一版本號無法同時表達三種 scope，只能拆成三層各自管</a:t>
             </a:r>
           </a:p>
         </p:txBody>
@@ -6432,6 +6629,24 @@
               <a:t>REF   </a:t>
             </a:r>
             <a:r>
+              <a:rPr sz="1200" b="0">
+                <a:solidFill>
+                  <a:srgbClr val="8A8A8A"/>
+                </a:solidFill>
+                <a:latin typeface="Calibri"/>
+              </a:rPr>
+              <a:t>kafka-features describe</a:t>
+            </a:r>
+            <a:r>
+              <a:rPr sz="1200" b="0">
+                <a:solidFill>
+                  <a:srgbClr val="8A8A8A"/>
+                </a:solidFill>
+                <a:latin typeface="Calibri"/>
+              </a:rPr>
+              <a:t>   ·   </a:t>
+            </a:r>
+            <a:r>
               <a:rPr sz="1200" b="0" u="sng">
                 <a:solidFill>
                   <a:srgbClr val="185FA5"/>
@@ -6439,45 +6654,7 @@
                 <a:latin typeface="Courier New"/>
                 <a:hlinkClick r:id="rId3"/>
               </a:rPr>
-              <a:t>latestUsableVersion</a:t>
-            </a:r>
-            <a:r>
-              <a:rPr sz="1200" b="0">
-                <a:solidFill>
-                  <a:srgbClr val="8A8A8A"/>
-                </a:solidFill>
-                <a:latin typeface="Calibri"/>
-              </a:rPr>
-              <a:t>   ·   </a:t>
-            </a:r>
-            <a:r>
-              <a:rPr sz="1200" b="0" u="sng">
-                <a:solidFill>
-                  <a:srgbClr val="185FA5"/>
-                </a:solidFill>
-                <a:latin typeface="Courier New"/>
-                <a:hlinkClick r:id="rId4"/>
-              </a:rPr>
-              <a:t>fetchRequestVersion</a:t>
-            </a:r>
-            <a:r>
-              <a:rPr sz="1200" b="0">
-                <a:solidFill>
-                  <a:srgbClr val="8A8A8A"/>
-                </a:solidFill>
-                <a:latin typeface="Calibri"/>
-              </a:rPr>
-              <a:t>   ·   </a:t>
-            </a:r>
-            <a:r>
-              <a:rPr sz="1200" b="0" u="sng">
-                <a:solidFill>
-                  <a:srgbClr val="185FA5"/>
-                </a:solidFill>
-                <a:latin typeface="Courier New"/>
-                <a:hlinkClick r:id="rId5"/>
-              </a:rPr>
-              <a:t>javadoc</a:t>
+              <a:t>zk2kraft.md:71</a:t>
             </a:r>
           </a:p>
         </p:txBody>
@@ -6529,7 +6706,7 @@
                 </a:solidFill>
                 <a:latin typeface="Calibri"/>
               </a:rPr>
-              <a:t>Part 1 · 舉例</a:t>
+              <a:t>Part 1 · 選版機制</a:t>
             </a:r>
           </a:p>
         </p:txBody>
@@ -6542,69 +6719,35 @@
         </p:nvSpPr>
         <p:spPr>
           <a:xfrm>
-            <a:off x="640080" y="822960"/>
-            <a:ext cx="10972800" cy="640080"/>
-          </a:xfrm>
-          <a:prstGeom prst="rect">
-            <a:avLst/>
-          </a:prstGeom>
-          <a:noFill/>
-        </p:spPr>
-        <p:txBody>
-          <a:bodyPr wrap="square">
-            <a:noAutofit/>
-          </a:bodyPr>
-          <a:lstStyle/>
-          <a:p>
-            <a:r>
-              <a:rPr sz="3000" b="1">
+            <a:off x="640080" y="841248"/>
+            <a:ext cx="10972800" cy="1005840"/>
+          </a:xfrm>
+          <a:prstGeom prst="rect">
+            <a:avLst/>
+          </a:prstGeom>
+          <a:noFill/>
+        </p:spPr>
+        <p:txBody>
+          <a:bodyPr wrap="square">
+            <a:noAutofit/>
+          </a:bodyPr>
+          <a:lstStyle/>
+          <a:p>
+            <a:r>
+              <a:rPr sz="3200" b="1">
                 <a:solidFill>
                   <a:srgbClr val="1E2024"/>
                 </a:solidFill>
                 <a:latin typeface="Calibri"/>
               </a:rPr>
-              <a:t>以一支 Fetch 為例：cb 協商、bb 由 MV</a:t>
-            </a:r>
-          </a:p>
-        </p:txBody>
-      </p:sp>
-      <p:sp>
-        <p:nvSpPr>
-          <p:cNvPr id="4" name="TextBox 3"/>
-          <p:cNvSpPr txBox="1"/>
-          <p:nvPr/>
-        </p:nvSpPr>
-        <p:spPr>
-          <a:xfrm>
-            <a:off x="640080" y="1481328"/>
-            <a:ext cx="10972800" cy="365760"/>
-          </a:xfrm>
-          <a:prstGeom prst="rect">
-            <a:avLst/>
-          </a:prstGeom>
-          <a:noFill/>
-        </p:spPr>
-        <p:txBody>
-          <a:bodyPr wrap="square">
-            <a:noAutofit/>
-          </a:bodyPr>
-          <a:lstStyle/>
-          <a:p>
-            <a:r>
-              <a:rPr sz="1400" b="0">
-                <a:solidFill>
-                  <a:srgbClr val="5F5E5A"/>
-                </a:solidFill>
-                <a:latin typeface="Calibri"/>
-              </a:rPr>
-              <a:t>同一支 Fetch 兩條線都會走：consumer fetch 是 cb、replica fetch 是 bb</a:t>
+              <a:t>回到三個角色：各自怎麼選版</a:t>
             </a:r>
           </a:p>
         </p:txBody>
       </p:sp>
       <p:pic>
         <p:nvPicPr>
-          <p:cNvPr id="5" name="Picture 4" descr="s2a-rangeline.png"/>
+          <p:cNvPr id="4" name="Picture 3" descr="arrows-split.png"/>
           <p:cNvPicPr>
             <a:picLocks noChangeAspect="1"/>
           </p:cNvPicPr>
@@ -6618,8 +6761,8 @@
         </p:blipFill>
         <p:spPr>
           <a:xfrm>
-            <a:off x="1664208" y="1965960"/>
-            <a:ext cx="8869680" cy="4093698"/>
+            <a:off x="658368" y="2176272"/>
+            <a:ext cx="274320" cy="274320"/>
           </a:xfrm>
           <a:prstGeom prst="rect">
             <a:avLst/>
@@ -6628,7 +6771,143 @@
       </p:pic>
       <p:sp>
         <p:nvSpPr>
+          <p:cNvPr id="5" name="TextBox 4"/>
+          <p:cNvSpPr txBox="1"/>
+          <p:nvPr/>
+        </p:nvSpPr>
+        <p:spPr>
+          <a:xfrm>
+            <a:off x="1078992" y="2148840"/>
+            <a:ext cx="10515600" cy="841248"/>
+          </a:xfrm>
+          <a:prstGeom prst="rect">
+            <a:avLst/>
+          </a:prstGeom>
+          <a:noFill/>
+        </p:spPr>
+        <p:txBody>
+          <a:bodyPr wrap="square">
+            <a:noAutofit/>
+          </a:bodyPr>
+          <a:lstStyle/>
+          <a:p>
+            <a:r>
+              <a:rPr sz="1650" b="0">
+                <a:solidFill>
+                  <a:srgbClr val="1E2024"/>
+                </a:solidFill>
+                <a:latin typeface="Calibri"/>
+              </a:rPr>
+              <a:t>底層都先做 ApiVersions 握手（共用同一顆 NetworkClient）；決定版本的是 request Builder 留多少空間</a:t>
+            </a:r>
+          </a:p>
+        </p:txBody>
+      </p:sp>
+      <p:sp>
+        <p:nvSpPr>
           <p:cNvPr id="6" name="TextBox 5"/>
+          <p:cNvSpPr txBox="1"/>
+          <p:nvPr/>
+        </p:nvSpPr>
+        <p:spPr>
+          <a:xfrm>
+            <a:off x="640080" y="3136392"/>
+            <a:ext cx="10972800" cy="1371600"/>
+          </a:xfrm>
+          <a:prstGeom prst="rect">
+            <a:avLst/>
+          </a:prstGeom>
+          <a:solidFill>
+            <a:srgbClr val="F3F1EC"/>
+          </a:solidFill>
+          <a:ln w="6350">
+            <a:solidFill>
+              <a:srgbClr val="E3E0D8"/>
+            </a:solidFill>
+          </a:ln>
+        </p:spPr>
+        <p:txBody>
+          <a:bodyPr wrap="square" lIns="146304" tIns="91440" bIns="91440">
+            <a:noAutofit/>
+          </a:bodyPr>
+          <a:lstStyle/>
+          <a:p>
+            <a:r>
+              <a:rPr sz="1350" b="0">
+                <a:solidFill>
+                  <a:srgbClr val="2C2C2A"/>
+                </a:solidFill>
+                <a:latin typeface="Calibri"/>
+              </a:rPr>
+              <a:t>client ↔ broker       協商，取交集最高</a:t>
+            </a:r>
+          </a:p>
+          <a:p>
+            <a:r>
+              <a:rPr sz="1350" b="0">
+                <a:solidFill>
+                  <a:srgbClr val="2C2C2A"/>
+                </a:solidFill>
+                <a:latin typeface="Calibri"/>
+              </a:rPr>
+              <a:t>broker ↔ controller   也協商（broker 當 client：heartbeat / registration）</a:t>
+            </a:r>
+          </a:p>
+          <a:p>
+            <a:r>
+              <a:rPr sz="1350" b="0">
+                <a:solidFill>
+                  <a:srgbClr val="2C2C2A"/>
+                </a:solidFill>
+                <a:latin typeface="Calibri"/>
+              </a:rPr>
+              <a:t>broker ↔ broker 複製   Fetch 由 MV 決定、ListOffsets 以 MV 為上限</a:t>
+            </a:r>
+          </a:p>
+        </p:txBody>
+      </p:sp>
+      <p:sp>
+        <p:nvSpPr>
+          <p:cNvPr id="7" name="TextBox 6"/>
+          <p:cNvSpPr txBox="1"/>
+          <p:nvPr/>
+        </p:nvSpPr>
+        <p:spPr>
+          <a:xfrm>
+            <a:off x="640080" y="4709160"/>
+            <a:ext cx="10972800" cy="877824"/>
+          </a:xfrm>
+          <a:prstGeom prst="rect">
+            <a:avLst/>
+          </a:prstGeom>
+          <a:solidFill>
+            <a:srgbClr val="E9F3DE"/>
+          </a:solidFill>
+          <a:ln>
+            <a:noFill/>
+          </a:ln>
+        </p:spPr>
+        <p:txBody>
+          <a:bodyPr wrap="square" lIns="146304" tIns="82296">
+            <a:noAutofit/>
+          </a:bodyPr>
+          <a:lstStyle/>
+          <a:p>
+            <a:r>
+              <a:rPr sz="1500" b="0">
+                <a:solidFill>
+                  <a:srgbClr val="27500A"/>
+                </a:solidFill>
+                <a:latin typeface="Calibri"/>
+              </a:rPr>
+              <a:t>MV 只影響複製用的 Fetch / ListOffsets；client、controller 那兩條都是協商</a:t>
+            </a:r>
+          </a:p>
+        </p:txBody>
+      </p:sp>
+      <p:sp>
+        <p:nvSpPr>
+          <p:cNvPr id="8" name="TextBox 7"/>
           <p:cNvSpPr txBox="1"/>
           <p:nvPr/>
         </p:nvSpPr>
@@ -6665,7 +6944,7 @@
                 <a:latin typeface="Courier New"/>
                 <a:hlinkClick r:id="rId3"/>
               </a:rPr>
-              <a:t>forConsumer/forReplica</a:t>
+              <a:t>latestUsableVersion</a:t>
             </a:r>
             <a:r>
               <a:rPr sz="1200" b="0">
@@ -6703,7 +6982,7 @@
                 <a:latin typeface="Courier New"/>
                 <a:hlinkClick r:id="rId5"/>
               </a:rPr>
-              <a:t>validVersions</a:t>
+              <a:t>javadoc</a:t>
             </a:r>
           </a:p>
         </p:txBody>
@@ -6755,7 +7034,7 @@
                 </a:solidFill>
                 <a:latin typeface="Calibri"/>
               </a:rPr>
-              <a:t>隨堂考 · 暖身</a:t>
+              <a:t>Part 1 · 舉例</a:t>
             </a:r>
           </a:p>
         </p:txBody>
@@ -6768,28 +7047,28 @@
         </p:nvSpPr>
         <p:spPr>
           <a:xfrm>
-            <a:off x="640080" y="841248"/>
-            <a:ext cx="10972800" cy="1188720"/>
-          </a:xfrm>
-          <a:prstGeom prst="rect">
-            <a:avLst/>
-          </a:prstGeom>
-          <a:noFill/>
-        </p:spPr>
-        <p:txBody>
-          <a:bodyPr wrap="square">
-            <a:noAutofit/>
-          </a:bodyPr>
-          <a:lstStyle/>
-          <a:p>
-            <a:r>
-              <a:rPr sz="2600" b="1">
+            <a:off x="640080" y="822960"/>
+            <a:ext cx="10972800" cy="640080"/>
+          </a:xfrm>
+          <a:prstGeom prst="rect">
+            <a:avLst/>
+          </a:prstGeom>
+          <a:noFill/>
+        </p:spPr>
+        <p:txBody>
+          <a:bodyPr wrap="square">
+            <a:noAutofit/>
+          </a:bodyPr>
+          <a:lstStyle/>
+          <a:p>
+            <a:r>
+              <a:rPr sz="2900" b="1">
                 <a:solidFill>
                   <a:srgbClr val="1E2024"/>
                 </a:solidFill>
                 <a:latin typeface="Calibri"/>
               </a:rPr>
-              <a:t>可以「一個版本打天下」嗎？</a:t>
+              <a:t>以一支 Fetch 為例：consumer 協商、replica 由 MV</a:t>
             </a:r>
           </a:p>
         </p:txBody>
@@ -6802,84 +7081,56 @@
         </p:nvSpPr>
         <p:spPr>
           <a:xfrm>
-            <a:off x="822960" y="2331720"/>
-            <a:ext cx="10515600" cy="493776"/>
-          </a:xfrm>
-          <a:prstGeom prst="rect">
-            <a:avLst/>
-          </a:prstGeom>
-          <a:noFill/>
-        </p:spPr>
-        <p:txBody>
-          <a:bodyPr wrap="square">
-            <a:noAutofit/>
-          </a:bodyPr>
-          <a:lstStyle/>
-          <a:p>
-            <a:r>
-              <a:rPr sz="1600" b="0">
-                <a:solidFill>
-                  <a:srgbClr val="1E2024"/>
-                </a:solidFill>
-                <a:latin typeface="Calibri"/>
-              </a:rPr>
-              <a:t>A.  </a:t>
-            </a:r>
-            <a:r>
-              <a:rPr sz="1600" b="0">
-                <a:solidFill>
-                  <a:srgbClr val="1E2024"/>
-                </a:solidFill>
-                <a:latin typeface="Calibri"/>
-              </a:rPr>
-              <a:t>可以，大家同一版一起升</a:t>
-            </a:r>
-          </a:p>
-        </p:txBody>
-      </p:sp>
-      <p:sp>
-        <p:nvSpPr>
-          <p:cNvPr id="5" name="TextBox 4"/>
-          <p:cNvSpPr txBox="1"/>
-          <p:nvPr/>
-        </p:nvSpPr>
-        <p:spPr>
-          <a:xfrm>
-            <a:off x="822960" y="2953512"/>
-            <a:ext cx="10515600" cy="493776"/>
-          </a:xfrm>
-          <a:prstGeom prst="rect">
-            <a:avLst/>
-          </a:prstGeom>
-          <a:noFill/>
-        </p:spPr>
-        <p:txBody>
-          <a:bodyPr wrap="square">
-            <a:noAutofit/>
-          </a:bodyPr>
-          <a:lstStyle/>
-          <a:p>
-            <a:r>
-              <a:rPr sz="1600" b="0">
-                <a:solidFill>
-                  <a:srgbClr val="1E2024"/>
-                </a:solidFill>
-                <a:latin typeface="Calibri"/>
-              </a:rPr>
-              <a:t>B.  </a:t>
-            </a:r>
-            <a:r>
-              <a:rPr sz="1600" b="0">
-                <a:solidFill>
-                  <a:srgbClr val="1E2024"/>
-                </a:solidFill>
-                <a:latin typeface="Calibri"/>
-              </a:rPr>
-              <a:t>不行——client 長壽 + 要不停機，得溝通當下協商</a:t>
-            </a:r>
-          </a:p>
-        </p:txBody>
-      </p:sp>
+            <a:off x="640080" y="1481328"/>
+            <a:ext cx="10972800" cy="365760"/>
+          </a:xfrm>
+          <a:prstGeom prst="rect">
+            <a:avLst/>
+          </a:prstGeom>
+          <a:noFill/>
+        </p:spPr>
+        <p:txBody>
+          <a:bodyPr wrap="square">
+            <a:noAutofit/>
+          </a:bodyPr>
+          <a:lstStyle/>
+          <a:p>
+            <a:r>
+              <a:rPr sz="1400" b="0">
+                <a:solidFill>
+                  <a:srgbClr val="5F5E5A"/>
+                </a:solidFill>
+                <a:latin typeface="Calibri"/>
+              </a:rPr>
+              <a:t>同一支 Fetch 兩種身分：consumer fetch 走 client↔broker、replica fetch 走 broker↔broker</a:t>
+            </a:r>
+          </a:p>
+        </p:txBody>
+      </p:sp>
+      <p:pic>
+        <p:nvPicPr>
+          <p:cNvPr id="5" name="Picture 4" descr="s2a-rangeline.png"/>
+          <p:cNvPicPr>
+            <a:picLocks noChangeAspect="1"/>
+          </p:cNvPicPr>
+          <p:nvPr/>
+        </p:nvPicPr>
+        <p:blipFill>
+          <a:blip r:embed="rId2"/>
+          <a:stretch>
+            <a:fillRect/>
+          </a:stretch>
+        </p:blipFill>
+        <p:spPr>
+          <a:xfrm>
+            <a:off x="1664208" y="1965960"/>
+            <a:ext cx="8869680" cy="4093698"/>
+          </a:xfrm>
+          <a:prstGeom prst="rect">
+            <a:avLst/>
+          </a:prstGeom>
+        </p:spPr>
+      </p:pic>
       <p:sp>
         <p:nvSpPr>
           <p:cNvPr id="6" name="TextBox 5"/>
@@ -6888,114 +7139,76 @@
         </p:nvSpPr>
         <p:spPr>
           <a:xfrm>
-            <a:off x="822960" y="3575304"/>
-            <a:ext cx="10515600" cy="493776"/>
-          </a:xfrm>
-          <a:prstGeom prst="rect">
-            <a:avLst/>
-          </a:prstGeom>
-          <a:noFill/>
-        </p:spPr>
-        <p:txBody>
-          <a:bodyPr wrap="square">
-            <a:noAutofit/>
-          </a:bodyPr>
-          <a:lstStyle/>
-          <a:p>
-            <a:r>
-              <a:rPr sz="1600" b="0">
-                <a:solidFill>
-                  <a:srgbClr val="1E2024"/>
-                </a:solidFill>
-                <a:latin typeface="Calibri"/>
-              </a:rPr>
-              <a:t>C.  </a:t>
-            </a:r>
-            <a:r>
-              <a:rPr sz="1600" b="0">
-                <a:solidFill>
-                  <a:srgbClr val="1E2024"/>
-                </a:solidFill>
-                <a:latin typeface="Calibri"/>
-              </a:rPr>
-              <a:t>可以，只要都 4.x</a:t>
-            </a:r>
-          </a:p>
-        </p:txBody>
-      </p:sp>
-      <p:sp>
-        <p:nvSpPr>
-          <p:cNvPr id="7" name="TextBox 6"/>
-          <p:cNvSpPr txBox="1"/>
-          <p:nvPr/>
-        </p:nvSpPr>
-        <p:spPr>
-          <a:xfrm>
-            <a:off x="822960" y="4197096"/>
-            <a:ext cx="10515600" cy="493776"/>
-          </a:xfrm>
-          <a:prstGeom prst="rect">
-            <a:avLst/>
-          </a:prstGeom>
-          <a:noFill/>
-        </p:spPr>
-        <p:txBody>
-          <a:bodyPr wrap="square">
-            <a:noAutofit/>
-          </a:bodyPr>
-          <a:lstStyle/>
-          <a:p>
-            <a:r>
-              <a:rPr sz="1600" b="0">
-                <a:solidFill>
-                  <a:srgbClr val="1E2024"/>
-                </a:solidFill>
-                <a:latin typeface="Calibri"/>
-              </a:rPr>
-              <a:t>D.  </a:t>
-            </a:r>
-            <a:r>
-              <a:rPr sz="1600" b="0">
-                <a:solidFill>
-                  <a:srgbClr val="1E2024"/>
-                </a:solidFill>
-                <a:latin typeface="Calibri"/>
-              </a:rPr>
-              <a:t>看 broker 數量</a:t>
-            </a:r>
-          </a:p>
-        </p:txBody>
-      </p:sp>
-      <p:sp>
-        <p:nvSpPr>
-          <p:cNvPr id="8" name="TextBox 7"/>
-          <p:cNvSpPr txBox="1"/>
-          <p:nvPr/>
-        </p:nvSpPr>
-        <p:spPr>
-          <a:xfrm>
-            <a:off x="640080" y="4910327"/>
-            <a:ext cx="10972800" cy="914400"/>
-          </a:xfrm>
-          <a:prstGeom prst="rect">
-            <a:avLst/>
-          </a:prstGeom>
-          <a:noFill/>
-        </p:spPr>
-        <p:txBody>
-          <a:bodyPr wrap="square">
-            <a:noAutofit/>
-          </a:bodyPr>
-          <a:lstStyle/>
-          <a:p>
-            <a:r>
-              <a:rPr sz="1400" b="0">
+            <a:off x="640080" y="6400800"/>
+            <a:ext cx="10972800" cy="384048"/>
+          </a:xfrm>
+          <a:prstGeom prst="rect">
+            <a:avLst/>
+          </a:prstGeom>
+          <a:noFill/>
+        </p:spPr>
+        <p:txBody>
+          <a:bodyPr wrap="square">
+            <a:noAutofit/>
+          </a:bodyPr>
+          <a:lstStyle/>
+          <a:p>
+            <a:r>
+              <a:rPr sz="1200" b="1">
                 <a:solidFill>
                   <a:srgbClr val="8A8A8A"/>
                 </a:solidFill>
                 <a:latin typeface="Calibri"/>
               </a:rPr>
-              <a:t>想一想 —— 下一頁公布答案</a:t>
+              <a:t>REF   </a:t>
+            </a:r>
+            <a:r>
+              <a:rPr sz="1200" b="0" u="sng">
+                <a:solidFill>
+                  <a:srgbClr val="185FA5"/>
+                </a:solidFill>
+                <a:latin typeface="Courier New"/>
+                <a:hlinkClick r:id="rId3"/>
+              </a:rPr>
+              <a:t>forConsumer/forReplica</a:t>
+            </a:r>
+            <a:r>
+              <a:rPr sz="1200" b="0">
+                <a:solidFill>
+                  <a:srgbClr val="8A8A8A"/>
+                </a:solidFill>
+                <a:latin typeface="Calibri"/>
+              </a:rPr>
+              <a:t>   ·   </a:t>
+            </a:r>
+            <a:r>
+              <a:rPr sz="1200" b="0" u="sng">
+                <a:solidFill>
+                  <a:srgbClr val="185FA5"/>
+                </a:solidFill>
+                <a:latin typeface="Courier New"/>
+                <a:hlinkClick r:id="rId4"/>
+              </a:rPr>
+              <a:t>fetchRequestVersion</a:t>
+            </a:r>
+            <a:r>
+              <a:rPr sz="1200" b="0">
+                <a:solidFill>
+                  <a:srgbClr val="8A8A8A"/>
+                </a:solidFill>
+                <a:latin typeface="Calibri"/>
+              </a:rPr>
+              <a:t>   ·   </a:t>
+            </a:r>
+            <a:r>
+              <a:rPr sz="1200" b="0" u="sng">
+                <a:solidFill>
+                  <a:srgbClr val="185FA5"/>
+                </a:solidFill>
+                <a:latin typeface="Courier New"/>
+                <a:hlinkClick r:id="rId5"/>
+              </a:rPr>
+              <a:t>validVersions</a:t>
             </a:r>
           </a:p>
         </p:txBody>
@@ -7047,7 +7260,7 @@
                 </a:solidFill>
                 <a:latin typeface="Calibri"/>
               </a:rPr>
-              <a:t>隨堂考 · 暖身　（正解）</a:t>
+              <a:t>隨堂考 · 暖身</a:t>
             </a:r>
           </a:p>
         </p:txBody>
@@ -7143,36 +7356,31 @@
           <a:prstGeom prst="rect">
             <a:avLst/>
           </a:prstGeom>
-          <a:solidFill>
-            <a:srgbClr val="E9F3DE"/>
-          </a:solidFill>
-          <a:ln>
-            <a:noFill/>
-          </a:ln>
-        </p:spPr>
-        <p:txBody>
-          <a:bodyPr wrap="square" lIns="128016" tIns="54864">
-            <a:noAutofit/>
-          </a:bodyPr>
-          <a:lstStyle/>
-          <a:p>
-            <a:r>
-              <a:rPr sz="1600" b="1">
-                <a:solidFill>
-                  <a:srgbClr val="27500A"/>
+          <a:noFill/>
+        </p:spPr>
+        <p:txBody>
+          <a:bodyPr wrap="square">
+            <a:noAutofit/>
+          </a:bodyPr>
+          <a:lstStyle/>
+          <a:p>
+            <a:r>
+              <a:rPr sz="1600" b="0">
+                <a:solidFill>
+                  <a:srgbClr val="1E2024"/>
                 </a:solidFill>
                 <a:latin typeface="Calibri"/>
               </a:rPr>
               <a:t>B.  </a:t>
             </a:r>
             <a:r>
-              <a:rPr sz="1600" b="1">
-                <a:solidFill>
-                  <a:srgbClr val="27500A"/>
-                </a:solidFill>
-                <a:latin typeface="Calibri"/>
-              </a:rPr>
-              <a:t>不行——client 長壽 + 要不停機，得溝通當下協商   ✓</a:t>
+              <a:rPr sz="1600" b="0">
+                <a:solidFill>
+                  <a:srgbClr val="1E2024"/>
+                </a:solidFill>
+                <a:latin typeface="Calibri"/>
+              </a:rPr>
+              <a:t>不行——client 長壽 + 要不停機，得溝通當下協商</a:t>
             </a:r>
           </a:p>
         </p:txBody>
@@ -7286,85 +7494,13 @@
           <a:lstStyle/>
           <a:p>
             <a:r>
-              <a:rPr sz="1400" b="1">
-                <a:solidFill>
-                  <a:srgbClr val="27500A"/>
-                </a:solidFill>
-                <a:latin typeface="Calibri"/>
-              </a:rPr>
-              <a:t>正解 B — </a:t>
-            </a:r>
-            <a:r>
               <a:rPr sz="1400" b="0">
                 <a:solidFill>
-                  <a:srgbClr val="1E2024"/>
-                </a:solidFill>
-                <a:latin typeface="Calibri"/>
-              </a:rPr>
-              <a:t>client 嵌在各 app、超長壽，混版是常態；要不停機升級就得每條連線各自選版本。</a:t>
-            </a:r>
-          </a:p>
-        </p:txBody>
-      </p:sp>
-      <p:sp>
-        <p:nvSpPr>
-          <p:cNvPr id="9" name="TextBox 8"/>
-          <p:cNvSpPr txBox="1"/>
-          <p:nvPr/>
-        </p:nvSpPr>
-        <p:spPr>
-          <a:xfrm>
-            <a:off x="640080" y="6400800"/>
-            <a:ext cx="10972800" cy="384048"/>
-          </a:xfrm>
-          <a:prstGeom prst="rect">
-            <a:avLst/>
-          </a:prstGeom>
-          <a:noFill/>
-        </p:spPr>
-        <p:txBody>
-          <a:bodyPr wrap="square">
-            <a:noAutofit/>
-          </a:bodyPr>
-          <a:lstStyle/>
-          <a:p>
-            <a:r>
-              <a:rPr sz="1200" b="1">
-                <a:solidFill>
                   <a:srgbClr val="8A8A8A"/>
                 </a:solidFill>
                 <a:latin typeface="Calibri"/>
               </a:rPr>
-              <a:t>REF   </a:t>
-            </a:r>
-            <a:r>
-              <a:rPr sz="1200" b="0" u="sng">
-                <a:solidFill>
-                  <a:srgbClr val="185FA5"/>
-                </a:solidFill>
-                <a:latin typeface="Courier New"/>
-                <a:hlinkClick r:id="rId2"/>
-              </a:rPr>
-              <a:t>protocol.md:94</a:t>
-            </a:r>
-            <a:r>
-              <a:rPr sz="1200" b="0">
-                <a:solidFill>
-                  <a:srgbClr val="8A8A8A"/>
-                </a:solidFill>
-                <a:latin typeface="Calibri"/>
-              </a:rPr>
-              <a:t>   ·   </a:t>
-            </a:r>
-            <a:r>
-              <a:rPr sz="1200" b="0" u="sng">
-                <a:solidFill>
-                  <a:srgbClr val="185FA5"/>
-                </a:solidFill>
-                <a:latin typeface="Calibri"/>
-                <a:hlinkClick r:id="rId3"/>
-              </a:rPr>
-              <a:t>KIP-896</a:t>
+              <a:t>想一想 —— 下一頁公布答案</a:t>
             </a:r>
           </a:p>
         </p:txBody>
@@ -7416,7 +7552,7 @@
                 </a:solidFill>
                 <a:latin typeface="Calibri"/>
               </a:rPr>
-              <a:t>隨堂考 · 核心</a:t>
+              <a:t>隨堂考 · 暖身　（正解）</a:t>
             </a:r>
           </a:p>
         </p:txBody>
@@ -7450,7 +7586,7 @@
                 </a:solidFill>
                 <a:latin typeface="Calibri"/>
               </a:rPr>
-              <a:t>replica fetch（broker↔broker）的 Fetch 版本怎麼決定？</a:t>
+              <a:t>可以「一個版本打天下」嗎？</a:t>
             </a:r>
           </a:p>
         </p:txBody>
@@ -7493,7 +7629,7 @@
                 </a:solidFill>
                 <a:latin typeface="Calibri"/>
               </a:rPr>
-              <a:t>兩 broker ApiVersions 協商取交集</a:t>
+              <a:t>可以，大家同一版一起升</a:t>
             </a:r>
           </a:p>
         </p:txBody>
@@ -7512,31 +7648,36 @@
           <a:prstGeom prst="rect">
             <a:avLst/>
           </a:prstGeom>
-          <a:noFill/>
-        </p:spPr>
-        <p:txBody>
-          <a:bodyPr wrap="square">
-            <a:noAutofit/>
-          </a:bodyPr>
-          <a:lstStyle/>
-          <a:p>
-            <a:r>
-              <a:rPr sz="1600" b="0">
-                <a:solidFill>
-                  <a:srgbClr val="1E2024"/>
+          <a:solidFill>
+            <a:srgbClr val="E9F3DE"/>
+          </a:solidFill>
+          <a:ln>
+            <a:noFill/>
+          </a:ln>
+        </p:spPr>
+        <p:txBody>
+          <a:bodyPr wrap="square" lIns="128016" tIns="54864">
+            <a:noAutofit/>
+          </a:bodyPr>
+          <a:lstStyle/>
+          <a:p>
+            <a:r>
+              <a:rPr sz="1600" b="1">
+                <a:solidFill>
+                  <a:srgbClr val="27500A"/>
                 </a:solidFill>
                 <a:latin typeface="Calibri"/>
               </a:rPr>
               <a:t>B.  </a:t>
             </a:r>
             <a:r>
-              <a:rPr sz="1600" b="0">
-                <a:solidFill>
-                  <a:srgbClr val="1E2024"/>
-                </a:solidFill>
-                <a:latin typeface="Calibri"/>
-              </a:rPr>
-              <a:t>由 finalized metadata.version 決定</a:t>
+              <a:rPr sz="1600" b="1">
+                <a:solidFill>
+                  <a:srgbClr val="27500A"/>
+                </a:solidFill>
+                <a:latin typeface="Calibri"/>
+              </a:rPr>
+              <a:t>不行——client 長壽 + 要不停機，得溝通當下協商   ✓</a:t>
             </a:r>
           </a:p>
         </p:txBody>
@@ -7579,7 +7720,7 @@
                 </a:solidFill>
                 <a:latin typeface="Calibri"/>
               </a:rPr>
-              <a:t>永遠用最新版</a:t>
+              <a:t>可以，只要都 4.x</a:t>
             </a:r>
           </a:p>
         </p:txBody>
@@ -7622,7 +7763,7 @@
                 </a:solidFill>
                 <a:latin typeface="Calibri"/>
               </a:rPr>
-              <a:t>controller 每次指定</a:t>
+              <a:t>看 broker 數量</a:t>
             </a:r>
           </a:p>
         </p:txBody>
@@ -7650,13 +7791,85 @@
           <a:lstStyle/>
           <a:p>
             <a:r>
+              <a:rPr sz="1400" b="1">
+                <a:solidFill>
+                  <a:srgbClr val="27500A"/>
+                </a:solidFill>
+                <a:latin typeface="Calibri"/>
+              </a:rPr>
+              <a:t>正解 B — </a:t>
+            </a:r>
+            <a:r>
               <a:rPr sz="1400" b="0">
                 <a:solidFill>
+                  <a:srgbClr val="1E2024"/>
+                </a:solidFill>
+                <a:latin typeface="Calibri"/>
+              </a:rPr>
+              <a:t>client 嵌在各 app、超長壽，混版是常態；要不停機升級就得每條連線各自選版本。</a:t>
+            </a:r>
+          </a:p>
+        </p:txBody>
+      </p:sp>
+      <p:sp>
+        <p:nvSpPr>
+          <p:cNvPr id="9" name="TextBox 8"/>
+          <p:cNvSpPr txBox="1"/>
+          <p:nvPr/>
+        </p:nvSpPr>
+        <p:spPr>
+          <a:xfrm>
+            <a:off x="640080" y="6400800"/>
+            <a:ext cx="10972800" cy="384048"/>
+          </a:xfrm>
+          <a:prstGeom prst="rect">
+            <a:avLst/>
+          </a:prstGeom>
+          <a:noFill/>
+        </p:spPr>
+        <p:txBody>
+          <a:bodyPr wrap="square">
+            <a:noAutofit/>
+          </a:bodyPr>
+          <a:lstStyle/>
+          <a:p>
+            <a:r>
+              <a:rPr sz="1200" b="1">
+                <a:solidFill>
                   <a:srgbClr val="8A8A8A"/>
                 </a:solidFill>
                 <a:latin typeface="Calibri"/>
               </a:rPr>
-              <a:t>想一想 —— 下一頁公布答案</a:t>
+              <a:t>REF   </a:t>
+            </a:r>
+            <a:r>
+              <a:rPr sz="1200" b="0" u="sng">
+                <a:solidFill>
+                  <a:srgbClr val="185FA5"/>
+                </a:solidFill>
+                <a:latin typeface="Courier New"/>
+                <a:hlinkClick r:id="rId2"/>
+              </a:rPr>
+              <a:t>protocol.md:94</a:t>
+            </a:r>
+            <a:r>
+              <a:rPr sz="1200" b="0">
+                <a:solidFill>
+                  <a:srgbClr val="8A8A8A"/>
+                </a:solidFill>
+                <a:latin typeface="Calibri"/>
+              </a:rPr>
+              <a:t>   ·   </a:t>
+            </a:r>
+            <a:r>
+              <a:rPr sz="1200" b="0" u="sng">
+                <a:solidFill>
+                  <a:srgbClr val="185FA5"/>
+                </a:solidFill>
+                <a:latin typeface="Calibri"/>
+                <a:hlinkClick r:id="rId3"/>
+              </a:rPr>
+              <a:t>KIP-896</a:t>
             </a:r>
           </a:p>
         </p:txBody>

--- a/study/version-control/kafka-version-negotiation.pptx
+++ b/study/version-control/kafka-version-negotiation.pptx
@@ -19,8 +19,6 @@
     <p:sldId id="267" r:id="rId18"/>
     <p:sldId id="268" r:id="rId19"/>
     <p:sldId id="269" r:id="rId20"/>
-    <p:sldId id="270" r:id="rId21"/>
-    <p:sldId id="271" r:id="rId22"/>
   </p:sldIdLst>
   <p:sldSz cx="12191695" cy="6858000" type="screen4x3"/>
   <p:notesSz cx="6858000" cy="9144000"/>
@@ -3329,7 +3327,7 @@
                 </a:solidFill>
                 <a:latin typeface="Calibri"/>
               </a:rPr>
-              <a:t>隨堂考 · 核心</a:t>
+              <a:t>Part 2 · 失敗訊息</a:t>
             </a:r>
           </a:p>
         </p:txBody>
@@ -3343,7 +3341,7 @@
         <p:spPr>
           <a:xfrm>
             <a:off x="640080" y="841248"/>
-            <a:ext cx="10972800" cy="1188720"/>
+            <a:ext cx="10972800" cy="1005840"/>
           </a:xfrm>
           <a:prstGeom prst="rect">
             <a:avLst/>
@@ -3357,13 +3355,13 @@
           <a:lstStyle/>
           <a:p>
             <a:r>
-              <a:rPr sz="2600" b="1">
+              <a:rPr sz="3200" b="1">
                 <a:solidFill>
                   <a:srgbClr val="1E2024"/>
                 </a:solidFill>
                 <a:latin typeface="Calibri"/>
               </a:rPr>
-              <a:t>replica fetch（broker↔broker）的 Fetch 版本怎麼決定？</a:t>
+              <a:t>通訊當下協商不出版本，會看到什麼</a:t>
             </a:r>
           </a:p>
         </p:txBody>
@@ -3376,7 +3374,94 @@
         </p:nvSpPr>
         <p:spPr>
           <a:xfrm>
-            <a:off x="822960" y="2331720"/>
+            <a:off x="640080" y="2148840"/>
+            <a:ext cx="10972800" cy="1371600"/>
+          </a:xfrm>
+          <a:prstGeom prst="rect">
+            <a:avLst/>
+          </a:prstGeom>
+          <a:solidFill>
+            <a:srgbClr val="F3F1EC"/>
+          </a:solidFill>
+          <a:ln w="6350">
+            <a:solidFill>
+              <a:srgbClr val="E3E0D8"/>
+            </a:solidFill>
+          </a:ln>
+        </p:spPr>
+        <p:txBody>
+          <a:bodyPr wrap="square" lIns="146304" tIns="91440" bIns="91440">
+            <a:noAutofit/>
+          </a:bodyPr>
+          <a:lstStyle/>
+          <a:p>
+            <a:r>
+              <a:rPr sz="1350" b="0">
+                <a:solidFill>
+                  <a:srgbClr val="2C2C2A"/>
+                </a:solidFill>
+                <a:latin typeface="Calibri"/>
+              </a:rPr>
+              <a:t>交集空        → client 端 UnsupportedVersionException（送出前 abort）</a:t>
+            </a:r>
+          </a:p>
+          <a:p>
+            <a:r>
+              <a:rPr sz="1350" b="0">
+                <a:solidFill>
+                  <a:srgbClr val="2C2C2A"/>
+                </a:solidFill>
+                <a:latin typeface="Calibri"/>
+              </a:rPr>
+              <a:t>繞過協商自刻  → broker 丟 UnsupportedVersionException + 關線</a:t>
+            </a:r>
+          </a:p>
+          <a:p>
+            <a:r>
+              <a:rPr sz="1350" b="0">
+                <a:solidFill>
+                  <a:srgbClr val="2C2C2A"/>
+                </a:solidFill>
+                <a:latin typeface="Calibri"/>
+              </a:rPr>
+              <a:t>（ApiVersions 例外：回 v0 + UNSUPPORTED_VERSION 錯誤碼）</a:t>
+            </a:r>
+          </a:p>
+        </p:txBody>
+      </p:sp>
+      <p:pic>
+        <p:nvPicPr>
+          <p:cNvPr id="5" name="Picture 4" descr="ban.png"/>
+          <p:cNvPicPr>
+            <a:picLocks noChangeAspect="1"/>
+          </p:cNvPicPr>
+          <p:nvPr/>
+        </p:nvPicPr>
+        <p:blipFill>
+          <a:blip r:embed="rId2"/>
+          <a:stretch>
+            <a:fillRect/>
+          </a:stretch>
+        </p:blipFill>
+        <p:spPr>
+          <a:xfrm>
+            <a:off x="658368" y="3749040"/>
+            <a:ext cx="274320" cy="274320"/>
+          </a:xfrm>
+          <a:prstGeom prst="rect">
+            <a:avLst/>
+          </a:prstGeom>
+        </p:spPr>
+      </p:pic>
+      <p:sp>
+        <p:nvSpPr>
+          <p:cNvPr id="6" name="TextBox 5"/>
+          <p:cNvSpPr txBox="1"/>
+          <p:nvPr/>
+        </p:nvSpPr>
+        <p:spPr>
+          <a:xfrm>
+            <a:off x="1078992" y="3721608"/>
             <a:ext cx="10515600" cy="493776"/>
           </a:xfrm>
           <a:prstGeom prst="rect">
@@ -3391,36 +3476,27 @@
           <a:lstStyle/>
           <a:p>
             <a:r>
-              <a:rPr sz="1600" b="0">
+              <a:rPr sz="1650" b="0">
                 <a:solidFill>
                   <a:srgbClr val="1E2024"/>
                 </a:solidFill>
                 <a:latin typeface="Calibri"/>
               </a:rPr>
-              <a:t>A.  </a:t>
-            </a:r>
-            <a:r>
-              <a:rPr sz="1600" b="0">
-                <a:solidFill>
-                  <a:srgbClr val="1E2024"/>
-                </a:solidFill>
-                <a:latin typeface="Calibri"/>
-              </a:rPr>
-              <a:t>兩 broker ApiVersions 協商取交集</a:t>
-            </a:r>
-          </a:p>
-        </p:txBody>
-      </p:sp>
-      <p:sp>
-        <p:nvSpPr>
-          <p:cNvPr id="5" name="TextBox 4"/>
-          <p:cNvSpPr txBox="1"/>
-          <p:nvPr/>
-        </p:nvSpPr>
-        <p:spPr>
-          <a:xfrm>
-            <a:off x="822960" y="2953512"/>
-            <a:ext cx="10515600" cy="493776"/>
+              <a:t>多數情況 client 在送出前就本地中止，根本沒上網路</a:t>
+            </a:r>
+          </a:p>
+        </p:txBody>
+      </p:sp>
+      <p:sp>
+        <p:nvSpPr>
+          <p:cNvPr id="7" name="TextBox 6"/>
+          <p:cNvSpPr txBox="1"/>
+          <p:nvPr/>
+        </p:nvSpPr>
+        <p:spPr>
+          <a:xfrm>
+            <a:off x="640080" y="6400800"/>
+            <a:ext cx="10972800" cy="384048"/>
           </a:xfrm>
           <a:prstGeom prst="rect">
             <a:avLst/>
@@ -3434,142 +3510,61 @@
           <a:lstStyle/>
           <a:p>
             <a:r>
-              <a:rPr sz="1600" b="0">
-                <a:solidFill>
-                  <a:srgbClr val="1E2024"/>
-                </a:solidFill>
-                <a:latin typeface="Calibri"/>
-              </a:rPr>
-              <a:t>B.  </a:t>
-            </a:r>
-            <a:r>
-              <a:rPr sz="1600" b="0">
-                <a:solidFill>
-                  <a:srgbClr val="1E2024"/>
-                </a:solidFill>
-                <a:latin typeface="Calibri"/>
-              </a:rPr>
-              <a:t>由 finalized metadata.version 決定</a:t>
-            </a:r>
-          </a:p>
-        </p:txBody>
-      </p:sp>
-      <p:sp>
-        <p:nvSpPr>
-          <p:cNvPr id="6" name="TextBox 5"/>
-          <p:cNvSpPr txBox="1"/>
-          <p:nvPr/>
-        </p:nvSpPr>
-        <p:spPr>
-          <a:xfrm>
-            <a:off x="822960" y="3575304"/>
-            <a:ext cx="10515600" cy="493776"/>
-          </a:xfrm>
-          <a:prstGeom prst="rect">
-            <a:avLst/>
-          </a:prstGeom>
-          <a:noFill/>
-        </p:spPr>
-        <p:txBody>
-          <a:bodyPr wrap="square">
-            <a:noAutofit/>
-          </a:bodyPr>
-          <a:lstStyle/>
-          <a:p>
-            <a:r>
-              <a:rPr sz="1600" b="0">
-                <a:solidFill>
-                  <a:srgbClr val="1E2024"/>
-                </a:solidFill>
-                <a:latin typeface="Calibri"/>
-              </a:rPr>
-              <a:t>C.  </a:t>
-            </a:r>
-            <a:r>
-              <a:rPr sz="1600" b="0">
-                <a:solidFill>
-                  <a:srgbClr val="1E2024"/>
-                </a:solidFill>
-                <a:latin typeface="Calibri"/>
-              </a:rPr>
-              <a:t>永遠用最新版</a:t>
-            </a:r>
-          </a:p>
-        </p:txBody>
-      </p:sp>
-      <p:sp>
-        <p:nvSpPr>
-          <p:cNvPr id="7" name="TextBox 6"/>
-          <p:cNvSpPr txBox="1"/>
-          <p:nvPr/>
-        </p:nvSpPr>
-        <p:spPr>
-          <a:xfrm>
-            <a:off x="822960" y="4197096"/>
-            <a:ext cx="10515600" cy="493776"/>
-          </a:xfrm>
-          <a:prstGeom prst="rect">
-            <a:avLst/>
-          </a:prstGeom>
-          <a:noFill/>
-        </p:spPr>
-        <p:txBody>
-          <a:bodyPr wrap="square">
-            <a:noAutofit/>
-          </a:bodyPr>
-          <a:lstStyle/>
-          <a:p>
-            <a:r>
-              <a:rPr sz="1600" b="0">
-                <a:solidFill>
-                  <a:srgbClr val="1E2024"/>
-                </a:solidFill>
-                <a:latin typeface="Calibri"/>
-              </a:rPr>
-              <a:t>D.  </a:t>
-            </a:r>
-            <a:r>
-              <a:rPr sz="1600" b="0">
-                <a:solidFill>
-                  <a:srgbClr val="1E2024"/>
-                </a:solidFill>
-                <a:latin typeface="Calibri"/>
-              </a:rPr>
-              <a:t>controller 每次指定</a:t>
-            </a:r>
-          </a:p>
-        </p:txBody>
-      </p:sp>
-      <p:sp>
-        <p:nvSpPr>
-          <p:cNvPr id="8" name="TextBox 7"/>
-          <p:cNvSpPr txBox="1"/>
-          <p:nvPr/>
-        </p:nvSpPr>
-        <p:spPr>
-          <a:xfrm>
-            <a:off x="640080" y="4910327"/>
-            <a:ext cx="10972800" cy="914400"/>
-          </a:xfrm>
-          <a:prstGeom prst="rect">
-            <a:avLst/>
-          </a:prstGeom>
-          <a:noFill/>
-        </p:spPr>
-        <p:txBody>
-          <a:bodyPr wrap="square">
-            <a:noAutofit/>
-          </a:bodyPr>
-          <a:lstStyle/>
-          <a:p>
-            <a:r>
-              <a:rPr sz="1400" b="0">
+              <a:rPr sz="1200" b="1">
                 <a:solidFill>
                   <a:srgbClr val="8A8A8A"/>
                 </a:solidFill>
                 <a:latin typeface="Calibri"/>
               </a:rPr>
-              <a:t>想一想 —— 下一頁公布答案</a:t>
+              <a:t>REF   </a:t>
+            </a:r>
+            <a:r>
+              <a:rPr sz="1200" b="0" u="sng">
+                <a:solidFill>
+                  <a:srgbClr val="185FA5"/>
+                </a:solidFill>
+                <a:latin typeface="Courier New"/>
+                <a:hlinkClick r:id="rId3"/>
+              </a:rPr>
+              <a:t>latestUsableVersion</a:t>
+            </a:r>
+            <a:r>
+              <a:rPr sz="1200" b="0">
+                <a:solidFill>
+                  <a:srgbClr val="8A8A8A"/>
+                </a:solidFill>
+                <a:latin typeface="Calibri"/>
+              </a:rPr>
+              <a:t>   ·   </a:t>
+            </a:r>
+            <a:r>
+              <a:rPr sz="1200" b="0" u="sng">
+                <a:solidFill>
+                  <a:srgbClr val="185FA5"/>
+                </a:solidFill>
+                <a:latin typeface="Courier New"/>
+                <a:hlinkClick r:id="rId4"/>
+              </a:rPr>
+              <a:t>NetworkClient</a:t>
+            </a:r>
+            <a:r>
+              <a:rPr sz="1200" b="0">
+                <a:solidFill>
+                  <a:srgbClr val="8A8A8A"/>
+                </a:solidFill>
+                <a:latin typeface="Calibri"/>
+              </a:rPr>
+              <a:t>   ·   </a:t>
+            </a:r>
+            <a:r>
+              <a:rPr sz="1200" b="0" u="sng">
+                <a:solidFill>
+                  <a:srgbClr val="185FA5"/>
+                </a:solidFill>
+                <a:latin typeface="Courier New"/>
+                <a:hlinkClick r:id="rId5"/>
+              </a:rPr>
+              <a:t>RequestContext</a:t>
             </a:r>
           </a:p>
         </p:txBody>
@@ -3621,7 +3616,7 @@
                 </a:solidFill>
                 <a:latin typeface="Calibri"/>
               </a:rPr>
-              <a:t>隨堂考 · 核心　（正解）</a:t>
+              <a:t>Part 2 · 失敗訊息</a:t>
             </a:r>
           </a:p>
         </p:txBody>
@@ -3635,7 +3630,7 @@
         <p:spPr>
           <a:xfrm>
             <a:off x="640080" y="841248"/>
-            <a:ext cx="10972800" cy="1188720"/>
+            <a:ext cx="10972800" cy="1005840"/>
           </a:xfrm>
           <a:prstGeom prst="rect">
             <a:avLst/>
@@ -3649,13 +3644,13 @@
           <a:lstStyle/>
           <a:p>
             <a:r>
-              <a:rPr sz="2600" b="1">
+              <a:rPr sz="3200" b="1">
                 <a:solidFill>
                   <a:srgbClr val="1E2024"/>
                 </a:solidFill>
                 <a:latin typeface="Calibri"/>
               </a:rPr>
-              <a:t>replica fetch（broker↔broker）的 Fetch 版本怎麼決定？</a:t>
+              <a:t>版本截斷：為什麼「升一點點」不夠</a:t>
             </a:r>
           </a:p>
         </p:txBody>
@@ -3668,37 +3663,46 @@
         </p:nvSpPr>
         <p:spPr>
           <a:xfrm>
-            <a:off x="822960" y="2331720"/>
-            <a:ext cx="10515600" cy="493776"/>
-          </a:xfrm>
-          <a:prstGeom prst="rect">
-            <a:avLst/>
-          </a:prstGeom>
-          <a:noFill/>
-        </p:spPr>
-        <p:txBody>
-          <a:bodyPr wrap="square">
-            <a:noAutofit/>
-          </a:bodyPr>
-          <a:lstStyle/>
-          <a:p>
-            <a:r>
-              <a:rPr sz="1600" b="0">
-                <a:solidFill>
-                  <a:srgbClr val="1E2024"/>
-                </a:solidFill>
-                <a:latin typeface="Calibri"/>
-              </a:rPr>
-              <a:t>A.  </a:t>
-            </a:r>
-            <a:r>
-              <a:rPr sz="1600" b="0">
-                <a:solidFill>
-                  <a:srgbClr val="1E2024"/>
-                </a:solidFill>
-                <a:latin typeface="Calibri"/>
-              </a:rPr>
-              <a:t>兩 broker ApiVersions 協商取交集</a:t>
+            <a:off x="640080" y="2148840"/>
+            <a:ext cx="10972800" cy="822959"/>
+          </a:xfrm>
+          <a:prstGeom prst="rect">
+            <a:avLst/>
+          </a:prstGeom>
+          <a:solidFill>
+            <a:srgbClr val="F3F1EC"/>
+          </a:solidFill>
+          <a:ln w="6350">
+            <a:solidFill>
+              <a:srgbClr val="E3E0D8"/>
+            </a:solidFill>
+          </a:ln>
+        </p:spPr>
+        <p:txBody>
+          <a:bodyPr wrap="square" lIns="146304" tIns="91440" bIns="91440">
+            <a:noAutofit/>
+          </a:bodyPr>
+          <a:lstStyle/>
+          <a:p>
+            <a:r>
+              <a:rPr sz="1350" b="0">
+                <a:solidFill>
+                  <a:srgbClr val="2C2C2A"/>
+                </a:solidFill>
+                <a:latin typeface="Calibri"/>
+              </a:rPr>
+              <a:t>舊 wire API version 被整個移除，min 可 &gt; 0</a:t>
+            </a:r>
+          </a:p>
+          <a:p>
+            <a:r>
+              <a:rPr sz="1350" b="0">
+                <a:solidFill>
+                  <a:srgbClr val="2C2C2A"/>
+                </a:solidFill>
+                <a:latin typeface="Calibri"/>
+              </a:rPr>
+              <a:t>  Fetch：4–18（v0–3 在 4.0 移除）</a:t>
             </a:r>
           </a:p>
         </p:txBody>
@@ -3711,8 +3715,8 @@
         </p:nvSpPr>
         <p:spPr>
           <a:xfrm>
-            <a:off x="822960" y="2953512"/>
-            <a:ext cx="10515600" cy="493776"/>
+            <a:off x="640080" y="3172968"/>
+            <a:ext cx="10972800" cy="566928"/>
           </a:xfrm>
           <a:prstGeom prst="rect">
             <a:avLst/>
@@ -3725,28 +3729,19 @@
           </a:ln>
         </p:spPr>
         <p:txBody>
-          <a:bodyPr wrap="square" lIns="128016" tIns="54864">
-            <a:noAutofit/>
-          </a:bodyPr>
-          <a:lstStyle/>
-          <a:p>
-            <a:r>
-              <a:rPr sz="1600" b="1">
+          <a:bodyPr wrap="square" lIns="146304" tIns="82296">
+            <a:noAutofit/>
+          </a:bodyPr>
+          <a:lstStyle/>
+          <a:p>
+            <a:r>
+              <a:rPr sz="1500" b="0">
                 <a:solidFill>
                   <a:srgbClr val="27500A"/>
                 </a:solidFill>
                 <a:latin typeface="Calibri"/>
               </a:rPr>
-              <a:t>B.  </a:t>
-            </a:r>
-            <a:r>
-              <a:rPr sz="1600" b="1">
-                <a:solidFill>
-                  <a:srgbClr val="27500A"/>
-                </a:solidFill>
-                <a:latin typeface="Calibri"/>
-              </a:rPr>
-              <a:t>由 finalized metadata.version 決定   ✓</a:t>
+              <a:t>解法：升級前確認兩端都跨過版本下限（升 4.0 需至少 2.1），否則協商結果沒有可用版本</a:t>
             </a:r>
           </a:p>
         </p:txBody>
@@ -3759,8 +3754,8 @@
         </p:nvSpPr>
         <p:spPr>
           <a:xfrm>
-            <a:off x="822960" y="3575304"/>
-            <a:ext cx="10515600" cy="493776"/>
+            <a:off x="640080" y="3922776"/>
+            <a:ext cx="10972800" cy="731520"/>
           </a:xfrm>
           <a:prstGeom prst="rect">
             <a:avLst/>
@@ -3774,22 +3769,13 @@
           <a:lstStyle/>
           <a:p>
             <a:r>
-              <a:rPr sz="1600" b="0">
-                <a:solidFill>
-                  <a:srgbClr val="1E2024"/>
-                </a:solidFill>
-                <a:latin typeface="Calibri"/>
-              </a:rPr>
-              <a:t>C.  </a:t>
-            </a:r>
-            <a:r>
-              <a:rPr sz="1600" b="0">
-                <a:solidFill>
-                  <a:srgbClr val="1E2024"/>
-                </a:solidFill>
-                <a:latin typeface="Calibri"/>
-              </a:rPr>
-              <a:t>永遠用最新版</a:t>
+              <a:rPr sz="1500" b="0">
+                <a:solidFill>
+                  <a:srgbClr val="5F5E5A"/>
+                </a:solidFill>
+                <a:latin typeface="Calibri"/>
+              </a:rPr>
+              <a:t>銜接（非本場）：finalize / 升降當下的錯誤（INVALID_UPDATE_VERSION 等）屬「運行時的版本升降」那場，本場不展開。</a:t>
             </a:r>
           </a:p>
         </p:txBody>
@@ -3797,92 +3783,6 @@
       <p:sp>
         <p:nvSpPr>
           <p:cNvPr id="7" name="TextBox 6"/>
-          <p:cNvSpPr txBox="1"/>
-          <p:nvPr/>
-        </p:nvSpPr>
-        <p:spPr>
-          <a:xfrm>
-            <a:off x="822960" y="4197096"/>
-            <a:ext cx="10515600" cy="493776"/>
-          </a:xfrm>
-          <a:prstGeom prst="rect">
-            <a:avLst/>
-          </a:prstGeom>
-          <a:noFill/>
-        </p:spPr>
-        <p:txBody>
-          <a:bodyPr wrap="square">
-            <a:noAutofit/>
-          </a:bodyPr>
-          <a:lstStyle/>
-          <a:p>
-            <a:r>
-              <a:rPr sz="1600" b="0">
-                <a:solidFill>
-                  <a:srgbClr val="1E2024"/>
-                </a:solidFill>
-                <a:latin typeface="Calibri"/>
-              </a:rPr>
-              <a:t>D.  </a:t>
-            </a:r>
-            <a:r>
-              <a:rPr sz="1600" b="0">
-                <a:solidFill>
-                  <a:srgbClr val="1E2024"/>
-                </a:solidFill>
-                <a:latin typeface="Calibri"/>
-              </a:rPr>
-              <a:t>controller 每次指定</a:t>
-            </a:r>
-          </a:p>
-        </p:txBody>
-      </p:sp>
-      <p:sp>
-        <p:nvSpPr>
-          <p:cNvPr id="8" name="TextBox 7"/>
-          <p:cNvSpPr txBox="1"/>
-          <p:nvPr/>
-        </p:nvSpPr>
-        <p:spPr>
-          <a:xfrm>
-            <a:off x="640080" y="4910327"/>
-            <a:ext cx="10972800" cy="914400"/>
-          </a:xfrm>
-          <a:prstGeom prst="rect">
-            <a:avLst/>
-          </a:prstGeom>
-          <a:noFill/>
-        </p:spPr>
-        <p:txBody>
-          <a:bodyPr wrap="square">
-            <a:noAutofit/>
-          </a:bodyPr>
-          <a:lstStyle/>
-          <a:p>
-            <a:r>
-              <a:rPr sz="1400" b="1">
-                <a:solidFill>
-                  <a:srgbClr val="27500A"/>
-                </a:solidFill>
-                <a:latin typeface="Calibri"/>
-              </a:rPr>
-              <a:t>正解 B — </a:t>
-            </a:r>
-            <a:r>
-              <a:rPr sz="1400" b="0">
-                <a:solidFill>
-                  <a:srgbClr val="1E2024"/>
-                </a:solidFill>
-                <a:latin typeface="Calibri"/>
-              </a:rPr>
-              <a:t>fetchRequestVersion(MV)：MV 是集中共識，不做 per-connection 協商。</a:t>
-            </a:r>
-          </a:p>
-        </p:txBody>
-      </p:sp>
-      <p:sp>
-        <p:nvSpPr>
-          <p:cNvPr id="9" name="TextBox 8"/>
           <p:cNvSpPr txBox="1"/>
           <p:nvPr/>
         </p:nvSpPr>
@@ -3919,7 +3819,7 @@
                 <a:latin typeface="Courier New"/>
                 <a:hlinkClick r:id="rId2"/>
               </a:rPr>
-              <a:t>RemoteLeaderEndPoint.scala:215</a:t>
+              <a:t>upgrade.md:229</a:t>
             </a:r>
             <a:r>
               <a:rPr sz="1200" b="0">
@@ -3938,7 +3838,7 @@
                 <a:latin typeface="Courier New"/>
                 <a:hlinkClick r:id="rId3"/>
               </a:rPr>
-              <a:t>MetadataVersion.java:273</a:t>
+              <a:t>FetchRequest.json validVersions</a:t>
             </a:r>
           </a:p>
         </p:txBody>
@@ -3990,7 +3890,7 @@
                 </a:solidFill>
                 <a:latin typeface="Calibri"/>
               </a:rPr>
-              <a:t>Part 2 · 失敗訊息</a:t>
+              <a:t>隨堂考 · 核心</a:t>
             </a:r>
           </a:p>
         </p:txBody>
@@ -4004,7 +3904,7 @@
         <p:spPr>
           <a:xfrm>
             <a:off x="640080" y="841248"/>
-            <a:ext cx="10972800" cy="1005840"/>
+            <a:ext cx="10972800" cy="1188720"/>
           </a:xfrm>
           <a:prstGeom prst="rect">
             <a:avLst/>
@@ -4018,13 +3918,13 @@
           <a:lstStyle/>
           <a:p>
             <a:r>
-              <a:rPr sz="3200" b="1">
+              <a:rPr sz="2600" b="1">
                 <a:solidFill>
                   <a:srgbClr val="1E2024"/>
                 </a:solidFill>
                 <a:latin typeface="Calibri"/>
               </a:rPr>
-              <a:t>通訊當下協商不出版本，會看到什麼</a:t>
+              <a:t>自刻 client 送了不支援的 API version，會怎樣？</a:t>
             </a:r>
           </a:p>
         </p:txBody>
@@ -4037,85 +3937,84 @@
         </p:nvSpPr>
         <p:spPr>
           <a:xfrm>
-            <a:off x="640080" y="2148840"/>
-            <a:ext cx="10972800" cy="1371600"/>
-          </a:xfrm>
-          <a:prstGeom prst="rect">
-            <a:avLst/>
-          </a:prstGeom>
-          <a:solidFill>
-            <a:srgbClr val="F3F1EC"/>
-          </a:solidFill>
-          <a:ln w="6350">
-            <a:solidFill>
-              <a:srgbClr val="E3E0D8"/>
-            </a:solidFill>
-          </a:ln>
-        </p:spPr>
-        <p:txBody>
-          <a:bodyPr wrap="square" lIns="146304" tIns="91440" bIns="91440">
-            <a:noAutofit/>
-          </a:bodyPr>
-          <a:lstStyle/>
-          <a:p>
-            <a:r>
-              <a:rPr sz="1350" b="0">
-                <a:solidFill>
-                  <a:srgbClr val="2C2C2A"/>
-                </a:solidFill>
-                <a:latin typeface="Calibri"/>
-              </a:rPr>
-              <a:t>交集空        → client 端 UnsupportedVersionException（送出前 abort）</a:t>
-            </a:r>
-          </a:p>
-          <a:p>
-            <a:r>
-              <a:rPr sz="1350" b="0">
-                <a:solidFill>
-                  <a:srgbClr val="2C2C2A"/>
-                </a:solidFill>
-                <a:latin typeface="Calibri"/>
-              </a:rPr>
-              <a:t>繞過協商自刻  → broker 丟 UnsupportedVersionException + 關線</a:t>
-            </a:r>
-          </a:p>
-          <a:p>
-            <a:r>
-              <a:rPr sz="1350" b="0">
-                <a:solidFill>
-                  <a:srgbClr val="2C2C2A"/>
-                </a:solidFill>
-                <a:latin typeface="Calibri"/>
-              </a:rPr>
-              <a:t>（ApiVersions 例外：回 v0 + UNSUPPORTED_VERSION 錯誤碼）</a:t>
-            </a:r>
-          </a:p>
-        </p:txBody>
-      </p:sp>
-      <p:pic>
-        <p:nvPicPr>
-          <p:cNvPr id="5" name="Picture 4" descr="ban.png"/>
-          <p:cNvPicPr>
-            <a:picLocks noChangeAspect="1"/>
-          </p:cNvPicPr>
-          <p:nvPr/>
-        </p:nvPicPr>
-        <p:blipFill>
-          <a:blip r:embed="rId2"/>
-          <a:stretch>
-            <a:fillRect/>
-          </a:stretch>
-        </p:blipFill>
-        <p:spPr>
-          <a:xfrm>
-            <a:off x="658368" y="3749040"/>
-            <a:ext cx="274320" cy="274320"/>
-          </a:xfrm>
-          <a:prstGeom prst="rect">
-            <a:avLst/>
-          </a:prstGeom>
-        </p:spPr>
-      </p:pic>
+            <a:off x="822960" y="2331720"/>
+            <a:ext cx="10515600" cy="493776"/>
+          </a:xfrm>
+          <a:prstGeom prst="rect">
+            <a:avLst/>
+          </a:prstGeom>
+          <a:noFill/>
+        </p:spPr>
+        <p:txBody>
+          <a:bodyPr wrap="square">
+            <a:noAutofit/>
+          </a:bodyPr>
+          <a:lstStyle/>
+          <a:p>
+            <a:r>
+              <a:rPr sz="1600" b="0">
+                <a:solidFill>
+                  <a:srgbClr val="1E2024"/>
+                </a:solidFill>
+                <a:latin typeface="Calibri"/>
+              </a:rPr>
+              <a:t>A.  </a:t>
+            </a:r>
+            <a:r>
+              <a:rPr sz="1600" b="0">
+                <a:solidFill>
+                  <a:srgbClr val="1E2024"/>
+                </a:solidFill>
+                <a:latin typeface="Calibri"/>
+              </a:rPr>
+              <a:t>一律回 UNSUPPORTED_VERSION</a:t>
+            </a:r>
+          </a:p>
+        </p:txBody>
+      </p:sp>
+      <p:sp>
+        <p:nvSpPr>
+          <p:cNvPr id="5" name="TextBox 4"/>
+          <p:cNvSpPr txBox="1"/>
+          <p:nvPr/>
+        </p:nvSpPr>
+        <p:spPr>
+          <a:xfrm>
+            <a:off x="822960" y="2953512"/>
+            <a:ext cx="10515600" cy="493776"/>
+          </a:xfrm>
+          <a:prstGeom prst="rect">
+            <a:avLst/>
+          </a:prstGeom>
+          <a:noFill/>
+        </p:spPr>
+        <p:txBody>
+          <a:bodyPr wrap="square">
+            <a:noAutofit/>
+          </a:bodyPr>
+          <a:lstStyle/>
+          <a:p>
+            <a:r>
+              <a:rPr sz="1600" b="0">
+                <a:solidFill>
+                  <a:srgbClr val="1E2024"/>
+                </a:solidFill>
+                <a:latin typeface="Calibri"/>
+              </a:rPr>
+              <a:t>B.  </a:t>
+            </a:r>
+            <a:r>
+              <a:rPr sz="1600" b="0">
+                <a:solidFill>
+                  <a:srgbClr val="1E2024"/>
+                </a:solidFill>
+                <a:latin typeface="Calibri"/>
+              </a:rPr>
+              <a:t>只有 ApiVersions 例外回錯誤+範圍；其他 API 關線</a:t>
+            </a:r>
+          </a:p>
+        </p:txBody>
+      </p:sp>
       <p:sp>
         <p:nvSpPr>
           <p:cNvPr id="6" name="TextBox 5"/>
@@ -4124,7 +4023,7 @@
         </p:nvSpPr>
         <p:spPr>
           <a:xfrm>
-            <a:off x="1078992" y="3721608"/>
+            <a:off x="822960" y="3575304"/>
             <a:ext cx="10515600" cy="493776"/>
           </a:xfrm>
           <a:prstGeom prst="rect">
@@ -4139,13 +4038,22 @@
           <a:lstStyle/>
           <a:p>
             <a:r>
-              <a:rPr sz="1650" b="0">
+              <a:rPr sz="1600" b="0">
                 <a:solidFill>
                   <a:srgbClr val="1E2024"/>
                 </a:solidFill>
                 <a:latin typeface="Calibri"/>
               </a:rPr>
-              <a:t>多數情況 client 在送出前就本地中止，根本沒上網路</a:t>
+              <a:t>C.  </a:t>
+            </a:r>
+            <a:r>
+              <a:rPr sz="1600" b="0">
+                <a:solidFill>
+                  <a:srgbClr val="1E2024"/>
+                </a:solidFill>
+                <a:latin typeface="Calibri"/>
+              </a:rPr>
+              <a:t>broker 自動降版</a:t>
             </a:r>
           </a:p>
         </p:txBody>
@@ -4158,8 +4066,8 @@
         </p:nvSpPr>
         <p:spPr>
           <a:xfrm>
-            <a:off x="640080" y="6400800"/>
-            <a:ext cx="10972800" cy="384048"/>
+            <a:off x="822960" y="4197096"/>
+            <a:ext cx="10515600" cy="493776"/>
           </a:xfrm>
           <a:prstGeom prst="rect">
             <a:avLst/>
@@ -4173,61 +4081,56 @@
           <a:lstStyle/>
           <a:p>
             <a:r>
-              <a:rPr sz="1200" b="1">
+              <a:rPr sz="1600" b="0">
+                <a:solidFill>
+                  <a:srgbClr val="1E2024"/>
+                </a:solidFill>
+                <a:latin typeface="Calibri"/>
+              </a:rPr>
+              <a:t>D.  </a:t>
+            </a:r>
+            <a:r>
+              <a:rPr sz="1600" b="0">
+                <a:solidFill>
+                  <a:srgbClr val="1E2024"/>
+                </a:solidFill>
+                <a:latin typeface="Calibri"/>
+              </a:rPr>
+              <a:t>忽略版本照跑</a:t>
+            </a:r>
+          </a:p>
+        </p:txBody>
+      </p:sp>
+      <p:sp>
+        <p:nvSpPr>
+          <p:cNvPr id="8" name="TextBox 7"/>
+          <p:cNvSpPr txBox="1"/>
+          <p:nvPr/>
+        </p:nvSpPr>
+        <p:spPr>
+          <a:xfrm>
+            <a:off x="640080" y="4910327"/>
+            <a:ext cx="10972800" cy="914400"/>
+          </a:xfrm>
+          <a:prstGeom prst="rect">
+            <a:avLst/>
+          </a:prstGeom>
+          <a:noFill/>
+        </p:spPr>
+        <p:txBody>
+          <a:bodyPr wrap="square">
+            <a:noAutofit/>
+          </a:bodyPr>
+          <a:lstStyle/>
+          <a:p>
+            <a:r>
+              <a:rPr sz="1400" b="0">
                 <a:solidFill>
                   <a:srgbClr val="8A8A8A"/>
                 </a:solidFill>
                 <a:latin typeface="Calibri"/>
               </a:rPr>
-              <a:t>REF   </a:t>
-            </a:r>
-            <a:r>
-              <a:rPr sz="1200" b="0" u="sng">
-                <a:solidFill>
-                  <a:srgbClr val="185FA5"/>
-                </a:solidFill>
-                <a:latin typeface="Courier New"/>
-                <a:hlinkClick r:id="rId3"/>
-              </a:rPr>
-              <a:t>latestUsableVersion</a:t>
-            </a:r>
-            <a:r>
-              <a:rPr sz="1200" b="0">
-                <a:solidFill>
-                  <a:srgbClr val="8A8A8A"/>
-                </a:solidFill>
-                <a:latin typeface="Calibri"/>
-              </a:rPr>
-              <a:t>   ·   </a:t>
-            </a:r>
-            <a:r>
-              <a:rPr sz="1200" b="0" u="sng">
-                <a:solidFill>
-                  <a:srgbClr val="185FA5"/>
-                </a:solidFill>
-                <a:latin typeface="Courier New"/>
-                <a:hlinkClick r:id="rId4"/>
-              </a:rPr>
-              <a:t>NetworkClient</a:t>
-            </a:r>
-            <a:r>
-              <a:rPr sz="1200" b="0">
-                <a:solidFill>
-                  <a:srgbClr val="8A8A8A"/>
-                </a:solidFill>
-                <a:latin typeface="Calibri"/>
-              </a:rPr>
-              <a:t>   ·   </a:t>
-            </a:r>
-            <a:r>
-              <a:rPr sz="1200" b="0" u="sng">
-                <a:solidFill>
-                  <a:srgbClr val="185FA5"/>
-                </a:solidFill>
-                <a:latin typeface="Courier New"/>
-                <a:hlinkClick r:id="rId5"/>
-              </a:rPr>
-              <a:t>RequestContext</a:t>
+              <a:t>想一想 —— 下一頁公布答案</a:t>
             </a:r>
           </a:p>
         </p:txBody>
@@ -4279,7 +4182,7 @@
                 </a:solidFill>
                 <a:latin typeface="Calibri"/>
               </a:rPr>
-              <a:t>Part 2 · 失敗訊息</a:t>
+              <a:t>隨堂考 · 核心　（正解）</a:t>
             </a:r>
           </a:p>
         </p:txBody>
@@ -4293,7 +4196,7 @@
         <p:spPr>
           <a:xfrm>
             <a:off x="640080" y="841248"/>
-            <a:ext cx="10972800" cy="1005840"/>
+            <a:ext cx="10972800" cy="1188720"/>
           </a:xfrm>
           <a:prstGeom prst="rect">
             <a:avLst/>
@@ -4307,13 +4210,13 @@
           <a:lstStyle/>
           <a:p>
             <a:r>
-              <a:rPr sz="3200" b="1">
+              <a:rPr sz="2600" b="1">
                 <a:solidFill>
                   <a:srgbClr val="1E2024"/>
                 </a:solidFill>
                 <a:latin typeface="Calibri"/>
               </a:rPr>
-              <a:t>版本截斷：為什麼「升一點點」不夠</a:t>
+              <a:t>自刻 client 送了不支援的 API version，會怎樣？</a:t>
             </a:r>
           </a:p>
         </p:txBody>
@@ -4326,46 +4229,37 @@
         </p:nvSpPr>
         <p:spPr>
           <a:xfrm>
-            <a:off x="640080" y="2148840"/>
-            <a:ext cx="10972800" cy="822959"/>
-          </a:xfrm>
-          <a:prstGeom prst="rect">
-            <a:avLst/>
-          </a:prstGeom>
-          <a:solidFill>
-            <a:srgbClr val="F3F1EC"/>
-          </a:solidFill>
-          <a:ln w="6350">
-            <a:solidFill>
-              <a:srgbClr val="E3E0D8"/>
-            </a:solidFill>
-          </a:ln>
-        </p:spPr>
-        <p:txBody>
-          <a:bodyPr wrap="square" lIns="146304" tIns="91440" bIns="91440">
-            <a:noAutofit/>
-          </a:bodyPr>
-          <a:lstStyle/>
-          <a:p>
-            <a:r>
-              <a:rPr sz="1350" b="0">
-                <a:solidFill>
-                  <a:srgbClr val="2C2C2A"/>
-                </a:solidFill>
-                <a:latin typeface="Calibri"/>
-              </a:rPr>
-              <a:t>舊 wire API version 被整個移除，min 可 &gt; 0</a:t>
-            </a:r>
-          </a:p>
-          <a:p>
-            <a:r>
-              <a:rPr sz="1350" b="0">
-                <a:solidFill>
-                  <a:srgbClr val="2C2C2A"/>
-                </a:solidFill>
-                <a:latin typeface="Calibri"/>
-              </a:rPr>
-              <a:t>  Fetch：4–18（v0–3 在 4.0 移除）</a:t>
+            <a:off x="822960" y="2331720"/>
+            <a:ext cx="10515600" cy="493776"/>
+          </a:xfrm>
+          <a:prstGeom prst="rect">
+            <a:avLst/>
+          </a:prstGeom>
+          <a:noFill/>
+        </p:spPr>
+        <p:txBody>
+          <a:bodyPr wrap="square">
+            <a:noAutofit/>
+          </a:bodyPr>
+          <a:lstStyle/>
+          <a:p>
+            <a:r>
+              <a:rPr sz="1600" b="0">
+                <a:solidFill>
+                  <a:srgbClr val="1E2024"/>
+                </a:solidFill>
+                <a:latin typeface="Calibri"/>
+              </a:rPr>
+              <a:t>A.  </a:t>
+            </a:r>
+            <a:r>
+              <a:rPr sz="1600" b="0">
+                <a:solidFill>
+                  <a:srgbClr val="1E2024"/>
+                </a:solidFill>
+                <a:latin typeface="Calibri"/>
+              </a:rPr>
+              <a:t>一律回 UNSUPPORTED_VERSION</a:t>
             </a:r>
           </a:p>
         </p:txBody>
@@ -4378,8 +4272,8 @@
         </p:nvSpPr>
         <p:spPr>
           <a:xfrm>
-            <a:off x="640080" y="3172968"/>
-            <a:ext cx="10972800" cy="566928"/>
+            <a:off x="822960" y="2953512"/>
+            <a:ext cx="10515600" cy="493776"/>
           </a:xfrm>
           <a:prstGeom prst="rect">
             <a:avLst/>
@@ -4392,19 +4286,28 @@
           </a:ln>
         </p:spPr>
         <p:txBody>
-          <a:bodyPr wrap="square" lIns="146304" tIns="82296">
-            <a:noAutofit/>
-          </a:bodyPr>
-          <a:lstStyle/>
-          <a:p>
-            <a:r>
-              <a:rPr sz="1500" b="0">
+          <a:bodyPr wrap="square" lIns="128016" tIns="54864">
+            <a:noAutofit/>
+          </a:bodyPr>
+          <a:lstStyle/>
+          <a:p>
+            <a:r>
+              <a:rPr sz="1600" b="1">
                 <a:solidFill>
                   <a:srgbClr val="27500A"/>
                 </a:solidFill>
                 <a:latin typeface="Calibri"/>
               </a:rPr>
-              <a:t>解法：升級前確認兩端都跨過版本下限（升 4.0 需至少 2.1），否則協商結果沒有可用版本</a:t>
+              <a:t>B.  </a:t>
+            </a:r>
+            <a:r>
+              <a:rPr sz="1600" b="1">
+                <a:solidFill>
+                  <a:srgbClr val="27500A"/>
+                </a:solidFill>
+                <a:latin typeface="Calibri"/>
+              </a:rPr>
+              <a:t>只有 ApiVersions 例外回錯誤+範圍；其他 API 關線   ✓</a:t>
             </a:r>
           </a:p>
         </p:txBody>
@@ -4417,8 +4320,8 @@
         </p:nvSpPr>
         <p:spPr>
           <a:xfrm>
-            <a:off x="640080" y="3922776"/>
-            <a:ext cx="10972800" cy="731520"/>
+            <a:off x="822960" y="3575304"/>
+            <a:ext cx="10515600" cy="493776"/>
           </a:xfrm>
           <a:prstGeom prst="rect">
             <a:avLst/>
@@ -4432,13 +4335,22 @@
           <a:lstStyle/>
           <a:p>
             <a:r>
-              <a:rPr sz="1500" b="0">
-                <a:solidFill>
-                  <a:srgbClr val="5F5E5A"/>
-                </a:solidFill>
-                <a:latin typeface="Calibri"/>
-              </a:rPr>
-              <a:t>銜接（非本場）：finalize / 升降當下的錯誤（INVALID_UPDATE_VERSION 等）屬「運行時的版本升降」那場，本場不展開。</a:t>
+              <a:rPr sz="1600" b="0">
+                <a:solidFill>
+                  <a:srgbClr val="1E2024"/>
+                </a:solidFill>
+                <a:latin typeface="Calibri"/>
+              </a:rPr>
+              <a:t>C.  </a:t>
+            </a:r>
+            <a:r>
+              <a:rPr sz="1600" b="0">
+                <a:solidFill>
+                  <a:srgbClr val="1E2024"/>
+                </a:solidFill>
+                <a:latin typeface="Calibri"/>
+              </a:rPr>
+              <a:t>broker 自動降版</a:t>
             </a:r>
           </a:p>
         </p:txBody>
@@ -4446,6 +4358,92 @@
       <p:sp>
         <p:nvSpPr>
           <p:cNvPr id="7" name="TextBox 6"/>
+          <p:cNvSpPr txBox="1"/>
+          <p:nvPr/>
+        </p:nvSpPr>
+        <p:spPr>
+          <a:xfrm>
+            <a:off x="822960" y="4197096"/>
+            <a:ext cx="10515600" cy="493776"/>
+          </a:xfrm>
+          <a:prstGeom prst="rect">
+            <a:avLst/>
+          </a:prstGeom>
+          <a:noFill/>
+        </p:spPr>
+        <p:txBody>
+          <a:bodyPr wrap="square">
+            <a:noAutofit/>
+          </a:bodyPr>
+          <a:lstStyle/>
+          <a:p>
+            <a:r>
+              <a:rPr sz="1600" b="0">
+                <a:solidFill>
+                  <a:srgbClr val="1E2024"/>
+                </a:solidFill>
+                <a:latin typeface="Calibri"/>
+              </a:rPr>
+              <a:t>D.  </a:t>
+            </a:r>
+            <a:r>
+              <a:rPr sz="1600" b="0">
+                <a:solidFill>
+                  <a:srgbClr val="1E2024"/>
+                </a:solidFill>
+                <a:latin typeface="Calibri"/>
+              </a:rPr>
+              <a:t>忽略版本照跑</a:t>
+            </a:r>
+          </a:p>
+        </p:txBody>
+      </p:sp>
+      <p:sp>
+        <p:nvSpPr>
+          <p:cNvPr id="8" name="TextBox 7"/>
+          <p:cNvSpPr txBox="1"/>
+          <p:nvPr/>
+        </p:nvSpPr>
+        <p:spPr>
+          <a:xfrm>
+            <a:off x="640080" y="4910327"/>
+            <a:ext cx="10972800" cy="914400"/>
+          </a:xfrm>
+          <a:prstGeom prst="rect">
+            <a:avLst/>
+          </a:prstGeom>
+          <a:noFill/>
+        </p:spPr>
+        <p:txBody>
+          <a:bodyPr wrap="square">
+            <a:noAutofit/>
+          </a:bodyPr>
+          <a:lstStyle/>
+          <a:p>
+            <a:r>
+              <a:rPr sz="1400" b="1">
+                <a:solidFill>
+                  <a:srgbClr val="27500A"/>
+                </a:solidFill>
+                <a:latin typeface="Calibri"/>
+              </a:rPr>
+              <a:t>正解 B — </a:t>
+            </a:r>
+            <a:r>
+              <a:rPr sz="1400" b="0">
+                <a:solidFill>
+                  <a:srgbClr val="1E2024"/>
+                </a:solidFill>
+                <a:latin typeface="Calibri"/>
+              </a:rPr>
+              <a:t>ApiVersions 是 bootstrap 逃生口；其他 API → broker 丟 UnsupportedVersionException → 斷線。</a:t>
+            </a:r>
+          </a:p>
+        </p:txBody>
+      </p:sp>
+      <p:sp>
+        <p:nvSpPr>
+          <p:cNvPr id="9" name="TextBox 8"/>
           <p:cNvSpPr txBox="1"/>
           <p:nvPr/>
         </p:nvSpPr>
@@ -4482,26 +4480,7 @@
                 <a:latin typeface="Courier New"/>
                 <a:hlinkClick r:id="rId2"/>
               </a:rPr>
-              <a:t>upgrade.md:229</a:t>
-            </a:r>
-            <a:r>
-              <a:rPr sz="1200" b="0">
-                <a:solidFill>
-                  <a:srgbClr val="8A8A8A"/>
-                </a:solidFill>
-                <a:latin typeface="Calibri"/>
-              </a:rPr>
-              <a:t>   ·   </a:t>
-            </a:r>
-            <a:r>
-              <a:rPr sz="1200" b="0" u="sng">
-                <a:solidFill>
-                  <a:srgbClr val="185FA5"/>
-                </a:solidFill>
-                <a:latin typeface="Courier New"/>
-                <a:hlinkClick r:id="rId3"/>
-              </a:rPr>
-              <a:t>FetchRequest.json validVersions</a:t>
+              <a:t>RequestContext.java:112</a:t>
             </a:r>
           </a:p>
         </p:txBody>
@@ -4553,648 +4532,6 @@
                 </a:solidFill>
                 <a:latin typeface="Calibri"/>
               </a:rPr>
-              <a:t>隨堂考 · 核心</a:t>
-            </a:r>
-          </a:p>
-        </p:txBody>
-      </p:sp>
-      <p:sp>
-        <p:nvSpPr>
-          <p:cNvPr id="3" name="TextBox 2"/>
-          <p:cNvSpPr txBox="1"/>
-          <p:nvPr/>
-        </p:nvSpPr>
-        <p:spPr>
-          <a:xfrm>
-            <a:off x="640080" y="841248"/>
-            <a:ext cx="10972800" cy="1188720"/>
-          </a:xfrm>
-          <a:prstGeom prst="rect">
-            <a:avLst/>
-          </a:prstGeom>
-          <a:noFill/>
-        </p:spPr>
-        <p:txBody>
-          <a:bodyPr wrap="square">
-            <a:noAutofit/>
-          </a:bodyPr>
-          <a:lstStyle/>
-          <a:p>
-            <a:r>
-              <a:rPr sz="2600" b="1">
-                <a:solidFill>
-                  <a:srgbClr val="1E2024"/>
-                </a:solidFill>
-                <a:latin typeface="Calibri"/>
-              </a:rPr>
-              <a:t>自刻 client 送了不支援的 API version，會怎樣？</a:t>
-            </a:r>
-          </a:p>
-        </p:txBody>
-      </p:sp>
-      <p:sp>
-        <p:nvSpPr>
-          <p:cNvPr id="4" name="TextBox 3"/>
-          <p:cNvSpPr txBox="1"/>
-          <p:nvPr/>
-        </p:nvSpPr>
-        <p:spPr>
-          <a:xfrm>
-            <a:off x="822960" y="2331720"/>
-            <a:ext cx="10515600" cy="493776"/>
-          </a:xfrm>
-          <a:prstGeom prst="rect">
-            <a:avLst/>
-          </a:prstGeom>
-          <a:noFill/>
-        </p:spPr>
-        <p:txBody>
-          <a:bodyPr wrap="square">
-            <a:noAutofit/>
-          </a:bodyPr>
-          <a:lstStyle/>
-          <a:p>
-            <a:r>
-              <a:rPr sz="1600" b="0">
-                <a:solidFill>
-                  <a:srgbClr val="1E2024"/>
-                </a:solidFill>
-                <a:latin typeface="Calibri"/>
-              </a:rPr>
-              <a:t>A.  </a:t>
-            </a:r>
-            <a:r>
-              <a:rPr sz="1600" b="0">
-                <a:solidFill>
-                  <a:srgbClr val="1E2024"/>
-                </a:solidFill>
-                <a:latin typeface="Calibri"/>
-              </a:rPr>
-              <a:t>一律回 UNSUPPORTED_VERSION</a:t>
-            </a:r>
-          </a:p>
-        </p:txBody>
-      </p:sp>
-      <p:sp>
-        <p:nvSpPr>
-          <p:cNvPr id="5" name="TextBox 4"/>
-          <p:cNvSpPr txBox="1"/>
-          <p:nvPr/>
-        </p:nvSpPr>
-        <p:spPr>
-          <a:xfrm>
-            <a:off x="822960" y="2953512"/>
-            <a:ext cx="10515600" cy="493776"/>
-          </a:xfrm>
-          <a:prstGeom prst="rect">
-            <a:avLst/>
-          </a:prstGeom>
-          <a:noFill/>
-        </p:spPr>
-        <p:txBody>
-          <a:bodyPr wrap="square">
-            <a:noAutofit/>
-          </a:bodyPr>
-          <a:lstStyle/>
-          <a:p>
-            <a:r>
-              <a:rPr sz="1600" b="0">
-                <a:solidFill>
-                  <a:srgbClr val="1E2024"/>
-                </a:solidFill>
-                <a:latin typeface="Calibri"/>
-              </a:rPr>
-              <a:t>B.  </a:t>
-            </a:r>
-            <a:r>
-              <a:rPr sz="1600" b="0">
-                <a:solidFill>
-                  <a:srgbClr val="1E2024"/>
-                </a:solidFill>
-                <a:latin typeface="Calibri"/>
-              </a:rPr>
-              <a:t>只有 ApiVersions 例外回錯誤+範圍；其他 API 關線</a:t>
-            </a:r>
-          </a:p>
-        </p:txBody>
-      </p:sp>
-      <p:sp>
-        <p:nvSpPr>
-          <p:cNvPr id="6" name="TextBox 5"/>
-          <p:cNvSpPr txBox="1"/>
-          <p:nvPr/>
-        </p:nvSpPr>
-        <p:spPr>
-          <a:xfrm>
-            <a:off x="822960" y="3575304"/>
-            <a:ext cx="10515600" cy="493776"/>
-          </a:xfrm>
-          <a:prstGeom prst="rect">
-            <a:avLst/>
-          </a:prstGeom>
-          <a:noFill/>
-        </p:spPr>
-        <p:txBody>
-          <a:bodyPr wrap="square">
-            <a:noAutofit/>
-          </a:bodyPr>
-          <a:lstStyle/>
-          <a:p>
-            <a:r>
-              <a:rPr sz="1600" b="0">
-                <a:solidFill>
-                  <a:srgbClr val="1E2024"/>
-                </a:solidFill>
-                <a:latin typeface="Calibri"/>
-              </a:rPr>
-              <a:t>C.  </a:t>
-            </a:r>
-            <a:r>
-              <a:rPr sz="1600" b="0">
-                <a:solidFill>
-                  <a:srgbClr val="1E2024"/>
-                </a:solidFill>
-                <a:latin typeface="Calibri"/>
-              </a:rPr>
-              <a:t>broker 自動降版</a:t>
-            </a:r>
-          </a:p>
-        </p:txBody>
-      </p:sp>
-      <p:sp>
-        <p:nvSpPr>
-          <p:cNvPr id="7" name="TextBox 6"/>
-          <p:cNvSpPr txBox="1"/>
-          <p:nvPr/>
-        </p:nvSpPr>
-        <p:spPr>
-          <a:xfrm>
-            <a:off x="822960" y="4197096"/>
-            <a:ext cx="10515600" cy="493776"/>
-          </a:xfrm>
-          <a:prstGeom prst="rect">
-            <a:avLst/>
-          </a:prstGeom>
-          <a:noFill/>
-        </p:spPr>
-        <p:txBody>
-          <a:bodyPr wrap="square">
-            <a:noAutofit/>
-          </a:bodyPr>
-          <a:lstStyle/>
-          <a:p>
-            <a:r>
-              <a:rPr sz="1600" b="0">
-                <a:solidFill>
-                  <a:srgbClr val="1E2024"/>
-                </a:solidFill>
-                <a:latin typeface="Calibri"/>
-              </a:rPr>
-              <a:t>D.  </a:t>
-            </a:r>
-            <a:r>
-              <a:rPr sz="1600" b="0">
-                <a:solidFill>
-                  <a:srgbClr val="1E2024"/>
-                </a:solidFill>
-                <a:latin typeface="Calibri"/>
-              </a:rPr>
-              <a:t>忽略版本照跑</a:t>
-            </a:r>
-          </a:p>
-        </p:txBody>
-      </p:sp>
-      <p:sp>
-        <p:nvSpPr>
-          <p:cNvPr id="8" name="TextBox 7"/>
-          <p:cNvSpPr txBox="1"/>
-          <p:nvPr/>
-        </p:nvSpPr>
-        <p:spPr>
-          <a:xfrm>
-            <a:off x="640080" y="4910327"/>
-            <a:ext cx="10972800" cy="914400"/>
-          </a:xfrm>
-          <a:prstGeom prst="rect">
-            <a:avLst/>
-          </a:prstGeom>
-          <a:noFill/>
-        </p:spPr>
-        <p:txBody>
-          <a:bodyPr wrap="square">
-            <a:noAutofit/>
-          </a:bodyPr>
-          <a:lstStyle/>
-          <a:p>
-            <a:r>
-              <a:rPr sz="1400" b="0">
-                <a:solidFill>
-                  <a:srgbClr val="8A8A8A"/>
-                </a:solidFill>
-                <a:latin typeface="Calibri"/>
-              </a:rPr>
-              <a:t>想一想 —— 下一頁公布答案</a:t>
-            </a:r>
-          </a:p>
-        </p:txBody>
-      </p:sp>
-    </p:spTree>
-  </p:cSld>
-  <p:clrMapOvr>
-    <a:masterClrMapping/>
-  </p:clrMapOvr>
-</p:sld>
-</file>
-
-<file path=ppt/slides/slide15.xml><?xml version="1.0" encoding="utf-8"?>
-<p:sld xmlns:a="http://schemas.openxmlformats.org/drawingml/2006/main" xmlns:p="http://schemas.openxmlformats.org/presentationml/2006/main" xmlns:r="http://schemas.openxmlformats.org/officeDocument/2006/relationships">
-  <p:cSld>
-    <p:spTree>
-      <p:nvGrpSpPr>
-        <p:cNvPr id="1" name=""/>
-        <p:cNvGrpSpPr/>
-        <p:nvPr/>
-      </p:nvGrpSpPr>
-      <p:grpSpPr/>
-      <p:sp>
-        <p:nvSpPr>
-          <p:cNvPr id="2" name="TextBox 1"/>
-          <p:cNvSpPr txBox="1"/>
-          <p:nvPr/>
-        </p:nvSpPr>
-        <p:spPr>
-          <a:xfrm>
-            <a:off x="640080" y="457200"/>
-            <a:ext cx="10972800" cy="365760"/>
-          </a:xfrm>
-          <a:prstGeom prst="rect">
-            <a:avLst/>
-          </a:prstGeom>
-          <a:noFill/>
-        </p:spPr>
-        <p:txBody>
-          <a:bodyPr wrap="square">
-            <a:noAutofit/>
-          </a:bodyPr>
-          <a:lstStyle/>
-          <a:p>
-            <a:r>
-              <a:rPr sz="1300" b="1">
-                <a:solidFill>
-                  <a:srgbClr val="185FA5"/>
-                </a:solidFill>
-                <a:latin typeface="Calibri"/>
-              </a:rPr>
-              <a:t>隨堂考 · 核心　（正解）</a:t>
-            </a:r>
-          </a:p>
-        </p:txBody>
-      </p:sp>
-      <p:sp>
-        <p:nvSpPr>
-          <p:cNvPr id="3" name="TextBox 2"/>
-          <p:cNvSpPr txBox="1"/>
-          <p:nvPr/>
-        </p:nvSpPr>
-        <p:spPr>
-          <a:xfrm>
-            <a:off x="640080" y="841248"/>
-            <a:ext cx="10972800" cy="1188720"/>
-          </a:xfrm>
-          <a:prstGeom prst="rect">
-            <a:avLst/>
-          </a:prstGeom>
-          <a:noFill/>
-        </p:spPr>
-        <p:txBody>
-          <a:bodyPr wrap="square">
-            <a:noAutofit/>
-          </a:bodyPr>
-          <a:lstStyle/>
-          <a:p>
-            <a:r>
-              <a:rPr sz="2600" b="1">
-                <a:solidFill>
-                  <a:srgbClr val="1E2024"/>
-                </a:solidFill>
-                <a:latin typeface="Calibri"/>
-              </a:rPr>
-              <a:t>自刻 client 送了不支援的 API version，會怎樣？</a:t>
-            </a:r>
-          </a:p>
-        </p:txBody>
-      </p:sp>
-      <p:sp>
-        <p:nvSpPr>
-          <p:cNvPr id="4" name="TextBox 3"/>
-          <p:cNvSpPr txBox="1"/>
-          <p:nvPr/>
-        </p:nvSpPr>
-        <p:spPr>
-          <a:xfrm>
-            <a:off x="822960" y="2331720"/>
-            <a:ext cx="10515600" cy="493776"/>
-          </a:xfrm>
-          <a:prstGeom prst="rect">
-            <a:avLst/>
-          </a:prstGeom>
-          <a:noFill/>
-        </p:spPr>
-        <p:txBody>
-          <a:bodyPr wrap="square">
-            <a:noAutofit/>
-          </a:bodyPr>
-          <a:lstStyle/>
-          <a:p>
-            <a:r>
-              <a:rPr sz="1600" b="0">
-                <a:solidFill>
-                  <a:srgbClr val="1E2024"/>
-                </a:solidFill>
-                <a:latin typeface="Calibri"/>
-              </a:rPr>
-              <a:t>A.  </a:t>
-            </a:r>
-            <a:r>
-              <a:rPr sz="1600" b="0">
-                <a:solidFill>
-                  <a:srgbClr val="1E2024"/>
-                </a:solidFill>
-                <a:latin typeface="Calibri"/>
-              </a:rPr>
-              <a:t>一律回 UNSUPPORTED_VERSION</a:t>
-            </a:r>
-          </a:p>
-        </p:txBody>
-      </p:sp>
-      <p:sp>
-        <p:nvSpPr>
-          <p:cNvPr id="5" name="TextBox 4"/>
-          <p:cNvSpPr txBox="1"/>
-          <p:nvPr/>
-        </p:nvSpPr>
-        <p:spPr>
-          <a:xfrm>
-            <a:off x="822960" y="2953512"/>
-            <a:ext cx="10515600" cy="493776"/>
-          </a:xfrm>
-          <a:prstGeom prst="rect">
-            <a:avLst/>
-          </a:prstGeom>
-          <a:solidFill>
-            <a:srgbClr val="E9F3DE"/>
-          </a:solidFill>
-          <a:ln>
-            <a:noFill/>
-          </a:ln>
-        </p:spPr>
-        <p:txBody>
-          <a:bodyPr wrap="square" lIns="128016" tIns="54864">
-            <a:noAutofit/>
-          </a:bodyPr>
-          <a:lstStyle/>
-          <a:p>
-            <a:r>
-              <a:rPr sz="1600" b="1">
-                <a:solidFill>
-                  <a:srgbClr val="27500A"/>
-                </a:solidFill>
-                <a:latin typeface="Calibri"/>
-              </a:rPr>
-              <a:t>B.  </a:t>
-            </a:r>
-            <a:r>
-              <a:rPr sz="1600" b="1">
-                <a:solidFill>
-                  <a:srgbClr val="27500A"/>
-                </a:solidFill>
-                <a:latin typeface="Calibri"/>
-              </a:rPr>
-              <a:t>只有 ApiVersions 例外回錯誤+範圍；其他 API 關線   ✓</a:t>
-            </a:r>
-          </a:p>
-        </p:txBody>
-      </p:sp>
-      <p:sp>
-        <p:nvSpPr>
-          <p:cNvPr id="6" name="TextBox 5"/>
-          <p:cNvSpPr txBox="1"/>
-          <p:nvPr/>
-        </p:nvSpPr>
-        <p:spPr>
-          <a:xfrm>
-            <a:off x="822960" y="3575304"/>
-            <a:ext cx="10515600" cy="493776"/>
-          </a:xfrm>
-          <a:prstGeom prst="rect">
-            <a:avLst/>
-          </a:prstGeom>
-          <a:noFill/>
-        </p:spPr>
-        <p:txBody>
-          <a:bodyPr wrap="square">
-            <a:noAutofit/>
-          </a:bodyPr>
-          <a:lstStyle/>
-          <a:p>
-            <a:r>
-              <a:rPr sz="1600" b="0">
-                <a:solidFill>
-                  <a:srgbClr val="1E2024"/>
-                </a:solidFill>
-                <a:latin typeface="Calibri"/>
-              </a:rPr>
-              <a:t>C.  </a:t>
-            </a:r>
-            <a:r>
-              <a:rPr sz="1600" b="0">
-                <a:solidFill>
-                  <a:srgbClr val="1E2024"/>
-                </a:solidFill>
-                <a:latin typeface="Calibri"/>
-              </a:rPr>
-              <a:t>broker 自動降版</a:t>
-            </a:r>
-          </a:p>
-        </p:txBody>
-      </p:sp>
-      <p:sp>
-        <p:nvSpPr>
-          <p:cNvPr id="7" name="TextBox 6"/>
-          <p:cNvSpPr txBox="1"/>
-          <p:nvPr/>
-        </p:nvSpPr>
-        <p:spPr>
-          <a:xfrm>
-            <a:off x="822960" y="4197096"/>
-            <a:ext cx="10515600" cy="493776"/>
-          </a:xfrm>
-          <a:prstGeom prst="rect">
-            <a:avLst/>
-          </a:prstGeom>
-          <a:noFill/>
-        </p:spPr>
-        <p:txBody>
-          <a:bodyPr wrap="square">
-            <a:noAutofit/>
-          </a:bodyPr>
-          <a:lstStyle/>
-          <a:p>
-            <a:r>
-              <a:rPr sz="1600" b="0">
-                <a:solidFill>
-                  <a:srgbClr val="1E2024"/>
-                </a:solidFill>
-                <a:latin typeface="Calibri"/>
-              </a:rPr>
-              <a:t>D.  </a:t>
-            </a:r>
-            <a:r>
-              <a:rPr sz="1600" b="0">
-                <a:solidFill>
-                  <a:srgbClr val="1E2024"/>
-                </a:solidFill>
-                <a:latin typeface="Calibri"/>
-              </a:rPr>
-              <a:t>忽略版本照跑</a:t>
-            </a:r>
-          </a:p>
-        </p:txBody>
-      </p:sp>
-      <p:sp>
-        <p:nvSpPr>
-          <p:cNvPr id="8" name="TextBox 7"/>
-          <p:cNvSpPr txBox="1"/>
-          <p:nvPr/>
-        </p:nvSpPr>
-        <p:spPr>
-          <a:xfrm>
-            <a:off x="640080" y="4910327"/>
-            <a:ext cx="10972800" cy="914400"/>
-          </a:xfrm>
-          <a:prstGeom prst="rect">
-            <a:avLst/>
-          </a:prstGeom>
-          <a:noFill/>
-        </p:spPr>
-        <p:txBody>
-          <a:bodyPr wrap="square">
-            <a:noAutofit/>
-          </a:bodyPr>
-          <a:lstStyle/>
-          <a:p>
-            <a:r>
-              <a:rPr sz="1400" b="1">
-                <a:solidFill>
-                  <a:srgbClr val="27500A"/>
-                </a:solidFill>
-                <a:latin typeface="Calibri"/>
-              </a:rPr>
-              <a:t>正解 B — </a:t>
-            </a:r>
-            <a:r>
-              <a:rPr sz="1400" b="0">
-                <a:solidFill>
-                  <a:srgbClr val="1E2024"/>
-                </a:solidFill>
-                <a:latin typeface="Calibri"/>
-              </a:rPr>
-              <a:t>ApiVersions 是 bootstrap 逃生口；其他 API → broker 丟 UnsupportedVersionException → 斷線。</a:t>
-            </a:r>
-          </a:p>
-        </p:txBody>
-      </p:sp>
-      <p:sp>
-        <p:nvSpPr>
-          <p:cNvPr id="9" name="TextBox 8"/>
-          <p:cNvSpPr txBox="1"/>
-          <p:nvPr/>
-        </p:nvSpPr>
-        <p:spPr>
-          <a:xfrm>
-            <a:off x="640080" y="6400800"/>
-            <a:ext cx="10972800" cy="384048"/>
-          </a:xfrm>
-          <a:prstGeom prst="rect">
-            <a:avLst/>
-          </a:prstGeom>
-          <a:noFill/>
-        </p:spPr>
-        <p:txBody>
-          <a:bodyPr wrap="square">
-            <a:noAutofit/>
-          </a:bodyPr>
-          <a:lstStyle/>
-          <a:p>
-            <a:r>
-              <a:rPr sz="1200" b="1">
-                <a:solidFill>
-                  <a:srgbClr val="8A8A8A"/>
-                </a:solidFill>
-                <a:latin typeface="Calibri"/>
-              </a:rPr>
-              <a:t>REF   </a:t>
-            </a:r>
-            <a:r>
-              <a:rPr sz="1200" b="0" u="sng">
-                <a:solidFill>
-                  <a:srgbClr val="185FA5"/>
-                </a:solidFill>
-                <a:latin typeface="Courier New"/>
-                <a:hlinkClick r:id="rId2"/>
-              </a:rPr>
-              <a:t>RequestContext.java:112</a:t>
-            </a:r>
-          </a:p>
-        </p:txBody>
-      </p:sp>
-    </p:spTree>
-  </p:cSld>
-  <p:clrMapOvr>
-    <a:masterClrMapping/>
-  </p:clrMapOvr>
-</p:sld>
-</file>
-
-<file path=ppt/slides/slide16.xml><?xml version="1.0" encoding="utf-8"?>
-<p:sld xmlns:a="http://schemas.openxmlformats.org/drawingml/2006/main" xmlns:p="http://schemas.openxmlformats.org/presentationml/2006/main" xmlns:r="http://schemas.openxmlformats.org/officeDocument/2006/relationships">
-  <p:cSld>
-    <p:spTree>
-      <p:nvGrpSpPr>
-        <p:cNvPr id="1" name=""/>
-        <p:cNvGrpSpPr/>
-        <p:nvPr/>
-      </p:nvGrpSpPr>
-      <p:grpSpPr/>
-      <p:sp>
-        <p:nvSpPr>
-          <p:cNvPr id="2" name="TextBox 1"/>
-          <p:cNvSpPr txBox="1"/>
-          <p:nvPr/>
-        </p:nvSpPr>
-        <p:spPr>
-          <a:xfrm>
-            <a:off x="640080" y="457200"/>
-            <a:ext cx="10972800" cy="365760"/>
-          </a:xfrm>
-          <a:prstGeom prst="rect">
-            <a:avLst/>
-          </a:prstGeom>
-          <a:noFill/>
-        </p:spPr>
-        <p:txBody>
-          <a:bodyPr wrap="square">
-            <a:noAutofit/>
-          </a:bodyPr>
-          <a:lstStyle/>
-          <a:p>
-            <a:r>
-              <a:rPr sz="1300" b="1">
-                <a:solidFill>
-                  <a:srgbClr val="185FA5"/>
-                </a:solidFill>
-                <a:latin typeface="Calibri"/>
-              </a:rPr>
               <a:t>Recap</a:t>
             </a:r>
           </a:p>
@@ -5489,7 +4826,7 @@
                 </a:solidFill>
                 <a:latin typeface="Calibri"/>
               </a:rPr>
-              <a:t>兩段，加 3 題隨堂考穿插</a:t>
+              <a:t>兩段，加 2 題隨堂考穿插</a:t>
             </a:r>
           </a:p>
         </p:txBody>
@@ -5978,7 +5315,7 @@
                 </a:solidFill>
                 <a:latin typeface="Calibri"/>
               </a:rPr>
-              <a:t>Part 1 · 地圖</a:t>
+              <a:t>Part 1 · 動機</a:t>
             </a:r>
           </a:p>
         </p:txBody>
@@ -6012,20 +5349,136 @@
                 </a:solidFill>
                 <a:latin typeface="Calibri"/>
               </a:rPr>
-              <a:t>叢集裡有三種通訊，而且版本天生對不齊</a:t>
-            </a:r>
-          </a:p>
-        </p:txBody>
-      </p:sp>
-      <p:sp>
-        <p:nvSpPr>
-          <p:cNvPr id="4" name="TextBox 3"/>
-          <p:cNvSpPr txBox="1"/>
-          <p:nvPr/>
-        </p:nvSpPr>
-        <p:spPr>
-          <a:xfrm>
-            <a:off x="640080" y="2148840"/>
+              <a:t>為什麼版本天生對不齊，只能連線當下協商</a:t>
+            </a:r>
+          </a:p>
+        </p:txBody>
+      </p:sp>
+      <p:pic>
+        <p:nvPicPr>
+          <p:cNvPr id="4" name="Picture 3" descr="clock-hour-4.png"/>
+          <p:cNvPicPr>
+            <a:picLocks noChangeAspect="1"/>
+          </p:cNvPicPr>
+          <p:nvPr/>
+        </p:nvPicPr>
+        <p:blipFill>
+          <a:blip r:embed="rId2"/>
+          <a:stretch>
+            <a:fillRect/>
+          </a:stretch>
+        </p:blipFill>
+        <p:spPr>
+          <a:xfrm>
+            <a:off x="658368" y="2176272"/>
+            <a:ext cx="274320" cy="274320"/>
+          </a:xfrm>
+          <a:prstGeom prst="rect">
+            <a:avLst/>
+          </a:prstGeom>
+        </p:spPr>
+      </p:pic>
+      <p:sp>
+        <p:nvSpPr>
+          <p:cNvPr id="5" name="TextBox 4"/>
+          <p:cNvSpPr txBox="1"/>
+          <p:nvPr/>
+        </p:nvSpPr>
+        <p:spPr>
+          <a:xfrm>
+            <a:off x="1078992" y="2148840"/>
+            <a:ext cx="10515600" cy="841248"/>
+          </a:xfrm>
+          <a:prstGeom prst="rect">
+            <a:avLst/>
+          </a:prstGeom>
+          <a:noFill/>
+        </p:spPr>
+        <p:txBody>
+          <a:bodyPr wrap="square">
+            <a:noAutofit/>
+          </a:bodyPr>
+          <a:lstStyle/>
+          <a:p>
+            <a:r>
+              <a:rPr sz="1650" b="0">
+                <a:solidFill>
+                  <a:srgbClr val="1E2024"/>
+                </a:solidFill>
+                <a:latin typeface="Calibri"/>
+              </a:rPr>
+              <a:t>client 內嵌在各 app、長期不更新（Kafka 曾為舊 client 保留每個 protocol 版本近九年，4.0／KIP-896 才把下限提到 2.1）</a:t>
+            </a:r>
+          </a:p>
+        </p:txBody>
+      </p:sp>
+      <p:pic>
+        <p:nvPicPr>
+          <p:cNvPr id="6" name="Picture 5" descr="server-2.png"/>
+          <p:cNvPicPr>
+            <a:picLocks noChangeAspect="1"/>
+          </p:cNvPicPr>
+          <p:nvPr/>
+        </p:nvPicPr>
+        <p:blipFill>
+          <a:blip r:embed="rId3"/>
+          <a:stretch>
+            <a:fillRect/>
+          </a:stretch>
+        </p:blipFill>
+        <p:spPr>
+          <a:xfrm>
+            <a:off x="658368" y="3163824"/>
+            <a:ext cx="274320" cy="274320"/>
+          </a:xfrm>
+          <a:prstGeom prst="rect">
+            <a:avLst/>
+          </a:prstGeom>
+        </p:spPr>
+      </p:pic>
+      <p:sp>
+        <p:nvSpPr>
+          <p:cNvPr id="7" name="TextBox 6"/>
+          <p:cNvSpPr txBox="1"/>
+          <p:nvPr/>
+        </p:nvSpPr>
+        <p:spPr>
+          <a:xfrm>
+            <a:off x="1078992" y="3136392"/>
+            <a:ext cx="10515600" cy="493776"/>
+          </a:xfrm>
+          <a:prstGeom prst="rect">
+            <a:avLst/>
+          </a:prstGeom>
+          <a:noFill/>
+        </p:spPr>
+        <p:txBody>
+          <a:bodyPr wrap="square">
+            <a:noAutofit/>
+          </a:bodyPr>
+          <a:lstStyle/>
+          <a:p>
+            <a:r>
+              <a:rPr sz="1650" b="0">
+                <a:solidFill>
+                  <a:srgbClr val="1E2024"/>
+                </a:solidFill>
+                <a:latin typeface="Calibri"/>
+              </a:rPr>
+              <a:t>broker 逐台滾動升級，過程必然新舊並存</a:t>
+            </a:r>
+          </a:p>
+        </p:txBody>
+      </p:sp>
+      <p:sp>
+        <p:nvSpPr>
+          <p:cNvPr id="8" name="TextBox 7"/>
+          <p:cNvSpPr txBox="1"/>
+          <p:nvPr/>
+        </p:nvSpPr>
+        <p:spPr>
+          <a:xfrm>
+            <a:off x="640080" y="3776472"/>
             <a:ext cx="10972800" cy="1097280"/>
           </a:xfrm>
           <a:prstGeom prst="rect">
@@ -6053,7 +5506,7 @@
                 </a:solidFill>
                 <a:latin typeface="Calibri"/>
               </a:rPr>
-              <a:t>client ─▶ broker        讀寫資料、查 metadata…</a:t>
+              <a:t>任一時刻：不同節點能力／版本不同</a:t>
             </a:r>
           </a:p>
           <a:p>
@@ -6064,7 +5517,7 @@
                 </a:solidFill>
                 <a:latin typeface="Calibri"/>
               </a:rPr>
-              <a:t>broker ─▶ controller    註冊、心跳、AlterPartition、轉發 admin…</a:t>
+              <a:t>        → 不能鎖全叢集同一版（又要不停機）</a:t>
             </a:r>
           </a:p>
           <a:p>
@@ -6075,127 +5528,11 @@
                 </a:solidFill>
                 <a:latin typeface="Calibri"/>
               </a:rPr>
-              <a:t>broker ◀▶ broker        複製（follower 抓 leader）</a:t>
-            </a:r>
-          </a:p>
-        </p:txBody>
-      </p:sp>
-      <p:sp>
-        <p:nvSpPr>
-          <p:cNvPr id="5" name="TextBox 4"/>
-          <p:cNvSpPr txBox="1"/>
-          <p:nvPr/>
-        </p:nvSpPr>
-        <p:spPr>
-          <a:xfrm>
-            <a:off x="640080" y="3447288"/>
-            <a:ext cx="10972800" cy="438912"/>
-          </a:xfrm>
-          <a:prstGeom prst="rect">
-            <a:avLst/>
-          </a:prstGeom>
-          <a:noFill/>
-        </p:spPr>
-        <p:txBody>
-          <a:bodyPr wrap="square">
-            <a:noAutofit/>
-          </a:bodyPr>
-          <a:lstStyle/>
-          <a:p>
-            <a:r>
-              <a:rPr sz="1500" b="0">
-                <a:solidFill>
-                  <a:srgbClr val="5F5E5A"/>
-                </a:solidFill>
-                <a:latin typeface="Calibri"/>
-              </a:rPr>
-              <a:t>每列只列代表性的幾種、非窮舉；重點是「就這三條線」。</a:t>
-            </a:r>
-          </a:p>
-        </p:txBody>
-      </p:sp>
-      <p:pic>
-        <p:nvPicPr>
-          <p:cNvPr id="6" name="Picture 5" descr="clock-hour-4.png"/>
-          <p:cNvPicPr>
-            <a:picLocks noChangeAspect="1"/>
-          </p:cNvPicPr>
-          <p:nvPr/>
-        </p:nvPicPr>
-        <p:blipFill>
-          <a:blip r:embed="rId2"/>
-          <a:stretch>
-            <a:fillRect/>
-          </a:stretch>
-        </p:blipFill>
-        <p:spPr>
-          <a:xfrm>
-            <a:off x="658368" y="4041648"/>
-            <a:ext cx="274320" cy="274320"/>
-          </a:xfrm>
-          <a:prstGeom prst="rect">
-            <a:avLst/>
-          </a:prstGeom>
-        </p:spPr>
-      </p:pic>
-      <p:sp>
-        <p:nvSpPr>
-          <p:cNvPr id="7" name="TextBox 6"/>
-          <p:cNvSpPr txBox="1"/>
-          <p:nvPr/>
-        </p:nvSpPr>
-        <p:spPr>
-          <a:xfrm>
-            <a:off x="1078992" y="4014215"/>
-            <a:ext cx="10515600" cy="841248"/>
-          </a:xfrm>
-          <a:prstGeom prst="rect">
-            <a:avLst/>
-          </a:prstGeom>
-          <a:noFill/>
-        </p:spPr>
-        <p:txBody>
-          <a:bodyPr wrap="square">
-            <a:noAutofit/>
-          </a:bodyPr>
-          <a:lstStyle/>
-          <a:p>
-            <a:r>
-              <a:rPr sz="1650" b="0">
-                <a:solidFill>
-                  <a:srgbClr val="1E2024"/>
-                </a:solidFill>
-                <a:latin typeface="Calibri"/>
-              </a:rPr>
-              <a:t>client 內嵌在各 app、長期不更新（Kafka 曾為舊 client 保留每個 protocol 版本近九年，4.0／KIP-896 才把下限提到 2.1）</a:t>
-            </a:r>
-          </a:p>
-        </p:txBody>
-      </p:sp>
-      <p:pic>
-        <p:nvPicPr>
-          <p:cNvPr id="8" name="Picture 7" descr="server-2.png"/>
-          <p:cNvPicPr>
-            <a:picLocks noChangeAspect="1"/>
-          </p:cNvPicPr>
-          <p:nvPr/>
-        </p:nvPicPr>
-        <p:blipFill>
-          <a:blip r:embed="rId3"/>
-          <a:stretch>
-            <a:fillRect/>
-          </a:stretch>
-        </p:blipFill>
-        <p:spPr>
-          <a:xfrm>
-            <a:off x="658368" y="5029200"/>
-            <a:ext cx="274320" cy="274320"/>
-          </a:xfrm>
-          <a:prstGeom prst="rect">
-            <a:avLst/>
-          </a:prstGeom>
-        </p:spPr>
-      </p:pic>
+              <a:t>        → 只能在「連線當下」協商</a:t>
+            </a:r>
+          </a:p>
+        </p:txBody>
+      </p:sp>
       <p:sp>
         <p:nvSpPr>
           <p:cNvPr id="9" name="TextBox 8"/>
@@ -6204,41 +5541,7 @@
         </p:nvSpPr>
         <p:spPr>
           <a:xfrm>
-            <a:off x="1078992" y="5001768"/>
-            <a:ext cx="10515600" cy="493776"/>
-          </a:xfrm>
-          <a:prstGeom prst="rect">
-            <a:avLst/>
-          </a:prstGeom>
-          <a:noFill/>
-        </p:spPr>
-        <p:txBody>
-          <a:bodyPr wrap="square">
-            <a:noAutofit/>
-          </a:bodyPr>
-          <a:lstStyle/>
-          <a:p>
-            <a:r>
-              <a:rPr sz="1650" b="0">
-                <a:solidFill>
-                  <a:srgbClr val="1E2024"/>
-                </a:solidFill>
-                <a:latin typeface="Calibri"/>
-              </a:rPr>
-              <a:t>broker 逐台滾動升級，過程必然新舊並存；要不停機就不能要求全叢集同版</a:t>
-            </a:r>
-          </a:p>
-        </p:txBody>
-      </p:sp>
-      <p:sp>
-        <p:nvSpPr>
-          <p:cNvPr id="10" name="TextBox 9"/>
-          <p:cNvSpPr txBox="1"/>
-          <p:nvPr/>
-        </p:nvSpPr>
-        <p:spPr>
-          <a:xfrm>
-            <a:off x="640080" y="5641848"/>
+            <a:off x="640080" y="5074920"/>
             <a:ext cx="10972800" cy="566928"/>
           </a:xfrm>
           <a:prstGeom prst="rect">
@@ -6264,14 +5567,14 @@
                 </a:solidFill>
                 <a:latin typeface="Calibri"/>
               </a:rPr>
-              <a:t>所以版本只能在連線當下協商——後面每個機制都掛在上面這三條線</a:t>
-            </a:r>
-          </a:p>
-        </p:txBody>
-      </p:sp>
-      <p:sp>
-        <p:nvSpPr>
-          <p:cNvPr id="11" name="TextBox 10"/>
+              <a:t>這就是本場主題「溝通當下的版本選擇」的由來</a:t>
+            </a:r>
+          </a:p>
+        </p:txBody>
+      </p:sp>
+      <p:sp>
+        <p:nvSpPr>
+          <p:cNvPr id="10" name="TextBox 9"/>
           <p:cNvSpPr txBox="1"/>
           <p:nvPr/>
         </p:nvSpPr>
@@ -6398,7 +5701,7 @@
                 </a:solidFill>
                 <a:latin typeface="Calibri"/>
               </a:rPr>
-              <a:t>Part 1 · 三層 scope</a:t>
+              <a:t>Part 1 · 術語</a:t>
             </a:r>
           </a:p>
         </p:txBody>
@@ -6432,7 +5735,7 @@
                 </a:solidFill>
                 <a:latin typeface="Calibri"/>
               </a:rPr>
-              <a:t>一個版本號不夠：三種 scope 互斥</a:t>
+              <a:t>講「版本」時，其實是指哪一個？分三層</a:t>
             </a:r>
           </a:p>
         </p:txBody>
@@ -6553,7 +5856,7 @@
                 </a:solidFill>
                 <a:latin typeface="Calibri"/>
               </a:rPr>
-              <a:t>三層不會同步變動、scope 也不同，多數版本問題的根源都在於此</a:t>
+              <a:t>三個獨立的軸、各自變動；後面提到「版本」都要先分清楚是哪一層</a:t>
             </a:r>
           </a:p>
         </p:txBody>
@@ -6567,20 +5870,15 @@
         <p:spPr>
           <a:xfrm>
             <a:off x="640080" y="4087368"/>
-            <a:ext cx="10972800" cy="566928"/>
-          </a:xfrm>
-          <a:prstGeom prst="rect">
-            <a:avLst/>
-          </a:prstGeom>
-          <a:solidFill>
-            <a:srgbClr val="E9F3DE"/>
-          </a:solidFill>
-          <a:ln>
-            <a:noFill/>
-          </a:ln>
-        </p:spPr>
-        <p:txBody>
-          <a:bodyPr wrap="square" lIns="146304" tIns="82296">
+            <a:ext cx="10972800" cy="438912"/>
+          </a:xfrm>
+          <a:prstGeom prst="rect">
+            <a:avLst/>
+          </a:prstGeom>
+          <a:noFill/>
+        </p:spPr>
+        <p:txBody>
+          <a:bodyPr wrap="square">
             <a:noAutofit/>
           </a:bodyPr>
           <a:lstStyle/>
@@ -6588,11 +5886,11 @@
             <a:r>
               <a:rPr sz="1500" b="0">
                 <a:solidFill>
-                  <a:srgbClr val="27500A"/>
-                </a:solidFill>
-                <a:latin typeface="Calibri"/>
-              </a:rPr>
-              <a:t>單一版本號無法同時表達三種 scope，只能拆成三層各自管</a:t>
+                  <a:srgbClr val="5F5E5A"/>
+                </a:solidFill>
+                <a:latin typeface="Calibri"/>
+              </a:rPr>
+              <a:t>本場主角是 wire 版本（連線當下選哪版）；MV 是叢集治理、release 是 binary。</a:t>
             </a:r>
           </a:p>
         </p:txBody>
@@ -6706,7 +6004,7 @@
                 </a:solidFill>
                 <a:latin typeface="Calibri"/>
               </a:rPr>
-              <a:t>Part 1 · 選版機制</a:t>
+              <a:t>Part 1 · 架構</a:t>
             </a:r>
           </a:p>
         </p:txBody>
@@ -6740,7 +6038,7 @@
                 </a:solidFill>
                 <a:latin typeface="Calibri"/>
               </a:rPr>
-              <a:t>回到三個角色：各自怎麼選版</a:t>
+              <a:t>三種連線，各自怎麼選版</a:t>
             </a:r>
           </a:p>
         </p:txBody>
@@ -6798,7 +6096,7 @@
                 </a:solidFill>
                 <a:latin typeface="Calibri"/>
               </a:rPr>
-              <a:t>底層都先做 ApiVersions 握手（共用同一顆 NetworkClient）；決定版本的是 request Builder 留多少空間</a:t>
+              <a:t>協商發生在三條線上，底層都先做 ApiVersions 握手（共用同一顆 NetworkClient）</a:t>
             </a:r>
           </a:p>
         </p:txBody>
@@ -6850,7 +6148,7 @@
                 </a:solidFill>
                 <a:latin typeface="Calibri"/>
               </a:rPr>
-              <a:t>broker ↔ controller   也協商（broker 當 client：heartbeat / registration）</a:t>
+              <a:t>broker ↔ controller   也協商（broker 當 client：註冊 / 心跳 / 轉發 admin）</a:t>
             </a:r>
           </a:p>
           <a:p>
@@ -6900,7 +6198,7 @@
                 </a:solidFill>
                 <a:latin typeface="Calibri"/>
               </a:rPr>
-              <a:t>MV 只影響複製用的 Fetch / ListOffsets；client、controller 那兩條都是協商</a:t>
+              <a:t>決定版本的是 request Builder 留多少空間；MV 只影響複製的 Fetch / ListOffsets，其餘都是協商</a:t>
             </a:r>
           </a:p>
         </p:txBody>
@@ -7260,7 +6558,7 @@
                 </a:solidFill>
                 <a:latin typeface="Calibri"/>
               </a:rPr>
-              <a:t>隨堂考 · 暖身</a:t>
+              <a:t>隨堂考 · 核心</a:t>
             </a:r>
           </a:p>
         </p:txBody>
@@ -7294,7 +6592,7 @@
                 </a:solidFill>
                 <a:latin typeface="Calibri"/>
               </a:rPr>
-              <a:t>可以「一個版本打天下」嗎？</a:t>
+              <a:t>replica fetch（broker↔broker）的 Fetch 版本怎麼決定？</a:t>
             </a:r>
           </a:p>
         </p:txBody>
@@ -7337,7 +6635,7 @@
                 </a:solidFill>
                 <a:latin typeface="Calibri"/>
               </a:rPr>
-              <a:t>可以，大家同一版一起升</a:t>
+              <a:t>兩 broker ApiVersions 協商取交集</a:t>
             </a:r>
           </a:p>
         </p:txBody>
@@ -7380,7 +6678,7 @@
                 </a:solidFill>
                 <a:latin typeface="Calibri"/>
               </a:rPr>
-              <a:t>不行——client 長壽 + 要不停機，得溝通當下協商</a:t>
+              <a:t>由 finalized metadata.version 決定</a:t>
             </a:r>
           </a:p>
         </p:txBody>
@@ -7423,7 +6721,7 @@
                 </a:solidFill>
                 <a:latin typeface="Calibri"/>
               </a:rPr>
-              <a:t>可以，只要都 4.x</a:t>
+              <a:t>永遠用最新版</a:t>
             </a:r>
           </a:p>
         </p:txBody>
@@ -7466,7 +6764,7 @@
                 </a:solidFill>
                 <a:latin typeface="Calibri"/>
               </a:rPr>
-              <a:t>看 broker 數量</a:t>
+              <a:t>controller 每次指定</a:t>
             </a:r>
           </a:p>
         </p:txBody>
@@ -7552,7 +6850,7 @@
                 </a:solidFill>
                 <a:latin typeface="Calibri"/>
               </a:rPr>
-              <a:t>隨堂考 · 暖身　（正解）</a:t>
+              <a:t>隨堂考 · 核心　（正解）</a:t>
             </a:r>
           </a:p>
         </p:txBody>
@@ -7586,7 +6884,7 @@
                 </a:solidFill>
                 <a:latin typeface="Calibri"/>
               </a:rPr>
-              <a:t>可以「一個版本打天下」嗎？</a:t>
+              <a:t>replica fetch（broker↔broker）的 Fetch 版本怎麼決定？</a:t>
             </a:r>
           </a:p>
         </p:txBody>
@@ -7629,7 +6927,7 @@
                 </a:solidFill>
                 <a:latin typeface="Calibri"/>
               </a:rPr>
-              <a:t>可以，大家同一版一起升</a:t>
+              <a:t>兩 broker ApiVersions 協商取交集</a:t>
             </a:r>
           </a:p>
         </p:txBody>
@@ -7677,7 +6975,7 @@
                 </a:solidFill>
                 <a:latin typeface="Calibri"/>
               </a:rPr>
-              <a:t>不行——client 長壽 + 要不停機，得溝通當下協商   ✓</a:t>
+              <a:t>由 finalized metadata.version 決定   ✓</a:t>
             </a:r>
           </a:p>
         </p:txBody>
@@ -7720,7 +7018,7 @@
                 </a:solidFill>
                 <a:latin typeface="Calibri"/>
               </a:rPr>
-              <a:t>可以，只要都 4.x</a:t>
+              <a:t>永遠用最新版</a:t>
             </a:r>
           </a:p>
         </p:txBody>
@@ -7763,7 +7061,7 @@
                 </a:solidFill>
                 <a:latin typeface="Calibri"/>
               </a:rPr>
-              <a:t>看 broker 數量</a:t>
+              <a:t>controller 每次指定</a:t>
             </a:r>
           </a:p>
         </p:txBody>
@@ -7806,7 +7104,7 @@
                 </a:solidFill>
                 <a:latin typeface="Calibri"/>
               </a:rPr>
-              <a:t>client 嵌在各 app、超長壽，混版是常態；要不停機升級就得每條連線各自選版本。</a:t>
+              <a:t>fetchRequestVersion(MV)：MV 是集中共識，不做 per-connection 協商。</a:t>
             </a:r>
           </a:p>
         </p:txBody>
@@ -7850,7 +7148,7 @@
                 <a:latin typeface="Courier New"/>
                 <a:hlinkClick r:id="rId2"/>
               </a:rPr>
-              <a:t>protocol.md:94</a:t>
+              <a:t>RemoteLeaderEndPoint.scala:215</a:t>
             </a:r>
             <a:r>
               <a:rPr sz="1200" b="0">
@@ -7866,10 +7164,10 @@
                 <a:solidFill>
                   <a:srgbClr val="185FA5"/>
                 </a:solidFill>
-                <a:latin typeface="Calibri"/>
+                <a:latin typeface="Courier New"/>
                 <a:hlinkClick r:id="rId3"/>
               </a:rPr>
-              <a:t>KIP-896</a:t>
+              <a:t>MetadataVersion.java:273</a:t>
             </a:r>
           </a:p>
         </p:txBody>

--- a/study/version-control/kafka-version-negotiation.pptx
+++ b/study/version-control/kafka-version-negotiation.pptx
@@ -19,6 +19,7 @@
     <p:sldId id="267" r:id="rId18"/>
     <p:sldId id="268" r:id="rId19"/>
     <p:sldId id="269" r:id="rId20"/>
+    <p:sldId id="270" r:id="rId21"/>
   </p:sldIdLst>
   <p:sldSz cx="12191695" cy="6858000" type="screen4x3"/>
   <p:notesSz cx="6858000" cy="9144000"/>
@@ -3327,7 +3328,7 @@
                 </a:solidFill>
                 <a:latin typeface="Calibri"/>
               </a:rPr>
-              <a:t>Part 2 · 失敗訊息</a:t>
+              <a:t>隨堂考 · 核心　（正解）</a:t>
             </a:r>
           </a:p>
         </p:txBody>
@@ -3341,7 +3342,7 @@
         <p:spPr>
           <a:xfrm>
             <a:off x="640080" y="841248"/>
-            <a:ext cx="10972800" cy="1005840"/>
+            <a:ext cx="10972800" cy="1188720"/>
           </a:xfrm>
           <a:prstGeom prst="rect">
             <a:avLst/>
@@ -3355,13 +3356,13 @@
           <a:lstStyle/>
           <a:p>
             <a:r>
-              <a:rPr sz="3200" b="1">
+              <a:rPr sz="2600" b="1">
                 <a:solidFill>
                   <a:srgbClr val="1E2024"/>
                 </a:solidFill>
                 <a:latin typeface="Calibri"/>
               </a:rPr>
-              <a:t>通訊當下協商不出版本，會看到什麼</a:t>
+              <a:t>replica fetch（broker↔broker）的 Fetch 版本怎麼決定？</a:t>
             </a:r>
           </a:p>
         </p:txBody>
@@ -3374,85 +3375,89 @@
         </p:nvSpPr>
         <p:spPr>
           <a:xfrm>
-            <a:off x="640080" y="2148840"/>
-            <a:ext cx="10972800" cy="1371600"/>
+            <a:off x="822960" y="2331720"/>
+            <a:ext cx="10515600" cy="493776"/>
+          </a:xfrm>
+          <a:prstGeom prst="rect">
+            <a:avLst/>
+          </a:prstGeom>
+          <a:noFill/>
+        </p:spPr>
+        <p:txBody>
+          <a:bodyPr wrap="square">
+            <a:noAutofit/>
+          </a:bodyPr>
+          <a:lstStyle/>
+          <a:p>
+            <a:r>
+              <a:rPr sz="1600" b="0">
+                <a:solidFill>
+                  <a:srgbClr val="1E2024"/>
+                </a:solidFill>
+                <a:latin typeface="Calibri"/>
+              </a:rPr>
+              <a:t>A.  </a:t>
+            </a:r>
+            <a:r>
+              <a:rPr sz="1600" b="0">
+                <a:solidFill>
+                  <a:srgbClr val="1E2024"/>
+                </a:solidFill>
+                <a:latin typeface="Calibri"/>
+              </a:rPr>
+              <a:t>兩 broker ApiVersions 協商取交集</a:t>
+            </a:r>
+          </a:p>
+        </p:txBody>
+      </p:sp>
+      <p:sp>
+        <p:nvSpPr>
+          <p:cNvPr id="5" name="TextBox 4"/>
+          <p:cNvSpPr txBox="1"/>
+          <p:nvPr/>
+        </p:nvSpPr>
+        <p:spPr>
+          <a:xfrm>
+            <a:off x="822960" y="2953512"/>
+            <a:ext cx="10515600" cy="493776"/>
           </a:xfrm>
           <a:prstGeom prst="rect">
             <a:avLst/>
           </a:prstGeom>
           <a:solidFill>
-            <a:srgbClr val="F3F1EC"/>
+            <a:srgbClr val="E9F3DE"/>
           </a:solidFill>
-          <a:ln w="6350">
-            <a:solidFill>
-              <a:srgbClr val="E3E0D8"/>
-            </a:solidFill>
+          <a:ln>
+            <a:noFill/>
           </a:ln>
         </p:spPr>
         <p:txBody>
-          <a:bodyPr wrap="square" lIns="146304" tIns="91440" bIns="91440">
-            <a:noAutofit/>
-          </a:bodyPr>
-          <a:lstStyle/>
-          <a:p>
-            <a:r>
-              <a:rPr sz="1350" b="0">
-                <a:solidFill>
-                  <a:srgbClr val="2C2C2A"/>
-                </a:solidFill>
-                <a:latin typeface="Calibri"/>
-              </a:rPr>
-              <a:t>交集空        → client 端 UnsupportedVersionException（送出前 abort）</a:t>
-            </a:r>
-          </a:p>
-          <a:p>
-            <a:r>
-              <a:rPr sz="1350" b="0">
-                <a:solidFill>
-                  <a:srgbClr val="2C2C2A"/>
-                </a:solidFill>
-                <a:latin typeface="Calibri"/>
-              </a:rPr>
-              <a:t>繞過協商自刻  → broker 丟 UnsupportedVersionException + 關線</a:t>
-            </a:r>
-          </a:p>
-          <a:p>
-            <a:r>
-              <a:rPr sz="1350" b="0">
-                <a:solidFill>
-                  <a:srgbClr val="2C2C2A"/>
-                </a:solidFill>
-                <a:latin typeface="Calibri"/>
-              </a:rPr>
-              <a:t>（ApiVersions 例外：回 v0 + UNSUPPORTED_VERSION 錯誤碼）</a:t>
-            </a:r>
-          </a:p>
-        </p:txBody>
-      </p:sp>
-      <p:pic>
-        <p:nvPicPr>
-          <p:cNvPr id="5" name="Picture 4" descr="ban.png"/>
-          <p:cNvPicPr>
-            <a:picLocks noChangeAspect="1"/>
-          </p:cNvPicPr>
-          <p:nvPr/>
-        </p:nvPicPr>
-        <p:blipFill>
-          <a:blip r:embed="rId2"/>
-          <a:stretch>
-            <a:fillRect/>
-          </a:stretch>
-        </p:blipFill>
-        <p:spPr>
-          <a:xfrm>
-            <a:off x="658368" y="3749040"/>
-            <a:ext cx="274320" cy="274320"/>
-          </a:xfrm>
-          <a:prstGeom prst="rect">
-            <a:avLst/>
-          </a:prstGeom>
-        </p:spPr>
-      </p:pic>
+          <a:bodyPr wrap="square" lIns="128016" tIns="54864">
+            <a:noAutofit/>
+          </a:bodyPr>
+          <a:lstStyle/>
+          <a:p>
+            <a:r>
+              <a:rPr sz="1600" b="1">
+                <a:solidFill>
+                  <a:srgbClr val="27500A"/>
+                </a:solidFill>
+                <a:latin typeface="Calibri"/>
+              </a:rPr>
+              <a:t>B.  </a:t>
+            </a:r>
+            <a:r>
+              <a:rPr sz="1600" b="1">
+                <a:solidFill>
+                  <a:srgbClr val="27500A"/>
+                </a:solidFill>
+                <a:latin typeface="Calibri"/>
+              </a:rPr>
+              <a:t>由 finalized metadata.version 決定   ✓</a:t>
+            </a:r>
+          </a:p>
+        </p:txBody>
+      </p:sp>
       <p:sp>
         <p:nvSpPr>
           <p:cNvPr id="6" name="TextBox 5"/>
@@ -3461,7 +3466,7 @@
         </p:nvSpPr>
         <p:spPr>
           <a:xfrm>
-            <a:off x="1078992" y="3721608"/>
+            <a:off x="822960" y="3575304"/>
             <a:ext cx="10515600" cy="493776"/>
           </a:xfrm>
           <a:prstGeom prst="rect">
@@ -3476,13 +3481,22 @@
           <a:lstStyle/>
           <a:p>
             <a:r>
-              <a:rPr sz="1650" b="0">
+              <a:rPr sz="1600" b="0">
                 <a:solidFill>
                   <a:srgbClr val="1E2024"/>
                 </a:solidFill>
                 <a:latin typeface="Calibri"/>
               </a:rPr>
-              <a:t>多數情況 client 在送出前就本地中止，根本沒上網路</a:t>
+              <a:t>C.  </a:t>
+            </a:r>
+            <a:r>
+              <a:rPr sz="1600" b="0">
+                <a:solidFill>
+                  <a:srgbClr val="1E2024"/>
+                </a:solidFill>
+                <a:latin typeface="Calibri"/>
+              </a:rPr>
+              <a:t>永遠用最新版</a:t>
             </a:r>
           </a:p>
         </p:txBody>
@@ -3490,6 +3504,92 @@
       <p:sp>
         <p:nvSpPr>
           <p:cNvPr id="7" name="TextBox 6"/>
+          <p:cNvSpPr txBox="1"/>
+          <p:nvPr/>
+        </p:nvSpPr>
+        <p:spPr>
+          <a:xfrm>
+            <a:off x="822960" y="4197096"/>
+            <a:ext cx="10515600" cy="493776"/>
+          </a:xfrm>
+          <a:prstGeom prst="rect">
+            <a:avLst/>
+          </a:prstGeom>
+          <a:noFill/>
+        </p:spPr>
+        <p:txBody>
+          <a:bodyPr wrap="square">
+            <a:noAutofit/>
+          </a:bodyPr>
+          <a:lstStyle/>
+          <a:p>
+            <a:r>
+              <a:rPr sz="1600" b="0">
+                <a:solidFill>
+                  <a:srgbClr val="1E2024"/>
+                </a:solidFill>
+                <a:latin typeface="Calibri"/>
+              </a:rPr>
+              <a:t>D.  </a:t>
+            </a:r>
+            <a:r>
+              <a:rPr sz="1600" b="0">
+                <a:solidFill>
+                  <a:srgbClr val="1E2024"/>
+                </a:solidFill>
+                <a:latin typeface="Calibri"/>
+              </a:rPr>
+              <a:t>controller 每次指定</a:t>
+            </a:r>
+          </a:p>
+        </p:txBody>
+      </p:sp>
+      <p:sp>
+        <p:nvSpPr>
+          <p:cNvPr id="8" name="TextBox 7"/>
+          <p:cNvSpPr txBox="1"/>
+          <p:nvPr/>
+        </p:nvSpPr>
+        <p:spPr>
+          <a:xfrm>
+            <a:off x="640080" y="4910327"/>
+            <a:ext cx="10972800" cy="914400"/>
+          </a:xfrm>
+          <a:prstGeom prst="rect">
+            <a:avLst/>
+          </a:prstGeom>
+          <a:noFill/>
+        </p:spPr>
+        <p:txBody>
+          <a:bodyPr wrap="square">
+            <a:noAutofit/>
+          </a:bodyPr>
+          <a:lstStyle/>
+          <a:p>
+            <a:r>
+              <a:rPr sz="1400" b="1">
+                <a:solidFill>
+                  <a:srgbClr val="27500A"/>
+                </a:solidFill>
+                <a:latin typeface="Calibri"/>
+              </a:rPr>
+              <a:t>正解 B — </a:t>
+            </a:r>
+            <a:r>
+              <a:rPr sz="1400" b="0">
+                <a:solidFill>
+                  <a:srgbClr val="1E2024"/>
+                </a:solidFill>
+                <a:latin typeface="Calibri"/>
+              </a:rPr>
+              <a:t>fetchRequestVersion(MV)：MV 是集中共識，不做 per-connection 協商。</a:t>
+            </a:r>
+          </a:p>
+        </p:txBody>
+      </p:sp>
+      <p:sp>
+        <p:nvSpPr>
+          <p:cNvPr id="9" name="TextBox 8"/>
           <p:cNvSpPr txBox="1"/>
           <p:nvPr/>
         </p:nvSpPr>
@@ -3524,47 +3624,28 @@
                   <a:srgbClr val="185FA5"/>
                 </a:solidFill>
                 <a:latin typeface="Courier New"/>
+                <a:hlinkClick r:id="rId2"/>
+              </a:rPr>
+              <a:t>RemoteLeaderEndPoint.scala:215</a:t>
+            </a:r>
+            <a:r>
+              <a:rPr sz="1200" b="0">
+                <a:solidFill>
+                  <a:srgbClr val="8A8A8A"/>
+                </a:solidFill>
+                <a:latin typeface="Calibri"/>
+              </a:rPr>
+              <a:t>   ·   </a:t>
+            </a:r>
+            <a:r>
+              <a:rPr sz="1200" b="0" u="sng">
+                <a:solidFill>
+                  <a:srgbClr val="185FA5"/>
+                </a:solidFill>
+                <a:latin typeface="Courier New"/>
                 <a:hlinkClick r:id="rId3"/>
               </a:rPr>
-              <a:t>latestUsableVersion</a:t>
-            </a:r>
-            <a:r>
-              <a:rPr sz="1200" b="0">
-                <a:solidFill>
-                  <a:srgbClr val="8A8A8A"/>
-                </a:solidFill>
-                <a:latin typeface="Calibri"/>
-              </a:rPr>
-              <a:t>   ·   </a:t>
-            </a:r>
-            <a:r>
-              <a:rPr sz="1200" b="0" u="sng">
-                <a:solidFill>
-                  <a:srgbClr val="185FA5"/>
-                </a:solidFill>
-                <a:latin typeface="Courier New"/>
-                <a:hlinkClick r:id="rId4"/>
-              </a:rPr>
-              <a:t>NetworkClient</a:t>
-            </a:r>
-            <a:r>
-              <a:rPr sz="1200" b="0">
-                <a:solidFill>
-                  <a:srgbClr val="8A8A8A"/>
-                </a:solidFill>
-                <a:latin typeface="Calibri"/>
-              </a:rPr>
-              <a:t>   ·   </a:t>
-            </a:r>
-            <a:r>
-              <a:rPr sz="1200" b="0" u="sng">
-                <a:solidFill>
-                  <a:srgbClr val="185FA5"/>
-                </a:solidFill>
-                <a:latin typeface="Courier New"/>
-                <a:hlinkClick r:id="rId5"/>
-              </a:rPr>
-              <a:t>RequestContext</a:t>
+              <a:t>MetadataVersion.java:273</a:t>
             </a:r>
           </a:p>
         </p:txBody>
@@ -3650,7 +3731,7 @@
                 </a:solidFill>
                 <a:latin typeface="Calibri"/>
               </a:rPr>
-              <a:t>版本截斷：為什麼「升一點點」不夠</a:t>
+              <a:t>通訊當下協商不出版本，會看到什麼</a:t>
             </a:r>
           </a:p>
         </p:txBody>
@@ -3664,7 +3745,7 @@
         <p:spPr>
           <a:xfrm>
             <a:off x="640080" y="2148840"/>
-            <a:ext cx="10972800" cy="822959"/>
+            <a:ext cx="10972800" cy="1371600"/>
           </a:xfrm>
           <a:prstGeom prst="rect">
             <a:avLst/>
@@ -3691,7 +3772,7 @@
                 </a:solidFill>
                 <a:latin typeface="Calibri"/>
               </a:rPr>
-              <a:t>舊 wire API version 被整個移除，min 可 &gt; 0</a:t>
+              <a:t>交集空        → client 端 UnsupportedVersionException（送出前 abort）</a:t>
             </a:r>
           </a:p>
           <a:p>
@@ -3702,50 +3783,46 @@
                 </a:solidFill>
                 <a:latin typeface="Calibri"/>
               </a:rPr>
-              <a:t>  Fetch：4–18（v0–3 在 4.0 移除）</a:t>
-            </a:r>
-          </a:p>
-        </p:txBody>
-      </p:sp>
-      <p:sp>
-        <p:nvSpPr>
-          <p:cNvPr id="5" name="TextBox 4"/>
-          <p:cNvSpPr txBox="1"/>
-          <p:nvPr/>
-        </p:nvSpPr>
-        <p:spPr>
-          <a:xfrm>
-            <a:off x="640080" y="3172968"/>
-            <a:ext cx="10972800" cy="566928"/>
-          </a:xfrm>
-          <a:prstGeom prst="rect">
-            <a:avLst/>
-          </a:prstGeom>
-          <a:solidFill>
-            <a:srgbClr val="E9F3DE"/>
-          </a:solidFill>
-          <a:ln>
-            <a:noFill/>
-          </a:ln>
-        </p:spPr>
-        <p:txBody>
-          <a:bodyPr wrap="square" lIns="146304" tIns="82296">
-            <a:noAutofit/>
-          </a:bodyPr>
-          <a:lstStyle/>
-          <a:p>
-            <a:r>
-              <a:rPr sz="1500" b="0">
-                <a:solidFill>
-                  <a:srgbClr val="27500A"/>
-                </a:solidFill>
-                <a:latin typeface="Calibri"/>
-              </a:rPr>
-              <a:t>解法：升級前確認兩端都跨過版本下限（升 4.0 需至少 2.1），否則協商結果沒有可用版本</a:t>
-            </a:r>
-          </a:p>
-        </p:txBody>
-      </p:sp>
+              <a:t>繞過協商自刻  → broker 丟 UnsupportedVersionException + 關線</a:t>
+            </a:r>
+          </a:p>
+          <a:p>
+            <a:r>
+              <a:rPr sz="1350" b="0">
+                <a:solidFill>
+                  <a:srgbClr val="2C2C2A"/>
+                </a:solidFill>
+                <a:latin typeface="Calibri"/>
+              </a:rPr>
+              <a:t>（ApiVersions 例外：回 v0 + UNSUPPORTED_VERSION 錯誤碼）</a:t>
+            </a:r>
+          </a:p>
+        </p:txBody>
+      </p:sp>
+      <p:pic>
+        <p:nvPicPr>
+          <p:cNvPr id="5" name="Picture 4" descr="ban.png"/>
+          <p:cNvPicPr>
+            <a:picLocks noChangeAspect="1"/>
+          </p:cNvPicPr>
+          <p:nvPr/>
+        </p:nvPicPr>
+        <p:blipFill>
+          <a:blip r:embed="rId2"/>
+          <a:stretch>
+            <a:fillRect/>
+          </a:stretch>
+        </p:blipFill>
+        <p:spPr>
+          <a:xfrm>
+            <a:off x="658368" y="3749040"/>
+            <a:ext cx="274320" cy="274320"/>
+          </a:xfrm>
+          <a:prstGeom prst="rect">
+            <a:avLst/>
+          </a:prstGeom>
+        </p:spPr>
+      </p:pic>
       <p:sp>
         <p:nvSpPr>
           <p:cNvPr id="6" name="TextBox 5"/>
@@ -3754,8 +3831,8 @@
         </p:nvSpPr>
         <p:spPr>
           <a:xfrm>
-            <a:off x="640080" y="3922776"/>
-            <a:ext cx="10972800" cy="731520"/>
+            <a:off x="1078992" y="3721608"/>
+            <a:ext cx="10515600" cy="493776"/>
           </a:xfrm>
           <a:prstGeom prst="rect">
             <a:avLst/>
@@ -3769,13 +3846,13 @@
           <a:lstStyle/>
           <a:p>
             <a:r>
-              <a:rPr sz="1500" b="0">
-                <a:solidFill>
-                  <a:srgbClr val="5F5E5A"/>
-                </a:solidFill>
-                <a:latin typeface="Calibri"/>
-              </a:rPr>
-              <a:t>銜接（非本場）：finalize / 升降當下的錯誤（INVALID_UPDATE_VERSION 等）屬「運行時的版本升降」那場，本場不展開。</a:t>
+              <a:rPr sz="1650" b="0">
+                <a:solidFill>
+                  <a:srgbClr val="1E2024"/>
+                </a:solidFill>
+                <a:latin typeface="Calibri"/>
+              </a:rPr>
+              <a:t>多數情況 client 在送出前就本地中止，根本沒上網路</a:t>
             </a:r>
           </a:p>
         </p:txBody>
@@ -3817,9 +3894,9 @@
                   <a:srgbClr val="185FA5"/>
                 </a:solidFill>
                 <a:latin typeface="Courier New"/>
-                <a:hlinkClick r:id="rId2"/>
-              </a:rPr>
-              <a:t>upgrade.md:229</a:t>
+                <a:hlinkClick r:id="rId3"/>
+              </a:rPr>
+              <a:t>latestUsableVersion</a:t>
             </a:r>
             <a:r>
               <a:rPr sz="1200" b="0">
@@ -3836,9 +3913,28 @@
                   <a:srgbClr val="185FA5"/>
                 </a:solidFill>
                 <a:latin typeface="Courier New"/>
-                <a:hlinkClick r:id="rId3"/>
-              </a:rPr>
-              <a:t>FetchRequest.json validVersions</a:t>
+                <a:hlinkClick r:id="rId4"/>
+              </a:rPr>
+              <a:t>NetworkClient</a:t>
+            </a:r>
+            <a:r>
+              <a:rPr sz="1200" b="0">
+                <a:solidFill>
+                  <a:srgbClr val="8A8A8A"/>
+                </a:solidFill>
+                <a:latin typeface="Calibri"/>
+              </a:rPr>
+              <a:t>   ·   </a:t>
+            </a:r>
+            <a:r>
+              <a:rPr sz="1200" b="0" u="sng">
+                <a:solidFill>
+                  <a:srgbClr val="185FA5"/>
+                </a:solidFill>
+                <a:latin typeface="Courier New"/>
+                <a:hlinkClick r:id="rId5"/>
+              </a:rPr>
+              <a:t>RequestContext</a:t>
             </a:r>
           </a:p>
         </p:txBody>
@@ -3890,7 +3986,7 @@
                 </a:solidFill>
                 <a:latin typeface="Calibri"/>
               </a:rPr>
-              <a:t>隨堂考 · 核心</a:t>
+              <a:t>Part 2 · 失敗訊息</a:t>
             </a:r>
           </a:p>
         </p:txBody>
@@ -3904,7 +4000,7 @@
         <p:spPr>
           <a:xfrm>
             <a:off x="640080" y="841248"/>
-            <a:ext cx="10972800" cy="1188720"/>
+            <a:ext cx="10972800" cy="1005840"/>
           </a:xfrm>
           <a:prstGeom prst="rect">
             <a:avLst/>
@@ -3918,13 +4014,13 @@
           <a:lstStyle/>
           <a:p>
             <a:r>
-              <a:rPr sz="2600" b="1">
+              <a:rPr sz="3200" b="1">
                 <a:solidFill>
                   <a:srgbClr val="1E2024"/>
                 </a:solidFill>
                 <a:latin typeface="Calibri"/>
               </a:rPr>
-              <a:t>自刻 client 送了不支援的 API version，會怎樣？</a:t>
+              <a:t>版本截斷：為什麼「升一點點」不夠</a:t>
             </a:r>
           </a:p>
         </p:txBody>
@@ -3937,8 +4033,99 @@
         </p:nvSpPr>
         <p:spPr>
           <a:xfrm>
-            <a:off x="822960" y="2331720"/>
-            <a:ext cx="10515600" cy="493776"/>
+            <a:off x="640080" y="2148840"/>
+            <a:ext cx="10972800" cy="822959"/>
+          </a:xfrm>
+          <a:prstGeom prst="rect">
+            <a:avLst/>
+          </a:prstGeom>
+          <a:solidFill>
+            <a:srgbClr val="F3F1EC"/>
+          </a:solidFill>
+          <a:ln w="6350">
+            <a:solidFill>
+              <a:srgbClr val="E3E0D8"/>
+            </a:solidFill>
+          </a:ln>
+        </p:spPr>
+        <p:txBody>
+          <a:bodyPr wrap="square" lIns="146304" tIns="91440" bIns="91440">
+            <a:noAutofit/>
+          </a:bodyPr>
+          <a:lstStyle/>
+          <a:p>
+            <a:r>
+              <a:rPr sz="1350" b="0">
+                <a:solidFill>
+                  <a:srgbClr val="2C2C2A"/>
+                </a:solidFill>
+                <a:latin typeface="Calibri"/>
+              </a:rPr>
+              <a:t>舊 wire API version 被整個移除，min 可 &gt; 0</a:t>
+            </a:r>
+          </a:p>
+          <a:p>
+            <a:r>
+              <a:rPr sz="1350" b="0">
+                <a:solidFill>
+                  <a:srgbClr val="2C2C2A"/>
+                </a:solidFill>
+                <a:latin typeface="Calibri"/>
+              </a:rPr>
+              <a:t>  Fetch：4–18（v0–3 在 4.0 移除）</a:t>
+            </a:r>
+          </a:p>
+        </p:txBody>
+      </p:sp>
+      <p:sp>
+        <p:nvSpPr>
+          <p:cNvPr id="5" name="TextBox 4"/>
+          <p:cNvSpPr txBox="1"/>
+          <p:nvPr/>
+        </p:nvSpPr>
+        <p:spPr>
+          <a:xfrm>
+            <a:off x="640080" y="3172968"/>
+            <a:ext cx="10972800" cy="566928"/>
+          </a:xfrm>
+          <a:prstGeom prst="rect">
+            <a:avLst/>
+          </a:prstGeom>
+          <a:solidFill>
+            <a:srgbClr val="E9F3DE"/>
+          </a:solidFill>
+          <a:ln>
+            <a:noFill/>
+          </a:ln>
+        </p:spPr>
+        <p:txBody>
+          <a:bodyPr wrap="square" lIns="146304" tIns="82296">
+            <a:noAutofit/>
+          </a:bodyPr>
+          <a:lstStyle/>
+          <a:p>
+            <a:r>
+              <a:rPr sz="1500" b="0">
+                <a:solidFill>
+                  <a:srgbClr val="27500A"/>
+                </a:solidFill>
+                <a:latin typeface="Calibri"/>
+              </a:rPr>
+              <a:t>解法：升級前確認兩端都跨過版本下限（升 4.0 需至少 2.1），否則協商結果沒有可用版本</a:t>
+            </a:r>
+          </a:p>
+        </p:txBody>
+      </p:sp>
+      <p:sp>
+        <p:nvSpPr>
+          <p:cNvPr id="6" name="TextBox 5"/>
+          <p:cNvSpPr txBox="1"/>
+          <p:nvPr/>
+        </p:nvSpPr>
+        <p:spPr>
+          <a:xfrm>
+            <a:off x="640080" y="3922776"/>
+            <a:ext cx="10972800" cy="731520"/>
           </a:xfrm>
           <a:prstGeom prst="rect">
             <a:avLst/>
@@ -3952,36 +4139,27 @@
           <a:lstStyle/>
           <a:p>
             <a:r>
-              <a:rPr sz="1600" b="0">
-                <a:solidFill>
-                  <a:srgbClr val="1E2024"/>
-                </a:solidFill>
-                <a:latin typeface="Calibri"/>
-              </a:rPr>
-              <a:t>A.  </a:t>
-            </a:r>
-            <a:r>
-              <a:rPr sz="1600" b="0">
-                <a:solidFill>
-                  <a:srgbClr val="1E2024"/>
-                </a:solidFill>
-                <a:latin typeface="Calibri"/>
-              </a:rPr>
-              <a:t>一律回 UNSUPPORTED_VERSION</a:t>
-            </a:r>
-          </a:p>
-        </p:txBody>
-      </p:sp>
-      <p:sp>
-        <p:nvSpPr>
-          <p:cNvPr id="5" name="TextBox 4"/>
-          <p:cNvSpPr txBox="1"/>
-          <p:nvPr/>
-        </p:nvSpPr>
-        <p:spPr>
-          <a:xfrm>
-            <a:off x="822960" y="2953512"/>
-            <a:ext cx="10515600" cy="493776"/>
+              <a:rPr sz="1500" b="0">
+                <a:solidFill>
+                  <a:srgbClr val="5F5E5A"/>
+                </a:solidFill>
+                <a:latin typeface="Calibri"/>
+              </a:rPr>
+              <a:t>銜接（非本場）：finalize / 升降當下的錯誤（INVALID_UPDATE_VERSION 等）屬「運行時的版本升降」那場，本場不展開。</a:t>
+            </a:r>
+          </a:p>
+        </p:txBody>
+      </p:sp>
+      <p:sp>
+        <p:nvSpPr>
+          <p:cNvPr id="7" name="TextBox 6"/>
+          <p:cNvSpPr txBox="1"/>
+          <p:nvPr/>
+        </p:nvSpPr>
+        <p:spPr>
+          <a:xfrm>
+            <a:off x="640080" y="6400800"/>
+            <a:ext cx="10972800" cy="384048"/>
           </a:xfrm>
           <a:prstGeom prst="rect">
             <a:avLst/>
@@ -3995,142 +4173,42 @@
           <a:lstStyle/>
           <a:p>
             <a:r>
-              <a:rPr sz="1600" b="0">
-                <a:solidFill>
-                  <a:srgbClr val="1E2024"/>
-                </a:solidFill>
-                <a:latin typeface="Calibri"/>
-              </a:rPr>
-              <a:t>B.  </a:t>
-            </a:r>
-            <a:r>
-              <a:rPr sz="1600" b="0">
-                <a:solidFill>
-                  <a:srgbClr val="1E2024"/>
-                </a:solidFill>
-                <a:latin typeface="Calibri"/>
-              </a:rPr>
-              <a:t>只有 ApiVersions 例外回錯誤+範圍；其他 API 關線</a:t>
-            </a:r>
-          </a:p>
-        </p:txBody>
-      </p:sp>
-      <p:sp>
-        <p:nvSpPr>
-          <p:cNvPr id="6" name="TextBox 5"/>
-          <p:cNvSpPr txBox="1"/>
-          <p:nvPr/>
-        </p:nvSpPr>
-        <p:spPr>
-          <a:xfrm>
-            <a:off x="822960" y="3575304"/>
-            <a:ext cx="10515600" cy="493776"/>
-          </a:xfrm>
-          <a:prstGeom prst="rect">
-            <a:avLst/>
-          </a:prstGeom>
-          <a:noFill/>
-        </p:spPr>
-        <p:txBody>
-          <a:bodyPr wrap="square">
-            <a:noAutofit/>
-          </a:bodyPr>
-          <a:lstStyle/>
-          <a:p>
-            <a:r>
-              <a:rPr sz="1600" b="0">
-                <a:solidFill>
-                  <a:srgbClr val="1E2024"/>
-                </a:solidFill>
-                <a:latin typeface="Calibri"/>
-              </a:rPr>
-              <a:t>C.  </a:t>
-            </a:r>
-            <a:r>
-              <a:rPr sz="1600" b="0">
-                <a:solidFill>
-                  <a:srgbClr val="1E2024"/>
-                </a:solidFill>
-                <a:latin typeface="Calibri"/>
-              </a:rPr>
-              <a:t>broker 自動降版</a:t>
-            </a:r>
-          </a:p>
-        </p:txBody>
-      </p:sp>
-      <p:sp>
-        <p:nvSpPr>
-          <p:cNvPr id="7" name="TextBox 6"/>
-          <p:cNvSpPr txBox="1"/>
-          <p:nvPr/>
-        </p:nvSpPr>
-        <p:spPr>
-          <a:xfrm>
-            <a:off x="822960" y="4197096"/>
-            <a:ext cx="10515600" cy="493776"/>
-          </a:xfrm>
-          <a:prstGeom prst="rect">
-            <a:avLst/>
-          </a:prstGeom>
-          <a:noFill/>
-        </p:spPr>
-        <p:txBody>
-          <a:bodyPr wrap="square">
-            <a:noAutofit/>
-          </a:bodyPr>
-          <a:lstStyle/>
-          <a:p>
-            <a:r>
-              <a:rPr sz="1600" b="0">
-                <a:solidFill>
-                  <a:srgbClr val="1E2024"/>
-                </a:solidFill>
-                <a:latin typeface="Calibri"/>
-              </a:rPr>
-              <a:t>D.  </a:t>
-            </a:r>
-            <a:r>
-              <a:rPr sz="1600" b="0">
-                <a:solidFill>
-                  <a:srgbClr val="1E2024"/>
-                </a:solidFill>
-                <a:latin typeface="Calibri"/>
-              </a:rPr>
-              <a:t>忽略版本照跑</a:t>
-            </a:r>
-          </a:p>
-        </p:txBody>
-      </p:sp>
-      <p:sp>
-        <p:nvSpPr>
-          <p:cNvPr id="8" name="TextBox 7"/>
-          <p:cNvSpPr txBox="1"/>
-          <p:nvPr/>
-        </p:nvSpPr>
-        <p:spPr>
-          <a:xfrm>
-            <a:off x="640080" y="4910327"/>
-            <a:ext cx="10972800" cy="914400"/>
-          </a:xfrm>
-          <a:prstGeom prst="rect">
-            <a:avLst/>
-          </a:prstGeom>
-          <a:noFill/>
-        </p:spPr>
-        <p:txBody>
-          <a:bodyPr wrap="square">
-            <a:noAutofit/>
-          </a:bodyPr>
-          <a:lstStyle/>
-          <a:p>
-            <a:r>
-              <a:rPr sz="1400" b="0">
+              <a:rPr sz="1200" b="1">
                 <a:solidFill>
                   <a:srgbClr val="8A8A8A"/>
                 </a:solidFill>
                 <a:latin typeface="Calibri"/>
               </a:rPr>
-              <a:t>想一想 —— 下一頁公布答案</a:t>
+              <a:t>REF   </a:t>
+            </a:r>
+            <a:r>
+              <a:rPr sz="1200" b="0" u="sng">
+                <a:solidFill>
+                  <a:srgbClr val="185FA5"/>
+                </a:solidFill>
+                <a:latin typeface="Courier New"/>
+                <a:hlinkClick r:id="rId2"/>
+              </a:rPr>
+              <a:t>upgrade.md:229</a:t>
+            </a:r>
+            <a:r>
+              <a:rPr sz="1200" b="0">
+                <a:solidFill>
+                  <a:srgbClr val="8A8A8A"/>
+                </a:solidFill>
+                <a:latin typeface="Calibri"/>
+              </a:rPr>
+              <a:t>   ·   </a:t>
+            </a:r>
+            <a:r>
+              <a:rPr sz="1200" b="0" u="sng">
+                <a:solidFill>
+                  <a:srgbClr val="185FA5"/>
+                </a:solidFill>
+                <a:latin typeface="Courier New"/>
+                <a:hlinkClick r:id="rId3"/>
+              </a:rPr>
+              <a:t>FetchRequest.json validVersions</a:t>
             </a:r>
           </a:p>
         </p:txBody>
@@ -4182,7 +4260,7 @@
                 </a:solidFill>
                 <a:latin typeface="Calibri"/>
               </a:rPr>
-              <a:t>隨堂考 · 核心　（正解）</a:t>
+              <a:t>隨堂考 · 核心</a:t>
             </a:r>
           </a:p>
         </p:txBody>
@@ -4278,36 +4356,31 @@
           <a:prstGeom prst="rect">
             <a:avLst/>
           </a:prstGeom>
-          <a:solidFill>
-            <a:srgbClr val="E9F3DE"/>
-          </a:solidFill>
-          <a:ln>
-            <a:noFill/>
-          </a:ln>
-        </p:spPr>
-        <p:txBody>
-          <a:bodyPr wrap="square" lIns="128016" tIns="54864">
-            <a:noAutofit/>
-          </a:bodyPr>
-          <a:lstStyle/>
-          <a:p>
-            <a:r>
-              <a:rPr sz="1600" b="1">
-                <a:solidFill>
-                  <a:srgbClr val="27500A"/>
+          <a:noFill/>
+        </p:spPr>
+        <p:txBody>
+          <a:bodyPr wrap="square">
+            <a:noAutofit/>
+          </a:bodyPr>
+          <a:lstStyle/>
+          <a:p>
+            <a:r>
+              <a:rPr sz="1600" b="0">
+                <a:solidFill>
+                  <a:srgbClr val="1E2024"/>
                 </a:solidFill>
                 <a:latin typeface="Calibri"/>
               </a:rPr>
               <a:t>B.  </a:t>
             </a:r>
             <a:r>
-              <a:rPr sz="1600" b="1">
-                <a:solidFill>
-                  <a:srgbClr val="27500A"/>
-                </a:solidFill>
-                <a:latin typeface="Calibri"/>
-              </a:rPr>
-              <a:t>只有 ApiVersions 例外回錯誤+範圍；其他 API 關線   ✓</a:t>
+              <a:rPr sz="1600" b="0">
+                <a:solidFill>
+                  <a:srgbClr val="1E2024"/>
+                </a:solidFill>
+                <a:latin typeface="Calibri"/>
+              </a:rPr>
+              <a:t>只有 ApiVersions 例外回錯誤+範圍；其他 API 關線</a:t>
             </a:r>
           </a:p>
         </p:txBody>
@@ -4421,66 +4494,13 @@
           <a:lstStyle/>
           <a:p>
             <a:r>
-              <a:rPr sz="1400" b="1">
-                <a:solidFill>
-                  <a:srgbClr val="27500A"/>
-                </a:solidFill>
-                <a:latin typeface="Calibri"/>
-              </a:rPr>
-              <a:t>正解 B — </a:t>
-            </a:r>
-            <a:r>
               <a:rPr sz="1400" b="0">
                 <a:solidFill>
-                  <a:srgbClr val="1E2024"/>
-                </a:solidFill>
-                <a:latin typeface="Calibri"/>
-              </a:rPr>
-              <a:t>ApiVersions 是 bootstrap 逃生口；其他 API → broker 丟 UnsupportedVersionException → 斷線。</a:t>
-            </a:r>
-          </a:p>
-        </p:txBody>
-      </p:sp>
-      <p:sp>
-        <p:nvSpPr>
-          <p:cNvPr id="9" name="TextBox 8"/>
-          <p:cNvSpPr txBox="1"/>
-          <p:nvPr/>
-        </p:nvSpPr>
-        <p:spPr>
-          <a:xfrm>
-            <a:off x="640080" y="6400800"/>
-            <a:ext cx="10972800" cy="384048"/>
-          </a:xfrm>
-          <a:prstGeom prst="rect">
-            <a:avLst/>
-          </a:prstGeom>
-          <a:noFill/>
-        </p:spPr>
-        <p:txBody>
-          <a:bodyPr wrap="square">
-            <a:noAutofit/>
-          </a:bodyPr>
-          <a:lstStyle/>
-          <a:p>
-            <a:r>
-              <a:rPr sz="1200" b="1">
-                <a:solidFill>
                   <a:srgbClr val="8A8A8A"/>
                 </a:solidFill>
                 <a:latin typeface="Calibri"/>
               </a:rPr>
-              <a:t>REF   </a:t>
-            </a:r>
-            <a:r>
-              <a:rPr sz="1200" b="0" u="sng">
-                <a:solidFill>
-                  <a:srgbClr val="185FA5"/>
-                </a:solidFill>
-                <a:latin typeface="Courier New"/>
-                <a:hlinkClick r:id="rId2"/>
-              </a:rPr>
-              <a:t>RequestContext.java:112</a:t>
+              <a:t>想一想 —— 下一頁公布答案</a:t>
             </a:r>
           </a:p>
         </p:txBody>
@@ -4532,6 +4552,375 @@
                 </a:solidFill>
                 <a:latin typeface="Calibri"/>
               </a:rPr>
+              <a:t>隨堂考 · 核心　（正解）</a:t>
+            </a:r>
+          </a:p>
+        </p:txBody>
+      </p:sp>
+      <p:sp>
+        <p:nvSpPr>
+          <p:cNvPr id="3" name="TextBox 2"/>
+          <p:cNvSpPr txBox="1"/>
+          <p:nvPr/>
+        </p:nvSpPr>
+        <p:spPr>
+          <a:xfrm>
+            <a:off x="640080" y="841248"/>
+            <a:ext cx="10972800" cy="1188720"/>
+          </a:xfrm>
+          <a:prstGeom prst="rect">
+            <a:avLst/>
+          </a:prstGeom>
+          <a:noFill/>
+        </p:spPr>
+        <p:txBody>
+          <a:bodyPr wrap="square">
+            <a:noAutofit/>
+          </a:bodyPr>
+          <a:lstStyle/>
+          <a:p>
+            <a:r>
+              <a:rPr sz="2600" b="1">
+                <a:solidFill>
+                  <a:srgbClr val="1E2024"/>
+                </a:solidFill>
+                <a:latin typeface="Calibri"/>
+              </a:rPr>
+              <a:t>自刻 client 送了不支援的 API version，會怎樣？</a:t>
+            </a:r>
+          </a:p>
+        </p:txBody>
+      </p:sp>
+      <p:sp>
+        <p:nvSpPr>
+          <p:cNvPr id="4" name="TextBox 3"/>
+          <p:cNvSpPr txBox="1"/>
+          <p:nvPr/>
+        </p:nvSpPr>
+        <p:spPr>
+          <a:xfrm>
+            <a:off x="822960" y="2331720"/>
+            <a:ext cx="10515600" cy="493776"/>
+          </a:xfrm>
+          <a:prstGeom prst="rect">
+            <a:avLst/>
+          </a:prstGeom>
+          <a:noFill/>
+        </p:spPr>
+        <p:txBody>
+          <a:bodyPr wrap="square">
+            <a:noAutofit/>
+          </a:bodyPr>
+          <a:lstStyle/>
+          <a:p>
+            <a:r>
+              <a:rPr sz="1600" b="0">
+                <a:solidFill>
+                  <a:srgbClr val="1E2024"/>
+                </a:solidFill>
+                <a:latin typeface="Calibri"/>
+              </a:rPr>
+              <a:t>A.  </a:t>
+            </a:r>
+            <a:r>
+              <a:rPr sz="1600" b="0">
+                <a:solidFill>
+                  <a:srgbClr val="1E2024"/>
+                </a:solidFill>
+                <a:latin typeface="Calibri"/>
+              </a:rPr>
+              <a:t>一律回 UNSUPPORTED_VERSION</a:t>
+            </a:r>
+          </a:p>
+        </p:txBody>
+      </p:sp>
+      <p:sp>
+        <p:nvSpPr>
+          <p:cNvPr id="5" name="TextBox 4"/>
+          <p:cNvSpPr txBox="1"/>
+          <p:nvPr/>
+        </p:nvSpPr>
+        <p:spPr>
+          <a:xfrm>
+            <a:off x="822960" y="2953512"/>
+            <a:ext cx="10515600" cy="493776"/>
+          </a:xfrm>
+          <a:prstGeom prst="rect">
+            <a:avLst/>
+          </a:prstGeom>
+          <a:solidFill>
+            <a:srgbClr val="E9F3DE"/>
+          </a:solidFill>
+          <a:ln>
+            <a:noFill/>
+          </a:ln>
+        </p:spPr>
+        <p:txBody>
+          <a:bodyPr wrap="square" lIns="128016" tIns="54864">
+            <a:noAutofit/>
+          </a:bodyPr>
+          <a:lstStyle/>
+          <a:p>
+            <a:r>
+              <a:rPr sz="1600" b="1">
+                <a:solidFill>
+                  <a:srgbClr val="27500A"/>
+                </a:solidFill>
+                <a:latin typeface="Calibri"/>
+              </a:rPr>
+              <a:t>B.  </a:t>
+            </a:r>
+            <a:r>
+              <a:rPr sz="1600" b="1">
+                <a:solidFill>
+                  <a:srgbClr val="27500A"/>
+                </a:solidFill>
+                <a:latin typeface="Calibri"/>
+              </a:rPr>
+              <a:t>只有 ApiVersions 例外回錯誤+範圍；其他 API 關線   ✓</a:t>
+            </a:r>
+          </a:p>
+        </p:txBody>
+      </p:sp>
+      <p:sp>
+        <p:nvSpPr>
+          <p:cNvPr id="6" name="TextBox 5"/>
+          <p:cNvSpPr txBox="1"/>
+          <p:nvPr/>
+        </p:nvSpPr>
+        <p:spPr>
+          <a:xfrm>
+            <a:off x="822960" y="3575304"/>
+            <a:ext cx="10515600" cy="493776"/>
+          </a:xfrm>
+          <a:prstGeom prst="rect">
+            <a:avLst/>
+          </a:prstGeom>
+          <a:noFill/>
+        </p:spPr>
+        <p:txBody>
+          <a:bodyPr wrap="square">
+            <a:noAutofit/>
+          </a:bodyPr>
+          <a:lstStyle/>
+          <a:p>
+            <a:r>
+              <a:rPr sz="1600" b="0">
+                <a:solidFill>
+                  <a:srgbClr val="1E2024"/>
+                </a:solidFill>
+                <a:latin typeface="Calibri"/>
+              </a:rPr>
+              <a:t>C.  </a:t>
+            </a:r>
+            <a:r>
+              <a:rPr sz="1600" b="0">
+                <a:solidFill>
+                  <a:srgbClr val="1E2024"/>
+                </a:solidFill>
+                <a:latin typeface="Calibri"/>
+              </a:rPr>
+              <a:t>broker 自動降版</a:t>
+            </a:r>
+          </a:p>
+        </p:txBody>
+      </p:sp>
+      <p:sp>
+        <p:nvSpPr>
+          <p:cNvPr id="7" name="TextBox 6"/>
+          <p:cNvSpPr txBox="1"/>
+          <p:nvPr/>
+        </p:nvSpPr>
+        <p:spPr>
+          <a:xfrm>
+            <a:off x="822960" y="4197096"/>
+            <a:ext cx="10515600" cy="493776"/>
+          </a:xfrm>
+          <a:prstGeom prst="rect">
+            <a:avLst/>
+          </a:prstGeom>
+          <a:noFill/>
+        </p:spPr>
+        <p:txBody>
+          <a:bodyPr wrap="square">
+            <a:noAutofit/>
+          </a:bodyPr>
+          <a:lstStyle/>
+          <a:p>
+            <a:r>
+              <a:rPr sz="1600" b="0">
+                <a:solidFill>
+                  <a:srgbClr val="1E2024"/>
+                </a:solidFill>
+                <a:latin typeface="Calibri"/>
+              </a:rPr>
+              <a:t>D.  </a:t>
+            </a:r>
+            <a:r>
+              <a:rPr sz="1600" b="0">
+                <a:solidFill>
+                  <a:srgbClr val="1E2024"/>
+                </a:solidFill>
+                <a:latin typeface="Calibri"/>
+              </a:rPr>
+              <a:t>忽略版本照跑</a:t>
+            </a:r>
+          </a:p>
+        </p:txBody>
+      </p:sp>
+      <p:sp>
+        <p:nvSpPr>
+          <p:cNvPr id="8" name="TextBox 7"/>
+          <p:cNvSpPr txBox="1"/>
+          <p:nvPr/>
+        </p:nvSpPr>
+        <p:spPr>
+          <a:xfrm>
+            <a:off x="640080" y="4910327"/>
+            <a:ext cx="10972800" cy="914400"/>
+          </a:xfrm>
+          <a:prstGeom prst="rect">
+            <a:avLst/>
+          </a:prstGeom>
+          <a:noFill/>
+        </p:spPr>
+        <p:txBody>
+          <a:bodyPr wrap="square">
+            <a:noAutofit/>
+          </a:bodyPr>
+          <a:lstStyle/>
+          <a:p>
+            <a:r>
+              <a:rPr sz="1400" b="1">
+                <a:solidFill>
+                  <a:srgbClr val="27500A"/>
+                </a:solidFill>
+                <a:latin typeface="Calibri"/>
+              </a:rPr>
+              <a:t>正解 B — </a:t>
+            </a:r>
+            <a:r>
+              <a:rPr sz="1400" b="0">
+                <a:solidFill>
+                  <a:srgbClr val="1E2024"/>
+                </a:solidFill>
+                <a:latin typeface="Calibri"/>
+              </a:rPr>
+              <a:t>ApiVersions 是 bootstrap 逃生口；其他 API 在 RequestContext 解析失敗、broker 丟 UnsupportedVersionException，SocketServer 關閉連線。</a:t>
+            </a:r>
+          </a:p>
+        </p:txBody>
+      </p:sp>
+      <p:sp>
+        <p:nvSpPr>
+          <p:cNvPr id="9" name="TextBox 8"/>
+          <p:cNvSpPr txBox="1"/>
+          <p:nvPr/>
+        </p:nvSpPr>
+        <p:spPr>
+          <a:xfrm>
+            <a:off x="640080" y="6400800"/>
+            <a:ext cx="10972800" cy="384048"/>
+          </a:xfrm>
+          <a:prstGeom prst="rect">
+            <a:avLst/>
+          </a:prstGeom>
+          <a:noFill/>
+        </p:spPr>
+        <p:txBody>
+          <a:bodyPr wrap="square">
+            <a:noAutofit/>
+          </a:bodyPr>
+          <a:lstStyle/>
+          <a:p>
+            <a:r>
+              <a:rPr sz="1200" b="1">
+                <a:solidFill>
+                  <a:srgbClr val="8A8A8A"/>
+                </a:solidFill>
+                <a:latin typeface="Calibri"/>
+              </a:rPr>
+              <a:t>REF   </a:t>
+            </a:r>
+            <a:r>
+              <a:rPr sz="1200" b="0" u="sng">
+                <a:solidFill>
+                  <a:srgbClr val="185FA5"/>
+                </a:solidFill>
+                <a:latin typeface="Courier New"/>
+                <a:hlinkClick r:id="rId2"/>
+              </a:rPr>
+              <a:t>RequestContext.java:112</a:t>
+            </a:r>
+            <a:r>
+              <a:rPr sz="1200" b="0">
+                <a:solidFill>
+                  <a:srgbClr val="8A8A8A"/>
+                </a:solidFill>
+                <a:latin typeface="Calibri"/>
+              </a:rPr>
+              <a:t>   ·   </a:t>
+            </a:r>
+            <a:r>
+              <a:rPr sz="1200" b="0" u="sng">
+                <a:solidFill>
+                  <a:srgbClr val="185FA5"/>
+                </a:solidFill>
+                <a:latin typeface="Courier New"/>
+                <a:hlinkClick r:id="rId3"/>
+              </a:rPr>
+              <a:t>SocketServer.scala:781</a:t>
+            </a:r>
+          </a:p>
+        </p:txBody>
+      </p:sp>
+    </p:spTree>
+  </p:cSld>
+  <p:clrMapOvr>
+    <a:masterClrMapping/>
+  </p:clrMapOvr>
+</p:sld>
+</file>
+
+<file path=ppt/slides/slide15.xml><?xml version="1.0" encoding="utf-8"?>
+<p:sld xmlns:a="http://schemas.openxmlformats.org/drawingml/2006/main" xmlns:p="http://schemas.openxmlformats.org/presentationml/2006/main" xmlns:r="http://schemas.openxmlformats.org/officeDocument/2006/relationships">
+  <p:cSld>
+    <p:spTree>
+      <p:nvGrpSpPr>
+        <p:cNvPr id="1" name=""/>
+        <p:cNvGrpSpPr/>
+        <p:nvPr/>
+      </p:nvGrpSpPr>
+      <p:grpSpPr/>
+      <p:sp>
+        <p:nvSpPr>
+          <p:cNvPr id="2" name="TextBox 1"/>
+          <p:cNvSpPr txBox="1"/>
+          <p:nvPr/>
+        </p:nvSpPr>
+        <p:spPr>
+          <a:xfrm>
+            <a:off x="640080" y="457200"/>
+            <a:ext cx="10972800" cy="365760"/>
+          </a:xfrm>
+          <a:prstGeom prst="rect">
+            <a:avLst/>
+          </a:prstGeom>
+          <a:noFill/>
+        </p:spPr>
+        <p:txBody>
+          <a:bodyPr wrap="square">
+            <a:noAutofit/>
+          </a:bodyPr>
+          <a:lstStyle/>
+          <a:p>
+            <a:r>
+              <a:rPr sz="1300" b="1">
+                <a:solidFill>
+                  <a:srgbClr val="185FA5"/>
+                </a:solidFill>
+                <a:latin typeface="Calibri"/>
+              </a:rPr>
               <a:t>Recap</a:t>
             </a:r>
           </a:p>
@@ -4571,9 +4960,61 @@
           </a:p>
         </p:txBody>
       </p:sp>
+      <p:sp>
+        <p:nvSpPr>
+          <p:cNvPr id="4" name="TextBox 3"/>
+          <p:cNvSpPr txBox="1"/>
+          <p:nvPr/>
+        </p:nvSpPr>
+        <p:spPr>
+          <a:xfrm>
+            <a:off x="640080" y="2148840"/>
+            <a:ext cx="10972800" cy="1097280"/>
+          </a:xfrm>
+          <a:prstGeom prst="rect">
+            <a:avLst/>
+          </a:prstGeom>
+          <a:solidFill>
+            <a:srgbClr val="F3F1EC"/>
+          </a:solidFill>
+          <a:ln w="6350">
+            <a:solidFill>
+              <a:srgbClr val="E3E0D8"/>
+            </a:solidFill>
+          </a:ln>
+        </p:spPr>
+        <p:txBody>
+          <a:bodyPr wrap="square" lIns="146304" tIns="91440" bIns="91440">
+            <a:noAutofit/>
+          </a:bodyPr>
+          <a:lstStyle/>
+          <a:p>
+            <a:r>
+              <a:rPr sz="1350" b="0">
+                <a:solidFill>
+                  <a:srgbClr val="2C2C2A"/>
+                </a:solidFill>
+                <a:latin typeface="Calibri"/>
+              </a:rPr>
+              <a:t>想像中：client v4.1 ─── broker v4.1</a:t>
+            </a:r>
+          </a:p>
+          <a:p>
+            <a:r>
+              <a:rPr sz="1350" b="0">
+                <a:solidFill>
+                  <a:srgbClr val="2C2C2A"/>
+                </a:solidFill>
+                <a:latin typeface="Calibri"/>
+              </a:rPr>
+              <a:t>實際上：同一顆 4.1 broker，同時講 Fetch v11（對老 consumer）和 v17（對 replica）</a:t>
+            </a:r>
+          </a:p>
+        </p:txBody>
+      </p:sp>
       <p:pic>
         <p:nvPicPr>
-          <p:cNvPr id="4" name="Picture 3" descr="point.png"/>
+          <p:cNvPr id="5" name="Picture 4" descr="point.png"/>
           <p:cNvPicPr>
             <a:picLocks noChangeAspect="1"/>
           </p:cNvPicPr>
@@ -4587,7 +5028,7 @@
         </p:blipFill>
         <p:spPr>
           <a:xfrm>
-            <a:off x="658368" y="2176272"/>
+            <a:off x="658368" y="3474720"/>
             <a:ext cx="274320" cy="274320"/>
           </a:xfrm>
           <a:prstGeom prst="rect">
@@ -4597,13 +5038,13 @@
       </p:pic>
       <p:sp>
         <p:nvSpPr>
-          <p:cNvPr id="5" name="TextBox 4"/>
-          <p:cNvSpPr txBox="1"/>
-          <p:nvPr/>
-        </p:nvSpPr>
-        <p:spPr>
-          <a:xfrm>
-            <a:off x="1078992" y="2148840"/>
+          <p:cNvPr id="6" name="TextBox 5"/>
+          <p:cNvSpPr txBox="1"/>
+          <p:nvPr/>
+        </p:nvSpPr>
+        <p:spPr>
+          <a:xfrm>
+            <a:off x="1078992" y="3447288"/>
             <a:ext cx="10515600" cy="841248"/>
           </a:xfrm>
           <a:prstGeom prst="rect">
@@ -4624,14 +5065,14 @@
                 </a:solidFill>
                 <a:latin typeface="Calibri"/>
               </a:rPr>
-              <a:t>三種通訊：client↔broker、broker↔controller、broker↔broker——版本機制都掛在這三條線</a:t>
+              <a:t>Part 1：不能「一個版本打天下」（client 長壽、broker 滾動升級）；三條線多數靠協商，只有複製面由 finalized MV 決定</a:t>
             </a:r>
           </a:p>
         </p:txBody>
       </p:sp>
       <p:pic>
         <p:nvPicPr>
-          <p:cNvPr id="6" name="Picture 5" descr="point.png"/>
+          <p:cNvPr id="7" name="Picture 6" descr="point.png"/>
           <p:cNvPicPr>
             <a:picLocks noChangeAspect="1"/>
           </p:cNvPicPr>
@@ -4645,7 +5086,7 @@
         </p:blipFill>
         <p:spPr>
           <a:xfrm>
-            <a:off x="658368" y="3163824"/>
+            <a:off x="658368" y="4462272"/>
             <a:ext cx="274320" cy="274320"/>
           </a:xfrm>
           <a:prstGeom prst="rect">
@@ -4655,71 +5096,13 @@
       </p:pic>
       <p:sp>
         <p:nvSpPr>
-          <p:cNvPr id="7" name="TextBox 6"/>
-          <p:cNvSpPr txBox="1"/>
-          <p:nvPr/>
-        </p:nvSpPr>
-        <p:spPr>
-          <a:xfrm>
-            <a:off x="1078992" y="3136392"/>
-            <a:ext cx="10515600" cy="841248"/>
-          </a:xfrm>
-          <a:prstGeom prst="rect">
-            <a:avLst/>
-          </a:prstGeom>
-          <a:noFill/>
-        </p:spPr>
-        <p:txBody>
-          <a:bodyPr wrap="square">
-            <a:noAutofit/>
-          </a:bodyPr>
-          <a:lstStyle/>
-          <a:p>
-            <a:r>
-              <a:rPr sz="1650" b="0">
-                <a:solidFill>
-                  <a:srgbClr val="1E2024"/>
-                </a:solidFill>
-                <a:latin typeface="Calibri"/>
-              </a:rPr>
-              <a:t>Part 1：不能「一個版本打天下」（client 長壽、broker 滾動升級）；多數路徑靠協商，只有複製面由 finalized MV 決定</a:t>
-            </a:r>
-          </a:p>
-        </p:txBody>
-      </p:sp>
-      <p:pic>
-        <p:nvPicPr>
-          <p:cNvPr id="8" name="Picture 7" descr="point.png"/>
-          <p:cNvPicPr>
-            <a:picLocks noChangeAspect="1"/>
-          </p:cNvPicPr>
-          <p:nvPr/>
-        </p:nvPicPr>
-        <p:blipFill>
-          <a:blip r:embed="rId2"/>
-          <a:stretch>
-            <a:fillRect/>
-          </a:stretch>
-        </p:blipFill>
-        <p:spPr>
-          <a:xfrm>
-            <a:off x="658368" y="4151376"/>
-            <a:ext cx="274320" cy="274320"/>
-          </a:xfrm>
-          <a:prstGeom prst="rect">
-            <a:avLst/>
-          </a:prstGeom>
-        </p:spPr>
-      </p:pic>
-      <p:sp>
-        <p:nvSpPr>
-          <p:cNvPr id="9" name="TextBox 8"/>
-          <p:cNvSpPr txBox="1"/>
-          <p:nvPr/>
-        </p:nvSpPr>
-        <p:spPr>
-          <a:xfrm>
-            <a:off x="1078992" y="4123944"/>
+          <p:cNvPr id="8" name="TextBox 7"/>
+          <p:cNvSpPr txBox="1"/>
+          <p:nvPr/>
+        </p:nvSpPr>
+        <p:spPr>
+          <a:xfrm>
+            <a:off x="1078992" y="4434840"/>
             <a:ext cx="10515600" cy="841248"/>
           </a:xfrm>
           <a:prstGeom prst="rect">
@@ -5632,25 +6015,6 @@
               </a:rPr>
               <a:t>protocol.md:94</a:t>
             </a:r>
-            <a:r>
-              <a:rPr sz="1200" b="0">
-                <a:solidFill>
-                  <a:srgbClr val="8A8A8A"/>
-                </a:solidFill>
-                <a:latin typeface="Calibri"/>
-              </a:rPr>
-              <a:t>   ·   </a:t>
-            </a:r>
-            <a:r>
-              <a:rPr sz="1200" b="0" u="sng">
-                <a:solidFill>
-                  <a:srgbClr val="185FA5"/>
-                </a:solidFill>
-                <a:latin typeface="Calibri"/>
-                <a:hlinkClick r:id="rId6"/>
-              </a:rPr>
-              <a:t>KIP-35</a:t>
-            </a:r>
           </a:p>
         </p:txBody>
       </p:sp>
@@ -5787,7 +6151,7 @@
                 </a:solidFill>
                 <a:latin typeface="Calibri"/>
               </a:rPr>
-              <a:t>metadata.version  = 叢集一致的能力世代   (cluster-wide, finalize)</a:t>
+              <a:t>metadata.version  = 叢集一致的能力世代   (cluster-wide, finalized)</a:t>
             </a:r>
           </a:p>
           <a:p>
@@ -5870,7 +6234,7 @@
         <p:spPr>
           <a:xfrm>
             <a:off x="640080" y="4087368"/>
-            <a:ext cx="10972800" cy="438912"/>
+            <a:ext cx="10972800" cy="731520"/>
           </a:xfrm>
           <a:prstGeom prst="rect">
             <a:avLst/>
@@ -5890,7 +6254,7 @@
                 </a:solidFill>
                 <a:latin typeface="Calibri"/>
               </a:rPr>
-              <a:t>本場主角是 wire 版本（連線當下選哪版）；MV 是叢集治理、release 是 binary。</a:t>
+              <a:t>finalize＝管理員手動宣告「全叢集從此認定這個能力世代」；怎麼宣告是第一場《版本定義》的主題，本場只需知道它是叢集共識的一個值。本場主角是 wire 版本。</a:t>
             </a:r>
           </a:p>
         </p:txBody>
@@ -6004,7 +6368,7 @@
                 </a:solidFill>
                 <a:latin typeface="Calibri"/>
               </a:rPr>
-              <a:t>Part 1 · 架構</a:t>
+              <a:t>Part 1 · 架構 (a)</a:t>
             </a:r>
           </a:p>
         </p:txBody>
@@ -6038,7 +6402,7 @@
                 </a:solidFill>
                 <a:latin typeface="Calibri"/>
               </a:rPr>
-              <a:t>三種連線，各自怎麼選版</a:t>
+              <a:t>三種連線，都先做 ApiVersions 握手</a:t>
             </a:r>
           </a:p>
         </p:txBody>
@@ -6096,7 +6460,7 @@
                 </a:solidFill>
                 <a:latin typeface="Calibri"/>
               </a:rPr>
-              <a:t>協商發生在三條線上，底層都先做 ApiVersions 握手（共用同一顆 NetworkClient）</a:t>
+              <a:t>連線建立後，發起端先送一支 ApiVersions：問對方「你每支 API 支援哪個版本區間？」（KIP-35）</a:t>
             </a:r>
           </a:p>
         </p:txBody>
@@ -6110,7 +6474,7 @@
         <p:spPr>
           <a:xfrm>
             <a:off x="640080" y="3136392"/>
-            <a:ext cx="10972800" cy="1371600"/>
+            <a:ext cx="10972800" cy="1097280"/>
           </a:xfrm>
           <a:prstGeom prst="rect">
             <a:avLst/>
@@ -6137,7 +6501,7 @@
                 </a:solidFill>
                 <a:latin typeface="Calibri"/>
               </a:rPr>
-              <a:t>client ↔ broker       協商，取交集最高</a:t>
+              <a:t>client ─▶ broker        讀寫資料、查 metadata…</a:t>
             </a:r>
           </a:p>
           <a:p>
@@ -6148,7 +6512,7 @@
                 </a:solidFill>
                 <a:latin typeface="Calibri"/>
               </a:rPr>
-              <a:t>broker ↔ controller   也協商（broker 當 client：註冊 / 心跳 / 轉發 admin）</a:t>
+              <a:t>broker ─▶ controller    註冊、心跳、轉發 admin…</a:t>
             </a:r>
           </a:p>
           <a:p>
@@ -6159,7 +6523,7 @@
                 </a:solidFill>
                 <a:latin typeface="Calibri"/>
               </a:rPr>
-              <a:t>broker ↔ broker 複製   Fetch 由 MV 決定、ListOffsets 以 MV 為上限</a:t>
+              <a:t>broker ◀▶ broker        複製（follower 抓 leader）</a:t>
             </a:r>
           </a:p>
         </p:txBody>
@@ -6172,21 +6536,16 @@
         </p:nvSpPr>
         <p:spPr>
           <a:xfrm>
-            <a:off x="640080" y="4709160"/>
-            <a:ext cx="10972800" cy="877824"/>
-          </a:xfrm>
-          <a:prstGeom prst="rect">
-            <a:avLst/>
-          </a:prstGeom>
-          <a:solidFill>
-            <a:srgbClr val="E9F3DE"/>
-          </a:solidFill>
-          <a:ln>
-            <a:noFill/>
-          </a:ln>
-        </p:spPr>
-        <p:txBody>
-          <a:bodyPr wrap="square" lIns="146304" tIns="82296">
+            <a:off x="640080" y="4434840"/>
+            <a:ext cx="10972800" cy="438912"/>
+          </a:xfrm>
+          <a:prstGeom prst="rect">
+            <a:avLst/>
+          </a:prstGeom>
+          <a:noFill/>
+        </p:spPr>
+        <p:txBody>
+          <a:bodyPr wrap="square">
             <a:noAutofit/>
           </a:bodyPr>
           <a:lstStyle/>
@@ -6194,11 +6553,11 @@
             <a:r>
               <a:rPr sz="1500" b="0">
                 <a:solidFill>
-                  <a:srgbClr val="27500A"/>
-                </a:solidFill>
-                <a:latin typeface="Calibri"/>
-              </a:rPr>
-              <a:t>決定版本的是 request Builder 留多少空間；MV 只影響複製的 Fetch / ListOffsets，其餘都是協商</a:t>
+                  <a:srgbClr val="5F5E5A"/>
+                </a:solidFill>
+                <a:latin typeface="Calibri"/>
+              </a:rPr>
+              <a:t>每列只列代表性的幾種、非窮舉；重點是三條線都先做這個握手。</a:t>
             </a:r>
           </a:p>
         </p:txBody>
@@ -6239,10 +6598,10 @@
                 <a:solidFill>
                   <a:srgbClr val="185FA5"/>
                 </a:solidFill>
-                <a:latin typeface="Courier New"/>
+                <a:latin typeface="Calibri"/>
                 <a:hlinkClick r:id="rId3"/>
               </a:rPr>
-              <a:t>latestUsableVersion</a:t>
+              <a:t>KIP-35</a:t>
             </a:r>
             <a:r>
               <a:rPr sz="1200" b="0">
@@ -6261,26 +6620,7 @@
                 <a:latin typeface="Courier New"/>
                 <a:hlinkClick r:id="rId4"/>
               </a:rPr>
-              <a:t>fetchRequestVersion</a:t>
-            </a:r>
-            <a:r>
-              <a:rPr sz="1200" b="0">
-                <a:solidFill>
-                  <a:srgbClr val="8A8A8A"/>
-                </a:solidFill>
-                <a:latin typeface="Calibri"/>
-              </a:rPr>
-              <a:t>   ·   </a:t>
-            </a:r>
-            <a:r>
-              <a:rPr sz="1200" b="0" u="sng">
-                <a:solidFill>
-                  <a:srgbClr val="185FA5"/>
-                </a:solidFill>
-                <a:latin typeface="Courier New"/>
-                <a:hlinkClick r:id="rId5"/>
-              </a:rPr>
-              <a:t>javadoc</a:t>
+              <a:t>latestUsableVersion</a:t>
             </a:r>
           </a:p>
         </p:txBody>
@@ -6332,7 +6672,7 @@
                 </a:solidFill>
                 <a:latin typeface="Calibri"/>
               </a:rPr>
-              <a:t>Part 1 · 舉例</a:t>
+              <a:t>Part 1 · 架構 (b)</a:t>
             </a:r>
           </a:p>
         </p:txBody>
@@ -6345,8 +6685,8 @@
         </p:nvSpPr>
         <p:spPr>
           <a:xfrm>
-            <a:off x="640080" y="822960"/>
-            <a:ext cx="10972800" cy="640080"/>
+            <a:off x="640080" y="841248"/>
+            <a:ext cx="10972800" cy="1005840"/>
           </a:xfrm>
           <a:prstGeom prst="rect">
             <a:avLst/>
@@ -6360,13 +6700,13 @@
           <a:lstStyle/>
           <a:p>
             <a:r>
-              <a:rPr sz="2900" b="1">
+              <a:rPr sz="3200" b="1">
                 <a:solidFill>
                   <a:srgbClr val="1E2024"/>
                 </a:solidFill>
                 <a:latin typeface="Calibri"/>
               </a:rPr>
-              <a:t>以一支 Fetch 為例：consumer 協商、replica 由 MV</a:t>
+              <a:t>握手之後，最終版本誰說了算？</a:t>
             </a:r>
           </a:p>
         </p:txBody>
@@ -6379,35 +6719,64 @@
         </p:nvSpPr>
         <p:spPr>
           <a:xfrm>
-            <a:off x="640080" y="1481328"/>
-            <a:ext cx="10972800" cy="365760"/>
-          </a:xfrm>
-          <a:prstGeom prst="rect">
-            <a:avLst/>
-          </a:prstGeom>
-          <a:noFill/>
-        </p:spPr>
-        <p:txBody>
-          <a:bodyPr wrap="square">
-            <a:noAutofit/>
-          </a:bodyPr>
-          <a:lstStyle/>
-          <a:p>
-            <a:r>
-              <a:rPr sz="1400" b="0">
-                <a:solidFill>
-                  <a:srgbClr val="5F5E5A"/>
-                </a:solidFill>
-                <a:latin typeface="Calibri"/>
-              </a:rPr>
-              <a:t>同一支 Fetch 兩種身分：consumer fetch 走 client↔broker、replica fetch 走 broker↔broker</a:t>
+            <a:off x="640080" y="2148840"/>
+            <a:ext cx="10972800" cy="1097280"/>
+          </a:xfrm>
+          <a:prstGeom prst="rect">
+            <a:avLst/>
+          </a:prstGeom>
+          <a:solidFill>
+            <a:srgbClr val="F3F1EC"/>
+          </a:solidFill>
+          <a:ln w="6350">
+            <a:solidFill>
+              <a:srgbClr val="E3E0D8"/>
+            </a:solidFill>
+          </a:ln>
+        </p:spPr>
+        <p:txBody>
+          <a:bodyPr wrap="square" lIns="146304" tIns="91440" bIns="91440">
+            <a:noAutofit/>
+          </a:bodyPr>
+          <a:lstStyle/>
+          <a:p>
+            <a:r>
+              <a:rPr sz="1350" b="0">
+                <a:solidFill>
+                  <a:srgbClr val="2C2C2A"/>
+                </a:solidFill>
+                <a:latin typeface="Calibri"/>
+              </a:rPr>
+              <a:t>client ↔ broker       協商，取交集最高</a:t>
+            </a:r>
+          </a:p>
+          <a:p>
+            <a:r>
+              <a:rPr sz="1350" b="0">
+                <a:solidFill>
+                  <a:srgbClr val="2C2C2A"/>
+                </a:solidFill>
+                <a:latin typeface="Calibri"/>
+              </a:rPr>
+              <a:t>broker ↔ controller   也協商（broker 當 client）</a:t>
+            </a:r>
+          </a:p>
+          <a:p>
+            <a:r>
+              <a:rPr sz="1350" b="0">
+                <a:solidFill>
+                  <a:srgbClr val="2C2C2A"/>
+                </a:solidFill>
+                <a:latin typeface="Calibri"/>
+              </a:rPr>
+              <a:t>broker ↔ broker 複製   不協商——由 finalized MV 決定</a:t>
             </a:r>
           </a:p>
         </p:txBody>
       </p:sp>
       <p:pic>
         <p:nvPicPr>
-          <p:cNvPr id="5" name="Picture 4" descr="s2a-rangeline.png"/>
+          <p:cNvPr id="5" name="Picture 4" descr="point.png"/>
           <p:cNvPicPr>
             <a:picLocks noChangeAspect="1"/>
           </p:cNvPicPr>
@@ -6421,8 +6790,8 @@
         </p:blipFill>
         <p:spPr>
           <a:xfrm>
-            <a:off x="1664208" y="1965960"/>
-            <a:ext cx="8869680" cy="4093698"/>
+            <a:off x="658368" y="3474720"/>
+            <a:ext cx="274320" cy="274320"/>
           </a:xfrm>
           <a:prstGeom prst="rect">
             <a:avLst/>
@@ -6432,6 +6801,113 @@
       <p:sp>
         <p:nvSpPr>
           <p:cNvPr id="6" name="TextBox 5"/>
+          <p:cNvSpPr txBox="1"/>
+          <p:nvPr/>
+        </p:nvSpPr>
+        <p:spPr>
+          <a:xfrm>
+            <a:off x="1078992" y="3447288"/>
+            <a:ext cx="10515600" cy="841248"/>
+          </a:xfrm>
+          <a:prstGeom prst="rect">
+            <a:avLst/>
+          </a:prstGeom>
+          <a:noFill/>
+        </p:spPr>
+        <p:txBody>
+          <a:bodyPr wrap="square">
+            <a:noAutofit/>
+          </a:bodyPr>
+          <a:lstStyle/>
+          <a:p>
+            <a:r>
+              <a:rPr sz="1650" b="0">
+                <a:solidFill>
+                  <a:srgbClr val="1E2024"/>
+                </a:solidFill>
+                <a:latin typeface="Calibri"/>
+              </a:rPr>
+              <a:t>決定權在「組出這支 request 的程式碼」宣告的允許版本範圍：留全範圍就走協商、被指成 MV 對應的單一版本就不協商</a:t>
+            </a:r>
+          </a:p>
+        </p:txBody>
+      </p:sp>
+      <p:sp>
+        <p:nvSpPr>
+          <p:cNvPr id="7" name="TextBox 6"/>
+          <p:cNvSpPr txBox="1"/>
+          <p:nvPr/>
+        </p:nvSpPr>
+        <p:spPr>
+          <a:xfrm>
+            <a:off x="640080" y="4434840"/>
+            <a:ext cx="10972800" cy="877824"/>
+          </a:xfrm>
+          <a:prstGeom prst="rect">
+            <a:avLst/>
+          </a:prstGeom>
+          <a:solidFill>
+            <a:srgbClr val="E9F3DE"/>
+          </a:solidFill>
+          <a:ln>
+            <a:noFill/>
+          </a:ln>
+        </p:spPr>
+        <p:txBody>
+          <a:bodyPr wrap="square" lIns="146304" tIns="82296">
+            <a:noAutofit/>
+          </a:bodyPr>
+          <a:lstStyle/>
+          <a:p>
+            <a:r>
+              <a:rPr sz="1500" b="0">
+                <a:solidFill>
+                  <a:srgbClr val="27500A"/>
+                </a:solidFill>
+                <a:latin typeface="Calibri"/>
+              </a:rPr>
+              <a:t>為什麼複製面例外？複製要求所有 follower↔leader 講同一版，才交給 finalized MV 集中決定；其餘連線點對點，各自挑最好版即可</a:t>
+            </a:r>
+          </a:p>
+        </p:txBody>
+      </p:sp>
+      <p:sp>
+        <p:nvSpPr>
+          <p:cNvPr id="8" name="TextBox 7"/>
+          <p:cNvSpPr txBox="1"/>
+          <p:nvPr/>
+        </p:nvSpPr>
+        <p:spPr>
+          <a:xfrm>
+            <a:off x="640080" y="5495544"/>
+            <a:ext cx="10972800" cy="438912"/>
+          </a:xfrm>
+          <a:prstGeom prst="rect">
+            <a:avLst/>
+          </a:prstGeom>
+          <a:noFill/>
+        </p:spPr>
+        <p:txBody>
+          <a:bodyPr wrap="square">
+            <a:noAutofit/>
+          </a:bodyPr>
+          <a:lstStyle/>
+          <a:p>
+            <a:r>
+              <a:rPr sz="1500" b="0">
+                <a:solidFill>
+                  <a:srgbClr val="5F5E5A"/>
+                </a:solidFill>
+                <a:latin typeface="Calibri"/>
+              </a:rPr>
+              <a:t>更細的差異（ListOffsets 以 MV 為上限等）見 blog 附錄，此處不展開。</a:t>
+            </a:r>
+          </a:p>
+        </p:txBody>
+      </p:sp>
+      <p:sp>
+        <p:nvSpPr>
+          <p:cNvPr id="9" name="TextBox 8"/>
           <p:cNvSpPr txBox="1"/>
           <p:nvPr/>
         </p:nvSpPr>
@@ -6468,7 +6944,7 @@
                 <a:latin typeface="Courier New"/>
                 <a:hlinkClick r:id="rId3"/>
               </a:rPr>
-              <a:t>forConsumer/forReplica</a:t>
+              <a:t>fetchRequestVersion</a:t>
             </a:r>
             <a:r>
               <a:rPr sz="1200" b="0">
@@ -6487,7 +6963,7 @@
                 <a:latin typeface="Courier New"/>
                 <a:hlinkClick r:id="rId4"/>
               </a:rPr>
-              <a:t>fetchRequestVersion</a:t>
+              <a:t>javadoc</a:t>
             </a:r>
             <a:r>
               <a:rPr sz="1200" b="0">
@@ -6506,7 +6982,7 @@
                 <a:latin typeface="Courier New"/>
                 <a:hlinkClick r:id="rId5"/>
               </a:rPr>
-              <a:t>validVersions</a:t>
+              <a:t>RemoteLeaderEndPoint.scala:215</a:t>
             </a:r>
           </a:p>
         </p:txBody>
@@ -6558,7 +7034,7 @@
                 </a:solidFill>
                 <a:latin typeface="Calibri"/>
               </a:rPr>
-              <a:t>隨堂考 · 核心</a:t>
+              <a:t>Part 1 · 舉例</a:t>
             </a:r>
           </a:p>
         </p:txBody>
@@ -6571,8 +7047,8 @@
         </p:nvSpPr>
         <p:spPr>
           <a:xfrm>
-            <a:off x="640080" y="841248"/>
-            <a:ext cx="10972800" cy="1188720"/>
+            <a:off x="640080" y="822960"/>
+            <a:ext cx="10972800" cy="640080"/>
           </a:xfrm>
           <a:prstGeom prst="rect">
             <a:avLst/>
@@ -6586,13 +7062,13 @@
           <a:lstStyle/>
           <a:p>
             <a:r>
-              <a:rPr sz="2600" b="1">
+              <a:rPr sz="2900" b="1">
                 <a:solidFill>
                   <a:srgbClr val="1E2024"/>
                 </a:solidFill>
                 <a:latin typeface="Calibri"/>
               </a:rPr>
-              <a:t>replica fetch（broker↔broker）的 Fetch 版本怎麼決定？</a:t>
+              <a:t>以一支 Fetch 為例：consumer 協商、replica 由 MV</a:t>
             </a:r>
           </a:p>
         </p:txBody>
@@ -6605,8 +7081,8 @@
         </p:nvSpPr>
         <p:spPr>
           <a:xfrm>
-            <a:off x="822960" y="2331720"/>
-            <a:ext cx="10515600" cy="493776"/>
+            <a:off x="640080" y="1481328"/>
+            <a:ext cx="10972800" cy="365760"/>
           </a:xfrm>
           <a:prstGeom prst="rect">
             <a:avLst/>
@@ -6620,36 +7096,51 @@
           <a:lstStyle/>
           <a:p>
             <a:r>
-              <a:rPr sz="1600" b="0">
-                <a:solidFill>
-                  <a:srgbClr val="1E2024"/>
-                </a:solidFill>
-                <a:latin typeface="Calibri"/>
-              </a:rPr>
-              <a:t>A.  </a:t>
-            </a:r>
-            <a:r>
-              <a:rPr sz="1600" b="0">
-                <a:solidFill>
-                  <a:srgbClr val="1E2024"/>
-                </a:solidFill>
-                <a:latin typeface="Calibri"/>
-              </a:rPr>
-              <a:t>兩 broker ApiVersions 協商取交集</a:t>
-            </a:r>
-          </a:p>
-        </p:txBody>
-      </p:sp>
-      <p:sp>
-        <p:nvSpPr>
-          <p:cNvPr id="5" name="TextBox 4"/>
-          <p:cNvSpPr txBox="1"/>
-          <p:nvPr/>
-        </p:nvSpPr>
-        <p:spPr>
-          <a:xfrm>
-            <a:off x="822960" y="2953512"/>
-            <a:ext cx="10515600" cy="493776"/>
+              <a:rPr sz="1400" b="0">
+                <a:solidFill>
+                  <a:srgbClr val="5F5E5A"/>
+                </a:solidFill>
+                <a:latin typeface="Calibri"/>
+              </a:rPr>
+              <a:t>同一支 Fetch 兩種身分：consumer fetch 走 client↔broker、replica fetch 走 broker↔broker</a:t>
+            </a:r>
+          </a:p>
+        </p:txBody>
+      </p:sp>
+      <p:pic>
+        <p:nvPicPr>
+          <p:cNvPr id="5" name="Picture 4" descr="s2a-rangeline.png"/>
+          <p:cNvPicPr>
+            <a:picLocks noChangeAspect="1"/>
+          </p:cNvPicPr>
+          <p:nvPr/>
+        </p:nvPicPr>
+        <p:blipFill>
+          <a:blip r:embed="rId2"/>
+          <a:stretch>
+            <a:fillRect/>
+          </a:stretch>
+        </p:blipFill>
+        <p:spPr>
+          <a:xfrm>
+            <a:off x="1664208" y="1965960"/>
+            <a:ext cx="8869680" cy="4093698"/>
+          </a:xfrm>
+          <a:prstGeom prst="rect">
+            <a:avLst/>
+          </a:prstGeom>
+        </p:spPr>
+      </p:pic>
+      <p:sp>
+        <p:nvSpPr>
+          <p:cNvPr id="6" name="TextBox 5"/>
+          <p:cNvSpPr txBox="1"/>
+          <p:nvPr/>
+        </p:nvSpPr>
+        <p:spPr>
+          <a:xfrm>
+            <a:off x="640080" y="6400800"/>
+            <a:ext cx="10972800" cy="384048"/>
           </a:xfrm>
           <a:prstGeom prst="rect">
             <a:avLst/>
@@ -6663,142 +7154,61 @@
           <a:lstStyle/>
           <a:p>
             <a:r>
-              <a:rPr sz="1600" b="0">
-                <a:solidFill>
-                  <a:srgbClr val="1E2024"/>
-                </a:solidFill>
-                <a:latin typeface="Calibri"/>
-              </a:rPr>
-              <a:t>B.  </a:t>
-            </a:r>
-            <a:r>
-              <a:rPr sz="1600" b="0">
-                <a:solidFill>
-                  <a:srgbClr val="1E2024"/>
-                </a:solidFill>
-                <a:latin typeface="Calibri"/>
-              </a:rPr>
-              <a:t>由 finalized metadata.version 決定</a:t>
-            </a:r>
-          </a:p>
-        </p:txBody>
-      </p:sp>
-      <p:sp>
-        <p:nvSpPr>
-          <p:cNvPr id="6" name="TextBox 5"/>
-          <p:cNvSpPr txBox="1"/>
-          <p:nvPr/>
-        </p:nvSpPr>
-        <p:spPr>
-          <a:xfrm>
-            <a:off x="822960" y="3575304"/>
-            <a:ext cx="10515600" cy="493776"/>
-          </a:xfrm>
-          <a:prstGeom prst="rect">
-            <a:avLst/>
-          </a:prstGeom>
-          <a:noFill/>
-        </p:spPr>
-        <p:txBody>
-          <a:bodyPr wrap="square">
-            <a:noAutofit/>
-          </a:bodyPr>
-          <a:lstStyle/>
-          <a:p>
-            <a:r>
-              <a:rPr sz="1600" b="0">
-                <a:solidFill>
-                  <a:srgbClr val="1E2024"/>
-                </a:solidFill>
-                <a:latin typeface="Calibri"/>
-              </a:rPr>
-              <a:t>C.  </a:t>
-            </a:r>
-            <a:r>
-              <a:rPr sz="1600" b="0">
-                <a:solidFill>
-                  <a:srgbClr val="1E2024"/>
-                </a:solidFill>
-                <a:latin typeface="Calibri"/>
-              </a:rPr>
-              <a:t>永遠用最新版</a:t>
-            </a:r>
-          </a:p>
-        </p:txBody>
-      </p:sp>
-      <p:sp>
-        <p:nvSpPr>
-          <p:cNvPr id="7" name="TextBox 6"/>
-          <p:cNvSpPr txBox="1"/>
-          <p:nvPr/>
-        </p:nvSpPr>
-        <p:spPr>
-          <a:xfrm>
-            <a:off x="822960" y="4197096"/>
-            <a:ext cx="10515600" cy="493776"/>
-          </a:xfrm>
-          <a:prstGeom prst="rect">
-            <a:avLst/>
-          </a:prstGeom>
-          <a:noFill/>
-        </p:spPr>
-        <p:txBody>
-          <a:bodyPr wrap="square">
-            <a:noAutofit/>
-          </a:bodyPr>
-          <a:lstStyle/>
-          <a:p>
-            <a:r>
-              <a:rPr sz="1600" b="0">
-                <a:solidFill>
-                  <a:srgbClr val="1E2024"/>
-                </a:solidFill>
-                <a:latin typeface="Calibri"/>
-              </a:rPr>
-              <a:t>D.  </a:t>
-            </a:r>
-            <a:r>
-              <a:rPr sz="1600" b="0">
-                <a:solidFill>
-                  <a:srgbClr val="1E2024"/>
-                </a:solidFill>
-                <a:latin typeface="Calibri"/>
-              </a:rPr>
-              <a:t>controller 每次指定</a:t>
-            </a:r>
-          </a:p>
-        </p:txBody>
-      </p:sp>
-      <p:sp>
-        <p:nvSpPr>
-          <p:cNvPr id="8" name="TextBox 7"/>
-          <p:cNvSpPr txBox="1"/>
-          <p:nvPr/>
-        </p:nvSpPr>
-        <p:spPr>
-          <a:xfrm>
-            <a:off x="640080" y="4910327"/>
-            <a:ext cx="10972800" cy="914400"/>
-          </a:xfrm>
-          <a:prstGeom prst="rect">
-            <a:avLst/>
-          </a:prstGeom>
-          <a:noFill/>
-        </p:spPr>
-        <p:txBody>
-          <a:bodyPr wrap="square">
-            <a:noAutofit/>
-          </a:bodyPr>
-          <a:lstStyle/>
-          <a:p>
-            <a:r>
-              <a:rPr sz="1400" b="0">
+              <a:rPr sz="1200" b="1">
                 <a:solidFill>
                   <a:srgbClr val="8A8A8A"/>
                 </a:solidFill>
                 <a:latin typeface="Calibri"/>
               </a:rPr>
-              <a:t>想一想 —— 下一頁公布答案</a:t>
+              <a:t>REF   </a:t>
+            </a:r>
+            <a:r>
+              <a:rPr sz="1200" b="0" u="sng">
+                <a:solidFill>
+                  <a:srgbClr val="185FA5"/>
+                </a:solidFill>
+                <a:latin typeface="Courier New"/>
+                <a:hlinkClick r:id="rId3"/>
+              </a:rPr>
+              <a:t>forConsumer/forReplica</a:t>
+            </a:r>
+            <a:r>
+              <a:rPr sz="1200" b="0">
+                <a:solidFill>
+                  <a:srgbClr val="8A8A8A"/>
+                </a:solidFill>
+                <a:latin typeface="Calibri"/>
+              </a:rPr>
+              <a:t>   ·   </a:t>
+            </a:r>
+            <a:r>
+              <a:rPr sz="1200" b="0" u="sng">
+                <a:solidFill>
+                  <a:srgbClr val="185FA5"/>
+                </a:solidFill>
+                <a:latin typeface="Courier New"/>
+                <a:hlinkClick r:id="rId4"/>
+              </a:rPr>
+              <a:t>fetchRequestVersion</a:t>
+            </a:r>
+            <a:r>
+              <a:rPr sz="1200" b="0">
+                <a:solidFill>
+                  <a:srgbClr val="8A8A8A"/>
+                </a:solidFill>
+                <a:latin typeface="Calibri"/>
+              </a:rPr>
+              <a:t>   ·   </a:t>
+            </a:r>
+            <a:r>
+              <a:rPr sz="1200" b="0" u="sng">
+                <a:solidFill>
+                  <a:srgbClr val="185FA5"/>
+                </a:solidFill>
+                <a:latin typeface="Courier New"/>
+                <a:hlinkClick r:id="rId5"/>
+              </a:rPr>
+              <a:t>validVersions</a:t>
             </a:r>
           </a:p>
         </p:txBody>
@@ -6850,7 +7260,7 @@
                 </a:solidFill>
                 <a:latin typeface="Calibri"/>
               </a:rPr>
-              <a:t>隨堂考 · 核心　（正解）</a:t>
+              <a:t>隨堂考 · 核心</a:t>
             </a:r>
           </a:p>
         </p:txBody>
@@ -6946,36 +7356,31 @@
           <a:prstGeom prst="rect">
             <a:avLst/>
           </a:prstGeom>
-          <a:solidFill>
-            <a:srgbClr val="E9F3DE"/>
-          </a:solidFill>
-          <a:ln>
-            <a:noFill/>
-          </a:ln>
-        </p:spPr>
-        <p:txBody>
-          <a:bodyPr wrap="square" lIns="128016" tIns="54864">
-            <a:noAutofit/>
-          </a:bodyPr>
-          <a:lstStyle/>
-          <a:p>
-            <a:r>
-              <a:rPr sz="1600" b="1">
-                <a:solidFill>
-                  <a:srgbClr val="27500A"/>
+          <a:noFill/>
+        </p:spPr>
+        <p:txBody>
+          <a:bodyPr wrap="square">
+            <a:noAutofit/>
+          </a:bodyPr>
+          <a:lstStyle/>
+          <a:p>
+            <a:r>
+              <a:rPr sz="1600" b="0">
+                <a:solidFill>
+                  <a:srgbClr val="1E2024"/>
                 </a:solidFill>
                 <a:latin typeface="Calibri"/>
               </a:rPr>
               <a:t>B.  </a:t>
             </a:r>
             <a:r>
-              <a:rPr sz="1600" b="1">
-                <a:solidFill>
-                  <a:srgbClr val="27500A"/>
-                </a:solidFill>
-                <a:latin typeface="Calibri"/>
-              </a:rPr>
-              <a:t>由 finalized metadata.version 決定   ✓</a:t>
+              <a:rPr sz="1600" b="0">
+                <a:solidFill>
+                  <a:srgbClr val="1E2024"/>
+                </a:solidFill>
+                <a:latin typeface="Calibri"/>
+              </a:rPr>
+              <a:t>由 finalized metadata.version 決定</a:t>
             </a:r>
           </a:p>
         </p:txBody>
@@ -7089,85 +7494,13 @@
           <a:lstStyle/>
           <a:p>
             <a:r>
-              <a:rPr sz="1400" b="1">
-                <a:solidFill>
-                  <a:srgbClr val="27500A"/>
-                </a:solidFill>
-                <a:latin typeface="Calibri"/>
-              </a:rPr>
-              <a:t>正解 B — </a:t>
-            </a:r>
-            <a:r>
               <a:rPr sz="1400" b="0">
                 <a:solidFill>
-                  <a:srgbClr val="1E2024"/>
-                </a:solidFill>
-                <a:latin typeface="Calibri"/>
-              </a:rPr>
-              <a:t>fetchRequestVersion(MV)：MV 是集中共識，不做 per-connection 協商。</a:t>
-            </a:r>
-          </a:p>
-        </p:txBody>
-      </p:sp>
-      <p:sp>
-        <p:nvSpPr>
-          <p:cNvPr id="9" name="TextBox 8"/>
-          <p:cNvSpPr txBox="1"/>
-          <p:nvPr/>
-        </p:nvSpPr>
-        <p:spPr>
-          <a:xfrm>
-            <a:off x="640080" y="6400800"/>
-            <a:ext cx="10972800" cy="384048"/>
-          </a:xfrm>
-          <a:prstGeom prst="rect">
-            <a:avLst/>
-          </a:prstGeom>
-          <a:noFill/>
-        </p:spPr>
-        <p:txBody>
-          <a:bodyPr wrap="square">
-            <a:noAutofit/>
-          </a:bodyPr>
-          <a:lstStyle/>
-          <a:p>
-            <a:r>
-              <a:rPr sz="1200" b="1">
-                <a:solidFill>
                   <a:srgbClr val="8A8A8A"/>
                 </a:solidFill>
                 <a:latin typeface="Calibri"/>
               </a:rPr>
-              <a:t>REF   </a:t>
-            </a:r>
-            <a:r>
-              <a:rPr sz="1200" b="0" u="sng">
-                <a:solidFill>
-                  <a:srgbClr val="185FA5"/>
-                </a:solidFill>
-                <a:latin typeface="Courier New"/>
-                <a:hlinkClick r:id="rId2"/>
-              </a:rPr>
-              <a:t>RemoteLeaderEndPoint.scala:215</a:t>
-            </a:r>
-            <a:r>
-              <a:rPr sz="1200" b="0">
-                <a:solidFill>
-                  <a:srgbClr val="8A8A8A"/>
-                </a:solidFill>
-                <a:latin typeface="Calibri"/>
-              </a:rPr>
-              <a:t>   ·   </a:t>
-            </a:r>
-            <a:r>
-              <a:rPr sz="1200" b="0" u="sng">
-                <a:solidFill>
-                  <a:srgbClr val="185FA5"/>
-                </a:solidFill>
-                <a:latin typeface="Courier New"/>
-                <a:hlinkClick r:id="rId3"/>
-              </a:rPr>
-              <a:t>MetadataVersion.java:273</a:t>
+              <a:t>想一想 —— 下一頁公布答案</a:t>
             </a:r>
           </a:p>
         </p:txBody>

--- a/study/version-control/kafka-version-negotiation.pptx
+++ b/study/version-control/kafka-version-negotiation.pptx
@@ -4025,15 +4025,73 @@
           </a:p>
         </p:txBody>
       </p:sp>
-      <p:sp>
-        <p:nvSpPr>
-          <p:cNvPr id="4" name="TextBox 3"/>
-          <p:cNvSpPr txBox="1"/>
-          <p:nvPr/>
-        </p:nvSpPr>
-        <p:spPr>
-          <a:xfrm>
-            <a:off x="640080" y="2148840"/>
+      <p:pic>
+        <p:nvPicPr>
+          <p:cNvPr id="4" name="Picture 3" descr="alert-triangle.png"/>
+          <p:cNvPicPr>
+            <a:picLocks noChangeAspect="1"/>
+          </p:cNvPicPr>
+          <p:nvPr/>
+        </p:nvPicPr>
+        <p:blipFill>
+          <a:blip r:embed="rId2"/>
+          <a:stretch>
+            <a:fillRect/>
+          </a:stretch>
+        </p:blipFill>
+        <p:spPr>
+          <a:xfrm>
+            <a:off x="658368" y="2176272"/>
+            <a:ext cx="274320" cy="274320"/>
+          </a:xfrm>
+          <a:prstGeom prst="rect">
+            <a:avLst/>
+          </a:prstGeom>
+        </p:spPr>
+      </p:pic>
+      <p:sp>
+        <p:nvSpPr>
+          <p:cNvPr id="5" name="TextBox 4"/>
+          <p:cNvSpPr txBox="1"/>
+          <p:nvPr/>
+        </p:nvSpPr>
+        <p:spPr>
+          <a:xfrm>
+            <a:off x="1078992" y="2148840"/>
+            <a:ext cx="10515600" cy="493776"/>
+          </a:xfrm>
+          <a:prstGeom prst="rect">
+            <a:avLst/>
+          </a:prstGeom>
+          <a:noFill/>
+        </p:spPr>
+        <p:txBody>
+          <a:bodyPr wrap="square">
+            <a:noAutofit/>
+          </a:bodyPr>
+          <a:lstStyle/>
+          <a:p>
+            <a:r>
+              <a:rPr sz="1650" b="0">
+                <a:solidFill>
+                  <a:srgbClr val="1E2024"/>
+                </a:solidFill>
+                <a:latin typeface="Calibri"/>
+              </a:rPr>
+              <a:t>前一頁「交集空」最容易被忽略的根因——舊 wire 版本被整批移除</a:t>
+            </a:r>
+          </a:p>
+        </p:txBody>
+      </p:sp>
+      <p:sp>
+        <p:nvSpPr>
+          <p:cNvPr id="6" name="TextBox 5"/>
+          <p:cNvSpPr txBox="1"/>
+          <p:nvPr/>
+        </p:nvSpPr>
+        <p:spPr>
+          <a:xfrm>
+            <a:off x="640080" y="2788920"/>
             <a:ext cx="10972800" cy="822959"/>
           </a:xfrm>
           <a:prstGeom prst="rect">
@@ -4079,13 +4137,13 @@
       </p:sp>
       <p:sp>
         <p:nvSpPr>
-          <p:cNvPr id="5" name="TextBox 4"/>
-          <p:cNvSpPr txBox="1"/>
-          <p:nvPr/>
-        </p:nvSpPr>
-        <p:spPr>
-          <a:xfrm>
-            <a:off x="640080" y="3172968"/>
+          <p:cNvPr id="7" name="TextBox 6"/>
+          <p:cNvSpPr txBox="1"/>
+          <p:nvPr/>
+        </p:nvSpPr>
+        <p:spPr>
+          <a:xfrm>
+            <a:off x="640080" y="3813048"/>
             <a:ext cx="10972800" cy="566928"/>
           </a:xfrm>
           <a:prstGeom prst="rect">
@@ -4118,13 +4176,13 @@
       </p:sp>
       <p:sp>
         <p:nvSpPr>
-          <p:cNvPr id="6" name="TextBox 5"/>
-          <p:cNvSpPr txBox="1"/>
-          <p:nvPr/>
-        </p:nvSpPr>
-        <p:spPr>
-          <a:xfrm>
-            <a:off x="640080" y="3922776"/>
+          <p:cNvPr id="8" name="TextBox 7"/>
+          <p:cNvSpPr txBox="1"/>
+          <p:nvPr/>
+        </p:nvSpPr>
+        <p:spPr>
+          <a:xfrm>
+            <a:off x="640080" y="4562856"/>
             <a:ext cx="10972800" cy="731520"/>
           </a:xfrm>
           <a:prstGeom prst="rect">
@@ -4152,7 +4210,7 @@
       </p:sp>
       <p:sp>
         <p:nvSpPr>
-          <p:cNvPr id="7" name="TextBox 6"/>
+          <p:cNvPr id="9" name="TextBox 8"/>
           <p:cNvSpPr txBox="1"/>
           <p:nvPr/>
         </p:nvSpPr>
@@ -4187,7 +4245,7 @@
                   <a:srgbClr val="185FA5"/>
                 </a:solidFill>
                 <a:latin typeface="Courier New"/>
-                <a:hlinkClick r:id="rId2"/>
+                <a:hlinkClick r:id="rId3"/>
               </a:rPr>
               <a:t>upgrade.md:229</a:t>
             </a:r>
@@ -4206,7 +4264,7 @@
                   <a:srgbClr val="185FA5"/>
                 </a:solidFill>
                 <a:latin typeface="Courier New"/>
-                <a:hlinkClick r:id="rId3"/>
+                <a:hlinkClick r:id="rId4"/>
               </a:rPr>
               <a:t>FetchRequest.json validVersions</a:t>
             </a:r>
@@ -5770,7 +5828,7 @@
         <p:spPr>
           <a:xfrm>
             <a:off x="1078992" y="2148840"/>
-            <a:ext cx="10515600" cy="841248"/>
+            <a:ext cx="10515600" cy="493776"/>
           </a:xfrm>
           <a:prstGeom prst="rect">
             <a:avLst/>
@@ -5790,7 +5848,7 @@
                 </a:solidFill>
                 <a:latin typeface="Calibri"/>
               </a:rPr>
-              <a:t>client 內嵌在各 app、長期不更新（Kafka 曾為舊 client 保留每個 protocol 版本近九年，4.0／KIP-896 才把下限提到 2.1）</a:t>
+              <a:t>client 內嵌在各 app、長期不更新</a:t>
             </a:r>
           </a:p>
         </p:txBody>
@@ -5811,7 +5869,7 @@
         </p:blipFill>
         <p:spPr>
           <a:xfrm>
-            <a:off x="658368" y="3163824"/>
+            <a:off x="658368" y="2816352"/>
             <a:ext cx="274320" cy="274320"/>
           </a:xfrm>
           <a:prstGeom prst="rect">
@@ -5827,7 +5885,7 @@
         </p:nvSpPr>
         <p:spPr>
           <a:xfrm>
-            <a:off x="1078992" y="3136392"/>
+            <a:off x="1078992" y="2788920"/>
             <a:ext cx="10515600" cy="493776"/>
           </a:xfrm>
           <a:prstGeom prst="rect">
@@ -5861,7 +5919,41 @@
         </p:nvSpPr>
         <p:spPr>
           <a:xfrm>
-            <a:off x="640080" y="3776472"/>
+            <a:off x="640080" y="3429000"/>
+            <a:ext cx="10972800" cy="731520"/>
+          </a:xfrm>
+          <a:prstGeom prst="rect">
+            <a:avLst/>
+          </a:prstGeom>
+          <a:noFill/>
+        </p:spPr>
+        <p:txBody>
+          <a:bodyPr wrap="square">
+            <a:noAutofit/>
+          </a:bodyPr>
+          <a:lstStyle/>
+          <a:p>
+            <a:r>
+              <a:rPr sz="1500" b="0">
+                <a:solidFill>
+                  <a:srgbClr val="5F5E5A"/>
+                </a:solidFill>
+                <a:latin typeface="Calibri"/>
+              </a:rPr>
+              <a:t>有多長壽？Kafka 曾為舊 client 保留每個 protocol 版本近九年，直到 4.0（KIP-896）才把下限提到 2.1。</a:t>
+            </a:r>
+          </a:p>
+        </p:txBody>
+      </p:sp>
+      <p:sp>
+        <p:nvSpPr>
+          <p:cNvPr id="9" name="TextBox 8"/>
+          <p:cNvSpPr txBox="1"/>
+          <p:nvPr/>
+        </p:nvSpPr>
+        <p:spPr>
+          <a:xfrm>
+            <a:off x="640080" y="4288536"/>
             <a:ext cx="10972800" cy="1097280"/>
           </a:xfrm>
           <a:prstGeom prst="rect">
@@ -5918,13 +6010,13 @@
       </p:sp>
       <p:sp>
         <p:nvSpPr>
-          <p:cNvPr id="9" name="TextBox 8"/>
-          <p:cNvSpPr txBox="1"/>
-          <p:nvPr/>
-        </p:nvSpPr>
-        <p:spPr>
-          <a:xfrm>
-            <a:off x="640080" y="5074920"/>
+          <p:cNvPr id="10" name="TextBox 9"/>
+          <p:cNvSpPr txBox="1"/>
+          <p:nvPr/>
+        </p:nvSpPr>
+        <p:spPr>
+          <a:xfrm>
+            <a:off x="640080" y="5586984"/>
             <a:ext cx="10972800" cy="566928"/>
           </a:xfrm>
           <a:prstGeom prst="rect">
@@ -5957,7 +6049,7 @@
       </p:sp>
       <p:sp>
         <p:nvSpPr>
-          <p:cNvPr id="10" name="TextBox 9"/>
+          <p:cNvPr id="11" name="TextBox 10"/>
           <p:cNvSpPr txBox="1"/>
           <p:nvPr/>
         </p:nvSpPr>

--- a/study/version-control/kafka-version-negotiation.pptx
+++ b/study/version-control/kafka-version-negotiation.pptx
@@ -3772,7 +3772,7 @@
                 </a:solidFill>
                 <a:latin typeface="Calibri"/>
               </a:rPr>
-              <a:t>交集空        → client 端 UnsupportedVersionException（送出前 abort）</a:t>
+              <a:t>交集空              → client 端 UnsupportedVersionException（送出前 abort）</a:t>
             </a:r>
           </a:p>
           <a:p>
@@ -3783,7 +3783,7 @@
                 </a:solidFill>
                 <a:latin typeface="Calibri"/>
               </a:rPr>
-              <a:t>繞過協商自刻  → broker 丟 UnsupportedVersionException + 關線</a:t>
+              <a:t>直送不支援的版本    → broker 丟 UnsupportedVersionException、關閉連線</a:t>
             </a:r>
           </a:p>
           <a:p>
@@ -4144,7 +4144,7 @@
         <p:spPr>
           <a:xfrm>
             <a:off x="640080" y="3813048"/>
-            <a:ext cx="10972800" cy="566928"/>
+            <a:ext cx="10972800" cy="877824"/>
           </a:xfrm>
           <a:prstGeom prst="rect">
             <a:avLst/>
@@ -4169,7 +4169,7 @@
                 </a:solidFill>
                 <a:latin typeface="Calibri"/>
               </a:rPr>
-              <a:t>解法：升級前確認兩端都跨過版本下限（升 4.0 需至少 2.1），否則協商結果沒有可用版本</a:t>
+              <a:t>解法：升任一端到 4.0 前，先確認另一端 ≥ 2.1（upgrade guide 明訂雙向要求），否則協商結果沒有可用版本</a:t>
             </a:r>
           </a:p>
         </p:txBody>
@@ -4182,7 +4182,7 @@
         </p:nvSpPr>
         <p:spPr>
           <a:xfrm>
-            <a:off x="640080" y="4562856"/>
+            <a:off x="640080" y="4873752"/>
             <a:ext cx="10972800" cy="731520"/>
           </a:xfrm>
           <a:prstGeom prst="rect">
@@ -4352,7 +4352,7 @@
                 </a:solidFill>
                 <a:latin typeface="Calibri"/>
               </a:rPr>
-              <a:t>自刻 client 送了不支援的 API version，會怎樣？</a:t>
+              <a:t>client 繞過協商、直接送出 broker 不支援的 API version，會怎樣？</a:t>
             </a:r>
           </a:p>
         </p:txBody>
@@ -4395,7 +4395,7 @@
                 </a:solidFill>
                 <a:latin typeface="Calibri"/>
               </a:rPr>
-              <a:t>一律回 UNSUPPORTED_VERSION</a:t>
+              <a:t>一律回 UNSUPPORTED_VERSION 錯誤碼</a:t>
             </a:r>
           </a:p>
         </p:txBody>
@@ -4438,7 +4438,7 @@
                 </a:solidFill>
                 <a:latin typeface="Calibri"/>
               </a:rPr>
-              <a:t>只有 ApiVersions 例外回錯誤+範圍；其他 API 關線</a:t>
+              <a:t>只有 ApiVersions 例外回錯誤碼+支援範圍；其他 API 直接關閉連線</a:t>
             </a:r>
           </a:p>
         </p:txBody>
@@ -4481,7 +4481,7 @@
                 </a:solidFill>
                 <a:latin typeface="Calibri"/>
               </a:rPr>
-              <a:t>broker 自動降版</a:t>
+              <a:t>broker 自動降版處理</a:t>
             </a:r>
           </a:p>
         </p:txBody>
@@ -4524,7 +4524,7 @@
                 </a:solidFill>
                 <a:latin typeface="Calibri"/>
               </a:rPr>
-              <a:t>忽略版本照跑</a:t>
+              <a:t>忽略版本照常處理</a:t>
             </a:r>
           </a:p>
         </p:txBody>
@@ -4644,7 +4644,7 @@
                 </a:solidFill>
                 <a:latin typeface="Calibri"/>
               </a:rPr>
-              <a:t>自刻 client 送了不支援的 API version，會怎樣？</a:t>
+              <a:t>client 繞過協商、直接送出 broker 不支援的 API version，會怎樣？</a:t>
             </a:r>
           </a:p>
         </p:txBody>
@@ -4687,7 +4687,7 @@
                 </a:solidFill>
                 <a:latin typeface="Calibri"/>
               </a:rPr>
-              <a:t>一律回 UNSUPPORTED_VERSION</a:t>
+              <a:t>一律回 UNSUPPORTED_VERSION 錯誤碼</a:t>
             </a:r>
           </a:p>
         </p:txBody>
@@ -4735,7 +4735,7 @@
                 </a:solidFill>
                 <a:latin typeface="Calibri"/>
               </a:rPr>
-              <a:t>只有 ApiVersions 例外回錯誤+範圍；其他 API 關線   ✓</a:t>
+              <a:t>只有 ApiVersions 例外回錯誤碼+支援範圍；其他 API 直接關閉連線   ✓</a:t>
             </a:r>
           </a:p>
         </p:txBody>
@@ -4778,7 +4778,7 @@
                 </a:solidFill>
                 <a:latin typeface="Calibri"/>
               </a:rPr>
-              <a:t>broker 自動降版</a:t>
+              <a:t>broker 自動降版處理</a:t>
             </a:r>
           </a:p>
         </p:txBody>
@@ -4821,7 +4821,7 @@
                 </a:solidFill>
                 <a:latin typeface="Calibri"/>
               </a:rPr>
-              <a:t>忽略版本照跑</a:t>
+              <a:t>忽略版本照常處理</a:t>
             </a:r>
           </a:p>
         </p:txBody>
@@ -4864,7 +4864,7 @@
                 </a:solidFill>
                 <a:latin typeface="Calibri"/>
               </a:rPr>
-              <a:t>ApiVersions 是 bootstrap 逃生口；其他 API 在 RequestContext 解析失敗、broker 丟 UnsupportedVersionException，SocketServer 關閉連線。</a:t>
+              <a:t>ApiVersions 是協商的第一支 request（此時雙方還不知道彼此版本），若它也關線，client 永遠問不到支援範圍，故回 v0+錯誤碼讓 client 重新協商；其他 API 在 RequestContext 解析失敗、SocketServer 關閉連線。</a:t>
             </a:r>
           </a:p>
         </p:txBody>
@@ -5103,7 +5103,7 @@
         <p:spPr>
           <a:xfrm>
             <a:off x="1078992" y="3447288"/>
-            <a:ext cx="10515600" cy="841248"/>
+            <a:ext cx="10515600" cy="1188720"/>
           </a:xfrm>
           <a:prstGeom prst="rect">
             <a:avLst/>
@@ -5123,7 +5123,7 @@
                 </a:solidFill>
                 <a:latin typeface="Calibri"/>
               </a:rPr>
-              <a:t>Part 1：不能「一個版本打天下」（client 長壽、broker 滾動升級）；三條線多數靠協商，只有複製面由 finalized MV 決定</a:t>
+              <a:t>Part 1：不能「一個版本打天下」（client 長壽、broker 滾動升級）；三條線多數靠協商，只有 partition replication 由 finalized MV 決定</a:t>
             </a:r>
           </a:p>
         </p:txBody>
@@ -5144,7 +5144,7 @@
         </p:blipFill>
         <p:spPr>
           <a:xfrm>
-            <a:off x="658368" y="4462272"/>
+            <a:off x="658368" y="4809744"/>
             <a:ext cx="274320" cy="274320"/>
           </a:xfrm>
           <a:prstGeom prst="rect">
@@ -5160,7 +5160,7 @@
         </p:nvSpPr>
         <p:spPr>
           <a:xfrm>
-            <a:off x="1078992" y="4434840"/>
+            <a:off x="1078992" y="4782312"/>
             <a:ext cx="10515600" cy="841248"/>
           </a:xfrm>
           <a:prstGeom prst="rect">
@@ -5233,7 +5233,7 @@
                 </a:solidFill>
                 <a:latin typeface="Calibri"/>
               </a:rPr>
-              <a:t>本場大綱</a:t>
+              <a:t>議程</a:t>
             </a:r>
           </a:p>
         </p:txBody>
@@ -5267,7 +5267,7 @@
                 </a:solidFill>
                 <a:latin typeface="Calibri"/>
               </a:rPr>
-              <a:t>兩段，加 2 題隨堂考穿插</a:t>
+              <a:t>本場範圍</a:t>
             </a:r>
           </a:p>
         </p:txBody>
@@ -5325,7 +5325,7 @@
                 </a:solidFill>
                 <a:latin typeface="Calibri"/>
               </a:rPr>
-              <a:t>Part 1 — 版本為何要在連線當下協商、又是怎麼選的</a:t>
+              <a:t>Part 1 — 版本為何要在連線當下決定、又是怎麼選的</a:t>
             </a:r>
           </a:p>
         </p:txBody>
@@ -5417,7 +5417,7 @@
                 </a:solidFill>
                 <a:latin typeface="Calibri"/>
               </a:rPr>
-              <a:t>結尾會用一頁 Recap 把兩段串回開場那個問題。</a:t>
+              <a:t>兩題隨堂考穿插於對應段落；結尾以 Recap 回收開場的問題。</a:t>
             </a:r>
           </a:p>
         </p:txBody>
@@ -5640,7 +5640,7 @@
         <p:spPr>
           <a:xfrm>
             <a:off x="1078992" y="3538728"/>
-            <a:ext cx="10515600" cy="493776"/>
+            <a:ext cx="10515600" cy="841248"/>
           </a:xfrm>
           <a:prstGeom prst="rect">
             <a:avLst/>
@@ -5660,7 +5660,7 @@
                 </a:solidFill>
                 <a:latin typeface="Calibri"/>
               </a:rPr>
-              <a:t>但只要叢集達到一定規模，這個假設就不再成立</a:t>
+              <a:t>但生產環境的 Kafka 通常是資料主幹道——訂單事件、log、metrics pipeline 都在上面，停機升級＝整條資料鏈路停擺，這個假設不成立</a:t>
             </a:r>
           </a:p>
         </p:txBody>
@@ -5828,7 +5828,7 @@
         <p:spPr>
           <a:xfrm>
             <a:off x="1078992" y="2148840"/>
-            <a:ext cx="10515600" cy="493776"/>
+            <a:ext cx="10515600" cy="841248"/>
           </a:xfrm>
           <a:prstGeom prst="rect">
             <a:avLst/>
@@ -5848,7 +5848,7 @@
                 </a:solidFill>
                 <a:latin typeface="Calibri"/>
               </a:rPr>
-              <a:t>client 內嵌在各 app、長期不更新</a:t>
+              <a:t>client 是內嵌在應用程式裡的函式庫：IoT 裝置、車載系統、多年前的 batch job——隨應用長期運行、難以更新</a:t>
             </a:r>
           </a:p>
         </p:txBody>
@@ -5869,7 +5869,7 @@
         </p:blipFill>
         <p:spPr>
           <a:xfrm>
-            <a:off x="658368" y="2816352"/>
+            <a:off x="658368" y="3163824"/>
             <a:ext cx="274320" cy="274320"/>
           </a:xfrm>
           <a:prstGeom prst="rect">
@@ -5885,7 +5885,7 @@
         </p:nvSpPr>
         <p:spPr>
           <a:xfrm>
-            <a:off x="1078992" y="2788920"/>
+            <a:off x="1078992" y="3136392"/>
             <a:ext cx="10515600" cy="493776"/>
           </a:xfrm>
           <a:prstGeom prst="rect">
@@ -5919,7 +5919,7 @@
         </p:nvSpPr>
         <p:spPr>
           <a:xfrm>
-            <a:off x="640080" y="3429000"/>
+            <a:off x="640080" y="3776472"/>
             <a:ext cx="10972800" cy="731520"/>
           </a:xfrm>
           <a:prstGeom prst="rect">
@@ -5953,7 +5953,7 @@
         </p:nvSpPr>
         <p:spPr>
           <a:xfrm>
-            <a:off x="640080" y="4288536"/>
+            <a:off x="640080" y="4636008"/>
             <a:ext cx="10972800" cy="1097280"/>
           </a:xfrm>
           <a:prstGeom prst="rect">
@@ -5981,7 +5981,7 @@
                 </a:solidFill>
                 <a:latin typeface="Calibri"/>
               </a:rPr>
-              <a:t>任一時刻：不同節點能力／版本不同</a:t>
+              <a:t>任一時刻：各節點支援的版本範圍（supported versions）不同</a:t>
             </a:r>
           </a:p>
           <a:p>
@@ -6003,7 +6003,7 @@
                 </a:solidFill>
                 <a:latin typeface="Calibri"/>
               </a:rPr>
-              <a:t>        → 只能在「連線當下」協商</a:t>
+              <a:t>        → 只能在「連線當下」決定</a:t>
             </a:r>
           </a:p>
         </p:txBody>
@@ -6016,7 +6016,7 @@
         </p:nvSpPr>
         <p:spPr>
           <a:xfrm>
-            <a:off x="640080" y="5586984"/>
+            <a:off x="640080" y="5934456"/>
             <a:ext cx="10972800" cy="566928"/>
           </a:xfrm>
           <a:prstGeom prst="rect">
@@ -6205,7 +6205,7 @@
         <p:spPr>
           <a:xfrm>
             <a:off x="640080" y="2148840"/>
-            <a:ext cx="10972800" cy="1097280"/>
+            <a:ext cx="10972800" cy="1645920"/>
           </a:xfrm>
           <a:prstGeom prst="rect">
             <a:avLst/>
@@ -6232,7 +6232,7 @@
                 </a:solidFill>
                 <a:latin typeface="Calibri"/>
               </a:rPr>
-              <a:t>release version   = 我裝了哪版 binary   (per-node)</a:t>
+              <a:t>release version   = 我裝了哪版 binary            (per-node)</a:t>
             </a:r>
           </a:p>
           <a:p>
@@ -6243,7 +6243,7 @@
                 </a:solidFill>
                 <a:latin typeface="Calibri"/>
               </a:rPr>
-              <a:t>metadata.version  = 叢集一致的能力世代   (cluster-wide, finalized)</a:t>
+              <a:t>metadata.version  = 叢集 finalized 的 feature level (cluster-wide)</a:t>
             </a:r>
           </a:p>
           <a:p>
@@ -6254,7 +6254,7 @@
                 </a:solidFill>
                 <a:latin typeface="Calibri"/>
               </a:rPr>
-              <a:t>wire API version  = 這條連線講第幾版     (per-connection)</a:t>
+              <a:t>wire API version  = 這條連線講第幾版               (per-connection)</a:t>
             </a:r>
           </a:p>
         </p:txBody>
@@ -6275,7 +6275,7 @@
         </p:blipFill>
         <p:spPr>
           <a:xfrm>
-            <a:off x="658368" y="3474720"/>
+            <a:off x="658368" y="4023360"/>
             <a:ext cx="274320" cy="274320"/>
           </a:xfrm>
           <a:prstGeom prst="rect">
@@ -6291,7 +6291,7 @@
         </p:nvSpPr>
         <p:spPr>
           <a:xfrm>
-            <a:off x="1078992" y="3447288"/>
+            <a:off x="1078992" y="3995928"/>
             <a:ext cx="10515600" cy="493776"/>
           </a:xfrm>
           <a:prstGeom prst="rect">
@@ -6325,7 +6325,7 @@
         </p:nvSpPr>
         <p:spPr>
           <a:xfrm>
-            <a:off x="640080" y="4087368"/>
+            <a:off x="640080" y="4636008"/>
             <a:ext cx="10972800" cy="731520"/>
           </a:xfrm>
           <a:prstGeom prst="rect">
@@ -6346,7 +6346,7 @@
                 </a:solidFill>
                 <a:latin typeface="Calibri"/>
               </a:rPr>
-              <a:t>finalize＝管理員手動宣告「全叢集從此認定這個能力世代」；怎麼宣告是第一場《版本定義》的主題，本場只需知道它是叢集共識的一個值。本場主角是 wire 版本。</a:t>
+              <a:t>finalize＝管理員手動宣告全叢集一致採用的 feature level；怎麼宣告是第一場《版本定義》的主題。本場主角是 wire 版本。</a:t>
             </a:r>
           </a:p>
         </p:txBody>
@@ -6494,7 +6494,7 @@
                 </a:solidFill>
                 <a:latin typeface="Calibri"/>
               </a:rPr>
-              <a:t>三種連線，都先做 ApiVersions 握手</a:t>
+              <a:t>三種連線；要協商，先送 ApiVersionsRequest</a:t>
             </a:r>
           </a:p>
         </p:txBody>
@@ -6552,7 +6552,7 @@
                 </a:solidFill>
                 <a:latin typeface="Calibri"/>
               </a:rPr>
-              <a:t>連線建立後，發起端先送一支 ApiVersions：問對方「你每支 API 支援哪個版本區間？」（KIP-35）</a:t>
+              <a:t>連線建立後，發起端先送一支 ApiVersionsRequest，查詢對方「每支 API 支援哪個版本區間？」（KIP-35）</a:t>
             </a:r>
           </a:p>
         </p:txBody>
@@ -6566,7 +6566,7 @@
         <p:spPr>
           <a:xfrm>
             <a:off x="640080" y="3136392"/>
-            <a:ext cx="10972800" cy="1097280"/>
+            <a:ext cx="10972800" cy="1371600"/>
           </a:xfrm>
           <a:prstGeom prst="rect">
             <a:avLst/>
@@ -6593,7 +6593,7 @@
                 </a:solidFill>
                 <a:latin typeface="Calibri"/>
               </a:rPr>
-              <a:t>client ─▶ broker        讀寫資料、查 metadata…</a:t>
+              <a:t>client ─▶ broker        讀寫資料、查 metadata…      連線後先查詢</a:t>
             </a:r>
           </a:p>
           <a:p>
@@ -6604,7 +6604,7 @@
                 </a:solidFill>
                 <a:latin typeface="Calibri"/>
               </a:rPr>
-              <a:t>broker ─▶ controller    註冊、心跳、轉發 admin…</a:t>
+              <a:t>broker ─▶ controller    註冊、心跳、轉發 admin…      連線後先查詢</a:t>
             </a:r>
           </a:p>
           <a:p>
@@ -6615,7 +6615,7 @@
                 </a:solidFill>
                 <a:latin typeface="Calibri"/>
               </a:rPr>
-              <a:t>broker ◀▶ broker        複製（follower 抓 leader）</a:t>
+              <a:t>broker ◀▶ broker        partition replication        不查詢（下一張）</a:t>
             </a:r>
           </a:p>
         </p:txBody>
@@ -6628,7 +6628,7 @@
         </p:nvSpPr>
         <p:spPr>
           <a:xfrm>
-            <a:off x="640080" y="4434840"/>
+            <a:off x="640080" y="4709160"/>
             <a:ext cx="10972800" cy="438912"/>
           </a:xfrm>
           <a:prstGeom prst="rect">
@@ -6649,7 +6649,7 @@
                 </a:solidFill>
                 <a:latin typeface="Calibri"/>
               </a:rPr>
-              <a:t>每列只列代表性的幾種、非窮舉；重點是三條線都先做這個握手。</a:t>
+              <a:t>每列的 RPC 只列代表性的幾種、非窮舉。</a:t>
             </a:r>
           </a:p>
         </p:txBody>
@@ -6798,7 +6798,7 @@
                 </a:solidFill>
                 <a:latin typeface="Calibri"/>
               </a:rPr>
-              <a:t>握手之後，最終版本誰說了算？</a:t>
+              <a:t>查詢之後，最終版本誰說了算？</a:t>
             </a:r>
           </a:p>
         </p:txBody>
@@ -6839,7 +6839,7 @@
                 </a:solidFill>
                 <a:latin typeface="Calibri"/>
               </a:rPr>
-              <a:t>client ↔ broker       協商，取交集最高</a:t>
+              <a:t>client ↔ broker              協商，取交集最高</a:t>
             </a:r>
           </a:p>
           <a:p>
@@ -6850,7 +6850,7 @@
                 </a:solidFill>
                 <a:latin typeface="Calibri"/>
               </a:rPr>
-              <a:t>broker ↔ controller   也協商（broker 當 client）</a:t>
+              <a:t>broker ↔ controller          也協商（broker 當 client）</a:t>
             </a:r>
           </a:p>
           <a:p>
@@ -6861,14 +6861,14 @@
                 </a:solidFill>
                 <a:latin typeface="Calibri"/>
               </a:rPr>
-              <a:t>broker ↔ broker 複製   不協商——由 finalized MV 決定</a:t>
+              <a:t>broker ↔ broker replication  不協商——由 finalized MV 決定</a:t>
             </a:r>
           </a:p>
         </p:txBody>
       </p:sp>
       <p:pic>
         <p:nvPicPr>
-          <p:cNvPr id="5" name="Picture 4" descr="point.png"/>
+          <p:cNvPr id="5" name="Picture 4" descr="ban.png"/>
           <p:cNvPicPr>
             <a:picLocks noChangeAspect="1"/>
           </p:cNvPicPr>
@@ -6899,7 +6899,7 @@
         <p:spPr>
           <a:xfrm>
             <a:off x="1078992" y="3447288"/>
-            <a:ext cx="10515600" cy="841248"/>
+            <a:ext cx="10515600" cy="1188720"/>
           </a:xfrm>
           <a:prstGeom prst="rect">
             <a:avLst/>
@@ -6919,7 +6919,7 @@
                 </a:solidFill>
                 <a:latin typeface="Calibri"/>
               </a:rPr>
-              <a:t>決定權在「組出這支 request 的程式碼」宣告的允許版本範圍：留全範圍就走協商、被指成 MV 對應的單一版本就不協商</a:t>
+              <a:t>replication 連 ApiVersionsRequest 都不送（discoverBrokerVersions=false）：版本已由 finalized MV 決定，直接照該版本送</a:t>
             </a:r>
           </a:p>
         </p:txBody>
@@ -6932,7 +6932,7 @@
         </p:nvSpPr>
         <p:spPr>
           <a:xfrm>
-            <a:off x="640080" y="4434840"/>
+            <a:off x="640080" y="4782312"/>
             <a:ext cx="10972800" cy="877824"/>
           </a:xfrm>
           <a:prstGeom prst="rect">
@@ -6958,7 +6958,7 @@
                 </a:solidFill>
                 <a:latin typeface="Calibri"/>
               </a:rPr>
-              <a:t>為什麼複製面例外？複製要求所有 follower↔leader 講同一版，才交給 finalized MV 集中決定；其餘連線點對點，各自挑最好版即可</a:t>
+              <a:t>為什麼 replication 例外？它要求所有 follower↔leader 講同一版，才交給 finalized MV 集中決定；其餘連線點對點，各自挑最好版即可</a:t>
             </a:r>
           </a:p>
         </p:txBody>
@@ -6971,7 +6971,7 @@
         </p:nvSpPr>
         <p:spPr>
           <a:xfrm>
-            <a:off x="640080" y="5495544"/>
+            <a:off x="640080" y="5843016"/>
             <a:ext cx="10972800" cy="438912"/>
           </a:xfrm>
           <a:prstGeom prst="rect">
@@ -6992,7 +6992,7 @@
                 </a:solidFill>
                 <a:latin typeface="Calibri"/>
               </a:rPr>
-              <a:t>更細的差異（ListOffsets 以 MV 為上限等）見 blog 附錄，此處不展開。</a:t>
+              <a:t>機制上，決定權在組出 request 的程式碼宣告的允許版本範圍；ListOffsets 等更細差異見 blog 附錄。</a:t>
             </a:r>
           </a:p>
         </p:txBody>
@@ -7055,7 +7055,7 @@
                 <a:latin typeface="Courier New"/>
                 <a:hlinkClick r:id="rId4"/>
               </a:rPr>
-              <a:t>javadoc</a:t>
+              <a:t>discoverBrokerVersions=false</a:t>
             </a:r>
             <a:r>
               <a:rPr sz="1200" b="0">

--- a/study/version-control/kafka-version-negotiation.pptx
+++ b/study/version-control/kafka-version-negotiation.pptx
@@ -20,6 +20,7 @@
     <p:sldId id="268" r:id="rId19"/>
     <p:sldId id="269" r:id="rId20"/>
     <p:sldId id="270" r:id="rId21"/>
+    <p:sldId id="271" r:id="rId22"/>
   </p:sldIdLst>
   <p:sldSz cx="12191695" cy="6858000" type="screen4x3"/>
   <p:notesSz cx="6858000" cy="9144000"/>
@@ -3328,7 +3329,7 @@
                 </a:solidFill>
                 <a:latin typeface="Calibri"/>
               </a:rPr>
-              <a:t>隨堂考 · 核心　（正解）</a:t>
+              <a:t>隨堂考 · 核心</a:t>
             </a:r>
           </a:p>
         </p:txBody>
@@ -3424,36 +3425,31 @@
           <a:prstGeom prst="rect">
             <a:avLst/>
           </a:prstGeom>
-          <a:solidFill>
-            <a:srgbClr val="E9F3DE"/>
-          </a:solidFill>
-          <a:ln>
-            <a:noFill/>
-          </a:ln>
-        </p:spPr>
-        <p:txBody>
-          <a:bodyPr wrap="square" lIns="128016" tIns="54864">
-            <a:noAutofit/>
-          </a:bodyPr>
-          <a:lstStyle/>
-          <a:p>
-            <a:r>
-              <a:rPr sz="1600" b="1">
-                <a:solidFill>
-                  <a:srgbClr val="27500A"/>
+          <a:noFill/>
+        </p:spPr>
+        <p:txBody>
+          <a:bodyPr wrap="square">
+            <a:noAutofit/>
+          </a:bodyPr>
+          <a:lstStyle/>
+          <a:p>
+            <a:r>
+              <a:rPr sz="1600" b="0">
+                <a:solidFill>
+                  <a:srgbClr val="1E2024"/>
                 </a:solidFill>
                 <a:latin typeface="Calibri"/>
               </a:rPr>
               <a:t>B.  </a:t>
             </a:r>
             <a:r>
-              <a:rPr sz="1600" b="1">
-                <a:solidFill>
-                  <a:srgbClr val="27500A"/>
-                </a:solidFill>
-                <a:latin typeface="Calibri"/>
-              </a:rPr>
-              <a:t>由 finalized metadata.version 決定   ✓</a:t>
+              <a:rPr sz="1600" b="0">
+                <a:solidFill>
+                  <a:srgbClr val="1E2024"/>
+                </a:solidFill>
+                <a:latin typeface="Calibri"/>
+              </a:rPr>
+              <a:t>由 finalized metadata.version 決定</a:t>
             </a:r>
           </a:p>
         </p:txBody>
@@ -3567,85 +3563,13 @@
           <a:lstStyle/>
           <a:p>
             <a:r>
-              <a:rPr sz="1400" b="1">
-                <a:solidFill>
-                  <a:srgbClr val="27500A"/>
-                </a:solidFill>
-                <a:latin typeface="Calibri"/>
-              </a:rPr>
-              <a:t>正解 B — </a:t>
-            </a:r>
-            <a:r>
               <a:rPr sz="1400" b="0">
                 <a:solidFill>
-                  <a:srgbClr val="1E2024"/>
-                </a:solidFill>
-                <a:latin typeface="Calibri"/>
-              </a:rPr>
-              <a:t>fetchRequestVersion(MV)：MV 是集中共識，不做 per-connection 協商。</a:t>
-            </a:r>
-          </a:p>
-        </p:txBody>
-      </p:sp>
-      <p:sp>
-        <p:nvSpPr>
-          <p:cNvPr id="9" name="TextBox 8"/>
-          <p:cNvSpPr txBox="1"/>
-          <p:nvPr/>
-        </p:nvSpPr>
-        <p:spPr>
-          <a:xfrm>
-            <a:off x="640080" y="6400800"/>
-            <a:ext cx="10972800" cy="384048"/>
-          </a:xfrm>
-          <a:prstGeom prst="rect">
-            <a:avLst/>
-          </a:prstGeom>
-          <a:noFill/>
-        </p:spPr>
-        <p:txBody>
-          <a:bodyPr wrap="square">
-            <a:noAutofit/>
-          </a:bodyPr>
-          <a:lstStyle/>
-          <a:p>
-            <a:r>
-              <a:rPr sz="1200" b="1">
-                <a:solidFill>
                   <a:srgbClr val="8A8A8A"/>
                 </a:solidFill>
                 <a:latin typeface="Calibri"/>
               </a:rPr>
-              <a:t>REF   </a:t>
-            </a:r>
-            <a:r>
-              <a:rPr sz="1200" b="0" u="sng">
-                <a:solidFill>
-                  <a:srgbClr val="185FA5"/>
-                </a:solidFill>
-                <a:latin typeface="Courier New"/>
-                <a:hlinkClick r:id="rId2"/>
-              </a:rPr>
-              <a:t>RemoteLeaderEndPoint.scala:215</a:t>
-            </a:r>
-            <a:r>
-              <a:rPr sz="1200" b="0">
-                <a:solidFill>
-                  <a:srgbClr val="8A8A8A"/>
-                </a:solidFill>
-                <a:latin typeface="Calibri"/>
-              </a:rPr>
-              <a:t>   ·   </a:t>
-            </a:r>
-            <a:r>
-              <a:rPr sz="1200" b="0" u="sng">
-                <a:solidFill>
-                  <a:srgbClr val="185FA5"/>
-                </a:solidFill>
-                <a:latin typeface="Courier New"/>
-                <a:hlinkClick r:id="rId3"/>
-              </a:rPr>
-              <a:t>MetadataVersion.java:273</a:t>
+              <a:t>想一想 —— 下一頁公布答案</a:t>
             </a:r>
           </a:p>
         </p:txBody>
@@ -3697,7 +3621,7 @@
                 </a:solidFill>
                 <a:latin typeface="Calibri"/>
               </a:rPr>
-              <a:t>Part 2 · 失敗訊息</a:t>
+              <a:t>隨堂考 · 核心　（正解）</a:t>
             </a:r>
           </a:p>
         </p:txBody>
@@ -3711,27 +3635,27 @@
         <p:spPr>
           <a:xfrm>
             <a:off x="640080" y="841248"/>
-            <a:ext cx="10972800" cy="1005840"/>
-          </a:xfrm>
-          <a:prstGeom prst="rect">
-            <a:avLst/>
-          </a:prstGeom>
-          <a:noFill/>
-        </p:spPr>
-        <p:txBody>
-          <a:bodyPr wrap="square">
-            <a:noAutofit/>
-          </a:bodyPr>
-          <a:lstStyle/>
-          <a:p>
-            <a:r>
-              <a:rPr sz="3200" b="1">
+            <a:ext cx="10972800" cy="1188720"/>
+          </a:xfrm>
+          <a:prstGeom prst="rect">
+            <a:avLst/>
+          </a:prstGeom>
+          <a:noFill/>
+        </p:spPr>
+        <p:txBody>
+          <a:bodyPr wrap="square">
+            <a:noAutofit/>
+          </a:bodyPr>
+          <a:lstStyle/>
+          <a:p>
+            <a:r>
+              <a:rPr sz="2600" b="1">
                 <a:solidFill>
                   <a:srgbClr val="1E2024"/>
                 </a:solidFill>
                 <a:latin typeface="Calibri"/>
               </a:rPr>
-              <a:t>通訊當下協商不出版本，會看到什麼</a:t>
+              <a:t>replica fetch（broker↔broker）的 Fetch 版本怎麼決定？</a:t>
             </a:r>
           </a:p>
         </p:txBody>
@@ -3744,85 +3668,89 @@
         </p:nvSpPr>
         <p:spPr>
           <a:xfrm>
-            <a:off x="640080" y="2148840"/>
-            <a:ext cx="10972800" cy="1371600"/>
+            <a:off x="822960" y="2331720"/>
+            <a:ext cx="10515600" cy="493776"/>
+          </a:xfrm>
+          <a:prstGeom prst="rect">
+            <a:avLst/>
+          </a:prstGeom>
+          <a:noFill/>
+        </p:spPr>
+        <p:txBody>
+          <a:bodyPr wrap="square">
+            <a:noAutofit/>
+          </a:bodyPr>
+          <a:lstStyle/>
+          <a:p>
+            <a:r>
+              <a:rPr sz="1600" b="0">
+                <a:solidFill>
+                  <a:srgbClr val="1E2024"/>
+                </a:solidFill>
+                <a:latin typeface="Calibri"/>
+              </a:rPr>
+              <a:t>A.  </a:t>
+            </a:r>
+            <a:r>
+              <a:rPr sz="1600" b="0">
+                <a:solidFill>
+                  <a:srgbClr val="1E2024"/>
+                </a:solidFill>
+                <a:latin typeface="Calibri"/>
+              </a:rPr>
+              <a:t>兩 broker ApiVersions 協商取交集</a:t>
+            </a:r>
+          </a:p>
+        </p:txBody>
+      </p:sp>
+      <p:sp>
+        <p:nvSpPr>
+          <p:cNvPr id="5" name="TextBox 4"/>
+          <p:cNvSpPr txBox="1"/>
+          <p:nvPr/>
+        </p:nvSpPr>
+        <p:spPr>
+          <a:xfrm>
+            <a:off x="822960" y="2953512"/>
+            <a:ext cx="10515600" cy="493776"/>
           </a:xfrm>
           <a:prstGeom prst="rect">
             <a:avLst/>
           </a:prstGeom>
           <a:solidFill>
-            <a:srgbClr val="F3F1EC"/>
+            <a:srgbClr val="E9F3DE"/>
           </a:solidFill>
-          <a:ln w="6350">
-            <a:solidFill>
-              <a:srgbClr val="E3E0D8"/>
-            </a:solidFill>
+          <a:ln>
+            <a:noFill/>
           </a:ln>
         </p:spPr>
         <p:txBody>
-          <a:bodyPr wrap="square" lIns="146304" tIns="91440" bIns="91440">
-            <a:noAutofit/>
-          </a:bodyPr>
-          <a:lstStyle/>
-          <a:p>
-            <a:r>
-              <a:rPr sz="1350" b="0">
-                <a:solidFill>
-                  <a:srgbClr val="2C2C2A"/>
-                </a:solidFill>
-                <a:latin typeface="Calibri"/>
-              </a:rPr>
-              <a:t>交集空              → client 端 UnsupportedVersionException（送出前 abort）</a:t>
-            </a:r>
-          </a:p>
-          <a:p>
-            <a:r>
-              <a:rPr sz="1350" b="0">
-                <a:solidFill>
-                  <a:srgbClr val="2C2C2A"/>
-                </a:solidFill>
-                <a:latin typeface="Calibri"/>
-              </a:rPr>
-              <a:t>直送不支援的版本    → broker 丟 UnsupportedVersionException、關閉連線</a:t>
-            </a:r>
-          </a:p>
-          <a:p>
-            <a:r>
-              <a:rPr sz="1350" b="0">
-                <a:solidFill>
-                  <a:srgbClr val="2C2C2A"/>
-                </a:solidFill>
-                <a:latin typeface="Calibri"/>
-              </a:rPr>
-              <a:t>（ApiVersions 例外：回 v0 + UNSUPPORTED_VERSION 錯誤碼）</a:t>
-            </a:r>
-          </a:p>
-        </p:txBody>
-      </p:sp>
-      <p:pic>
-        <p:nvPicPr>
-          <p:cNvPr id="5" name="Picture 4" descr="ban.png"/>
-          <p:cNvPicPr>
-            <a:picLocks noChangeAspect="1"/>
-          </p:cNvPicPr>
-          <p:nvPr/>
-        </p:nvPicPr>
-        <p:blipFill>
-          <a:blip r:embed="rId2"/>
-          <a:stretch>
-            <a:fillRect/>
-          </a:stretch>
-        </p:blipFill>
-        <p:spPr>
-          <a:xfrm>
-            <a:off x="658368" y="3749040"/>
-            <a:ext cx="274320" cy="274320"/>
-          </a:xfrm>
-          <a:prstGeom prst="rect">
-            <a:avLst/>
-          </a:prstGeom>
-        </p:spPr>
-      </p:pic>
+          <a:bodyPr wrap="square" lIns="128016" tIns="54864">
+            <a:noAutofit/>
+          </a:bodyPr>
+          <a:lstStyle/>
+          <a:p>
+            <a:r>
+              <a:rPr sz="1600" b="1">
+                <a:solidFill>
+                  <a:srgbClr val="27500A"/>
+                </a:solidFill>
+                <a:latin typeface="Calibri"/>
+              </a:rPr>
+              <a:t>B.  </a:t>
+            </a:r>
+            <a:r>
+              <a:rPr sz="1600" b="1">
+                <a:solidFill>
+                  <a:srgbClr val="27500A"/>
+                </a:solidFill>
+                <a:latin typeface="Calibri"/>
+              </a:rPr>
+              <a:t>由 finalized metadata.version 決定   ✓</a:t>
+            </a:r>
+          </a:p>
+        </p:txBody>
+      </p:sp>
       <p:sp>
         <p:nvSpPr>
           <p:cNvPr id="6" name="TextBox 5"/>
@@ -3831,7 +3759,7 @@
         </p:nvSpPr>
         <p:spPr>
           <a:xfrm>
-            <a:off x="1078992" y="3721608"/>
+            <a:off x="822960" y="3575304"/>
             <a:ext cx="10515600" cy="493776"/>
           </a:xfrm>
           <a:prstGeom prst="rect">
@@ -3846,13 +3774,22 @@
           <a:lstStyle/>
           <a:p>
             <a:r>
-              <a:rPr sz="1650" b="0">
+              <a:rPr sz="1600" b="0">
                 <a:solidFill>
                   <a:srgbClr val="1E2024"/>
                 </a:solidFill>
                 <a:latin typeface="Calibri"/>
               </a:rPr>
-              <a:t>多數情況 client 在送出前就本地中止，根本沒上網路</a:t>
+              <a:t>C.  </a:t>
+            </a:r>
+            <a:r>
+              <a:rPr sz="1600" b="0">
+                <a:solidFill>
+                  <a:srgbClr val="1E2024"/>
+                </a:solidFill>
+                <a:latin typeface="Calibri"/>
+              </a:rPr>
+              <a:t>永遠用最新版</a:t>
             </a:r>
           </a:p>
         </p:txBody>
@@ -3860,6 +3797,92 @@
       <p:sp>
         <p:nvSpPr>
           <p:cNvPr id="7" name="TextBox 6"/>
+          <p:cNvSpPr txBox="1"/>
+          <p:nvPr/>
+        </p:nvSpPr>
+        <p:spPr>
+          <a:xfrm>
+            <a:off x="822960" y="4197096"/>
+            <a:ext cx="10515600" cy="493776"/>
+          </a:xfrm>
+          <a:prstGeom prst="rect">
+            <a:avLst/>
+          </a:prstGeom>
+          <a:noFill/>
+        </p:spPr>
+        <p:txBody>
+          <a:bodyPr wrap="square">
+            <a:noAutofit/>
+          </a:bodyPr>
+          <a:lstStyle/>
+          <a:p>
+            <a:r>
+              <a:rPr sz="1600" b="0">
+                <a:solidFill>
+                  <a:srgbClr val="1E2024"/>
+                </a:solidFill>
+                <a:latin typeface="Calibri"/>
+              </a:rPr>
+              <a:t>D.  </a:t>
+            </a:r>
+            <a:r>
+              <a:rPr sz="1600" b="0">
+                <a:solidFill>
+                  <a:srgbClr val="1E2024"/>
+                </a:solidFill>
+                <a:latin typeface="Calibri"/>
+              </a:rPr>
+              <a:t>controller 每次指定</a:t>
+            </a:r>
+          </a:p>
+        </p:txBody>
+      </p:sp>
+      <p:sp>
+        <p:nvSpPr>
+          <p:cNvPr id="8" name="TextBox 7"/>
+          <p:cNvSpPr txBox="1"/>
+          <p:nvPr/>
+        </p:nvSpPr>
+        <p:spPr>
+          <a:xfrm>
+            <a:off x="640080" y="4910327"/>
+            <a:ext cx="10972800" cy="914400"/>
+          </a:xfrm>
+          <a:prstGeom prst="rect">
+            <a:avLst/>
+          </a:prstGeom>
+          <a:noFill/>
+        </p:spPr>
+        <p:txBody>
+          <a:bodyPr wrap="square">
+            <a:noAutofit/>
+          </a:bodyPr>
+          <a:lstStyle/>
+          <a:p>
+            <a:r>
+              <a:rPr sz="1400" b="1">
+                <a:solidFill>
+                  <a:srgbClr val="27500A"/>
+                </a:solidFill>
+                <a:latin typeface="Calibri"/>
+              </a:rPr>
+              <a:t>正解 B — </a:t>
+            </a:r>
+            <a:r>
+              <a:rPr sz="1400" b="0">
+                <a:solidFill>
+                  <a:srgbClr val="1E2024"/>
+                </a:solidFill>
+                <a:latin typeface="Calibri"/>
+              </a:rPr>
+              <a:t>fetchRequestVersion(MV)：MV 是集中共識，不做 per-connection 協商。</a:t>
+            </a:r>
+          </a:p>
+        </p:txBody>
+      </p:sp>
+      <p:sp>
+        <p:nvSpPr>
+          <p:cNvPr id="9" name="TextBox 8"/>
           <p:cNvSpPr txBox="1"/>
           <p:nvPr/>
         </p:nvSpPr>
@@ -3894,47 +3917,28 @@
                   <a:srgbClr val="185FA5"/>
                 </a:solidFill>
                 <a:latin typeface="Courier New"/>
+                <a:hlinkClick r:id="rId2"/>
+              </a:rPr>
+              <a:t>RemoteLeaderEndPoint.scala:215</a:t>
+            </a:r>
+            <a:r>
+              <a:rPr sz="1200" b="0">
+                <a:solidFill>
+                  <a:srgbClr val="8A8A8A"/>
+                </a:solidFill>
+                <a:latin typeface="Calibri"/>
+              </a:rPr>
+              <a:t>   ·   </a:t>
+            </a:r>
+            <a:r>
+              <a:rPr sz="1200" b="0" u="sng">
+                <a:solidFill>
+                  <a:srgbClr val="185FA5"/>
+                </a:solidFill>
+                <a:latin typeface="Courier New"/>
                 <a:hlinkClick r:id="rId3"/>
               </a:rPr>
-              <a:t>latestUsableVersion</a:t>
-            </a:r>
-            <a:r>
-              <a:rPr sz="1200" b="0">
-                <a:solidFill>
-                  <a:srgbClr val="8A8A8A"/>
-                </a:solidFill>
-                <a:latin typeface="Calibri"/>
-              </a:rPr>
-              <a:t>   ·   </a:t>
-            </a:r>
-            <a:r>
-              <a:rPr sz="1200" b="0" u="sng">
-                <a:solidFill>
-                  <a:srgbClr val="185FA5"/>
-                </a:solidFill>
-                <a:latin typeface="Courier New"/>
-                <a:hlinkClick r:id="rId4"/>
-              </a:rPr>
-              <a:t>NetworkClient</a:t>
-            </a:r>
-            <a:r>
-              <a:rPr sz="1200" b="0">
-                <a:solidFill>
-                  <a:srgbClr val="8A8A8A"/>
-                </a:solidFill>
-                <a:latin typeface="Calibri"/>
-              </a:rPr>
-              <a:t>   ·   </a:t>
-            </a:r>
-            <a:r>
-              <a:rPr sz="1200" b="0" u="sng">
-                <a:solidFill>
-                  <a:srgbClr val="185FA5"/>
-                </a:solidFill>
-                <a:latin typeface="Courier New"/>
-                <a:hlinkClick r:id="rId5"/>
-              </a:rPr>
-              <a:t>RequestContext</a:t>
+              <a:t>MetadataVersion.java:273</a:t>
             </a:r>
           </a:p>
         </p:txBody>
@@ -4020,79 +4024,21 @@
                 </a:solidFill>
                 <a:latin typeface="Calibri"/>
               </a:rPr>
-              <a:t>版本截斷：為什麼「升一點點」不夠</a:t>
-            </a:r>
-          </a:p>
-        </p:txBody>
-      </p:sp>
-      <p:pic>
-        <p:nvPicPr>
-          <p:cNvPr id="4" name="Picture 3" descr="alert-triangle.png"/>
-          <p:cNvPicPr>
-            <a:picLocks noChangeAspect="1"/>
-          </p:cNvPicPr>
-          <p:nvPr/>
-        </p:nvPicPr>
-        <p:blipFill>
-          <a:blip r:embed="rId2"/>
-          <a:stretch>
-            <a:fillRect/>
-          </a:stretch>
-        </p:blipFill>
-        <p:spPr>
-          <a:xfrm>
-            <a:off x="658368" y="2176272"/>
-            <a:ext cx="274320" cy="274320"/>
-          </a:xfrm>
-          <a:prstGeom prst="rect">
-            <a:avLst/>
-          </a:prstGeom>
-        </p:spPr>
-      </p:pic>
-      <p:sp>
-        <p:nvSpPr>
-          <p:cNvPr id="5" name="TextBox 4"/>
-          <p:cNvSpPr txBox="1"/>
-          <p:nvPr/>
-        </p:nvSpPr>
-        <p:spPr>
-          <a:xfrm>
-            <a:off x="1078992" y="2148840"/>
-            <a:ext cx="10515600" cy="493776"/>
-          </a:xfrm>
-          <a:prstGeom prst="rect">
-            <a:avLst/>
-          </a:prstGeom>
-          <a:noFill/>
-        </p:spPr>
-        <p:txBody>
-          <a:bodyPr wrap="square">
-            <a:noAutofit/>
-          </a:bodyPr>
-          <a:lstStyle/>
-          <a:p>
-            <a:r>
-              <a:rPr sz="1650" b="0">
-                <a:solidFill>
-                  <a:srgbClr val="1E2024"/>
-                </a:solidFill>
-                <a:latin typeface="Calibri"/>
-              </a:rPr>
-              <a:t>前一頁「交集空」最容易被忽略的根因——舊 wire 版本被整批移除</a:t>
-            </a:r>
-          </a:p>
-        </p:txBody>
-      </p:sp>
-      <p:sp>
-        <p:nvSpPr>
-          <p:cNvPr id="6" name="TextBox 5"/>
-          <p:cNvSpPr txBox="1"/>
-          <p:nvPr/>
-        </p:nvSpPr>
-        <p:spPr>
-          <a:xfrm>
-            <a:off x="640080" y="2788920"/>
-            <a:ext cx="10972800" cy="822959"/>
+              <a:t>通訊當下協商不出版本，會看到什麼</a:t>
+            </a:r>
+          </a:p>
+        </p:txBody>
+      </p:sp>
+      <p:sp>
+        <p:nvSpPr>
+          <p:cNvPr id="4" name="TextBox 3"/>
+          <p:cNvSpPr txBox="1"/>
+          <p:nvPr/>
+        </p:nvSpPr>
+        <p:spPr>
+          <a:xfrm>
+            <a:off x="640080" y="2148840"/>
+            <a:ext cx="10972800" cy="1371600"/>
           </a:xfrm>
           <a:prstGeom prst="rect">
             <a:avLst/>
@@ -4119,7 +4065,7 @@
                 </a:solidFill>
                 <a:latin typeface="Calibri"/>
               </a:rPr>
-              <a:t>舊 wire API version 被整個移除，min 可 &gt; 0</a:t>
+              <a:t>交集空              → client 端 UnsupportedVersionException（送出前 abort）</a:t>
             </a:r>
           </a:p>
           <a:p>
@@ -4130,7 +4076,76 @@
                 </a:solidFill>
                 <a:latin typeface="Calibri"/>
               </a:rPr>
-              <a:t>  Fetch：4–18（v0–3 在 4.0 移除）</a:t>
+              <a:t>直送不支援的版本    → broker 丟 UnsupportedVersionException、關閉連線</a:t>
+            </a:r>
+          </a:p>
+          <a:p>
+            <a:r>
+              <a:rPr sz="1350" b="0">
+                <a:solidFill>
+                  <a:srgbClr val="2C2C2A"/>
+                </a:solidFill>
+                <a:latin typeface="Calibri"/>
+              </a:rPr>
+              <a:t>（ApiVersions 例外：回 v0 + UNSUPPORTED_VERSION 錯誤碼）</a:t>
+            </a:r>
+          </a:p>
+        </p:txBody>
+      </p:sp>
+      <p:pic>
+        <p:nvPicPr>
+          <p:cNvPr id="5" name="Picture 4" descr="ban.png"/>
+          <p:cNvPicPr>
+            <a:picLocks noChangeAspect="1"/>
+          </p:cNvPicPr>
+          <p:nvPr/>
+        </p:nvPicPr>
+        <p:blipFill>
+          <a:blip r:embed="rId2"/>
+          <a:stretch>
+            <a:fillRect/>
+          </a:stretch>
+        </p:blipFill>
+        <p:spPr>
+          <a:xfrm>
+            <a:off x="658368" y="3749040"/>
+            <a:ext cx="274320" cy="274320"/>
+          </a:xfrm>
+          <a:prstGeom prst="rect">
+            <a:avLst/>
+          </a:prstGeom>
+        </p:spPr>
+      </p:pic>
+      <p:sp>
+        <p:nvSpPr>
+          <p:cNvPr id="6" name="TextBox 5"/>
+          <p:cNvSpPr txBox="1"/>
+          <p:nvPr/>
+        </p:nvSpPr>
+        <p:spPr>
+          <a:xfrm>
+            <a:off x="1078992" y="3721608"/>
+            <a:ext cx="10515600" cy="493776"/>
+          </a:xfrm>
+          <a:prstGeom prst="rect">
+            <a:avLst/>
+          </a:prstGeom>
+          <a:noFill/>
+        </p:spPr>
+        <p:txBody>
+          <a:bodyPr wrap="square">
+            <a:noAutofit/>
+          </a:bodyPr>
+          <a:lstStyle/>
+          <a:p>
+            <a:r>
+              <a:rPr sz="1650" b="0">
+                <a:solidFill>
+                  <a:srgbClr val="1E2024"/>
+                </a:solidFill>
+                <a:latin typeface="Calibri"/>
+              </a:rPr>
+              <a:t>多數情況 client 在送出前就本地中止，根本沒上網路</a:t>
             </a:r>
           </a:p>
         </p:txBody>
@@ -4138,79 +4153,6 @@
       <p:sp>
         <p:nvSpPr>
           <p:cNvPr id="7" name="TextBox 6"/>
-          <p:cNvSpPr txBox="1"/>
-          <p:nvPr/>
-        </p:nvSpPr>
-        <p:spPr>
-          <a:xfrm>
-            <a:off x="640080" y="3813048"/>
-            <a:ext cx="10972800" cy="877824"/>
-          </a:xfrm>
-          <a:prstGeom prst="rect">
-            <a:avLst/>
-          </a:prstGeom>
-          <a:solidFill>
-            <a:srgbClr val="E9F3DE"/>
-          </a:solidFill>
-          <a:ln>
-            <a:noFill/>
-          </a:ln>
-        </p:spPr>
-        <p:txBody>
-          <a:bodyPr wrap="square" lIns="146304" tIns="82296">
-            <a:noAutofit/>
-          </a:bodyPr>
-          <a:lstStyle/>
-          <a:p>
-            <a:r>
-              <a:rPr sz="1500" b="0">
-                <a:solidFill>
-                  <a:srgbClr val="27500A"/>
-                </a:solidFill>
-                <a:latin typeface="Calibri"/>
-              </a:rPr>
-              <a:t>解法：升任一端到 4.0 前，先確認另一端 ≥ 2.1（upgrade guide 明訂雙向要求），否則協商結果沒有可用版本</a:t>
-            </a:r>
-          </a:p>
-        </p:txBody>
-      </p:sp>
-      <p:sp>
-        <p:nvSpPr>
-          <p:cNvPr id="8" name="TextBox 7"/>
-          <p:cNvSpPr txBox="1"/>
-          <p:nvPr/>
-        </p:nvSpPr>
-        <p:spPr>
-          <a:xfrm>
-            <a:off x="640080" y="4873752"/>
-            <a:ext cx="10972800" cy="731520"/>
-          </a:xfrm>
-          <a:prstGeom prst="rect">
-            <a:avLst/>
-          </a:prstGeom>
-          <a:noFill/>
-        </p:spPr>
-        <p:txBody>
-          <a:bodyPr wrap="square">
-            <a:noAutofit/>
-          </a:bodyPr>
-          <a:lstStyle/>
-          <a:p>
-            <a:r>
-              <a:rPr sz="1500" b="0">
-                <a:solidFill>
-                  <a:srgbClr val="5F5E5A"/>
-                </a:solidFill>
-                <a:latin typeface="Calibri"/>
-              </a:rPr>
-              <a:t>銜接（非本場）：finalize / 升降當下的錯誤（INVALID_UPDATE_VERSION 等）屬「運行時的版本升降」那場，本場不展開。</a:t>
-            </a:r>
-          </a:p>
-        </p:txBody>
-      </p:sp>
-      <p:sp>
-        <p:nvSpPr>
-          <p:cNvPr id="9" name="TextBox 8"/>
           <p:cNvSpPr txBox="1"/>
           <p:nvPr/>
         </p:nvSpPr>
@@ -4247,7 +4189,7 @@
                 <a:latin typeface="Courier New"/>
                 <a:hlinkClick r:id="rId3"/>
               </a:rPr>
-              <a:t>upgrade.md:229</a:t>
+              <a:t>latestUsableVersion</a:t>
             </a:r>
             <a:r>
               <a:rPr sz="1200" b="0">
@@ -4266,7 +4208,26 @@
                 <a:latin typeface="Courier New"/>
                 <a:hlinkClick r:id="rId4"/>
               </a:rPr>
-              <a:t>FetchRequest.json validVersions</a:t>
+              <a:t>NetworkClient</a:t>
+            </a:r>
+            <a:r>
+              <a:rPr sz="1200" b="0">
+                <a:solidFill>
+                  <a:srgbClr val="8A8A8A"/>
+                </a:solidFill>
+                <a:latin typeface="Calibri"/>
+              </a:rPr>
+              <a:t>   ·   </a:t>
+            </a:r>
+            <a:r>
+              <a:rPr sz="1200" b="0" u="sng">
+                <a:solidFill>
+                  <a:srgbClr val="185FA5"/>
+                </a:solidFill>
+                <a:latin typeface="Courier New"/>
+                <a:hlinkClick r:id="rId5"/>
+              </a:rPr>
+              <a:t>RequestContext</a:t>
             </a:r>
           </a:p>
         </p:txBody>
@@ -4318,7 +4279,7 @@
                 </a:solidFill>
                 <a:latin typeface="Calibri"/>
               </a:rPr>
-              <a:t>隨堂考 · 核心</a:t>
+              <a:t>Part 2 · 失敗訊息</a:t>
             </a:r>
           </a:p>
         </p:txBody>
@@ -4332,40 +4293,64 @@
         <p:spPr>
           <a:xfrm>
             <a:off x="640080" y="841248"/>
-            <a:ext cx="10972800" cy="1188720"/>
-          </a:xfrm>
-          <a:prstGeom prst="rect">
-            <a:avLst/>
-          </a:prstGeom>
-          <a:noFill/>
-        </p:spPr>
-        <p:txBody>
-          <a:bodyPr wrap="square">
-            <a:noAutofit/>
-          </a:bodyPr>
-          <a:lstStyle/>
-          <a:p>
-            <a:r>
-              <a:rPr sz="2600" b="1">
+            <a:ext cx="10972800" cy="1005840"/>
+          </a:xfrm>
+          <a:prstGeom prst="rect">
+            <a:avLst/>
+          </a:prstGeom>
+          <a:noFill/>
+        </p:spPr>
+        <p:txBody>
+          <a:bodyPr wrap="square">
+            <a:noAutofit/>
+          </a:bodyPr>
+          <a:lstStyle/>
+          <a:p>
+            <a:r>
+              <a:rPr sz="3200" b="1">
                 <a:solidFill>
                   <a:srgbClr val="1E2024"/>
                 </a:solidFill>
                 <a:latin typeface="Calibri"/>
               </a:rPr>
-              <a:t>client 繞過協商、直接送出 broker 不支援的 API version，會怎樣？</a:t>
-            </a:r>
-          </a:p>
-        </p:txBody>
-      </p:sp>
-      <p:sp>
-        <p:nvSpPr>
-          <p:cNvPr id="4" name="TextBox 3"/>
-          <p:cNvSpPr txBox="1"/>
-          <p:nvPr/>
-        </p:nvSpPr>
-        <p:spPr>
-          <a:xfrm>
-            <a:off x="822960" y="2331720"/>
+              <a:t>版本截斷：為什麼「升一點點」不夠</a:t>
+            </a:r>
+          </a:p>
+        </p:txBody>
+      </p:sp>
+      <p:pic>
+        <p:nvPicPr>
+          <p:cNvPr id="4" name="Picture 3" descr="alert-triangle.png"/>
+          <p:cNvPicPr>
+            <a:picLocks noChangeAspect="1"/>
+          </p:cNvPicPr>
+          <p:nvPr/>
+        </p:nvPicPr>
+        <p:blipFill>
+          <a:blip r:embed="rId2"/>
+          <a:stretch>
+            <a:fillRect/>
+          </a:stretch>
+        </p:blipFill>
+        <p:spPr>
+          <a:xfrm>
+            <a:off x="658368" y="2176272"/>
+            <a:ext cx="274320" cy="274320"/>
+          </a:xfrm>
+          <a:prstGeom prst="rect">
+            <a:avLst/>
+          </a:prstGeom>
+        </p:spPr>
+      </p:pic>
+      <p:sp>
+        <p:nvSpPr>
+          <p:cNvPr id="5" name="TextBox 4"/>
+          <p:cNvSpPr txBox="1"/>
+          <p:nvPr/>
+        </p:nvSpPr>
+        <p:spPr>
+          <a:xfrm>
+            <a:off x="1078992" y="2148840"/>
             <a:ext cx="10515600" cy="493776"/>
           </a:xfrm>
           <a:prstGeom prst="rect">
@@ -4380,65 +4365,13 @@
           <a:lstStyle/>
           <a:p>
             <a:r>
-              <a:rPr sz="1600" b="0">
+              <a:rPr sz="1650" b="0">
                 <a:solidFill>
                   <a:srgbClr val="1E2024"/>
                 </a:solidFill>
                 <a:latin typeface="Calibri"/>
               </a:rPr>
-              <a:t>A.  </a:t>
-            </a:r>
-            <a:r>
-              <a:rPr sz="1600" b="0">
-                <a:solidFill>
-                  <a:srgbClr val="1E2024"/>
-                </a:solidFill>
-                <a:latin typeface="Calibri"/>
-              </a:rPr>
-              <a:t>一律回 UNSUPPORTED_VERSION 錯誤碼</a:t>
-            </a:r>
-          </a:p>
-        </p:txBody>
-      </p:sp>
-      <p:sp>
-        <p:nvSpPr>
-          <p:cNvPr id="5" name="TextBox 4"/>
-          <p:cNvSpPr txBox="1"/>
-          <p:nvPr/>
-        </p:nvSpPr>
-        <p:spPr>
-          <a:xfrm>
-            <a:off x="822960" y="2953512"/>
-            <a:ext cx="10515600" cy="493776"/>
-          </a:xfrm>
-          <a:prstGeom prst="rect">
-            <a:avLst/>
-          </a:prstGeom>
-          <a:noFill/>
-        </p:spPr>
-        <p:txBody>
-          <a:bodyPr wrap="square">
-            <a:noAutofit/>
-          </a:bodyPr>
-          <a:lstStyle/>
-          <a:p>
-            <a:r>
-              <a:rPr sz="1600" b="0">
-                <a:solidFill>
-                  <a:srgbClr val="1E2024"/>
-                </a:solidFill>
-                <a:latin typeface="Calibri"/>
-              </a:rPr>
-              <a:t>B.  </a:t>
-            </a:r>
-            <a:r>
-              <a:rPr sz="1600" b="0">
-                <a:solidFill>
-                  <a:srgbClr val="1E2024"/>
-                </a:solidFill>
-                <a:latin typeface="Calibri"/>
-              </a:rPr>
-              <a:t>只有 ApiVersions 例外回錯誤碼+支援範圍；其他 API 直接關閉連線</a:t>
+              <a:t>前一頁「交集空」最容易被忽略的根因——舊 wire 版本被整批移除</a:t>
             </a:r>
           </a:p>
         </p:txBody>
@@ -4451,37 +4384,46 @@
         </p:nvSpPr>
         <p:spPr>
           <a:xfrm>
-            <a:off x="822960" y="3575304"/>
-            <a:ext cx="10515600" cy="493776"/>
-          </a:xfrm>
-          <a:prstGeom prst="rect">
-            <a:avLst/>
-          </a:prstGeom>
-          <a:noFill/>
-        </p:spPr>
-        <p:txBody>
-          <a:bodyPr wrap="square">
-            <a:noAutofit/>
-          </a:bodyPr>
-          <a:lstStyle/>
-          <a:p>
-            <a:r>
-              <a:rPr sz="1600" b="0">
-                <a:solidFill>
-                  <a:srgbClr val="1E2024"/>
-                </a:solidFill>
-                <a:latin typeface="Calibri"/>
-              </a:rPr>
-              <a:t>C.  </a:t>
-            </a:r>
-            <a:r>
-              <a:rPr sz="1600" b="0">
-                <a:solidFill>
-                  <a:srgbClr val="1E2024"/>
-                </a:solidFill>
-                <a:latin typeface="Calibri"/>
-              </a:rPr>
-              <a:t>broker 自動降版處理</a:t>
+            <a:off x="640080" y="2788920"/>
+            <a:ext cx="10972800" cy="822959"/>
+          </a:xfrm>
+          <a:prstGeom prst="rect">
+            <a:avLst/>
+          </a:prstGeom>
+          <a:solidFill>
+            <a:srgbClr val="F3F1EC"/>
+          </a:solidFill>
+          <a:ln w="6350">
+            <a:solidFill>
+              <a:srgbClr val="E3E0D8"/>
+            </a:solidFill>
+          </a:ln>
+        </p:spPr>
+        <p:txBody>
+          <a:bodyPr wrap="square" lIns="146304" tIns="91440" bIns="91440">
+            <a:noAutofit/>
+          </a:bodyPr>
+          <a:lstStyle/>
+          <a:p>
+            <a:r>
+              <a:rPr sz="1350" b="0">
+                <a:solidFill>
+                  <a:srgbClr val="2C2C2A"/>
+                </a:solidFill>
+                <a:latin typeface="Calibri"/>
+              </a:rPr>
+              <a:t>舊 wire API version 被整個移除，min 可 &gt; 0</a:t>
+            </a:r>
+          </a:p>
+          <a:p>
+            <a:r>
+              <a:rPr sz="1350" b="0">
+                <a:solidFill>
+                  <a:srgbClr val="2C2C2A"/>
+                </a:solidFill>
+                <a:latin typeface="Calibri"/>
+              </a:rPr>
+              <a:t>  Fetch：4–18（v0–3 在 4.0 移除）</a:t>
             </a:r>
           </a:p>
         </p:txBody>
@@ -4494,37 +4436,33 @@
         </p:nvSpPr>
         <p:spPr>
           <a:xfrm>
-            <a:off x="822960" y="4197096"/>
-            <a:ext cx="10515600" cy="493776"/>
-          </a:xfrm>
-          <a:prstGeom prst="rect">
-            <a:avLst/>
-          </a:prstGeom>
-          <a:noFill/>
-        </p:spPr>
-        <p:txBody>
-          <a:bodyPr wrap="square">
-            <a:noAutofit/>
-          </a:bodyPr>
-          <a:lstStyle/>
-          <a:p>
-            <a:r>
-              <a:rPr sz="1600" b="0">
-                <a:solidFill>
-                  <a:srgbClr val="1E2024"/>
-                </a:solidFill>
-                <a:latin typeface="Calibri"/>
-              </a:rPr>
-              <a:t>D.  </a:t>
-            </a:r>
-            <a:r>
-              <a:rPr sz="1600" b="0">
-                <a:solidFill>
-                  <a:srgbClr val="1E2024"/>
-                </a:solidFill>
-                <a:latin typeface="Calibri"/>
-              </a:rPr>
-              <a:t>忽略版本照常處理</a:t>
+            <a:off x="640080" y="3813048"/>
+            <a:ext cx="10972800" cy="877824"/>
+          </a:xfrm>
+          <a:prstGeom prst="rect">
+            <a:avLst/>
+          </a:prstGeom>
+          <a:solidFill>
+            <a:srgbClr val="E9F3DE"/>
+          </a:solidFill>
+          <a:ln>
+            <a:noFill/>
+          </a:ln>
+        </p:spPr>
+        <p:txBody>
+          <a:bodyPr wrap="square" lIns="146304" tIns="82296">
+            <a:noAutofit/>
+          </a:bodyPr>
+          <a:lstStyle/>
+          <a:p>
+            <a:r>
+              <a:rPr sz="1500" b="0">
+                <a:solidFill>
+                  <a:srgbClr val="27500A"/>
+                </a:solidFill>
+                <a:latin typeface="Calibri"/>
+              </a:rPr>
+              <a:t>解法：升任一端到 4.0 前，先確認另一端 ≥ 2.1（upgrade guide 明訂雙向要求），否則協商結果沒有可用版本</a:t>
             </a:r>
           </a:p>
         </p:txBody>
@@ -4537,28 +4475,125 @@
         </p:nvSpPr>
         <p:spPr>
           <a:xfrm>
-            <a:off x="640080" y="4910327"/>
-            <a:ext cx="10972800" cy="914400"/>
-          </a:xfrm>
-          <a:prstGeom prst="rect">
-            <a:avLst/>
-          </a:prstGeom>
-          <a:noFill/>
-        </p:spPr>
-        <p:txBody>
-          <a:bodyPr wrap="square">
-            <a:noAutofit/>
-          </a:bodyPr>
-          <a:lstStyle/>
-          <a:p>
-            <a:r>
-              <a:rPr sz="1400" b="0">
+            <a:off x="640080" y="4873752"/>
+            <a:ext cx="10972800" cy="731520"/>
+          </a:xfrm>
+          <a:prstGeom prst="rect">
+            <a:avLst/>
+          </a:prstGeom>
+          <a:noFill/>
+        </p:spPr>
+        <p:txBody>
+          <a:bodyPr wrap="square">
+            <a:noAutofit/>
+          </a:bodyPr>
+          <a:lstStyle/>
+          <a:p>
+            <a:r>
+              <a:rPr sz="1500" b="0">
+                <a:solidFill>
+                  <a:srgbClr val="5F5E5A"/>
+                </a:solidFill>
+                <a:latin typeface="Calibri"/>
+              </a:rPr>
+              <a:t>取捨：0.8.0（2013）起九年保留每個版本——每個舊版本都是活的程式碼與測試面；4.0 用「斷 2018 年前的 client」換「刪九年的碼」，只有 major 版本邊界付得起。</a:t>
+            </a:r>
+          </a:p>
+        </p:txBody>
+      </p:sp>
+      <p:sp>
+        <p:nvSpPr>
+          <p:cNvPr id="9" name="TextBox 8"/>
+          <p:cNvSpPr txBox="1"/>
+          <p:nvPr/>
+        </p:nvSpPr>
+        <p:spPr>
+          <a:xfrm>
+            <a:off x="640080" y="5733288"/>
+            <a:ext cx="10972800" cy="731520"/>
+          </a:xfrm>
+          <a:prstGeom prst="rect">
+            <a:avLst/>
+          </a:prstGeom>
+          <a:noFill/>
+        </p:spPr>
+        <p:txBody>
+          <a:bodyPr wrap="square">
+            <a:noAutofit/>
+          </a:bodyPr>
+          <a:lstStyle/>
+          <a:p>
+            <a:r>
+              <a:rPr sz="1500" b="0">
+                <a:solidFill>
+                  <a:srgbClr val="5F5E5A"/>
+                </a:solidFill>
+                <a:latin typeface="Calibri"/>
+              </a:rPr>
+              <a:t>銜接（非本場）：finalize / 升降當下的錯誤（INVALID_UPDATE_VERSION 等）屬「運行時的版本升降」那場，本場不展開。</a:t>
+            </a:r>
+          </a:p>
+        </p:txBody>
+      </p:sp>
+      <p:sp>
+        <p:nvSpPr>
+          <p:cNvPr id="10" name="TextBox 9"/>
+          <p:cNvSpPr txBox="1"/>
+          <p:nvPr/>
+        </p:nvSpPr>
+        <p:spPr>
+          <a:xfrm>
+            <a:off x="640080" y="6400800"/>
+            <a:ext cx="10972800" cy="384048"/>
+          </a:xfrm>
+          <a:prstGeom prst="rect">
+            <a:avLst/>
+          </a:prstGeom>
+          <a:noFill/>
+        </p:spPr>
+        <p:txBody>
+          <a:bodyPr wrap="square">
+            <a:noAutofit/>
+          </a:bodyPr>
+          <a:lstStyle/>
+          <a:p>
+            <a:r>
+              <a:rPr sz="1200" b="1">
                 <a:solidFill>
                   <a:srgbClr val="8A8A8A"/>
                 </a:solidFill>
                 <a:latin typeface="Calibri"/>
               </a:rPr>
-              <a:t>想一想 —— 下一頁公布答案</a:t>
+              <a:t>REF   </a:t>
+            </a:r>
+            <a:r>
+              <a:rPr sz="1200" b="0" u="sng">
+                <a:solidFill>
+                  <a:srgbClr val="185FA5"/>
+                </a:solidFill>
+                <a:latin typeface="Courier New"/>
+                <a:hlinkClick r:id="rId3"/>
+              </a:rPr>
+              <a:t>upgrade.md:229</a:t>
+            </a:r>
+            <a:r>
+              <a:rPr sz="1200" b="0">
+                <a:solidFill>
+                  <a:srgbClr val="8A8A8A"/>
+                </a:solidFill>
+                <a:latin typeface="Calibri"/>
+              </a:rPr>
+              <a:t>   ·   </a:t>
+            </a:r>
+            <a:r>
+              <a:rPr sz="1200" b="0" u="sng">
+                <a:solidFill>
+                  <a:srgbClr val="185FA5"/>
+                </a:solidFill>
+                <a:latin typeface="Courier New"/>
+                <a:hlinkClick r:id="rId4"/>
+              </a:rPr>
+              <a:t>FetchRequest.json validVersions</a:t>
             </a:r>
           </a:p>
         </p:txBody>
@@ -4610,7 +4645,7 @@
                 </a:solidFill>
                 <a:latin typeface="Calibri"/>
               </a:rPr>
-              <a:t>隨堂考 · 核心　（正解）</a:t>
+              <a:t>隨堂考 · 核心</a:t>
             </a:r>
           </a:p>
         </p:txBody>
@@ -4706,36 +4741,31 @@
           <a:prstGeom prst="rect">
             <a:avLst/>
           </a:prstGeom>
-          <a:solidFill>
-            <a:srgbClr val="E9F3DE"/>
-          </a:solidFill>
-          <a:ln>
-            <a:noFill/>
-          </a:ln>
-        </p:spPr>
-        <p:txBody>
-          <a:bodyPr wrap="square" lIns="128016" tIns="54864">
-            <a:noAutofit/>
-          </a:bodyPr>
-          <a:lstStyle/>
-          <a:p>
-            <a:r>
-              <a:rPr sz="1600" b="1">
-                <a:solidFill>
-                  <a:srgbClr val="27500A"/>
+          <a:noFill/>
+        </p:spPr>
+        <p:txBody>
+          <a:bodyPr wrap="square">
+            <a:noAutofit/>
+          </a:bodyPr>
+          <a:lstStyle/>
+          <a:p>
+            <a:r>
+              <a:rPr sz="1600" b="0">
+                <a:solidFill>
+                  <a:srgbClr val="1E2024"/>
                 </a:solidFill>
                 <a:latin typeface="Calibri"/>
               </a:rPr>
               <a:t>B.  </a:t>
             </a:r>
             <a:r>
-              <a:rPr sz="1600" b="1">
-                <a:solidFill>
-                  <a:srgbClr val="27500A"/>
-                </a:solidFill>
-                <a:latin typeface="Calibri"/>
-              </a:rPr>
-              <a:t>只有 ApiVersions 例外回錯誤碼+支援範圍；其他 API 直接關閉連線   ✓</a:t>
+              <a:rPr sz="1600" b="0">
+                <a:solidFill>
+                  <a:srgbClr val="1E2024"/>
+                </a:solidFill>
+                <a:latin typeface="Calibri"/>
+              </a:rPr>
+              <a:t>只有 ApiVersions 例外回錯誤碼+支援範圍；其他 API 直接關閉連線</a:t>
             </a:r>
           </a:p>
         </p:txBody>
@@ -4849,85 +4879,13 @@
           <a:lstStyle/>
           <a:p>
             <a:r>
-              <a:rPr sz="1400" b="1">
-                <a:solidFill>
-                  <a:srgbClr val="27500A"/>
-                </a:solidFill>
-                <a:latin typeface="Calibri"/>
-              </a:rPr>
-              <a:t>正解 B — </a:t>
-            </a:r>
-            <a:r>
               <a:rPr sz="1400" b="0">
                 <a:solidFill>
-                  <a:srgbClr val="1E2024"/>
-                </a:solidFill>
-                <a:latin typeface="Calibri"/>
-              </a:rPr>
-              <a:t>ApiVersions 是協商的第一支 request（此時雙方還不知道彼此版本），若它也關線，client 永遠問不到支援範圍，故回 v0+錯誤碼讓 client 重新協商；其他 API 在 RequestContext 解析失敗、SocketServer 關閉連線。</a:t>
-            </a:r>
-          </a:p>
-        </p:txBody>
-      </p:sp>
-      <p:sp>
-        <p:nvSpPr>
-          <p:cNvPr id="9" name="TextBox 8"/>
-          <p:cNvSpPr txBox="1"/>
-          <p:nvPr/>
-        </p:nvSpPr>
-        <p:spPr>
-          <a:xfrm>
-            <a:off x="640080" y="6400800"/>
-            <a:ext cx="10972800" cy="384048"/>
-          </a:xfrm>
-          <a:prstGeom prst="rect">
-            <a:avLst/>
-          </a:prstGeom>
-          <a:noFill/>
-        </p:spPr>
-        <p:txBody>
-          <a:bodyPr wrap="square">
-            <a:noAutofit/>
-          </a:bodyPr>
-          <a:lstStyle/>
-          <a:p>
-            <a:r>
-              <a:rPr sz="1200" b="1">
-                <a:solidFill>
                   <a:srgbClr val="8A8A8A"/>
                 </a:solidFill>
                 <a:latin typeface="Calibri"/>
               </a:rPr>
-              <a:t>REF   </a:t>
-            </a:r>
-            <a:r>
-              <a:rPr sz="1200" b="0" u="sng">
-                <a:solidFill>
-                  <a:srgbClr val="185FA5"/>
-                </a:solidFill>
-                <a:latin typeface="Courier New"/>
-                <a:hlinkClick r:id="rId2"/>
-              </a:rPr>
-              <a:t>RequestContext.java:112</a:t>
-            </a:r>
-            <a:r>
-              <a:rPr sz="1200" b="0">
-                <a:solidFill>
-                  <a:srgbClr val="8A8A8A"/>
-                </a:solidFill>
-                <a:latin typeface="Calibri"/>
-              </a:rPr>
-              <a:t>   ·   </a:t>
-            </a:r>
-            <a:r>
-              <a:rPr sz="1200" b="0" u="sng">
-                <a:solidFill>
-                  <a:srgbClr val="185FA5"/>
-                </a:solidFill>
-                <a:latin typeface="Courier New"/>
-                <a:hlinkClick r:id="rId3"/>
-              </a:rPr>
-              <a:t>SocketServer.scala:781</a:t>
+              <a:t>想一想 —— 下一頁公布答案</a:t>
             </a:r>
           </a:p>
         </p:txBody>
@@ -4979,6 +4937,375 @@
                 </a:solidFill>
                 <a:latin typeface="Calibri"/>
               </a:rPr>
+              <a:t>隨堂考 · 核心　（正解）</a:t>
+            </a:r>
+          </a:p>
+        </p:txBody>
+      </p:sp>
+      <p:sp>
+        <p:nvSpPr>
+          <p:cNvPr id="3" name="TextBox 2"/>
+          <p:cNvSpPr txBox="1"/>
+          <p:nvPr/>
+        </p:nvSpPr>
+        <p:spPr>
+          <a:xfrm>
+            <a:off x="640080" y="841248"/>
+            <a:ext cx="10972800" cy="1188720"/>
+          </a:xfrm>
+          <a:prstGeom prst="rect">
+            <a:avLst/>
+          </a:prstGeom>
+          <a:noFill/>
+        </p:spPr>
+        <p:txBody>
+          <a:bodyPr wrap="square">
+            <a:noAutofit/>
+          </a:bodyPr>
+          <a:lstStyle/>
+          <a:p>
+            <a:r>
+              <a:rPr sz="2600" b="1">
+                <a:solidFill>
+                  <a:srgbClr val="1E2024"/>
+                </a:solidFill>
+                <a:latin typeface="Calibri"/>
+              </a:rPr>
+              <a:t>client 繞過協商、直接送出 broker 不支援的 API version，會怎樣？</a:t>
+            </a:r>
+          </a:p>
+        </p:txBody>
+      </p:sp>
+      <p:sp>
+        <p:nvSpPr>
+          <p:cNvPr id="4" name="TextBox 3"/>
+          <p:cNvSpPr txBox="1"/>
+          <p:nvPr/>
+        </p:nvSpPr>
+        <p:spPr>
+          <a:xfrm>
+            <a:off x="822960" y="2331720"/>
+            <a:ext cx="10515600" cy="493776"/>
+          </a:xfrm>
+          <a:prstGeom prst="rect">
+            <a:avLst/>
+          </a:prstGeom>
+          <a:noFill/>
+        </p:spPr>
+        <p:txBody>
+          <a:bodyPr wrap="square">
+            <a:noAutofit/>
+          </a:bodyPr>
+          <a:lstStyle/>
+          <a:p>
+            <a:r>
+              <a:rPr sz="1600" b="0">
+                <a:solidFill>
+                  <a:srgbClr val="1E2024"/>
+                </a:solidFill>
+                <a:latin typeface="Calibri"/>
+              </a:rPr>
+              <a:t>A.  </a:t>
+            </a:r>
+            <a:r>
+              <a:rPr sz="1600" b="0">
+                <a:solidFill>
+                  <a:srgbClr val="1E2024"/>
+                </a:solidFill>
+                <a:latin typeface="Calibri"/>
+              </a:rPr>
+              <a:t>一律回 UNSUPPORTED_VERSION 錯誤碼</a:t>
+            </a:r>
+          </a:p>
+        </p:txBody>
+      </p:sp>
+      <p:sp>
+        <p:nvSpPr>
+          <p:cNvPr id="5" name="TextBox 4"/>
+          <p:cNvSpPr txBox="1"/>
+          <p:nvPr/>
+        </p:nvSpPr>
+        <p:spPr>
+          <a:xfrm>
+            <a:off x="822960" y="2953512"/>
+            <a:ext cx="10515600" cy="493776"/>
+          </a:xfrm>
+          <a:prstGeom prst="rect">
+            <a:avLst/>
+          </a:prstGeom>
+          <a:solidFill>
+            <a:srgbClr val="E9F3DE"/>
+          </a:solidFill>
+          <a:ln>
+            <a:noFill/>
+          </a:ln>
+        </p:spPr>
+        <p:txBody>
+          <a:bodyPr wrap="square" lIns="128016" tIns="54864">
+            <a:noAutofit/>
+          </a:bodyPr>
+          <a:lstStyle/>
+          <a:p>
+            <a:r>
+              <a:rPr sz="1600" b="1">
+                <a:solidFill>
+                  <a:srgbClr val="27500A"/>
+                </a:solidFill>
+                <a:latin typeface="Calibri"/>
+              </a:rPr>
+              <a:t>B.  </a:t>
+            </a:r>
+            <a:r>
+              <a:rPr sz="1600" b="1">
+                <a:solidFill>
+                  <a:srgbClr val="27500A"/>
+                </a:solidFill>
+                <a:latin typeface="Calibri"/>
+              </a:rPr>
+              <a:t>只有 ApiVersions 例外回錯誤碼+支援範圍；其他 API 直接關閉連線   ✓</a:t>
+            </a:r>
+          </a:p>
+        </p:txBody>
+      </p:sp>
+      <p:sp>
+        <p:nvSpPr>
+          <p:cNvPr id="6" name="TextBox 5"/>
+          <p:cNvSpPr txBox="1"/>
+          <p:nvPr/>
+        </p:nvSpPr>
+        <p:spPr>
+          <a:xfrm>
+            <a:off x="822960" y="3575304"/>
+            <a:ext cx="10515600" cy="493776"/>
+          </a:xfrm>
+          <a:prstGeom prst="rect">
+            <a:avLst/>
+          </a:prstGeom>
+          <a:noFill/>
+        </p:spPr>
+        <p:txBody>
+          <a:bodyPr wrap="square">
+            <a:noAutofit/>
+          </a:bodyPr>
+          <a:lstStyle/>
+          <a:p>
+            <a:r>
+              <a:rPr sz="1600" b="0">
+                <a:solidFill>
+                  <a:srgbClr val="1E2024"/>
+                </a:solidFill>
+                <a:latin typeface="Calibri"/>
+              </a:rPr>
+              <a:t>C.  </a:t>
+            </a:r>
+            <a:r>
+              <a:rPr sz="1600" b="0">
+                <a:solidFill>
+                  <a:srgbClr val="1E2024"/>
+                </a:solidFill>
+                <a:latin typeface="Calibri"/>
+              </a:rPr>
+              <a:t>broker 自動降版處理</a:t>
+            </a:r>
+          </a:p>
+        </p:txBody>
+      </p:sp>
+      <p:sp>
+        <p:nvSpPr>
+          <p:cNvPr id="7" name="TextBox 6"/>
+          <p:cNvSpPr txBox="1"/>
+          <p:nvPr/>
+        </p:nvSpPr>
+        <p:spPr>
+          <a:xfrm>
+            <a:off x="822960" y="4197096"/>
+            <a:ext cx="10515600" cy="493776"/>
+          </a:xfrm>
+          <a:prstGeom prst="rect">
+            <a:avLst/>
+          </a:prstGeom>
+          <a:noFill/>
+        </p:spPr>
+        <p:txBody>
+          <a:bodyPr wrap="square">
+            <a:noAutofit/>
+          </a:bodyPr>
+          <a:lstStyle/>
+          <a:p>
+            <a:r>
+              <a:rPr sz="1600" b="0">
+                <a:solidFill>
+                  <a:srgbClr val="1E2024"/>
+                </a:solidFill>
+                <a:latin typeface="Calibri"/>
+              </a:rPr>
+              <a:t>D.  </a:t>
+            </a:r>
+            <a:r>
+              <a:rPr sz="1600" b="0">
+                <a:solidFill>
+                  <a:srgbClr val="1E2024"/>
+                </a:solidFill>
+                <a:latin typeface="Calibri"/>
+              </a:rPr>
+              <a:t>忽略版本照常處理</a:t>
+            </a:r>
+          </a:p>
+        </p:txBody>
+      </p:sp>
+      <p:sp>
+        <p:nvSpPr>
+          <p:cNvPr id="8" name="TextBox 7"/>
+          <p:cNvSpPr txBox="1"/>
+          <p:nvPr/>
+        </p:nvSpPr>
+        <p:spPr>
+          <a:xfrm>
+            <a:off x="640080" y="4910327"/>
+            <a:ext cx="10972800" cy="914400"/>
+          </a:xfrm>
+          <a:prstGeom prst="rect">
+            <a:avLst/>
+          </a:prstGeom>
+          <a:noFill/>
+        </p:spPr>
+        <p:txBody>
+          <a:bodyPr wrap="square">
+            <a:noAutofit/>
+          </a:bodyPr>
+          <a:lstStyle/>
+          <a:p>
+            <a:r>
+              <a:rPr sz="1400" b="1">
+                <a:solidFill>
+                  <a:srgbClr val="27500A"/>
+                </a:solidFill>
+                <a:latin typeface="Calibri"/>
+              </a:rPr>
+              <a:t>正解 B — </a:t>
+            </a:r>
+            <a:r>
+              <a:rPr sz="1400" b="0">
+                <a:solidFill>
+                  <a:srgbClr val="1E2024"/>
+                </a:solidFill>
+                <a:latin typeface="Calibri"/>
+              </a:rPr>
+              <a:t>ApiVersions 是協商的第一支 request（此時雙方還不知道彼此版本），若它也關線，client 永遠問不到支援範圍，故回 v0+錯誤碼讓 client 重新協商；其他 API 在 RequestContext 解析失敗、SocketServer 關閉連線。</a:t>
+            </a:r>
+          </a:p>
+        </p:txBody>
+      </p:sp>
+      <p:sp>
+        <p:nvSpPr>
+          <p:cNvPr id="9" name="TextBox 8"/>
+          <p:cNvSpPr txBox="1"/>
+          <p:nvPr/>
+        </p:nvSpPr>
+        <p:spPr>
+          <a:xfrm>
+            <a:off x="640080" y="6400800"/>
+            <a:ext cx="10972800" cy="384048"/>
+          </a:xfrm>
+          <a:prstGeom prst="rect">
+            <a:avLst/>
+          </a:prstGeom>
+          <a:noFill/>
+        </p:spPr>
+        <p:txBody>
+          <a:bodyPr wrap="square">
+            <a:noAutofit/>
+          </a:bodyPr>
+          <a:lstStyle/>
+          <a:p>
+            <a:r>
+              <a:rPr sz="1200" b="1">
+                <a:solidFill>
+                  <a:srgbClr val="8A8A8A"/>
+                </a:solidFill>
+                <a:latin typeface="Calibri"/>
+              </a:rPr>
+              <a:t>REF   </a:t>
+            </a:r>
+            <a:r>
+              <a:rPr sz="1200" b="0" u="sng">
+                <a:solidFill>
+                  <a:srgbClr val="185FA5"/>
+                </a:solidFill>
+                <a:latin typeface="Courier New"/>
+                <a:hlinkClick r:id="rId2"/>
+              </a:rPr>
+              <a:t>RequestContext.java:112</a:t>
+            </a:r>
+            <a:r>
+              <a:rPr sz="1200" b="0">
+                <a:solidFill>
+                  <a:srgbClr val="8A8A8A"/>
+                </a:solidFill>
+                <a:latin typeface="Calibri"/>
+              </a:rPr>
+              <a:t>   ·   </a:t>
+            </a:r>
+            <a:r>
+              <a:rPr sz="1200" b="0" u="sng">
+                <a:solidFill>
+                  <a:srgbClr val="185FA5"/>
+                </a:solidFill>
+                <a:latin typeface="Courier New"/>
+                <a:hlinkClick r:id="rId3"/>
+              </a:rPr>
+              <a:t>SocketServer.scala:781</a:t>
+            </a:r>
+          </a:p>
+        </p:txBody>
+      </p:sp>
+    </p:spTree>
+  </p:cSld>
+  <p:clrMapOvr>
+    <a:masterClrMapping/>
+  </p:clrMapOvr>
+</p:sld>
+</file>
+
+<file path=ppt/slides/slide16.xml><?xml version="1.0" encoding="utf-8"?>
+<p:sld xmlns:a="http://schemas.openxmlformats.org/drawingml/2006/main" xmlns:p="http://schemas.openxmlformats.org/presentationml/2006/main" xmlns:r="http://schemas.openxmlformats.org/officeDocument/2006/relationships">
+  <p:cSld>
+    <p:spTree>
+      <p:nvGrpSpPr>
+        <p:cNvPr id="1" name=""/>
+        <p:cNvGrpSpPr/>
+        <p:nvPr/>
+      </p:nvGrpSpPr>
+      <p:grpSpPr/>
+      <p:sp>
+        <p:nvSpPr>
+          <p:cNvPr id="2" name="TextBox 1"/>
+          <p:cNvSpPr txBox="1"/>
+          <p:nvPr/>
+        </p:nvSpPr>
+        <p:spPr>
+          <a:xfrm>
+            <a:off x="640080" y="457200"/>
+            <a:ext cx="10972800" cy="365760"/>
+          </a:xfrm>
+          <a:prstGeom prst="rect">
+            <a:avLst/>
+          </a:prstGeom>
+          <a:noFill/>
+        </p:spPr>
+        <p:txBody>
+          <a:bodyPr wrap="square">
+            <a:noAutofit/>
+          </a:bodyPr>
+          <a:lstStyle/>
+          <a:p>
+            <a:r>
+              <a:rPr sz="1300" b="1">
+                <a:solidFill>
+                  <a:srgbClr val="185FA5"/>
+                </a:solidFill>
+                <a:latin typeface="Calibri"/>
+              </a:rPr>
               <a:t>Recap</a:t>
             </a:r>
           </a:p>
@@ -5182,6 +5509,45 @@
                 <a:latin typeface="Calibri"/>
               </a:rPr>
               <a:t>Part 2：協商不出版本 → UnsupportedVersionException（多在送出前中止）；finalize／升降的錯誤交給運行時那場</a:t>
+            </a:r>
+          </a:p>
+        </p:txBody>
+      </p:sp>
+      <p:sp>
+        <p:nvSpPr>
+          <p:cNvPr id="9" name="TextBox 8"/>
+          <p:cNvSpPr txBox="1"/>
+          <p:nvPr/>
+        </p:nvSpPr>
+        <p:spPr>
+          <a:xfrm>
+            <a:off x="640080" y="5769864"/>
+            <a:ext cx="10972800" cy="877824"/>
+          </a:xfrm>
+          <a:prstGeom prst="rect">
+            <a:avLst/>
+          </a:prstGeom>
+          <a:solidFill>
+            <a:srgbClr val="E9F3DE"/>
+          </a:solidFill>
+          <a:ln>
+            <a:noFill/>
+          </a:ln>
+        </p:spPr>
+        <p:txBody>
+          <a:bodyPr wrap="square" lIns="146304" tIns="82296">
+            <a:noAutofit/>
+          </a:bodyPr>
+          <a:lstStyle/>
+          <a:p>
+            <a:r>
+              <a:rPr sz="1500" b="0">
+                <a:solidFill>
+                  <a:srgbClr val="27500A"/>
+                </a:solidFill>
+                <a:latin typeface="Calibri"/>
+              </a:rPr>
+              <a:t>立場：per-API 細粒度協商＋replication 集中治理，是為「client 生態極度分散」量身的取捨——對 Kafka 划算，但不是通用解</a:t>
             </a:r>
           </a:p>
         </p:txBody>
@@ -5673,6 +6039,40 @@
         </p:nvSpPr>
         <p:spPr>
           <a:xfrm>
+            <a:off x="640080" y="4526280"/>
+            <a:ext cx="10972800" cy="731520"/>
+          </a:xfrm>
+          <a:prstGeom prst="rect">
+            <a:avLst/>
+          </a:prstGeom>
+          <a:noFill/>
+        </p:spPr>
+        <p:txBody>
+          <a:bodyPr wrap="square">
+            <a:noAutofit/>
+          </a:bodyPr>
+          <a:lstStyle/>
+          <a:p>
+            <a:r>
+              <a:rPr sz="1500" b="0">
+                <a:solidFill>
+                  <a:srgbClr val="5F5E5A"/>
+                </a:solidFill>
+                <a:latin typeface="Calibri"/>
+              </a:rPr>
+              <a:t>預告：拆開版本也不是免費的——Kafka 為此揹上每支 API 一組 [min,max] 版本矩陣；MongoDB／PostgreSQL 選擇只維護一個全域版本號。結尾會回來評這筆帳。</a:t>
+            </a:r>
+          </a:p>
+        </p:txBody>
+      </p:sp>
+      <p:sp>
+        <p:nvSpPr>
+          <p:cNvPr id="10" name="TextBox 9"/>
+          <p:cNvSpPr txBox="1"/>
+          <p:nvPr/>
+        </p:nvSpPr>
+        <p:spPr>
+          <a:xfrm>
             <a:off x="640080" y="6400800"/>
             <a:ext cx="10972800" cy="384048"/>
           </a:xfrm>
@@ -6933,7 +7333,7 @@
         <p:spPr>
           <a:xfrm>
             <a:off x="640080" y="4782312"/>
-            <a:ext cx="10972800" cy="877824"/>
+            <a:ext cx="10972800" cy="1188720"/>
           </a:xfrm>
           <a:prstGeom prst="rect">
             <a:avLst/>
@@ -6958,7 +7358,7 @@
                 </a:solidFill>
                 <a:latin typeface="Calibri"/>
               </a:rPr>
-              <a:t>為什麼 replication 例外？它要求所有 follower↔leader 講同一版，才交給 finalized MV 集中決定；其餘連線點對點，各自挑最好版即可</a:t>
+              <a:t>為什麼 replication 例外？它要求所有 follower↔leader 講同一版，才交給 finalized MV 集中決定；帳單是升級變兩階段（先滾 binary、再 finalize）——一致性拿彈性換</a:t>
             </a:r>
           </a:p>
         </p:txBody>
@@ -6971,7 +7371,7 @@
         </p:nvSpPr>
         <p:spPr>
           <a:xfrm>
-            <a:off x="640080" y="5843016"/>
+            <a:off x="640080" y="6153912"/>
             <a:ext cx="10972800" cy="438912"/>
           </a:xfrm>
           <a:prstGeom prst="rect">
@@ -7126,7 +7526,7 @@
                 </a:solidFill>
                 <a:latin typeface="Calibri"/>
               </a:rPr>
-              <a:t>Part 1 · 舉例</a:t>
+              <a:t>Part 1 · 對照</a:t>
             </a:r>
           </a:p>
         </p:txBody>
@@ -7139,28 +7539,28 @@
         </p:nvSpPr>
         <p:spPr>
           <a:xfrm>
-            <a:off x="640080" y="822960"/>
-            <a:ext cx="10972800" cy="640080"/>
-          </a:xfrm>
-          <a:prstGeom prst="rect">
-            <a:avLst/>
-          </a:prstGeom>
-          <a:noFill/>
-        </p:spPr>
-        <p:txBody>
-          <a:bodyPr wrap="square">
-            <a:noAutofit/>
-          </a:bodyPr>
-          <a:lstStyle/>
-          <a:p>
-            <a:r>
-              <a:rPr sz="2900" b="1">
+            <a:off x="640080" y="841248"/>
+            <a:ext cx="10972800" cy="1005840"/>
+          </a:xfrm>
+          <a:prstGeom prst="rect">
+            <a:avLst/>
+          </a:prstGeom>
+          <a:noFill/>
+        </p:spPr>
+        <p:txBody>
+          <a:bodyPr wrap="square">
+            <a:noAutofit/>
+          </a:bodyPr>
+          <a:lstStyle/>
+          <a:p>
+            <a:r>
+              <a:rPr sz="3200" b="1">
                 <a:solidFill>
                   <a:srgbClr val="1E2024"/>
                 </a:solidFill>
                 <a:latin typeface="Calibri"/>
               </a:rPr>
-              <a:t>以一支 Fetch 為例：consumer 協商、replica 由 MV</a:t>
+              <a:t>同一道題，別家怎麼答</a:t>
             </a:r>
           </a:p>
         </p:txBody>
@@ -7173,59 +7573,137 @@
         </p:nvSpPr>
         <p:spPr>
           <a:xfrm>
-            <a:off x="640080" y="1481328"/>
-            <a:ext cx="10972800" cy="365760"/>
-          </a:xfrm>
-          <a:prstGeom prst="rect">
-            <a:avLst/>
-          </a:prstGeom>
-          <a:noFill/>
-        </p:spPr>
-        <p:txBody>
-          <a:bodyPr wrap="square">
-            <a:noAutofit/>
-          </a:bodyPr>
-          <a:lstStyle/>
-          <a:p>
-            <a:r>
-              <a:rPr sz="1400" b="0">
+            <a:off x="640080" y="2148840"/>
+            <a:ext cx="10972800" cy="1645920"/>
+          </a:xfrm>
+          <a:prstGeom prst="rect">
+            <a:avLst/>
+          </a:prstGeom>
+          <a:solidFill>
+            <a:srgbClr val="F3F1EC"/>
+          </a:solidFill>
+          <a:ln w="6350">
+            <a:solidFill>
+              <a:srgbClr val="E3E0D8"/>
+            </a:solidFill>
+          </a:ln>
+        </p:spPr>
+        <p:txBody>
+          <a:bodyPr wrap="square" lIns="146304" tIns="91440" bIns="91440">
+            <a:noAutofit/>
+          </a:bodyPr>
+          <a:lstStyle/>
+          <a:p>
+            <a:r>
+              <a:rPr sz="1350" b="0">
+                <a:solidFill>
+                  <a:srgbClr val="2C2C2A"/>
+                </a:solidFill>
+                <a:latin typeface="Calibri"/>
+              </a:rPr>
+              <a:t>Kafka        per-API 協商 + MV 治理 replication      粒度最細、協定面積最大</a:t>
+            </a:r>
+          </a:p>
+          <a:p>
+            <a:r>
+              <a:rPr sz="1350" b="0">
+                <a:solidFill>
+                  <a:srgbClr val="2C2C2A"/>
+                </a:solidFill>
+                <a:latin typeface="Calibri"/>
+              </a:rPr>
+              <a:t>MongoDB      全域 wire version + FCV 治理叢集         FCV ≈ MV，同一套思路</a:t>
+            </a:r>
+          </a:p>
+          <a:p>
+            <a:r>
+              <a:rPr sz="1350" b="0">
+                <a:solidFill>
+                  <a:srgbClr val="2C2C2A"/>
+                </a:solidFill>
+                <a:latin typeface="Calibri"/>
+              </a:rPr>
+              <a:t>PostgreSQL   協定 v3 逾二十年；實體複製鎖 major 版本   複製層無法滾動升級</a:t>
+            </a:r>
+          </a:p>
+        </p:txBody>
+      </p:sp>
+      <p:sp>
+        <p:nvSpPr>
+          <p:cNvPr id="5" name="TextBox 4"/>
+          <p:cNvSpPr txBox="1"/>
+          <p:nvPr/>
+        </p:nvSpPr>
+        <p:spPr>
+          <a:xfrm>
+            <a:off x="640080" y="3995928"/>
+            <a:ext cx="10972800" cy="877824"/>
+          </a:xfrm>
+          <a:prstGeom prst="rect">
+            <a:avLst/>
+          </a:prstGeom>
+          <a:solidFill>
+            <a:srgbClr val="E9F3DE"/>
+          </a:solidFill>
+          <a:ln>
+            <a:noFill/>
+          </a:ln>
+        </p:spPr>
+        <p:txBody>
+          <a:bodyPr wrap="square" lIns="146304" tIns="82296">
+            <a:noAutofit/>
+          </a:bodyPr>
+          <a:lstStyle/>
+          <a:p>
+            <a:r>
+              <a:rPr sz="1500" b="0">
+                <a:solidFill>
+                  <a:srgbClr val="27500A"/>
+                </a:solidFill>
+                <a:latin typeface="Calibri"/>
+              </a:rPr>
+              <a:t>PostgreSQL 就是「複製層不做版本治理」的反事實——Kafka 的 MV 買到的，正是 PostgreSQL 買不到的線上滾動升級</a:t>
+            </a:r>
+          </a:p>
+        </p:txBody>
+      </p:sp>
+      <p:sp>
+        <p:nvSpPr>
+          <p:cNvPr id="6" name="TextBox 5"/>
+          <p:cNvSpPr txBox="1"/>
+          <p:nvPr/>
+        </p:nvSpPr>
+        <p:spPr>
+          <a:xfrm>
+            <a:off x="640080" y="5056632"/>
+            <a:ext cx="10972800" cy="438912"/>
+          </a:xfrm>
+          <a:prstGeom prst="rect">
+            <a:avLst/>
+          </a:prstGeom>
+          <a:noFill/>
+        </p:spPr>
+        <p:txBody>
+          <a:bodyPr wrap="square">
+            <a:noAutofit/>
+          </a:bodyPr>
+          <a:lstStyle/>
+          <a:p>
+            <a:r>
+              <a:rPr sz="1500" b="0">
                 <a:solidFill>
                   <a:srgbClr val="5F5E5A"/>
                 </a:solidFill>
                 <a:latin typeface="Calibri"/>
               </a:rPr>
-              <a:t>同一支 Fetch 兩種身分：consumer fetch 走 client↔broker、replica fetch 走 broker↔broker</a:t>
-            </a:r>
-          </a:p>
-        </p:txBody>
-      </p:sp>
-      <p:pic>
-        <p:nvPicPr>
-          <p:cNvPr id="5" name="Picture 4" descr="s2a-rangeline.png"/>
-          <p:cNvPicPr>
-            <a:picLocks noChangeAspect="1"/>
-          </p:cNvPicPr>
-          <p:nvPr/>
-        </p:nvPicPr>
-        <p:blipFill>
-          <a:blip r:embed="rId2"/>
-          <a:stretch>
-            <a:fillRect/>
-          </a:stretch>
-        </p:blipFill>
-        <p:spPr>
-          <a:xfrm>
-            <a:off x="1664208" y="1965960"/>
-            <a:ext cx="8869680" cy="4093698"/>
-          </a:xfrm>
-          <a:prstGeom prst="rect">
-            <a:avLst/>
-          </a:prstGeom>
-        </p:spPr>
-      </p:pic>
-      <p:sp>
-        <p:nvSpPr>
-          <p:cNvPr id="6" name="TextBox 5"/>
+              <a:t>細節與來源見 other-systems-comparison.md，本場不展開。</a:t>
+            </a:r>
+          </a:p>
+        </p:txBody>
+      </p:sp>
+      <p:sp>
+        <p:nvSpPr>
+          <p:cNvPr id="7" name="TextBox 6"/>
           <p:cNvSpPr txBox="1"/>
           <p:nvPr/>
         </p:nvSpPr>
@@ -7259,48 +7737,29 @@
                 <a:solidFill>
                   <a:srgbClr val="185FA5"/>
                 </a:solidFill>
-                <a:latin typeface="Courier New"/>
+                <a:latin typeface="Calibri"/>
+                <a:hlinkClick r:id="rId2"/>
+              </a:rPr>
+              <a:t>MongoDB hello / FCV</a:t>
+            </a:r>
+            <a:r>
+              <a:rPr sz="1200" b="0">
+                <a:solidFill>
+                  <a:srgbClr val="8A8A8A"/>
+                </a:solidFill>
+                <a:latin typeface="Calibri"/>
+              </a:rPr>
+              <a:t>   ·   </a:t>
+            </a:r>
+            <a:r>
+              <a:rPr sz="1200" b="0" u="sng">
+                <a:solidFill>
+                  <a:srgbClr val="185FA5"/>
+                </a:solidFill>
+                <a:latin typeface="Calibri"/>
                 <a:hlinkClick r:id="rId3"/>
               </a:rPr>
-              <a:t>forConsumer/forReplica</a:t>
-            </a:r>
-            <a:r>
-              <a:rPr sz="1200" b="0">
-                <a:solidFill>
-                  <a:srgbClr val="8A8A8A"/>
-                </a:solidFill>
-                <a:latin typeface="Calibri"/>
-              </a:rPr>
-              <a:t>   ·   </a:t>
-            </a:r>
-            <a:r>
-              <a:rPr sz="1200" b="0" u="sng">
-                <a:solidFill>
-                  <a:srgbClr val="185FA5"/>
-                </a:solidFill>
-                <a:latin typeface="Courier New"/>
-                <a:hlinkClick r:id="rId4"/>
-              </a:rPr>
-              <a:t>fetchRequestVersion</a:t>
-            </a:r>
-            <a:r>
-              <a:rPr sz="1200" b="0">
-                <a:solidFill>
-                  <a:srgbClr val="8A8A8A"/>
-                </a:solidFill>
-                <a:latin typeface="Calibri"/>
-              </a:rPr>
-              <a:t>   ·   </a:t>
-            </a:r>
-            <a:r>
-              <a:rPr sz="1200" b="0" u="sng">
-                <a:solidFill>
-                  <a:srgbClr val="185FA5"/>
-                </a:solidFill>
-                <a:latin typeface="Courier New"/>
-                <a:hlinkClick r:id="rId5"/>
-              </a:rPr>
-              <a:t>validVersions</a:t>
+              <a:t>PostgreSQL protocol</a:t>
             </a:r>
           </a:p>
         </p:txBody>
@@ -7352,7 +7811,7 @@
                 </a:solidFill>
                 <a:latin typeface="Calibri"/>
               </a:rPr>
-              <a:t>隨堂考 · 核心</a:t>
+              <a:t>Part 1 · 舉例</a:t>
             </a:r>
           </a:p>
         </p:txBody>
@@ -7365,28 +7824,28 @@
         </p:nvSpPr>
         <p:spPr>
           <a:xfrm>
-            <a:off x="640080" y="841248"/>
-            <a:ext cx="10972800" cy="1188720"/>
-          </a:xfrm>
-          <a:prstGeom prst="rect">
-            <a:avLst/>
-          </a:prstGeom>
-          <a:noFill/>
-        </p:spPr>
-        <p:txBody>
-          <a:bodyPr wrap="square">
-            <a:noAutofit/>
-          </a:bodyPr>
-          <a:lstStyle/>
-          <a:p>
-            <a:r>
-              <a:rPr sz="2600" b="1">
+            <a:off x="640080" y="822960"/>
+            <a:ext cx="10972800" cy="640080"/>
+          </a:xfrm>
+          <a:prstGeom prst="rect">
+            <a:avLst/>
+          </a:prstGeom>
+          <a:noFill/>
+        </p:spPr>
+        <p:txBody>
+          <a:bodyPr wrap="square">
+            <a:noAutofit/>
+          </a:bodyPr>
+          <a:lstStyle/>
+          <a:p>
+            <a:r>
+              <a:rPr sz="2900" b="1">
                 <a:solidFill>
                   <a:srgbClr val="1E2024"/>
                 </a:solidFill>
                 <a:latin typeface="Calibri"/>
               </a:rPr>
-              <a:t>replica fetch（broker↔broker）的 Fetch 版本怎麼決定？</a:t>
+              <a:t>以一支 Fetch 為例：consumer 協商、replica 由 MV</a:t>
             </a:r>
           </a:p>
         </p:txBody>
@@ -7399,84 +7858,56 @@
         </p:nvSpPr>
         <p:spPr>
           <a:xfrm>
-            <a:off x="822960" y="2331720"/>
-            <a:ext cx="10515600" cy="493776"/>
-          </a:xfrm>
-          <a:prstGeom prst="rect">
-            <a:avLst/>
-          </a:prstGeom>
-          <a:noFill/>
-        </p:spPr>
-        <p:txBody>
-          <a:bodyPr wrap="square">
-            <a:noAutofit/>
-          </a:bodyPr>
-          <a:lstStyle/>
-          <a:p>
-            <a:r>
-              <a:rPr sz="1600" b="0">
-                <a:solidFill>
-                  <a:srgbClr val="1E2024"/>
-                </a:solidFill>
-                <a:latin typeface="Calibri"/>
-              </a:rPr>
-              <a:t>A.  </a:t>
-            </a:r>
-            <a:r>
-              <a:rPr sz="1600" b="0">
-                <a:solidFill>
-                  <a:srgbClr val="1E2024"/>
-                </a:solidFill>
-                <a:latin typeface="Calibri"/>
-              </a:rPr>
-              <a:t>兩 broker ApiVersions 協商取交集</a:t>
-            </a:r>
-          </a:p>
-        </p:txBody>
-      </p:sp>
-      <p:sp>
-        <p:nvSpPr>
-          <p:cNvPr id="5" name="TextBox 4"/>
-          <p:cNvSpPr txBox="1"/>
-          <p:nvPr/>
-        </p:nvSpPr>
-        <p:spPr>
-          <a:xfrm>
-            <a:off x="822960" y="2953512"/>
-            <a:ext cx="10515600" cy="493776"/>
-          </a:xfrm>
-          <a:prstGeom prst="rect">
-            <a:avLst/>
-          </a:prstGeom>
-          <a:noFill/>
-        </p:spPr>
-        <p:txBody>
-          <a:bodyPr wrap="square">
-            <a:noAutofit/>
-          </a:bodyPr>
-          <a:lstStyle/>
-          <a:p>
-            <a:r>
-              <a:rPr sz="1600" b="0">
-                <a:solidFill>
-                  <a:srgbClr val="1E2024"/>
-                </a:solidFill>
-                <a:latin typeface="Calibri"/>
-              </a:rPr>
-              <a:t>B.  </a:t>
-            </a:r>
-            <a:r>
-              <a:rPr sz="1600" b="0">
-                <a:solidFill>
-                  <a:srgbClr val="1E2024"/>
-                </a:solidFill>
-                <a:latin typeface="Calibri"/>
-              </a:rPr>
-              <a:t>由 finalized metadata.version 決定</a:t>
-            </a:r>
-          </a:p>
-        </p:txBody>
-      </p:sp>
+            <a:off x="640080" y="1481328"/>
+            <a:ext cx="10972800" cy="365760"/>
+          </a:xfrm>
+          <a:prstGeom prst="rect">
+            <a:avLst/>
+          </a:prstGeom>
+          <a:noFill/>
+        </p:spPr>
+        <p:txBody>
+          <a:bodyPr wrap="square">
+            <a:noAutofit/>
+          </a:bodyPr>
+          <a:lstStyle/>
+          <a:p>
+            <a:r>
+              <a:rPr sz="1400" b="0">
+                <a:solidFill>
+                  <a:srgbClr val="5F5E5A"/>
+                </a:solidFill>
+                <a:latin typeface="Calibri"/>
+              </a:rPr>
+              <a:t>同一支 Fetch 兩種身分：consumer fetch 走 client↔broker、replica fetch 走 broker↔broker</a:t>
+            </a:r>
+          </a:p>
+        </p:txBody>
+      </p:sp>
+      <p:pic>
+        <p:nvPicPr>
+          <p:cNvPr id="5" name="Picture 4" descr="s2a-rangeline.png"/>
+          <p:cNvPicPr>
+            <a:picLocks noChangeAspect="1"/>
+          </p:cNvPicPr>
+          <p:nvPr/>
+        </p:nvPicPr>
+        <p:blipFill>
+          <a:blip r:embed="rId2"/>
+          <a:stretch>
+            <a:fillRect/>
+          </a:stretch>
+        </p:blipFill>
+        <p:spPr>
+          <a:xfrm>
+            <a:off x="1664208" y="1965960"/>
+            <a:ext cx="8869680" cy="4093698"/>
+          </a:xfrm>
+          <a:prstGeom prst="rect">
+            <a:avLst/>
+          </a:prstGeom>
+        </p:spPr>
+      </p:pic>
       <p:sp>
         <p:nvSpPr>
           <p:cNvPr id="6" name="TextBox 5"/>
@@ -7485,114 +7916,76 @@
         </p:nvSpPr>
         <p:spPr>
           <a:xfrm>
-            <a:off x="822960" y="3575304"/>
-            <a:ext cx="10515600" cy="493776"/>
-          </a:xfrm>
-          <a:prstGeom prst="rect">
-            <a:avLst/>
-          </a:prstGeom>
-          <a:noFill/>
-        </p:spPr>
-        <p:txBody>
-          <a:bodyPr wrap="square">
-            <a:noAutofit/>
-          </a:bodyPr>
-          <a:lstStyle/>
-          <a:p>
-            <a:r>
-              <a:rPr sz="1600" b="0">
-                <a:solidFill>
-                  <a:srgbClr val="1E2024"/>
-                </a:solidFill>
-                <a:latin typeface="Calibri"/>
-              </a:rPr>
-              <a:t>C.  </a:t>
-            </a:r>
-            <a:r>
-              <a:rPr sz="1600" b="0">
-                <a:solidFill>
-                  <a:srgbClr val="1E2024"/>
-                </a:solidFill>
-                <a:latin typeface="Calibri"/>
-              </a:rPr>
-              <a:t>永遠用最新版</a:t>
-            </a:r>
-          </a:p>
-        </p:txBody>
-      </p:sp>
-      <p:sp>
-        <p:nvSpPr>
-          <p:cNvPr id="7" name="TextBox 6"/>
-          <p:cNvSpPr txBox="1"/>
-          <p:nvPr/>
-        </p:nvSpPr>
-        <p:spPr>
-          <a:xfrm>
-            <a:off x="822960" y="4197096"/>
-            <a:ext cx="10515600" cy="493776"/>
-          </a:xfrm>
-          <a:prstGeom prst="rect">
-            <a:avLst/>
-          </a:prstGeom>
-          <a:noFill/>
-        </p:spPr>
-        <p:txBody>
-          <a:bodyPr wrap="square">
-            <a:noAutofit/>
-          </a:bodyPr>
-          <a:lstStyle/>
-          <a:p>
-            <a:r>
-              <a:rPr sz="1600" b="0">
-                <a:solidFill>
-                  <a:srgbClr val="1E2024"/>
-                </a:solidFill>
-                <a:latin typeface="Calibri"/>
-              </a:rPr>
-              <a:t>D.  </a:t>
-            </a:r>
-            <a:r>
-              <a:rPr sz="1600" b="0">
-                <a:solidFill>
-                  <a:srgbClr val="1E2024"/>
-                </a:solidFill>
-                <a:latin typeface="Calibri"/>
-              </a:rPr>
-              <a:t>controller 每次指定</a:t>
-            </a:r>
-          </a:p>
-        </p:txBody>
-      </p:sp>
-      <p:sp>
-        <p:nvSpPr>
-          <p:cNvPr id="8" name="TextBox 7"/>
-          <p:cNvSpPr txBox="1"/>
-          <p:nvPr/>
-        </p:nvSpPr>
-        <p:spPr>
-          <a:xfrm>
-            <a:off x="640080" y="4910327"/>
-            <a:ext cx="10972800" cy="914400"/>
-          </a:xfrm>
-          <a:prstGeom prst="rect">
-            <a:avLst/>
-          </a:prstGeom>
-          <a:noFill/>
-        </p:spPr>
-        <p:txBody>
-          <a:bodyPr wrap="square">
-            <a:noAutofit/>
-          </a:bodyPr>
-          <a:lstStyle/>
-          <a:p>
-            <a:r>
-              <a:rPr sz="1400" b="0">
+            <a:off x="640080" y="6400800"/>
+            <a:ext cx="10972800" cy="384048"/>
+          </a:xfrm>
+          <a:prstGeom prst="rect">
+            <a:avLst/>
+          </a:prstGeom>
+          <a:noFill/>
+        </p:spPr>
+        <p:txBody>
+          <a:bodyPr wrap="square">
+            <a:noAutofit/>
+          </a:bodyPr>
+          <a:lstStyle/>
+          <a:p>
+            <a:r>
+              <a:rPr sz="1200" b="1">
                 <a:solidFill>
                   <a:srgbClr val="8A8A8A"/>
                 </a:solidFill>
                 <a:latin typeface="Calibri"/>
               </a:rPr>
-              <a:t>想一想 —— 下一頁公布答案</a:t>
+              <a:t>REF   </a:t>
+            </a:r>
+            <a:r>
+              <a:rPr sz="1200" b="0" u="sng">
+                <a:solidFill>
+                  <a:srgbClr val="185FA5"/>
+                </a:solidFill>
+                <a:latin typeface="Courier New"/>
+                <a:hlinkClick r:id="rId3"/>
+              </a:rPr>
+              <a:t>forConsumer/forReplica</a:t>
+            </a:r>
+            <a:r>
+              <a:rPr sz="1200" b="0">
+                <a:solidFill>
+                  <a:srgbClr val="8A8A8A"/>
+                </a:solidFill>
+                <a:latin typeface="Calibri"/>
+              </a:rPr>
+              <a:t>   ·   </a:t>
+            </a:r>
+            <a:r>
+              <a:rPr sz="1200" b="0" u="sng">
+                <a:solidFill>
+                  <a:srgbClr val="185FA5"/>
+                </a:solidFill>
+                <a:latin typeface="Courier New"/>
+                <a:hlinkClick r:id="rId4"/>
+              </a:rPr>
+              <a:t>fetchRequestVersion</a:t>
+            </a:r>
+            <a:r>
+              <a:rPr sz="1200" b="0">
+                <a:solidFill>
+                  <a:srgbClr val="8A8A8A"/>
+                </a:solidFill>
+                <a:latin typeface="Calibri"/>
+              </a:rPr>
+              <a:t>   ·   </a:t>
+            </a:r>
+            <a:r>
+              <a:rPr sz="1200" b="0" u="sng">
+                <a:solidFill>
+                  <a:srgbClr val="185FA5"/>
+                </a:solidFill>
+                <a:latin typeface="Courier New"/>
+                <a:hlinkClick r:id="rId5"/>
+              </a:rPr>
+              <a:t>validVersions</a:t>
             </a:r>
           </a:p>
         </p:txBody>

--- a/study/version-control/kafka-version-negotiation.pptx
+++ b/study/version-control/kafka-version-negotiation.pptx
@@ -5691,7 +5691,7 @@
                 </a:solidFill>
                 <a:latin typeface="Calibri"/>
               </a:rPr>
-              <a:t>Part 1 — 版本為何要在連線當下決定、又是怎麼選的</a:t>
+              <a:t>Part 1 — 版本為何對不齊，又是怎麼決定的</a:t>
             </a:r>
           </a:p>
         </p:txBody>
@@ -5750,40 +5750,6 @@
                 <a:latin typeface="Calibri"/>
               </a:rPr>
               <a:t>Part 2 — 協商失敗時，會看到什麼訊息</a:t>
-            </a:r>
-          </a:p>
-        </p:txBody>
-      </p:sp>
-      <p:sp>
-        <p:nvSpPr>
-          <p:cNvPr id="8" name="TextBox 7"/>
-          <p:cNvSpPr txBox="1"/>
-          <p:nvPr/>
-        </p:nvSpPr>
-        <p:spPr>
-          <a:xfrm>
-            <a:off x="640080" y="3429000"/>
-            <a:ext cx="10972800" cy="438912"/>
-          </a:xfrm>
-          <a:prstGeom prst="rect">
-            <a:avLst/>
-          </a:prstGeom>
-          <a:noFill/>
-        </p:spPr>
-        <p:txBody>
-          <a:bodyPr wrap="square">
-            <a:noAutofit/>
-          </a:bodyPr>
-          <a:lstStyle/>
-          <a:p>
-            <a:r>
-              <a:rPr sz="1500" b="0">
-                <a:solidFill>
-                  <a:srgbClr val="5F5E5A"/>
-                </a:solidFill>
-                <a:latin typeface="Calibri"/>
-              </a:rPr>
-              <a:t>兩題隨堂考穿插於對應段落；結尾以 Recap 回收開場的問題。</a:t>
             </a:r>
           </a:p>
         </p:txBody>
@@ -6039,40 +6005,6 @@
         </p:nvSpPr>
         <p:spPr>
           <a:xfrm>
-            <a:off x="640080" y="4526280"/>
-            <a:ext cx="10972800" cy="731520"/>
-          </a:xfrm>
-          <a:prstGeom prst="rect">
-            <a:avLst/>
-          </a:prstGeom>
-          <a:noFill/>
-        </p:spPr>
-        <p:txBody>
-          <a:bodyPr wrap="square">
-            <a:noAutofit/>
-          </a:bodyPr>
-          <a:lstStyle/>
-          <a:p>
-            <a:r>
-              <a:rPr sz="1500" b="0">
-                <a:solidFill>
-                  <a:srgbClr val="5F5E5A"/>
-                </a:solidFill>
-                <a:latin typeface="Calibri"/>
-              </a:rPr>
-              <a:t>預告：拆開版本也不是免費的——Kafka 為此揹上每支 API 一組 [min,max] 版本矩陣；MongoDB／PostgreSQL 選擇只維護一個全域版本號。結尾會回來評這筆帳。</a:t>
-            </a:r>
-          </a:p>
-        </p:txBody>
-      </p:sp>
-      <p:sp>
-        <p:nvSpPr>
-          <p:cNvPr id="10" name="TextBox 9"/>
-          <p:cNvSpPr txBox="1"/>
-          <p:nvPr/>
-        </p:nvSpPr>
-        <p:spPr>
-          <a:xfrm>
             <a:off x="640080" y="6400800"/>
             <a:ext cx="10972800" cy="384048"/>
           </a:xfrm>
@@ -6894,7 +6826,7 @@
                 </a:solidFill>
                 <a:latin typeface="Calibri"/>
               </a:rPr>
-              <a:t>三種連線；要協商，先送 ApiVersionsRequest</a:t>
+              <a:t>先認識叢集裡的三種連線</a:t>
             </a:r>
           </a:p>
         </p:txBody>
@@ -6952,7 +6884,7 @@
                 </a:solidFill>
                 <a:latin typeface="Calibri"/>
               </a:rPr>
-              <a:t>連線建立後，發起端先送一支 ApiVersionsRequest，查詢對方「每支 API 支援哪個版本區間？」（KIP-35）</a:t>
+              <a:t>要協商的連線，會在建立後先送一支 ApiVersionsRequest 查詢對方「每支 API 支援哪個版本區間？」（KIP-35）——但不是每條都協商</a:t>
             </a:r>
           </a:p>
         </p:txBody>
@@ -7015,7 +6947,7 @@
                 </a:solidFill>
                 <a:latin typeface="Calibri"/>
               </a:rPr>
-              <a:t>broker ◀▶ broker        partition replication        不查詢（下一張）</a:t>
+              <a:t>broker ◀▶ broker        partition replication        不查詢（下一張說明）</a:t>
             </a:r>
           </a:p>
         </p:txBody>
@@ -7560,74 +7492,35 @@
                 </a:solidFill>
                 <a:latin typeface="Calibri"/>
               </a:rPr>
-              <a:t>同一道題，別家怎麼答</a:t>
-            </a:r>
-          </a:p>
-        </p:txBody>
-      </p:sp>
-      <p:sp>
-        <p:nvSpPr>
-          <p:cNvPr id="4" name="TextBox 3"/>
-          <p:cNvSpPr txBox="1"/>
-          <p:nvPr/>
-        </p:nvSpPr>
-        <p:spPr>
-          <a:xfrm>
-            <a:off x="640080" y="2148840"/>
-            <a:ext cx="10972800" cy="1645920"/>
-          </a:xfrm>
-          <a:prstGeom prst="rect">
-            <a:avLst/>
-          </a:prstGeom>
-          <a:solidFill>
-            <a:srgbClr val="F3F1EC"/>
-          </a:solidFill>
-          <a:ln w="6350">
-            <a:solidFill>
-              <a:srgbClr val="E3E0D8"/>
-            </a:solidFill>
-          </a:ln>
-        </p:spPr>
-        <p:txBody>
-          <a:bodyPr wrap="square" lIns="146304" tIns="91440" bIns="91440">
-            <a:noAutofit/>
-          </a:bodyPr>
-          <a:lstStyle/>
-          <a:p>
-            <a:r>
-              <a:rPr sz="1350" b="0">
-                <a:solidFill>
-                  <a:srgbClr val="2C2C2A"/>
-                </a:solidFill>
-                <a:latin typeface="Calibri"/>
-              </a:rPr>
-              <a:t>Kafka        per-API 協商 + MV 治理 replication      粒度最細、協定面積最大</a:t>
-            </a:r>
-          </a:p>
-          <a:p>
-            <a:r>
-              <a:rPr sz="1350" b="0">
-                <a:solidFill>
-                  <a:srgbClr val="2C2C2A"/>
-                </a:solidFill>
-                <a:latin typeface="Calibri"/>
-              </a:rPr>
-              <a:t>MongoDB      全域 wire version + FCV 治理叢集         FCV ≈ MV，同一套思路</a:t>
-            </a:r>
-          </a:p>
-          <a:p>
-            <a:r>
-              <a:rPr sz="1350" b="0">
-                <a:solidFill>
-                  <a:srgbClr val="2C2C2A"/>
-                </a:solidFill>
-                <a:latin typeface="Calibri"/>
-              </a:rPr>
-              <a:t>PostgreSQL   協定 v3 逾二十年；實體複製鎖 major 版本   複製層無法滾動升級</a:t>
-            </a:r>
-          </a:p>
-        </p:txBody>
-      </p:sp>
+              <a:t>同一道題，別家怎麼答——各付什麼代價</a:t>
+            </a:r>
+          </a:p>
+        </p:txBody>
+      </p:sp>
+      <p:pic>
+        <p:nvPicPr>
+          <p:cNvPr id="4" name="Picture 3" descr="arrows-split.png"/>
+          <p:cNvPicPr>
+            <a:picLocks noChangeAspect="1"/>
+          </p:cNvPicPr>
+          <p:nvPr/>
+        </p:nvPicPr>
+        <p:blipFill>
+          <a:blip r:embed="rId2"/>
+          <a:stretch>
+            <a:fillRect/>
+          </a:stretch>
+        </p:blipFill>
+        <p:spPr>
+          <a:xfrm>
+            <a:off x="658368" y="2176272"/>
+            <a:ext cx="274320" cy="274320"/>
+          </a:xfrm>
+          <a:prstGeom prst="rect">
+            <a:avLst/>
+          </a:prstGeom>
+        </p:spPr>
+      </p:pic>
       <p:sp>
         <p:nvSpPr>
           <p:cNvPr id="5" name="TextBox 4"/>
@@ -7636,7 +7529,157 @@
         </p:nvSpPr>
         <p:spPr>
           <a:xfrm>
-            <a:off x="640080" y="3995928"/>
+            <a:off x="1078992" y="2148840"/>
+            <a:ext cx="10515600" cy="841248"/>
+          </a:xfrm>
+          <a:prstGeom prst="rect">
+            <a:avLst/>
+          </a:prstGeom>
+          <a:noFill/>
+        </p:spPr>
+        <p:txBody>
+          <a:bodyPr wrap="square">
+            <a:noAutofit/>
+          </a:bodyPr>
+          <a:lstStyle/>
+          <a:p>
+            <a:r>
+              <a:rPr sz="1650" b="0">
+                <a:solidFill>
+                  <a:srgbClr val="1E2024"/>
+                </a:solidFill>
+                <a:latin typeface="Calibri"/>
+              </a:rPr>
+              <a:t>Kafka：per-API 協商＋MV 治理 replication。買到單支 API 獨立演進、複製層可線上滾動升級；代價＝協定面積最大、相容性測試按 API 數放大</a:t>
+            </a:r>
+          </a:p>
+        </p:txBody>
+      </p:sp>
+      <p:pic>
+        <p:nvPicPr>
+          <p:cNvPr id="6" name="Picture 5" descr="database.png"/>
+          <p:cNvPicPr>
+            <a:picLocks noChangeAspect="1"/>
+          </p:cNvPicPr>
+          <p:nvPr/>
+        </p:nvPicPr>
+        <p:blipFill>
+          <a:blip r:embed="rId3"/>
+          <a:stretch>
+            <a:fillRect/>
+          </a:stretch>
+        </p:blipFill>
+        <p:spPr>
+          <a:xfrm>
+            <a:off x="658368" y="3163824"/>
+            <a:ext cx="274320" cy="274320"/>
+          </a:xfrm>
+          <a:prstGeom prst="rect">
+            <a:avLst/>
+          </a:prstGeom>
+        </p:spPr>
+      </p:pic>
+      <p:sp>
+        <p:nvSpPr>
+          <p:cNvPr id="7" name="TextBox 6"/>
+          <p:cNvSpPr txBox="1"/>
+          <p:nvPr/>
+        </p:nvSpPr>
+        <p:spPr>
+          <a:xfrm>
+            <a:off x="1078992" y="3136392"/>
+            <a:ext cx="10515600" cy="841248"/>
+          </a:xfrm>
+          <a:prstGeom prst="rect">
+            <a:avLst/>
+          </a:prstGeom>
+          <a:noFill/>
+        </p:spPr>
+        <p:txBody>
+          <a:bodyPr wrap="square">
+            <a:noAutofit/>
+          </a:bodyPr>
+          <a:lstStyle/>
+          <a:p>
+            <a:r>
+              <a:rPr sz="1650" b="0">
+                <a:solidFill>
+                  <a:srgbClr val="1E2024"/>
+                </a:solidFill>
+                <a:latin typeface="Calibri"/>
+              </a:rPr>
+              <a:t>MongoDB：全域一個 wire version＋FCV 治理叢集。實作簡單；代價＝粒度粗、無法單支 API 獨立演進（FCV 與 MV 同一套思路）</a:t>
+            </a:r>
+          </a:p>
+        </p:txBody>
+      </p:sp>
+      <p:pic>
+        <p:nvPicPr>
+          <p:cNvPr id="8" name="Picture 7" descr="leaf.png"/>
+          <p:cNvPicPr>
+            <a:picLocks noChangeAspect="1"/>
+          </p:cNvPicPr>
+          <p:nvPr/>
+        </p:nvPicPr>
+        <p:blipFill>
+          <a:blip r:embed="rId4"/>
+          <a:stretch>
+            <a:fillRect/>
+          </a:stretch>
+        </p:blipFill>
+        <p:spPr>
+          <a:xfrm>
+            <a:off x="658368" y="4151376"/>
+            <a:ext cx="274320" cy="274320"/>
+          </a:xfrm>
+          <a:prstGeom prst="rect">
+            <a:avLst/>
+          </a:prstGeom>
+        </p:spPr>
+      </p:pic>
+      <p:sp>
+        <p:nvSpPr>
+          <p:cNvPr id="9" name="TextBox 8"/>
+          <p:cNvSpPr txBox="1"/>
+          <p:nvPr/>
+        </p:nvSpPr>
+        <p:spPr>
+          <a:xfrm>
+            <a:off x="1078992" y="4123944"/>
+            <a:ext cx="10515600" cy="841248"/>
+          </a:xfrm>
+          <a:prstGeom prst="rect">
+            <a:avLst/>
+          </a:prstGeom>
+          <a:noFill/>
+        </p:spPr>
+        <p:txBody>
+          <a:bodyPr wrap="square">
+            <a:noAutofit/>
+          </a:bodyPr>
+          <a:lstStyle/>
+          <a:p>
+            <a:r>
+              <a:rPr sz="1650" b="0">
+                <a:solidFill>
+                  <a:srgbClr val="1E2024"/>
+                </a:solidFill>
+                <a:latin typeface="Calibri"/>
+              </a:rPr>
+              <a:t>PostgreSQL：協定 v3 逾二十年極穩定；但實體複製鎖 major → 複製層無法線上滾動升級（得停機 pg_upgrade 或另建叢集）</a:t>
+            </a:r>
+          </a:p>
+        </p:txBody>
+      </p:sp>
+      <p:sp>
+        <p:nvSpPr>
+          <p:cNvPr id="10" name="TextBox 9"/>
+          <p:cNvSpPr txBox="1"/>
+          <p:nvPr/>
+        </p:nvSpPr>
+        <p:spPr>
+          <a:xfrm>
+            <a:off x="640080" y="5111496"/>
             <a:ext cx="10972800" cy="877824"/>
           </a:xfrm>
           <a:prstGeom prst="rect">
@@ -7662,48 +7705,14 @@
                 </a:solidFill>
                 <a:latin typeface="Calibri"/>
               </a:rPr>
-              <a:t>PostgreSQL 就是「複製層不做版本治理」的反事實——Kafka 的 MV 買到的，正是 PostgreSQL 買不到的線上滾動升級</a:t>
-            </a:r>
-          </a:p>
-        </p:txBody>
-      </p:sp>
-      <p:sp>
-        <p:nvSpPr>
-          <p:cNvPr id="6" name="TextBox 5"/>
-          <p:cNvSpPr txBox="1"/>
-          <p:nvPr/>
-        </p:nvSpPr>
-        <p:spPr>
-          <a:xfrm>
-            <a:off x="640080" y="5056632"/>
-            <a:ext cx="10972800" cy="438912"/>
-          </a:xfrm>
-          <a:prstGeom prst="rect">
-            <a:avLst/>
-          </a:prstGeom>
-          <a:noFill/>
-        </p:spPr>
-        <p:txBody>
-          <a:bodyPr wrap="square">
-            <a:noAutofit/>
-          </a:bodyPr>
-          <a:lstStyle/>
-          <a:p>
-            <a:r>
-              <a:rPr sz="1500" b="0">
-                <a:solidFill>
-                  <a:srgbClr val="5F5E5A"/>
-                </a:solidFill>
-                <a:latin typeface="Calibri"/>
-              </a:rPr>
-              <a:t>細節與來源見 other-systems-comparison.md，本場不展開。</a:t>
-            </a:r>
-          </a:p>
-        </p:txBody>
-      </p:sp>
-      <p:sp>
-        <p:nvSpPr>
-          <p:cNvPr id="7" name="TextBox 6"/>
+              <a:t>沒有免費的選擇：Kafka 拿協定複雜度換到細粒度演進＋複製層線上升級——後者正是 PostgreSQL 買不到的</a:t>
+            </a:r>
+          </a:p>
+        </p:txBody>
+      </p:sp>
+      <p:sp>
+        <p:nvSpPr>
+          <p:cNvPr id="11" name="TextBox 10"/>
           <p:cNvSpPr txBox="1"/>
           <p:nvPr/>
         </p:nvSpPr>
@@ -7738,7 +7747,7 @@
                   <a:srgbClr val="185FA5"/>
                 </a:solidFill>
                 <a:latin typeface="Calibri"/>
-                <a:hlinkClick r:id="rId2"/>
+                <a:hlinkClick r:id="rId5"/>
               </a:rPr>
               <a:t>MongoDB hello / FCV</a:t>
             </a:r>
@@ -7757,7 +7766,7 @@
                   <a:srgbClr val="185FA5"/>
                 </a:solidFill>
                 <a:latin typeface="Calibri"/>
-                <a:hlinkClick r:id="rId3"/>
+                <a:hlinkClick r:id="rId6"/>
               </a:rPr>
               <a:t>PostgreSQL protocol</a:t>
             </a:r>

--- a/study/version-control/kafka-version-negotiation.pptx
+++ b/study/version-control/kafka-version-negotiation.pptx
@@ -20,7 +20,6 @@
     <p:sldId id="268" r:id="rId19"/>
     <p:sldId id="269" r:id="rId20"/>
     <p:sldId id="270" r:id="rId21"/>
-    <p:sldId id="271" r:id="rId22"/>
   </p:sldIdLst>
   <p:sldSz cx="12191695" cy="6858000" type="screen4x3"/>
   <p:notesSz cx="6858000" cy="9144000"/>
@@ -3329,7 +3328,7 @@
                 </a:solidFill>
                 <a:latin typeface="Calibri"/>
               </a:rPr>
-              <a:t>隨堂考 · 核心</a:t>
+              <a:t>隨堂考 · 核心　（正解）</a:t>
             </a:r>
           </a:p>
         </p:txBody>
@@ -3425,31 +3424,36 @@
           <a:prstGeom prst="rect">
             <a:avLst/>
           </a:prstGeom>
-          <a:noFill/>
-        </p:spPr>
-        <p:txBody>
-          <a:bodyPr wrap="square">
-            <a:noAutofit/>
-          </a:bodyPr>
-          <a:lstStyle/>
-          <a:p>
-            <a:r>
-              <a:rPr sz="1600" b="0">
-                <a:solidFill>
-                  <a:srgbClr val="1E2024"/>
+          <a:solidFill>
+            <a:srgbClr val="E9F3DE"/>
+          </a:solidFill>
+          <a:ln>
+            <a:noFill/>
+          </a:ln>
+        </p:spPr>
+        <p:txBody>
+          <a:bodyPr wrap="square" lIns="128016" tIns="54864">
+            <a:noAutofit/>
+          </a:bodyPr>
+          <a:lstStyle/>
+          <a:p>
+            <a:r>
+              <a:rPr sz="1600" b="1">
+                <a:solidFill>
+                  <a:srgbClr val="27500A"/>
                 </a:solidFill>
                 <a:latin typeface="Calibri"/>
               </a:rPr>
               <a:t>B.  </a:t>
             </a:r>
             <a:r>
-              <a:rPr sz="1600" b="0">
-                <a:solidFill>
-                  <a:srgbClr val="1E2024"/>
-                </a:solidFill>
-                <a:latin typeface="Calibri"/>
-              </a:rPr>
-              <a:t>由 finalized metadata.version 決定</a:t>
+              <a:rPr sz="1600" b="1">
+                <a:solidFill>
+                  <a:srgbClr val="27500A"/>
+                </a:solidFill>
+                <a:latin typeface="Calibri"/>
+              </a:rPr>
+              <a:t>由 finalized metadata.version 決定   ✓</a:t>
             </a:r>
           </a:p>
         </p:txBody>
@@ -3563,13 +3567,85 @@
           <a:lstStyle/>
           <a:p>
             <a:r>
+              <a:rPr sz="1400" b="1">
+                <a:solidFill>
+                  <a:srgbClr val="27500A"/>
+                </a:solidFill>
+                <a:latin typeface="Calibri"/>
+              </a:rPr>
+              <a:t>正解 B — </a:t>
+            </a:r>
+            <a:r>
               <a:rPr sz="1400" b="0">
                 <a:solidFill>
+                  <a:srgbClr val="1E2024"/>
+                </a:solidFill>
+                <a:latin typeface="Calibri"/>
+              </a:rPr>
+              <a:t>fetchRequestVersion(MV)：MV 是集中共識，不做 per-connection 協商。</a:t>
+            </a:r>
+          </a:p>
+        </p:txBody>
+      </p:sp>
+      <p:sp>
+        <p:nvSpPr>
+          <p:cNvPr id="9" name="TextBox 8"/>
+          <p:cNvSpPr txBox="1"/>
+          <p:nvPr/>
+        </p:nvSpPr>
+        <p:spPr>
+          <a:xfrm>
+            <a:off x="640080" y="6400800"/>
+            <a:ext cx="10972800" cy="384048"/>
+          </a:xfrm>
+          <a:prstGeom prst="rect">
+            <a:avLst/>
+          </a:prstGeom>
+          <a:noFill/>
+        </p:spPr>
+        <p:txBody>
+          <a:bodyPr wrap="square">
+            <a:noAutofit/>
+          </a:bodyPr>
+          <a:lstStyle/>
+          <a:p>
+            <a:r>
+              <a:rPr sz="1200" b="1">
+                <a:solidFill>
                   <a:srgbClr val="8A8A8A"/>
                 </a:solidFill>
                 <a:latin typeface="Calibri"/>
               </a:rPr>
-              <a:t>想一想 —— 下一頁公布答案</a:t>
+              <a:t>REF   </a:t>
+            </a:r>
+            <a:r>
+              <a:rPr sz="1200" b="0" u="sng">
+                <a:solidFill>
+                  <a:srgbClr val="185FA5"/>
+                </a:solidFill>
+                <a:latin typeface="Courier New"/>
+                <a:hlinkClick r:id="rId2"/>
+              </a:rPr>
+              <a:t>RemoteLeaderEndPoint.scala:215</a:t>
+            </a:r>
+            <a:r>
+              <a:rPr sz="1200" b="0">
+                <a:solidFill>
+                  <a:srgbClr val="8A8A8A"/>
+                </a:solidFill>
+                <a:latin typeface="Calibri"/>
+              </a:rPr>
+              <a:t>   ·   </a:t>
+            </a:r>
+            <a:r>
+              <a:rPr sz="1200" b="0" u="sng">
+                <a:solidFill>
+                  <a:srgbClr val="185FA5"/>
+                </a:solidFill>
+                <a:latin typeface="Courier New"/>
+                <a:hlinkClick r:id="rId3"/>
+              </a:rPr>
+              <a:t>MetadataVersion.java:273</a:t>
             </a:r>
           </a:p>
         </p:txBody>
@@ -3621,7 +3697,7 @@
                 </a:solidFill>
                 <a:latin typeface="Calibri"/>
               </a:rPr>
-              <a:t>隨堂考 · 核心　（正解）</a:t>
+              <a:t>Part 2 · 失敗訊息</a:t>
             </a:r>
           </a:p>
         </p:txBody>
@@ -3635,7 +3711,7 @@
         <p:spPr>
           <a:xfrm>
             <a:off x="640080" y="841248"/>
-            <a:ext cx="10972800" cy="1188720"/>
+            <a:ext cx="10972800" cy="1005840"/>
           </a:xfrm>
           <a:prstGeom prst="rect">
             <a:avLst/>
@@ -3649,13 +3725,13 @@
           <a:lstStyle/>
           <a:p>
             <a:r>
-              <a:rPr sz="2600" b="1">
+              <a:rPr sz="3200" b="1">
                 <a:solidFill>
                   <a:srgbClr val="1E2024"/>
                 </a:solidFill>
                 <a:latin typeface="Calibri"/>
               </a:rPr>
-              <a:t>replica fetch（broker↔broker）的 Fetch 版本怎麼決定？</a:t>
+              <a:t>通訊當下協商不出版本，會看到什麼</a:t>
             </a:r>
           </a:p>
         </p:txBody>
@@ -3668,7 +3744,94 @@
         </p:nvSpPr>
         <p:spPr>
           <a:xfrm>
-            <a:off x="822960" y="2331720"/>
+            <a:off x="640080" y="2148840"/>
+            <a:ext cx="10972800" cy="1371600"/>
+          </a:xfrm>
+          <a:prstGeom prst="rect">
+            <a:avLst/>
+          </a:prstGeom>
+          <a:solidFill>
+            <a:srgbClr val="F3F1EC"/>
+          </a:solidFill>
+          <a:ln w="6350">
+            <a:solidFill>
+              <a:srgbClr val="E3E0D8"/>
+            </a:solidFill>
+          </a:ln>
+        </p:spPr>
+        <p:txBody>
+          <a:bodyPr wrap="square" lIns="146304" tIns="91440" bIns="91440">
+            <a:noAutofit/>
+          </a:bodyPr>
+          <a:lstStyle/>
+          <a:p>
+            <a:r>
+              <a:rPr sz="1350" b="0">
+                <a:solidFill>
+                  <a:srgbClr val="2C2C2A"/>
+                </a:solidFill>
+                <a:latin typeface="Calibri"/>
+              </a:rPr>
+              <a:t>交集空              → client 端 UnsupportedVersionException（送出前 abort）</a:t>
+            </a:r>
+          </a:p>
+          <a:p>
+            <a:r>
+              <a:rPr sz="1350" b="0">
+                <a:solidFill>
+                  <a:srgbClr val="2C2C2A"/>
+                </a:solidFill>
+                <a:latin typeface="Calibri"/>
+              </a:rPr>
+              <a:t>直送不支援的版本    → broker 丟 UnsupportedVersionException、關閉連線</a:t>
+            </a:r>
+          </a:p>
+          <a:p>
+            <a:r>
+              <a:rPr sz="1350" b="0">
+                <a:solidFill>
+                  <a:srgbClr val="2C2C2A"/>
+                </a:solidFill>
+                <a:latin typeface="Calibri"/>
+              </a:rPr>
+              <a:t>（ApiVersions 例外：回 v0 + UNSUPPORTED_VERSION 錯誤碼）</a:t>
+            </a:r>
+          </a:p>
+        </p:txBody>
+      </p:sp>
+      <p:pic>
+        <p:nvPicPr>
+          <p:cNvPr id="5" name="Picture 4" descr="ban.png"/>
+          <p:cNvPicPr>
+            <a:picLocks noChangeAspect="1"/>
+          </p:cNvPicPr>
+          <p:nvPr/>
+        </p:nvPicPr>
+        <p:blipFill>
+          <a:blip r:embed="rId2"/>
+          <a:stretch>
+            <a:fillRect/>
+          </a:stretch>
+        </p:blipFill>
+        <p:spPr>
+          <a:xfrm>
+            <a:off x="658368" y="3749040"/>
+            <a:ext cx="274320" cy="274320"/>
+          </a:xfrm>
+          <a:prstGeom prst="rect">
+            <a:avLst/>
+          </a:prstGeom>
+        </p:spPr>
+      </p:pic>
+      <p:sp>
+        <p:nvSpPr>
+          <p:cNvPr id="6" name="TextBox 5"/>
+          <p:cNvSpPr txBox="1"/>
+          <p:nvPr/>
+        </p:nvSpPr>
+        <p:spPr>
+          <a:xfrm>
+            <a:off x="1078992" y="3721608"/>
             <a:ext cx="10515600" cy="493776"/>
           </a:xfrm>
           <a:prstGeom prst="rect">
@@ -3683,113 +3846,13 @@
           <a:lstStyle/>
           <a:p>
             <a:r>
-              <a:rPr sz="1600" b="0">
+              <a:rPr sz="1650" b="0">
                 <a:solidFill>
                   <a:srgbClr val="1E2024"/>
                 </a:solidFill>
                 <a:latin typeface="Calibri"/>
               </a:rPr>
-              <a:t>A.  </a:t>
-            </a:r>
-            <a:r>
-              <a:rPr sz="1600" b="0">
-                <a:solidFill>
-                  <a:srgbClr val="1E2024"/>
-                </a:solidFill>
-                <a:latin typeface="Calibri"/>
-              </a:rPr>
-              <a:t>兩 broker ApiVersions 協商取交集</a:t>
-            </a:r>
-          </a:p>
-        </p:txBody>
-      </p:sp>
-      <p:sp>
-        <p:nvSpPr>
-          <p:cNvPr id="5" name="TextBox 4"/>
-          <p:cNvSpPr txBox="1"/>
-          <p:nvPr/>
-        </p:nvSpPr>
-        <p:spPr>
-          <a:xfrm>
-            <a:off x="822960" y="2953512"/>
-            <a:ext cx="10515600" cy="493776"/>
-          </a:xfrm>
-          <a:prstGeom prst="rect">
-            <a:avLst/>
-          </a:prstGeom>
-          <a:solidFill>
-            <a:srgbClr val="E9F3DE"/>
-          </a:solidFill>
-          <a:ln>
-            <a:noFill/>
-          </a:ln>
-        </p:spPr>
-        <p:txBody>
-          <a:bodyPr wrap="square" lIns="128016" tIns="54864">
-            <a:noAutofit/>
-          </a:bodyPr>
-          <a:lstStyle/>
-          <a:p>
-            <a:r>
-              <a:rPr sz="1600" b="1">
-                <a:solidFill>
-                  <a:srgbClr val="27500A"/>
-                </a:solidFill>
-                <a:latin typeface="Calibri"/>
-              </a:rPr>
-              <a:t>B.  </a:t>
-            </a:r>
-            <a:r>
-              <a:rPr sz="1600" b="1">
-                <a:solidFill>
-                  <a:srgbClr val="27500A"/>
-                </a:solidFill>
-                <a:latin typeface="Calibri"/>
-              </a:rPr>
-              <a:t>由 finalized metadata.version 決定   ✓</a:t>
-            </a:r>
-          </a:p>
-        </p:txBody>
-      </p:sp>
-      <p:sp>
-        <p:nvSpPr>
-          <p:cNvPr id="6" name="TextBox 5"/>
-          <p:cNvSpPr txBox="1"/>
-          <p:nvPr/>
-        </p:nvSpPr>
-        <p:spPr>
-          <a:xfrm>
-            <a:off x="822960" y="3575304"/>
-            <a:ext cx="10515600" cy="493776"/>
-          </a:xfrm>
-          <a:prstGeom prst="rect">
-            <a:avLst/>
-          </a:prstGeom>
-          <a:noFill/>
-        </p:spPr>
-        <p:txBody>
-          <a:bodyPr wrap="square">
-            <a:noAutofit/>
-          </a:bodyPr>
-          <a:lstStyle/>
-          <a:p>
-            <a:r>
-              <a:rPr sz="1600" b="0">
-                <a:solidFill>
-                  <a:srgbClr val="1E2024"/>
-                </a:solidFill>
-                <a:latin typeface="Calibri"/>
-              </a:rPr>
-              <a:t>C.  </a:t>
-            </a:r>
-            <a:r>
-              <a:rPr sz="1600" b="0">
-                <a:solidFill>
-                  <a:srgbClr val="1E2024"/>
-                </a:solidFill>
-                <a:latin typeface="Calibri"/>
-              </a:rPr>
-              <a:t>永遠用最新版</a:t>
+              <a:t>多數情況 client 在送出前就本地中止，根本沒上網路</a:t>
             </a:r>
           </a:p>
         </p:txBody>
@@ -3797,92 +3860,6 @@
       <p:sp>
         <p:nvSpPr>
           <p:cNvPr id="7" name="TextBox 6"/>
-          <p:cNvSpPr txBox="1"/>
-          <p:nvPr/>
-        </p:nvSpPr>
-        <p:spPr>
-          <a:xfrm>
-            <a:off x="822960" y="4197096"/>
-            <a:ext cx="10515600" cy="493776"/>
-          </a:xfrm>
-          <a:prstGeom prst="rect">
-            <a:avLst/>
-          </a:prstGeom>
-          <a:noFill/>
-        </p:spPr>
-        <p:txBody>
-          <a:bodyPr wrap="square">
-            <a:noAutofit/>
-          </a:bodyPr>
-          <a:lstStyle/>
-          <a:p>
-            <a:r>
-              <a:rPr sz="1600" b="0">
-                <a:solidFill>
-                  <a:srgbClr val="1E2024"/>
-                </a:solidFill>
-                <a:latin typeface="Calibri"/>
-              </a:rPr>
-              <a:t>D.  </a:t>
-            </a:r>
-            <a:r>
-              <a:rPr sz="1600" b="0">
-                <a:solidFill>
-                  <a:srgbClr val="1E2024"/>
-                </a:solidFill>
-                <a:latin typeface="Calibri"/>
-              </a:rPr>
-              <a:t>controller 每次指定</a:t>
-            </a:r>
-          </a:p>
-        </p:txBody>
-      </p:sp>
-      <p:sp>
-        <p:nvSpPr>
-          <p:cNvPr id="8" name="TextBox 7"/>
-          <p:cNvSpPr txBox="1"/>
-          <p:nvPr/>
-        </p:nvSpPr>
-        <p:spPr>
-          <a:xfrm>
-            <a:off x="640080" y="4910327"/>
-            <a:ext cx="10972800" cy="914400"/>
-          </a:xfrm>
-          <a:prstGeom prst="rect">
-            <a:avLst/>
-          </a:prstGeom>
-          <a:noFill/>
-        </p:spPr>
-        <p:txBody>
-          <a:bodyPr wrap="square">
-            <a:noAutofit/>
-          </a:bodyPr>
-          <a:lstStyle/>
-          <a:p>
-            <a:r>
-              <a:rPr sz="1400" b="1">
-                <a:solidFill>
-                  <a:srgbClr val="27500A"/>
-                </a:solidFill>
-                <a:latin typeface="Calibri"/>
-              </a:rPr>
-              <a:t>正解 B — </a:t>
-            </a:r>
-            <a:r>
-              <a:rPr sz="1400" b="0">
-                <a:solidFill>
-                  <a:srgbClr val="1E2024"/>
-                </a:solidFill>
-                <a:latin typeface="Calibri"/>
-              </a:rPr>
-              <a:t>fetchRequestVersion(MV)：MV 是集中共識，不做 per-connection 協商。</a:t>
-            </a:r>
-          </a:p>
-        </p:txBody>
-      </p:sp>
-      <p:sp>
-        <p:nvSpPr>
-          <p:cNvPr id="9" name="TextBox 8"/>
           <p:cNvSpPr txBox="1"/>
           <p:nvPr/>
         </p:nvSpPr>
@@ -3917,9 +3894,9 @@
                   <a:srgbClr val="185FA5"/>
                 </a:solidFill>
                 <a:latin typeface="Courier New"/>
-                <a:hlinkClick r:id="rId2"/>
-              </a:rPr>
-              <a:t>RemoteLeaderEndPoint.scala:215</a:t>
+                <a:hlinkClick r:id="rId3"/>
+              </a:rPr>
+              <a:t>latestUsableVersion</a:t>
             </a:r>
             <a:r>
               <a:rPr sz="1200" b="0">
@@ -3936,9 +3913,28 @@
                   <a:srgbClr val="185FA5"/>
                 </a:solidFill>
                 <a:latin typeface="Courier New"/>
-                <a:hlinkClick r:id="rId3"/>
-              </a:rPr>
-              <a:t>MetadataVersion.java:273</a:t>
+                <a:hlinkClick r:id="rId4"/>
+              </a:rPr>
+              <a:t>NetworkClient</a:t>
+            </a:r>
+            <a:r>
+              <a:rPr sz="1200" b="0">
+                <a:solidFill>
+                  <a:srgbClr val="8A8A8A"/>
+                </a:solidFill>
+                <a:latin typeface="Calibri"/>
+              </a:rPr>
+              <a:t>   ·   </a:t>
+            </a:r>
+            <a:r>
+              <a:rPr sz="1200" b="0" u="sng">
+                <a:solidFill>
+                  <a:srgbClr val="185FA5"/>
+                </a:solidFill>
+                <a:latin typeface="Courier New"/>
+                <a:hlinkClick r:id="rId5"/>
+              </a:rPr>
+              <a:t>RequestContext</a:t>
             </a:r>
           </a:p>
         </p:txBody>
@@ -4024,21 +4020,79 @@
                 </a:solidFill>
                 <a:latin typeface="Calibri"/>
               </a:rPr>
-              <a:t>通訊當下協商不出版本，會看到什麼</a:t>
-            </a:r>
-          </a:p>
-        </p:txBody>
-      </p:sp>
-      <p:sp>
-        <p:nvSpPr>
-          <p:cNvPr id="4" name="TextBox 3"/>
-          <p:cNvSpPr txBox="1"/>
-          <p:nvPr/>
-        </p:nvSpPr>
-        <p:spPr>
-          <a:xfrm>
-            <a:off x="640080" y="2148840"/>
-            <a:ext cx="10972800" cy="1371600"/>
+              <a:t>版本截斷：為什麼「升一點點」不夠</a:t>
+            </a:r>
+          </a:p>
+        </p:txBody>
+      </p:sp>
+      <p:pic>
+        <p:nvPicPr>
+          <p:cNvPr id="4" name="Picture 3" descr="alert-triangle.png"/>
+          <p:cNvPicPr>
+            <a:picLocks noChangeAspect="1"/>
+          </p:cNvPicPr>
+          <p:nvPr/>
+        </p:nvPicPr>
+        <p:blipFill>
+          <a:blip r:embed="rId2"/>
+          <a:stretch>
+            <a:fillRect/>
+          </a:stretch>
+        </p:blipFill>
+        <p:spPr>
+          <a:xfrm>
+            <a:off x="658368" y="2176272"/>
+            <a:ext cx="274320" cy="274320"/>
+          </a:xfrm>
+          <a:prstGeom prst="rect">
+            <a:avLst/>
+          </a:prstGeom>
+        </p:spPr>
+      </p:pic>
+      <p:sp>
+        <p:nvSpPr>
+          <p:cNvPr id="5" name="TextBox 4"/>
+          <p:cNvSpPr txBox="1"/>
+          <p:nvPr/>
+        </p:nvSpPr>
+        <p:spPr>
+          <a:xfrm>
+            <a:off x="1078992" y="2148840"/>
+            <a:ext cx="10515600" cy="493776"/>
+          </a:xfrm>
+          <a:prstGeom prst="rect">
+            <a:avLst/>
+          </a:prstGeom>
+          <a:noFill/>
+        </p:spPr>
+        <p:txBody>
+          <a:bodyPr wrap="square">
+            <a:noAutofit/>
+          </a:bodyPr>
+          <a:lstStyle/>
+          <a:p>
+            <a:r>
+              <a:rPr sz="1650" b="0">
+                <a:solidFill>
+                  <a:srgbClr val="1E2024"/>
+                </a:solidFill>
+                <a:latin typeface="Calibri"/>
+              </a:rPr>
+              <a:t>前一頁「交集空」最容易被忽略的根因——舊 wire 版本被整批移除</a:t>
+            </a:r>
+          </a:p>
+        </p:txBody>
+      </p:sp>
+      <p:sp>
+        <p:nvSpPr>
+          <p:cNvPr id="6" name="TextBox 5"/>
+          <p:cNvSpPr txBox="1"/>
+          <p:nvPr/>
+        </p:nvSpPr>
+        <p:spPr>
+          <a:xfrm>
+            <a:off x="640080" y="2788920"/>
+            <a:ext cx="10972800" cy="822959"/>
           </a:xfrm>
           <a:prstGeom prst="rect">
             <a:avLst/>
@@ -4065,7 +4119,7 @@
                 </a:solidFill>
                 <a:latin typeface="Calibri"/>
               </a:rPr>
-              <a:t>交集空              → client 端 UnsupportedVersionException（送出前 abort）</a:t>
+              <a:t>舊 wire API version 被整個移除，min 可 &gt; 0</a:t>
             </a:r>
           </a:p>
           <a:p>
@@ -4076,56 +4130,60 @@
                 </a:solidFill>
                 <a:latin typeface="Calibri"/>
               </a:rPr>
-              <a:t>直送不支援的版本    → broker 丟 UnsupportedVersionException、關閉連線</a:t>
-            </a:r>
-          </a:p>
-          <a:p>
-            <a:r>
-              <a:rPr sz="1350" b="0">
-                <a:solidFill>
-                  <a:srgbClr val="2C2C2A"/>
-                </a:solidFill>
-                <a:latin typeface="Calibri"/>
-              </a:rPr>
-              <a:t>（ApiVersions 例外：回 v0 + UNSUPPORTED_VERSION 錯誤碼）</a:t>
-            </a:r>
-          </a:p>
-        </p:txBody>
-      </p:sp>
-      <p:pic>
-        <p:nvPicPr>
-          <p:cNvPr id="5" name="Picture 4" descr="ban.png"/>
-          <p:cNvPicPr>
-            <a:picLocks noChangeAspect="1"/>
-          </p:cNvPicPr>
-          <p:nvPr/>
-        </p:nvPicPr>
-        <p:blipFill>
-          <a:blip r:embed="rId2"/>
-          <a:stretch>
-            <a:fillRect/>
-          </a:stretch>
-        </p:blipFill>
-        <p:spPr>
-          <a:xfrm>
-            <a:off x="658368" y="3749040"/>
-            <a:ext cx="274320" cy="274320"/>
-          </a:xfrm>
-          <a:prstGeom prst="rect">
-            <a:avLst/>
-          </a:prstGeom>
-        </p:spPr>
-      </p:pic>
-      <p:sp>
-        <p:nvSpPr>
-          <p:cNvPr id="6" name="TextBox 5"/>
-          <p:cNvSpPr txBox="1"/>
-          <p:nvPr/>
-        </p:nvSpPr>
-        <p:spPr>
-          <a:xfrm>
-            <a:off x="1078992" y="3721608"/>
-            <a:ext cx="10515600" cy="493776"/>
+              <a:t>  Fetch：4–18（v0–3 在 4.0 移除）</a:t>
+            </a:r>
+          </a:p>
+        </p:txBody>
+      </p:sp>
+      <p:sp>
+        <p:nvSpPr>
+          <p:cNvPr id="7" name="TextBox 6"/>
+          <p:cNvSpPr txBox="1"/>
+          <p:nvPr/>
+        </p:nvSpPr>
+        <p:spPr>
+          <a:xfrm>
+            <a:off x="640080" y="3813048"/>
+            <a:ext cx="10972800" cy="877824"/>
+          </a:xfrm>
+          <a:prstGeom prst="rect">
+            <a:avLst/>
+          </a:prstGeom>
+          <a:solidFill>
+            <a:srgbClr val="E9F3DE"/>
+          </a:solidFill>
+          <a:ln>
+            <a:noFill/>
+          </a:ln>
+        </p:spPr>
+        <p:txBody>
+          <a:bodyPr wrap="square" lIns="146304" tIns="82296">
+            <a:noAutofit/>
+          </a:bodyPr>
+          <a:lstStyle/>
+          <a:p>
+            <a:r>
+              <a:rPr sz="1500" b="0">
+                <a:solidFill>
+                  <a:srgbClr val="27500A"/>
+                </a:solidFill>
+                <a:latin typeface="Calibri"/>
+              </a:rPr>
+              <a:t>解法：升任一端到 4.0 前，先確認另一端 ≥ 2.1（upgrade guide 明訂雙向要求），否則協商結果沒有可用版本</a:t>
+            </a:r>
+          </a:p>
+        </p:txBody>
+      </p:sp>
+      <p:sp>
+        <p:nvSpPr>
+          <p:cNvPr id="8" name="TextBox 7"/>
+          <p:cNvSpPr txBox="1"/>
+          <p:nvPr/>
+        </p:nvSpPr>
+        <p:spPr>
+          <a:xfrm>
+            <a:off x="640080" y="4873752"/>
+            <a:ext cx="10972800" cy="731520"/>
           </a:xfrm>
           <a:prstGeom prst="rect">
             <a:avLst/>
@@ -4139,20 +4197,54 @@
           <a:lstStyle/>
           <a:p>
             <a:r>
-              <a:rPr sz="1650" b="0">
-                <a:solidFill>
-                  <a:srgbClr val="1E2024"/>
-                </a:solidFill>
-                <a:latin typeface="Calibri"/>
-              </a:rPr>
-              <a:t>多數情況 client 在送出前就本地中止，根本沒上網路</a:t>
-            </a:r>
-          </a:p>
-        </p:txBody>
-      </p:sp>
-      <p:sp>
-        <p:nvSpPr>
-          <p:cNvPr id="7" name="TextBox 6"/>
+              <a:rPr sz="1500" b="0">
+                <a:solidFill>
+                  <a:srgbClr val="5F5E5A"/>
+                </a:solidFill>
+                <a:latin typeface="Calibri"/>
+              </a:rPr>
+              <a:t>取捨：0.8.0（2013）起九年保留每個版本——每個舊版本都是活的程式碼與測試面；4.0 用「斷 2018 年前的 client」換「刪九年的碼」，只有 major 版本邊界付得起。</a:t>
+            </a:r>
+          </a:p>
+        </p:txBody>
+      </p:sp>
+      <p:sp>
+        <p:nvSpPr>
+          <p:cNvPr id="9" name="TextBox 8"/>
+          <p:cNvSpPr txBox="1"/>
+          <p:nvPr/>
+        </p:nvSpPr>
+        <p:spPr>
+          <a:xfrm>
+            <a:off x="640080" y="5733288"/>
+            <a:ext cx="10972800" cy="731520"/>
+          </a:xfrm>
+          <a:prstGeom prst="rect">
+            <a:avLst/>
+          </a:prstGeom>
+          <a:noFill/>
+        </p:spPr>
+        <p:txBody>
+          <a:bodyPr wrap="square">
+            <a:noAutofit/>
+          </a:bodyPr>
+          <a:lstStyle/>
+          <a:p>
+            <a:r>
+              <a:rPr sz="1500" b="0">
+                <a:solidFill>
+                  <a:srgbClr val="5F5E5A"/>
+                </a:solidFill>
+                <a:latin typeface="Calibri"/>
+              </a:rPr>
+              <a:t>銜接（非本場）：finalize / 升降當下的錯誤（INVALID_UPDATE_VERSION 等）屬「運行時的版本升降」那場，本場不展開。</a:t>
+            </a:r>
+          </a:p>
+        </p:txBody>
+      </p:sp>
+      <p:sp>
+        <p:nvSpPr>
+          <p:cNvPr id="10" name="TextBox 9"/>
           <p:cNvSpPr txBox="1"/>
           <p:nvPr/>
         </p:nvSpPr>
@@ -4189,7 +4281,7 @@
                 <a:latin typeface="Courier New"/>
                 <a:hlinkClick r:id="rId3"/>
               </a:rPr>
-              <a:t>latestUsableVersion</a:t>
+              <a:t>upgrade.md:229</a:t>
             </a:r>
             <a:r>
               <a:rPr sz="1200" b="0">
@@ -4208,26 +4300,7 @@
                 <a:latin typeface="Courier New"/>
                 <a:hlinkClick r:id="rId4"/>
               </a:rPr>
-              <a:t>NetworkClient</a:t>
-            </a:r>
-            <a:r>
-              <a:rPr sz="1200" b="0">
-                <a:solidFill>
-                  <a:srgbClr val="8A8A8A"/>
-                </a:solidFill>
-                <a:latin typeface="Calibri"/>
-              </a:rPr>
-              <a:t>   ·   </a:t>
-            </a:r>
-            <a:r>
-              <a:rPr sz="1200" b="0" u="sng">
-                <a:solidFill>
-                  <a:srgbClr val="185FA5"/>
-                </a:solidFill>
-                <a:latin typeface="Courier New"/>
-                <a:hlinkClick r:id="rId5"/>
-              </a:rPr>
-              <a:t>RequestContext</a:t>
+              <a:t>FetchRequest.json validVersions</a:t>
             </a:r>
           </a:p>
         </p:txBody>
@@ -4279,7 +4352,7 @@
                 </a:solidFill>
                 <a:latin typeface="Calibri"/>
               </a:rPr>
-              <a:t>Part 2 · 失敗訊息</a:t>
+              <a:t>隨堂考 · 核心</a:t>
             </a:r>
           </a:p>
         </p:txBody>
@@ -4293,7 +4366,7 @@
         <p:spPr>
           <a:xfrm>
             <a:off x="640080" y="841248"/>
-            <a:ext cx="10972800" cy="1005840"/>
+            <a:ext cx="10972800" cy="1188720"/>
           </a:xfrm>
           <a:prstGeom prst="rect">
             <a:avLst/>
@@ -4307,41 +4380,60 @@
           <a:lstStyle/>
           <a:p>
             <a:r>
-              <a:rPr sz="3200" b="1">
+              <a:rPr sz="2600" b="1">
                 <a:solidFill>
                   <a:srgbClr val="1E2024"/>
                 </a:solidFill>
                 <a:latin typeface="Calibri"/>
               </a:rPr>
-              <a:t>版本截斷：為什麼「升一點點」不夠</a:t>
-            </a:r>
-          </a:p>
-        </p:txBody>
-      </p:sp>
-      <p:pic>
-        <p:nvPicPr>
-          <p:cNvPr id="4" name="Picture 3" descr="alert-triangle.png"/>
-          <p:cNvPicPr>
-            <a:picLocks noChangeAspect="1"/>
-          </p:cNvPicPr>
-          <p:nvPr/>
-        </p:nvPicPr>
-        <p:blipFill>
-          <a:blip r:embed="rId2"/>
-          <a:stretch>
-            <a:fillRect/>
-          </a:stretch>
-        </p:blipFill>
-        <p:spPr>
-          <a:xfrm>
-            <a:off x="658368" y="2176272"/>
-            <a:ext cx="274320" cy="274320"/>
-          </a:xfrm>
-          <a:prstGeom prst="rect">
-            <a:avLst/>
-          </a:prstGeom>
-        </p:spPr>
-      </p:pic>
+              <a:t>client 繞過協商、直接送出 broker 不支援的 API version，會怎樣？</a:t>
+            </a:r>
+          </a:p>
+        </p:txBody>
+      </p:sp>
+      <p:sp>
+        <p:nvSpPr>
+          <p:cNvPr id="4" name="TextBox 3"/>
+          <p:cNvSpPr txBox="1"/>
+          <p:nvPr/>
+        </p:nvSpPr>
+        <p:spPr>
+          <a:xfrm>
+            <a:off x="822960" y="2331720"/>
+            <a:ext cx="10515600" cy="493776"/>
+          </a:xfrm>
+          <a:prstGeom prst="rect">
+            <a:avLst/>
+          </a:prstGeom>
+          <a:noFill/>
+        </p:spPr>
+        <p:txBody>
+          <a:bodyPr wrap="square">
+            <a:noAutofit/>
+          </a:bodyPr>
+          <a:lstStyle/>
+          <a:p>
+            <a:r>
+              <a:rPr sz="1600" b="0">
+                <a:solidFill>
+                  <a:srgbClr val="1E2024"/>
+                </a:solidFill>
+                <a:latin typeface="Calibri"/>
+              </a:rPr>
+              <a:t>A.  </a:t>
+            </a:r>
+            <a:r>
+              <a:rPr sz="1600" b="0">
+                <a:solidFill>
+                  <a:srgbClr val="1E2024"/>
+                </a:solidFill>
+                <a:latin typeface="Calibri"/>
+              </a:rPr>
+              <a:t>一律回 UNSUPPORTED_VERSION 錯誤碼</a:t>
+            </a:r>
+          </a:p>
+        </p:txBody>
+      </p:sp>
       <p:sp>
         <p:nvSpPr>
           <p:cNvPr id="5" name="TextBox 4"/>
@@ -4350,7 +4442,7 @@
         </p:nvSpPr>
         <p:spPr>
           <a:xfrm>
-            <a:off x="1078992" y="2148840"/>
+            <a:off x="822960" y="2953512"/>
             <a:ext cx="10515600" cy="493776"/>
           </a:xfrm>
           <a:prstGeom prst="rect">
@@ -4365,13 +4457,22 @@
           <a:lstStyle/>
           <a:p>
             <a:r>
-              <a:rPr sz="1650" b="0">
+              <a:rPr sz="1600" b="0">
                 <a:solidFill>
                   <a:srgbClr val="1E2024"/>
                 </a:solidFill>
                 <a:latin typeface="Calibri"/>
               </a:rPr>
-              <a:t>前一頁「交集空」最容易被忽略的根因——舊 wire 版本被整批移除</a:t>
+              <a:t>B.  </a:t>
+            </a:r>
+            <a:r>
+              <a:rPr sz="1600" b="0">
+                <a:solidFill>
+                  <a:srgbClr val="1E2024"/>
+                </a:solidFill>
+                <a:latin typeface="Calibri"/>
+              </a:rPr>
+              <a:t>只有 ApiVersions 例外回錯誤碼+支援範圍；其他 API 直接關閉連線</a:t>
             </a:r>
           </a:p>
         </p:txBody>
@@ -4384,46 +4485,37 @@
         </p:nvSpPr>
         <p:spPr>
           <a:xfrm>
-            <a:off x="640080" y="2788920"/>
-            <a:ext cx="10972800" cy="822959"/>
-          </a:xfrm>
-          <a:prstGeom prst="rect">
-            <a:avLst/>
-          </a:prstGeom>
-          <a:solidFill>
-            <a:srgbClr val="F3F1EC"/>
-          </a:solidFill>
-          <a:ln w="6350">
-            <a:solidFill>
-              <a:srgbClr val="E3E0D8"/>
-            </a:solidFill>
-          </a:ln>
-        </p:spPr>
-        <p:txBody>
-          <a:bodyPr wrap="square" lIns="146304" tIns="91440" bIns="91440">
-            <a:noAutofit/>
-          </a:bodyPr>
-          <a:lstStyle/>
-          <a:p>
-            <a:r>
-              <a:rPr sz="1350" b="0">
-                <a:solidFill>
-                  <a:srgbClr val="2C2C2A"/>
-                </a:solidFill>
-                <a:latin typeface="Calibri"/>
-              </a:rPr>
-              <a:t>舊 wire API version 被整個移除，min 可 &gt; 0</a:t>
-            </a:r>
-          </a:p>
-          <a:p>
-            <a:r>
-              <a:rPr sz="1350" b="0">
-                <a:solidFill>
-                  <a:srgbClr val="2C2C2A"/>
-                </a:solidFill>
-                <a:latin typeface="Calibri"/>
-              </a:rPr>
-              <a:t>  Fetch：4–18（v0–3 在 4.0 移除）</a:t>
+            <a:off x="822960" y="3575304"/>
+            <a:ext cx="10515600" cy="493776"/>
+          </a:xfrm>
+          <a:prstGeom prst="rect">
+            <a:avLst/>
+          </a:prstGeom>
+          <a:noFill/>
+        </p:spPr>
+        <p:txBody>
+          <a:bodyPr wrap="square">
+            <a:noAutofit/>
+          </a:bodyPr>
+          <a:lstStyle/>
+          <a:p>
+            <a:r>
+              <a:rPr sz="1600" b="0">
+                <a:solidFill>
+                  <a:srgbClr val="1E2024"/>
+                </a:solidFill>
+                <a:latin typeface="Calibri"/>
+              </a:rPr>
+              <a:t>C.  </a:t>
+            </a:r>
+            <a:r>
+              <a:rPr sz="1600" b="0">
+                <a:solidFill>
+                  <a:srgbClr val="1E2024"/>
+                </a:solidFill>
+                <a:latin typeface="Calibri"/>
+              </a:rPr>
+              <a:t>broker 自動降版處理</a:t>
             </a:r>
           </a:p>
         </p:txBody>
@@ -4436,33 +4528,37 @@
         </p:nvSpPr>
         <p:spPr>
           <a:xfrm>
-            <a:off x="640080" y="3813048"/>
-            <a:ext cx="10972800" cy="877824"/>
-          </a:xfrm>
-          <a:prstGeom prst="rect">
-            <a:avLst/>
-          </a:prstGeom>
-          <a:solidFill>
-            <a:srgbClr val="E9F3DE"/>
-          </a:solidFill>
-          <a:ln>
-            <a:noFill/>
-          </a:ln>
-        </p:spPr>
-        <p:txBody>
-          <a:bodyPr wrap="square" lIns="146304" tIns="82296">
-            <a:noAutofit/>
-          </a:bodyPr>
-          <a:lstStyle/>
-          <a:p>
-            <a:r>
-              <a:rPr sz="1500" b="0">
-                <a:solidFill>
-                  <a:srgbClr val="27500A"/>
-                </a:solidFill>
-                <a:latin typeface="Calibri"/>
-              </a:rPr>
-              <a:t>解法：升任一端到 4.0 前，先確認另一端 ≥ 2.1（upgrade guide 明訂雙向要求），否則協商結果沒有可用版本</a:t>
+            <a:off x="822960" y="4197096"/>
+            <a:ext cx="10515600" cy="493776"/>
+          </a:xfrm>
+          <a:prstGeom prst="rect">
+            <a:avLst/>
+          </a:prstGeom>
+          <a:noFill/>
+        </p:spPr>
+        <p:txBody>
+          <a:bodyPr wrap="square">
+            <a:noAutofit/>
+          </a:bodyPr>
+          <a:lstStyle/>
+          <a:p>
+            <a:r>
+              <a:rPr sz="1600" b="0">
+                <a:solidFill>
+                  <a:srgbClr val="1E2024"/>
+                </a:solidFill>
+                <a:latin typeface="Calibri"/>
+              </a:rPr>
+              <a:t>D.  </a:t>
+            </a:r>
+            <a:r>
+              <a:rPr sz="1600" b="0">
+                <a:solidFill>
+                  <a:srgbClr val="1E2024"/>
+                </a:solidFill>
+                <a:latin typeface="Calibri"/>
+              </a:rPr>
+              <a:t>忽略版本照常處理</a:t>
             </a:r>
           </a:p>
         </p:txBody>
@@ -4475,8 +4571,8 @@
         </p:nvSpPr>
         <p:spPr>
           <a:xfrm>
-            <a:off x="640080" y="4873752"/>
-            <a:ext cx="10972800" cy="731520"/>
+            <a:off x="640080" y="4910327"/>
+            <a:ext cx="10972800" cy="914400"/>
           </a:xfrm>
           <a:prstGeom prst="rect">
             <a:avLst/>
@@ -4490,110 +4586,13 @@
           <a:lstStyle/>
           <a:p>
             <a:r>
-              <a:rPr sz="1500" b="0">
-                <a:solidFill>
-                  <a:srgbClr val="5F5E5A"/>
-                </a:solidFill>
-                <a:latin typeface="Calibri"/>
-              </a:rPr>
-              <a:t>取捨：0.8.0（2013）起九年保留每個版本——每個舊版本都是活的程式碼與測試面；4.0 用「斷 2018 年前的 client」換「刪九年的碼」，只有 major 版本邊界付得起。</a:t>
-            </a:r>
-          </a:p>
-        </p:txBody>
-      </p:sp>
-      <p:sp>
-        <p:nvSpPr>
-          <p:cNvPr id="9" name="TextBox 8"/>
-          <p:cNvSpPr txBox="1"/>
-          <p:nvPr/>
-        </p:nvSpPr>
-        <p:spPr>
-          <a:xfrm>
-            <a:off x="640080" y="5733288"/>
-            <a:ext cx="10972800" cy="731520"/>
-          </a:xfrm>
-          <a:prstGeom prst="rect">
-            <a:avLst/>
-          </a:prstGeom>
-          <a:noFill/>
-        </p:spPr>
-        <p:txBody>
-          <a:bodyPr wrap="square">
-            <a:noAutofit/>
-          </a:bodyPr>
-          <a:lstStyle/>
-          <a:p>
-            <a:r>
-              <a:rPr sz="1500" b="0">
-                <a:solidFill>
-                  <a:srgbClr val="5F5E5A"/>
-                </a:solidFill>
-                <a:latin typeface="Calibri"/>
-              </a:rPr>
-              <a:t>銜接（非本場）：finalize / 升降當下的錯誤（INVALID_UPDATE_VERSION 等）屬「運行時的版本升降」那場，本場不展開。</a:t>
-            </a:r>
-          </a:p>
-        </p:txBody>
-      </p:sp>
-      <p:sp>
-        <p:nvSpPr>
-          <p:cNvPr id="10" name="TextBox 9"/>
-          <p:cNvSpPr txBox="1"/>
-          <p:nvPr/>
-        </p:nvSpPr>
-        <p:spPr>
-          <a:xfrm>
-            <a:off x="640080" y="6400800"/>
-            <a:ext cx="10972800" cy="384048"/>
-          </a:xfrm>
-          <a:prstGeom prst="rect">
-            <a:avLst/>
-          </a:prstGeom>
-          <a:noFill/>
-        </p:spPr>
-        <p:txBody>
-          <a:bodyPr wrap="square">
-            <a:noAutofit/>
-          </a:bodyPr>
-          <a:lstStyle/>
-          <a:p>
-            <a:r>
-              <a:rPr sz="1200" b="1">
+              <a:rPr sz="1400" b="0">
                 <a:solidFill>
                   <a:srgbClr val="8A8A8A"/>
                 </a:solidFill>
                 <a:latin typeface="Calibri"/>
               </a:rPr>
-              <a:t>REF   </a:t>
-            </a:r>
-            <a:r>
-              <a:rPr sz="1200" b="0" u="sng">
-                <a:solidFill>
-                  <a:srgbClr val="185FA5"/>
-                </a:solidFill>
-                <a:latin typeface="Courier New"/>
-                <a:hlinkClick r:id="rId3"/>
-              </a:rPr>
-              <a:t>upgrade.md:229</a:t>
-            </a:r>
-            <a:r>
-              <a:rPr sz="1200" b="0">
-                <a:solidFill>
-                  <a:srgbClr val="8A8A8A"/>
-                </a:solidFill>
-                <a:latin typeface="Calibri"/>
-              </a:rPr>
-              <a:t>   ·   </a:t>
-            </a:r>
-            <a:r>
-              <a:rPr sz="1200" b="0" u="sng">
-                <a:solidFill>
-                  <a:srgbClr val="185FA5"/>
-                </a:solidFill>
-                <a:latin typeface="Courier New"/>
-                <a:hlinkClick r:id="rId4"/>
-              </a:rPr>
-              <a:t>FetchRequest.json validVersions</a:t>
+              <a:t>想一想 —— 下一頁公布答案</a:t>
             </a:r>
           </a:p>
         </p:txBody>
@@ -4645,7 +4644,7 @@
                 </a:solidFill>
                 <a:latin typeface="Calibri"/>
               </a:rPr>
-              <a:t>隨堂考 · 核心</a:t>
+              <a:t>隨堂考 · 核心　（正解）</a:t>
             </a:r>
           </a:p>
         </p:txBody>
@@ -4741,31 +4740,36 @@
           <a:prstGeom prst="rect">
             <a:avLst/>
           </a:prstGeom>
-          <a:noFill/>
-        </p:spPr>
-        <p:txBody>
-          <a:bodyPr wrap="square">
-            <a:noAutofit/>
-          </a:bodyPr>
-          <a:lstStyle/>
-          <a:p>
-            <a:r>
-              <a:rPr sz="1600" b="0">
-                <a:solidFill>
-                  <a:srgbClr val="1E2024"/>
+          <a:solidFill>
+            <a:srgbClr val="E9F3DE"/>
+          </a:solidFill>
+          <a:ln>
+            <a:noFill/>
+          </a:ln>
+        </p:spPr>
+        <p:txBody>
+          <a:bodyPr wrap="square" lIns="128016" tIns="54864">
+            <a:noAutofit/>
+          </a:bodyPr>
+          <a:lstStyle/>
+          <a:p>
+            <a:r>
+              <a:rPr sz="1600" b="1">
+                <a:solidFill>
+                  <a:srgbClr val="27500A"/>
                 </a:solidFill>
                 <a:latin typeface="Calibri"/>
               </a:rPr>
               <a:t>B.  </a:t>
             </a:r>
             <a:r>
-              <a:rPr sz="1600" b="0">
-                <a:solidFill>
-                  <a:srgbClr val="1E2024"/>
-                </a:solidFill>
-                <a:latin typeface="Calibri"/>
-              </a:rPr>
-              <a:t>只有 ApiVersions 例外回錯誤碼+支援範圍；其他 API 直接關閉連線</a:t>
+              <a:rPr sz="1600" b="1">
+                <a:solidFill>
+                  <a:srgbClr val="27500A"/>
+                </a:solidFill>
+                <a:latin typeface="Calibri"/>
+              </a:rPr>
+              <a:t>只有 ApiVersions 例外回錯誤碼+支援範圍；其他 API 直接關閉連線   ✓</a:t>
             </a:r>
           </a:p>
         </p:txBody>
@@ -4879,13 +4883,85 @@
           <a:lstStyle/>
           <a:p>
             <a:r>
+              <a:rPr sz="1400" b="1">
+                <a:solidFill>
+                  <a:srgbClr val="27500A"/>
+                </a:solidFill>
+                <a:latin typeface="Calibri"/>
+              </a:rPr>
+              <a:t>正解 B — </a:t>
+            </a:r>
+            <a:r>
               <a:rPr sz="1400" b="0">
                 <a:solidFill>
+                  <a:srgbClr val="1E2024"/>
+                </a:solidFill>
+                <a:latin typeface="Calibri"/>
+              </a:rPr>
+              <a:t>ApiVersions 是協商的第一支 request（此時雙方還不知道彼此版本），若它也關閉連線，client 永遠問不到支援範圍，故回 v0+錯誤碼讓 client 重新協商；其他 API 在 RequestContext 解析失敗、SocketServer 關閉連線。</a:t>
+            </a:r>
+          </a:p>
+        </p:txBody>
+      </p:sp>
+      <p:sp>
+        <p:nvSpPr>
+          <p:cNvPr id="9" name="TextBox 8"/>
+          <p:cNvSpPr txBox="1"/>
+          <p:nvPr/>
+        </p:nvSpPr>
+        <p:spPr>
+          <a:xfrm>
+            <a:off x="640080" y="6400800"/>
+            <a:ext cx="10972800" cy="384048"/>
+          </a:xfrm>
+          <a:prstGeom prst="rect">
+            <a:avLst/>
+          </a:prstGeom>
+          <a:noFill/>
+        </p:spPr>
+        <p:txBody>
+          <a:bodyPr wrap="square">
+            <a:noAutofit/>
+          </a:bodyPr>
+          <a:lstStyle/>
+          <a:p>
+            <a:r>
+              <a:rPr sz="1200" b="1">
+                <a:solidFill>
                   <a:srgbClr val="8A8A8A"/>
                 </a:solidFill>
                 <a:latin typeface="Calibri"/>
               </a:rPr>
-              <a:t>想一想 —— 下一頁公布答案</a:t>
+              <a:t>REF   </a:t>
+            </a:r>
+            <a:r>
+              <a:rPr sz="1200" b="0" u="sng">
+                <a:solidFill>
+                  <a:srgbClr val="185FA5"/>
+                </a:solidFill>
+                <a:latin typeface="Courier New"/>
+                <a:hlinkClick r:id="rId2"/>
+              </a:rPr>
+              <a:t>RequestContext.java:112</a:t>
+            </a:r>
+            <a:r>
+              <a:rPr sz="1200" b="0">
+                <a:solidFill>
+                  <a:srgbClr val="8A8A8A"/>
+                </a:solidFill>
+                <a:latin typeface="Calibri"/>
+              </a:rPr>
+              <a:t>   ·   </a:t>
+            </a:r>
+            <a:r>
+              <a:rPr sz="1200" b="0" u="sng">
+                <a:solidFill>
+                  <a:srgbClr val="185FA5"/>
+                </a:solidFill>
+                <a:latin typeface="Courier New"/>
+                <a:hlinkClick r:id="rId3"/>
+              </a:rPr>
+              <a:t>SocketServer.scala:781</a:t>
             </a:r>
           </a:p>
         </p:txBody>
@@ -4937,375 +5013,6 @@
                 </a:solidFill>
                 <a:latin typeface="Calibri"/>
               </a:rPr>
-              <a:t>隨堂考 · 核心　（正解）</a:t>
-            </a:r>
-          </a:p>
-        </p:txBody>
-      </p:sp>
-      <p:sp>
-        <p:nvSpPr>
-          <p:cNvPr id="3" name="TextBox 2"/>
-          <p:cNvSpPr txBox="1"/>
-          <p:nvPr/>
-        </p:nvSpPr>
-        <p:spPr>
-          <a:xfrm>
-            <a:off x="640080" y="841248"/>
-            <a:ext cx="10972800" cy="1188720"/>
-          </a:xfrm>
-          <a:prstGeom prst="rect">
-            <a:avLst/>
-          </a:prstGeom>
-          <a:noFill/>
-        </p:spPr>
-        <p:txBody>
-          <a:bodyPr wrap="square">
-            <a:noAutofit/>
-          </a:bodyPr>
-          <a:lstStyle/>
-          <a:p>
-            <a:r>
-              <a:rPr sz="2600" b="1">
-                <a:solidFill>
-                  <a:srgbClr val="1E2024"/>
-                </a:solidFill>
-                <a:latin typeface="Calibri"/>
-              </a:rPr>
-              <a:t>client 繞過協商、直接送出 broker 不支援的 API version，會怎樣？</a:t>
-            </a:r>
-          </a:p>
-        </p:txBody>
-      </p:sp>
-      <p:sp>
-        <p:nvSpPr>
-          <p:cNvPr id="4" name="TextBox 3"/>
-          <p:cNvSpPr txBox="1"/>
-          <p:nvPr/>
-        </p:nvSpPr>
-        <p:spPr>
-          <a:xfrm>
-            <a:off x="822960" y="2331720"/>
-            <a:ext cx="10515600" cy="493776"/>
-          </a:xfrm>
-          <a:prstGeom prst="rect">
-            <a:avLst/>
-          </a:prstGeom>
-          <a:noFill/>
-        </p:spPr>
-        <p:txBody>
-          <a:bodyPr wrap="square">
-            <a:noAutofit/>
-          </a:bodyPr>
-          <a:lstStyle/>
-          <a:p>
-            <a:r>
-              <a:rPr sz="1600" b="0">
-                <a:solidFill>
-                  <a:srgbClr val="1E2024"/>
-                </a:solidFill>
-                <a:latin typeface="Calibri"/>
-              </a:rPr>
-              <a:t>A.  </a:t>
-            </a:r>
-            <a:r>
-              <a:rPr sz="1600" b="0">
-                <a:solidFill>
-                  <a:srgbClr val="1E2024"/>
-                </a:solidFill>
-                <a:latin typeface="Calibri"/>
-              </a:rPr>
-              <a:t>一律回 UNSUPPORTED_VERSION 錯誤碼</a:t>
-            </a:r>
-          </a:p>
-        </p:txBody>
-      </p:sp>
-      <p:sp>
-        <p:nvSpPr>
-          <p:cNvPr id="5" name="TextBox 4"/>
-          <p:cNvSpPr txBox="1"/>
-          <p:nvPr/>
-        </p:nvSpPr>
-        <p:spPr>
-          <a:xfrm>
-            <a:off x="822960" y="2953512"/>
-            <a:ext cx="10515600" cy="493776"/>
-          </a:xfrm>
-          <a:prstGeom prst="rect">
-            <a:avLst/>
-          </a:prstGeom>
-          <a:solidFill>
-            <a:srgbClr val="E9F3DE"/>
-          </a:solidFill>
-          <a:ln>
-            <a:noFill/>
-          </a:ln>
-        </p:spPr>
-        <p:txBody>
-          <a:bodyPr wrap="square" lIns="128016" tIns="54864">
-            <a:noAutofit/>
-          </a:bodyPr>
-          <a:lstStyle/>
-          <a:p>
-            <a:r>
-              <a:rPr sz="1600" b="1">
-                <a:solidFill>
-                  <a:srgbClr val="27500A"/>
-                </a:solidFill>
-                <a:latin typeface="Calibri"/>
-              </a:rPr>
-              <a:t>B.  </a:t>
-            </a:r>
-            <a:r>
-              <a:rPr sz="1600" b="1">
-                <a:solidFill>
-                  <a:srgbClr val="27500A"/>
-                </a:solidFill>
-                <a:latin typeface="Calibri"/>
-              </a:rPr>
-              <a:t>只有 ApiVersions 例外回錯誤碼+支援範圍；其他 API 直接關閉連線   ✓</a:t>
-            </a:r>
-          </a:p>
-        </p:txBody>
-      </p:sp>
-      <p:sp>
-        <p:nvSpPr>
-          <p:cNvPr id="6" name="TextBox 5"/>
-          <p:cNvSpPr txBox="1"/>
-          <p:nvPr/>
-        </p:nvSpPr>
-        <p:spPr>
-          <a:xfrm>
-            <a:off x="822960" y="3575304"/>
-            <a:ext cx="10515600" cy="493776"/>
-          </a:xfrm>
-          <a:prstGeom prst="rect">
-            <a:avLst/>
-          </a:prstGeom>
-          <a:noFill/>
-        </p:spPr>
-        <p:txBody>
-          <a:bodyPr wrap="square">
-            <a:noAutofit/>
-          </a:bodyPr>
-          <a:lstStyle/>
-          <a:p>
-            <a:r>
-              <a:rPr sz="1600" b="0">
-                <a:solidFill>
-                  <a:srgbClr val="1E2024"/>
-                </a:solidFill>
-                <a:latin typeface="Calibri"/>
-              </a:rPr>
-              <a:t>C.  </a:t>
-            </a:r>
-            <a:r>
-              <a:rPr sz="1600" b="0">
-                <a:solidFill>
-                  <a:srgbClr val="1E2024"/>
-                </a:solidFill>
-                <a:latin typeface="Calibri"/>
-              </a:rPr>
-              <a:t>broker 自動降版處理</a:t>
-            </a:r>
-          </a:p>
-        </p:txBody>
-      </p:sp>
-      <p:sp>
-        <p:nvSpPr>
-          <p:cNvPr id="7" name="TextBox 6"/>
-          <p:cNvSpPr txBox="1"/>
-          <p:nvPr/>
-        </p:nvSpPr>
-        <p:spPr>
-          <a:xfrm>
-            <a:off x="822960" y="4197096"/>
-            <a:ext cx="10515600" cy="493776"/>
-          </a:xfrm>
-          <a:prstGeom prst="rect">
-            <a:avLst/>
-          </a:prstGeom>
-          <a:noFill/>
-        </p:spPr>
-        <p:txBody>
-          <a:bodyPr wrap="square">
-            <a:noAutofit/>
-          </a:bodyPr>
-          <a:lstStyle/>
-          <a:p>
-            <a:r>
-              <a:rPr sz="1600" b="0">
-                <a:solidFill>
-                  <a:srgbClr val="1E2024"/>
-                </a:solidFill>
-                <a:latin typeface="Calibri"/>
-              </a:rPr>
-              <a:t>D.  </a:t>
-            </a:r>
-            <a:r>
-              <a:rPr sz="1600" b="0">
-                <a:solidFill>
-                  <a:srgbClr val="1E2024"/>
-                </a:solidFill>
-                <a:latin typeface="Calibri"/>
-              </a:rPr>
-              <a:t>忽略版本照常處理</a:t>
-            </a:r>
-          </a:p>
-        </p:txBody>
-      </p:sp>
-      <p:sp>
-        <p:nvSpPr>
-          <p:cNvPr id="8" name="TextBox 7"/>
-          <p:cNvSpPr txBox="1"/>
-          <p:nvPr/>
-        </p:nvSpPr>
-        <p:spPr>
-          <a:xfrm>
-            <a:off x="640080" y="4910327"/>
-            <a:ext cx="10972800" cy="914400"/>
-          </a:xfrm>
-          <a:prstGeom prst="rect">
-            <a:avLst/>
-          </a:prstGeom>
-          <a:noFill/>
-        </p:spPr>
-        <p:txBody>
-          <a:bodyPr wrap="square">
-            <a:noAutofit/>
-          </a:bodyPr>
-          <a:lstStyle/>
-          <a:p>
-            <a:r>
-              <a:rPr sz="1400" b="1">
-                <a:solidFill>
-                  <a:srgbClr val="27500A"/>
-                </a:solidFill>
-                <a:latin typeface="Calibri"/>
-              </a:rPr>
-              <a:t>正解 B — </a:t>
-            </a:r>
-            <a:r>
-              <a:rPr sz="1400" b="0">
-                <a:solidFill>
-                  <a:srgbClr val="1E2024"/>
-                </a:solidFill>
-                <a:latin typeface="Calibri"/>
-              </a:rPr>
-              <a:t>ApiVersions 是協商的第一支 request（此時雙方還不知道彼此版本），若它也關線，client 永遠問不到支援範圍，故回 v0+錯誤碼讓 client 重新協商；其他 API 在 RequestContext 解析失敗、SocketServer 關閉連線。</a:t>
-            </a:r>
-          </a:p>
-        </p:txBody>
-      </p:sp>
-      <p:sp>
-        <p:nvSpPr>
-          <p:cNvPr id="9" name="TextBox 8"/>
-          <p:cNvSpPr txBox="1"/>
-          <p:nvPr/>
-        </p:nvSpPr>
-        <p:spPr>
-          <a:xfrm>
-            <a:off x="640080" y="6400800"/>
-            <a:ext cx="10972800" cy="384048"/>
-          </a:xfrm>
-          <a:prstGeom prst="rect">
-            <a:avLst/>
-          </a:prstGeom>
-          <a:noFill/>
-        </p:spPr>
-        <p:txBody>
-          <a:bodyPr wrap="square">
-            <a:noAutofit/>
-          </a:bodyPr>
-          <a:lstStyle/>
-          <a:p>
-            <a:r>
-              <a:rPr sz="1200" b="1">
-                <a:solidFill>
-                  <a:srgbClr val="8A8A8A"/>
-                </a:solidFill>
-                <a:latin typeface="Calibri"/>
-              </a:rPr>
-              <a:t>REF   </a:t>
-            </a:r>
-            <a:r>
-              <a:rPr sz="1200" b="0" u="sng">
-                <a:solidFill>
-                  <a:srgbClr val="185FA5"/>
-                </a:solidFill>
-                <a:latin typeface="Courier New"/>
-                <a:hlinkClick r:id="rId2"/>
-              </a:rPr>
-              <a:t>RequestContext.java:112</a:t>
-            </a:r>
-            <a:r>
-              <a:rPr sz="1200" b="0">
-                <a:solidFill>
-                  <a:srgbClr val="8A8A8A"/>
-                </a:solidFill>
-                <a:latin typeface="Calibri"/>
-              </a:rPr>
-              <a:t>   ·   </a:t>
-            </a:r>
-            <a:r>
-              <a:rPr sz="1200" b="0" u="sng">
-                <a:solidFill>
-                  <a:srgbClr val="185FA5"/>
-                </a:solidFill>
-                <a:latin typeface="Courier New"/>
-                <a:hlinkClick r:id="rId3"/>
-              </a:rPr>
-              <a:t>SocketServer.scala:781</a:t>
-            </a:r>
-          </a:p>
-        </p:txBody>
-      </p:sp>
-    </p:spTree>
-  </p:cSld>
-  <p:clrMapOvr>
-    <a:masterClrMapping/>
-  </p:clrMapOvr>
-</p:sld>
-</file>
-
-<file path=ppt/slides/slide16.xml><?xml version="1.0" encoding="utf-8"?>
-<p:sld xmlns:a="http://schemas.openxmlformats.org/drawingml/2006/main" xmlns:p="http://schemas.openxmlformats.org/presentationml/2006/main" xmlns:r="http://schemas.openxmlformats.org/officeDocument/2006/relationships">
-  <p:cSld>
-    <p:spTree>
-      <p:nvGrpSpPr>
-        <p:cNvPr id="1" name=""/>
-        <p:cNvGrpSpPr/>
-        <p:nvPr/>
-      </p:nvGrpSpPr>
-      <p:grpSpPr/>
-      <p:sp>
-        <p:nvSpPr>
-          <p:cNvPr id="2" name="TextBox 1"/>
-          <p:cNvSpPr txBox="1"/>
-          <p:nvPr/>
-        </p:nvSpPr>
-        <p:spPr>
-          <a:xfrm>
-            <a:off x="640080" y="457200"/>
-            <a:ext cx="10972800" cy="365760"/>
-          </a:xfrm>
-          <a:prstGeom prst="rect">
-            <a:avLst/>
-          </a:prstGeom>
-          <a:noFill/>
-        </p:spPr>
-        <p:txBody>
-          <a:bodyPr wrap="square">
-            <a:noAutofit/>
-          </a:bodyPr>
-          <a:lstStyle/>
-          <a:p>
-            <a:r>
-              <a:rPr sz="1300" b="1">
-                <a:solidFill>
-                  <a:srgbClr val="185FA5"/>
-                </a:solidFill>
-                <a:latin typeface="Calibri"/>
-              </a:rPr>
               <a:t>Recap</a:t>
             </a:r>
           </a:p>
@@ -5691,7 +5398,7 @@
                 </a:solidFill>
                 <a:latin typeface="Calibri"/>
               </a:rPr>
-              <a:t>Part 1 — 版本為何對不齊，又是怎麼決定的</a:t>
+              <a:t>Part 1 — 為什麼不能「一個版本打天下」，版本又是怎麼選出來的</a:t>
             </a:r>
           </a:p>
         </p:txBody>
@@ -5835,78 +5542,20 @@
                 </a:solidFill>
                 <a:latin typeface="Calibri"/>
               </a:rPr>
-              <a:t>為什麼不「一個版本打天下」？</a:t>
-            </a:r>
-          </a:p>
-        </p:txBody>
-      </p:sp>
-      <p:pic>
-        <p:nvPicPr>
-          <p:cNvPr id="4" name="Picture 3" descr="bulb.png"/>
-          <p:cNvPicPr>
-            <a:picLocks noChangeAspect="1"/>
-          </p:cNvPicPr>
-          <p:nvPr/>
-        </p:nvPicPr>
-        <p:blipFill>
-          <a:blip r:embed="rId2"/>
-          <a:stretch>
-            <a:fillRect/>
-          </a:stretch>
-        </p:blipFill>
-        <p:spPr>
-          <a:xfrm>
-            <a:off x="658368" y="2176272"/>
-            <a:ext cx="274320" cy="274320"/>
-          </a:xfrm>
-          <a:prstGeom prst="rect">
-            <a:avLst/>
-          </a:prstGeom>
-        </p:spPr>
-      </p:pic>
-      <p:sp>
-        <p:nvSpPr>
-          <p:cNvPr id="5" name="TextBox 4"/>
-          <p:cNvSpPr txBox="1"/>
-          <p:nvPr/>
-        </p:nvSpPr>
-        <p:spPr>
-          <a:xfrm>
-            <a:off x="1078992" y="2148840"/>
-            <a:ext cx="10515600" cy="493776"/>
-          </a:xfrm>
-          <a:prstGeom prst="rect">
-            <a:avLst/>
-          </a:prstGeom>
-          <a:noFill/>
-        </p:spPr>
-        <p:txBody>
-          <a:bodyPr wrap="square">
-            <a:noAutofit/>
-          </a:bodyPr>
-          <a:lstStyle/>
-          <a:p>
-            <a:r>
-              <a:rPr sz="1650" b="0">
-                <a:solidFill>
-                  <a:srgbClr val="1E2024"/>
-                </a:solidFill>
-                <a:latin typeface="Calibri"/>
-              </a:rPr>
-              <a:t>初學者常有的直覺：client 與 broker 使用同一個版本，升級時一併更新</a:t>
-            </a:r>
-          </a:p>
-        </p:txBody>
-      </p:sp>
-      <p:sp>
-        <p:nvSpPr>
-          <p:cNvPr id="6" name="TextBox 5"/>
-          <p:cNvSpPr txBox="1"/>
-          <p:nvPr/>
-        </p:nvSpPr>
-        <p:spPr>
-          <a:xfrm>
-            <a:off x="640080" y="2788920"/>
+              <a:t>為什麼不能「一個版本打天下」？</a:t>
+            </a:r>
+          </a:p>
+        </p:txBody>
+      </p:sp>
+      <p:sp>
+        <p:nvSpPr>
+          <p:cNvPr id="4" name="TextBox 3"/>
+          <p:cNvSpPr txBox="1"/>
+          <p:nvPr/>
+        </p:nvSpPr>
+        <p:spPr>
+          <a:xfrm>
+            <a:off x="640080" y="2148840"/>
             <a:ext cx="10972800" cy="548640"/>
           </a:xfrm>
           <a:prstGeom prst="rect">
@@ -5934,14 +5583,72 @@
                 </a:solidFill>
                 <a:latin typeface="Calibri"/>
               </a:rPr>
-              <a:t>想像中：  client v4.1 ─────── broker v4.1</a:t>
+              <a:t>直覺（想像中）：  client v4.1 ─────── broker v4.1   同版、一起升</a:t>
             </a:r>
           </a:p>
         </p:txBody>
       </p:sp>
       <p:pic>
         <p:nvPicPr>
-          <p:cNvPr id="7" name="Picture 6" descr="help-circle.png"/>
+          <p:cNvPr id="5" name="Picture 4" descr="clock-hour-4.png"/>
+          <p:cNvPicPr>
+            <a:picLocks noChangeAspect="1"/>
+          </p:cNvPicPr>
+          <p:nvPr/>
+        </p:nvPicPr>
+        <p:blipFill>
+          <a:blip r:embed="rId2"/>
+          <a:stretch>
+            <a:fillRect/>
+          </a:stretch>
+        </p:blipFill>
+        <p:spPr>
+          <a:xfrm>
+            <a:off x="658368" y="2926079"/>
+            <a:ext cx="274320" cy="274320"/>
+          </a:xfrm>
+          <a:prstGeom prst="rect">
+            <a:avLst/>
+          </a:prstGeom>
+        </p:spPr>
+      </p:pic>
+      <p:sp>
+        <p:nvSpPr>
+          <p:cNvPr id="6" name="TextBox 5"/>
+          <p:cNvSpPr txBox="1"/>
+          <p:nvPr/>
+        </p:nvSpPr>
+        <p:spPr>
+          <a:xfrm>
+            <a:off x="1078992" y="2898648"/>
+            <a:ext cx="10515600" cy="1188720"/>
+          </a:xfrm>
+          <a:prstGeom prst="rect">
+            <a:avLst/>
+          </a:prstGeom>
+          <a:noFill/>
+        </p:spPr>
+        <p:txBody>
+          <a:bodyPr wrap="square">
+            <a:noAutofit/>
+          </a:bodyPr>
+          <a:lstStyle/>
+          <a:p>
+            <a:r>
+              <a:rPr sz="1650" b="0">
+                <a:solidFill>
+                  <a:srgbClr val="1E2024"/>
+                </a:solidFill>
+                <a:latin typeface="Calibri"/>
+              </a:rPr>
+              <a:t>現實一：client 是內嵌在應用裡的函式庫——IoT 裝置、車載系統、多年前的 batch job，隨應用長期運行、難更新（Kafka 曾為此保留每個 protocol 版本近九年，4.0／KIP-896 才把下限提到 2.1）</a:t>
+            </a:r>
+          </a:p>
+        </p:txBody>
+      </p:sp>
+      <p:pic>
+        <p:nvPicPr>
+          <p:cNvPr id="7" name="Picture 6" descr="server-2.png"/>
           <p:cNvPicPr>
             <a:picLocks noChangeAspect="1"/>
           </p:cNvPicPr>
@@ -5955,7 +5662,7 @@
         </p:blipFill>
         <p:spPr>
           <a:xfrm>
-            <a:off x="658368" y="3566160"/>
+            <a:off x="658368" y="4261104"/>
             <a:ext cx="274320" cy="274320"/>
           </a:xfrm>
           <a:prstGeom prst="rect">
@@ -5971,7 +5678,7 @@
         </p:nvSpPr>
         <p:spPr>
           <a:xfrm>
-            <a:off x="1078992" y="3538728"/>
+            <a:off x="1078992" y="4233672"/>
             <a:ext cx="10515600" cy="841248"/>
           </a:xfrm>
           <a:prstGeom prst="rect">
@@ -5992,7 +5699,7 @@
                 </a:solidFill>
                 <a:latin typeface="Calibri"/>
               </a:rPr>
-              <a:t>但生產環境的 Kafka 通常是資料主幹道——訂單事件、log、metrics pipeline 都在上面，停機升級＝整條資料鏈路停擺，這個假設不成立</a:t>
+              <a:t>現實二：Kafka 要求 zero downtime → broker 只能一台一台滾動升級 → 過程必然新舊混版</a:t>
             </a:r>
           </a:p>
         </p:txBody>
@@ -6000,6 +5707,45 @@
       <p:sp>
         <p:nvSpPr>
           <p:cNvPr id="9" name="TextBox 8"/>
+          <p:cNvSpPr txBox="1"/>
+          <p:nvPr/>
+        </p:nvSpPr>
+        <p:spPr>
+          <a:xfrm>
+            <a:off x="640080" y="5221224"/>
+            <a:ext cx="10972800" cy="566928"/>
+          </a:xfrm>
+          <a:prstGeom prst="rect">
+            <a:avLst/>
+          </a:prstGeom>
+          <a:solidFill>
+            <a:srgbClr val="E9F3DE"/>
+          </a:solidFill>
+          <a:ln>
+            <a:noFill/>
+          </a:ln>
+        </p:spPr>
+        <p:txBody>
+          <a:bodyPr wrap="square" lIns="146304" tIns="82296">
+            <a:noAutofit/>
+          </a:bodyPr>
+          <a:lstStyle/>
+          <a:p>
+            <a:r>
+              <a:rPr sz="1500" b="0">
+                <a:solidFill>
+                  <a:srgbClr val="27500A"/>
+                </a:solidFill>
+                <a:latin typeface="Calibri"/>
+              </a:rPr>
+              <a:t>兩個現實加起來：不能鎖全叢集同一版（又要不停機）——版本無法事先統一，那要怎麼選？</a:t>
+            </a:r>
+          </a:p>
+        </p:txBody>
+      </p:sp>
+      <p:sp>
+        <p:nvSpPr>
+          <p:cNvPr id="10" name="TextBox 9"/>
           <p:cNvSpPr txBox="1"/>
           <p:nvPr/>
         </p:nvSpPr>
@@ -6033,8 +5779,27 @@
                 <a:solidFill>
                   <a:srgbClr val="185FA5"/>
                 </a:solidFill>
+                <a:latin typeface="Calibri"/>
+                <a:hlinkClick r:id="rId4"/>
+              </a:rPr>
+              <a:t>KIP-896</a:t>
+            </a:r>
+            <a:r>
+              <a:rPr sz="1200" b="0">
+                <a:solidFill>
+                  <a:srgbClr val="8A8A8A"/>
+                </a:solidFill>
+                <a:latin typeface="Calibri"/>
+              </a:rPr>
+              <a:t>   ·   </a:t>
+            </a:r>
+            <a:r>
+              <a:rPr sz="1200" b="0" u="sng">
+                <a:solidFill>
+                  <a:srgbClr val="185FA5"/>
+                </a:solidFill>
                 <a:latin typeface="Courier New"/>
-                <a:hlinkClick r:id="rId4"/>
+                <a:hlinkClick r:id="rId5"/>
               </a:rPr>
               <a:t>protocol.md:94</a:t>
             </a:r>
@@ -6088,7 +5853,7 @@
                 </a:solidFill>
                 <a:latin typeface="Calibri"/>
               </a:rPr>
-              <a:t>Part 1 · 動機</a:t>
+              <a:t>Part 1 · 術語</a:t>
             </a:r>
           </a:p>
         </p:txBody>
@@ -6122,14 +5887,14 @@
                 </a:solidFill>
                 <a:latin typeface="Calibri"/>
               </a:rPr>
-              <a:t>為什麼版本天生對不齊，只能連線當下協商</a:t>
+              <a:t>要談「怎麼選」，先分清楚「版本」是哪一層</a:t>
             </a:r>
           </a:p>
         </p:txBody>
       </p:sp>
       <p:pic>
         <p:nvPicPr>
-          <p:cNvPr id="4" name="Picture 3" descr="clock-hour-4.png"/>
+          <p:cNvPr id="4" name="Picture 3" descr="arrows-split.png"/>
           <p:cNvPicPr>
             <a:picLocks noChangeAspect="1"/>
           </p:cNvPicPr>
@@ -6180,113 +5945,21 @@
                 </a:solidFill>
                 <a:latin typeface="Calibri"/>
               </a:rPr>
-              <a:t>client 是內嵌在應用程式裡的函式庫：IoT 裝置、車載系統、多年前的 batch job——隨應用長期運行、難以更新</a:t>
-            </a:r>
-          </a:p>
-        </p:txBody>
-      </p:sp>
-      <p:pic>
-        <p:nvPicPr>
-          <p:cNvPr id="6" name="Picture 5" descr="server-2.png"/>
-          <p:cNvPicPr>
-            <a:picLocks noChangeAspect="1"/>
-          </p:cNvPicPr>
-          <p:nvPr/>
-        </p:nvPicPr>
-        <p:blipFill>
-          <a:blip r:embed="rId3"/>
-          <a:stretch>
-            <a:fillRect/>
-          </a:stretch>
-        </p:blipFill>
-        <p:spPr>
-          <a:xfrm>
-            <a:off x="658368" y="3163824"/>
-            <a:ext cx="274320" cy="274320"/>
-          </a:xfrm>
-          <a:prstGeom prst="rect">
-            <a:avLst/>
-          </a:prstGeom>
-        </p:spPr>
-      </p:pic>
-      <p:sp>
-        <p:nvSpPr>
-          <p:cNvPr id="7" name="TextBox 6"/>
-          <p:cNvSpPr txBox="1"/>
-          <p:nvPr/>
-        </p:nvSpPr>
-        <p:spPr>
-          <a:xfrm>
-            <a:off x="1078992" y="3136392"/>
-            <a:ext cx="10515600" cy="493776"/>
-          </a:xfrm>
-          <a:prstGeom prst="rect">
-            <a:avLst/>
-          </a:prstGeom>
-          <a:noFill/>
-        </p:spPr>
-        <p:txBody>
-          <a:bodyPr wrap="square">
-            <a:noAutofit/>
-          </a:bodyPr>
-          <a:lstStyle/>
-          <a:p>
-            <a:r>
-              <a:rPr sz="1650" b="0">
-                <a:solidFill>
-                  <a:srgbClr val="1E2024"/>
-                </a:solidFill>
-                <a:latin typeface="Calibri"/>
-              </a:rPr>
-              <a:t>broker 逐台滾動升級，過程必然新舊並存</a:t>
-            </a:r>
-          </a:p>
-        </p:txBody>
-      </p:sp>
-      <p:sp>
-        <p:nvSpPr>
-          <p:cNvPr id="8" name="TextBox 7"/>
-          <p:cNvSpPr txBox="1"/>
-          <p:nvPr/>
-        </p:nvSpPr>
-        <p:spPr>
-          <a:xfrm>
-            <a:off x="640080" y="3776472"/>
-            <a:ext cx="10972800" cy="731520"/>
-          </a:xfrm>
-          <a:prstGeom prst="rect">
-            <a:avLst/>
-          </a:prstGeom>
-          <a:noFill/>
-        </p:spPr>
-        <p:txBody>
-          <a:bodyPr wrap="square">
-            <a:noAutofit/>
-          </a:bodyPr>
-          <a:lstStyle/>
-          <a:p>
-            <a:r>
-              <a:rPr sz="1500" b="0">
-                <a:solidFill>
-                  <a:srgbClr val="5F5E5A"/>
-                </a:solidFill>
-                <a:latin typeface="Calibri"/>
-              </a:rPr>
-              <a:t>有多長壽？Kafka 曾為舊 client 保留每個 protocol 版本近九年，直到 4.0（KIP-896）才把下限提到 2.1。</a:t>
-            </a:r>
-          </a:p>
-        </p:txBody>
-      </p:sp>
-      <p:sp>
-        <p:nvSpPr>
-          <p:cNvPr id="9" name="TextBox 8"/>
-          <p:cNvSpPr txBox="1"/>
-          <p:nvPr/>
-        </p:nvSpPr>
-        <p:spPr>
-          <a:xfrm>
-            <a:off x="640080" y="4636008"/>
-            <a:ext cx="10972800" cy="1097280"/>
+              <a:t>上一頁的結論是「版本無法事先統一」；但在講機制前得先知道，日常講的『版本』其實混了三個東西</a:t>
+            </a:r>
+          </a:p>
+        </p:txBody>
+      </p:sp>
+      <p:sp>
+        <p:nvSpPr>
+          <p:cNvPr id="6" name="TextBox 5"/>
+          <p:cNvSpPr txBox="1"/>
+          <p:nvPr/>
+        </p:nvSpPr>
+        <p:spPr>
+          <a:xfrm>
+            <a:off x="640080" y="3136392"/>
+            <a:ext cx="10972800" cy="1645920"/>
           </a:xfrm>
           <a:prstGeom prst="rect">
             <a:avLst/>
@@ -6313,7 +5986,7 @@
                 </a:solidFill>
                 <a:latin typeface="Calibri"/>
               </a:rPr>
-              <a:t>任一時刻：各節點支援的版本範圍（supported versions）不同</a:t>
+              <a:t>release version   = 我裝了哪版 binary            (per-node)</a:t>
             </a:r>
           </a:p>
           <a:p>
@@ -6324,7 +5997,7 @@
                 </a:solidFill>
                 <a:latin typeface="Calibri"/>
               </a:rPr>
-              <a:t>        → 不能鎖全叢集同一版（又要不停機）</a:t>
+              <a:t>metadata.version  = 叢集 finalized 的 feature level (cluster-wide)</a:t>
             </a:r>
           </a:p>
           <a:p>
@@ -6335,34 +6008,29 @@
                 </a:solidFill>
                 <a:latin typeface="Calibri"/>
               </a:rPr>
-              <a:t>        → 只能在「連線當下」決定</a:t>
-            </a:r>
-          </a:p>
-        </p:txBody>
-      </p:sp>
-      <p:sp>
-        <p:nvSpPr>
-          <p:cNvPr id="10" name="TextBox 9"/>
-          <p:cNvSpPr txBox="1"/>
-          <p:nvPr/>
-        </p:nvSpPr>
-        <p:spPr>
-          <a:xfrm>
-            <a:off x="640080" y="5934456"/>
-            <a:ext cx="10972800" cy="566928"/>
-          </a:xfrm>
-          <a:prstGeom prst="rect">
-            <a:avLst/>
-          </a:prstGeom>
-          <a:solidFill>
-            <a:srgbClr val="E9F3DE"/>
-          </a:solidFill>
-          <a:ln>
-            <a:noFill/>
-          </a:ln>
-        </p:spPr>
-        <p:txBody>
-          <a:bodyPr wrap="square" lIns="146304" tIns="82296">
+              <a:t>wire API version  = 這條連線講第幾版               (per-connection)</a:t>
+            </a:r>
+          </a:p>
+        </p:txBody>
+      </p:sp>
+      <p:sp>
+        <p:nvSpPr>
+          <p:cNvPr id="7" name="TextBox 6"/>
+          <p:cNvSpPr txBox="1"/>
+          <p:nvPr/>
+        </p:nvSpPr>
+        <p:spPr>
+          <a:xfrm>
+            <a:off x="640080" y="4983480"/>
+            <a:ext cx="10972800" cy="731520"/>
+          </a:xfrm>
+          <a:prstGeom prst="rect">
+            <a:avLst/>
+          </a:prstGeom>
+          <a:noFill/>
+        </p:spPr>
+        <p:txBody>
+          <a:bodyPr wrap="square">
             <a:noAutofit/>
           </a:bodyPr>
           <a:lstStyle/>
@@ -6370,18 +6038,18 @@
             <a:r>
               <a:rPr sz="1500" b="0">
                 <a:solidFill>
-                  <a:srgbClr val="27500A"/>
-                </a:solidFill>
-                <a:latin typeface="Calibri"/>
-              </a:rPr>
-              <a:t>這就是本場主題「溝通當下的版本選擇」的由來</a:t>
-            </a:r>
-          </a:p>
-        </p:txBody>
-      </p:sp>
-      <p:sp>
-        <p:nvSpPr>
-          <p:cNvPr id="11" name="TextBox 10"/>
+                  <a:srgbClr val="5F5E5A"/>
+                </a:solidFill>
+                <a:latin typeface="Calibri"/>
+              </a:rPr>
+              <a:t>finalize＝管理員手動宣告全叢集一致採用的 feature level（第一場《版本定義》的主題）。本場主角是 wire 版本。</a:t>
+            </a:r>
+          </a:p>
+        </p:txBody>
+      </p:sp>
+      <p:sp>
+        <p:nvSpPr>
+          <p:cNvPr id="8" name="TextBox 7"/>
           <p:cNvSpPr txBox="1"/>
           <p:nvPr/>
         </p:nvSpPr>
@@ -6411,33 +6079,32 @@
               <a:t>REF   </a:t>
             </a:r>
             <a:r>
+              <a:rPr sz="1200" b="0">
+                <a:solidFill>
+                  <a:srgbClr val="8A8A8A"/>
+                </a:solidFill>
+                <a:latin typeface="Calibri"/>
+              </a:rPr>
+              <a:t>kafka-features describe</a:t>
+            </a:r>
+            <a:r>
+              <a:rPr sz="1200" b="0">
+                <a:solidFill>
+                  <a:srgbClr val="8A8A8A"/>
+                </a:solidFill>
+                <a:latin typeface="Calibri"/>
+              </a:rPr>
+              <a:t>   ·   </a:t>
+            </a:r>
+            <a:r>
               <a:rPr sz="1200" b="0" u="sng">
                 <a:solidFill>
                   <a:srgbClr val="185FA5"/>
                 </a:solidFill>
-                <a:latin typeface="Calibri"/>
-                <a:hlinkClick r:id="rId4"/>
-              </a:rPr>
-              <a:t>KIP-896</a:t>
-            </a:r>
-            <a:r>
-              <a:rPr sz="1200" b="0">
-                <a:solidFill>
-                  <a:srgbClr val="8A8A8A"/>
-                </a:solidFill>
-                <a:latin typeface="Calibri"/>
-              </a:rPr>
-              <a:t>   ·   </a:t>
-            </a:r>
-            <a:r>
-              <a:rPr sz="1200" b="0" u="sng">
-                <a:solidFill>
-                  <a:srgbClr val="185FA5"/>
-                </a:solidFill>
                 <a:latin typeface="Courier New"/>
-                <a:hlinkClick r:id="rId5"/>
-              </a:rPr>
-              <a:t>protocol.md:94</a:t>
+                <a:hlinkClick r:id="rId3"/>
+              </a:rPr>
+              <a:t>zk2kraft.md:71</a:t>
             </a:r>
           </a:p>
         </p:txBody>
@@ -6489,7 +6156,7 @@
                 </a:solidFill>
                 <a:latin typeface="Calibri"/>
               </a:rPr>
-              <a:t>Part 1 · 術語</a:t>
+              <a:t>Part 1 · 架構 (a)</a:t>
             </a:r>
           </a:p>
         </p:txBody>
@@ -6523,21 +6190,137 @@
                 </a:solidFill>
                 <a:latin typeface="Calibri"/>
               </a:rPr>
-              <a:t>講「版本」時，其實是指哪一個？分三層</a:t>
-            </a:r>
-          </a:p>
-        </p:txBody>
-      </p:sp>
-      <p:sp>
-        <p:nvSpPr>
-          <p:cNvPr id="4" name="TextBox 3"/>
-          <p:cNvSpPr txBox="1"/>
-          <p:nvPr/>
-        </p:nvSpPr>
-        <p:spPr>
-          <a:xfrm>
-            <a:off x="640080" y="2148840"/>
-            <a:ext cx="10972800" cy="1645920"/>
+              <a:t>三種連線，分成兩類</a:t>
+            </a:r>
+          </a:p>
+        </p:txBody>
+      </p:sp>
+      <p:pic>
+        <p:nvPicPr>
+          <p:cNvPr id="4" name="Picture 3" descr="arrows-split.png"/>
+          <p:cNvPicPr>
+            <a:picLocks noChangeAspect="1"/>
+          </p:cNvPicPr>
+          <p:nvPr/>
+        </p:nvPicPr>
+        <p:blipFill>
+          <a:blip r:embed="rId2"/>
+          <a:stretch>
+            <a:fillRect/>
+          </a:stretch>
+        </p:blipFill>
+        <p:spPr>
+          <a:xfrm>
+            <a:off x="658368" y="2176272"/>
+            <a:ext cx="274320" cy="274320"/>
+          </a:xfrm>
+          <a:prstGeom prst="rect">
+            <a:avLst/>
+          </a:prstGeom>
+        </p:spPr>
+      </p:pic>
+      <p:sp>
+        <p:nvSpPr>
+          <p:cNvPr id="5" name="TextBox 4"/>
+          <p:cNvSpPr txBox="1"/>
+          <p:nvPr/>
+        </p:nvSpPr>
+        <p:spPr>
+          <a:xfrm>
+            <a:off x="1078992" y="2148840"/>
+            <a:ext cx="10515600" cy="1188720"/>
+          </a:xfrm>
+          <a:prstGeom prst="rect">
+            <a:avLst/>
+          </a:prstGeom>
+          <a:noFill/>
+        </p:spPr>
+        <p:txBody>
+          <a:bodyPr wrap="square">
+            <a:noAutofit/>
+          </a:bodyPr>
+          <a:lstStyle/>
+          <a:p>
+            <a:r>
+              <a:rPr sz="1650" b="0">
+                <a:solidFill>
+                  <a:srgbClr val="1E2024"/>
+                </a:solidFill>
+                <a:latin typeface="Calibri"/>
+              </a:rPr>
+              <a:t>會協商的兩條：client ↔ broker、broker ↔ controller——連線後先送 ApiVersionsRequest 查對方每支 API 的版本區間（KIP-35）</a:t>
+            </a:r>
+          </a:p>
+        </p:txBody>
+      </p:sp>
+      <p:pic>
+        <p:nvPicPr>
+          <p:cNvPr id="6" name="Picture 5" descr="ban.png"/>
+          <p:cNvPicPr>
+            <a:picLocks noChangeAspect="1"/>
+          </p:cNvPicPr>
+          <p:nvPr/>
+        </p:nvPicPr>
+        <p:blipFill>
+          <a:blip r:embed="rId3"/>
+          <a:stretch>
+            <a:fillRect/>
+          </a:stretch>
+        </p:blipFill>
+        <p:spPr>
+          <a:xfrm>
+            <a:off x="658368" y="3511296"/>
+            <a:ext cx="274320" cy="274320"/>
+          </a:xfrm>
+          <a:prstGeom prst="rect">
+            <a:avLst/>
+          </a:prstGeom>
+        </p:spPr>
+      </p:pic>
+      <p:sp>
+        <p:nvSpPr>
+          <p:cNvPr id="7" name="TextBox 6"/>
+          <p:cNvSpPr txBox="1"/>
+          <p:nvPr/>
+        </p:nvSpPr>
+        <p:spPr>
+          <a:xfrm>
+            <a:off x="1078992" y="3483864"/>
+            <a:ext cx="10515600" cy="1188720"/>
+          </a:xfrm>
+          <a:prstGeom prst="rect">
+            <a:avLst/>
+          </a:prstGeom>
+          <a:noFill/>
+        </p:spPr>
+        <p:txBody>
+          <a:bodyPr wrap="square">
+            <a:noAutofit/>
+          </a:bodyPr>
+          <a:lstStyle/>
+          <a:p>
+            <a:r>
+              <a:rPr sz="1650" b="0">
+                <a:solidFill>
+                  <a:srgbClr val="1E2024"/>
+                </a:solidFill>
+                <a:latin typeface="Calibri"/>
+              </a:rPr>
+              <a:t>不協商的一條：broker ↔ broker 的 partition replication——連 ApiVersionsRequest 都不送，版本由 MV 事先決定（下一張）</a:t>
+            </a:r>
+          </a:p>
+        </p:txBody>
+      </p:sp>
+      <p:sp>
+        <p:nvSpPr>
+          <p:cNvPr id="8" name="TextBox 7"/>
+          <p:cNvSpPr txBox="1"/>
+          <p:nvPr/>
+        </p:nvSpPr>
+        <p:spPr>
+          <a:xfrm>
+            <a:off x="640080" y="4818888"/>
+            <a:ext cx="10972800" cy="1097280"/>
           </a:xfrm>
           <a:prstGeom prst="rect">
             <a:avLst/>
@@ -6564,7 +6347,7 @@
                 </a:solidFill>
                 <a:latin typeface="Calibri"/>
               </a:rPr>
-              <a:t>release version   = 我裝了哪版 binary            (per-node)</a:t>
+              <a:t>client ─▶ broker        讀寫資料、查 metadata…</a:t>
             </a:r>
           </a:p>
           <a:p>
@@ -6575,7 +6358,7 @@
                 </a:solidFill>
                 <a:latin typeface="Calibri"/>
               </a:rPr>
-              <a:t>metadata.version  = 叢集 finalized 的 feature level (cluster-wide)</a:t>
+              <a:t>broker ─▶ controller    註冊、心跳、轉發 admin…</a:t>
             </a:r>
           </a:p>
           <a:p>
@@ -6586,106 +6369,14 @@
                 </a:solidFill>
                 <a:latin typeface="Calibri"/>
               </a:rPr>
-              <a:t>wire API version  = 這條連線講第幾版               (per-connection)</a:t>
-            </a:r>
-          </a:p>
-        </p:txBody>
-      </p:sp>
-      <p:pic>
-        <p:nvPicPr>
-          <p:cNvPr id="5" name="Picture 4" descr="arrows-split.png"/>
-          <p:cNvPicPr>
-            <a:picLocks noChangeAspect="1"/>
-          </p:cNvPicPr>
-          <p:nvPr/>
-        </p:nvPicPr>
-        <p:blipFill>
-          <a:blip r:embed="rId2"/>
-          <a:stretch>
-            <a:fillRect/>
-          </a:stretch>
-        </p:blipFill>
-        <p:spPr>
-          <a:xfrm>
-            <a:off x="658368" y="4023360"/>
-            <a:ext cx="274320" cy="274320"/>
-          </a:xfrm>
-          <a:prstGeom prst="rect">
-            <a:avLst/>
-          </a:prstGeom>
-        </p:spPr>
-      </p:pic>
-      <p:sp>
-        <p:nvSpPr>
-          <p:cNvPr id="6" name="TextBox 5"/>
-          <p:cNvSpPr txBox="1"/>
-          <p:nvPr/>
-        </p:nvSpPr>
-        <p:spPr>
-          <a:xfrm>
-            <a:off x="1078992" y="3995928"/>
-            <a:ext cx="10515600" cy="493776"/>
-          </a:xfrm>
-          <a:prstGeom prst="rect">
-            <a:avLst/>
-          </a:prstGeom>
-          <a:noFill/>
-        </p:spPr>
-        <p:txBody>
-          <a:bodyPr wrap="square">
-            <a:noAutofit/>
-          </a:bodyPr>
-          <a:lstStyle/>
-          <a:p>
-            <a:r>
-              <a:rPr sz="1650" b="0">
-                <a:solidFill>
-                  <a:srgbClr val="1E2024"/>
-                </a:solidFill>
-                <a:latin typeface="Calibri"/>
-              </a:rPr>
-              <a:t>三個獨立的軸、各自變動；後面提到「版本」都要先分清楚是哪一層</a:t>
-            </a:r>
-          </a:p>
-        </p:txBody>
-      </p:sp>
-      <p:sp>
-        <p:nvSpPr>
-          <p:cNvPr id="7" name="TextBox 6"/>
-          <p:cNvSpPr txBox="1"/>
-          <p:nvPr/>
-        </p:nvSpPr>
-        <p:spPr>
-          <a:xfrm>
-            <a:off x="640080" y="4636008"/>
-            <a:ext cx="10972800" cy="731520"/>
-          </a:xfrm>
-          <a:prstGeom prst="rect">
-            <a:avLst/>
-          </a:prstGeom>
-          <a:noFill/>
-        </p:spPr>
-        <p:txBody>
-          <a:bodyPr wrap="square">
-            <a:noAutofit/>
-          </a:bodyPr>
-          <a:lstStyle/>
-          <a:p>
-            <a:r>
-              <a:rPr sz="1500" b="0">
-                <a:solidFill>
-                  <a:srgbClr val="5F5E5A"/>
-                </a:solidFill>
-                <a:latin typeface="Calibri"/>
-              </a:rPr>
-              <a:t>finalize＝管理員手動宣告全叢集一致採用的 feature level；怎麼宣告是第一場《版本定義》的主題。本場主角是 wire 版本。</a:t>
-            </a:r>
-          </a:p>
-        </p:txBody>
-      </p:sp>
-      <p:sp>
-        <p:nvSpPr>
-          <p:cNvPr id="8" name="TextBox 7"/>
+              <a:t>broker ◀▶ broker        partition replication</a:t>
+            </a:r>
+          </a:p>
+        </p:txBody>
+      </p:sp>
+      <p:sp>
+        <p:nvSpPr>
+          <p:cNvPr id="9" name="TextBox 8"/>
           <p:cNvSpPr txBox="1"/>
           <p:nvPr/>
         </p:nvSpPr>
@@ -6715,21 +6406,22 @@
               <a:t>REF   </a:t>
             </a:r>
             <a:r>
+              <a:rPr sz="1200" b="0" u="sng">
+                <a:solidFill>
+                  <a:srgbClr val="185FA5"/>
+                </a:solidFill>
+                <a:latin typeface="Calibri"/>
+                <a:hlinkClick r:id="rId4"/>
+              </a:rPr>
+              <a:t>KIP-35</a:t>
+            </a:r>
+            <a:r>
               <a:rPr sz="1200" b="0">
                 <a:solidFill>
                   <a:srgbClr val="8A8A8A"/>
                 </a:solidFill>
                 <a:latin typeface="Calibri"/>
               </a:rPr>
-              <a:t>kafka-features describe</a:t>
-            </a:r>
-            <a:r>
-              <a:rPr sz="1200" b="0">
-                <a:solidFill>
-                  <a:srgbClr val="8A8A8A"/>
-                </a:solidFill>
-                <a:latin typeface="Calibri"/>
-              </a:rPr>
               <a:t>   ·   </a:t>
             </a:r>
             <a:r>
@@ -6738,9 +6430,9 @@
                   <a:srgbClr val="185FA5"/>
                 </a:solidFill>
                 <a:latin typeface="Courier New"/>
-                <a:hlinkClick r:id="rId3"/>
-              </a:rPr>
-              <a:t>zk2kraft.md:71</a:t>
+                <a:hlinkClick r:id="rId5"/>
+              </a:rPr>
+              <a:t>latestUsableVersion</a:t>
             </a:r>
           </a:p>
         </p:txBody>
@@ -6792,7 +6484,7 @@
                 </a:solidFill>
                 <a:latin typeface="Calibri"/>
               </a:rPr>
-              <a:t>Part 1 · 架構 (a)</a:t>
+              <a:t>Part 1 · 架構 (b)</a:t>
             </a:r>
           </a:p>
         </p:txBody>
@@ -6826,79 +6518,21 @@
                 </a:solidFill>
                 <a:latin typeface="Calibri"/>
               </a:rPr>
-              <a:t>先認識叢集裡的三種連線</a:t>
-            </a:r>
-          </a:p>
-        </p:txBody>
-      </p:sp>
-      <p:pic>
-        <p:nvPicPr>
-          <p:cNvPr id="4" name="Picture 3" descr="arrows-split.png"/>
-          <p:cNvPicPr>
-            <a:picLocks noChangeAspect="1"/>
-          </p:cNvPicPr>
-          <p:nvPr/>
-        </p:nvPicPr>
-        <p:blipFill>
-          <a:blip r:embed="rId2"/>
-          <a:stretch>
-            <a:fillRect/>
-          </a:stretch>
-        </p:blipFill>
-        <p:spPr>
-          <a:xfrm>
-            <a:off x="658368" y="2176272"/>
-            <a:ext cx="274320" cy="274320"/>
-          </a:xfrm>
-          <a:prstGeom prst="rect">
-            <a:avLst/>
-          </a:prstGeom>
-        </p:spPr>
-      </p:pic>
-      <p:sp>
-        <p:nvSpPr>
-          <p:cNvPr id="5" name="TextBox 4"/>
-          <p:cNvSpPr txBox="1"/>
-          <p:nvPr/>
-        </p:nvSpPr>
-        <p:spPr>
-          <a:xfrm>
-            <a:off x="1078992" y="2148840"/>
-            <a:ext cx="10515600" cy="841248"/>
-          </a:xfrm>
-          <a:prstGeom prst="rect">
-            <a:avLst/>
-          </a:prstGeom>
-          <a:noFill/>
-        </p:spPr>
-        <p:txBody>
-          <a:bodyPr wrap="square">
-            <a:noAutofit/>
-          </a:bodyPr>
-          <a:lstStyle/>
-          <a:p>
-            <a:r>
-              <a:rPr sz="1650" b="0">
-                <a:solidFill>
-                  <a:srgbClr val="1E2024"/>
-                </a:solidFill>
-                <a:latin typeface="Calibri"/>
-              </a:rPr>
-              <a:t>要協商的連線，會在建立後先送一支 ApiVersionsRequest 查詢對方「每支 API 支援哪個版本區間？」（KIP-35）——但不是每條都協商</a:t>
-            </a:r>
-          </a:p>
-        </p:txBody>
-      </p:sp>
-      <p:sp>
-        <p:nvSpPr>
-          <p:cNvPr id="6" name="TextBox 5"/>
-          <p:cNvSpPr txBox="1"/>
-          <p:nvPr/>
-        </p:nvSpPr>
-        <p:spPr>
-          <a:xfrm>
-            <a:off x="640080" y="3136392"/>
-            <a:ext cx="10972800" cy="1371600"/>
+              <a:t>查詢之後，最終版本誰說了算？</a:t>
+            </a:r>
+          </a:p>
+        </p:txBody>
+      </p:sp>
+      <p:sp>
+        <p:nvSpPr>
+          <p:cNvPr id="4" name="TextBox 3"/>
+          <p:cNvSpPr txBox="1"/>
+          <p:nvPr/>
+        </p:nvSpPr>
+        <p:spPr>
+          <a:xfrm>
+            <a:off x="640080" y="2148840"/>
+            <a:ext cx="10972800" cy="1097280"/>
           </a:xfrm>
           <a:prstGeom prst="rect">
             <a:avLst/>
@@ -6925,7 +6559,7 @@
                 </a:solidFill>
                 <a:latin typeface="Calibri"/>
               </a:rPr>
-              <a:t>client ─▶ broker        讀寫資料、查 metadata…      連線後先查詢</a:t>
+              <a:t>client ↔ broker              協商，取交集最高</a:t>
             </a:r>
           </a:p>
           <a:p>
@@ -6936,7 +6570,7 @@
                 </a:solidFill>
                 <a:latin typeface="Calibri"/>
               </a:rPr>
-              <a:t>broker ─▶ controller    註冊、心跳、轉發 admin…      連線後先查詢</a:t>
+              <a:t>broker ↔ controller          也協商（broker 當 client）</a:t>
             </a:r>
           </a:p>
           <a:p>
@@ -6947,7 +6581,65 @@
                 </a:solidFill>
                 <a:latin typeface="Calibri"/>
               </a:rPr>
-              <a:t>broker ◀▶ broker        partition replication        不查詢（下一張說明）</a:t>
+              <a:t>broker ↔ broker replication  不協商——由 finalized MV 決定</a:t>
+            </a:r>
+          </a:p>
+        </p:txBody>
+      </p:sp>
+      <p:pic>
+        <p:nvPicPr>
+          <p:cNvPr id="5" name="Picture 4" descr="ban.png"/>
+          <p:cNvPicPr>
+            <a:picLocks noChangeAspect="1"/>
+          </p:cNvPicPr>
+          <p:nvPr/>
+        </p:nvPicPr>
+        <p:blipFill>
+          <a:blip r:embed="rId2"/>
+          <a:stretch>
+            <a:fillRect/>
+          </a:stretch>
+        </p:blipFill>
+        <p:spPr>
+          <a:xfrm>
+            <a:off x="658368" y="3474720"/>
+            <a:ext cx="274320" cy="274320"/>
+          </a:xfrm>
+          <a:prstGeom prst="rect">
+            <a:avLst/>
+          </a:prstGeom>
+        </p:spPr>
+      </p:pic>
+      <p:sp>
+        <p:nvSpPr>
+          <p:cNvPr id="6" name="TextBox 5"/>
+          <p:cNvSpPr txBox="1"/>
+          <p:nvPr/>
+        </p:nvSpPr>
+        <p:spPr>
+          <a:xfrm>
+            <a:off x="1078992" y="3447288"/>
+            <a:ext cx="10515600" cy="1188720"/>
+          </a:xfrm>
+          <a:prstGeom prst="rect">
+            <a:avLst/>
+          </a:prstGeom>
+          <a:noFill/>
+        </p:spPr>
+        <p:txBody>
+          <a:bodyPr wrap="square">
+            <a:noAutofit/>
+          </a:bodyPr>
+          <a:lstStyle/>
+          <a:p>
+            <a:r>
+              <a:rPr sz="1650" b="0">
+                <a:solidFill>
+                  <a:srgbClr val="1E2024"/>
+                </a:solidFill>
+                <a:latin typeface="Calibri"/>
+              </a:rPr>
+              <a:t>replication 連 ApiVersionsRequest 都不送（discoverBrokerVersions=false）：版本已由 finalized MV 決定，直接照該版本送</a:t>
             </a:r>
           </a:p>
         </p:txBody>
@@ -6960,7 +6652,46 @@
         </p:nvSpPr>
         <p:spPr>
           <a:xfrm>
-            <a:off x="640080" y="4709160"/>
+            <a:off x="640080" y="4782312"/>
+            <a:ext cx="10972800" cy="1188720"/>
+          </a:xfrm>
+          <a:prstGeom prst="rect">
+            <a:avLst/>
+          </a:prstGeom>
+          <a:solidFill>
+            <a:srgbClr val="E9F3DE"/>
+          </a:solidFill>
+          <a:ln>
+            <a:noFill/>
+          </a:ln>
+        </p:spPr>
+        <p:txBody>
+          <a:bodyPr wrap="square" lIns="146304" tIns="82296">
+            <a:noAutofit/>
+          </a:bodyPr>
+          <a:lstStyle/>
+          <a:p>
+            <a:r>
+              <a:rPr sz="1500" b="0">
+                <a:solidFill>
+                  <a:srgbClr val="27500A"/>
+                </a:solidFill>
+                <a:latin typeface="Calibri"/>
+              </a:rPr>
+              <a:t>為什麼 replication 例外？它要求所有 follower↔leader 講同一版，才交給 finalized MV 集中決定；帳單是升級變兩階段（先滾 binary、再 finalize）——一致性拿彈性換</a:t>
+            </a:r>
+          </a:p>
+        </p:txBody>
+      </p:sp>
+      <p:sp>
+        <p:nvSpPr>
+          <p:cNvPr id="8" name="TextBox 7"/>
+          <p:cNvSpPr txBox="1"/>
+          <p:nvPr/>
+        </p:nvSpPr>
+        <p:spPr>
+          <a:xfrm>
+            <a:off x="640080" y="6153912"/>
             <a:ext cx="10972800" cy="438912"/>
           </a:xfrm>
           <a:prstGeom prst="rect">
@@ -6981,14 +6712,14 @@
                 </a:solidFill>
                 <a:latin typeface="Calibri"/>
               </a:rPr>
-              <a:t>每列的 RPC 只列代表性的幾種、非窮舉。</a:t>
-            </a:r>
-          </a:p>
-        </p:txBody>
-      </p:sp>
-      <p:sp>
-        <p:nvSpPr>
-          <p:cNvPr id="8" name="TextBox 7"/>
+              <a:t>機制上，決定權在組出 request 的程式碼宣告的允許版本範圍；ListOffsets 等更細差異見 blog 附錄。</a:t>
+            </a:r>
+          </a:p>
+        </p:txBody>
+      </p:sp>
+      <p:sp>
+        <p:nvSpPr>
+          <p:cNvPr id="9" name="TextBox 8"/>
           <p:cNvSpPr txBox="1"/>
           <p:nvPr/>
         </p:nvSpPr>
@@ -7022,10 +6753,10 @@
                 <a:solidFill>
                   <a:srgbClr val="185FA5"/>
                 </a:solidFill>
-                <a:latin typeface="Calibri"/>
+                <a:latin typeface="Courier New"/>
                 <a:hlinkClick r:id="rId3"/>
               </a:rPr>
-              <a:t>KIP-35</a:t>
+              <a:t>fetchRequestVersion</a:t>
             </a:r>
             <a:r>
               <a:rPr sz="1200" b="0">
@@ -7044,7 +6775,26 @@
                 <a:latin typeface="Courier New"/>
                 <a:hlinkClick r:id="rId4"/>
               </a:rPr>
-              <a:t>latestUsableVersion</a:t>
+              <a:t>discoverBrokerVersions=false</a:t>
+            </a:r>
+            <a:r>
+              <a:rPr sz="1200" b="0">
+                <a:solidFill>
+                  <a:srgbClr val="8A8A8A"/>
+                </a:solidFill>
+                <a:latin typeface="Calibri"/>
+              </a:rPr>
+              <a:t>   ·   </a:t>
+            </a:r>
+            <a:r>
+              <a:rPr sz="1200" b="0" u="sng">
+                <a:solidFill>
+                  <a:srgbClr val="185FA5"/>
+                </a:solidFill>
+                <a:latin typeface="Courier New"/>
+                <a:hlinkClick r:id="rId5"/>
+              </a:rPr>
+              <a:t>RemoteLeaderEndPoint.scala:215</a:t>
             </a:r>
           </a:p>
         </p:txBody>
@@ -7096,7 +6846,7 @@
                 </a:solidFill>
                 <a:latin typeface="Calibri"/>
               </a:rPr>
-              <a:t>Part 1 · 架構 (b)</a:t>
+              <a:t>Part 1 · 舉例</a:t>
             </a:r>
           </a:p>
         </p:txBody>
@@ -7109,8 +6859,8 @@
         </p:nvSpPr>
         <p:spPr>
           <a:xfrm>
-            <a:off x="640080" y="841248"/>
-            <a:ext cx="10972800" cy="1005840"/>
+            <a:off x="640080" y="822960"/>
+            <a:ext cx="10972800" cy="640080"/>
           </a:xfrm>
           <a:prstGeom prst="rect">
             <a:avLst/>
@@ -7124,13 +6874,13 @@
           <a:lstStyle/>
           <a:p>
             <a:r>
-              <a:rPr sz="3200" b="1">
+              <a:rPr sz="2900" b="1">
                 <a:solidFill>
                   <a:srgbClr val="1E2024"/>
                 </a:solidFill>
                 <a:latin typeface="Calibri"/>
               </a:rPr>
-              <a:t>查詢之後，最終版本誰說了算？</a:t>
+              <a:t>以一支 Fetch 為例：consumer 協商、replica 由 MV</a:t>
             </a:r>
           </a:p>
         </p:txBody>
@@ -7143,64 +6893,35 @@
         </p:nvSpPr>
         <p:spPr>
           <a:xfrm>
-            <a:off x="640080" y="2148840"/>
-            <a:ext cx="10972800" cy="1097280"/>
-          </a:xfrm>
-          <a:prstGeom prst="rect">
-            <a:avLst/>
-          </a:prstGeom>
-          <a:solidFill>
-            <a:srgbClr val="F3F1EC"/>
-          </a:solidFill>
-          <a:ln w="6350">
-            <a:solidFill>
-              <a:srgbClr val="E3E0D8"/>
-            </a:solidFill>
-          </a:ln>
-        </p:spPr>
-        <p:txBody>
-          <a:bodyPr wrap="square" lIns="146304" tIns="91440" bIns="91440">
-            <a:noAutofit/>
-          </a:bodyPr>
-          <a:lstStyle/>
-          <a:p>
-            <a:r>
-              <a:rPr sz="1350" b="0">
-                <a:solidFill>
-                  <a:srgbClr val="2C2C2A"/>
-                </a:solidFill>
-                <a:latin typeface="Calibri"/>
-              </a:rPr>
-              <a:t>client ↔ broker              協商，取交集最高</a:t>
-            </a:r>
-          </a:p>
-          <a:p>
-            <a:r>
-              <a:rPr sz="1350" b="0">
-                <a:solidFill>
-                  <a:srgbClr val="2C2C2A"/>
-                </a:solidFill>
-                <a:latin typeface="Calibri"/>
-              </a:rPr>
-              <a:t>broker ↔ controller          也協商（broker 當 client）</a:t>
-            </a:r>
-          </a:p>
-          <a:p>
-            <a:r>
-              <a:rPr sz="1350" b="0">
-                <a:solidFill>
-                  <a:srgbClr val="2C2C2A"/>
-                </a:solidFill>
-                <a:latin typeface="Calibri"/>
-              </a:rPr>
-              <a:t>broker ↔ broker replication  不協商——由 finalized MV 決定</a:t>
+            <a:off x="640080" y="1481328"/>
+            <a:ext cx="10972800" cy="365760"/>
+          </a:xfrm>
+          <a:prstGeom prst="rect">
+            <a:avLst/>
+          </a:prstGeom>
+          <a:noFill/>
+        </p:spPr>
+        <p:txBody>
+          <a:bodyPr wrap="square">
+            <a:noAutofit/>
+          </a:bodyPr>
+          <a:lstStyle/>
+          <a:p>
+            <a:r>
+              <a:rPr sz="1400" b="0">
+                <a:solidFill>
+                  <a:srgbClr val="5F5E5A"/>
+                </a:solidFill>
+                <a:latin typeface="Calibri"/>
+              </a:rPr>
+              <a:t>同一支 Fetch 兩種身分：consumer fetch 走 client↔broker、replica fetch 走 broker↔broker</a:t>
             </a:r>
           </a:p>
         </p:txBody>
       </p:sp>
       <p:pic>
         <p:nvPicPr>
-          <p:cNvPr id="5" name="Picture 4" descr="ban.png"/>
+          <p:cNvPr id="5" name="Picture 4" descr="s2a-rangeline.png"/>
           <p:cNvPicPr>
             <a:picLocks noChangeAspect="1"/>
           </p:cNvPicPr>
@@ -7214,8 +6935,8 @@
         </p:blipFill>
         <p:spPr>
           <a:xfrm>
-            <a:off x="658368" y="3474720"/>
-            <a:ext cx="274320" cy="274320"/>
+            <a:off x="1664208" y="1965960"/>
+            <a:ext cx="8869680" cy="4093698"/>
           </a:xfrm>
           <a:prstGeom prst="rect">
             <a:avLst/>
@@ -7225,113 +6946,6 @@
       <p:sp>
         <p:nvSpPr>
           <p:cNvPr id="6" name="TextBox 5"/>
-          <p:cNvSpPr txBox="1"/>
-          <p:nvPr/>
-        </p:nvSpPr>
-        <p:spPr>
-          <a:xfrm>
-            <a:off x="1078992" y="3447288"/>
-            <a:ext cx="10515600" cy="1188720"/>
-          </a:xfrm>
-          <a:prstGeom prst="rect">
-            <a:avLst/>
-          </a:prstGeom>
-          <a:noFill/>
-        </p:spPr>
-        <p:txBody>
-          <a:bodyPr wrap="square">
-            <a:noAutofit/>
-          </a:bodyPr>
-          <a:lstStyle/>
-          <a:p>
-            <a:r>
-              <a:rPr sz="1650" b="0">
-                <a:solidFill>
-                  <a:srgbClr val="1E2024"/>
-                </a:solidFill>
-                <a:latin typeface="Calibri"/>
-              </a:rPr>
-              <a:t>replication 連 ApiVersionsRequest 都不送（discoverBrokerVersions=false）：版本已由 finalized MV 決定，直接照該版本送</a:t>
-            </a:r>
-          </a:p>
-        </p:txBody>
-      </p:sp>
-      <p:sp>
-        <p:nvSpPr>
-          <p:cNvPr id="7" name="TextBox 6"/>
-          <p:cNvSpPr txBox="1"/>
-          <p:nvPr/>
-        </p:nvSpPr>
-        <p:spPr>
-          <a:xfrm>
-            <a:off x="640080" y="4782312"/>
-            <a:ext cx="10972800" cy="1188720"/>
-          </a:xfrm>
-          <a:prstGeom prst="rect">
-            <a:avLst/>
-          </a:prstGeom>
-          <a:solidFill>
-            <a:srgbClr val="E9F3DE"/>
-          </a:solidFill>
-          <a:ln>
-            <a:noFill/>
-          </a:ln>
-        </p:spPr>
-        <p:txBody>
-          <a:bodyPr wrap="square" lIns="146304" tIns="82296">
-            <a:noAutofit/>
-          </a:bodyPr>
-          <a:lstStyle/>
-          <a:p>
-            <a:r>
-              <a:rPr sz="1500" b="0">
-                <a:solidFill>
-                  <a:srgbClr val="27500A"/>
-                </a:solidFill>
-                <a:latin typeface="Calibri"/>
-              </a:rPr>
-              <a:t>為什麼 replication 例外？它要求所有 follower↔leader 講同一版，才交給 finalized MV 集中決定；帳單是升級變兩階段（先滾 binary、再 finalize）——一致性拿彈性換</a:t>
-            </a:r>
-          </a:p>
-        </p:txBody>
-      </p:sp>
-      <p:sp>
-        <p:nvSpPr>
-          <p:cNvPr id="8" name="TextBox 7"/>
-          <p:cNvSpPr txBox="1"/>
-          <p:nvPr/>
-        </p:nvSpPr>
-        <p:spPr>
-          <a:xfrm>
-            <a:off x="640080" y="6153912"/>
-            <a:ext cx="10972800" cy="438912"/>
-          </a:xfrm>
-          <a:prstGeom prst="rect">
-            <a:avLst/>
-          </a:prstGeom>
-          <a:noFill/>
-        </p:spPr>
-        <p:txBody>
-          <a:bodyPr wrap="square">
-            <a:noAutofit/>
-          </a:bodyPr>
-          <a:lstStyle/>
-          <a:p>
-            <a:r>
-              <a:rPr sz="1500" b="0">
-                <a:solidFill>
-                  <a:srgbClr val="5F5E5A"/>
-                </a:solidFill>
-                <a:latin typeface="Calibri"/>
-              </a:rPr>
-              <a:t>機制上，決定權在組出 request 的程式碼宣告的允許版本範圍；ListOffsets 等更細差異見 blog 附錄。</a:t>
-            </a:r>
-          </a:p>
-        </p:txBody>
-      </p:sp>
-      <p:sp>
-        <p:nvSpPr>
-          <p:cNvPr id="9" name="TextBox 8"/>
           <p:cNvSpPr txBox="1"/>
           <p:nvPr/>
         </p:nvSpPr>
@@ -7368,7 +6982,7 @@
                 <a:latin typeface="Courier New"/>
                 <a:hlinkClick r:id="rId3"/>
               </a:rPr>
-              <a:t>fetchRequestVersion</a:t>
+              <a:t>forConsumer/forReplica</a:t>
             </a:r>
             <a:r>
               <a:rPr sz="1200" b="0">
@@ -7387,7 +7001,7 @@
                 <a:latin typeface="Courier New"/>
                 <a:hlinkClick r:id="rId4"/>
               </a:rPr>
-              <a:t>discoverBrokerVersions=false</a:t>
+              <a:t>fetchRequestVersion</a:t>
             </a:r>
             <a:r>
               <a:rPr sz="1200" b="0">
@@ -7406,7 +7020,7 @@
                 <a:latin typeface="Courier New"/>
                 <a:hlinkClick r:id="rId5"/>
               </a:rPr>
-              <a:t>RemoteLeaderEndPoint.scala:215</a:t>
+              <a:t>validVersions</a:t>
             </a:r>
           </a:p>
         </p:txBody>
@@ -7820,7 +7434,7 @@
                 </a:solidFill>
                 <a:latin typeface="Calibri"/>
               </a:rPr>
-              <a:t>Part 1 · 舉例</a:t>
+              <a:t>隨堂考 · 核心</a:t>
             </a:r>
           </a:p>
         </p:txBody>
@@ -7833,8 +7447,8 @@
         </p:nvSpPr>
         <p:spPr>
           <a:xfrm>
-            <a:off x="640080" y="822960"/>
-            <a:ext cx="10972800" cy="640080"/>
+            <a:off x="640080" y="841248"/>
+            <a:ext cx="10972800" cy="1188720"/>
           </a:xfrm>
           <a:prstGeom prst="rect">
             <a:avLst/>
@@ -7848,13 +7462,13 @@
           <a:lstStyle/>
           <a:p>
             <a:r>
-              <a:rPr sz="2900" b="1">
+              <a:rPr sz="2600" b="1">
                 <a:solidFill>
                   <a:srgbClr val="1E2024"/>
                 </a:solidFill>
                 <a:latin typeface="Calibri"/>
               </a:rPr>
-              <a:t>以一支 Fetch 為例：consumer 協商、replica 由 MV</a:t>
+              <a:t>replica fetch（broker↔broker）的 Fetch 版本怎麼決定？</a:t>
             </a:r>
           </a:p>
         </p:txBody>
@@ -7867,8 +7481,8 @@
         </p:nvSpPr>
         <p:spPr>
           <a:xfrm>
-            <a:off x="640080" y="1481328"/>
-            <a:ext cx="10972800" cy="365760"/>
+            <a:off x="822960" y="2331720"/>
+            <a:ext cx="10515600" cy="493776"/>
           </a:xfrm>
           <a:prstGeom prst="rect">
             <a:avLst/>
@@ -7882,119 +7496,185 @@
           <a:lstStyle/>
           <a:p>
             <a:r>
+              <a:rPr sz="1600" b="0">
+                <a:solidFill>
+                  <a:srgbClr val="1E2024"/>
+                </a:solidFill>
+                <a:latin typeface="Calibri"/>
+              </a:rPr>
+              <a:t>A.  </a:t>
+            </a:r>
+            <a:r>
+              <a:rPr sz="1600" b="0">
+                <a:solidFill>
+                  <a:srgbClr val="1E2024"/>
+                </a:solidFill>
+                <a:latin typeface="Calibri"/>
+              </a:rPr>
+              <a:t>兩 broker ApiVersions 協商取交集</a:t>
+            </a:r>
+          </a:p>
+        </p:txBody>
+      </p:sp>
+      <p:sp>
+        <p:nvSpPr>
+          <p:cNvPr id="5" name="TextBox 4"/>
+          <p:cNvSpPr txBox="1"/>
+          <p:nvPr/>
+        </p:nvSpPr>
+        <p:spPr>
+          <a:xfrm>
+            <a:off x="822960" y="2953512"/>
+            <a:ext cx="10515600" cy="493776"/>
+          </a:xfrm>
+          <a:prstGeom prst="rect">
+            <a:avLst/>
+          </a:prstGeom>
+          <a:noFill/>
+        </p:spPr>
+        <p:txBody>
+          <a:bodyPr wrap="square">
+            <a:noAutofit/>
+          </a:bodyPr>
+          <a:lstStyle/>
+          <a:p>
+            <a:r>
+              <a:rPr sz="1600" b="0">
+                <a:solidFill>
+                  <a:srgbClr val="1E2024"/>
+                </a:solidFill>
+                <a:latin typeface="Calibri"/>
+              </a:rPr>
+              <a:t>B.  </a:t>
+            </a:r>
+            <a:r>
+              <a:rPr sz="1600" b="0">
+                <a:solidFill>
+                  <a:srgbClr val="1E2024"/>
+                </a:solidFill>
+                <a:latin typeface="Calibri"/>
+              </a:rPr>
+              <a:t>由 finalized metadata.version 決定</a:t>
+            </a:r>
+          </a:p>
+        </p:txBody>
+      </p:sp>
+      <p:sp>
+        <p:nvSpPr>
+          <p:cNvPr id="6" name="TextBox 5"/>
+          <p:cNvSpPr txBox="1"/>
+          <p:nvPr/>
+        </p:nvSpPr>
+        <p:spPr>
+          <a:xfrm>
+            <a:off x="822960" y="3575304"/>
+            <a:ext cx="10515600" cy="493776"/>
+          </a:xfrm>
+          <a:prstGeom prst="rect">
+            <a:avLst/>
+          </a:prstGeom>
+          <a:noFill/>
+        </p:spPr>
+        <p:txBody>
+          <a:bodyPr wrap="square">
+            <a:noAutofit/>
+          </a:bodyPr>
+          <a:lstStyle/>
+          <a:p>
+            <a:r>
+              <a:rPr sz="1600" b="0">
+                <a:solidFill>
+                  <a:srgbClr val="1E2024"/>
+                </a:solidFill>
+                <a:latin typeface="Calibri"/>
+              </a:rPr>
+              <a:t>C.  </a:t>
+            </a:r>
+            <a:r>
+              <a:rPr sz="1600" b="0">
+                <a:solidFill>
+                  <a:srgbClr val="1E2024"/>
+                </a:solidFill>
+                <a:latin typeface="Calibri"/>
+              </a:rPr>
+              <a:t>永遠用最新版</a:t>
+            </a:r>
+          </a:p>
+        </p:txBody>
+      </p:sp>
+      <p:sp>
+        <p:nvSpPr>
+          <p:cNvPr id="7" name="TextBox 6"/>
+          <p:cNvSpPr txBox="1"/>
+          <p:nvPr/>
+        </p:nvSpPr>
+        <p:spPr>
+          <a:xfrm>
+            <a:off x="822960" y="4197096"/>
+            <a:ext cx="10515600" cy="493776"/>
+          </a:xfrm>
+          <a:prstGeom prst="rect">
+            <a:avLst/>
+          </a:prstGeom>
+          <a:noFill/>
+        </p:spPr>
+        <p:txBody>
+          <a:bodyPr wrap="square">
+            <a:noAutofit/>
+          </a:bodyPr>
+          <a:lstStyle/>
+          <a:p>
+            <a:r>
+              <a:rPr sz="1600" b="0">
+                <a:solidFill>
+                  <a:srgbClr val="1E2024"/>
+                </a:solidFill>
+                <a:latin typeface="Calibri"/>
+              </a:rPr>
+              <a:t>D.  </a:t>
+            </a:r>
+            <a:r>
+              <a:rPr sz="1600" b="0">
+                <a:solidFill>
+                  <a:srgbClr val="1E2024"/>
+                </a:solidFill>
+                <a:latin typeface="Calibri"/>
+              </a:rPr>
+              <a:t>controller 每次指定</a:t>
+            </a:r>
+          </a:p>
+        </p:txBody>
+      </p:sp>
+      <p:sp>
+        <p:nvSpPr>
+          <p:cNvPr id="8" name="TextBox 7"/>
+          <p:cNvSpPr txBox="1"/>
+          <p:nvPr/>
+        </p:nvSpPr>
+        <p:spPr>
+          <a:xfrm>
+            <a:off x="640080" y="4910327"/>
+            <a:ext cx="10972800" cy="914400"/>
+          </a:xfrm>
+          <a:prstGeom prst="rect">
+            <a:avLst/>
+          </a:prstGeom>
+          <a:noFill/>
+        </p:spPr>
+        <p:txBody>
+          <a:bodyPr wrap="square">
+            <a:noAutofit/>
+          </a:bodyPr>
+          <a:lstStyle/>
+          <a:p>
+            <a:r>
               <a:rPr sz="1400" b="0">
                 <a:solidFill>
-                  <a:srgbClr val="5F5E5A"/>
-                </a:solidFill>
-                <a:latin typeface="Calibri"/>
-              </a:rPr>
-              <a:t>同一支 Fetch 兩種身分：consumer fetch 走 client↔broker、replica fetch 走 broker↔broker</a:t>
-            </a:r>
-          </a:p>
-        </p:txBody>
-      </p:sp>
-      <p:pic>
-        <p:nvPicPr>
-          <p:cNvPr id="5" name="Picture 4" descr="s2a-rangeline.png"/>
-          <p:cNvPicPr>
-            <a:picLocks noChangeAspect="1"/>
-          </p:cNvPicPr>
-          <p:nvPr/>
-        </p:nvPicPr>
-        <p:blipFill>
-          <a:blip r:embed="rId2"/>
-          <a:stretch>
-            <a:fillRect/>
-          </a:stretch>
-        </p:blipFill>
-        <p:spPr>
-          <a:xfrm>
-            <a:off x="1664208" y="1965960"/>
-            <a:ext cx="8869680" cy="4093698"/>
-          </a:xfrm>
-          <a:prstGeom prst="rect">
-            <a:avLst/>
-          </a:prstGeom>
-        </p:spPr>
-      </p:pic>
-      <p:sp>
-        <p:nvSpPr>
-          <p:cNvPr id="6" name="TextBox 5"/>
-          <p:cNvSpPr txBox="1"/>
-          <p:nvPr/>
-        </p:nvSpPr>
-        <p:spPr>
-          <a:xfrm>
-            <a:off x="640080" y="6400800"/>
-            <a:ext cx="10972800" cy="384048"/>
-          </a:xfrm>
-          <a:prstGeom prst="rect">
-            <a:avLst/>
-          </a:prstGeom>
-          <a:noFill/>
-        </p:spPr>
-        <p:txBody>
-          <a:bodyPr wrap="square">
-            <a:noAutofit/>
-          </a:bodyPr>
-          <a:lstStyle/>
-          <a:p>
-            <a:r>
-              <a:rPr sz="1200" b="1">
-                <a:solidFill>
                   <a:srgbClr val="8A8A8A"/>
                 </a:solidFill>
                 <a:latin typeface="Calibri"/>
               </a:rPr>
-              <a:t>REF   </a:t>
-            </a:r>
-            <a:r>
-              <a:rPr sz="1200" b="0" u="sng">
-                <a:solidFill>
-                  <a:srgbClr val="185FA5"/>
-                </a:solidFill>
-                <a:latin typeface="Courier New"/>
-                <a:hlinkClick r:id="rId3"/>
-              </a:rPr>
-              <a:t>forConsumer/forReplica</a:t>
-            </a:r>
-            <a:r>
-              <a:rPr sz="1200" b="0">
-                <a:solidFill>
-                  <a:srgbClr val="8A8A8A"/>
-                </a:solidFill>
-                <a:latin typeface="Calibri"/>
-              </a:rPr>
-              <a:t>   ·   </a:t>
-            </a:r>
-            <a:r>
-              <a:rPr sz="1200" b="0" u="sng">
-                <a:solidFill>
-                  <a:srgbClr val="185FA5"/>
-                </a:solidFill>
-                <a:latin typeface="Courier New"/>
-                <a:hlinkClick r:id="rId4"/>
-              </a:rPr>
-              <a:t>fetchRequestVersion</a:t>
-            </a:r>
-            <a:r>
-              <a:rPr sz="1200" b="0">
-                <a:solidFill>
-                  <a:srgbClr val="8A8A8A"/>
-                </a:solidFill>
-                <a:latin typeface="Calibri"/>
-              </a:rPr>
-              <a:t>   ·   </a:t>
-            </a:r>
-            <a:r>
-              <a:rPr sz="1200" b="0" u="sng">
-                <a:solidFill>
-                  <a:srgbClr val="185FA5"/>
-                </a:solidFill>
-                <a:latin typeface="Courier New"/>
-                <a:hlinkClick r:id="rId5"/>
-              </a:rPr>
-              <a:t>validVersions</a:t>
+              <a:t>想一想 —— 下一頁公布答案</a:t>
             </a:r>
           </a:p>
         </p:txBody>

--- a/study/version-control/kafka-version-negotiation.pptx
+++ b/study/version-control/kafka-version-negotiation.pptx
@@ -20,6 +20,7 @@
     <p:sldId id="268" r:id="rId19"/>
     <p:sldId id="269" r:id="rId20"/>
     <p:sldId id="270" r:id="rId21"/>
+    <p:sldId id="271" r:id="rId22"/>
   </p:sldIdLst>
   <p:sldSz cx="12191695" cy="6858000" type="screen4x3"/>
   <p:notesSz cx="6858000" cy="9144000"/>
@@ -3328,7 +3329,7 @@
                 </a:solidFill>
                 <a:latin typeface="Calibri"/>
               </a:rPr>
-              <a:t>隨堂考 · 核心　（正解）</a:t>
+              <a:t>隨堂考 · 核心</a:t>
             </a:r>
           </a:p>
         </p:txBody>
@@ -3424,36 +3425,31 @@
           <a:prstGeom prst="rect">
             <a:avLst/>
           </a:prstGeom>
-          <a:solidFill>
-            <a:srgbClr val="E9F3DE"/>
-          </a:solidFill>
-          <a:ln>
-            <a:noFill/>
-          </a:ln>
-        </p:spPr>
-        <p:txBody>
-          <a:bodyPr wrap="square" lIns="128016" tIns="54864">
-            <a:noAutofit/>
-          </a:bodyPr>
-          <a:lstStyle/>
-          <a:p>
-            <a:r>
-              <a:rPr sz="1600" b="1">
-                <a:solidFill>
-                  <a:srgbClr val="27500A"/>
+          <a:noFill/>
+        </p:spPr>
+        <p:txBody>
+          <a:bodyPr wrap="square">
+            <a:noAutofit/>
+          </a:bodyPr>
+          <a:lstStyle/>
+          <a:p>
+            <a:r>
+              <a:rPr sz="1600" b="0">
+                <a:solidFill>
+                  <a:srgbClr val="1E2024"/>
                 </a:solidFill>
                 <a:latin typeface="Calibri"/>
               </a:rPr>
               <a:t>B.  </a:t>
             </a:r>
             <a:r>
-              <a:rPr sz="1600" b="1">
-                <a:solidFill>
-                  <a:srgbClr val="27500A"/>
-                </a:solidFill>
-                <a:latin typeface="Calibri"/>
-              </a:rPr>
-              <a:t>由 finalized metadata.version 決定   ✓</a:t>
+              <a:rPr sz="1600" b="0">
+                <a:solidFill>
+                  <a:srgbClr val="1E2024"/>
+                </a:solidFill>
+                <a:latin typeface="Calibri"/>
+              </a:rPr>
+              <a:t>由 finalized metadata.version 決定</a:t>
             </a:r>
           </a:p>
         </p:txBody>
@@ -3567,85 +3563,13 @@
           <a:lstStyle/>
           <a:p>
             <a:r>
-              <a:rPr sz="1400" b="1">
-                <a:solidFill>
-                  <a:srgbClr val="27500A"/>
-                </a:solidFill>
-                <a:latin typeface="Calibri"/>
-              </a:rPr>
-              <a:t>正解 B — </a:t>
-            </a:r>
-            <a:r>
               <a:rPr sz="1400" b="0">
                 <a:solidFill>
-                  <a:srgbClr val="1E2024"/>
-                </a:solidFill>
-                <a:latin typeface="Calibri"/>
-              </a:rPr>
-              <a:t>fetchRequestVersion(MV)：MV 是集中共識，不做 per-connection 協商。</a:t>
-            </a:r>
-          </a:p>
-        </p:txBody>
-      </p:sp>
-      <p:sp>
-        <p:nvSpPr>
-          <p:cNvPr id="9" name="TextBox 8"/>
-          <p:cNvSpPr txBox="1"/>
-          <p:nvPr/>
-        </p:nvSpPr>
-        <p:spPr>
-          <a:xfrm>
-            <a:off x="640080" y="6400800"/>
-            <a:ext cx="10972800" cy="384048"/>
-          </a:xfrm>
-          <a:prstGeom prst="rect">
-            <a:avLst/>
-          </a:prstGeom>
-          <a:noFill/>
-        </p:spPr>
-        <p:txBody>
-          <a:bodyPr wrap="square">
-            <a:noAutofit/>
-          </a:bodyPr>
-          <a:lstStyle/>
-          <a:p>
-            <a:r>
-              <a:rPr sz="1200" b="1">
-                <a:solidFill>
                   <a:srgbClr val="8A8A8A"/>
                 </a:solidFill>
                 <a:latin typeface="Calibri"/>
               </a:rPr>
-              <a:t>REF   </a:t>
-            </a:r>
-            <a:r>
-              <a:rPr sz="1200" b="0" u="sng">
-                <a:solidFill>
-                  <a:srgbClr val="185FA5"/>
-                </a:solidFill>
-                <a:latin typeface="Courier New"/>
-                <a:hlinkClick r:id="rId2"/>
-              </a:rPr>
-              <a:t>RemoteLeaderEndPoint.scala:215</a:t>
-            </a:r>
-            <a:r>
-              <a:rPr sz="1200" b="0">
-                <a:solidFill>
-                  <a:srgbClr val="8A8A8A"/>
-                </a:solidFill>
-                <a:latin typeface="Calibri"/>
-              </a:rPr>
-              <a:t>   ·   </a:t>
-            </a:r>
-            <a:r>
-              <a:rPr sz="1200" b="0" u="sng">
-                <a:solidFill>
-                  <a:srgbClr val="185FA5"/>
-                </a:solidFill>
-                <a:latin typeface="Courier New"/>
-                <a:hlinkClick r:id="rId3"/>
-              </a:rPr>
-              <a:t>MetadataVersion.java:273</a:t>
+              <a:t>想一想 —— 下一頁公布答案</a:t>
             </a:r>
           </a:p>
         </p:txBody>
@@ -3697,7 +3621,7 @@
                 </a:solidFill>
                 <a:latin typeface="Calibri"/>
               </a:rPr>
-              <a:t>Part 2 · 失敗訊息</a:t>
+              <a:t>隨堂考 · 核心　（正解）</a:t>
             </a:r>
           </a:p>
         </p:txBody>
@@ -3711,7 +3635,7 @@
         <p:spPr>
           <a:xfrm>
             <a:off x="640080" y="841248"/>
-            <a:ext cx="10972800" cy="1005840"/>
+            <a:ext cx="10972800" cy="1188720"/>
           </a:xfrm>
           <a:prstGeom prst="rect">
             <a:avLst/>
@@ -3725,13 +3649,13 @@
           <a:lstStyle/>
           <a:p>
             <a:r>
-              <a:rPr sz="3200" b="1">
+              <a:rPr sz="2600" b="1">
                 <a:solidFill>
                   <a:srgbClr val="1E2024"/>
                 </a:solidFill>
                 <a:latin typeface="Calibri"/>
               </a:rPr>
-              <a:t>通訊當下協商不出版本，會看到什麼</a:t>
+              <a:t>replica fetch（broker↔broker）的 Fetch 版本怎麼決定？</a:t>
             </a:r>
           </a:p>
         </p:txBody>
@@ -3744,85 +3668,89 @@
         </p:nvSpPr>
         <p:spPr>
           <a:xfrm>
-            <a:off x="640080" y="2148840"/>
-            <a:ext cx="10972800" cy="1371600"/>
+            <a:off x="822960" y="2331720"/>
+            <a:ext cx="10515600" cy="493776"/>
+          </a:xfrm>
+          <a:prstGeom prst="rect">
+            <a:avLst/>
+          </a:prstGeom>
+          <a:noFill/>
+        </p:spPr>
+        <p:txBody>
+          <a:bodyPr wrap="square">
+            <a:noAutofit/>
+          </a:bodyPr>
+          <a:lstStyle/>
+          <a:p>
+            <a:r>
+              <a:rPr sz="1600" b="0">
+                <a:solidFill>
+                  <a:srgbClr val="1E2024"/>
+                </a:solidFill>
+                <a:latin typeface="Calibri"/>
+              </a:rPr>
+              <a:t>A.  </a:t>
+            </a:r>
+            <a:r>
+              <a:rPr sz="1600" b="0">
+                <a:solidFill>
+                  <a:srgbClr val="1E2024"/>
+                </a:solidFill>
+                <a:latin typeface="Calibri"/>
+              </a:rPr>
+              <a:t>兩 broker ApiVersions 協商取交集</a:t>
+            </a:r>
+          </a:p>
+        </p:txBody>
+      </p:sp>
+      <p:sp>
+        <p:nvSpPr>
+          <p:cNvPr id="5" name="TextBox 4"/>
+          <p:cNvSpPr txBox="1"/>
+          <p:nvPr/>
+        </p:nvSpPr>
+        <p:spPr>
+          <a:xfrm>
+            <a:off x="822960" y="2953512"/>
+            <a:ext cx="10515600" cy="493776"/>
           </a:xfrm>
           <a:prstGeom prst="rect">
             <a:avLst/>
           </a:prstGeom>
           <a:solidFill>
-            <a:srgbClr val="F3F1EC"/>
+            <a:srgbClr val="E9F3DE"/>
           </a:solidFill>
-          <a:ln w="6350">
-            <a:solidFill>
-              <a:srgbClr val="E3E0D8"/>
-            </a:solidFill>
+          <a:ln>
+            <a:noFill/>
           </a:ln>
         </p:spPr>
         <p:txBody>
-          <a:bodyPr wrap="square" lIns="146304" tIns="91440" bIns="91440">
-            <a:noAutofit/>
-          </a:bodyPr>
-          <a:lstStyle/>
-          <a:p>
-            <a:r>
-              <a:rPr sz="1350" b="0">
-                <a:solidFill>
-                  <a:srgbClr val="2C2C2A"/>
-                </a:solidFill>
-                <a:latin typeface="Calibri"/>
-              </a:rPr>
-              <a:t>交集空              → client 端 UnsupportedVersionException（送出前 abort）</a:t>
-            </a:r>
-          </a:p>
-          <a:p>
-            <a:r>
-              <a:rPr sz="1350" b="0">
-                <a:solidFill>
-                  <a:srgbClr val="2C2C2A"/>
-                </a:solidFill>
-                <a:latin typeface="Calibri"/>
-              </a:rPr>
-              <a:t>直送不支援的版本    → broker 丟 UnsupportedVersionException、關閉連線</a:t>
-            </a:r>
-          </a:p>
-          <a:p>
-            <a:r>
-              <a:rPr sz="1350" b="0">
-                <a:solidFill>
-                  <a:srgbClr val="2C2C2A"/>
-                </a:solidFill>
-                <a:latin typeface="Calibri"/>
-              </a:rPr>
-              <a:t>（ApiVersions 例外：回 v0 + UNSUPPORTED_VERSION 錯誤碼）</a:t>
-            </a:r>
-          </a:p>
-        </p:txBody>
-      </p:sp>
-      <p:pic>
-        <p:nvPicPr>
-          <p:cNvPr id="5" name="Picture 4" descr="ban.png"/>
-          <p:cNvPicPr>
-            <a:picLocks noChangeAspect="1"/>
-          </p:cNvPicPr>
-          <p:nvPr/>
-        </p:nvPicPr>
-        <p:blipFill>
-          <a:blip r:embed="rId2"/>
-          <a:stretch>
-            <a:fillRect/>
-          </a:stretch>
-        </p:blipFill>
-        <p:spPr>
-          <a:xfrm>
-            <a:off x="658368" y="3749040"/>
-            <a:ext cx="274320" cy="274320"/>
-          </a:xfrm>
-          <a:prstGeom prst="rect">
-            <a:avLst/>
-          </a:prstGeom>
-        </p:spPr>
-      </p:pic>
+          <a:bodyPr wrap="square" lIns="128016" tIns="54864">
+            <a:noAutofit/>
+          </a:bodyPr>
+          <a:lstStyle/>
+          <a:p>
+            <a:r>
+              <a:rPr sz="1600" b="1">
+                <a:solidFill>
+                  <a:srgbClr val="27500A"/>
+                </a:solidFill>
+                <a:latin typeface="Calibri"/>
+              </a:rPr>
+              <a:t>B.  </a:t>
+            </a:r>
+            <a:r>
+              <a:rPr sz="1600" b="1">
+                <a:solidFill>
+                  <a:srgbClr val="27500A"/>
+                </a:solidFill>
+                <a:latin typeface="Calibri"/>
+              </a:rPr>
+              <a:t>由 finalized metadata.version 決定   ✓</a:t>
+            </a:r>
+          </a:p>
+        </p:txBody>
+      </p:sp>
       <p:sp>
         <p:nvSpPr>
           <p:cNvPr id="6" name="TextBox 5"/>
@@ -3831,7 +3759,7 @@
         </p:nvSpPr>
         <p:spPr>
           <a:xfrm>
-            <a:off x="1078992" y="3721608"/>
+            <a:off x="822960" y="3575304"/>
             <a:ext cx="10515600" cy="493776"/>
           </a:xfrm>
           <a:prstGeom prst="rect">
@@ -3846,13 +3774,22 @@
           <a:lstStyle/>
           <a:p>
             <a:r>
-              <a:rPr sz="1650" b="0">
+              <a:rPr sz="1600" b="0">
                 <a:solidFill>
                   <a:srgbClr val="1E2024"/>
                 </a:solidFill>
                 <a:latin typeface="Calibri"/>
               </a:rPr>
-              <a:t>多數情況 client 在送出前就本地中止，根本沒上網路</a:t>
+              <a:t>C.  </a:t>
+            </a:r>
+            <a:r>
+              <a:rPr sz="1600" b="0">
+                <a:solidFill>
+                  <a:srgbClr val="1E2024"/>
+                </a:solidFill>
+                <a:latin typeface="Calibri"/>
+              </a:rPr>
+              <a:t>永遠用最新版</a:t>
             </a:r>
           </a:p>
         </p:txBody>
@@ -3860,6 +3797,92 @@
       <p:sp>
         <p:nvSpPr>
           <p:cNvPr id="7" name="TextBox 6"/>
+          <p:cNvSpPr txBox="1"/>
+          <p:nvPr/>
+        </p:nvSpPr>
+        <p:spPr>
+          <a:xfrm>
+            <a:off x="822960" y="4197096"/>
+            <a:ext cx="10515600" cy="493776"/>
+          </a:xfrm>
+          <a:prstGeom prst="rect">
+            <a:avLst/>
+          </a:prstGeom>
+          <a:noFill/>
+        </p:spPr>
+        <p:txBody>
+          <a:bodyPr wrap="square">
+            <a:noAutofit/>
+          </a:bodyPr>
+          <a:lstStyle/>
+          <a:p>
+            <a:r>
+              <a:rPr sz="1600" b="0">
+                <a:solidFill>
+                  <a:srgbClr val="1E2024"/>
+                </a:solidFill>
+                <a:latin typeface="Calibri"/>
+              </a:rPr>
+              <a:t>D.  </a:t>
+            </a:r>
+            <a:r>
+              <a:rPr sz="1600" b="0">
+                <a:solidFill>
+                  <a:srgbClr val="1E2024"/>
+                </a:solidFill>
+                <a:latin typeface="Calibri"/>
+              </a:rPr>
+              <a:t>controller 每次指定</a:t>
+            </a:r>
+          </a:p>
+        </p:txBody>
+      </p:sp>
+      <p:sp>
+        <p:nvSpPr>
+          <p:cNvPr id="8" name="TextBox 7"/>
+          <p:cNvSpPr txBox="1"/>
+          <p:nvPr/>
+        </p:nvSpPr>
+        <p:spPr>
+          <a:xfrm>
+            <a:off x="640080" y="4910327"/>
+            <a:ext cx="10972800" cy="914400"/>
+          </a:xfrm>
+          <a:prstGeom prst="rect">
+            <a:avLst/>
+          </a:prstGeom>
+          <a:noFill/>
+        </p:spPr>
+        <p:txBody>
+          <a:bodyPr wrap="square">
+            <a:noAutofit/>
+          </a:bodyPr>
+          <a:lstStyle/>
+          <a:p>
+            <a:r>
+              <a:rPr sz="1400" b="1">
+                <a:solidFill>
+                  <a:srgbClr val="27500A"/>
+                </a:solidFill>
+                <a:latin typeface="Calibri"/>
+              </a:rPr>
+              <a:t>正解 B — </a:t>
+            </a:r>
+            <a:r>
+              <a:rPr sz="1400" b="0">
+                <a:solidFill>
+                  <a:srgbClr val="1E2024"/>
+                </a:solidFill>
+                <a:latin typeface="Calibri"/>
+              </a:rPr>
+              <a:t>fetchRequestVersion(MV)：MV 是集中共識，不做 per-connection 協商。</a:t>
+            </a:r>
+          </a:p>
+        </p:txBody>
+      </p:sp>
+      <p:sp>
+        <p:nvSpPr>
+          <p:cNvPr id="9" name="TextBox 8"/>
           <p:cNvSpPr txBox="1"/>
           <p:nvPr/>
         </p:nvSpPr>
@@ -3894,47 +3917,28 @@
                   <a:srgbClr val="185FA5"/>
                 </a:solidFill>
                 <a:latin typeface="Courier New"/>
+                <a:hlinkClick r:id="rId2"/>
+              </a:rPr>
+              <a:t>RemoteLeaderEndPoint.scala:215</a:t>
+            </a:r>
+            <a:r>
+              <a:rPr sz="1200" b="0">
+                <a:solidFill>
+                  <a:srgbClr val="8A8A8A"/>
+                </a:solidFill>
+                <a:latin typeface="Calibri"/>
+              </a:rPr>
+              <a:t>   ·   </a:t>
+            </a:r>
+            <a:r>
+              <a:rPr sz="1200" b="0" u="sng">
+                <a:solidFill>
+                  <a:srgbClr val="185FA5"/>
+                </a:solidFill>
+                <a:latin typeface="Courier New"/>
                 <a:hlinkClick r:id="rId3"/>
               </a:rPr>
-              <a:t>latestUsableVersion</a:t>
-            </a:r>
-            <a:r>
-              <a:rPr sz="1200" b="0">
-                <a:solidFill>
-                  <a:srgbClr val="8A8A8A"/>
-                </a:solidFill>
-                <a:latin typeface="Calibri"/>
-              </a:rPr>
-              <a:t>   ·   </a:t>
-            </a:r>
-            <a:r>
-              <a:rPr sz="1200" b="0" u="sng">
-                <a:solidFill>
-                  <a:srgbClr val="185FA5"/>
-                </a:solidFill>
-                <a:latin typeface="Courier New"/>
-                <a:hlinkClick r:id="rId4"/>
-              </a:rPr>
-              <a:t>NetworkClient</a:t>
-            </a:r>
-            <a:r>
-              <a:rPr sz="1200" b="0">
-                <a:solidFill>
-                  <a:srgbClr val="8A8A8A"/>
-                </a:solidFill>
-                <a:latin typeface="Calibri"/>
-              </a:rPr>
-              <a:t>   ·   </a:t>
-            </a:r>
-            <a:r>
-              <a:rPr sz="1200" b="0" u="sng">
-                <a:solidFill>
-                  <a:srgbClr val="185FA5"/>
-                </a:solidFill>
-                <a:latin typeface="Courier New"/>
-                <a:hlinkClick r:id="rId5"/>
-              </a:rPr>
-              <a:t>RequestContext</a:t>
+              <a:t>MetadataVersion.java:273</a:t>
             </a:r>
           </a:p>
         </p:txBody>
@@ -4020,79 +4024,21 @@
                 </a:solidFill>
                 <a:latin typeface="Calibri"/>
               </a:rPr>
-              <a:t>版本截斷：為什麼「升一點點」不夠</a:t>
-            </a:r>
-          </a:p>
-        </p:txBody>
-      </p:sp>
-      <p:pic>
-        <p:nvPicPr>
-          <p:cNvPr id="4" name="Picture 3" descr="alert-triangle.png"/>
-          <p:cNvPicPr>
-            <a:picLocks noChangeAspect="1"/>
-          </p:cNvPicPr>
-          <p:nvPr/>
-        </p:nvPicPr>
-        <p:blipFill>
-          <a:blip r:embed="rId2"/>
-          <a:stretch>
-            <a:fillRect/>
-          </a:stretch>
-        </p:blipFill>
-        <p:spPr>
-          <a:xfrm>
-            <a:off x="658368" y="2176272"/>
-            <a:ext cx="274320" cy="274320"/>
-          </a:xfrm>
-          <a:prstGeom prst="rect">
-            <a:avLst/>
-          </a:prstGeom>
-        </p:spPr>
-      </p:pic>
-      <p:sp>
-        <p:nvSpPr>
-          <p:cNvPr id="5" name="TextBox 4"/>
-          <p:cNvSpPr txBox="1"/>
-          <p:nvPr/>
-        </p:nvSpPr>
-        <p:spPr>
-          <a:xfrm>
-            <a:off x="1078992" y="2148840"/>
-            <a:ext cx="10515600" cy="493776"/>
-          </a:xfrm>
-          <a:prstGeom prst="rect">
-            <a:avLst/>
-          </a:prstGeom>
-          <a:noFill/>
-        </p:spPr>
-        <p:txBody>
-          <a:bodyPr wrap="square">
-            <a:noAutofit/>
-          </a:bodyPr>
-          <a:lstStyle/>
-          <a:p>
-            <a:r>
-              <a:rPr sz="1650" b="0">
-                <a:solidFill>
-                  <a:srgbClr val="1E2024"/>
-                </a:solidFill>
-                <a:latin typeface="Calibri"/>
-              </a:rPr>
-              <a:t>前一頁「交集空」最容易被忽略的根因——舊 wire 版本被整批移除</a:t>
-            </a:r>
-          </a:p>
-        </p:txBody>
-      </p:sp>
-      <p:sp>
-        <p:nvSpPr>
-          <p:cNvPr id="6" name="TextBox 5"/>
-          <p:cNvSpPr txBox="1"/>
-          <p:nvPr/>
-        </p:nvSpPr>
-        <p:spPr>
-          <a:xfrm>
-            <a:off x="640080" y="2788920"/>
-            <a:ext cx="10972800" cy="822959"/>
+              <a:t>通訊當下協商不出版本，會看到什麼</a:t>
+            </a:r>
+          </a:p>
+        </p:txBody>
+      </p:sp>
+      <p:sp>
+        <p:nvSpPr>
+          <p:cNvPr id="4" name="TextBox 3"/>
+          <p:cNvSpPr txBox="1"/>
+          <p:nvPr/>
+        </p:nvSpPr>
+        <p:spPr>
+          <a:xfrm>
+            <a:off x="640080" y="2148840"/>
+            <a:ext cx="10972800" cy="1371600"/>
           </a:xfrm>
           <a:prstGeom prst="rect">
             <a:avLst/>
@@ -4119,7 +4065,7 @@
                 </a:solidFill>
                 <a:latin typeface="Calibri"/>
               </a:rPr>
-              <a:t>舊 wire API version 被整個移除，min 可 &gt; 0</a:t>
+              <a:t>交集空              → client 端 UnsupportedVersionException（送出前 abort）</a:t>
             </a:r>
           </a:p>
           <a:p>
@@ -4130,7 +4076,76 @@
                 </a:solidFill>
                 <a:latin typeface="Calibri"/>
               </a:rPr>
-              <a:t>  Fetch：4–18（v0–3 在 4.0 移除）</a:t>
+              <a:t>直送不支援的版本    → broker 丟 UnsupportedVersionException、關閉連線</a:t>
+            </a:r>
+          </a:p>
+          <a:p>
+            <a:r>
+              <a:rPr sz="1350" b="0">
+                <a:solidFill>
+                  <a:srgbClr val="2C2C2A"/>
+                </a:solidFill>
+                <a:latin typeface="Calibri"/>
+              </a:rPr>
+              <a:t>（ApiVersions 例外：回 v0 + UNSUPPORTED_VERSION 錯誤碼）</a:t>
+            </a:r>
+          </a:p>
+        </p:txBody>
+      </p:sp>
+      <p:pic>
+        <p:nvPicPr>
+          <p:cNvPr id="5" name="Picture 4" descr="ban.png"/>
+          <p:cNvPicPr>
+            <a:picLocks noChangeAspect="1"/>
+          </p:cNvPicPr>
+          <p:nvPr/>
+        </p:nvPicPr>
+        <p:blipFill>
+          <a:blip r:embed="rId2"/>
+          <a:stretch>
+            <a:fillRect/>
+          </a:stretch>
+        </p:blipFill>
+        <p:spPr>
+          <a:xfrm>
+            <a:off x="658368" y="3749040"/>
+            <a:ext cx="274320" cy="274320"/>
+          </a:xfrm>
+          <a:prstGeom prst="rect">
+            <a:avLst/>
+          </a:prstGeom>
+        </p:spPr>
+      </p:pic>
+      <p:sp>
+        <p:nvSpPr>
+          <p:cNvPr id="6" name="TextBox 5"/>
+          <p:cNvSpPr txBox="1"/>
+          <p:nvPr/>
+        </p:nvSpPr>
+        <p:spPr>
+          <a:xfrm>
+            <a:off x="1078992" y="3721608"/>
+            <a:ext cx="10515600" cy="493776"/>
+          </a:xfrm>
+          <a:prstGeom prst="rect">
+            <a:avLst/>
+          </a:prstGeom>
+          <a:noFill/>
+        </p:spPr>
+        <p:txBody>
+          <a:bodyPr wrap="square">
+            <a:noAutofit/>
+          </a:bodyPr>
+          <a:lstStyle/>
+          <a:p>
+            <a:r>
+              <a:rPr sz="1650" b="0">
+                <a:solidFill>
+                  <a:srgbClr val="1E2024"/>
+                </a:solidFill>
+                <a:latin typeface="Calibri"/>
+              </a:rPr>
+              <a:t>多數情況 client 在送出前就本地中止，根本沒上網路</a:t>
             </a:r>
           </a:p>
         </p:txBody>
@@ -4138,113 +4153,6 @@
       <p:sp>
         <p:nvSpPr>
           <p:cNvPr id="7" name="TextBox 6"/>
-          <p:cNvSpPr txBox="1"/>
-          <p:nvPr/>
-        </p:nvSpPr>
-        <p:spPr>
-          <a:xfrm>
-            <a:off x="640080" y="3813048"/>
-            <a:ext cx="10972800" cy="877824"/>
-          </a:xfrm>
-          <a:prstGeom prst="rect">
-            <a:avLst/>
-          </a:prstGeom>
-          <a:solidFill>
-            <a:srgbClr val="E9F3DE"/>
-          </a:solidFill>
-          <a:ln>
-            <a:noFill/>
-          </a:ln>
-        </p:spPr>
-        <p:txBody>
-          <a:bodyPr wrap="square" lIns="146304" tIns="82296">
-            <a:noAutofit/>
-          </a:bodyPr>
-          <a:lstStyle/>
-          <a:p>
-            <a:r>
-              <a:rPr sz="1500" b="0">
-                <a:solidFill>
-                  <a:srgbClr val="27500A"/>
-                </a:solidFill>
-                <a:latin typeface="Calibri"/>
-              </a:rPr>
-              <a:t>解法：升任一端到 4.0 前，先確認另一端 ≥ 2.1（upgrade guide 明訂雙向要求），否則協商結果沒有可用版本</a:t>
-            </a:r>
-          </a:p>
-        </p:txBody>
-      </p:sp>
-      <p:sp>
-        <p:nvSpPr>
-          <p:cNvPr id="8" name="TextBox 7"/>
-          <p:cNvSpPr txBox="1"/>
-          <p:nvPr/>
-        </p:nvSpPr>
-        <p:spPr>
-          <a:xfrm>
-            <a:off x="640080" y="4873752"/>
-            <a:ext cx="10972800" cy="731520"/>
-          </a:xfrm>
-          <a:prstGeom prst="rect">
-            <a:avLst/>
-          </a:prstGeom>
-          <a:noFill/>
-        </p:spPr>
-        <p:txBody>
-          <a:bodyPr wrap="square">
-            <a:noAutofit/>
-          </a:bodyPr>
-          <a:lstStyle/>
-          <a:p>
-            <a:r>
-              <a:rPr sz="1500" b="0">
-                <a:solidFill>
-                  <a:srgbClr val="5F5E5A"/>
-                </a:solidFill>
-                <a:latin typeface="Calibri"/>
-              </a:rPr>
-              <a:t>取捨：0.8.0（2013）起九年保留每個版本——每個舊版本都是活的程式碼與測試面；4.0 用「斷 2018 年前的 client」換「刪九年的碼」，只有 major 版本邊界付得起。</a:t>
-            </a:r>
-          </a:p>
-        </p:txBody>
-      </p:sp>
-      <p:sp>
-        <p:nvSpPr>
-          <p:cNvPr id="9" name="TextBox 8"/>
-          <p:cNvSpPr txBox="1"/>
-          <p:nvPr/>
-        </p:nvSpPr>
-        <p:spPr>
-          <a:xfrm>
-            <a:off x="640080" y="5733288"/>
-            <a:ext cx="10972800" cy="731520"/>
-          </a:xfrm>
-          <a:prstGeom prst="rect">
-            <a:avLst/>
-          </a:prstGeom>
-          <a:noFill/>
-        </p:spPr>
-        <p:txBody>
-          <a:bodyPr wrap="square">
-            <a:noAutofit/>
-          </a:bodyPr>
-          <a:lstStyle/>
-          <a:p>
-            <a:r>
-              <a:rPr sz="1500" b="0">
-                <a:solidFill>
-                  <a:srgbClr val="5F5E5A"/>
-                </a:solidFill>
-                <a:latin typeface="Calibri"/>
-              </a:rPr>
-              <a:t>銜接（非本場）：finalize / 升降當下的錯誤（INVALID_UPDATE_VERSION 等）屬「運行時的版本升降」那場，本場不展開。</a:t>
-            </a:r>
-          </a:p>
-        </p:txBody>
-      </p:sp>
-      <p:sp>
-        <p:nvSpPr>
-          <p:cNvPr id="10" name="TextBox 9"/>
           <p:cNvSpPr txBox="1"/>
           <p:nvPr/>
         </p:nvSpPr>
@@ -4281,7 +4189,7 @@
                 <a:latin typeface="Courier New"/>
                 <a:hlinkClick r:id="rId3"/>
               </a:rPr>
-              <a:t>upgrade.md:229</a:t>
+              <a:t>latestUsableVersion</a:t>
             </a:r>
             <a:r>
               <a:rPr sz="1200" b="0">
@@ -4300,7 +4208,26 @@
                 <a:latin typeface="Courier New"/>
                 <a:hlinkClick r:id="rId4"/>
               </a:rPr>
-              <a:t>FetchRequest.json validVersions</a:t>
+              <a:t>NetworkClient</a:t>
+            </a:r>
+            <a:r>
+              <a:rPr sz="1200" b="0">
+                <a:solidFill>
+                  <a:srgbClr val="8A8A8A"/>
+                </a:solidFill>
+                <a:latin typeface="Calibri"/>
+              </a:rPr>
+              <a:t>   ·   </a:t>
+            </a:r>
+            <a:r>
+              <a:rPr sz="1200" b="0" u="sng">
+                <a:solidFill>
+                  <a:srgbClr val="185FA5"/>
+                </a:solidFill>
+                <a:latin typeface="Courier New"/>
+                <a:hlinkClick r:id="rId5"/>
+              </a:rPr>
+              <a:t>RequestContext</a:t>
             </a:r>
           </a:p>
         </p:txBody>
@@ -4352,7 +4279,7 @@
                 </a:solidFill>
                 <a:latin typeface="Calibri"/>
               </a:rPr>
-              <a:t>隨堂考 · 核心</a:t>
+              <a:t>Part 2 · 失敗訊息</a:t>
             </a:r>
           </a:p>
         </p:txBody>
@@ -4366,7 +4293,7 @@
         <p:spPr>
           <a:xfrm>
             <a:off x="640080" y="841248"/>
-            <a:ext cx="10972800" cy="1188720"/>
+            <a:ext cx="10972800" cy="1005840"/>
           </a:xfrm>
           <a:prstGeom prst="rect">
             <a:avLst/>
@@ -4380,26 +4307,50 @@
           <a:lstStyle/>
           <a:p>
             <a:r>
-              <a:rPr sz="2600" b="1">
+              <a:rPr sz="3200" b="1">
                 <a:solidFill>
                   <a:srgbClr val="1E2024"/>
                 </a:solidFill>
                 <a:latin typeface="Calibri"/>
               </a:rPr>
-              <a:t>client 繞過協商、直接送出 broker 不支援的 API version，會怎樣？</a:t>
-            </a:r>
-          </a:p>
-        </p:txBody>
-      </p:sp>
-      <p:sp>
-        <p:nvSpPr>
-          <p:cNvPr id="4" name="TextBox 3"/>
-          <p:cNvSpPr txBox="1"/>
-          <p:nvPr/>
-        </p:nvSpPr>
-        <p:spPr>
-          <a:xfrm>
-            <a:off x="822960" y="2331720"/>
+              <a:t>版本截斷：為什麼「升一點點」不夠</a:t>
+            </a:r>
+          </a:p>
+        </p:txBody>
+      </p:sp>
+      <p:pic>
+        <p:nvPicPr>
+          <p:cNvPr id="4" name="Picture 3" descr="alert-triangle.png"/>
+          <p:cNvPicPr>
+            <a:picLocks noChangeAspect="1"/>
+          </p:cNvPicPr>
+          <p:nvPr/>
+        </p:nvPicPr>
+        <p:blipFill>
+          <a:blip r:embed="rId2"/>
+          <a:stretch>
+            <a:fillRect/>
+          </a:stretch>
+        </p:blipFill>
+        <p:spPr>
+          <a:xfrm>
+            <a:off x="658368" y="2176272"/>
+            <a:ext cx="274320" cy="274320"/>
+          </a:xfrm>
+          <a:prstGeom prst="rect">
+            <a:avLst/>
+          </a:prstGeom>
+        </p:spPr>
+      </p:pic>
+      <p:sp>
+        <p:nvSpPr>
+          <p:cNvPr id="5" name="TextBox 4"/>
+          <p:cNvSpPr txBox="1"/>
+          <p:nvPr/>
+        </p:nvSpPr>
+        <p:spPr>
+          <a:xfrm>
+            <a:off x="1078992" y="2148840"/>
             <a:ext cx="10515600" cy="493776"/>
           </a:xfrm>
           <a:prstGeom prst="rect">
@@ -4414,36 +4365,118 @@
           <a:lstStyle/>
           <a:p>
             <a:r>
-              <a:rPr sz="1600" b="0">
+              <a:rPr sz="1650" b="0">
                 <a:solidFill>
                   <a:srgbClr val="1E2024"/>
                 </a:solidFill>
                 <a:latin typeface="Calibri"/>
               </a:rPr>
-              <a:t>A.  </a:t>
-            </a:r>
-            <a:r>
-              <a:rPr sz="1600" b="0">
-                <a:solidFill>
-                  <a:srgbClr val="1E2024"/>
-                </a:solidFill>
-                <a:latin typeface="Calibri"/>
-              </a:rPr>
-              <a:t>一律回 UNSUPPORTED_VERSION 錯誤碼</a:t>
-            </a:r>
-          </a:p>
-        </p:txBody>
-      </p:sp>
-      <p:sp>
-        <p:nvSpPr>
-          <p:cNvPr id="5" name="TextBox 4"/>
-          <p:cNvSpPr txBox="1"/>
-          <p:nvPr/>
-        </p:nvSpPr>
-        <p:spPr>
-          <a:xfrm>
-            <a:off x="822960" y="2953512"/>
-            <a:ext cx="10515600" cy="493776"/>
+              <a:t>前一頁「交集空」最容易被忽略的根因——舊 wire 版本被整批移除</a:t>
+            </a:r>
+          </a:p>
+        </p:txBody>
+      </p:sp>
+      <p:sp>
+        <p:nvSpPr>
+          <p:cNvPr id="6" name="TextBox 5"/>
+          <p:cNvSpPr txBox="1"/>
+          <p:nvPr/>
+        </p:nvSpPr>
+        <p:spPr>
+          <a:xfrm>
+            <a:off x="640080" y="2788920"/>
+            <a:ext cx="10972800" cy="822959"/>
+          </a:xfrm>
+          <a:prstGeom prst="rect">
+            <a:avLst/>
+          </a:prstGeom>
+          <a:solidFill>
+            <a:srgbClr val="F3F1EC"/>
+          </a:solidFill>
+          <a:ln w="6350">
+            <a:solidFill>
+              <a:srgbClr val="E3E0D8"/>
+            </a:solidFill>
+          </a:ln>
+        </p:spPr>
+        <p:txBody>
+          <a:bodyPr wrap="square" lIns="146304" tIns="91440" bIns="91440">
+            <a:noAutofit/>
+          </a:bodyPr>
+          <a:lstStyle/>
+          <a:p>
+            <a:r>
+              <a:rPr sz="1350" b="0">
+                <a:solidFill>
+                  <a:srgbClr val="2C2C2A"/>
+                </a:solidFill>
+                <a:latin typeface="Calibri"/>
+              </a:rPr>
+              <a:t>舊 wire API version 被整個移除，min 可 &gt; 0</a:t>
+            </a:r>
+          </a:p>
+          <a:p>
+            <a:r>
+              <a:rPr sz="1350" b="0">
+                <a:solidFill>
+                  <a:srgbClr val="2C2C2A"/>
+                </a:solidFill>
+                <a:latin typeface="Calibri"/>
+              </a:rPr>
+              <a:t>  Fetch：4–18（v0–3 在 4.0 移除）</a:t>
+            </a:r>
+          </a:p>
+        </p:txBody>
+      </p:sp>
+      <p:sp>
+        <p:nvSpPr>
+          <p:cNvPr id="7" name="TextBox 6"/>
+          <p:cNvSpPr txBox="1"/>
+          <p:nvPr/>
+        </p:nvSpPr>
+        <p:spPr>
+          <a:xfrm>
+            <a:off x="640080" y="3813048"/>
+            <a:ext cx="10972800" cy="877824"/>
+          </a:xfrm>
+          <a:prstGeom prst="rect">
+            <a:avLst/>
+          </a:prstGeom>
+          <a:solidFill>
+            <a:srgbClr val="E9F3DE"/>
+          </a:solidFill>
+          <a:ln>
+            <a:noFill/>
+          </a:ln>
+        </p:spPr>
+        <p:txBody>
+          <a:bodyPr wrap="square" lIns="146304" tIns="82296">
+            <a:noAutofit/>
+          </a:bodyPr>
+          <a:lstStyle/>
+          <a:p>
+            <a:r>
+              <a:rPr sz="1500" b="0">
+                <a:solidFill>
+                  <a:srgbClr val="27500A"/>
+                </a:solidFill>
+                <a:latin typeface="Calibri"/>
+              </a:rPr>
+              <a:t>解法：升任一端到 4.0 前，先確認另一端 ≥ 2.1（upgrade guide 明訂雙向要求），否則協商結果沒有可用版本</a:t>
+            </a:r>
+          </a:p>
+        </p:txBody>
+      </p:sp>
+      <p:sp>
+        <p:nvSpPr>
+          <p:cNvPr id="8" name="TextBox 7"/>
+          <p:cNvSpPr txBox="1"/>
+          <p:nvPr/>
+        </p:nvSpPr>
+        <p:spPr>
+          <a:xfrm>
+            <a:off x="640080" y="4873752"/>
+            <a:ext cx="10972800" cy="731520"/>
           </a:xfrm>
           <a:prstGeom prst="rect">
             <a:avLst/>
@@ -4457,36 +4490,27 @@
           <a:lstStyle/>
           <a:p>
             <a:r>
-              <a:rPr sz="1600" b="0">
-                <a:solidFill>
-                  <a:srgbClr val="1E2024"/>
-                </a:solidFill>
-                <a:latin typeface="Calibri"/>
-              </a:rPr>
-              <a:t>B.  </a:t>
-            </a:r>
-            <a:r>
-              <a:rPr sz="1600" b="0">
-                <a:solidFill>
-                  <a:srgbClr val="1E2024"/>
-                </a:solidFill>
-                <a:latin typeface="Calibri"/>
-              </a:rPr>
-              <a:t>只有 ApiVersions 例外回錯誤碼+支援範圍；其他 API 直接關閉連線</a:t>
-            </a:r>
-          </a:p>
-        </p:txBody>
-      </p:sp>
-      <p:sp>
-        <p:nvSpPr>
-          <p:cNvPr id="6" name="TextBox 5"/>
-          <p:cNvSpPr txBox="1"/>
-          <p:nvPr/>
-        </p:nvSpPr>
-        <p:spPr>
-          <a:xfrm>
-            <a:off x="822960" y="3575304"/>
-            <a:ext cx="10515600" cy="493776"/>
+              <a:rPr sz="1500" b="0">
+                <a:solidFill>
+                  <a:srgbClr val="5F5E5A"/>
+                </a:solidFill>
+                <a:latin typeface="Calibri"/>
+              </a:rPr>
+              <a:t>取捨：0.8.0（2013）起九年保留每個版本——每個舊版本都是活的程式碼與測試面；4.0 用「斷 2018 年前的 client」換「刪九年的碼」，只有 major 版本邊界付得起。</a:t>
+            </a:r>
+          </a:p>
+        </p:txBody>
+      </p:sp>
+      <p:sp>
+        <p:nvSpPr>
+          <p:cNvPr id="9" name="TextBox 8"/>
+          <p:cNvSpPr txBox="1"/>
+          <p:nvPr/>
+        </p:nvSpPr>
+        <p:spPr>
+          <a:xfrm>
+            <a:off x="640080" y="5733288"/>
+            <a:ext cx="10972800" cy="731520"/>
           </a:xfrm>
           <a:prstGeom prst="rect">
             <a:avLst/>
@@ -4500,36 +4524,27 @@
           <a:lstStyle/>
           <a:p>
             <a:r>
-              <a:rPr sz="1600" b="0">
-                <a:solidFill>
-                  <a:srgbClr val="1E2024"/>
-                </a:solidFill>
-                <a:latin typeface="Calibri"/>
-              </a:rPr>
-              <a:t>C.  </a:t>
-            </a:r>
-            <a:r>
-              <a:rPr sz="1600" b="0">
-                <a:solidFill>
-                  <a:srgbClr val="1E2024"/>
-                </a:solidFill>
-                <a:latin typeface="Calibri"/>
-              </a:rPr>
-              <a:t>broker 自動降版處理</a:t>
-            </a:r>
-          </a:p>
-        </p:txBody>
-      </p:sp>
-      <p:sp>
-        <p:nvSpPr>
-          <p:cNvPr id="7" name="TextBox 6"/>
-          <p:cNvSpPr txBox="1"/>
-          <p:nvPr/>
-        </p:nvSpPr>
-        <p:spPr>
-          <a:xfrm>
-            <a:off x="822960" y="4197096"/>
-            <a:ext cx="10515600" cy="493776"/>
+              <a:rPr sz="1500" b="0">
+                <a:solidFill>
+                  <a:srgbClr val="5F5E5A"/>
+                </a:solidFill>
+                <a:latin typeface="Calibri"/>
+              </a:rPr>
+              <a:t>銜接（非本場）：finalize / 升降當下的錯誤（INVALID_UPDATE_VERSION 等）屬「運行時的版本升降」那場，本場不展開。</a:t>
+            </a:r>
+          </a:p>
+        </p:txBody>
+      </p:sp>
+      <p:sp>
+        <p:nvSpPr>
+          <p:cNvPr id="10" name="TextBox 9"/>
+          <p:cNvSpPr txBox="1"/>
+          <p:nvPr/>
+        </p:nvSpPr>
+        <p:spPr>
+          <a:xfrm>
+            <a:off x="640080" y="6400800"/>
+            <a:ext cx="10972800" cy="384048"/>
           </a:xfrm>
           <a:prstGeom prst="rect">
             <a:avLst/>
@@ -4543,56 +4558,42 @@
           <a:lstStyle/>
           <a:p>
             <a:r>
-              <a:rPr sz="1600" b="0">
-                <a:solidFill>
-                  <a:srgbClr val="1E2024"/>
-                </a:solidFill>
-                <a:latin typeface="Calibri"/>
-              </a:rPr>
-              <a:t>D.  </a:t>
-            </a:r>
-            <a:r>
-              <a:rPr sz="1600" b="0">
-                <a:solidFill>
-                  <a:srgbClr val="1E2024"/>
-                </a:solidFill>
-                <a:latin typeface="Calibri"/>
-              </a:rPr>
-              <a:t>忽略版本照常處理</a:t>
-            </a:r>
-          </a:p>
-        </p:txBody>
-      </p:sp>
-      <p:sp>
-        <p:nvSpPr>
-          <p:cNvPr id="8" name="TextBox 7"/>
-          <p:cNvSpPr txBox="1"/>
-          <p:nvPr/>
-        </p:nvSpPr>
-        <p:spPr>
-          <a:xfrm>
-            <a:off x="640080" y="4910327"/>
-            <a:ext cx="10972800" cy="914400"/>
-          </a:xfrm>
-          <a:prstGeom prst="rect">
-            <a:avLst/>
-          </a:prstGeom>
-          <a:noFill/>
-        </p:spPr>
-        <p:txBody>
-          <a:bodyPr wrap="square">
-            <a:noAutofit/>
-          </a:bodyPr>
-          <a:lstStyle/>
-          <a:p>
-            <a:r>
-              <a:rPr sz="1400" b="0">
+              <a:rPr sz="1200" b="1">
                 <a:solidFill>
                   <a:srgbClr val="8A8A8A"/>
                 </a:solidFill>
                 <a:latin typeface="Calibri"/>
               </a:rPr>
-              <a:t>想一想 —— 下一頁公布答案</a:t>
+              <a:t>REF   </a:t>
+            </a:r>
+            <a:r>
+              <a:rPr sz="1200" b="0" u="sng">
+                <a:solidFill>
+                  <a:srgbClr val="185FA5"/>
+                </a:solidFill>
+                <a:latin typeface="Courier New"/>
+                <a:hlinkClick r:id="rId3"/>
+              </a:rPr>
+              <a:t>upgrade.md:229</a:t>
+            </a:r>
+            <a:r>
+              <a:rPr sz="1200" b="0">
+                <a:solidFill>
+                  <a:srgbClr val="8A8A8A"/>
+                </a:solidFill>
+                <a:latin typeface="Calibri"/>
+              </a:rPr>
+              <a:t>   ·   </a:t>
+            </a:r>
+            <a:r>
+              <a:rPr sz="1200" b="0" u="sng">
+                <a:solidFill>
+                  <a:srgbClr val="185FA5"/>
+                </a:solidFill>
+                <a:latin typeface="Courier New"/>
+                <a:hlinkClick r:id="rId4"/>
+              </a:rPr>
+              <a:t>FetchRequest.json validVersions</a:t>
             </a:r>
           </a:p>
         </p:txBody>
@@ -4644,7 +4645,7 @@
                 </a:solidFill>
                 <a:latin typeface="Calibri"/>
               </a:rPr>
-              <a:t>隨堂考 · 核心　（正解）</a:t>
+              <a:t>隨堂考 · 核心</a:t>
             </a:r>
           </a:p>
         </p:txBody>
@@ -4740,36 +4741,31 @@
           <a:prstGeom prst="rect">
             <a:avLst/>
           </a:prstGeom>
-          <a:solidFill>
-            <a:srgbClr val="E9F3DE"/>
-          </a:solidFill>
-          <a:ln>
-            <a:noFill/>
-          </a:ln>
-        </p:spPr>
-        <p:txBody>
-          <a:bodyPr wrap="square" lIns="128016" tIns="54864">
-            <a:noAutofit/>
-          </a:bodyPr>
-          <a:lstStyle/>
-          <a:p>
-            <a:r>
-              <a:rPr sz="1600" b="1">
-                <a:solidFill>
-                  <a:srgbClr val="27500A"/>
+          <a:noFill/>
+        </p:spPr>
+        <p:txBody>
+          <a:bodyPr wrap="square">
+            <a:noAutofit/>
+          </a:bodyPr>
+          <a:lstStyle/>
+          <a:p>
+            <a:r>
+              <a:rPr sz="1600" b="0">
+                <a:solidFill>
+                  <a:srgbClr val="1E2024"/>
                 </a:solidFill>
                 <a:latin typeface="Calibri"/>
               </a:rPr>
               <a:t>B.  </a:t>
             </a:r>
             <a:r>
-              <a:rPr sz="1600" b="1">
-                <a:solidFill>
-                  <a:srgbClr val="27500A"/>
-                </a:solidFill>
-                <a:latin typeface="Calibri"/>
-              </a:rPr>
-              <a:t>只有 ApiVersions 例外回錯誤碼+支援範圍；其他 API 直接關閉連線   ✓</a:t>
+              <a:rPr sz="1600" b="0">
+                <a:solidFill>
+                  <a:srgbClr val="1E2024"/>
+                </a:solidFill>
+                <a:latin typeface="Calibri"/>
+              </a:rPr>
+              <a:t>只有 ApiVersions 例外回錯誤碼+支援範圍；其他 API 直接關閉連線</a:t>
             </a:r>
           </a:p>
         </p:txBody>
@@ -4883,85 +4879,13 @@
           <a:lstStyle/>
           <a:p>
             <a:r>
-              <a:rPr sz="1400" b="1">
-                <a:solidFill>
-                  <a:srgbClr val="27500A"/>
-                </a:solidFill>
-                <a:latin typeface="Calibri"/>
-              </a:rPr>
-              <a:t>正解 B — </a:t>
-            </a:r>
-            <a:r>
               <a:rPr sz="1400" b="0">
                 <a:solidFill>
-                  <a:srgbClr val="1E2024"/>
-                </a:solidFill>
-                <a:latin typeface="Calibri"/>
-              </a:rPr>
-              <a:t>ApiVersions 是協商的第一支 request（此時雙方還不知道彼此版本），若它也關閉連線，client 永遠問不到支援範圍，故回 v0+錯誤碼讓 client 重新協商；其他 API 在 RequestContext 解析失敗、SocketServer 關閉連線。</a:t>
-            </a:r>
-          </a:p>
-        </p:txBody>
-      </p:sp>
-      <p:sp>
-        <p:nvSpPr>
-          <p:cNvPr id="9" name="TextBox 8"/>
-          <p:cNvSpPr txBox="1"/>
-          <p:nvPr/>
-        </p:nvSpPr>
-        <p:spPr>
-          <a:xfrm>
-            <a:off x="640080" y="6400800"/>
-            <a:ext cx="10972800" cy="384048"/>
-          </a:xfrm>
-          <a:prstGeom prst="rect">
-            <a:avLst/>
-          </a:prstGeom>
-          <a:noFill/>
-        </p:spPr>
-        <p:txBody>
-          <a:bodyPr wrap="square">
-            <a:noAutofit/>
-          </a:bodyPr>
-          <a:lstStyle/>
-          <a:p>
-            <a:r>
-              <a:rPr sz="1200" b="1">
-                <a:solidFill>
                   <a:srgbClr val="8A8A8A"/>
                 </a:solidFill>
                 <a:latin typeface="Calibri"/>
               </a:rPr>
-              <a:t>REF   </a:t>
-            </a:r>
-            <a:r>
-              <a:rPr sz="1200" b="0" u="sng">
-                <a:solidFill>
-                  <a:srgbClr val="185FA5"/>
-                </a:solidFill>
-                <a:latin typeface="Courier New"/>
-                <a:hlinkClick r:id="rId2"/>
-              </a:rPr>
-              <a:t>RequestContext.java:112</a:t>
-            </a:r>
-            <a:r>
-              <a:rPr sz="1200" b="0">
-                <a:solidFill>
-                  <a:srgbClr val="8A8A8A"/>
-                </a:solidFill>
-                <a:latin typeface="Calibri"/>
-              </a:rPr>
-              <a:t>   ·   </a:t>
-            </a:r>
-            <a:r>
-              <a:rPr sz="1200" b="0" u="sng">
-                <a:solidFill>
-                  <a:srgbClr val="185FA5"/>
-                </a:solidFill>
-                <a:latin typeface="Courier New"/>
-                <a:hlinkClick r:id="rId3"/>
-              </a:rPr>
-              <a:t>SocketServer.scala:781</a:t>
+              <a:t>想一想 —— 下一頁公布答案</a:t>
             </a:r>
           </a:p>
         </p:txBody>
@@ -5013,6 +4937,375 @@
                 </a:solidFill>
                 <a:latin typeface="Calibri"/>
               </a:rPr>
+              <a:t>隨堂考 · 核心　（正解）</a:t>
+            </a:r>
+          </a:p>
+        </p:txBody>
+      </p:sp>
+      <p:sp>
+        <p:nvSpPr>
+          <p:cNvPr id="3" name="TextBox 2"/>
+          <p:cNvSpPr txBox="1"/>
+          <p:nvPr/>
+        </p:nvSpPr>
+        <p:spPr>
+          <a:xfrm>
+            <a:off x="640080" y="841248"/>
+            <a:ext cx="10972800" cy="1188720"/>
+          </a:xfrm>
+          <a:prstGeom prst="rect">
+            <a:avLst/>
+          </a:prstGeom>
+          <a:noFill/>
+        </p:spPr>
+        <p:txBody>
+          <a:bodyPr wrap="square">
+            <a:noAutofit/>
+          </a:bodyPr>
+          <a:lstStyle/>
+          <a:p>
+            <a:r>
+              <a:rPr sz="2600" b="1">
+                <a:solidFill>
+                  <a:srgbClr val="1E2024"/>
+                </a:solidFill>
+                <a:latin typeface="Calibri"/>
+              </a:rPr>
+              <a:t>client 繞過協商、直接送出 broker 不支援的 API version，會怎樣？</a:t>
+            </a:r>
+          </a:p>
+        </p:txBody>
+      </p:sp>
+      <p:sp>
+        <p:nvSpPr>
+          <p:cNvPr id="4" name="TextBox 3"/>
+          <p:cNvSpPr txBox="1"/>
+          <p:nvPr/>
+        </p:nvSpPr>
+        <p:spPr>
+          <a:xfrm>
+            <a:off x="822960" y="2331720"/>
+            <a:ext cx="10515600" cy="493776"/>
+          </a:xfrm>
+          <a:prstGeom prst="rect">
+            <a:avLst/>
+          </a:prstGeom>
+          <a:noFill/>
+        </p:spPr>
+        <p:txBody>
+          <a:bodyPr wrap="square">
+            <a:noAutofit/>
+          </a:bodyPr>
+          <a:lstStyle/>
+          <a:p>
+            <a:r>
+              <a:rPr sz="1600" b="0">
+                <a:solidFill>
+                  <a:srgbClr val="1E2024"/>
+                </a:solidFill>
+                <a:latin typeface="Calibri"/>
+              </a:rPr>
+              <a:t>A.  </a:t>
+            </a:r>
+            <a:r>
+              <a:rPr sz="1600" b="0">
+                <a:solidFill>
+                  <a:srgbClr val="1E2024"/>
+                </a:solidFill>
+                <a:latin typeface="Calibri"/>
+              </a:rPr>
+              <a:t>一律回 UNSUPPORTED_VERSION 錯誤碼</a:t>
+            </a:r>
+          </a:p>
+        </p:txBody>
+      </p:sp>
+      <p:sp>
+        <p:nvSpPr>
+          <p:cNvPr id="5" name="TextBox 4"/>
+          <p:cNvSpPr txBox="1"/>
+          <p:nvPr/>
+        </p:nvSpPr>
+        <p:spPr>
+          <a:xfrm>
+            <a:off x="822960" y="2953512"/>
+            <a:ext cx="10515600" cy="493776"/>
+          </a:xfrm>
+          <a:prstGeom prst="rect">
+            <a:avLst/>
+          </a:prstGeom>
+          <a:solidFill>
+            <a:srgbClr val="E9F3DE"/>
+          </a:solidFill>
+          <a:ln>
+            <a:noFill/>
+          </a:ln>
+        </p:spPr>
+        <p:txBody>
+          <a:bodyPr wrap="square" lIns="128016" tIns="54864">
+            <a:noAutofit/>
+          </a:bodyPr>
+          <a:lstStyle/>
+          <a:p>
+            <a:r>
+              <a:rPr sz="1600" b="1">
+                <a:solidFill>
+                  <a:srgbClr val="27500A"/>
+                </a:solidFill>
+                <a:latin typeface="Calibri"/>
+              </a:rPr>
+              <a:t>B.  </a:t>
+            </a:r>
+            <a:r>
+              <a:rPr sz="1600" b="1">
+                <a:solidFill>
+                  <a:srgbClr val="27500A"/>
+                </a:solidFill>
+                <a:latin typeface="Calibri"/>
+              </a:rPr>
+              <a:t>只有 ApiVersions 例外回錯誤碼+支援範圍；其他 API 直接關閉連線   ✓</a:t>
+            </a:r>
+          </a:p>
+        </p:txBody>
+      </p:sp>
+      <p:sp>
+        <p:nvSpPr>
+          <p:cNvPr id="6" name="TextBox 5"/>
+          <p:cNvSpPr txBox="1"/>
+          <p:nvPr/>
+        </p:nvSpPr>
+        <p:spPr>
+          <a:xfrm>
+            <a:off x="822960" y="3575304"/>
+            <a:ext cx="10515600" cy="493776"/>
+          </a:xfrm>
+          <a:prstGeom prst="rect">
+            <a:avLst/>
+          </a:prstGeom>
+          <a:noFill/>
+        </p:spPr>
+        <p:txBody>
+          <a:bodyPr wrap="square">
+            <a:noAutofit/>
+          </a:bodyPr>
+          <a:lstStyle/>
+          <a:p>
+            <a:r>
+              <a:rPr sz="1600" b="0">
+                <a:solidFill>
+                  <a:srgbClr val="1E2024"/>
+                </a:solidFill>
+                <a:latin typeface="Calibri"/>
+              </a:rPr>
+              <a:t>C.  </a:t>
+            </a:r>
+            <a:r>
+              <a:rPr sz="1600" b="0">
+                <a:solidFill>
+                  <a:srgbClr val="1E2024"/>
+                </a:solidFill>
+                <a:latin typeface="Calibri"/>
+              </a:rPr>
+              <a:t>broker 自動降版處理</a:t>
+            </a:r>
+          </a:p>
+        </p:txBody>
+      </p:sp>
+      <p:sp>
+        <p:nvSpPr>
+          <p:cNvPr id="7" name="TextBox 6"/>
+          <p:cNvSpPr txBox="1"/>
+          <p:nvPr/>
+        </p:nvSpPr>
+        <p:spPr>
+          <a:xfrm>
+            <a:off x="822960" y="4197096"/>
+            <a:ext cx="10515600" cy="493776"/>
+          </a:xfrm>
+          <a:prstGeom prst="rect">
+            <a:avLst/>
+          </a:prstGeom>
+          <a:noFill/>
+        </p:spPr>
+        <p:txBody>
+          <a:bodyPr wrap="square">
+            <a:noAutofit/>
+          </a:bodyPr>
+          <a:lstStyle/>
+          <a:p>
+            <a:r>
+              <a:rPr sz="1600" b="0">
+                <a:solidFill>
+                  <a:srgbClr val="1E2024"/>
+                </a:solidFill>
+                <a:latin typeface="Calibri"/>
+              </a:rPr>
+              <a:t>D.  </a:t>
+            </a:r>
+            <a:r>
+              <a:rPr sz="1600" b="0">
+                <a:solidFill>
+                  <a:srgbClr val="1E2024"/>
+                </a:solidFill>
+                <a:latin typeface="Calibri"/>
+              </a:rPr>
+              <a:t>忽略版本照常處理</a:t>
+            </a:r>
+          </a:p>
+        </p:txBody>
+      </p:sp>
+      <p:sp>
+        <p:nvSpPr>
+          <p:cNvPr id="8" name="TextBox 7"/>
+          <p:cNvSpPr txBox="1"/>
+          <p:nvPr/>
+        </p:nvSpPr>
+        <p:spPr>
+          <a:xfrm>
+            <a:off x="640080" y="4910327"/>
+            <a:ext cx="10972800" cy="914400"/>
+          </a:xfrm>
+          <a:prstGeom prst="rect">
+            <a:avLst/>
+          </a:prstGeom>
+          <a:noFill/>
+        </p:spPr>
+        <p:txBody>
+          <a:bodyPr wrap="square">
+            <a:noAutofit/>
+          </a:bodyPr>
+          <a:lstStyle/>
+          <a:p>
+            <a:r>
+              <a:rPr sz="1400" b="1">
+                <a:solidFill>
+                  <a:srgbClr val="27500A"/>
+                </a:solidFill>
+                <a:latin typeface="Calibri"/>
+              </a:rPr>
+              <a:t>正解 B — </a:t>
+            </a:r>
+            <a:r>
+              <a:rPr sz="1400" b="0">
+                <a:solidFill>
+                  <a:srgbClr val="1E2024"/>
+                </a:solidFill>
+                <a:latin typeface="Calibri"/>
+              </a:rPr>
+              <a:t>ApiVersions 是協商的第一支 request（此時雙方還不知道彼此版本），若它也關閉連線，client 永遠問不到支援範圍，故回 v0+錯誤碼讓 client 重新協商；其他 API 在 RequestContext 解析失敗、SocketServer 關閉連線。</a:t>
+            </a:r>
+          </a:p>
+        </p:txBody>
+      </p:sp>
+      <p:sp>
+        <p:nvSpPr>
+          <p:cNvPr id="9" name="TextBox 8"/>
+          <p:cNvSpPr txBox="1"/>
+          <p:nvPr/>
+        </p:nvSpPr>
+        <p:spPr>
+          <a:xfrm>
+            <a:off x="640080" y="6400800"/>
+            <a:ext cx="10972800" cy="384048"/>
+          </a:xfrm>
+          <a:prstGeom prst="rect">
+            <a:avLst/>
+          </a:prstGeom>
+          <a:noFill/>
+        </p:spPr>
+        <p:txBody>
+          <a:bodyPr wrap="square">
+            <a:noAutofit/>
+          </a:bodyPr>
+          <a:lstStyle/>
+          <a:p>
+            <a:r>
+              <a:rPr sz="1200" b="1">
+                <a:solidFill>
+                  <a:srgbClr val="8A8A8A"/>
+                </a:solidFill>
+                <a:latin typeface="Calibri"/>
+              </a:rPr>
+              <a:t>REF   </a:t>
+            </a:r>
+            <a:r>
+              <a:rPr sz="1200" b="0" u="sng">
+                <a:solidFill>
+                  <a:srgbClr val="185FA5"/>
+                </a:solidFill>
+                <a:latin typeface="Courier New"/>
+                <a:hlinkClick r:id="rId2"/>
+              </a:rPr>
+              <a:t>RequestContext.java:112</a:t>
+            </a:r>
+            <a:r>
+              <a:rPr sz="1200" b="0">
+                <a:solidFill>
+                  <a:srgbClr val="8A8A8A"/>
+                </a:solidFill>
+                <a:latin typeface="Calibri"/>
+              </a:rPr>
+              <a:t>   ·   </a:t>
+            </a:r>
+            <a:r>
+              <a:rPr sz="1200" b="0" u="sng">
+                <a:solidFill>
+                  <a:srgbClr val="185FA5"/>
+                </a:solidFill>
+                <a:latin typeface="Courier New"/>
+                <a:hlinkClick r:id="rId3"/>
+              </a:rPr>
+              <a:t>SocketServer.scala:781</a:t>
+            </a:r>
+          </a:p>
+        </p:txBody>
+      </p:sp>
+    </p:spTree>
+  </p:cSld>
+  <p:clrMapOvr>
+    <a:masterClrMapping/>
+  </p:clrMapOvr>
+</p:sld>
+</file>
+
+<file path=ppt/slides/slide16.xml><?xml version="1.0" encoding="utf-8"?>
+<p:sld xmlns:a="http://schemas.openxmlformats.org/drawingml/2006/main" xmlns:p="http://schemas.openxmlformats.org/presentationml/2006/main" xmlns:r="http://schemas.openxmlformats.org/officeDocument/2006/relationships">
+  <p:cSld>
+    <p:spTree>
+      <p:nvGrpSpPr>
+        <p:cNvPr id="1" name=""/>
+        <p:cNvGrpSpPr/>
+        <p:nvPr/>
+      </p:nvGrpSpPr>
+      <p:grpSpPr/>
+      <p:sp>
+        <p:nvSpPr>
+          <p:cNvPr id="2" name="TextBox 1"/>
+          <p:cNvSpPr txBox="1"/>
+          <p:nvPr/>
+        </p:nvSpPr>
+        <p:spPr>
+          <a:xfrm>
+            <a:off x="640080" y="457200"/>
+            <a:ext cx="10972800" cy="365760"/>
+          </a:xfrm>
+          <a:prstGeom prst="rect">
+            <a:avLst/>
+          </a:prstGeom>
+          <a:noFill/>
+        </p:spPr>
+        <p:txBody>
+          <a:bodyPr wrap="square">
+            <a:noAutofit/>
+          </a:bodyPr>
+          <a:lstStyle/>
+          <a:p>
+            <a:r>
+              <a:rPr sz="1300" b="1">
+                <a:solidFill>
+                  <a:srgbClr val="185FA5"/>
+                </a:solidFill>
+                <a:latin typeface="Calibri"/>
+              </a:rPr>
               <a:t>Recap</a:t>
             </a:r>
           </a:p>
@@ -7434,7 +7727,7 @@
                 </a:solidFill>
                 <a:latin typeface="Calibri"/>
               </a:rPr>
-              <a:t>隨堂考 · 核心</a:t>
+              <a:t>Part 1 · 帳單</a:t>
             </a:r>
           </a:p>
         </p:txBody>
@@ -7448,7 +7741,7 @@
         <p:spPr>
           <a:xfrm>
             <a:off x="640080" y="841248"/>
-            <a:ext cx="10972800" cy="1188720"/>
+            <a:ext cx="10972800" cy="1005840"/>
           </a:xfrm>
           <a:prstGeom prst="rect">
             <a:avLst/>
@@ -7462,13 +7755,13 @@
           <a:lstStyle/>
           <a:p>
             <a:r>
-              <a:rPr sz="2600" b="1">
+              <a:rPr sz="3200" b="1">
                 <a:solidFill>
                   <a:srgbClr val="1E2024"/>
                 </a:solidFill>
                 <a:latin typeface="Calibri"/>
               </a:rPr>
-              <a:t>replica fetch（broker↔broker）的 Fetch 版本怎麼決定？</a:t>
+              <a:t>Kafka 這個選擇有多貴（實測數字）</a:t>
             </a:r>
           </a:p>
         </p:txBody>
@@ -7481,8 +7774,95 @@
         </p:nvSpPr>
         <p:spPr>
           <a:xfrm>
-            <a:off x="822960" y="2331720"/>
-            <a:ext cx="10515600" cy="493776"/>
+            <a:off x="640080" y="2148840"/>
+            <a:ext cx="10972800" cy="1097280"/>
+          </a:xfrm>
+          <a:prstGeom prst="rect">
+            <a:avLst/>
+          </a:prstGeom>
+          <a:solidFill>
+            <a:srgbClr val="F3F1EC"/>
+          </a:solidFill>
+          <a:ln w="6350">
+            <a:solidFill>
+              <a:srgbClr val="E3E0D8"/>
+            </a:solidFill>
+          </a:ln>
+        </p:spPr>
+        <p:txBody>
+          <a:bodyPr wrap="square" lIns="146304" tIns="91440" bIns="91440">
+            <a:noAutofit/>
+          </a:bodyPr>
+          <a:lstStyle/>
+          <a:p>
+            <a:r>
+              <a:rPr sz="1350" b="0">
+                <a:solidFill>
+                  <a:srgbClr val="2C2C2A"/>
+                </a:solidFill>
+                <a:latin typeface="Calibri"/>
+              </a:rPr>
+              <a:t>90 支 API × 308 個現役 wire 版本</a:t>
+            </a:r>
+          </a:p>
+          <a:p>
+            <a:r>
+              <a:rPr sz="1350" b="0">
+                <a:solidFill>
+                  <a:srgbClr val="2C2C2A"/>
+                </a:solidFill>
+                <a:latin typeface="Calibri"/>
+              </a:rPr>
+              <a:t>9,890 行 schema JSON → 約 18 萬行生成碼（≈18×）</a:t>
+            </a:r>
+          </a:p>
+          <a:p>
+            <a:r>
+              <a:rPr sz="1350" b="0">
+                <a:solidFill>
+                  <a:srgbClr val="2C2C2A"/>
+                </a:solidFill>
+                <a:latin typeface="Calibri"/>
+              </a:rPr>
+              <a:t>相容性系統測試涵蓋 23 個 broker 版本</a:t>
+            </a:r>
+          </a:p>
+        </p:txBody>
+      </p:sp>
+      <p:pic>
+        <p:nvPicPr>
+          <p:cNvPr id="5" name="Picture 4" descr="arrows-split.png"/>
+          <p:cNvPicPr>
+            <a:picLocks noChangeAspect="1"/>
+          </p:cNvPicPr>
+          <p:nvPr/>
+        </p:nvPicPr>
+        <p:blipFill>
+          <a:blip r:embed="rId2"/>
+          <a:stretch>
+            <a:fillRect/>
+          </a:stretch>
+        </p:blipFill>
+        <p:spPr>
+          <a:xfrm>
+            <a:off x="658368" y="3474720"/>
+            <a:ext cx="274320" cy="274320"/>
+          </a:xfrm>
+          <a:prstGeom prst="rect">
+            <a:avLst/>
+          </a:prstGeom>
+        </p:spPr>
+      </p:pic>
+      <p:sp>
+        <p:nvSpPr>
+          <p:cNvPr id="6" name="TextBox 5"/>
+          <p:cNvSpPr txBox="1"/>
+          <p:nvPr/>
+        </p:nvSpPr>
+        <p:spPr>
+          <a:xfrm>
+            <a:off x="1078992" y="3447288"/>
+            <a:ext cx="10515600" cy="841248"/>
           </a:xfrm>
           <a:prstGeom prst="rect">
             <a:avLst/>
@@ -7496,36 +7876,66 @@
           <a:lstStyle/>
           <a:p>
             <a:r>
-              <a:rPr sz="1600" b="0">
+              <a:rPr sz="1650" b="0">
                 <a:solidFill>
                   <a:srgbClr val="1E2024"/>
                 </a:solidFill>
                 <a:latin typeface="Calibri"/>
               </a:rPr>
-              <a:t>A.  </a:t>
-            </a:r>
-            <a:r>
-              <a:rPr sz="1600" b="0">
-                <a:solidFill>
-                  <a:srgbClr val="1E2024"/>
-                </a:solidFill>
-                <a:latin typeface="Calibri"/>
-              </a:rPr>
-              <a:t>兩 broker ApiVersions 協商取交集</a:t>
-            </a:r>
-          </a:p>
-        </p:txBody>
-      </p:sp>
-      <p:sp>
-        <p:nvSpPr>
-          <p:cNvPr id="5" name="TextBox 4"/>
-          <p:cNvSpPr txBox="1"/>
-          <p:nvPr/>
-        </p:nvSpPr>
-        <p:spPr>
-          <a:xfrm>
-            <a:off x="822960" y="2953512"/>
-            <a:ext cx="10515600" cy="493776"/>
+              <a:t>每加一版牽動 .json、generator 逐版讀寫、ApiKeys、全版本 round-trip 測試；成本隨 API 數 × 版本數乘積成長</a:t>
+            </a:r>
+          </a:p>
+        </p:txBody>
+      </p:sp>
+      <p:sp>
+        <p:nvSpPr>
+          <p:cNvPr id="7" name="TextBox 6"/>
+          <p:cNvSpPr txBox="1"/>
+          <p:nvPr/>
+        </p:nvSpPr>
+        <p:spPr>
+          <a:xfrm>
+            <a:off x="640080" y="4434840"/>
+            <a:ext cx="10972800" cy="877824"/>
+          </a:xfrm>
+          <a:prstGeom prst="rect">
+            <a:avLst/>
+          </a:prstGeom>
+          <a:solidFill>
+            <a:srgbClr val="E9F3DE"/>
+          </a:solidFill>
+          <a:ln>
+            <a:noFill/>
+          </a:ln>
+        </p:spPr>
+        <p:txBody>
+          <a:bodyPr wrap="square" lIns="146304" tIns="82296">
+            <a:noAutofit/>
+          </a:bodyPr>
+          <a:lstStyle/>
+          <a:p>
+            <a:r>
+              <a:rPr sz="1500" b="0">
+                <a:solidFill>
+                  <a:srgbClr val="27500A"/>
+                </a:solidFill>
+                <a:latin typeface="Calibri"/>
+              </a:rPr>
+              <a:t>貴到 Kafka 自己在 KIP-896 承認「maintenance cost goes up, value goes down」，4.0 砍掉 2.1 以前的舊版本止血</a:t>
+            </a:r>
+          </a:p>
+        </p:txBody>
+      </p:sp>
+      <p:sp>
+        <p:nvSpPr>
+          <p:cNvPr id="8" name="TextBox 7"/>
+          <p:cNvSpPr txBox="1"/>
+          <p:nvPr/>
+        </p:nvSpPr>
+        <p:spPr>
+          <a:xfrm>
+            <a:off x="640080" y="6400800"/>
+            <a:ext cx="10972800" cy="384048"/>
           </a:xfrm>
           <a:prstGeom prst="rect">
             <a:avLst/>
@@ -7539,142 +7949,42 @@
           <a:lstStyle/>
           <a:p>
             <a:r>
-              <a:rPr sz="1600" b="0">
-                <a:solidFill>
-                  <a:srgbClr val="1E2024"/>
-                </a:solidFill>
-                <a:latin typeface="Calibri"/>
-              </a:rPr>
-              <a:t>B.  </a:t>
-            </a:r>
-            <a:r>
-              <a:rPr sz="1600" b="0">
-                <a:solidFill>
-                  <a:srgbClr val="1E2024"/>
-                </a:solidFill>
-                <a:latin typeface="Calibri"/>
-              </a:rPr>
-              <a:t>由 finalized metadata.version 決定</a:t>
-            </a:r>
-          </a:p>
-        </p:txBody>
-      </p:sp>
-      <p:sp>
-        <p:nvSpPr>
-          <p:cNvPr id="6" name="TextBox 5"/>
-          <p:cNvSpPr txBox="1"/>
-          <p:nvPr/>
-        </p:nvSpPr>
-        <p:spPr>
-          <a:xfrm>
-            <a:off x="822960" y="3575304"/>
-            <a:ext cx="10515600" cy="493776"/>
-          </a:xfrm>
-          <a:prstGeom prst="rect">
-            <a:avLst/>
-          </a:prstGeom>
-          <a:noFill/>
-        </p:spPr>
-        <p:txBody>
-          <a:bodyPr wrap="square">
-            <a:noAutofit/>
-          </a:bodyPr>
-          <a:lstStyle/>
-          <a:p>
-            <a:r>
-              <a:rPr sz="1600" b="0">
-                <a:solidFill>
-                  <a:srgbClr val="1E2024"/>
-                </a:solidFill>
-                <a:latin typeface="Calibri"/>
-              </a:rPr>
-              <a:t>C.  </a:t>
-            </a:r>
-            <a:r>
-              <a:rPr sz="1600" b="0">
-                <a:solidFill>
-                  <a:srgbClr val="1E2024"/>
-                </a:solidFill>
-                <a:latin typeface="Calibri"/>
-              </a:rPr>
-              <a:t>永遠用最新版</a:t>
-            </a:r>
-          </a:p>
-        </p:txBody>
-      </p:sp>
-      <p:sp>
-        <p:nvSpPr>
-          <p:cNvPr id="7" name="TextBox 6"/>
-          <p:cNvSpPr txBox="1"/>
-          <p:nvPr/>
-        </p:nvSpPr>
-        <p:spPr>
-          <a:xfrm>
-            <a:off x="822960" y="4197096"/>
-            <a:ext cx="10515600" cy="493776"/>
-          </a:xfrm>
-          <a:prstGeom prst="rect">
-            <a:avLst/>
-          </a:prstGeom>
-          <a:noFill/>
-        </p:spPr>
-        <p:txBody>
-          <a:bodyPr wrap="square">
-            <a:noAutofit/>
-          </a:bodyPr>
-          <a:lstStyle/>
-          <a:p>
-            <a:r>
-              <a:rPr sz="1600" b="0">
-                <a:solidFill>
-                  <a:srgbClr val="1E2024"/>
-                </a:solidFill>
-                <a:latin typeface="Calibri"/>
-              </a:rPr>
-              <a:t>D.  </a:t>
-            </a:r>
-            <a:r>
-              <a:rPr sz="1600" b="0">
-                <a:solidFill>
-                  <a:srgbClr val="1E2024"/>
-                </a:solidFill>
-                <a:latin typeface="Calibri"/>
-              </a:rPr>
-              <a:t>controller 每次指定</a:t>
-            </a:r>
-          </a:p>
-        </p:txBody>
-      </p:sp>
-      <p:sp>
-        <p:nvSpPr>
-          <p:cNvPr id="8" name="TextBox 7"/>
-          <p:cNvSpPr txBox="1"/>
-          <p:nvPr/>
-        </p:nvSpPr>
-        <p:spPr>
-          <a:xfrm>
-            <a:off x="640080" y="4910327"/>
-            <a:ext cx="10972800" cy="914400"/>
-          </a:xfrm>
-          <a:prstGeom prst="rect">
-            <a:avLst/>
-          </a:prstGeom>
-          <a:noFill/>
-        </p:spPr>
-        <p:txBody>
-          <a:bodyPr wrap="square">
-            <a:noAutofit/>
-          </a:bodyPr>
-          <a:lstStyle/>
-          <a:p>
-            <a:r>
-              <a:rPr sz="1400" b="0">
+              <a:rPr sz="1200" b="1">
                 <a:solidFill>
                   <a:srgbClr val="8A8A8A"/>
                 </a:solidFill>
                 <a:latin typeface="Calibri"/>
               </a:rPr>
-              <a:t>想一想 —— 下一頁公布答案</a:t>
+              <a:t>REF   </a:t>
+            </a:r>
+            <a:r>
+              <a:rPr sz="1200" b="0" u="sng">
+                <a:solidFill>
+                  <a:srgbClr val="185FA5"/>
+                </a:solidFill>
+                <a:latin typeface="Calibri"/>
+                <a:hlinkClick r:id="rId3"/>
+              </a:rPr>
+              <a:t>KIP-896</a:t>
+            </a:r>
+            <a:r>
+              <a:rPr sz="1200" b="0">
+                <a:solidFill>
+                  <a:srgbClr val="8A8A8A"/>
+                </a:solidFill>
+                <a:latin typeface="Calibri"/>
+              </a:rPr>
+              <a:t>   ·   </a:t>
+            </a:r>
+            <a:r>
+              <a:rPr sz="1200" b="0" u="sng">
+                <a:solidFill>
+                  <a:srgbClr val="185FA5"/>
+                </a:solidFill>
+                <a:latin typeface="Courier New"/>
+                <a:hlinkClick r:id="rId4"/>
+              </a:rPr>
+              <a:t>FetchRequest.json 4-18</a:t>
             </a:r>
           </a:p>
         </p:txBody>

--- a/study/version-control/kafka-version-negotiation.pptx
+++ b/study/version-control/kafka-version-negotiation.pptx
@@ -4038,7 +4038,7 @@
         <p:spPr>
           <a:xfrm>
             <a:off x="640080" y="2148840"/>
-            <a:ext cx="10972800" cy="1371600"/>
+            <a:ext cx="10972800" cy="1645920"/>
           </a:xfrm>
           <a:prstGeom prst="rect">
             <a:avLst/>
@@ -4065,7 +4065,7 @@
                 </a:solidFill>
                 <a:latin typeface="Calibri"/>
               </a:rPr>
-              <a:t>交集空              → client 端 UnsupportedVersionException（送出前 abort）</a:t>
+              <a:t>交集空                       → client 端 UnsupportedVersionException（送出前 abort）</a:t>
             </a:r>
           </a:p>
           <a:p>
@@ -4076,7 +4076,7 @@
                 </a:solidFill>
                 <a:latin typeface="Calibri"/>
               </a:rPr>
-              <a:t>直送不支援的版本    → broker 丟 UnsupportedVersionException、關閉連線</a:t>
+              <a:t>client 繞過協商、硬送不支援版本 → broker 丟 UnsupportedVersionException、關閉連線</a:t>
             </a:r>
           </a:p>
           <a:p>
@@ -4108,7 +4108,7 @@
         </p:blipFill>
         <p:spPr>
           <a:xfrm>
-            <a:off x="658368" y="3749040"/>
+            <a:off x="658368" y="4023360"/>
             <a:ext cx="274320" cy="274320"/>
           </a:xfrm>
           <a:prstGeom prst="rect">
@@ -4124,7 +4124,7 @@
         </p:nvSpPr>
         <p:spPr>
           <a:xfrm>
-            <a:off x="1078992" y="3721608"/>
+            <a:off x="1078992" y="3995928"/>
             <a:ext cx="10515600" cy="493776"/>
           </a:xfrm>
           <a:prstGeom prst="rect">
@@ -4153,6 +4153,40 @@
       <p:sp>
         <p:nvSpPr>
           <p:cNvPr id="7" name="TextBox 6"/>
+          <p:cNvSpPr txBox="1"/>
+          <p:nvPr/>
+        </p:nvSpPr>
+        <p:spPr>
+          <a:xfrm>
+            <a:off x="640080" y="4636008"/>
+            <a:ext cx="10972800" cy="731520"/>
+          </a:xfrm>
+          <a:prstGeom prst="rect">
+            <a:avLst/>
+          </a:prstGeom>
+          <a:noFill/>
+        </p:spPr>
+        <p:txBody>
+          <a:bodyPr wrap="square">
+            <a:noAutofit/>
+          </a:bodyPr>
+          <a:lstStyle/>
+          <a:p>
+            <a:r>
+              <a:rPr sz="1500" b="0">
+                <a:solidFill>
+                  <a:srgbClr val="5F5E5A"/>
+                </a:solidFill>
+                <a:latin typeface="Calibri"/>
+              </a:rPr>
+              <a:t>「硬送」指 client↔broker：自刻或有 bug 的 client 繞過協商；broker↔broker 版本已由 MV 事先釘住，不會送出對方不懂的版本。</a:t>
+            </a:r>
+          </a:p>
+        </p:txBody>
+      </p:sp>
+      <p:sp>
+        <p:nvSpPr>
+          <p:cNvPr id="8" name="TextBox 7"/>
           <p:cNvSpPr txBox="1"/>
           <p:nvPr/>
         </p:nvSpPr>
@@ -5934,7 +5968,7 @@
                 </a:solidFill>
                 <a:latin typeface="Calibri"/>
               </a:rPr>
-              <a:t>現實一：client 是內嵌在應用裡的函式庫——IoT 裝置、車載系統、多年前的 batch job，隨應用長期運行、難更新（Kafka 曾為此保留每個 protocol 版本近九年，4.0／KIP-896 才把下限提到 2.1）</a:t>
+              <a:t>現實一：client 是內嵌在應用裡的函式庫——IoT 裝置、車載系統、多年前的 batch job，隨應用長期運行、難更新（Kafka 曾為此保留每個 protocol 版本近九年）</a:t>
             </a:r>
           </a:p>
         </p:txBody>
@@ -6039,6 +6073,40 @@
       <p:sp>
         <p:nvSpPr>
           <p:cNvPr id="10" name="TextBox 9"/>
+          <p:cNvSpPr txBox="1"/>
+          <p:nvPr/>
+        </p:nvSpPr>
+        <p:spPr>
+          <a:xfrm>
+            <a:off x="640080" y="5971032"/>
+            <a:ext cx="10972800" cy="1024127"/>
+          </a:xfrm>
+          <a:prstGeom prst="rect">
+            <a:avLst/>
+          </a:prstGeom>
+          <a:noFill/>
+        </p:spPr>
+        <p:txBody>
+          <a:bodyPr wrap="square">
+            <a:noAutofit/>
+          </a:bodyPr>
+          <a:lstStyle/>
+          <a:p>
+            <a:r>
+              <a:rPr sz="1500" b="0">
+                <a:solidFill>
+                  <a:srgbClr val="5F5E5A"/>
+                </a:solidFill>
+                <a:latin typeface="Calibri"/>
+              </a:rPr>
+              <a:t>這其實就是 backward／forward compatibility：一般服務多靠『加欄位＋ URL 版號 /v1 /v2』相容；Kafka 特別在每支 API 各自宣告版本區間、連線當下協商挑一版（更像 TLS 選 cipher，而非固定版號）。</a:t>
+            </a:r>
+          </a:p>
+        </p:txBody>
+      </p:sp>
+      <p:sp>
+        <p:nvSpPr>
+          <p:cNvPr id="11" name="TextBox 10"/>
           <p:cNvSpPr txBox="1"/>
           <p:nvPr/>
         </p:nvSpPr>
@@ -6727,6 +6795,25 @@
               </a:rPr>
               <a:t>latestUsableVersion</a:t>
             </a:r>
+            <a:r>
+              <a:rPr sz="1200" b="0">
+                <a:solidFill>
+                  <a:srgbClr val="8A8A8A"/>
+                </a:solidFill>
+                <a:latin typeface="Calibri"/>
+              </a:rPr>
+              <a:t>   ·   </a:t>
+            </a:r>
+            <a:r>
+              <a:rPr sz="1200" b="0" u="sng">
+                <a:solidFill>
+                  <a:srgbClr val="185FA5"/>
+                </a:solidFill>
+                <a:latin typeface="Courier New"/>
+                <a:hlinkClick r:id="rId6"/>
+              </a:rPr>
+              <a:t>fetchRequestVersion</a:t>
+            </a:r>
           </a:p>
         </p:txBody>
       </p:sp>
@@ -6971,7 +7058,7 @@
                 </a:solidFill>
                 <a:latin typeface="Calibri"/>
               </a:rPr>
-              <a:t>為什麼 replication 例外？它要求所有 follower↔leader 講同一版，才交給 finalized MV 集中決定；帳單是升級變兩階段（先滾 binary、再 finalize）——一致性拿彈性換</a:t>
+              <a:t>為什麼 replication 例外？它要求所有 follower↔leader 講同一版，才交給 finalized MV 集中決定；成本是升級變兩階段——先全叢集滾完 binary（都具備新版能力），管理員再手動 finalize MV 才切新版（協商連線則會自動挑上去）</a:t>
             </a:r>
           </a:p>
         </p:txBody>
@@ -7229,7 +7316,7 @@
         <p:spPr>
           <a:xfrm>
             <a:off x="1664208" y="1965960"/>
-            <a:ext cx="8869680" cy="4093698"/>
+            <a:ext cx="8869680" cy="4097792"/>
           </a:xfrm>
           <a:prstGeom prst="rect">
             <a:avLst/>
@@ -7727,7 +7814,7 @@
                 </a:solidFill>
                 <a:latin typeface="Calibri"/>
               </a:rPr>
-              <a:t>Part 1 · 帳單</a:t>
+              <a:t>Part 1 · 代價</a:t>
             </a:r>
           </a:p>
         </p:txBody>
@@ -7775,7 +7862,7 @@
         <p:spPr>
           <a:xfrm>
             <a:off x="640080" y="2148840"/>
-            <a:ext cx="10972800" cy="1097280"/>
+            <a:ext cx="10972800" cy="822959"/>
           </a:xfrm>
           <a:prstGeom prst="rect">
             <a:avLst/>
@@ -7802,7 +7889,7 @@
                 </a:solidFill>
                 <a:latin typeface="Calibri"/>
               </a:rPr>
-              <a:t>90 支 API × 308 個現役 wire 版本</a:t>
+              <a:t>90 支 API × 308 個現役 wire 版本 → generator 吹成約 18× 生成碼（~18 萬行）</a:t>
             </a:r>
           </a:p>
           <a:p>
@@ -7813,18 +7900,7 @@
                 </a:solidFill>
                 <a:latin typeface="Calibri"/>
               </a:rPr>
-              <a:t>9,890 行 schema JSON → 約 18 萬行生成碼（≈18×）</a:t>
-            </a:r>
-          </a:p>
-          <a:p>
-            <a:r>
-              <a:rPr sz="1350" b="0">
-                <a:solidFill>
-                  <a:srgbClr val="2C2C2A"/>
-                </a:solidFill>
-                <a:latin typeface="Calibri"/>
-              </a:rPr>
-              <a:t>相容性系統測試涵蓋 23 個 broker 版本</a:t>
+              <a:t>每加一版：改 .json、逐版生 read/write/size、ApiKeys 補版號</a:t>
             </a:r>
           </a:p>
         </p:txBody>
@@ -7845,7 +7921,7 @@
         </p:blipFill>
         <p:spPr>
           <a:xfrm>
-            <a:off x="658368" y="3474720"/>
+            <a:off x="658368" y="3200399"/>
             <a:ext cx="274320" cy="274320"/>
           </a:xfrm>
           <a:prstGeom prst="rect">
@@ -7861,8 +7937,8 @@
         </p:nvSpPr>
         <p:spPr>
           <a:xfrm>
-            <a:off x="1078992" y="3447288"/>
-            <a:ext cx="10515600" cy="841248"/>
+            <a:off x="1078992" y="3172968"/>
+            <a:ext cx="10515600" cy="1188720"/>
           </a:xfrm>
           <a:prstGeom prst="rect">
             <a:avLst/>
@@ -7882,7 +7958,7 @@
                 </a:solidFill>
                 <a:latin typeface="Calibri"/>
               </a:rPr>
-              <a:t>每加一版牽動 .json、generator 逐版讀寫、ApiKeys、全版本 round-trip 測試；成本隨 API 數 × 版本數乘積成長</a:t>
+              <a:t>相容性測試矩陣兩層、都隨版本數長：build 時全 308 版 round-trip 序列化；系統測試再起真實叢集 × 23 個 broker 版本（2.1→4.3）互測新 client 對舊 broker</a:t>
             </a:r>
           </a:p>
         </p:txBody>
@@ -7895,7 +7971,41 @@
         </p:nvSpPr>
         <p:spPr>
           <a:xfrm>
-            <a:off x="640080" y="4434840"/>
+            <a:off x="640080" y="4507992"/>
+            <a:ext cx="10972800" cy="731520"/>
+          </a:xfrm>
+          <a:prstGeom prst="rect">
+            <a:avLst/>
+          </a:prstGeom>
+          <a:noFill/>
+        </p:spPr>
+        <p:txBody>
+          <a:bodyPr wrap="square">
+            <a:noAutofit/>
+          </a:bodyPr>
+          <a:lstStyle/>
+          <a:p>
+            <a:r>
+              <a:rPr sz="1500" b="0">
+                <a:solidFill>
+                  <a:srgbClr val="5F5E5A"/>
+                </a:solidFill>
+                <a:latin typeface="Calibri"/>
+              </a:rPr>
+              <a:t>broker handler 也逐版分岔：按協商版本讀/填欄位、回應用『同一版』序列化、老版缺的欄位給預設，連語意差異（如 topic-id 取代 topic-name）都要 if (version≥N)。</a:t>
+            </a:r>
+          </a:p>
+        </p:txBody>
+      </p:sp>
+      <p:sp>
+        <p:nvSpPr>
+          <p:cNvPr id="8" name="TextBox 7"/>
+          <p:cNvSpPr txBox="1"/>
+          <p:nvPr/>
+        </p:nvSpPr>
+        <p:spPr>
+          <a:xfrm>
+            <a:off x="640080" y="5367528"/>
             <a:ext cx="10972800" cy="877824"/>
           </a:xfrm>
           <a:prstGeom prst="rect">
@@ -7921,14 +8031,14 @@
                 </a:solidFill>
                 <a:latin typeface="Calibri"/>
               </a:rPr>
-              <a:t>貴到 Kafka 自己在 KIP-896 承認「maintenance cost goes up, value goes down」，4.0 砍掉 2.1 以前的舊版本止血</a:t>
-            </a:r>
-          </a:p>
-        </p:txBody>
-      </p:sp>
-      <p:sp>
-        <p:nvSpPr>
-          <p:cNvPr id="8" name="TextBox 7"/>
+              <a:t>貴到 Kafka 自己在 KIP-896 承認「maintenance cost up, value down」，4.0 砍掉 2.1 以前的舊版本止血</a:t>
+            </a:r>
+          </a:p>
+        </p:txBody>
+      </p:sp>
+      <p:sp>
+        <p:nvSpPr>
+          <p:cNvPr id="9" name="TextBox 8"/>
           <p:cNvSpPr txBox="1"/>
           <p:nvPr/>
         </p:nvSpPr>
@@ -7984,7 +8094,26 @@
                 <a:latin typeface="Courier New"/>
                 <a:hlinkClick r:id="rId4"/>
               </a:rPr>
-              <a:t>FetchRequest.json 4-18</a:t>
+              <a:t>RequestContext</a:t>
+            </a:r>
+            <a:r>
+              <a:rPr sz="1200" b="0">
+                <a:solidFill>
+                  <a:srgbClr val="8A8A8A"/>
+                </a:solidFill>
+                <a:latin typeface="Calibri"/>
+              </a:rPr>
+              <a:t>   ·   </a:t>
+            </a:r>
+            <a:r>
+              <a:rPr sz="1200" b="0" u="sng">
+                <a:solidFill>
+                  <a:srgbClr val="185FA5"/>
+                </a:solidFill>
+                <a:latin typeface="Courier New"/>
+                <a:hlinkClick r:id="rId5"/>
+              </a:rPr>
+              <a:t>validVersions</a:t>
             </a:r>
           </a:p>
         </p:txBody>

--- a/study/version-control/kafka-version-negotiation.pptx
+++ b/study/version-control/kafka-version-negotiation.pptx
@@ -21,6 +21,8 @@
     <p:sldId id="269" r:id="rId20"/>
     <p:sldId id="270" r:id="rId21"/>
     <p:sldId id="271" r:id="rId22"/>
+    <p:sldId id="272" r:id="rId23"/>
+    <p:sldId id="273" r:id="rId24"/>
   </p:sldIdLst>
   <p:sldSz cx="12191695" cy="6858000" type="screen4x3"/>
   <p:notesSz cx="6858000" cy="9144000"/>
@@ -3329,7 +3331,7 @@
                 </a:solidFill>
                 <a:latin typeface="Calibri"/>
               </a:rPr>
-              <a:t>隨堂考 · 核心</a:t>
+              <a:t>Part 1 · 代價 · 測試</a:t>
             </a:r>
           </a:p>
         </p:txBody>
@@ -3343,27 +3345,27 @@
         <p:spPr>
           <a:xfrm>
             <a:off x="640080" y="841248"/>
-            <a:ext cx="10972800" cy="1188720"/>
-          </a:xfrm>
-          <a:prstGeom prst="rect">
-            <a:avLst/>
-          </a:prstGeom>
-          <a:noFill/>
-        </p:spPr>
-        <p:txBody>
-          <a:bodyPr wrap="square">
-            <a:noAutofit/>
-          </a:bodyPr>
-          <a:lstStyle/>
-          <a:p>
-            <a:r>
-              <a:rPr sz="2600" b="1">
+            <a:ext cx="10972800" cy="1005840"/>
+          </a:xfrm>
+          <a:prstGeom prst="rect">
+            <a:avLst/>
+          </a:prstGeom>
+          <a:noFill/>
+        </p:spPr>
+        <p:txBody>
+          <a:bodyPr wrap="square">
+            <a:noAutofit/>
+          </a:bodyPr>
+          <a:lstStyle/>
+          <a:p>
+            <a:r>
+              <a:rPr sz="3200" b="1">
                 <a:solidFill>
                   <a:srgbClr val="1E2024"/>
                 </a:solidFill>
                 <a:latin typeface="Calibri"/>
               </a:rPr>
-              <a:t>replica fetch（broker↔broker）的 Fetch 版本怎麼決定？</a:t>
+              <a:t>相容性測試（一）：每次 build 全版本 round-trip</a:t>
             </a:r>
           </a:p>
         </p:txBody>
@@ -3376,200 +3378,283 @@
         </p:nvSpPr>
         <p:spPr>
           <a:xfrm>
-            <a:off x="822960" y="2331720"/>
-            <a:ext cx="10515600" cy="493776"/>
-          </a:xfrm>
-          <a:prstGeom prst="rect">
-            <a:avLst/>
-          </a:prstGeom>
-          <a:noFill/>
-        </p:spPr>
-        <p:txBody>
-          <a:bodyPr wrap="square">
-            <a:noAutofit/>
-          </a:bodyPr>
-          <a:lstStyle/>
-          <a:p>
-            <a:r>
-              <a:rPr sz="1600" b="0">
+            <a:off x="640080" y="2148840"/>
+            <a:ext cx="10972800" cy="1097280"/>
+          </a:xfrm>
+          <a:prstGeom prst="rect">
+            <a:avLst/>
+          </a:prstGeom>
+          <a:solidFill>
+            <a:srgbClr val="F3F1EC"/>
+          </a:solidFill>
+          <a:ln w="6350">
+            <a:solidFill>
+              <a:srgbClr val="E3E0D8"/>
+            </a:solidFill>
+          </a:ln>
+        </p:spPr>
+        <p:txBody>
+          <a:bodyPr wrap="square" lIns="146304" tIns="91440" bIns="91440">
+            <a:noAutofit/>
+          </a:bodyPr>
+          <a:lstStyle/>
+          <a:p>
+            <a:r>
+              <a:rPr sz="1350" b="0">
+                <a:solidFill>
+                  <a:srgbClr val="2C2C2A"/>
+                </a:solidFill>
+                <a:latin typeface="Calibri"/>
+              </a:rPr>
+              <a:t>RequestResponseTest.testSerialization：ApiKeys × allVersions 全積</a:t>
+            </a:r>
+          </a:p>
+          <a:p>
+            <a:r>
+              <a:rPr sz="1350" b="0">
+                <a:solidFill>
+                  <a:srgbClr val="2C2C2A"/>
+                </a:solidFill>
+                <a:latin typeface="Calibri"/>
+              </a:rPr>
+              <a:t>94 支 RPC、308 個現役請求版本 → build → 序列化 → 反序列化 → 比對，逐一跑</a:t>
+            </a:r>
+          </a:p>
+        </p:txBody>
+      </p:sp>
+      <p:pic>
+        <p:nvPicPr>
+          <p:cNvPr id="5" name="Picture 4" descr="arrows-split.png"/>
+          <p:cNvPicPr>
+            <a:picLocks noChangeAspect="1"/>
+          </p:cNvPicPr>
+          <p:nvPr/>
+        </p:nvPicPr>
+        <p:blipFill>
+          <a:blip r:embed="rId2"/>
+          <a:stretch>
+            <a:fillRect/>
+          </a:stretch>
+        </p:blipFill>
+        <p:spPr>
+          <a:xfrm>
+            <a:off x="658368" y="3474720"/>
+            <a:ext cx="274320" cy="274320"/>
+          </a:xfrm>
+          <a:prstGeom prst="rect">
+            <a:avLst/>
+          </a:prstGeom>
+        </p:spPr>
+      </p:pic>
+      <p:sp>
+        <p:nvSpPr>
+          <p:cNvPr id="6" name="TextBox 5"/>
+          <p:cNvSpPr txBox="1"/>
+          <p:nvPr/>
+        </p:nvSpPr>
+        <p:spPr>
+          <a:xfrm>
+            <a:off x="1078992" y="3447288"/>
+            <a:ext cx="10515600" cy="841248"/>
+          </a:xfrm>
+          <a:prstGeom prst="rect">
+            <a:avLst/>
+          </a:prstGeom>
+          <a:noFill/>
+        </p:spPr>
+        <p:txBody>
+          <a:bodyPr wrap="square">
+            <a:noAutofit/>
+          </a:bodyPr>
+          <a:lstStyle/>
+          <a:p>
+            <a:r>
+              <a:rPr sz="1650" b="0">
                 <a:solidFill>
                   <a:srgbClr val="1E2024"/>
                 </a:solidFill>
                 <a:latin typeface="Calibri"/>
               </a:rPr>
-              <a:t>A.  </a:t>
-            </a:r>
-            <a:r>
-              <a:rPr sz="1600" b="0">
+              <a:t>靠 ApiKeys.values() × allVersions() 迴圈，新增版本自動涵蓋——省了手改，代價是每次 build 執行量只增不減</a:t>
+            </a:r>
+          </a:p>
+        </p:txBody>
+      </p:sp>
+      <p:pic>
+        <p:nvPicPr>
+          <p:cNvPr id="7" name="Picture 6" descr="ban.png"/>
+          <p:cNvPicPr>
+            <a:picLocks noChangeAspect="1"/>
+          </p:cNvPicPr>
+          <p:nvPr/>
+        </p:nvPicPr>
+        <p:blipFill>
+          <a:blip r:embed="rId3"/>
+          <a:stretch>
+            <a:fillRect/>
+          </a:stretch>
+        </p:blipFill>
+        <p:spPr>
+          <a:xfrm>
+            <a:off x="658368" y="4462272"/>
+            <a:ext cx="274320" cy="274320"/>
+          </a:xfrm>
+          <a:prstGeom prst="rect">
+            <a:avLst/>
+          </a:prstGeom>
+        </p:spPr>
+      </p:pic>
+      <p:sp>
+        <p:nvSpPr>
+          <p:cNvPr id="8" name="TextBox 7"/>
+          <p:cNvSpPr txBox="1"/>
+          <p:nvPr/>
+        </p:nvSpPr>
+        <p:spPr>
+          <a:xfrm>
+            <a:off x="1078992" y="4434840"/>
+            <a:ext cx="10515600" cy="841248"/>
+          </a:xfrm>
+          <a:prstGeom prst="rect">
+            <a:avLst/>
+          </a:prstGeom>
+          <a:noFill/>
+        </p:spPr>
+        <p:txBody>
+          <a:bodyPr wrap="square">
+            <a:noAutofit/>
+          </a:bodyPr>
+          <a:lstStyle/>
+          <a:p>
+            <a:r>
+              <a:rPr sz="1650" b="0">
                 <a:solidFill>
                   <a:srgbClr val="1E2024"/>
                 </a:solidFill>
                 <a:latin typeface="Calibri"/>
               </a:rPr>
-              <a:t>兩 broker ApiVersions 協商取交集</a:t>
-            </a:r>
-          </a:p>
-        </p:txBody>
-      </p:sp>
-      <p:sp>
-        <p:nvSpPr>
-          <p:cNvPr id="5" name="TextBox 4"/>
-          <p:cNvSpPr txBox="1"/>
-          <p:nvPr/>
-        </p:nvSpPr>
-        <p:spPr>
-          <a:xfrm>
-            <a:off x="822960" y="2953512"/>
-            <a:ext cx="10515600" cy="493776"/>
-          </a:xfrm>
-          <a:prstGeom prst="rect">
-            <a:avLst/>
-          </a:prstGeom>
-          <a:noFill/>
-        </p:spPr>
-        <p:txBody>
-          <a:bodyPr wrap="square">
-            <a:noAutofit/>
-          </a:bodyPr>
-          <a:lstStyle/>
-          <a:p>
-            <a:r>
-              <a:rPr sz="1600" b="0">
-                <a:solidFill>
-                  <a:srgbClr val="1E2024"/>
-                </a:solidFill>
-                <a:latin typeface="Calibri"/>
-              </a:rPr>
-              <a:t>B.  </a:t>
-            </a:r>
-            <a:r>
-              <a:rPr sz="1600" b="0">
-                <a:solidFill>
-                  <a:srgbClr val="1E2024"/>
-                </a:solidFill>
-                <a:latin typeface="Calibri"/>
-              </a:rPr>
-              <a:t>由 finalized metadata.version 決定</a:t>
-            </a:r>
-          </a:p>
-        </p:txBody>
-      </p:sp>
-      <p:sp>
-        <p:nvSpPr>
-          <p:cNvPr id="6" name="TextBox 5"/>
-          <p:cNvSpPr txBox="1"/>
-          <p:nvPr/>
-        </p:nvSpPr>
-        <p:spPr>
-          <a:xfrm>
-            <a:off x="822960" y="3575304"/>
-            <a:ext cx="10515600" cy="493776"/>
-          </a:xfrm>
-          <a:prstGeom prst="rect">
-            <a:avLst/>
-          </a:prstGeom>
-          <a:noFill/>
-        </p:spPr>
-        <p:txBody>
-          <a:bodyPr wrap="square">
-            <a:noAutofit/>
-          </a:bodyPr>
-          <a:lstStyle/>
-          <a:p>
-            <a:r>
-              <a:rPr sz="1600" b="0">
-                <a:solidFill>
-                  <a:srgbClr val="1E2024"/>
-                </a:solidFill>
-                <a:latin typeface="Calibri"/>
-              </a:rPr>
-              <a:t>C.  </a:t>
-            </a:r>
-            <a:r>
-              <a:rPr sz="1600" b="0">
-                <a:solidFill>
-                  <a:srgbClr val="1E2024"/>
-                </a:solidFill>
-                <a:latin typeface="Calibri"/>
-              </a:rPr>
-              <a:t>永遠用最新版</a:t>
-            </a:r>
-          </a:p>
-        </p:txBody>
-      </p:sp>
-      <p:sp>
-        <p:nvSpPr>
-          <p:cNvPr id="7" name="TextBox 6"/>
-          <p:cNvSpPr txBox="1"/>
-          <p:nvPr/>
-        </p:nvSpPr>
-        <p:spPr>
-          <a:xfrm>
-            <a:off x="822960" y="4197096"/>
-            <a:ext cx="10515600" cy="493776"/>
-          </a:xfrm>
-          <a:prstGeom prst="rect">
-            <a:avLst/>
-          </a:prstGeom>
-          <a:noFill/>
-        </p:spPr>
-        <p:txBody>
-          <a:bodyPr wrap="square">
-            <a:noAutofit/>
-          </a:bodyPr>
-          <a:lstStyle/>
-          <a:p>
-            <a:r>
-              <a:rPr sz="1600" b="0">
-                <a:solidFill>
-                  <a:srgbClr val="1E2024"/>
-                </a:solidFill>
-                <a:latin typeface="Calibri"/>
-              </a:rPr>
-              <a:t>D.  </a:t>
-            </a:r>
-            <a:r>
-              <a:rPr sz="1600" b="0">
-                <a:solidFill>
-                  <a:srgbClr val="1E2024"/>
-                </a:solidFill>
-                <a:latin typeface="Calibri"/>
-              </a:rPr>
-              <a:t>controller 每次指定</a:t>
-            </a:r>
-          </a:p>
-        </p:txBody>
-      </p:sp>
-      <p:sp>
-        <p:nvSpPr>
-          <p:cNvPr id="8" name="TextBox 7"/>
-          <p:cNvSpPr txBox="1"/>
-          <p:nvPr/>
-        </p:nvSpPr>
-        <p:spPr>
-          <a:xfrm>
-            <a:off x="640080" y="4910327"/>
-            <a:ext cx="10972800" cy="914400"/>
-          </a:xfrm>
-          <a:prstGeom prst="rect">
-            <a:avLst/>
-          </a:prstGeom>
-          <a:noFill/>
-        </p:spPr>
-        <p:txBody>
-          <a:bodyPr wrap="square">
-            <a:noAutofit/>
-          </a:bodyPr>
-          <a:lstStyle/>
-          <a:p>
-            <a:r>
-              <a:rPr sz="1400" b="0">
+              <a:t>想跳過某個歷史版本？得進 toSkip 白名單特案處理——目前只 4 支 RPC 拿得到豁免</a:t>
+            </a:r>
+          </a:p>
+        </p:txBody>
+      </p:sp>
+      <p:sp>
+        <p:nvSpPr>
+          <p:cNvPr id="9" name="TextBox 8"/>
+          <p:cNvSpPr txBox="1"/>
+          <p:nvPr/>
+        </p:nvSpPr>
+        <p:spPr>
+          <a:xfrm>
+            <a:off x="640080" y="5422392"/>
+            <a:ext cx="10972800" cy="877824"/>
+          </a:xfrm>
+          <a:prstGeom prst="rect">
+            <a:avLst/>
+          </a:prstGeom>
+          <a:solidFill>
+            <a:srgbClr val="E9F3DE"/>
+          </a:solidFill>
+          <a:ln>
+            <a:noFill/>
+          </a:ln>
+        </p:spPr>
+        <p:txBody>
+          <a:bodyPr wrap="square" lIns="146304" tIns="82296">
+            <a:noAutofit/>
+          </a:bodyPr>
+          <a:lstStyle/>
+          <a:p>
+            <a:r>
+              <a:rPr sz="1500" b="0">
+                <a:solidFill>
+                  <a:srgbClr val="27500A"/>
+                </a:solidFill>
+                <a:latin typeface="Calibri"/>
+              </a:rPr>
+              <a:t>KIP-896 直言維護舊版本「both in code complexity and the testing matrix」——測試面正是其一</a:t>
+            </a:r>
+          </a:p>
+        </p:txBody>
+      </p:sp>
+      <p:sp>
+        <p:nvSpPr>
+          <p:cNvPr id="10" name="TextBox 9"/>
+          <p:cNvSpPr txBox="1"/>
+          <p:nvPr/>
+        </p:nvSpPr>
+        <p:spPr>
+          <a:xfrm>
+            <a:off x="640080" y="6400800"/>
+            <a:ext cx="10972800" cy="384048"/>
+          </a:xfrm>
+          <a:prstGeom prst="rect">
+            <a:avLst/>
+          </a:prstGeom>
+          <a:noFill/>
+        </p:spPr>
+        <p:txBody>
+          <a:bodyPr wrap="square">
+            <a:noAutofit/>
+          </a:bodyPr>
+          <a:lstStyle/>
+          <a:p>
+            <a:r>
+              <a:rPr sz="1200" b="1">
                 <a:solidFill>
                   <a:srgbClr val="8A8A8A"/>
                 </a:solidFill>
                 <a:latin typeface="Calibri"/>
               </a:rPr>
-              <a:t>想一想 —— 下一頁公布答案</a:t>
+              <a:t>REF   </a:t>
+            </a:r>
+            <a:r>
+              <a:rPr sz="1200" b="0" u="sng">
+                <a:solidFill>
+                  <a:srgbClr val="185FA5"/>
+                </a:solidFill>
+                <a:latin typeface="Courier New"/>
+                <a:hlinkClick r:id="rId4"/>
+              </a:rPr>
+              <a:t>testSerialization</a:t>
+            </a:r>
+            <a:r>
+              <a:rPr sz="1200" b="0">
+                <a:solidFill>
+                  <a:srgbClr val="8A8A8A"/>
+                </a:solidFill>
+                <a:latin typeface="Calibri"/>
+              </a:rPr>
+              <a:t>   ·   </a:t>
+            </a:r>
+            <a:r>
+              <a:rPr sz="1200" b="0" u="sng">
+                <a:solidFill>
+                  <a:srgbClr val="185FA5"/>
+                </a:solidFill>
+                <a:latin typeface="Courier New"/>
+                <a:hlinkClick r:id="rId5"/>
+              </a:rPr>
+              <a:t>round-trip</a:t>
+            </a:r>
+            <a:r>
+              <a:rPr sz="1200" b="0">
+                <a:solidFill>
+                  <a:srgbClr val="8A8A8A"/>
+                </a:solidFill>
+                <a:latin typeface="Calibri"/>
+              </a:rPr>
+              <a:t>   ·   </a:t>
+            </a:r>
+            <a:r>
+              <a:rPr sz="1200" b="0" u="sng">
+                <a:solidFill>
+                  <a:srgbClr val="185FA5"/>
+                </a:solidFill>
+                <a:latin typeface="Calibri"/>
+                <a:hlinkClick r:id="rId6"/>
+              </a:rPr>
+              <a:t>KIP-896</a:t>
             </a:r>
           </a:p>
         </p:txBody>
@@ -3621,7 +3706,7 @@
                 </a:solidFill>
                 <a:latin typeface="Calibri"/>
               </a:rPr>
-              <a:t>隨堂考 · 核心　（正解）</a:t>
+              <a:t>Part 1 · 代價 · 測試</a:t>
             </a:r>
           </a:p>
         </p:txBody>
@@ -3635,27 +3720,27 @@
         <p:spPr>
           <a:xfrm>
             <a:off x="640080" y="841248"/>
-            <a:ext cx="10972800" cy="1188720"/>
-          </a:xfrm>
-          <a:prstGeom prst="rect">
-            <a:avLst/>
-          </a:prstGeom>
-          <a:noFill/>
-        </p:spPr>
-        <p:txBody>
-          <a:bodyPr wrap="square">
-            <a:noAutofit/>
-          </a:bodyPr>
-          <a:lstStyle/>
-          <a:p>
-            <a:r>
-              <a:rPr sz="2600" b="1">
+            <a:ext cx="10972800" cy="1005840"/>
+          </a:xfrm>
+          <a:prstGeom prst="rect">
+            <a:avLst/>
+          </a:prstGeom>
+          <a:noFill/>
+        </p:spPr>
+        <p:txBody>
+          <a:bodyPr wrap="square">
+            <a:noAutofit/>
+          </a:bodyPr>
+          <a:lstStyle/>
+          <a:p>
+            <a:r>
+              <a:rPr sz="3200" b="1">
                 <a:solidFill>
                   <a:srgbClr val="1E2024"/>
                 </a:solidFill>
                 <a:latin typeface="Calibri"/>
               </a:rPr>
-              <a:t>replica fetch（broker↔broker）的 Fetch 版本怎麼決定？</a:t>
+              <a:t>相容性測試（二）：把過去七年的 Kafka 一起養著</a:t>
             </a:r>
           </a:p>
         </p:txBody>
@@ -3668,51 +3753,118 @@
         </p:nvSpPr>
         <p:spPr>
           <a:xfrm>
-            <a:off x="822960" y="2331720"/>
-            <a:ext cx="10515600" cy="493776"/>
-          </a:xfrm>
-          <a:prstGeom prst="rect">
-            <a:avLst/>
-          </a:prstGeom>
-          <a:noFill/>
-        </p:spPr>
-        <p:txBody>
-          <a:bodyPr wrap="square">
-            <a:noAutofit/>
-          </a:bodyPr>
-          <a:lstStyle/>
-          <a:p>
-            <a:r>
-              <a:rPr sz="1600" b="0">
+            <a:off x="640080" y="2148840"/>
+            <a:ext cx="10972800" cy="822959"/>
+          </a:xfrm>
+          <a:prstGeom prst="rect">
+            <a:avLst/>
+          </a:prstGeom>
+          <a:solidFill>
+            <a:srgbClr val="F3F1EC"/>
+          </a:solidFill>
+          <a:ln w="6350">
+            <a:solidFill>
+              <a:srgbClr val="E3E0D8"/>
+            </a:solidFill>
+          </a:ln>
+        </p:spPr>
+        <p:txBody>
+          <a:bodyPr wrap="square" lIns="146304" tIns="91440" bIns="91440">
+            <a:noAutofit/>
+          </a:bodyPr>
+          <a:lstStyle/>
+          <a:p>
+            <a:r>
+              <a:rPr sz="1350" b="0">
+                <a:solidFill>
+                  <a:srgbClr val="2C2C2A"/>
+                </a:solidFill>
+                <a:latin typeface="Calibri"/>
+              </a:rPr>
+              <a:t>系統測試映像 curl 下載 22 個歷史版本二進位（2.1.1 → 4.3.0）</a:t>
+            </a:r>
+          </a:p>
+          <a:p>
+            <a:r>
+              <a:rPr sz="1350" b="0">
+                <a:solidFill>
+                  <a:srgbClr val="2C2C2A"/>
+                </a:solidFill>
+                <a:latin typeface="Calibri"/>
+              </a:rPr>
+              <a:t>client 相容測試：每個歷史 broker 各跑一遍（22 + dev = 23 param × 2 支測試）</a:t>
+            </a:r>
+          </a:p>
+        </p:txBody>
+      </p:sp>
+      <p:pic>
+        <p:nvPicPr>
+          <p:cNvPr id="5" name="Picture 4" descr="arrows-split.png"/>
+          <p:cNvPicPr>
+            <a:picLocks noChangeAspect="1"/>
+          </p:cNvPicPr>
+          <p:nvPr/>
+        </p:nvPicPr>
+        <p:blipFill>
+          <a:blip r:embed="rId2"/>
+          <a:stretch>
+            <a:fillRect/>
+          </a:stretch>
+        </p:blipFill>
+        <p:spPr>
+          <a:xfrm>
+            <a:off x="658368" y="3200399"/>
+            <a:ext cx="274320" cy="274320"/>
+          </a:xfrm>
+          <a:prstGeom prst="rect">
+            <a:avLst/>
+          </a:prstGeom>
+        </p:spPr>
+      </p:pic>
+      <p:sp>
+        <p:nvSpPr>
+          <p:cNvPr id="6" name="TextBox 5"/>
+          <p:cNvSpPr txBox="1"/>
+          <p:nvPr/>
+        </p:nvSpPr>
+        <p:spPr>
+          <a:xfrm>
+            <a:off x="1078992" y="3172968"/>
+            <a:ext cx="10515600" cy="1188720"/>
+          </a:xfrm>
+          <a:prstGeom prst="rect">
+            <a:avLst/>
+          </a:prstGeom>
+          <a:noFill/>
+        </p:spPr>
+        <p:txBody>
+          <a:bodyPr wrap="square">
+            <a:noAutofit/>
+          </a:bodyPr>
+          <a:lstStyle/>
+          <a:p>
+            <a:r>
+              <a:rPr sz="1650" b="0">
                 <a:solidFill>
                   <a:srgbClr val="1E2024"/>
                 </a:solidFill>
                 <a:latin typeface="Calibri"/>
               </a:rPr>
-              <a:t>A.  </a:t>
-            </a:r>
-            <a:r>
-              <a:rPr sz="1600" b="0">
-                <a:solidFill>
-                  <a:srgbClr val="1E2024"/>
-                </a:solidFill>
-                <a:latin typeface="Calibri"/>
-              </a:rPr>
-              <a:t>兩 broker ApiVersions 協商取交集</a:t>
-            </a:r>
-          </a:p>
-        </p:txBody>
-      </p:sp>
-      <p:sp>
-        <p:nvSpPr>
-          <p:cNvPr id="5" name="TextBox 4"/>
-          <p:cNvSpPr txBox="1"/>
-          <p:nvPr/>
-        </p:nvSpPr>
-        <p:spPr>
-          <a:xfrm>
-            <a:off x="822960" y="2953512"/>
-            <a:ext cx="10515600" cy="493776"/>
+              <a:t>升級/降級是 from×to 矩陣：4 個 @matrix × 11 個 from_version；混版交易再 22 組；MetadataVersion 另有 25 個現役 MV × 7 個 enum 測試</a:t>
+            </a:r>
+          </a:p>
+        </p:txBody>
+      </p:sp>
+      <p:sp>
+        <p:nvSpPr>
+          <p:cNvPr id="7" name="TextBox 6"/>
+          <p:cNvSpPr txBox="1"/>
+          <p:nvPr/>
+        </p:nvSpPr>
+        <p:spPr>
+          <a:xfrm>
+            <a:off x="640080" y="4507992"/>
+            <a:ext cx="10972800" cy="877824"/>
           </a:xfrm>
           <a:prstGeom prst="rect">
             <a:avLst/>
@@ -3725,114 +3877,19 @@
           </a:ln>
         </p:spPr>
         <p:txBody>
-          <a:bodyPr wrap="square" lIns="128016" tIns="54864">
-            <a:noAutofit/>
-          </a:bodyPr>
-          <a:lstStyle/>
-          <a:p>
-            <a:r>
-              <a:rPr sz="1600" b="1">
+          <a:bodyPr wrap="square" lIns="146304" tIns="82296">
+            <a:noAutofit/>
+          </a:bodyPr>
+          <a:lstStyle/>
+          <a:p>
+            <a:r>
+              <a:rPr sz="1500" b="0">
                 <a:solidFill>
                   <a:srgbClr val="27500A"/>
                 </a:solidFill>
                 <a:latin typeface="Calibri"/>
               </a:rPr>
-              <a:t>B.  </a:t>
-            </a:r>
-            <a:r>
-              <a:rPr sz="1600" b="1">
-                <a:solidFill>
-                  <a:srgbClr val="27500A"/>
-                </a:solidFill>
-                <a:latin typeface="Calibri"/>
-              </a:rPr>
-              <a:t>由 finalized metadata.version 決定   ✓</a:t>
-            </a:r>
-          </a:p>
-        </p:txBody>
-      </p:sp>
-      <p:sp>
-        <p:nvSpPr>
-          <p:cNvPr id="6" name="TextBox 5"/>
-          <p:cNvSpPr txBox="1"/>
-          <p:nvPr/>
-        </p:nvSpPr>
-        <p:spPr>
-          <a:xfrm>
-            <a:off x="822960" y="3575304"/>
-            <a:ext cx="10515600" cy="493776"/>
-          </a:xfrm>
-          <a:prstGeom prst="rect">
-            <a:avLst/>
-          </a:prstGeom>
-          <a:noFill/>
-        </p:spPr>
-        <p:txBody>
-          <a:bodyPr wrap="square">
-            <a:noAutofit/>
-          </a:bodyPr>
-          <a:lstStyle/>
-          <a:p>
-            <a:r>
-              <a:rPr sz="1600" b="0">
-                <a:solidFill>
-                  <a:srgbClr val="1E2024"/>
-                </a:solidFill>
-                <a:latin typeface="Calibri"/>
-              </a:rPr>
-              <a:t>C.  </a:t>
-            </a:r>
-            <a:r>
-              <a:rPr sz="1600" b="0">
-                <a:solidFill>
-                  <a:srgbClr val="1E2024"/>
-                </a:solidFill>
-                <a:latin typeface="Calibri"/>
-              </a:rPr>
-              <a:t>永遠用最新版</a:t>
-            </a:r>
-          </a:p>
-        </p:txBody>
-      </p:sp>
-      <p:sp>
-        <p:nvSpPr>
-          <p:cNvPr id="7" name="TextBox 6"/>
-          <p:cNvSpPr txBox="1"/>
-          <p:nvPr/>
-        </p:nvSpPr>
-        <p:spPr>
-          <a:xfrm>
-            <a:off x="822960" y="4197096"/>
-            <a:ext cx="10515600" cy="493776"/>
-          </a:xfrm>
-          <a:prstGeom prst="rect">
-            <a:avLst/>
-          </a:prstGeom>
-          <a:noFill/>
-        </p:spPr>
-        <p:txBody>
-          <a:bodyPr wrap="square">
-            <a:noAutofit/>
-          </a:bodyPr>
-          <a:lstStyle/>
-          <a:p>
-            <a:r>
-              <a:rPr sz="1600" b="0">
-                <a:solidFill>
-                  <a:srgbClr val="1E2024"/>
-                </a:solidFill>
-                <a:latin typeface="Calibri"/>
-              </a:rPr>
-              <a:t>D.  </a:t>
-            </a:r>
-            <a:r>
-              <a:rPr sz="1600" b="0">
-                <a:solidFill>
-                  <a:srgbClr val="1E2024"/>
-                </a:solidFill>
-                <a:latin typeface="Calibri"/>
-              </a:rPr>
-              <a:t>controller 每次指定</a:t>
+              <a:t>取捨：相容承諾＝「一次寫、永遠不能少測」——每發一個 release，version.py＋Dockerfile＋各測試 @parametrize 都得手動 +1</a:t>
             </a:r>
           </a:p>
         </p:txBody>
@@ -3840,49 +3897,6 @@
       <p:sp>
         <p:nvSpPr>
           <p:cNvPr id="8" name="TextBox 7"/>
-          <p:cNvSpPr txBox="1"/>
-          <p:nvPr/>
-        </p:nvSpPr>
-        <p:spPr>
-          <a:xfrm>
-            <a:off x="640080" y="4910327"/>
-            <a:ext cx="10972800" cy="914400"/>
-          </a:xfrm>
-          <a:prstGeom prst="rect">
-            <a:avLst/>
-          </a:prstGeom>
-          <a:noFill/>
-        </p:spPr>
-        <p:txBody>
-          <a:bodyPr wrap="square">
-            <a:noAutofit/>
-          </a:bodyPr>
-          <a:lstStyle/>
-          <a:p>
-            <a:r>
-              <a:rPr sz="1400" b="1">
-                <a:solidFill>
-                  <a:srgbClr val="27500A"/>
-                </a:solidFill>
-                <a:latin typeface="Calibri"/>
-              </a:rPr>
-              <a:t>正解 B — </a:t>
-            </a:r>
-            <a:r>
-              <a:rPr sz="1400" b="0">
-                <a:solidFill>
-                  <a:srgbClr val="1E2024"/>
-                </a:solidFill>
-                <a:latin typeface="Calibri"/>
-              </a:rPr>
-              <a:t>fetchRequestVersion(MV)：MV 是集中共識，不做 per-connection 協商。</a:t>
-            </a:r>
-          </a:p>
-        </p:txBody>
-      </p:sp>
-      <p:sp>
-        <p:nvSpPr>
-          <p:cNvPr id="9" name="TextBox 8"/>
           <p:cNvSpPr txBox="1"/>
           <p:nvPr/>
         </p:nvSpPr>
@@ -3917,9 +3931,9 @@
                   <a:srgbClr val="185FA5"/>
                 </a:solidFill>
                 <a:latin typeface="Courier New"/>
-                <a:hlinkClick r:id="rId2"/>
-              </a:rPr>
-              <a:t>RemoteLeaderEndPoint.scala:215</a:t>
+                <a:hlinkClick r:id="rId3"/>
+              </a:rPr>
+              <a:t>下載 22 版</a:t>
             </a:r>
             <a:r>
               <a:rPr sz="1200" b="0">
@@ -3936,9 +3950,47 @@
                   <a:srgbClr val="185FA5"/>
                 </a:solidFill>
                 <a:latin typeface="Courier New"/>
-                <a:hlinkClick r:id="rId3"/>
-              </a:rPr>
-              <a:t>MetadataVersion.java:273</a:t>
+                <a:hlinkClick r:id="rId4"/>
+              </a:rPr>
+              <a:t>client 相容 ×23</a:t>
+            </a:r>
+            <a:r>
+              <a:rPr sz="1200" b="0">
+                <a:solidFill>
+                  <a:srgbClr val="8A8A8A"/>
+                </a:solidFill>
+                <a:latin typeface="Calibri"/>
+              </a:rPr>
+              <a:t>   ·   </a:t>
+            </a:r>
+            <a:r>
+              <a:rPr sz="1200" b="0" u="sng">
+                <a:solidFill>
+                  <a:srgbClr val="185FA5"/>
+                </a:solidFill>
+                <a:latin typeface="Courier New"/>
+                <a:hlinkClick r:id="rId5"/>
+              </a:rPr>
+              <a:t>升級矩陣</a:t>
+            </a:r>
+            <a:r>
+              <a:rPr sz="1200" b="0">
+                <a:solidFill>
+                  <a:srgbClr val="8A8A8A"/>
+                </a:solidFill>
+                <a:latin typeface="Calibri"/>
+              </a:rPr>
+              <a:t>   ·   </a:t>
+            </a:r>
+            <a:r>
+              <a:rPr sz="1200" b="0" u="sng">
+                <a:solidFill>
+                  <a:srgbClr val="185FA5"/>
+                </a:solidFill>
+                <a:latin typeface="Courier New"/>
+                <a:hlinkClick r:id="rId6"/>
+              </a:rPr>
+              <a:t>25 MV</a:t>
             </a:r>
           </a:p>
         </p:txBody>
@@ -3990,7 +4042,7 @@
                 </a:solidFill>
                 <a:latin typeface="Calibri"/>
               </a:rPr>
-              <a:t>Part 2 · 失敗訊息</a:t>
+              <a:t>隨堂考 · 核心</a:t>
             </a:r>
           </a:p>
         </p:txBody>
@@ -4004,27 +4056,27 @@
         <p:spPr>
           <a:xfrm>
             <a:off x="640080" y="841248"/>
-            <a:ext cx="10972800" cy="1005840"/>
-          </a:xfrm>
-          <a:prstGeom prst="rect">
-            <a:avLst/>
-          </a:prstGeom>
-          <a:noFill/>
-        </p:spPr>
-        <p:txBody>
-          <a:bodyPr wrap="square">
-            <a:noAutofit/>
-          </a:bodyPr>
-          <a:lstStyle/>
-          <a:p>
-            <a:r>
-              <a:rPr sz="3200" b="1">
+            <a:ext cx="10972800" cy="1188720"/>
+          </a:xfrm>
+          <a:prstGeom prst="rect">
+            <a:avLst/>
+          </a:prstGeom>
+          <a:noFill/>
+        </p:spPr>
+        <p:txBody>
+          <a:bodyPr wrap="square">
+            <a:noAutofit/>
+          </a:bodyPr>
+          <a:lstStyle/>
+          <a:p>
+            <a:r>
+              <a:rPr sz="2600" b="1">
                 <a:solidFill>
                   <a:srgbClr val="1E2024"/>
                 </a:solidFill>
                 <a:latin typeface="Calibri"/>
               </a:rPr>
-              <a:t>通訊當下協商不出版本，會看到什麼</a:t>
+              <a:t>replica fetch（broker↔broker）的 Fetch 版本怎麼決定？</a:t>
             </a:r>
           </a:p>
         </p:txBody>
@@ -4037,85 +4089,84 @@
         </p:nvSpPr>
         <p:spPr>
           <a:xfrm>
-            <a:off x="640080" y="2148840"/>
-            <a:ext cx="10972800" cy="1645920"/>
-          </a:xfrm>
-          <a:prstGeom prst="rect">
-            <a:avLst/>
-          </a:prstGeom>
-          <a:solidFill>
-            <a:srgbClr val="F3F1EC"/>
-          </a:solidFill>
-          <a:ln w="6350">
-            <a:solidFill>
-              <a:srgbClr val="E3E0D8"/>
-            </a:solidFill>
-          </a:ln>
-        </p:spPr>
-        <p:txBody>
-          <a:bodyPr wrap="square" lIns="146304" tIns="91440" bIns="91440">
-            <a:noAutofit/>
-          </a:bodyPr>
-          <a:lstStyle/>
-          <a:p>
-            <a:r>
-              <a:rPr sz="1350" b="0">
-                <a:solidFill>
-                  <a:srgbClr val="2C2C2A"/>
-                </a:solidFill>
-                <a:latin typeface="Calibri"/>
-              </a:rPr>
-              <a:t>交集空                       → client 端 UnsupportedVersionException（送出前 abort）</a:t>
-            </a:r>
-          </a:p>
-          <a:p>
-            <a:r>
-              <a:rPr sz="1350" b="0">
-                <a:solidFill>
-                  <a:srgbClr val="2C2C2A"/>
-                </a:solidFill>
-                <a:latin typeface="Calibri"/>
-              </a:rPr>
-              <a:t>client 繞過協商、硬送不支援版本 → broker 丟 UnsupportedVersionException、關閉連線</a:t>
-            </a:r>
-          </a:p>
-          <a:p>
-            <a:r>
-              <a:rPr sz="1350" b="0">
-                <a:solidFill>
-                  <a:srgbClr val="2C2C2A"/>
-                </a:solidFill>
-                <a:latin typeface="Calibri"/>
-              </a:rPr>
-              <a:t>（ApiVersions 例外：回 v0 + UNSUPPORTED_VERSION 錯誤碼）</a:t>
-            </a:r>
-          </a:p>
-        </p:txBody>
-      </p:sp>
-      <p:pic>
-        <p:nvPicPr>
-          <p:cNvPr id="5" name="Picture 4" descr="ban.png"/>
-          <p:cNvPicPr>
-            <a:picLocks noChangeAspect="1"/>
-          </p:cNvPicPr>
-          <p:nvPr/>
-        </p:nvPicPr>
-        <p:blipFill>
-          <a:blip r:embed="rId2"/>
-          <a:stretch>
-            <a:fillRect/>
-          </a:stretch>
-        </p:blipFill>
-        <p:spPr>
-          <a:xfrm>
-            <a:off x="658368" y="4023360"/>
-            <a:ext cx="274320" cy="274320"/>
-          </a:xfrm>
-          <a:prstGeom prst="rect">
-            <a:avLst/>
-          </a:prstGeom>
-        </p:spPr>
-      </p:pic>
+            <a:off x="822960" y="2331720"/>
+            <a:ext cx="10515600" cy="493776"/>
+          </a:xfrm>
+          <a:prstGeom prst="rect">
+            <a:avLst/>
+          </a:prstGeom>
+          <a:noFill/>
+        </p:spPr>
+        <p:txBody>
+          <a:bodyPr wrap="square">
+            <a:noAutofit/>
+          </a:bodyPr>
+          <a:lstStyle/>
+          <a:p>
+            <a:r>
+              <a:rPr sz="1600" b="0">
+                <a:solidFill>
+                  <a:srgbClr val="1E2024"/>
+                </a:solidFill>
+                <a:latin typeface="Calibri"/>
+              </a:rPr>
+              <a:t>A.  </a:t>
+            </a:r>
+            <a:r>
+              <a:rPr sz="1600" b="0">
+                <a:solidFill>
+                  <a:srgbClr val="1E2024"/>
+                </a:solidFill>
+                <a:latin typeface="Calibri"/>
+              </a:rPr>
+              <a:t>兩 broker ApiVersions 協商取交集</a:t>
+            </a:r>
+          </a:p>
+        </p:txBody>
+      </p:sp>
+      <p:sp>
+        <p:nvSpPr>
+          <p:cNvPr id="5" name="TextBox 4"/>
+          <p:cNvSpPr txBox="1"/>
+          <p:nvPr/>
+        </p:nvSpPr>
+        <p:spPr>
+          <a:xfrm>
+            <a:off x="822960" y="2953512"/>
+            <a:ext cx="10515600" cy="493776"/>
+          </a:xfrm>
+          <a:prstGeom prst="rect">
+            <a:avLst/>
+          </a:prstGeom>
+          <a:noFill/>
+        </p:spPr>
+        <p:txBody>
+          <a:bodyPr wrap="square">
+            <a:noAutofit/>
+          </a:bodyPr>
+          <a:lstStyle/>
+          <a:p>
+            <a:r>
+              <a:rPr sz="1600" b="0">
+                <a:solidFill>
+                  <a:srgbClr val="1E2024"/>
+                </a:solidFill>
+                <a:latin typeface="Calibri"/>
+              </a:rPr>
+              <a:t>B.  </a:t>
+            </a:r>
+            <a:r>
+              <a:rPr sz="1600" b="0">
+                <a:solidFill>
+                  <a:srgbClr val="1E2024"/>
+                </a:solidFill>
+                <a:latin typeface="Calibri"/>
+              </a:rPr>
+              <a:t>由 finalized metadata.version 決定</a:t>
+            </a:r>
+          </a:p>
+        </p:txBody>
+      </p:sp>
       <p:sp>
         <p:nvSpPr>
           <p:cNvPr id="6" name="TextBox 5"/>
@@ -4124,7 +4175,7 @@
         </p:nvSpPr>
         <p:spPr>
           <a:xfrm>
-            <a:off x="1078992" y="3995928"/>
+            <a:off x="822960" y="3575304"/>
             <a:ext cx="10515600" cy="493776"/>
           </a:xfrm>
           <a:prstGeom prst="rect">
@@ -4139,13 +4190,22 @@
           <a:lstStyle/>
           <a:p>
             <a:r>
-              <a:rPr sz="1650" b="0">
+              <a:rPr sz="1600" b="0">
                 <a:solidFill>
                   <a:srgbClr val="1E2024"/>
                 </a:solidFill>
                 <a:latin typeface="Calibri"/>
               </a:rPr>
-              <a:t>多數情況 client 在送出前就本地中止，根本沒上網路</a:t>
+              <a:t>C.  </a:t>
+            </a:r>
+            <a:r>
+              <a:rPr sz="1600" b="0">
+                <a:solidFill>
+                  <a:srgbClr val="1E2024"/>
+                </a:solidFill>
+                <a:latin typeface="Calibri"/>
+              </a:rPr>
+              <a:t>永遠用最新版</a:t>
             </a:r>
           </a:p>
         </p:txBody>
@@ -4158,28 +4218,37 @@
         </p:nvSpPr>
         <p:spPr>
           <a:xfrm>
-            <a:off x="640080" y="4636008"/>
-            <a:ext cx="10972800" cy="731520"/>
-          </a:xfrm>
-          <a:prstGeom prst="rect">
-            <a:avLst/>
-          </a:prstGeom>
-          <a:noFill/>
-        </p:spPr>
-        <p:txBody>
-          <a:bodyPr wrap="square">
-            <a:noAutofit/>
-          </a:bodyPr>
-          <a:lstStyle/>
-          <a:p>
-            <a:r>
-              <a:rPr sz="1500" b="0">
-                <a:solidFill>
-                  <a:srgbClr val="5F5E5A"/>
-                </a:solidFill>
-                <a:latin typeface="Calibri"/>
-              </a:rPr>
-              <a:t>「硬送」指 client↔broker：自刻或有 bug 的 client 繞過協商；broker↔broker 版本已由 MV 事先釘住，不會送出對方不懂的版本。</a:t>
+            <a:off x="822960" y="4197096"/>
+            <a:ext cx="10515600" cy="493776"/>
+          </a:xfrm>
+          <a:prstGeom prst="rect">
+            <a:avLst/>
+          </a:prstGeom>
+          <a:noFill/>
+        </p:spPr>
+        <p:txBody>
+          <a:bodyPr wrap="square">
+            <a:noAutofit/>
+          </a:bodyPr>
+          <a:lstStyle/>
+          <a:p>
+            <a:r>
+              <a:rPr sz="1600" b="0">
+                <a:solidFill>
+                  <a:srgbClr val="1E2024"/>
+                </a:solidFill>
+                <a:latin typeface="Calibri"/>
+              </a:rPr>
+              <a:t>D.  </a:t>
+            </a:r>
+            <a:r>
+              <a:rPr sz="1600" b="0">
+                <a:solidFill>
+                  <a:srgbClr val="1E2024"/>
+                </a:solidFill>
+                <a:latin typeface="Calibri"/>
+              </a:rPr>
+              <a:t>controller 每次指定</a:t>
             </a:r>
           </a:p>
         </p:txBody>
@@ -4192,76 +4261,28 @@
         </p:nvSpPr>
         <p:spPr>
           <a:xfrm>
-            <a:off x="640080" y="6400800"/>
-            <a:ext cx="10972800" cy="384048"/>
-          </a:xfrm>
-          <a:prstGeom prst="rect">
-            <a:avLst/>
-          </a:prstGeom>
-          <a:noFill/>
-        </p:spPr>
-        <p:txBody>
-          <a:bodyPr wrap="square">
-            <a:noAutofit/>
-          </a:bodyPr>
-          <a:lstStyle/>
-          <a:p>
-            <a:r>
-              <a:rPr sz="1200" b="1">
+            <a:off x="640080" y="4910327"/>
+            <a:ext cx="10972800" cy="914400"/>
+          </a:xfrm>
+          <a:prstGeom prst="rect">
+            <a:avLst/>
+          </a:prstGeom>
+          <a:noFill/>
+        </p:spPr>
+        <p:txBody>
+          <a:bodyPr wrap="square">
+            <a:noAutofit/>
+          </a:bodyPr>
+          <a:lstStyle/>
+          <a:p>
+            <a:r>
+              <a:rPr sz="1400" b="0">
                 <a:solidFill>
                   <a:srgbClr val="8A8A8A"/>
                 </a:solidFill>
                 <a:latin typeface="Calibri"/>
               </a:rPr>
-              <a:t>REF   </a:t>
-            </a:r>
-            <a:r>
-              <a:rPr sz="1200" b="0" u="sng">
-                <a:solidFill>
-                  <a:srgbClr val="185FA5"/>
-                </a:solidFill>
-                <a:latin typeface="Courier New"/>
-                <a:hlinkClick r:id="rId3"/>
-              </a:rPr>
-              <a:t>latestUsableVersion</a:t>
-            </a:r>
-            <a:r>
-              <a:rPr sz="1200" b="0">
-                <a:solidFill>
-                  <a:srgbClr val="8A8A8A"/>
-                </a:solidFill>
-                <a:latin typeface="Calibri"/>
-              </a:rPr>
-              <a:t>   ·   </a:t>
-            </a:r>
-            <a:r>
-              <a:rPr sz="1200" b="0" u="sng">
-                <a:solidFill>
-                  <a:srgbClr val="185FA5"/>
-                </a:solidFill>
-                <a:latin typeface="Courier New"/>
-                <a:hlinkClick r:id="rId4"/>
-              </a:rPr>
-              <a:t>NetworkClient</a:t>
-            </a:r>
-            <a:r>
-              <a:rPr sz="1200" b="0">
-                <a:solidFill>
-                  <a:srgbClr val="8A8A8A"/>
-                </a:solidFill>
-                <a:latin typeface="Calibri"/>
-              </a:rPr>
-              <a:t>   ·   </a:t>
-            </a:r>
-            <a:r>
-              <a:rPr sz="1200" b="0" u="sng">
-                <a:solidFill>
-                  <a:srgbClr val="185FA5"/>
-                </a:solidFill>
-                <a:latin typeface="Courier New"/>
-                <a:hlinkClick r:id="rId5"/>
-              </a:rPr>
-              <a:t>RequestContext</a:t>
+              <a:t>想一想 —— 下一頁公布答案</a:t>
             </a:r>
           </a:p>
         </p:txBody>
@@ -4313,7 +4334,7 @@
                 </a:solidFill>
                 <a:latin typeface="Calibri"/>
               </a:rPr>
-              <a:t>Part 2 · 失敗訊息</a:t>
+              <a:t>隨堂考 · 核心　（正解）</a:t>
             </a:r>
           </a:p>
         </p:txBody>
@@ -4327,55 +4348,74 @@
         <p:spPr>
           <a:xfrm>
             <a:off x="640080" y="841248"/>
-            <a:ext cx="10972800" cy="1005840"/>
-          </a:xfrm>
-          <a:prstGeom prst="rect">
-            <a:avLst/>
-          </a:prstGeom>
-          <a:noFill/>
-        </p:spPr>
-        <p:txBody>
-          <a:bodyPr wrap="square">
-            <a:noAutofit/>
-          </a:bodyPr>
-          <a:lstStyle/>
-          <a:p>
-            <a:r>
-              <a:rPr sz="3200" b="1">
+            <a:ext cx="10972800" cy="1188720"/>
+          </a:xfrm>
+          <a:prstGeom prst="rect">
+            <a:avLst/>
+          </a:prstGeom>
+          <a:noFill/>
+        </p:spPr>
+        <p:txBody>
+          <a:bodyPr wrap="square">
+            <a:noAutofit/>
+          </a:bodyPr>
+          <a:lstStyle/>
+          <a:p>
+            <a:r>
+              <a:rPr sz="2600" b="1">
                 <a:solidFill>
                   <a:srgbClr val="1E2024"/>
                 </a:solidFill>
                 <a:latin typeface="Calibri"/>
               </a:rPr>
-              <a:t>版本截斷：為什麼「升一點點」不夠</a:t>
-            </a:r>
-          </a:p>
-        </p:txBody>
-      </p:sp>
-      <p:pic>
-        <p:nvPicPr>
-          <p:cNvPr id="4" name="Picture 3" descr="alert-triangle.png"/>
-          <p:cNvPicPr>
-            <a:picLocks noChangeAspect="1"/>
-          </p:cNvPicPr>
-          <p:nvPr/>
-        </p:nvPicPr>
-        <p:blipFill>
-          <a:blip r:embed="rId2"/>
-          <a:stretch>
-            <a:fillRect/>
-          </a:stretch>
-        </p:blipFill>
-        <p:spPr>
-          <a:xfrm>
-            <a:off x="658368" y="2176272"/>
-            <a:ext cx="274320" cy="274320"/>
-          </a:xfrm>
-          <a:prstGeom prst="rect">
-            <a:avLst/>
-          </a:prstGeom>
-        </p:spPr>
-      </p:pic>
+              <a:t>replica fetch（broker↔broker）的 Fetch 版本怎麼決定？</a:t>
+            </a:r>
+          </a:p>
+        </p:txBody>
+      </p:sp>
+      <p:sp>
+        <p:nvSpPr>
+          <p:cNvPr id="4" name="TextBox 3"/>
+          <p:cNvSpPr txBox="1"/>
+          <p:nvPr/>
+        </p:nvSpPr>
+        <p:spPr>
+          <a:xfrm>
+            <a:off x="822960" y="2331720"/>
+            <a:ext cx="10515600" cy="493776"/>
+          </a:xfrm>
+          <a:prstGeom prst="rect">
+            <a:avLst/>
+          </a:prstGeom>
+          <a:noFill/>
+        </p:spPr>
+        <p:txBody>
+          <a:bodyPr wrap="square">
+            <a:noAutofit/>
+          </a:bodyPr>
+          <a:lstStyle/>
+          <a:p>
+            <a:r>
+              <a:rPr sz="1600" b="0">
+                <a:solidFill>
+                  <a:srgbClr val="1E2024"/>
+                </a:solidFill>
+                <a:latin typeface="Calibri"/>
+              </a:rPr>
+              <a:t>A.  </a:t>
+            </a:r>
+            <a:r>
+              <a:rPr sz="1600" b="0">
+                <a:solidFill>
+                  <a:srgbClr val="1E2024"/>
+                </a:solidFill>
+                <a:latin typeface="Calibri"/>
+              </a:rPr>
+              <a:t>兩 broker ApiVersions 協商取交集</a:t>
+            </a:r>
+          </a:p>
+        </p:txBody>
+      </p:sp>
       <p:sp>
         <p:nvSpPr>
           <p:cNvPr id="5" name="TextBox 4"/>
@@ -4384,94 +4424,8 @@
         </p:nvSpPr>
         <p:spPr>
           <a:xfrm>
-            <a:off x="1078992" y="2148840"/>
+            <a:off x="822960" y="2953512"/>
             <a:ext cx="10515600" cy="493776"/>
-          </a:xfrm>
-          <a:prstGeom prst="rect">
-            <a:avLst/>
-          </a:prstGeom>
-          <a:noFill/>
-        </p:spPr>
-        <p:txBody>
-          <a:bodyPr wrap="square">
-            <a:noAutofit/>
-          </a:bodyPr>
-          <a:lstStyle/>
-          <a:p>
-            <a:r>
-              <a:rPr sz="1650" b="0">
-                <a:solidFill>
-                  <a:srgbClr val="1E2024"/>
-                </a:solidFill>
-                <a:latin typeface="Calibri"/>
-              </a:rPr>
-              <a:t>前一頁「交集空」最容易被忽略的根因——舊 wire 版本被整批移除</a:t>
-            </a:r>
-          </a:p>
-        </p:txBody>
-      </p:sp>
-      <p:sp>
-        <p:nvSpPr>
-          <p:cNvPr id="6" name="TextBox 5"/>
-          <p:cNvSpPr txBox="1"/>
-          <p:nvPr/>
-        </p:nvSpPr>
-        <p:spPr>
-          <a:xfrm>
-            <a:off x="640080" y="2788920"/>
-            <a:ext cx="10972800" cy="822959"/>
-          </a:xfrm>
-          <a:prstGeom prst="rect">
-            <a:avLst/>
-          </a:prstGeom>
-          <a:solidFill>
-            <a:srgbClr val="F3F1EC"/>
-          </a:solidFill>
-          <a:ln w="6350">
-            <a:solidFill>
-              <a:srgbClr val="E3E0D8"/>
-            </a:solidFill>
-          </a:ln>
-        </p:spPr>
-        <p:txBody>
-          <a:bodyPr wrap="square" lIns="146304" tIns="91440" bIns="91440">
-            <a:noAutofit/>
-          </a:bodyPr>
-          <a:lstStyle/>
-          <a:p>
-            <a:r>
-              <a:rPr sz="1350" b="0">
-                <a:solidFill>
-                  <a:srgbClr val="2C2C2A"/>
-                </a:solidFill>
-                <a:latin typeface="Calibri"/>
-              </a:rPr>
-              <a:t>舊 wire API version 被整個移除，min 可 &gt; 0</a:t>
-            </a:r>
-          </a:p>
-          <a:p>
-            <a:r>
-              <a:rPr sz="1350" b="0">
-                <a:solidFill>
-                  <a:srgbClr val="2C2C2A"/>
-                </a:solidFill>
-                <a:latin typeface="Calibri"/>
-              </a:rPr>
-              <a:t>  Fetch：4–18（v0–3 在 4.0 移除）</a:t>
-            </a:r>
-          </a:p>
-        </p:txBody>
-      </p:sp>
-      <p:sp>
-        <p:nvSpPr>
-          <p:cNvPr id="7" name="TextBox 6"/>
-          <p:cNvSpPr txBox="1"/>
-          <p:nvPr/>
-        </p:nvSpPr>
-        <p:spPr>
-          <a:xfrm>
-            <a:off x="640080" y="3813048"/>
-            <a:ext cx="10972800" cy="877824"/>
           </a:xfrm>
           <a:prstGeom prst="rect">
             <a:avLst/>
@@ -4484,19 +4438,114 @@
           </a:ln>
         </p:spPr>
         <p:txBody>
-          <a:bodyPr wrap="square" lIns="146304" tIns="82296">
-            <a:noAutofit/>
-          </a:bodyPr>
-          <a:lstStyle/>
-          <a:p>
-            <a:r>
-              <a:rPr sz="1500" b="0">
+          <a:bodyPr wrap="square" lIns="128016" tIns="54864">
+            <a:noAutofit/>
+          </a:bodyPr>
+          <a:lstStyle/>
+          <a:p>
+            <a:r>
+              <a:rPr sz="1600" b="1">
                 <a:solidFill>
                   <a:srgbClr val="27500A"/>
                 </a:solidFill>
                 <a:latin typeface="Calibri"/>
               </a:rPr>
-              <a:t>解法：升任一端到 4.0 前，先確認另一端 ≥ 2.1（upgrade guide 明訂雙向要求），否則協商結果沒有可用版本</a:t>
+              <a:t>B.  </a:t>
+            </a:r>
+            <a:r>
+              <a:rPr sz="1600" b="1">
+                <a:solidFill>
+                  <a:srgbClr val="27500A"/>
+                </a:solidFill>
+                <a:latin typeface="Calibri"/>
+              </a:rPr>
+              <a:t>由 finalized metadata.version 決定   ✓</a:t>
+            </a:r>
+          </a:p>
+        </p:txBody>
+      </p:sp>
+      <p:sp>
+        <p:nvSpPr>
+          <p:cNvPr id="6" name="TextBox 5"/>
+          <p:cNvSpPr txBox="1"/>
+          <p:nvPr/>
+        </p:nvSpPr>
+        <p:spPr>
+          <a:xfrm>
+            <a:off x="822960" y="3575304"/>
+            <a:ext cx="10515600" cy="493776"/>
+          </a:xfrm>
+          <a:prstGeom prst="rect">
+            <a:avLst/>
+          </a:prstGeom>
+          <a:noFill/>
+        </p:spPr>
+        <p:txBody>
+          <a:bodyPr wrap="square">
+            <a:noAutofit/>
+          </a:bodyPr>
+          <a:lstStyle/>
+          <a:p>
+            <a:r>
+              <a:rPr sz="1600" b="0">
+                <a:solidFill>
+                  <a:srgbClr val="1E2024"/>
+                </a:solidFill>
+                <a:latin typeface="Calibri"/>
+              </a:rPr>
+              <a:t>C.  </a:t>
+            </a:r>
+            <a:r>
+              <a:rPr sz="1600" b="0">
+                <a:solidFill>
+                  <a:srgbClr val="1E2024"/>
+                </a:solidFill>
+                <a:latin typeface="Calibri"/>
+              </a:rPr>
+              <a:t>永遠用最新版</a:t>
+            </a:r>
+          </a:p>
+        </p:txBody>
+      </p:sp>
+      <p:sp>
+        <p:nvSpPr>
+          <p:cNvPr id="7" name="TextBox 6"/>
+          <p:cNvSpPr txBox="1"/>
+          <p:nvPr/>
+        </p:nvSpPr>
+        <p:spPr>
+          <a:xfrm>
+            <a:off x="822960" y="4197096"/>
+            <a:ext cx="10515600" cy="493776"/>
+          </a:xfrm>
+          <a:prstGeom prst="rect">
+            <a:avLst/>
+          </a:prstGeom>
+          <a:noFill/>
+        </p:spPr>
+        <p:txBody>
+          <a:bodyPr wrap="square">
+            <a:noAutofit/>
+          </a:bodyPr>
+          <a:lstStyle/>
+          <a:p>
+            <a:r>
+              <a:rPr sz="1600" b="0">
+                <a:solidFill>
+                  <a:srgbClr val="1E2024"/>
+                </a:solidFill>
+                <a:latin typeface="Calibri"/>
+              </a:rPr>
+              <a:t>D.  </a:t>
+            </a:r>
+            <a:r>
+              <a:rPr sz="1600" b="0">
+                <a:solidFill>
+                  <a:srgbClr val="1E2024"/>
+                </a:solidFill>
+                <a:latin typeface="Calibri"/>
+              </a:rPr>
+              <a:t>controller 每次指定</a:t>
             </a:r>
           </a:p>
         </p:txBody>
@@ -4509,28 +4558,37 @@
         </p:nvSpPr>
         <p:spPr>
           <a:xfrm>
-            <a:off x="640080" y="4873752"/>
-            <a:ext cx="10972800" cy="731520"/>
-          </a:xfrm>
-          <a:prstGeom prst="rect">
-            <a:avLst/>
-          </a:prstGeom>
-          <a:noFill/>
-        </p:spPr>
-        <p:txBody>
-          <a:bodyPr wrap="square">
-            <a:noAutofit/>
-          </a:bodyPr>
-          <a:lstStyle/>
-          <a:p>
-            <a:r>
-              <a:rPr sz="1500" b="0">
-                <a:solidFill>
-                  <a:srgbClr val="5F5E5A"/>
-                </a:solidFill>
-                <a:latin typeface="Calibri"/>
-              </a:rPr>
-              <a:t>取捨：0.8.0（2013）起九年保留每個版本——每個舊版本都是活的程式碼與測試面；4.0 用「斷 2018 年前的 client」換「刪九年的碼」，只有 major 版本邊界付得起。</a:t>
+            <a:off x="640080" y="4910327"/>
+            <a:ext cx="10972800" cy="914400"/>
+          </a:xfrm>
+          <a:prstGeom prst="rect">
+            <a:avLst/>
+          </a:prstGeom>
+          <a:noFill/>
+        </p:spPr>
+        <p:txBody>
+          <a:bodyPr wrap="square">
+            <a:noAutofit/>
+          </a:bodyPr>
+          <a:lstStyle/>
+          <a:p>
+            <a:r>
+              <a:rPr sz="1400" b="1">
+                <a:solidFill>
+                  <a:srgbClr val="27500A"/>
+                </a:solidFill>
+                <a:latin typeface="Calibri"/>
+              </a:rPr>
+              <a:t>正解 B — </a:t>
+            </a:r>
+            <a:r>
+              <a:rPr sz="1400" b="0">
+                <a:solidFill>
+                  <a:srgbClr val="1E2024"/>
+                </a:solidFill>
+                <a:latin typeface="Calibri"/>
+              </a:rPr>
+              <a:t>fetchRequestVersion(MV)：MV 是集中共識，不做 per-connection 協商。</a:t>
             </a:r>
           </a:p>
         </p:txBody>
@@ -4538,40 +4596,6 @@
       <p:sp>
         <p:nvSpPr>
           <p:cNvPr id="9" name="TextBox 8"/>
-          <p:cNvSpPr txBox="1"/>
-          <p:nvPr/>
-        </p:nvSpPr>
-        <p:spPr>
-          <a:xfrm>
-            <a:off x="640080" y="5733288"/>
-            <a:ext cx="10972800" cy="731520"/>
-          </a:xfrm>
-          <a:prstGeom prst="rect">
-            <a:avLst/>
-          </a:prstGeom>
-          <a:noFill/>
-        </p:spPr>
-        <p:txBody>
-          <a:bodyPr wrap="square">
-            <a:noAutofit/>
-          </a:bodyPr>
-          <a:lstStyle/>
-          <a:p>
-            <a:r>
-              <a:rPr sz="1500" b="0">
-                <a:solidFill>
-                  <a:srgbClr val="5F5E5A"/>
-                </a:solidFill>
-                <a:latin typeface="Calibri"/>
-              </a:rPr>
-              <a:t>銜接（非本場）：finalize / 升降當下的錯誤（INVALID_UPDATE_VERSION 等）屬「運行時的版本升降」那場，本場不展開。</a:t>
-            </a:r>
-          </a:p>
-        </p:txBody>
-      </p:sp>
-      <p:sp>
-        <p:nvSpPr>
-          <p:cNvPr id="10" name="TextBox 9"/>
           <p:cNvSpPr txBox="1"/>
           <p:nvPr/>
         </p:nvSpPr>
@@ -4606,28 +4630,28 @@
                   <a:srgbClr val="185FA5"/>
                 </a:solidFill>
                 <a:latin typeface="Courier New"/>
+                <a:hlinkClick r:id="rId2"/>
+              </a:rPr>
+              <a:t>RemoteLeaderEndPoint.scala:215</a:t>
+            </a:r>
+            <a:r>
+              <a:rPr sz="1200" b="0">
+                <a:solidFill>
+                  <a:srgbClr val="8A8A8A"/>
+                </a:solidFill>
+                <a:latin typeface="Calibri"/>
+              </a:rPr>
+              <a:t>   ·   </a:t>
+            </a:r>
+            <a:r>
+              <a:rPr sz="1200" b="0" u="sng">
+                <a:solidFill>
+                  <a:srgbClr val="185FA5"/>
+                </a:solidFill>
+                <a:latin typeface="Courier New"/>
                 <a:hlinkClick r:id="rId3"/>
               </a:rPr>
-              <a:t>upgrade.md:229</a:t>
-            </a:r>
-            <a:r>
-              <a:rPr sz="1200" b="0">
-                <a:solidFill>
-                  <a:srgbClr val="8A8A8A"/>
-                </a:solidFill>
-                <a:latin typeface="Calibri"/>
-              </a:rPr>
-              <a:t>   ·   </a:t>
-            </a:r>
-            <a:r>
-              <a:rPr sz="1200" b="0" u="sng">
-                <a:solidFill>
-                  <a:srgbClr val="185FA5"/>
-                </a:solidFill>
-                <a:latin typeface="Courier New"/>
-                <a:hlinkClick r:id="rId4"/>
-              </a:rPr>
-              <a:t>FetchRequest.json validVersions</a:t>
+              <a:t>MetadataVersion.java:273</a:t>
             </a:r>
           </a:p>
         </p:txBody>
@@ -4679,7 +4703,7 @@
                 </a:solidFill>
                 <a:latin typeface="Calibri"/>
               </a:rPr>
-              <a:t>隨堂考 · 核心</a:t>
+              <a:t>Part 2 · 失敗訊息</a:t>
             </a:r>
           </a:p>
         </p:txBody>
@@ -4693,27 +4717,27 @@
         <p:spPr>
           <a:xfrm>
             <a:off x="640080" y="841248"/>
-            <a:ext cx="10972800" cy="1188720"/>
-          </a:xfrm>
-          <a:prstGeom prst="rect">
-            <a:avLst/>
-          </a:prstGeom>
-          <a:noFill/>
-        </p:spPr>
-        <p:txBody>
-          <a:bodyPr wrap="square">
-            <a:noAutofit/>
-          </a:bodyPr>
-          <a:lstStyle/>
-          <a:p>
-            <a:r>
-              <a:rPr sz="2600" b="1">
+            <a:ext cx="10972800" cy="1005840"/>
+          </a:xfrm>
+          <a:prstGeom prst="rect">
+            <a:avLst/>
+          </a:prstGeom>
+          <a:noFill/>
+        </p:spPr>
+        <p:txBody>
+          <a:bodyPr wrap="square">
+            <a:noAutofit/>
+          </a:bodyPr>
+          <a:lstStyle/>
+          <a:p>
+            <a:r>
+              <a:rPr sz="3200" b="1">
                 <a:solidFill>
                   <a:srgbClr val="1E2024"/>
                 </a:solidFill>
                 <a:latin typeface="Calibri"/>
               </a:rPr>
-              <a:t>client 繞過協商、直接送出 broker 不支援的 API version，會怎樣？</a:t>
+              <a:t>通訊當下協商不出版本，會看到什麼</a:t>
             </a:r>
           </a:p>
         </p:txBody>
@@ -4726,7 +4750,94 @@
         </p:nvSpPr>
         <p:spPr>
           <a:xfrm>
-            <a:off x="822960" y="2331720"/>
+            <a:off x="640080" y="2148840"/>
+            <a:ext cx="10972800" cy="1645920"/>
+          </a:xfrm>
+          <a:prstGeom prst="rect">
+            <a:avLst/>
+          </a:prstGeom>
+          <a:solidFill>
+            <a:srgbClr val="F3F1EC"/>
+          </a:solidFill>
+          <a:ln w="6350">
+            <a:solidFill>
+              <a:srgbClr val="E3E0D8"/>
+            </a:solidFill>
+          </a:ln>
+        </p:spPr>
+        <p:txBody>
+          <a:bodyPr wrap="square" lIns="146304" tIns="91440" bIns="91440">
+            <a:noAutofit/>
+          </a:bodyPr>
+          <a:lstStyle/>
+          <a:p>
+            <a:r>
+              <a:rPr sz="1350" b="0">
+                <a:solidFill>
+                  <a:srgbClr val="2C2C2A"/>
+                </a:solidFill>
+                <a:latin typeface="Calibri"/>
+              </a:rPr>
+              <a:t>交集空                       → client 端 UnsupportedVersionException（送出前 abort）</a:t>
+            </a:r>
+          </a:p>
+          <a:p>
+            <a:r>
+              <a:rPr sz="1350" b="0">
+                <a:solidFill>
+                  <a:srgbClr val="2C2C2A"/>
+                </a:solidFill>
+                <a:latin typeface="Calibri"/>
+              </a:rPr>
+              <a:t>client 繞過協商、硬送不支援版本 → broker 丟 UnsupportedVersionException、關閉連線</a:t>
+            </a:r>
+          </a:p>
+          <a:p>
+            <a:r>
+              <a:rPr sz="1350" b="0">
+                <a:solidFill>
+                  <a:srgbClr val="2C2C2A"/>
+                </a:solidFill>
+                <a:latin typeface="Calibri"/>
+              </a:rPr>
+              <a:t>（ApiVersions 例外：回 v0 + UNSUPPORTED_VERSION 錯誤碼）</a:t>
+            </a:r>
+          </a:p>
+        </p:txBody>
+      </p:sp>
+      <p:pic>
+        <p:nvPicPr>
+          <p:cNvPr id="5" name="Picture 4" descr="ban.png"/>
+          <p:cNvPicPr>
+            <a:picLocks noChangeAspect="1"/>
+          </p:cNvPicPr>
+          <p:nvPr/>
+        </p:nvPicPr>
+        <p:blipFill>
+          <a:blip r:embed="rId2"/>
+          <a:stretch>
+            <a:fillRect/>
+          </a:stretch>
+        </p:blipFill>
+        <p:spPr>
+          <a:xfrm>
+            <a:off x="658368" y="4023360"/>
+            <a:ext cx="274320" cy="274320"/>
+          </a:xfrm>
+          <a:prstGeom prst="rect">
+            <a:avLst/>
+          </a:prstGeom>
+        </p:spPr>
+      </p:pic>
+      <p:sp>
+        <p:nvSpPr>
+          <p:cNvPr id="6" name="TextBox 5"/>
+          <p:cNvSpPr txBox="1"/>
+          <p:nvPr/>
+        </p:nvSpPr>
+        <p:spPr>
+          <a:xfrm>
+            <a:off x="1078992" y="3995928"/>
             <a:ext cx="10515600" cy="493776"/>
           </a:xfrm>
           <a:prstGeom prst="rect">
@@ -4741,108 +4852,13 @@
           <a:lstStyle/>
           <a:p>
             <a:r>
-              <a:rPr sz="1600" b="0">
+              <a:rPr sz="1650" b="0">
                 <a:solidFill>
                   <a:srgbClr val="1E2024"/>
                 </a:solidFill>
                 <a:latin typeface="Calibri"/>
               </a:rPr>
-              <a:t>A.  </a:t>
-            </a:r>
-            <a:r>
-              <a:rPr sz="1600" b="0">
-                <a:solidFill>
-                  <a:srgbClr val="1E2024"/>
-                </a:solidFill>
-                <a:latin typeface="Calibri"/>
-              </a:rPr>
-              <a:t>一律回 UNSUPPORTED_VERSION 錯誤碼</a:t>
-            </a:r>
-          </a:p>
-        </p:txBody>
-      </p:sp>
-      <p:sp>
-        <p:nvSpPr>
-          <p:cNvPr id="5" name="TextBox 4"/>
-          <p:cNvSpPr txBox="1"/>
-          <p:nvPr/>
-        </p:nvSpPr>
-        <p:spPr>
-          <a:xfrm>
-            <a:off x="822960" y="2953512"/>
-            <a:ext cx="10515600" cy="493776"/>
-          </a:xfrm>
-          <a:prstGeom prst="rect">
-            <a:avLst/>
-          </a:prstGeom>
-          <a:noFill/>
-        </p:spPr>
-        <p:txBody>
-          <a:bodyPr wrap="square">
-            <a:noAutofit/>
-          </a:bodyPr>
-          <a:lstStyle/>
-          <a:p>
-            <a:r>
-              <a:rPr sz="1600" b="0">
-                <a:solidFill>
-                  <a:srgbClr val="1E2024"/>
-                </a:solidFill>
-                <a:latin typeface="Calibri"/>
-              </a:rPr>
-              <a:t>B.  </a:t>
-            </a:r>
-            <a:r>
-              <a:rPr sz="1600" b="0">
-                <a:solidFill>
-                  <a:srgbClr val="1E2024"/>
-                </a:solidFill>
-                <a:latin typeface="Calibri"/>
-              </a:rPr>
-              <a:t>只有 ApiVersions 例外回錯誤碼+支援範圍；其他 API 直接關閉連線</a:t>
-            </a:r>
-          </a:p>
-        </p:txBody>
-      </p:sp>
-      <p:sp>
-        <p:nvSpPr>
-          <p:cNvPr id="6" name="TextBox 5"/>
-          <p:cNvSpPr txBox="1"/>
-          <p:nvPr/>
-        </p:nvSpPr>
-        <p:spPr>
-          <a:xfrm>
-            <a:off x="822960" y="3575304"/>
-            <a:ext cx="10515600" cy="493776"/>
-          </a:xfrm>
-          <a:prstGeom prst="rect">
-            <a:avLst/>
-          </a:prstGeom>
-          <a:noFill/>
-        </p:spPr>
-        <p:txBody>
-          <a:bodyPr wrap="square">
-            <a:noAutofit/>
-          </a:bodyPr>
-          <a:lstStyle/>
-          <a:p>
-            <a:r>
-              <a:rPr sz="1600" b="0">
-                <a:solidFill>
-                  <a:srgbClr val="1E2024"/>
-                </a:solidFill>
-                <a:latin typeface="Calibri"/>
-              </a:rPr>
-              <a:t>C.  </a:t>
-            </a:r>
-            <a:r>
-              <a:rPr sz="1600" b="0">
-                <a:solidFill>
-                  <a:srgbClr val="1E2024"/>
-                </a:solidFill>
-                <a:latin typeface="Calibri"/>
-              </a:rPr>
-              <a:t>broker 自動降版處理</a:t>
+              <a:t>多數情況 client 在送出前就本地中止，根本沒上網路</a:t>
             </a:r>
           </a:p>
         </p:txBody>
@@ -4855,37 +4871,28 @@
         </p:nvSpPr>
         <p:spPr>
           <a:xfrm>
-            <a:off x="822960" y="4197096"/>
-            <a:ext cx="10515600" cy="493776"/>
-          </a:xfrm>
-          <a:prstGeom prst="rect">
-            <a:avLst/>
-          </a:prstGeom>
-          <a:noFill/>
-        </p:spPr>
-        <p:txBody>
-          <a:bodyPr wrap="square">
-            <a:noAutofit/>
-          </a:bodyPr>
-          <a:lstStyle/>
-          <a:p>
-            <a:r>
-              <a:rPr sz="1600" b="0">
-                <a:solidFill>
-                  <a:srgbClr val="1E2024"/>
-                </a:solidFill>
-                <a:latin typeface="Calibri"/>
-              </a:rPr>
-              <a:t>D.  </a:t>
-            </a:r>
-            <a:r>
-              <a:rPr sz="1600" b="0">
-                <a:solidFill>
-                  <a:srgbClr val="1E2024"/>
-                </a:solidFill>
-                <a:latin typeface="Calibri"/>
-              </a:rPr>
-              <a:t>忽略版本照常處理</a:t>
+            <a:off x="640080" y="4636008"/>
+            <a:ext cx="10972800" cy="731520"/>
+          </a:xfrm>
+          <a:prstGeom prst="rect">
+            <a:avLst/>
+          </a:prstGeom>
+          <a:noFill/>
+        </p:spPr>
+        <p:txBody>
+          <a:bodyPr wrap="square">
+            <a:noAutofit/>
+          </a:bodyPr>
+          <a:lstStyle/>
+          <a:p>
+            <a:r>
+              <a:rPr sz="1500" b="0">
+                <a:solidFill>
+                  <a:srgbClr val="5F5E5A"/>
+                </a:solidFill>
+                <a:latin typeface="Calibri"/>
+              </a:rPr>
+              <a:t>「硬送」指 client↔broker：自刻或有 bug 的 client 繞過協商；broker↔broker 版本已由 MV 事先釘住，不會送出對方不懂的版本。</a:t>
             </a:r>
           </a:p>
         </p:txBody>
@@ -4898,28 +4905,76 @@
         </p:nvSpPr>
         <p:spPr>
           <a:xfrm>
-            <a:off x="640080" y="4910327"/>
-            <a:ext cx="10972800" cy="914400"/>
-          </a:xfrm>
-          <a:prstGeom prst="rect">
-            <a:avLst/>
-          </a:prstGeom>
-          <a:noFill/>
-        </p:spPr>
-        <p:txBody>
-          <a:bodyPr wrap="square">
-            <a:noAutofit/>
-          </a:bodyPr>
-          <a:lstStyle/>
-          <a:p>
-            <a:r>
-              <a:rPr sz="1400" b="0">
+            <a:off x="640080" y="6400800"/>
+            <a:ext cx="10972800" cy="384048"/>
+          </a:xfrm>
+          <a:prstGeom prst="rect">
+            <a:avLst/>
+          </a:prstGeom>
+          <a:noFill/>
+        </p:spPr>
+        <p:txBody>
+          <a:bodyPr wrap="square">
+            <a:noAutofit/>
+          </a:bodyPr>
+          <a:lstStyle/>
+          <a:p>
+            <a:r>
+              <a:rPr sz="1200" b="1">
                 <a:solidFill>
                   <a:srgbClr val="8A8A8A"/>
                 </a:solidFill>
                 <a:latin typeface="Calibri"/>
               </a:rPr>
-              <a:t>想一想 —— 下一頁公布答案</a:t>
+              <a:t>REF   </a:t>
+            </a:r>
+            <a:r>
+              <a:rPr sz="1200" b="0" u="sng">
+                <a:solidFill>
+                  <a:srgbClr val="185FA5"/>
+                </a:solidFill>
+                <a:latin typeface="Courier New"/>
+                <a:hlinkClick r:id="rId3"/>
+              </a:rPr>
+              <a:t>latestUsableVersion</a:t>
+            </a:r>
+            <a:r>
+              <a:rPr sz="1200" b="0">
+                <a:solidFill>
+                  <a:srgbClr val="8A8A8A"/>
+                </a:solidFill>
+                <a:latin typeface="Calibri"/>
+              </a:rPr>
+              <a:t>   ·   </a:t>
+            </a:r>
+            <a:r>
+              <a:rPr sz="1200" b="0" u="sng">
+                <a:solidFill>
+                  <a:srgbClr val="185FA5"/>
+                </a:solidFill>
+                <a:latin typeface="Courier New"/>
+                <a:hlinkClick r:id="rId4"/>
+              </a:rPr>
+              <a:t>NetworkClient</a:t>
+            </a:r>
+            <a:r>
+              <a:rPr sz="1200" b="0">
+                <a:solidFill>
+                  <a:srgbClr val="8A8A8A"/>
+                </a:solidFill>
+                <a:latin typeface="Calibri"/>
+              </a:rPr>
+              <a:t>   ·   </a:t>
+            </a:r>
+            <a:r>
+              <a:rPr sz="1200" b="0" u="sng">
+                <a:solidFill>
+                  <a:srgbClr val="185FA5"/>
+                </a:solidFill>
+                <a:latin typeface="Courier New"/>
+                <a:hlinkClick r:id="rId5"/>
+              </a:rPr>
+              <a:t>RequestContext</a:t>
             </a:r>
           </a:p>
         </p:txBody>
@@ -4971,7 +5026,7 @@
                 </a:solidFill>
                 <a:latin typeface="Calibri"/>
               </a:rPr>
-              <a:t>隨堂考 · 核心　（正解）</a:t>
+              <a:t>Part 2 · 失敗訊息</a:t>
             </a:r>
           </a:p>
         </p:txBody>
@@ -4985,40 +5040,64 @@
         <p:spPr>
           <a:xfrm>
             <a:off x="640080" y="841248"/>
-            <a:ext cx="10972800" cy="1188720"/>
-          </a:xfrm>
-          <a:prstGeom prst="rect">
-            <a:avLst/>
-          </a:prstGeom>
-          <a:noFill/>
-        </p:spPr>
-        <p:txBody>
-          <a:bodyPr wrap="square">
-            <a:noAutofit/>
-          </a:bodyPr>
-          <a:lstStyle/>
-          <a:p>
-            <a:r>
-              <a:rPr sz="2600" b="1">
+            <a:ext cx="10972800" cy="1005840"/>
+          </a:xfrm>
+          <a:prstGeom prst="rect">
+            <a:avLst/>
+          </a:prstGeom>
+          <a:noFill/>
+        </p:spPr>
+        <p:txBody>
+          <a:bodyPr wrap="square">
+            <a:noAutofit/>
+          </a:bodyPr>
+          <a:lstStyle/>
+          <a:p>
+            <a:r>
+              <a:rPr sz="3200" b="1">
                 <a:solidFill>
                   <a:srgbClr val="1E2024"/>
                 </a:solidFill>
                 <a:latin typeface="Calibri"/>
               </a:rPr>
-              <a:t>client 繞過協商、直接送出 broker 不支援的 API version，會怎樣？</a:t>
-            </a:r>
-          </a:p>
-        </p:txBody>
-      </p:sp>
-      <p:sp>
-        <p:nvSpPr>
-          <p:cNvPr id="4" name="TextBox 3"/>
-          <p:cNvSpPr txBox="1"/>
-          <p:nvPr/>
-        </p:nvSpPr>
-        <p:spPr>
-          <a:xfrm>
-            <a:off x="822960" y="2331720"/>
+              <a:t>版本截斷：為什麼「升一點點」不夠</a:t>
+            </a:r>
+          </a:p>
+        </p:txBody>
+      </p:sp>
+      <p:pic>
+        <p:nvPicPr>
+          <p:cNvPr id="4" name="Picture 3" descr="alert-triangle.png"/>
+          <p:cNvPicPr>
+            <a:picLocks noChangeAspect="1"/>
+          </p:cNvPicPr>
+          <p:nvPr/>
+        </p:nvPicPr>
+        <p:blipFill>
+          <a:blip r:embed="rId2"/>
+          <a:stretch>
+            <a:fillRect/>
+          </a:stretch>
+        </p:blipFill>
+        <p:spPr>
+          <a:xfrm>
+            <a:off x="658368" y="2176272"/>
+            <a:ext cx="274320" cy="274320"/>
+          </a:xfrm>
+          <a:prstGeom prst="rect">
+            <a:avLst/>
+          </a:prstGeom>
+        </p:spPr>
+      </p:pic>
+      <p:sp>
+        <p:nvSpPr>
+          <p:cNvPr id="5" name="TextBox 4"/>
+          <p:cNvSpPr txBox="1"/>
+          <p:nvPr/>
+        </p:nvSpPr>
+        <p:spPr>
+          <a:xfrm>
+            <a:off x="1078992" y="2148840"/>
             <a:ext cx="10515600" cy="493776"/>
           </a:xfrm>
           <a:prstGeom prst="rect">
@@ -5033,36 +5112,79 @@
           <a:lstStyle/>
           <a:p>
             <a:r>
-              <a:rPr sz="1600" b="0">
+              <a:rPr sz="1650" b="0">
                 <a:solidFill>
                   <a:srgbClr val="1E2024"/>
                 </a:solidFill>
                 <a:latin typeface="Calibri"/>
               </a:rPr>
-              <a:t>A.  </a:t>
-            </a:r>
-            <a:r>
-              <a:rPr sz="1600" b="0">
-                <a:solidFill>
-                  <a:srgbClr val="1E2024"/>
-                </a:solidFill>
-                <a:latin typeface="Calibri"/>
-              </a:rPr>
-              <a:t>一律回 UNSUPPORTED_VERSION 錯誤碼</a:t>
-            </a:r>
-          </a:p>
-        </p:txBody>
-      </p:sp>
-      <p:sp>
-        <p:nvSpPr>
-          <p:cNvPr id="5" name="TextBox 4"/>
-          <p:cNvSpPr txBox="1"/>
-          <p:nvPr/>
-        </p:nvSpPr>
-        <p:spPr>
-          <a:xfrm>
-            <a:off x="822960" y="2953512"/>
-            <a:ext cx="10515600" cy="493776"/>
+              <a:t>前一頁「交集空」最容易被忽略的根因——舊 wire 版本被整批移除</a:t>
+            </a:r>
+          </a:p>
+        </p:txBody>
+      </p:sp>
+      <p:sp>
+        <p:nvSpPr>
+          <p:cNvPr id="6" name="TextBox 5"/>
+          <p:cNvSpPr txBox="1"/>
+          <p:nvPr/>
+        </p:nvSpPr>
+        <p:spPr>
+          <a:xfrm>
+            <a:off x="640080" y="2788920"/>
+            <a:ext cx="10972800" cy="822959"/>
+          </a:xfrm>
+          <a:prstGeom prst="rect">
+            <a:avLst/>
+          </a:prstGeom>
+          <a:solidFill>
+            <a:srgbClr val="F3F1EC"/>
+          </a:solidFill>
+          <a:ln w="6350">
+            <a:solidFill>
+              <a:srgbClr val="E3E0D8"/>
+            </a:solidFill>
+          </a:ln>
+        </p:spPr>
+        <p:txBody>
+          <a:bodyPr wrap="square" lIns="146304" tIns="91440" bIns="91440">
+            <a:noAutofit/>
+          </a:bodyPr>
+          <a:lstStyle/>
+          <a:p>
+            <a:r>
+              <a:rPr sz="1350" b="0">
+                <a:solidFill>
+                  <a:srgbClr val="2C2C2A"/>
+                </a:solidFill>
+                <a:latin typeface="Calibri"/>
+              </a:rPr>
+              <a:t>舊 wire API version 被整個移除，min 可 &gt; 0</a:t>
+            </a:r>
+          </a:p>
+          <a:p>
+            <a:r>
+              <a:rPr sz="1350" b="0">
+                <a:solidFill>
+                  <a:srgbClr val="2C2C2A"/>
+                </a:solidFill>
+                <a:latin typeface="Calibri"/>
+              </a:rPr>
+              <a:t>  Fetch：4–18（v0–3 在 4.0 移除）</a:t>
+            </a:r>
+          </a:p>
+        </p:txBody>
+      </p:sp>
+      <p:sp>
+        <p:nvSpPr>
+          <p:cNvPr id="7" name="TextBox 6"/>
+          <p:cNvSpPr txBox="1"/>
+          <p:nvPr/>
+        </p:nvSpPr>
+        <p:spPr>
+          <a:xfrm>
+            <a:off x="640080" y="3813048"/>
+            <a:ext cx="10972800" cy="877824"/>
           </a:xfrm>
           <a:prstGeom prst="rect">
             <a:avLst/>
@@ -5075,114 +5197,19 @@
           </a:ln>
         </p:spPr>
         <p:txBody>
-          <a:bodyPr wrap="square" lIns="128016" tIns="54864">
-            <a:noAutofit/>
-          </a:bodyPr>
-          <a:lstStyle/>
-          <a:p>
-            <a:r>
-              <a:rPr sz="1600" b="1">
+          <a:bodyPr wrap="square" lIns="146304" tIns="82296">
+            <a:noAutofit/>
+          </a:bodyPr>
+          <a:lstStyle/>
+          <a:p>
+            <a:r>
+              <a:rPr sz="1500" b="0">
                 <a:solidFill>
                   <a:srgbClr val="27500A"/>
                 </a:solidFill>
                 <a:latin typeface="Calibri"/>
               </a:rPr>
-              <a:t>B.  </a:t>
-            </a:r>
-            <a:r>
-              <a:rPr sz="1600" b="1">
-                <a:solidFill>
-                  <a:srgbClr val="27500A"/>
-                </a:solidFill>
-                <a:latin typeface="Calibri"/>
-              </a:rPr>
-              <a:t>只有 ApiVersions 例外回錯誤碼+支援範圍；其他 API 直接關閉連線   ✓</a:t>
-            </a:r>
-          </a:p>
-        </p:txBody>
-      </p:sp>
-      <p:sp>
-        <p:nvSpPr>
-          <p:cNvPr id="6" name="TextBox 5"/>
-          <p:cNvSpPr txBox="1"/>
-          <p:nvPr/>
-        </p:nvSpPr>
-        <p:spPr>
-          <a:xfrm>
-            <a:off x="822960" y="3575304"/>
-            <a:ext cx="10515600" cy="493776"/>
-          </a:xfrm>
-          <a:prstGeom prst="rect">
-            <a:avLst/>
-          </a:prstGeom>
-          <a:noFill/>
-        </p:spPr>
-        <p:txBody>
-          <a:bodyPr wrap="square">
-            <a:noAutofit/>
-          </a:bodyPr>
-          <a:lstStyle/>
-          <a:p>
-            <a:r>
-              <a:rPr sz="1600" b="0">
-                <a:solidFill>
-                  <a:srgbClr val="1E2024"/>
-                </a:solidFill>
-                <a:latin typeface="Calibri"/>
-              </a:rPr>
-              <a:t>C.  </a:t>
-            </a:r>
-            <a:r>
-              <a:rPr sz="1600" b="0">
-                <a:solidFill>
-                  <a:srgbClr val="1E2024"/>
-                </a:solidFill>
-                <a:latin typeface="Calibri"/>
-              </a:rPr>
-              <a:t>broker 自動降版處理</a:t>
-            </a:r>
-          </a:p>
-        </p:txBody>
-      </p:sp>
-      <p:sp>
-        <p:nvSpPr>
-          <p:cNvPr id="7" name="TextBox 6"/>
-          <p:cNvSpPr txBox="1"/>
-          <p:nvPr/>
-        </p:nvSpPr>
-        <p:spPr>
-          <a:xfrm>
-            <a:off x="822960" y="4197096"/>
-            <a:ext cx="10515600" cy="493776"/>
-          </a:xfrm>
-          <a:prstGeom prst="rect">
-            <a:avLst/>
-          </a:prstGeom>
-          <a:noFill/>
-        </p:spPr>
-        <p:txBody>
-          <a:bodyPr wrap="square">
-            <a:noAutofit/>
-          </a:bodyPr>
-          <a:lstStyle/>
-          <a:p>
-            <a:r>
-              <a:rPr sz="1600" b="0">
-                <a:solidFill>
-                  <a:srgbClr val="1E2024"/>
-                </a:solidFill>
-                <a:latin typeface="Calibri"/>
-              </a:rPr>
-              <a:t>D.  </a:t>
-            </a:r>
-            <a:r>
-              <a:rPr sz="1600" b="0">
-                <a:solidFill>
-                  <a:srgbClr val="1E2024"/>
-                </a:solidFill>
-                <a:latin typeface="Calibri"/>
-              </a:rPr>
-              <a:t>忽略版本照常處理</a:t>
+              <a:t>解法：升任一端到 4.0 前，先確認另一端 ≥ 2.1（upgrade guide 明訂雙向要求），否則協商結果沒有可用版本</a:t>
             </a:r>
           </a:p>
         </p:txBody>
@@ -5195,37 +5222,28 @@
         </p:nvSpPr>
         <p:spPr>
           <a:xfrm>
-            <a:off x="640080" y="4910327"/>
-            <a:ext cx="10972800" cy="914400"/>
-          </a:xfrm>
-          <a:prstGeom prst="rect">
-            <a:avLst/>
-          </a:prstGeom>
-          <a:noFill/>
-        </p:spPr>
-        <p:txBody>
-          <a:bodyPr wrap="square">
-            <a:noAutofit/>
-          </a:bodyPr>
-          <a:lstStyle/>
-          <a:p>
-            <a:r>
-              <a:rPr sz="1400" b="1">
-                <a:solidFill>
-                  <a:srgbClr val="27500A"/>
-                </a:solidFill>
-                <a:latin typeface="Calibri"/>
-              </a:rPr>
-              <a:t>正解 B — </a:t>
-            </a:r>
-            <a:r>
-              <a:rPr sz="1400" b="0">
-                <a:solidFill>
-                  <a:srgbClr val="1E2024"/>
-                </a:solidFill>
-                <a:latin typeface="Calibri"/>
-              </a:rPr>
-              <a:t>ApiVersions 是協商的第一支 request（此時雙方還不知道彼此版本），若它也關閉連線，client 永遠問不到支援範圍，故回 v0+錯誤碼讓 client 重新協商；其他 API 在 RequestContext 解析失敗、SocketServer 關閉連線。</a:t>
+            <a:off x="640080" y="4873752"/>
+            <a:ext cx="10972800" cy="731520"/>
+          </a:xfrm>
+          <a:prstGeom prst="rect">
+            <a:avLst/>
+          </a:prstGeom>
+          <a:noFill/>
+        </p:spPr>
+        <p:txBody>
+          <a:bodyPr wrap="square">
+            <a:noAutofit/>
+          </a:bodyPr>
+          <a:lstStyle/>
+          <a:p>
+            <a:r>
+              <a:rPr sz="1500" b="0">
+                <a:solidFill>
+                  <a:srgbClr val="5F5E5A"/>
+                </a:solidFill>
+                <a:latin typeface="Calibri"/>
+              </a:rPr>
+              <a:t>取捨：0.8.0（2013）起九年保留每個版本——每個舊版本都是活的程式碼與測試面；4.0 用「斷 2018 年前的 client」換「刪九年的碼」，只有 major 版本邊界付得起。</a:t>
             </a:r>
           </a:p>
         </p:txBody>
@@ -5233,6 +5251,40 @@
       <p:sp>
         <p:nvSpPr>
           <p:cNvPr id="9" name="TextBox 8"/>
+          <p:cNvSpPr txBox="1"/>
+          <p:nvPr/>
+        </p:nvSpPr>
+        <p:spPr>
+          <a:xfrm>
+            <a:off x="640080" y="5733288"/>
+            <a:ext cx="10972800" cy="731520"/>
+          </a:xfrm>
+          <a:prstGeom prst="rect">
+            <a:avLst/>
+          </a:prstGeom>
+          <a:noFill/>
+        </p:spPr>
+        <p:txBody>
+          <a:bodyPr wrap="square">
+            <a:noAutofit/>
+          </a:bodyPr>
+          <a:lstStyle/>
+          <a:p>
+            <a:r>
+              <a:rPr sz="1500" b="0">
+                <a:solidFill>
+                  <a:srgbClr val="5F5E5A"/>
+                </a:solidFill>
+                <a:latin typeface="Calibri"/>
+              </a:rPr>
+              <a:t>銜接（非本場）：finalize / 升降當下的錯誤（INVALID_UPDATE_VERSION 等）屬「運行時的版本升降」那場，本場不展開。</a:t>
+            </a:r>
+          </a:p>
+        </p:txBody>
+      </p:sp>
+      <p:sp>
+        <p:nvSpPr>
+          <p:cNvPr id="10" name="TextBox 9"/>
           <p:cNvSpPr txBox="1"/>
           <p:nvPr/>
         </p:nvSpPr>
@@ -5267,9 +5319,9 @@
                   <a:srgbClr val="185FA5"/>
                 </a:solidFill>
                 <a:latin typeface="Courier New"/>
-                <a:hlinkClick r:id="rId2"/>
-              </a:rPr>
-              <a:t>RequestContext.java:112</a:t>
+                <a:hlinkClick r:id="rId3"/>
+              </a:rPr>
+              <a:t>upgrade.md:229</a:t>
             </a:r>
             <a:r>
               <a:rPr sz="1200" b="0">
@@ -5286,9 +5338,9 @@
                   <a:srgbClr val="185FA5"/>
                 </a:solidFill>
                 <a:latin typeface="Courier New"/>
-                <a:hlinkClick r:id="rId3"/>
-              </a:rPr>
-              <a:t>SocketServer.scala:781</a:t>
+                <a:hlinkClick r:id="rId4"/>
+              </a:rPr>
+              <a:t>FetchRequest.json validVersions</a:t>
             </a:r>
           </a:p>
         </p:txBody>
@@ -5340,6 +5392,667 @@
                 </a:solidFill>
                 <a:latin typeface="Calibri"/>
               </a:rPr>
+              <a:t>隨堂考 · 核心</a:t>
+            </a:r>
+          </a:p>
+        </p:txBody>
+      </p:sp>
+      <p:sp>
+        <p:nvSpPr>
+          <p:cNvPr id="3" name="TextBox 2"/>
+          <p:cNvSpPr txBox="1"/>
+          <p:nvPr/>
+        </p:nvSpPr>
+        <p:spPr>
+          <a:xfrm>
+            <a:off x="640080" y="841248"/>
+            <a:ext cx="10972800" cy="1188720"/>
+          </a:xfrm>
+          <a:prstGeom prst="rect">
+            <a:avLst/>
+          </a:prstGeom>
+          <a:noFill/>
+        </p:spPr>
+        <p:txBody>
+          <a:bodyPr wrap="square">
+            <a:noAutofit/>
+          </a:bodyPr>
+          <a:lstStyle/>
+          <a:p>
+            <a:r>
+              <a:rPr sz="2600" b="1">
+                <a:solidFill>
+                  <a:srgbClr val="1E2024"/>
+                </a:solidFill>
+                <a:latin typeface="Calibri"/>
+              </a:rPr>
+              <a:t>client 繞過協商、直接送出 broker 不支援的 API version，會怎樣？</a:t>
+            </a:r>
+          </a:p>
+        </p:txBody>
+      </p:sp>
+      <p:sp>
+        <p:nvSpPr>
+          <p:cNvPr id="4" name="TextBox 3"/>
+          <p:cNvSpPr txBox="1"/>
+          <p:nvPr/>
+        </p:nvSpPr>
+        <p:spPr>
+          <a:xfrm>
+            <a:off x="822960" y="2331720"/>
+            <a:ext cx="10515600" cy="493776"/>
+          </a:xfrm>
+          <a:prstGeom prst="rect">
+            <a:avLst/>
+          </a:prstGeom>
+          <a:noFill/>
+        </p:spPr>
+        <p:txBody>
+          <a:bodyPr wrap="square">
+            <a:noAutofit/>
+          </a:bodyPr>
+          <a:lstStyle/>
+          <a:p>
+            <a:r>
+              <a:rPr sz="1600" b="0">
+                <a:solidFill>
+                  <a:srgbClr val="1E2024"/>
+                </a:solidFill>
+                <a:latin typeface="Calibri"/>
+              </a:rPr>
+              <a:t>A.  </a:t>
+            </a:r>
+            <a:r>
+              <a:rPr sz="1600" b="0">
+                <a:solidFill>
+                  <a:srgbClr val="1E2024"/>
+                </a:solidFill>
+                <a:latin typeface="Calibri"/>
+              </a:rPr>
+              <a:t>一律回 UNSUPPORTED_VERSION 錯誤碼</a:t>
+            </a:r>
+          </a:p>
+        </p:txBody>
+      </p:sp>
+      <p:sp>
+        <p:nvSpPr>
+          <p:cNvPr id="5" name="TextBox 4"/>
+          <p:cNvSpPr txBox="1"/>
+          <p:nvPr/>
+        </p:nvSpPr>
+        <p:spPr>
+          <a:xfrm>
+            <a:off x="822960" y="2953512"/>
+            <a:ext cx="10515600" cy="493776"/>
+          </a:xfrm>
+          <a:prstGeom prst="rect">
+            <a:avLst/>
+          </a:prstGeom>
+          <a:noFill/>
+        </p:spPr>
+        <p:txBody>
+          <a:bodyPr wrap="square">
+            <a:noAutofit/>
+          </a:bodyPr>
+          <a:lstStyle/>
+          <a:p>
+            <a:r>
+              <a:rPr sz="1600" b="0">
+                <a:solidFill>
+                  <a:srgbClr val="1E2024"/>
+                </a:solidFill>
+                <a:latin typeface="Calibri"/>
+              </a:rPr>
+              <a:t>B.  </a:t>
+            </a:r>
+            <a:r>
+              <a:rPr sz="1600" b="0">
+                <a:solidFill>
+                  <a:srgbClr val="1E2024"/>
+                </a:solidFill>
+                <a:latin typeface="Calibri"/>
+              </a:rPr>
+              <a:t>只有 ApiVersions 例外回錯誤碼+支援範圍；其他 API 直接關閉連線</a:t>
+            </a:r>
+          </a:p>
+        </p:txBody>
+      </p:sp>
+      <p:sp>
+        <p:nvSpPr>
+          <p:cNvPr id="6" name="TextBox 5"/>
+          <p:cNvSpPr txBox="1"/>
+          <p:nvPr/>
+        </p:nvSpPr>
+        <p:spPr>
+          <a:xfrm>
+            <a:off x="822960" y="3575304"/>
+            <a:ext cx="10515600" cy="493776"/>
+          </a:xfrm>
+          <a:prstGeom prst="rect">
+            <a:avLst/>
+          </a:prstGeom>
+          <a:noFill/>
+        </p:spPr>
+        <p:txBody>
+          <a:bodyPr wrap="square">
+            <a:noAutofit/>
+          </a:bodyPr>
+          <a:lstStyle/>
+          <a:p>
+            <a:r>
+              <a:rPr sz="1600" b="0">
+                <a:solidFill>
+                  <a:srgbClr val="1E2024"/>
+                </a:solidFill>
+                <a:latin typeface="Calibri"/>
+              </a:rPr>
+              <a:t>C.  </a:t>
+            </a:r>
+            <a:r>
+              <a:rPr sz="1600" b="0">
+                <a:solidFill>
+                  <a:srgbClr val="1E2024"/>
+                </a:solidFill>
+                <a:latin typeface="Calibri"/>
+              </a:rPr>
+              <a:t>broker 自動降版處理</a:t>
+            </a:r>
+          </a:p>
+        </p:txBody>
+      </p:sp>
+      <p:sp>
+        <p:nvSpPr>
+          <p:cNvPr id="7" name="TextBox 6"/>
+          <p:cNvSpPr txBox="1"/>
+          <p:nvPr/>
+        </p:nvSpPr>
+        <p:spPr>
+          <a:xfrm>
+            <a:off x="822960" y="4197096"/>
+            <a:ext cx="10515600" cy="493776"/>
+          </a:xfrm>
+          <a:prstGeom prst="rect">
+            <a:avLst/>
+          </a:prstGeom>
+          <a:noFill/>
+        </p:spPr>
+        <p:txBody>
+          <a:bodyPr wrap="square">
+            <a:noAutofit/>
+          </a:bodyPr>
+          <a:lstStyle/>
+          <a:p>
+            <a:r>
+              <a:rPr sz="1600" b="0">
+                <a:solidFill>
+                  <a:srgbClr val="1E2024"/>
+                </a:solidFill>
+                <a:latin typeface="Calibri"/>
+              </a:rPr>
+              <a:t>D.  </a:t>
+            </a:r>
+            <a:r>
+              <a:rPr sz="1600" b="0">
+                <a:solidFill>
+                  <a:srgbClr val="1E2024"/>
+                </a:solidFill>
+                <a:latin typeface="Calibri"/>
+              </a:rPr>
+              <a:t>忽略版本照常處理</a:t>
+            </a:r>
+          </a:p>
+        </p:txBody>
+      </p:sp>
+      <p:sp>
+        <p:nvSpPr>
+          <p:cNvPr id="8" name="TextBox 7"/>
+          <p:cNvSpPr txBox="1"/>
+          <p:nvPr/>
+        </p:nvSpPr>
+        <p:spPr>
+          <a:xfrm>
+            <a:off x="640080" y="4910327"/>
+            <a:ext cx="10972800" cy="914400"/>
+          </a:xfrm>
+          <a:prstGeom prst="rect">
+            <a:avLst/>
+          </a:prstGeom>
+          <a:noFill/>
+        </p:spPr>
+        <p:txBody>
+          <a:bodyPr wrap="square">
+            <a:noAutofit/>
+          </a:bodyPr>
+          <a:lstStyle/>
+          <a:p>
+            <a:r>
+              <a:rPr sz="1400" b="0">
+                <a:solidFill>
+                  <a:srgbClr val="8A8A8A"/>
+                </a:solidFill>
+                <a:latin typeface="Calibri"/>
+              </a:rPr>
+              <a:t>想一想 —— 下一頁公布答案</a:t>
+            </a:r>
+          </a:p>
+        </p:txBody>
+      </p:sp>
+    </p:spTree>
+  </p:cSld>
+  <p:clrMapOvr>
+    <a:masterClrMapping/>
+  </p:clrMapOvr>
+</p:sld>
+</file>
+
+<file path=ppt/slides/slide17.xml><?xml version="1.0" encoding="utf-8"?>
+<p:sld xmlns:a="http://schemas.openxmlformats.org/drawingml/2006/main" xmlns:p="http://schemas.openxmlformats.org/presentationml/2006/main" xmlns:r="http://schemas.openxmlformats.org/officeDocument/2006/relationships">
+  <p:cSld>
+    <p:spTree>
+      <p:nvGrpSpPr>
+        <p:cNvPr id="1" name=""/>
+        <p:cNvGrpSpPr/>
+        <p:nvPr/>
+      </p:nvGrpSpPr>
+      <p:grpSpPr/>
+      <p:sp>
+        <p:nvSpPr>
+          <p:cNvPr id="2" name="TextBox 1"/>
+          <p:cNvSpPr txBox="1"/>
+          <p:nvPr/>
+        </p:nvSpPr>
+        <p:spPr>
+          <a:xfrm>
+            <a:off x="640080" y="457200"/>
+            <a:ext cx="10972800" cy="365760"/>
+          </a:xfrm>
+          <a:prstGeom prst="rect">
+            <a:avLst/>
+          </a:prstGeom>
+          <a:noFill/>
+        </p:spPr>
+        <p:txBody>
+          <a:bodyPr wrap="square">
+            <a:noAutofit/>
+          </a:bodyPr>
+          <a:lstStyle/>
+          <a:p>
+            <a:r>
+              <a:rPr sz="1300" b="1">
+                <a:solidFill>
+                  <a:srgbClr val="185FA5"/>
+                </a:solidFill>
+                <a:latin typeface="Calibri"/>
+              </a:rPr>
+              <a:t>隨堂考 · 核心　（正解）</a:t>
+            </a:r>
+          </a:p>
+        </p:txBody>
+      </p:sp>
+      <p:sp>
+        <p:nvSpPr>
+          <p:cNvPr id="3" name="TextBox 2"/>
+          <p:cNvSpPr txBox="1"/>
+          <p:nvPr/>
+        </p:nvSpPr>
+        <p:spPr>
+          <a:xfrm>
+            <a:off x="640080" y="841248"/>
+            <a:ext cx="10972800" cy="1188720"/>
+          </a:xfrm>
+          <a:prstGeom prst="rect">
+            <a:avLst/>
+          </a:prstGeom>
+          <a:noFill/>
+        </p:spPr>
+        <p:txBody>
+          <a:bodyPr wrap="square">
+            <a:noAutofit/>
+          </a:bodyPr>
+          <a:lstStyle/>
+          <a:p>
+            <a:r>
+              <a:rPr sz="2600" b="1">
+                <a:solidFill>
+                  <a:srgbClr val="1E2024"/>
+                </a:solidFill>
+                <a:latin typeface="Calibri"/>
+              </a:rPr>
+              <a:t>client 繞過協商、直接送出 broker 不支援的 API version，會怎樣？</a:t>
+            </a:r>
+          </a:p>
+        </p:txBody>
+      </p:sp>
+      <p:sp>
+        <p:nvSpPr>
+          <p:cNvPr id="4" name="TextBox 3"/>
+          <p:cNvSpPr txBox="1"/>
+          <p:nvPr/>
+        </p:nvSpPr>
+        <p:spPr>
+          <a:xfrm>
+            <a:off x="822960" y="2331720"/>
+            <a:ext cx="10515600" cy="493776"/>
+          </a:xfrm>
+          <a:prstGeom prst="rect">
+            <a:avLst/>
+          </a:prstGeom>
+          <a:noFill/>
+        </p:spPr>
+        <p:txBody>
+          <a:bodyPr wrap="square">
+            <a:noAutofit/>
+          </a:bodyPr>
+          <a:lstStyle/>
+          <a:p>
+            <a:r>
+              <a:rPr sz="1600" b="0">
+                <a:solidFill>
+                  <a:srgbClr val="1E2024"/>
+                </a:solidFill>
+                <a:latin typeface="Calibri"/>
+              </a:rPr>
+              <a:t>A.  </a:t>
+            </a:r>
+            <a:r>
+              <a:rPr sz="1600" b="0">
+                <a:solidFill>
+                  <a:srgbClr val="1E2024"/>
+                </a:solidFill>
+                <a:latin typeface="Calibri"/>
+              </a:rPr>
+              <a:t>一律回 UNSUPPORTED_VERSION 錯誤碼</a:t>
+            </a:r>
+          </a:p>
+        </p:txBody>
+      </p:sp>
+      <p:sp>
+        <p:nvSpPr>
+          <p:cNvPr id="5" name="TextBox 4"/>
+          <p:cNvSpPr txBox="1"/>
+          <p:nvPr/>
+        </p:nvSpPr>
+        <p:spPr>
+          <a:xfrm>
+            <a:off x="822960" y="2953512"/>
+            <a:ext cx="10515600" cy="493776"/>
+          </a:xfrm>
+          <a:prstGeom prst="rect">
+            <a:avLst/>
+          </a:prstGeom>
+          <a:solidFill>
+            <a:srgbClr val="E9F3DE"/>
+          </a:solidFill>
+          <a:ln>
+            <a:noFill/>
+          </a:ln>
+        </p:spPr>
+        <p:txBody>
+          <a:bodyPr wrap="square" lIns="128016" tIns="54864">
+            <a:noAutofit/>
+          </a:bodyPr>
+          <a:lstStyle/>
+          <a:p>
+            <a:r>
+              <a:rPr sz="1600" b="1">
+                <a:solidFill>
+                  <a:srgbClr val="27500A"/>
+                </a:solidFill>
+                <a:latin typeface="Calibri"/>
+              </a:rPr>
+              <a:t>B.  </a:t>
+            </a:r>
+            <a:r>
+              <a:rPr sz="1600" b="1">
+                <a:solidFill>
+                  <a:srgbClr val="27500A"/>
+                </a:solidFill>
+                <a:latin typeface="Calibri"/>
+              </a:rPr>
+              <a:t>只有 ApiVersions 例外回錯誤碼+支援範圍；其他 API 直接關閉連線   ✓</a:t>
+            </a:r>
+          </a:p>
+        </p:txBody>
+      </p:sp>
+      <p:sp>
+        <p:nvSpPr>
+          <p:cNvPr id="6" name="TextBox 5"/>
+          <p:cNvSpPr txBox="1"/>
+          <p:nvPr/>
+        </p:nvSpPr>
+        <p:spPr>
+          <a:xfrm>
+            <a:off x="822960" y="3575304"/>
+            <a:ext cx="10515600" cy="493776"/>
+          </a:xfrm>
+          <a:prstGeom prst="rect">
+            <a:avLst/>
+          </a:prstGeom>
+          <a:noFill/>
+        </p:spPr>
+        <p:txBody>
+          <a:bodyPr wrap="square">
+            <a:noAutofit/>
+          </a:bodyPr>
+          <a:lstStyle/>
+          <a:p>
+            <a:r>
+              <a:rPr sz="1600" b="0">
+                <a:solidFill>
+                  <a:srgbClr val="1E2024"/>
+                </a:solidFill>
+                <a:latin typeface="Calibri"/>
+              </a:rPr>
+              <a:t>C.  </a:t>
+            </a:r>
+            <a:r>
+              <a:rPr sz="1600" b="0">
+                <a:solidFill>
+                  <a:srgbClr val="1E2024"/>
+                </a:solidFill>
+                <a:latin typeface="Calibri"/>
+              </a:rPr>
+              <a:t>broker 自動降版處理</a:t>
+            </a:r>
+          </a:p>
+        </p:txBody>
+      </p:sp>
+      <p:sp>
+        <p:nvSpPr>
+          <p:cNvPr id="7" name="TextBox 6"/>
+          <p:cNvSpPr txBox="1"/>
+          <p:nvPr/>
+        </p:nvSpPr>
+        <p:spPr>
+          <a:xfrm>
+            <a:off x="822960" y="4197096"/>
+            <a:ext cx="10515600" cy="493776"/>
+          </a:xfrm>
+          <a:prstGeom prst="rect">
+            <a:avLst/>
+          </a:prstGeom>
+          <a:noFill/>
+        </p:spPr>
+        <p:txBody>
+          <a:bodyPr wrap="square">
+            <a:noAutofit/>
+          </a:bodyPr>
+          <a:lstStyle/>
+          <a:p>
+            <a:r>
+              <a:rPr sz="1600" b="0">
+                <a:solidFill>
+                  <a:srgbClr val="1E2024"/>
+                </a:solidFill>
+                <a:latin typeface="Calibri"/>
+              </a:rPr>
+              <a:t>D.  </a:t>
+            </a:r>
+            <a:r>
+              <a:rPr sz="1600" b="0">
+                <a:solidFill>
+                  <a:srgbClr val="1E2024"/>
+                </a:solidFill>
+                <a:latin typeface="Calibri"/>
+              </a:rPr>
+              <a:t>忽略版本照常處理</a:t>
+            </a:r>
+          </a:p>
+        </p:txBody>
+      </p:sp>
+      <p:sp>
+        <p:nvSpPr>
+          <p:cNvPr id="8" name="TextBox 7"/>
+          <p:cNvSpPr txBox="1"/>
+          <p:nvPr/>
+        </p:nvSpPr>
+        <p:spPr>
+          <a:xfrm>
+            <a:off x="640080" y="4910327"/>
+            <a:ext cx="10972800" cy="914400"/>
+          </a:xfrm>
+          <a:prstGeom prst="rect">
+            <a:avLst/>
+          </a:prstGeom>
+          <a:noFill/>
+        </p:spPr>
+        <p:txBody>
+          <a:bodyPr wrap="square">
+            <a:noAutofit/>
+          </a:bodyPr>
+          <a:lstStyle/>
+          <a:p>
+            <a:r>
+              <a:rPr sz="1400" b="1">
+                <a:solidFill>
+                  <a:srgbClr val="27500A"/>
+                </a:solidFill>
+                <a:latin typeface="Calibri"/>
+              </a:rPr>
+              <a:t>正解 B — </a:t>
+            </a:r>
+            <a:r>
+              <a:rPr sz="1400" b="0">
+                <a:solidFill>
+                  <a:srgbClr val="1E2024"/>
+                </a:solidFill>
+                <a:latin typeface="Calibri"/>
+              </a:rPr>
+              <a:t>ApiVersions 是協商的第一支 request（此時雙方還不知道彼此版本），若它也關閉連線，client 永遠問不到支援範圍，故回 v0+錯誤碼讓 client 重新協商；其他 API 在 RequestContext 解析失敗、SocketServer 關閉連線。</a:t>
+            </a:r>
+          </a:p>
+        </p:txBody>
+      </p:sp>
+      <p:sp>
+        <p:nvSpPr>
+          <p:cNvPr id="9" name="TextBox 8"/>
+          <p:cNvSpPr txBox="1"/>
+          <p:nvPr/>
+        </p:nvSpPr>
+        <p:spPr>
+          <a:xfrm>
+            <a:off x="640080" y="6400800"/>
+            <a:ext cx="10972800" cy="384048"/>
+          </a:xfrm>
+          <a:prstGeom prst="rect">
+            <a:avLst/>
+          </a:prstGeom>
+          <a:noFill/>
+        </p:spPr>
+        <p:txBody>
+          <a:bodyPr wrap="square">
+            <a:noAutofit/>
+          </a:bodyPr>
+          <a:lstStyle/>
+          <a:p>
+            <a:r>
+              <a:rPr sz="1200" b="1">
+                <a:solidFill>
+                  <a:srgbClr val="8A8A8A"/>
+                </a:solidFill>
+                <a:latin typeface="Calibri"/>
+              </a:rPr>
+              <a:t>REF   </a:t>
+            </a:r>
+            <a:r>
+              <a:rPr sz="1200" b="0" u="sng">
+                <a:solidFill>
+                  <a:srgbClr val="185FA5"/>
+                </a:solidFill>
+                <a:latin typeface="Courier New"/>
+                <a:hlinkClick r:id="rId2"/>
+              </a:rPr>
+              <a:t>RequestContext.java:112</a:t>
+            </a:r>
+            <a:r>
+              <a:rPr sz="1200" b="0">
+                <a:solidFill>
+                  <a:srgbClr val="8A8A8A"/>
+                </a:solidFill>
+                <a:latin typeface="Calibri"/>
+              </a:rPr>
+              <a:t>   ·   </a:t>
+            </a:r>
+            <a:r>
+              <a:rPr sz="1200" b="0" u="sng">
+                <a:solidFill>
+                  <a:srgbClr val="185FA5"/>
+                </a:solidFill>
+                <a:latin typeface="Courier New"/>
+                <a:hlinkClick r:id="rId3"/>
+              </a:rPr>
+              <a:t>SocketServer.scala:781</a:t>
+            </a:r>
+          </a:p>
+        </p:txBody>
+      </p:sp>
+    </p:spTree>
+  </p:cSld>
+  <p:clrMapOvr>
+    <a:masterClrMapping/>
+  </p:clrMapOvr>
+</p:sld>
+</file>
+
+<file path=ppt/slides/slide18.xml><?xml version="1.0" encoding="utf-8"?>
+<p:sld xmlns:a="http://schemas.openxmlformats.org/drawingml/2006/main" xmlns:p="http://schemas.openxmlformats.org/presentationml/2006/main" xmlns:r="http://schemas.openxmlformats.org/officeDocument/2006/relationships">
+  <p:cSld>
+    <p:spTree>
+      <p:nvGrpSpPr>
+        <p:cNvPr id="1" name=""/>
+        <p:cNvGrpSpPr/>
+        <p:nvPr/>
+      </p:nvGrpSpPr>
+      <p:grpSpPr/>
+      <p:sp>
+        <p:nvSpPr>
+          <p:cNvPr id="2" name="TextBox 1"/>
+          <p:cNvSpPr txBox="1"/>
+          <p:nvPr/>
+        </p:nvSpPr>
+        <p:spPr>
+          <a:xfrm>
+            <a:off x="640080" y="457200"/>
+            <a:ext cx="10972800" cy="365760"/>
+          </a:xfrm>
+          <a:prstGeom prst="rect">
+            <a:avLst/>
+          </a:prstGeom>
+          <a:noFill/>
+        </p:spPr>
+        <p:txBody>
+          <a:bodyPr wrap="square">
+            <a:noAutofit/>
+          </a:bodyPr>
+          <a:lstStyle/>
+          <a:p>
+            <a:r>
+              <a:rPr sz="1300" b="1">
+                <a:solidFill>
+                  <a:srgbClr val="185FA5"/>
+                </a:solidFill>
+                <a:latin typeface="Calibri"/>
+              </a:rPr>
               <a:t>Recap</a:t>
             </a:r>
           </a:p>
@@ -5484,7 +6197,7 @@
                 </a:solidFill>
                 <a:latin typeface="Calibri"/>
               </a:rPr>
-              <a:t>Part 1：不能「一個版本打天下」（client 長壽、broker 滾動升級）；三條線多數靠協商，只有 partition replication 由 finalized MV 決定</a:t>
+              <a:t>Part 1：不能「一個版本打天下」（client 長壽、broker 滾動升級）；多數路徑靠協商，唯一不協商、由 finalized MV 釘版的是 replica fetch（其餘 broker↔broker 仍協商）</a:t>
             </a:r>
           </a:p>
         </p:txBody>
@@ -6551,7 +7264,7 @@
                 </a:solidFill>
                 <a:latin typeface="Calibri"/>
               </a:rPr>
-              <a:t>三種連線，分成兩類</a:t>
+              <a:t>版本怎麼定：協商，還是由 MV 事先釘版</a:t>
             </a:r>
           </a:p>
         </p:txBody>
@@ -6589,7 +7302,7 @@
         <p:spPr>
           <a:xfrm>
             <a:off x="1078992" y="2148840"/>
-            <a:ext cx="10515600" cy="1188720"/>
+            <a:ext cx="10515600" cy="841248"/>
           </a:xfrm>
           <a:prstGeom prst="rect">
             <a:avLst/>
@@ -6609,7 +7322,7 @@
                 </a:solidFill>
                 <a:latin typeface="Calibri"/>
               </a:rPr>
-              <a:t>會協商的兩條：client ↔ broker、broker ↔ controller——連線後先送 ApiVersionsRequest 查對方每支 API 的版本區間（KIP-35）</a:t>
+              <a:t>機制一 · 協商（KIP-35）：連線後送 ApiVersionsRequest、取交集最高——多數路徑都是</a:t>
             </a:r>
           </a:p>
         </p:txBody>
@@ -6630,7 +7343,7 @@
         </p:blipFill>
         <p:spPr>
           <a:xfrm>
-            <a:off x="658368" y="3511296"/>
+            <a:off x="658368" y="3163824"/>
             <a:ext cx="274320" cy="274320"/>
           </a:xfrm>
           <a:prstGeom prst="rect">
@@ -6646,8 +7359,8 @@
         </p:nvSpPr>
         <p:spPr>
           <a:xfrm>
-            <a:off x="1078992" y="3483864"/>
-            <a:ext cx="10515600" cy="1188720"/>
+            <a:off x="1078992" y="3136392"/>
+            <a:ext cx="10515600" cy="841248"/>
           </a:xfrm>
           <a:prstGeom prst="rect">
             <a:avLst/>
@@ -6667,7 +7380,7 @@
                 </a:solidFill>
                 <a:latin typeface="Calibri"/>
               </a:rPr>
-              <a:t>不協商的一條：broker ↔ broker 的 partition replication——連 ApiVersionsRequest 都不送，版本由 MV 事先決定（下一張）</a:t>
+              <a:t>機制二 · 由叢集 MV 事先釘版（KIP-584）：只有 replica fetch（partition replication）這條不協商</a:t>
             </a:r>
           </a:p>
         </p:txBody>
@@ -6680,8 +7393,8 @@
         </p:nvSpPr>
         <p:spPr>
           <a:xfrm>
-            <a:off x="640080" y="4818888"/>
-            <a:ext cx="10972800" cy="1097280"/>
+            <a:off x="640080" y="4123944"/>
+            <a:ext cx="10972800" cy="1371600"/>
           </a:xfrm>
           <a:prstGeom prst="rect">
             <a:avLst/>
@@ -6708,7 +7421,7 @@
                 </a:solidFill>
                 <a:latin typeface="Calibri"/>
               </a:rPr>
-              <a:t>client ─▶ broker        讀寫資料、查 metadata…</a:t>
+              <a:t>協商定版   client↔broker · broker↔controller · Raft · broker↔broker txn markers</a:t>
             </a:r>
           </a:p>
           <a:p>
@@ -6719,18 +7432,7 @@
                 </a:solidFill>
                 <a:latin typeface="Calibri"/>
               </a:rPr>
-              <a:t>broker ─▶ controller    註冊、心跳、轉發 admin…</a:t>
-            </a:r>
-          </a:p>
-          <a:p>
-            <a:r>
-              <a:rPr sz="1350" b="0">
-                <a:solidFill>
-                  <a:srgbClr val="2C2C2A"/>
-                </a:solidFill>
-                <a:latin typeface="Calibri"/>
-              </a:rPr>
-              <a:t>broker ◀▶ broker        partition replication</a:t>
+              <a:t>MV 釘版    replica fetch（follower → leader partition replication）—— 唯一一條</a:t>
             </a:r>
           </a:p>
         </p:txBody>
@@ -6738,6 +7440,40 @@
       <p:sp>
         <p:nvSpPr>
           <p:cNvPr id="9" name="TextBox 8"/>
+          <p:cNvSpPr txBox="1"/>
+          <p:nvPr/>
+        </p:nvSpPr>
+        <p:spPr>
+          <a:xfrm>
+            <a:off x="640080" y="5696712"/>
+            <a:ext cx="10972800" cy="731520"/>
+          </a:xfrm>
+          <a:prstGeom prst="rect">
+            <a:avLst/>
+          </a:prstGeom>
+          <a:noFill/>
+        </p:spPr>
+        <p:txBody>
+          <a:bodyPr wrap="square">
+            <a:noAutofit/>
+          </a:bodyPr>
+          <a:lstStyle/>
+          <a:p>
+            <a:r>
+              <a:rPr sz="1500" b="0">
+                <a:solidFill>
+                  <a:srgbClr val="5F5E5A"/>
+                </a:solidFill>
+                <a:latin typeface="Calibri"/>
+              </a:rPr>
+              <a:t>所以「broker↔broker 不協商」並不精確：只有 replica fetch 這條；同是 broker↔broker 的 transaction markers 仍協商。</a:t>
+            </a:r>
+          </a:p>
+        </p:txBody>
+      </p:sp>
+      <p:sp>
+        <p:nvSpPr>
+          <p:cNvPr id="10" name="TextBox 9"/>
           <p:cNvSpPr txBox="1"/>
           <p:nvPr/>
         </p:nvSpPr>
@@ -6790,10 +7526,10 @@
                 <a:solidFill>
                   <a:srgbClr val="185FA5"/>
                 </a:solidFill>
-                <a:latin typeface="Courier New"/>
+                <a:latin typeface="Calibri"/>
                 <a:hlinkClick r:id="rId5"/>
               </a:rPr>
-              <a:t>latestUsableVersion</a:t>
+              <a:t>KIP-584</a:t>
             </a:r>
             <a:r>
               <a:rPr sz="1200" b="0">
@@ -6812,7 +7548,26 @@
                 <a:latin typeface="Courier New"/>
                 <a:hlinkClick r:id="rId6"/>
               </a:rPr>
-              <a:t>fetchRequestVersion</a:t>
+              <a:t>replica fetch=false</a:t>
+            </a:r>
+            <a:r>
+              <a:rPr sz="1200" b="0">
+                <a:solidFill>
+                  <a:srgbClr val="8A8A8A"/>
+                </a:solidFill>
+                <a:latin typeface="Calibri"/>
+              </a:rPr>
+              <a:t>   ·   </a:t>
+            </a:r>
+            <a:r>
+              <a:rPr sz="1200" b="0" u="sng">
+                <a:solidFill>
+                  <a:srgbClr val="185FA5"/>
+                </a:solidFill>
+                <a:latin typeface="Courier New"/>
+                <a:hlinkClick r:id="rId7"/>
+              </a:rPr>
+              <a:t>txn markers=true</a:t>
             </a:r>
           </a:p>
         </p:txBody>
@@ -6912,7 +7667,7 @@
         <p:spPr>
           <a:xfrm>
             <a:off x="640080" y="2148840"/>
-            <a:ext cx="10972800" cy="1097280"/>
+            <a:ext cx="10972800" cy="1371600"/>
           </a:xfrm>
           <a:prstGeom prst="rect">
             <a:avLst/>
@@ -6939,7 +7694,7 @@
                 </a:solidFill>
                 <a:latin typeface="Calibri"/>
               </a:rPr>
-              <a:t>client ↔ broker              協商，取交集最高</a:t>
+              <a:t>協商           取交集最高（client↔broker、broker↔controller、Raft、txn markers）</a:t>
             </a:r>
           </a:p>
           <a:p>
@@ -6950,18 +7705,7 @@
                 </a:solidFill>
                 <a:latin typeface="Calibri"/>
               </a:rPr>
-              <a:t>broker ↔ controller          也協商（broker 當 client）</a:t>
-            </a:r>
-          </a:p>
-          <a:p>
-            <a:r>
-              <a:rPr sz="1350" b="0">
-                <a:solidFill>
-                  <a:srgbClr val="2C2C2A"/>
-                </a:solidFill>
-                <a:latin typeface="Calibri"/>
-              </a:rPr>
-              <a:t>broker ↔ broker replication  不協商——由 finalized MV 決定</a:t>
+              <a:t>replica fetch  不協商——Fetch/ListOffsets 由 finalized MV、OffsetsForLeaderEpoch 寫死 v4</a:t>
             </a:r>
           </a:p>
         </p:txBody>
@@ -6982,7 +7726,7 @@
         </p:blipFill>
         <p:spPr>
           <a:xfrm>
-            <a:off x="658368" y="3474720"/>
+            <a:off x="658368" y="3749040"/>
             <a:ext cx="274320" cy="274320"/>
           </a:xfrm>
           <a:prstGeom prst="rect">
@@ -6998,7 +7742,7 @@
         </p:nvSpPr>
         <p:spPr>
           <a:xfrm>
-            <a:off x="1078992" y="3447288"/>
+            <a:off x="1078992" y="3721608"/>
             <a:ext cx="10515600" cy="1188720"/>
           </a:xfrm>
           <a:prstGeom prst="rect">
@@ -7019,7 +7763,7 @@
                 </a:solidFill>
                 <a:latin typeface="Calibri"/>
               </a:rPr>
-              <a:t>replication 連 ApiVersionsRequest 都不送（discoverBrokerVersions=false）：版本已由 finalized MV 決定，直接照該版本送</a:t>
+              <a:t>replica fetch 連 ApiVersionsRequest 都不送（discoverBrokerVersions=false）：這條路上一整組 RPC 版本都不看對端能力，改由叢集事先決定</a:t>
             </a:r>
           </a:p>
         </p:txBody>
@@ -7032,7 +7776,7 @@
         </p:nvSpPr>
         <p:spPr>
           <a:xfrm>
-            <a:off x="640080" y="4782312"/>
+            <a:off x="640080" y="5056632"/>
             <a:ext cx="10972800" cy="1188720"/>
           </a:xfrm>
           <a:prstGeom prst="rect">
@@ -7058,7 +7802,7 @@
                 </a:solidFill>
                 <a:latin typeface="Calibri"/>
               </a:rPr>
-              <a:t>為什麼 replication 例外？它要求所有 follower↔leader 講同一版，才交給 finalized MV 集中決定；成本是升級變兩階段——先全叢集滾完 binary（都具備新版能力），管理員再手動 finalize MV 才切新版（協商連線則會自動挑上去）</a:t>
+              <a:t>為什麼 replica fetch 交給 MV？它要求 follower↔leader 全講同一版、沒法各連線各挑。代價『升級變兩階段』其實是 MV 治理的通性（凡版本由 MV 決定者皆然），非它專屬；協商連線則自動挑上去</a:t>
             </a:r>
           </a:p>
         </p:txBody>
@@ -7066,40 +7810,6 @@
       <p:sp>
         <p:nvSpPr>
           <p:cNvPr id="8" name="TextBox 7"/>
-          <p:cNvSpPr txBox="1"/>
-          <p:nvPr/>
-        </p:nvSpPr>
-        <p:spPr>
-          <a:xfrm>
-            <a:off x="640080" y="6153912"/>
-            <a:ext cx="10972800" cy="438912"/>
-          </a:xfrm>
-          <a:prstGeom prst="rect">
-            <a:avLst/>
-          </a:prstGeom>
-          <a:noFill/>
-        </p:spPr>
-        <p:txBody>
-          <a:bodyPr wrap="square">
-            <a:noAutofit/>
-          </a:bodyPr>
-          <a:lstStyle/>
-          <a:p>
-            <a:r>
-              <a:rPr sz="1500" b="0">
-                <a:solidFill>
-                  <a:srgbClr val="5F5E5A"/>
-                </a:solidFill>
-                <a:latin typeface="Calibri"/>
-              </a:rPr>
-              <a:t>機制上，決定權在組出 request 的程式碼宣告的允許版本範圍；ListOffsets 等更細差異見 blog 附錄。</a:t>
-            </a:r>
-          </a:p>
-        </p:txBody>
-      </p:sp>
-      <p:sp>
-        <p:nvSpPr>
-          <p:cNvPr id="9" name="TextBox 8"/>
           <p:cNvSpPr txBox="1"/>
           <p:nvPr/>
         </p:nvSpPr>
@@ -7173,6 +7883,25 @@
                 </a:solidFill>
                 <a:latin typeface="Courier New"/>
                 <a:hlinkClick r:id="rId5"/>
+              </a:rPr>
+              <a:t>forFollower 寫死 v4</a:t>
+            </a:r>
+            <a:r>
+              <a:rPr sz="1200" b="0">
+                <a:solidFill>
+                  <a:srgbClr val="8A8A8A"/>
+                </a:solidFill>
+                <a:latin typeface="Calibri"/>
+              </a:rPr>
+              <a:t>   ·   </a:t>
+            </a:r>
+            <a:r>
+              <a:rPr sz="1200" b="0" u="sng">
+                <a:solidFill>
+                  <a:srgbClr val="185FA5"/>
+                </a:solidFill>
+                <a:latin typeface="Courier New"/>
+                <a:hlinkClick r:id="rId6"/>
               </a:rPr>
               <a:t>RemoteLeaderEndPoint.scala:215</a:t>
             </a:r>
@@ -7524,7 +8253,7 @@
         <p:spPr>
           <a:xfrm>
             <a:off x="1078992" y="2148840"/>
-            <a:ext cx="10515600" cy="841248"/>
+            <a:ext cx="10515600" cy="1188720"/>
           </a:xfrm>
           <a:prstGeom prst="rect">
             <a:avLst/>
@@ -7544,7 +8273,7 @@
                 </a:solidFill>
                 <a:latin typeface="Calibri"/>
               </a:rPr>
-              <a:t>Kafka：per-API 協商＋MV 治理 replication。買到單支 API 獨立演進、複製層可線上滾動升級；代價＝協定面積最大、相容性測試按 API 數放大</a:t>
+              <a:t>Kafka：per-API 協商，replica fetch 交給 MV 釘版。買到單支 API 獨立演進、複製層可線上滾動升級；代價＝協定面積最大、相容性測試按 API × 版本數放大</a:t>
             </a:r>
           </a:p>
         </p:txBody>
@@ -7565,7 +8294,7 @@
         </p:blipFill>
         <p:spPr>
           <a:xfrm>
-            <a:off x="658368" y="3163824"/>
+            <a:off x="658368" y="3511296"/>
             <a:ext cx="274320" cy="274320"/>
           </a:xfrm>
           <a:prstGeom prst="rect">
@@ -7581,7 +8310,7 @@
         </p:nvSpPr>
         <p:spPr>
           <a:xfrm>
-            <a:off x="1078992" y="3136392"/>
+            <a:off x="1078992" y="3483864"/>
             <a:ext cx="10515600" cy="841248"/>
           </a:xfrm>
           <a:prstGeom prst="rect">
@@ -7623,7 +8352,7 @@
         </p:blipFill>
         <p:spPr>
           <a:xfrm>
-            <a:off x="658368" y="4151376"/>
+            <a:off x="658368" y="4498848"/>
             <a:ext cx="274320" cy="274320"/>
           </a:xfrm>
           <a:prstGeom prst="rect">
@@ -7639,7 +8368,7 @@
         </p:nvSpPr>
         <p:spPr>
           <a:xfrm>
-            <a:off x="1078992" y="4123944"/>
+            <a:off x="1078992" y="4471416"/>
             <a:ext cx="10515600" cy="841248"/>
           </a:xfrm>
           <a:prstGeom prst="rect">
@@ -7673,7 +8402,7 @@
         </p:nvSpPr>
         <p:spPr>
           <a:xfrm>
-            <a:off x="640080" y="5111496"/>
+            <a:off x="640080" y="5458968"/>
             <a:ext cx="10972800" cy="877824"/>
           </a:xfrm>
           <a:prstGeom prst="rect">
@@ -7958,7 +8687,7 @@
                 </a:solidFill>
                 <a:latin typeface="Calibri"/>
               </a:rPr>
-              <a:t>相容性測試矩陣兩層、都隨版本數長：build 時全 308 版 round-trip 序列化；系統測試再起真實叢集 × 23 個 broker 版本（2.1→4.3）互測新 client 對舊 broker</a:t>
+              <a:t>broker handler 還得逐版分岔：按協商版本讀/填欄位、回應用『同一版』序列化、老版缺的欄位給預設，連語意差異（如 topic-id 取代 topic-name）都要 if (version≥N)</a:t>
             </a:r>
           </a:p>
         </p:txBody>
@@ -7992,7 +8721,7 @@
                 </a:solidFill>
                 <a:latin typeface="Calibri"/>
               </a:rPr>
-              <a:t>broker handler 也逐版分岔：按協商版本讀/填欄位、回應用『同一版』序列化、老版缺的欄位給預設，連語意差異（如 topic-id 取代 topic-name）都要 if (version≥N)。</a:t>
+              <a:t>這還只是「生成碼＋handler」；相容性測試是另一條隱形帳單（下兩張細看）——build 全版本 round-trip＋release 養一堆歷史版本。</a:t>
             </a:r>
           </a:p>
         </p:txBody>
@@ -8094,7 +8823,7 @@
                 <a:latin typeface="Courier New"/>
                 <a:hlinkClick r:id="rId4"/>
               </a:rPr>
-              <a:t>RequestContext</a:t>
+              <a:t>buildResponseSend</a:t>
             </a:r>
             <a:r>
               <a:rPr sz="1200" b="0">
@@ -8113,7 +8842,26 @@
                 <a:latin typeface="Courier New"/>
                 <a:hlinkClick r:id="rId5"/>
               </a:rPr>
-              <a:t>validVersions</a:t>
+              <a:t>fetch version()&gt;=13</a:t>
+            </a:r>
+            <a:r>
+              <a:rPr sz="1200" b="0">
+                <a:solidFill>
+                  <a:srgbClr val="8A8A8A"/>
+                </a:solidFill>
+                <a:latin typeface="Calibri"/>
+              </a:rPr>
+              <a:t>   ·   </a:t>
+            </a:r>
+            <a:r>
+              <a:rPr sz="1200" b="0" u="sng">
+                <a:solidFill>
+                  <a:srgbClr val="185FA5"/>
+                </a:solidFill>
+                <a:latin typeface="Courier New"/>
+                <a:hlinkClick r:id="rId6"/>
+              </a:rPr>
+              <a:t>MaxBytes v3+ default</a:t>
             </a:r>
           </a:p>
         </p:txBody>

--- a/study/version-control/kafka-version-negotiation.pptx
+++ b/study/version-control/kafka-version-negotiation.pptx
@@ -6177,7 +6177,7 @@
         <p:spPr>
           <a:xfrm>
             <a:off x="1078992" y="3447288"/>
-            <a:ext cx="10515600" cy="1188720"/>
+            <a:ext cx="10515600" cy="1536192"/>
           </a:xfrm>
           <a:prstGeom prst="rect">
             <a:avLst/>
@@ -6197,7 +6197,7 @@
                 </a:solidFill>
                 <a:latin typeface="Calibri"/>
               </a:rPr>
-              <a:t>Part 1：不能「一個版本打天下」（client 長壽、broker 滾動升級）；多數路徑靠協商，唯一不協商、由 finalized MV 釘版的是 replica fetch（其餘 broker↔broker 仍協商）</a:t>
+              <a:t>Part 1：不能「一個版本打天下」（client 長壽、broker 滾動升級）；多數路徑靠協商，唯一不協商的「連線」是 replica fetch——上面 Fetch/ListOffsets 等由 MV 釘版（其餘 broker↔broker 仍協商）</a:t>
             </a:r>
           </a:p>
         </p:txBody>
@@ -6218,7 +6218,7 @@
         </p:blipFill>
         <p:spPr>
           <a:xfrm>
-            <a:off x="658368" y="4809744"/>
+            <a:off x="658368" y="5157216"/>
             <a:ext cx="274320" cy="274320"/>
           </a:xfrm>
           <a:prstGeom prst="rect">
@@ -6234,7 +6234,7 @@
         </p:nvSpPr>
         <p:spPr>
           <a:xfrm>
-            <a:off x="1078992" y="4782312"/>
+            <a:off x="1078992" y="5129783"/>
             <a:ext cx="10515600" cy="841248"/>
           </a:xfrm>
           <a:prstGeom prst="rect">
@@ -6268,7 +6268,7 @@
         </p:nvSpPr>
         <p:spPr>
           <a:xfrm>
-            <a:off x="640080" y="5769864"/>
+            <a:off x="640080" y="6117336"/>
             <a:ext cx="10972800" cy="877824"/>
           </a:xfrm>
           <a:prstGeom prst="rect">
@@ -7432,7 +7432,7 @@
                 </a:solidFill>
                 <a:latin typeface="Calibri"/>
               </a:rPr>
-              <a:t>MV 釘版    replica fetch（follower → leader partition replication）—— 唯一一條</a:t>
+              <a:t>MV 釘版    replica fetch（follower → leader partition replication）—— 唯一不協商的連線</a:t>
             </a:r>
           </a:p>
         </p:txBody>
@@ -7446,7 +7446,7 @@
         <p:spPr>
           <a:xfrm>
             <a:off x="640080" y="5696712"/>
-            <a:ext cx="10972800" cy="731520"/>
+            <a:ext cx="10972800" cy="1024127"/>
           </a:xfrm>
           <a:prstGeom prst="rect">
             <a:avLst/>
@@ -7466,7 +7466,7 @@
                 </a:solidFill>
                 <a:latin typeface="Calibri"/>
               </a:rPr>
-              <a:t>所以「broker↔broker 不協商」並不精確：只有 replica fetch 這條；同是 broker↔broker 的 transaction markers 仍協商。</a:t>
+              <a:t>精確講：唯一不協商的是 replica fetch 這一「連線」——上面 Fetch/ListOffsets/OffsetsForLeaderEpoch 三支 RPC 都不協商；同是 broker↔broker 的 transaction markers 仍協商。</a:t>
             </a:r>
           </a:p>
         </p:txBody>

--- a/study/version-control/kafka-version-negotiation.pptx
+++ b/study/version-control/kafka-version-negotiation.pptx
@@ -4076,7 +4076,7 @@
                 </a:solidFill>
                 <a:latin typeface="Calibri"/>
               </a:rPr>
-              <a:t>replica fetch（broker↔broker）的 Fetch 版本怎麼決定？</a:t>
+              <a:t>follower→leader 複製流程裡，Fetch 的版本怎麼決定？</a:t>
             </a:r>
           </a:p>
         </p:txBody>
@@ -4368,7 +4368,7 @@
                 </a:solidFill>
                 <a:latin typeface="Calibri"/>
               </a:rPr>
-              <a:t>replica fetch（broker↔broker）的 Fetch 版本怎麼決定？</a:t>
+              <a:t>follower→leader 複製流程裡，Fetch 的版本怎麼決定？</a:t>
             </a:r>
           </a:p>
         </p:txBody>
@@ -6197,7 +6197,7 @@
                 </a:solidFill>
                 <a:latin typeface="Calibri"/>
               </a:rPr>
-              <a:t>Part 1：不能「一個版本打天下」（client 長壽、broker 滾動升級）；多數路徑靠協商，唯一不協商的「連線」是 replica fetch——上面 Fetch/ListOffsets 等由 MV 釘版（其餘 broker↔broker 仍協商）</a:t>
+              <a:t>Part 1：不能「一個版本打天下」（client 長壽、broker 滾動升級）；多數路徑靠協商，唯一不協商的是 follower→leader 複製流程——上面 Fetch/ListOffsets 等由 MV 釘版（其餘 broker↔broker 仍協商）</a:t>
             </a:r>
           </a:p>
         </p:txBody>
@@ -7380,7 +7380,7 @@
                 </a:solidFill>
                 <a:latin typeface="Calibri"/>
               </a:rPr>
-              <a:t>機制二 · 由叢集 MV 事先釘版（KIP-584）：只有 replica fetch（partition replication）這條不協商</a:t>
+              <a:t>機制二 · 由叢集 MV 事先釘版（KIP-584）：只有 follower→leader 複製流程這條不協商</a:t>
             </a:r>
           </a:p>
         </p:txBody>
@@ -7394,7 +7394,7 @@
         <p:spPr>
           <a:xfrm>
             <a:off x="640080" y="4123944"/>
-            <a:ext cx="10972800" cy="1371600"/>
+            <a:ext cx="10972800" cy="1097280"/>
           </a:xfrm>
           <a:prstGeom prst="rect">
             <a:avLst/>
@@ -7432,7 +7432,7 @@
                 </a:solidFill>
                 <a:latin typeface="Calibri"/>
               </a:rPr>
-              <a:t>MV 釘版    replica fetch（follower → leader partition replication）—— 唯一不協商的連線</a:t>
+              <a:t>MV 釘版    follower→leader 複製流程（replica fetcher）—— 唯一不協商的路徑</a:t>
             </a:r>
           </a:p>
         </p:txBody>
@@ -7445,7 +7445,7 @@
         </p:nvSpPr>
         <p:spPr>
           <a:xfrm>
-            <a:off x="640080" y="5696712"/>
+            <a:off x="640080" y="5422392"/>
             <a:ext cx="10972800" cy="1024127"/>
           </a:xfrm>
           <a:prstGeom prst="rect">
@@ -7466,7 +7466,7 @@
                 </a:solidFill>
                 <a:latin typeface="Calibri"/>
               </a:rPr>
-              <a:t>精確講：唯一不協商的是 replica fetch 這一「連線」——上面 Fetch/ListOffsets/OffsetsForLeaderEpoch 三支 RPC 都不協商；同是 broker↔broker 的 transaction markers 仍協商。</a:t>
+              <a:t>唯一不協商的是 follower→leader 複製流程——發三支 RPC：OffsetsForLeaderEpoch 對齊、ListOffsets 定位、Fetch 抓資料，版本都由 MV／寫死；同是 broker↔broker 的 transaction markers 仍協商。</a:t>
             </a:r>
           </a:p>
         </p:txBody>
@@ -7694,7 +7694,7 @@
                 </a:solidFill>
                 <a:latin typeface="Calibri"/>
               </a:rPr>
-              <a:t>協商           取交集最高（client↔broker、broker↔controller、Raft、txn markers）</a:t>
+              <a:t>協商        取交集最高（client↔broker、broker↔controller、Raft、txn markers）</a:t>
             </a:r>
           </a:p>
           <a:p>
@@ -7705,7 +7705,7 @@
                 </a:solidFill>
                 <a:latin typeface="Calibri"/>
               </a:rPr>
-              <a:t>replica fetch  不協商——Fetch/ListOffsets 由 finalized MV、OffsetsForLeaderEpoch 寫死 v4</a:t>
+              <a:t>複製流程    不協商——Fetch/ListOffsets 由 finalized MV、OffsetsForLeaderEpoch 寫死 v4</a:t>
             </a:r>
           </a:p>
         </p:txBody>
@@ -7763,7 +7763,7 @@
                 </a:solidFill>
                 <a:latin typeface="Calibri"/>
               </a:rPr>
-              <a:t>replica fetch 連 ApiVersionsRequest 都不送（discoverBrokerVersions=false）：這條路上一整組 RPC 版本都不看對端能力，改由叢集事先決定</a:t>
+              <a:t>follower→leader 複製流程連 ApiVersionsRequest 都不送（discoverBrokerVersions=false）：這條路上一整組 RPC 版本都不看對端能力，改由叢集事先決定</a:t>
             </a:r>
           </a:p>
         </p:txBody>
@@ -7777,7 +7777,7 @@
         <p:spPr>
           <a:xfrm>
             <a:off x="640080" y="5056632"/>
-            <a:ext cx="10972800" cy="1188720"/>
+            <a:ext cx="10972800" cy="877824"/>
           </a:xfrm>
           <a:prstGeom prst="rect">
             <a:avLst/>
@@ -7802,7 +7802,7 @@
                 </a:solidFill>
                 <a:latin typeface="Calibri"/>
               </a:rPr>
-              <a:t>為什麼 replica fetch 交給 MV？它要求 follower↔leader 全講同一版、沒法各連線各挑。代價『升級變兩階段』其實是 MV 治理的通性（凡版本由 MV 決定者皆然），非它專屬；協商連線則自動挑上去</a:t>
+              <a:t>為什麼複製流程交給 MV？它要求 follower↔leader 全講同一版、沒法各連線各挑。代價『升級變兩階段』其實是 MV 治理的通性（凡版本由 MV 決定者皆然），非它專屬；協商連線則自動挑上去</a:t>
             </a:r>
           </a:p>
         </p:txBody>

--- a/study/version-control/kafka-version-negotiation.pptx
+++ b/study/version-control/kafka-version-negotiation.pptx
@@ -4076,7 +4076,7 @@
                 </a:solidFill>
                 <a:latin typeface="Calibri"/>
               </a:rPr>
-              <a:t>follower→leader 複製流程裡，Fetch 的版本怎麼決定？</a:t>
+              <a:t>partition replication（follower→leader）裡，Fetch 的版本怎麼決定？</a:t>
             </a:r>
           </a:p>
         </p:txBody>
@@ -4368,7 +4368,7 @@
                 </a:solidFill>
                 <a:latin typeface="Calibri"/>
               </a:rPr>
-              <a:t>follower→leader 複製流程裡，Fetch 的版本怎麼決定？</a:t>
+              <a:t>partition replication（follower→leader）裡，Fetch 的版本怎麼決定？</a:t>
             </a:r>
           </a:p>
         </p:txBody>
@@ -6197,7 +6197,7 @@
                 </a:solidFill>
                 <a:latin typeface="Calibri"/>
               </a:rPr>
-              <a:t>Part 1：不能「一個版本打天下」（client 長壽、broker 滾動升級）；多數路徑靠協商，唯一不協商的是 follower→leader 複製流程——上面 Fetch/ListOffsets 等由 MV 釘版（其餘 broker↔broker 仍協商）</a:t>
+              <a:t>Part 1：不能「一個版本打天下」（client 長壽、broker 滾動升級）；多數路徑靠協商，唯一不協商的是 partition replication（follower→leader）——上面 Fetch/ListOffsets 等由 MV 釘版（其餘 broker↔broker 仍協商）</a:t>
             </a:r>
           </a:p>
         </p:txBody>
@@ -7380,7 +7380,7 @@
                 </a:solidFill>
                 <a:latin typeface="Calibri"/>
               </a:rPr>
-              <a:t>機制二 · 由叢集 MV 事先釘版（KIP-584）：只有 follower→leader 複製流程這條不協商</a:t>
+              <a:t>機制二 · 由叢集 MV 事先釘版（KIP-584）：只有 partition replication（follower→leader）這條不協商</a:t>
             </a:r>
           </a:p>
         </p:txBody>
@@ -7394,7 +7394,7 @@
         <p:spPr>
           <a:xfrm>
             <a:off x="640080" y="4123944"/>
-            <a:ext cx="10972800" cy="1097280"/>
+            <a:ext cx="10972800" cy="1371600"/>
           </a:xfrm>
           <a:prstGeom prst="rect">
             <a:avLst/>
@@ -7432,7 +7432,7 @@
                 </a:solidFill>
                 <a:latin typeface="Calibri"/>
               </a:rPr>
-              <a:t>MV 釘版    follower→leader 複製流程（replica fetcher）—— 唯一不協商的路徑</a:t>
+              <a:t>MV 釘版    partition replication（follower→leader，replica fetcher）—— 唯一不協商</a:t>
             </a:r>
           </a:p>
         </p:txBody>
@@ -7445,7 +7445,7 @@
         </p:nvSpPr>
         <p:spPr>
           <a:xfrm>
-            <a:off x="640080" y="5422392"/>
+            <a:off x="640080" y="5696712"/>
             <a:ext cx="10972800" cy="1024127"/>
           </a:xfrm>
           <a:prstGeom prst="rect">
@@ -7466,7 +7466,7 @@
                 </a:solidFill>
                 <a:latin typeface="Calibri"/>
               </a:rPr>
-              <a:t>唯一不協商的是 follower→leader 複製流程——發三支 RPC：OffsetsForLeaderEpoch 對齊、ListOffsets 定位、Fetch 抓資料，版本都由 MV／寫死；同是 broker↔broker 的 transaction markers 仍協商。</a:t>
+              <a:t>唯一不協商的是 partition replication（follower→leader）——這條流程發三支 RPC：OffsetsForLeaderEpoch 對齊、ListOffsets 定位、Fetch 抓資料，版本都由 MV／寫死；同是 broker↔broker 的 transaction markers 仍協商。</a:t>
             </a:r>
           </a:p>
         </p:txBody>
@@ -7694,7 +7694,7 @@
                 </a:solidFill>
                 <a:latin typeface="Calibri"/>
               </a:rPr>
-              <a:t>協商        取交集最高（client↔broker、broker↔controller、Raft、txn markers）</a:t>
+              <a:t>協商                    取交集最高（client↔broker、broker↔controller、Raft、txn markers）</a:t>
             </a:r>
           </a:p>
           <a:p>
@@ -7705,7 +7705,7 @@
                 </a:solidFill>
                 <a:latin typeface="Calibri"/>
               </a:rPr>
-              <a:t>複製流程    不協商——Fetch/ListOffsets 由 finalized MV、OffsetsForLeaderEpoch 寫死 v4</a:t>
+              <a:t>partition replication   不協商——Fetch/ListOffsets 由 finalized MV、OffsetsForLeaderEpoch 寫死 v4</a:t>
             </a:r>
           </a:p>
         </p:txBody>
@@ -7763,7 +7763,7 @@
                 </a:solidFill>
                 <a:latin typeface="Calibri"/>
               </a:rPr>
-              <a:t>follower→leader 複製流程連 ApiVersionsRequest 都不送（discoverBrokerVersions=false）：這條路上一整組 RPC 版本都不看對端能力，改由叢集事先決定</a:t>
+              <a:t>partition replication（follower→leader）連 ApiVersionsRequest 都不送（discoverBrokerVersions=false）：這條路上一整組 RPC 版本都不看對端能力，改由叢集事先決定</a:t>
             </a:r>
           </a:p>
         </p:txBody>
@@ -7777,7 +7777,7 @@
         <p:spPr>
           <a:xfrm>
             <a:off x="640080" y="5056632"/>
-            <a:ext cx="10972800" cy="877824"/>
+            <a:ext cx="10972800" cy="1188720"/>
           </a:xfrm>
           <a:prstGeom prst="rect">
             <a:avLst/>
@@ -7802,7 +7802,7 @@
                 </a:solidFill>
                 <a:latin typeface="Calibri"/>
               </a:rPr>
-              <a:t>為什麼複製流程交給 MV？它要求 follower↔leader 全講同一版、沒法各連線各挑。代價『升級變兩階段』其實是 MV 治理的通性（凡版本由 MV 決定者皆然），非它專屬；協商連線則自動挑上去</a:t>
+              <a:t>為什麼 partition replication 交給 MV？它要求 follower↔leader 全講同一版、沒法各連線各挑。代價『升級變兩階段』其實是 MV 治理的通性（凡版本由 MV 決定者皆然），非它專屬；協商連線則自動挑上去</a:t>
             </a:r>
           </a:p>
         </p:txBody>

--- a/study/version-control/kafka-version-negotiation.pptx
+++ b/study/version-control/kafka-version-negotiation.pptx
@@ -3365,66 +3365,14 @@
                 </a:solidFill>
                 <a:latin typeface="Calibri"/>
               </a:rPr>
-              <a:t>相容性測試（一）：每次 build 全版本 round-trip</a:t>
-            </a:r>
-          </a:p>
-        </p:txBody>
-      </p:sp>
-      <p:sp>
-        <p:nvSpPr>
-          <p:cNvPr id="4" name="TextBox 3"/>
-          <p:cNvSpPr txBox="1"/>
-          <p:nvPr/>
-        </p:nvSpPr>
-        <p:spPr>
-          <a:xfrm>
-            <a:off x="640080" y="2148840"/>
-            <a:ext cx="10972800" cy="1097280"/>
-          </a:xfrm>
-          <a:prstGeom prst="rect">
-            <a:avLst/>
-          </a:prstGeom>
-          <a:solidFill>
-            <a:srgbClr val="F3F1EC"/>
-          </a:solidFill>
-          <a:ln w="6350">
-            <a:solidFill>
-              <a:srgbClr val="E3E0D8"/>
-            </a:solidFill>
-          </a:ln>
-        </p:spPr>
-        <p:txBody>
-          <a:bodyPr wrap="square" lIns="146304" tIns="91440" bIns="91440">
-            <a:noAutofit/>
-          </a:bodyPr>
-          <a:lstStyle/>
-          <a:p>
-            <a:r>
-              <a:rPr sz="1350" b="0">
-                <a:solidFill>
-                  <a:srgbClr val="2C2C2A"/>
-                </a:solidFill>
-                <a:latin typeface="Calibri"/>
-              </a:rPr>
-              <a:t>RequestResponseTest.testSerialization：ApiKeys × allVersions 全積</a:t>
-            </a:r>
-          </a:p>
-          <a:p>
-            <a:r>
-              <a:rPr sz="1350" b="0">
-                <a:solidFill>
-                  <a:srgbClr val="2C2C2A"/>
-                </a:solidFill>
-                <a:latin typeface="Calibri"/>
-              </a:rPr>
-              <a:t>94 支 RPC、308 個現役請求版本 → build → 序列化 → 反序列化 → 比對，逐一跑</a:t>
+              <a:t>「相容」到底要保證哪些事？</a:t>
             </a:r>
           </a:p>
         </p:txBody>
       </p:sp>
       <p:pic>
         <p:nvPicPr>
-          <p:cNvPr id="5" name="Picture 4" descr="arrows-split.png"/>
+          <p:cNvPr id="4" name="Picture 3" descr="arrows-split.png"/>
           <p:cNvPicPr>
             <a:picLocks noChangeAspect="1"/>
           </p:cNvPicPr>
@@ -3438,7 +3386,7 @@
         </p:blipFill>
         <p:spPr>
           <a:xfrm>
-            <a:off x="658368" y="3474720"/>
+            <a:off x="658368" y="2176272"/>
             <a:ext cx="274320" cy="274320"/>
           </a:xfrm>
           <a:prstGeom prst="rect">
@@ -3448,14 +3396,14 @@
       </p:pic>
       <p:sp>
         <p:nvSpPr>
-          <p:cNvPr id="6" name="TextBox 5"/>
-          <p:cNvSpPr txBox="1"/>
-          <p:nvPr/>
-        </p:nvSpPr>
-        <p:spPr>
-          <a:xfrm>
-            <a:off x="1078992" y="3447288"/>
-            <a:ext cx="10515600" cy="841248"/>
+          <p:cNvPr id="5" name="TextBox 4"/>
+          <p:cNvSpPr txBox="1"/>
+          <p:nvPr/>
+        </p:nvSpPr>
+        <p:spPr>
+          <a:xfrm>
+            <a:off x="1078992" y="2148840"/>
+            <a:ext cx="10515600" cy="493776"/>
           </a:xfrm>
           <a:prstGeom prst="rect">
             <a:avLst/>
@@ -3475,14 +3423,14 @@
                 </a:solidFill>
                 <a:latin typeface="Calibri"/>
               </a:rPr>
-              <a:t>靠 ApiKeys.values() × allVersions() 迴圈，新增版本自動涵蓋——省了手改，代價是每次 build 執行量只增不減</a:t>
+              <a:t>① 格式自洽：每個宣稱支援的 wire 版本，自己序列化都要來回讀寫無誤</a:t>
             </a:r>
           </a:p>
         </p:txBody>
       </p:sp>
       <p:pic>
         <p:nvPicPr>
-          <p:cNvPr id="7" name="Picture 6" descr="ban.png"/>
+          <p:cNvPr id="6" name="Picture 5" descr="point.png"/>
           <p:cNvPicPr>
             <a:picLocks noChangeAspect="1"/>
           </p:cNvPicPr>
@@ -3496,7 +3444,7 @@
         </p:blipFill>
         <p:spPr>
           <a:xfrm>
-            <a:off x="658368" y="4462272"/>
+            <a:off x="658368" y="2816352"/>
             <a:ext cx="274320" cy="274320"/>
           </a:xfrm>
           <a:prstGeom prst="rect">
@@ -3506,13 +3454,13 @@
       </p:pic>
       <p:sp>
         <p:nvSpPr>
-          <p:cNvPr id="8" name="TextBox 7"/>
-          <p:cNvSpPr txBox="1"/>
-          <p:nvPr/>
-        </p:nvSpPr>
-        <p:spPr>
-          <a:xfrm>
-            <a:off x="1078992" y="4434840"/>
+          <p:cNvPr id="7" name="TextBox 6"/>
+          <p:cNvSpPr txBox="1"/>
+          <p:nvPr/>
+        </p:nvSpPr>
+        <p:spPr>
+          <a:xfrm>
+            <a:off x="1078992" y="2788920"/>
             <a:ext cx="10515600" cy="841248"/>
           </a:xfrm>
           <a:prstGeom prst="rect">
@@ -3533,11 +3481,35 @@
                 </a:solidFill>
                 <a:latin typeface="Calibri"/>
               </a:rPr>
-              <a:t>想跳過某個歷史版本？得進 toSkip 白名單特案處理——目前只 4 支 RPC 拿得到豁免</a:t>
-            </a:r>
-          </a:p>
-        </p:txBody>
-      </p:sp>
+              <a:t>② 新 client → 舊 broker：client 肯協商降版、不假設對方有新功能</a:t>
+            </a:r>
+          </a:p>
+        </p:txBody>
+      </p:sp>
+      <p:pic>
+        <p:nvPicPr>
+          <p:cNvPr id="8" name="Picture 7" descr="point.png"/>
+          <p:cNvPicPr>
+            <a:picLocks noChangeAspect="1"/>
+          </p:cNvPicPr>
+          <p:nvPr/>
+        </p:nvPicPr>
+        <p:blipFill>
+          <a:blip r:embed="rId3"/>
+          <a:stretch>
+            <a:fillRect/>
+          </a:stretch>
+        </p:blipFill>
+        <p:spPr>
+          <a:xfrm>
+            <a:off x="658368" y="3803904"/>
+            <a:ext cx="274320" cy="274320"/>
+          </a:xfrm>
+          <a:prstGeom prst="rect">
+            <a:avLst/>
+          </a:prstGeom>
+        </p:spPr>
+      </p:pic>
       <p:sp>
         <p:nvSpPr>
           <p:cNvPr id="9" name="TextBox 8"/>
@@ -3546,8 +3518,100 @@
         </p:nvSpPr>
         <p:spPr>
           <a:xfrm>
-            <a:off x="640080" y="5422392"/>
-            <a:ext cx="10972800" cy="877824"/>
+            <a:off x="1078992" y="3776472"/>
+            <a:ext cx="10515600" cy="841248"/>
+          </a:xfrm>
+          <a:prstGeom prst="rect">
+            <a:avLst/>
+          </a:prstGeom>
+          <a:noFill/>
+        </p:spPr>
+        <p:txBody>
+          <a:bodyPr wrap="square">
+            <a:noAutofit/>
+          </a:bodyPr>
+          <a:lstStyle/>
+          <a:p>
+            <a:r>
+              <a:rPr sz="1650" b="0">
+                <a:solidFill>
+                  <a:srgbClr val="1E2024"/>
+                </a:solidFill>
+                <a:latin typeface="Calibri"/>
+              </a:rPr>
+              <a:t>③ 舊 client → 新 broker：broker 保留舊 wire 版本、繼續服務</a:t>
+            </a:r>
+          </a:p>
+        </p:txBody>
+      </p:sp>
+      <p:pic>
+        <p:nvPicPr>
+          <p:cNvPr id="10" name="Picture 9" descr="point.png"/>
+          <p:cNvPicPr>
+            <a:picLocks noChangeAspect="1"/>
+          </p:cNvPicPr>
+          <p:nvPr/>
+        </p:nvPicPr>
+        <p:blipFill>
+          <a:blip r:embed="rId3"/>
+          <a:stretch>
+            <a:fillRect/>
+          </a:stretch>
+        </p:blipFill>
+        <p:spPr>
+          <a:xfrm>
+            <a:off x="658368" y="4791456"/>
+            <a:ext cx="274320" cy="274320"/>
+          </a:xfrm>
+          <a:prstGeom prst="rect">
+            <a:avLst/>
+          </a:prstGeom>
+        </p:spPr>
+      </p:pic>
+      <p:sp>
+        <p:nvSpPr>
+          <p:cNvPr id="11" name="TextBox 10"/>
+          <p:cNvSpPr txBox="1"/>
+          <p:nvPr/>
+        </p:nvSpPr>
+        <p:spPr>
+          <a:xfrm>
+            <a:off x="1078992" y="4764024"/>
+            <a:ext cx="10515600" cy="841248"/>
+          </a:xfrm>
+          <a:prstGeom prst="rect">
+            <a:avLst/>
+          </a:prstGeom>
+          <a:noFill/>
+        </p:spPr>
+        <p:txBody>
+          <a:bodyPr wrap="square">
+            <a:noAutofit/>
+          </a:bodyPr>
+          <a:lstStyle/>
+          <a:p>
+            <a:r>
+              <a:rPr sz="1650" b="0">
+                <a:solidFill>
+                  <a:srgbClr val="1E2024"/>
+                </a:solidFill>
+                <a:latin typeface="Calibri"/>
+              </a:rPr>
+              <a:t>④ 滾動升級混版：新舊 broker 並存，inter-broker（MV 釘版）＋對 client 都不掉資料</a:t>
+            </a:r>
+          </a:p>
+        </p:txBody>
+      </p:sp>
+      <p:sp>
+        <p:nvSpPr>
+          <p:cNvPr id="12" name="TextBox 11"/>
+          <p:cNvSpPr txBox="1"/>
+          <p:nvPr/>
+        </p:nvSpPr>
+        <p:spPr>
+          <a:xfrm>
+            <a:off x="640080" y="5751576"/>
+            <a:ext cx="10972800" cy="566928"/>
           </a:xfrm>
           <a:prstGeom prst="rect">
             <a:avLst/>
@@ -3572,14 +3636,14 @@
                 </a:solidFill>
                 <a:latin typeface="Calibri"/>
               </a:rPr>
-              <a:t>KIP-896 直言維護舊版本「both in code complexity and the testing matrix」——測試面正是其一</a:t>
-            </a:r>
-          </a:p>
-        </p:txBody>
-      </p:sp>
-      <p:sp>
-        <p:nvSpPr>
-          <p:cNvPr id="10" name="TextBox 9"/>
+              <a:t>這四條就是「相容承諾」的全部內容——每一條都得有測試長期盯著</a:t>
+            </a:r>
+          </a:p>
+        </p:txBody>
+      </p:sp>
+      <p:sp>
+        <p:nvSpPr>
+          <p:cNvPr id="13" name="TextBox 12"/>
           <p:cNvSpPr txBox="1"/>
           <p:nvPr/>
         </p:nvSpPr>
@@ -3616,7 +3680,7 @@
                 <a:latin typeface="Courier New"/>
                 <a:hlinkClick r:id="rId4"/>
               </a:rPr>
-              <a:t>testSerialization</a:t>
+              <a:t>①格式自洽</a:t>
             </a:r>
             <a:r>
               <a:rPr sz="1200" b="0">
@@ -3635,7 +3699,7 @@
                 <a:latin typeface="Courier New"/>
                 <a:hlinkClick r:id="rId5"/>
               </a:rPr>
-              <a:t>round-trip</a:t>
+              <a:t>②新→舊</a:t>
             </a:r>
             <a:r>
               <a:rPr sz="1200" b="0">
@@ -3651,10 +3715,29 @@
                 <a:solidFill>
                   <a:srgbClr val="185FA5"/>
                 </a:solidFill>
-                <a:latin typeface="Calibri"/>
+                <a:latin typeface="Courier New"/>
                 <a:hlinkClick r:id="rId6"/>
               </a:rPr>
-              <a:t>KIP-896</a:t>
+              <a:t>③舊→新</a:t>
+            </a:r>
+            <a:r>
+              <a:rPr sz="1200" b="0">
+                <a:solidFill>
+                  <a:srgbClr val="8A8A8A"/>
+                </a:solidFill>
+                <a:latin typeface="Calibri"/>
+              </a:rPr>
+              <a:t>   ·   </a:t>
+            </a:r>
+            <a:r>
+              <a:rPr sz="1200" b="0" u="sng">
+                <a:solidFill>
+                  <a:srgbClr val="185FA5"/>
+                </a:solidFill>
+                <a:latin typeface="Courier New"/>
+                <a:hlinkClick r:id="rId7"/>
+              </a:rPr>
+              <a:t>④滾動升級</a:t>
             </a:r>
           </a:p>
         </p:txBody>
@@ -3740,66 +3823,14 @@
                 </a:solidFill>
                 <a:latin typeface="Calibri"/>
               </a:rPr>
-              <a:t>相容性測試（二）：把過去七年的 Kafka 一起養著</a:t>
-            </a:r>
-          </a:p>
-        </p:txBody>
-      </p:sp>
-      <p:sp>
-        <p:nvSpPr>
-          <p:cNvPr id="4" name="TextBox 3"/>
-          <p:cNvSpPr txBox="1"/>
-          <p:nvPr/>
-        </p:nvSpPr>
-        <p:spPr>
-          <a:xfrm>
-            <a:off x="640080" y="2148840"/>
-            <a:ext cx="10972800" cy="822959"/>
-          </a:xfrm>
-          <a:prstGeom prst="rect">
-            <a:avLst/>
-          </a:prstGeom>
-          <a:solidFill>
-            <a:srgbClr val="F3F1EC"/>
-          </a:solidFill>
-          <a:ln w="6350">
-            <a:solidFill>
-              <a:srgbClr val="E3E0D8"/>
-            </a:solidFill>
-          </a:ln>
-        </p:spPr>
-        <p:txBody>
-          <a:bodyPr wrap="square" lIns="146304" tIns="91440" bIns="91440">
-            <a:noAutofit/>
-          </a:bodyPr>
-          <a:lstStyle/>
-          <a:p>
-            <a:r>
-              <a:rPr sz="1350" b="0">
-                <a:solidFill>
-                  <a:srgbClr val="2C2C2A"/>
-                </a:solidFill>
-                <a:latin typeface="Calibri"/>
-              </a:rPr>
-              <a:t>系統測試映像 curl 下載 22 個歷史版本二進位（2.1.1 → 4.3.0）</a:t>
-            </a:r>
-          </a:p>
-          <a:p>
-            <a:r>
-              <a:rPr sz="1350" b="0">
-                <a:solidFill>
-                  <a:srgbClr val="2C2C2A"/>
-                </a:solidFill>
-                <a:latin typeface="Calibri"/>
-              </a:rPr>
-              <a:t>client 相容測試：每個歷史 broker 各跑一遍（22 + dev = 23 param × 2 支測試）</a:t>
+              <a:t>守住相容，為什麼越來越貴</a:t>
             </a:r>
           </a:p>
         </p:txBody>
       </p:sp>
       <p:pic>
         <p:nvPicPr>
-          <p:cNvPr id="5" name="Picture 4" descr="arrows-split.png"/>
+          <p:cNvPr id="4" name="Picture 3" descr="arrows-split.png"/>
           <p:cNvPicPr>
             <a:picLocks noChangeAspect="1"/>
           </p:cNvPicPr>
@@ -3813,7 +3844,7 @@
         </p:blipFill>
         <p:spPr>
           <a:xfrm>
-            <a:off x="658368" y="3200399"/>
+            <a:off x="658368" y="2176272"/>
             <a:ext cx="274320" cy="274320"/>
           </a:xfrm>
           <a:prstGeom prst="rect">
@@ -3823,14 +3854,14 @@
       </p:pic>
       <p:sp>
         <p:nvSpPr>
-          <p:cNvPr id="6" name="TextBox 5"/>
-          <p:cNvSpPr txBox="1"/>
-          <p:nvPr/>
-        </p:nvSpPr>
-        <p:spPr>
-          <a:xfrm>
-            <a:off x="1078992" y="3172968"/>
-            <a:ext cx="10515600" cy="1188720"/>
+          <p:cNvPr id="5" name="TextBox 4"/>
+          <p:cNvSpPr txBox="1"/>
+          <p:nvPr/>
+        </p:nvSpPr>
+        <p:spPr>
+          <a:xfrm>
+            <a:off x="1078992" y="2148840"/>
+            <a:ext cx="10515600" cy="493776"/>
           </a:xfrm>
           <a:prstGeom prst="rect">
             <a:avLst/>
@@ -3850,11 +3881,35 @@
                 </a:solidFill>
                 <a:latin typeface="Calibri"/>
               </a:rPr>
-              <a:t>升級/降級是 from×to 矩陣：4 個 @matrix × 11 個 from_version；混版交易再 22 組；MetadataVersion 另有 25 個現役 MV × 7 個 enum 測試</a:t>
-            </a:r>
-          </a:p>
-        </p:txBody>
-      </p:sp>
+              <a:t>① 是「API × 版本」、②③④ 是「版本 × 版本」——測試面是乘積，不是加總</a:t>
+            </a:r>
+          </a:p>
+        </p:txBody>
+      </p:sp>
+      <p:pic>
+        <p:nvPicPr>
+          <p:cNvPr id="6" name="Picture 5" descr="point.png"/>
+          <p:cNvPicPr>
+            <a:picLocks noChangeAspect="1"/>
+          </p:cNvPicPr>
+          <p:nvPr/>
+        </p:nvPicPr>
+        <p:blipFill>
+          <a:blip r:embed="rId3"/>
+          <a:stretch>
+            <a:fillRect/>
+          </a:stretch>
+        </p:blipFill>
+        <p:spPr>
+          <a:xfrm>
+            <a:off x="658368" y="2816352"/>
+            <a:ext cx="274320" cy="274320"/>
+          </a:xfrm>
+          <a:prstGeom prst="rect">
+            <a:avLst/>
+          </a:prstGeom>
+        </p:spPr>
+      </p:pic>
       <p:sp>
         <p:nvSpPr>
           <p:cNvPr id="7" name="TextBox 6"/>
@@ -3863,8 +3918,42 @@
         </p:nvSpPr>
         <p:spPr>
           <a:xfrm>
-            <a:off x="640080" y="4507992"/>
-            <a:ext cx="10972800" cy="877824"/>
+            <a:off x="1078992" y="2788920"/>
+            <a:ext cx="10515600" cy="841248"/>
+          </a:xfrm>
+          <a:prstGeom prst="rect">
+            <a:avLst/>
+          </a:prstGeom>
+          <a:noFill/>
+        </p:spPr>
+        <p:txBody>
+          <a:bodyPr wrap="square">
+            <a:noAutofit/>
+          </a:bodyPr>
+          <a:lstStyle/>
+          <a:p>
+            <a:r>
+              <a:rPr sz="1650" b="0">
+                <a:solidFill>
+                  <a:srgbClr val="1E2024"/>
+                </a:solidFill>
+                <a:latin typeface="Calibri"/>
+              </a:rPr>
+              <a:t>有些自動擴張（新版本免補測試、但每次 build 越跑越久），有些得手動 +1（多養一個歷史版本、多一組參數）</a:t>
+            </a:r>
+          </a:p>
+        </p:txBody>
+      </p:sp>
+      <p:sp>
+        <p:nvSpPr>
+          <p:cNvPr id="8" name="TextBox 7"/>
+          <p:cNvSpPr txBox="1"/>
+          <p:nvPr/>
+        </p:nvSpPr>
+        <p:spPr>
+          <a:xfrm>
+            <a:off x="640080" y="3776472"/>
+            <a:ext cx="10972800" cy="566928"/>
           </a:xfrm>
           <a:prstGeom prst="rect">
             <a:avLst/>
@@ -3889,14 +3978,14 @@
                 </a:solidFill>
                 <a:latin typeface="Calibri"/>
               </a:rPr>
-              <a:t>取捨：相容承諾＝「一次寫、永遠不能少測」——每發一個 release，version.py＋Dockerfile＋各測試 @parametrize 都得手動 +1</a:t>
-            </a:r>
-          </a:p>
-        </p:txBody>
-      </p:sp>
-      <p:sp>
-        <p:nvSpPr>
-          <p:cNvPr id="8" name="TextBox 7"/>
+              <a:t>所以它是只增不減的持續支出——貴到 Kafka 在 KIP-896 得砍掉 2.1 以前的舊版本止血</a:t>
+            </a:r>
+          </a:p>
+        </p:txBody>
+      </p:sp>
+      <p:sp>
+        <p:nvSpPr>
+          <p:cNvPr id="9" name="TextBox 8"/>
           <p:cNvSpPr txBox="1"/>
           <p:nvPr/>
         </p:nvSpPr>
@@ -3930,29 +4019,10 @@
                 <a:solidFill>
                   <a:srgbClr val="185FA5"/>
                 </a:solidFill>
-                <a:latin typeface="Courier New"/>
-                <a:hlinkClick r:id="rId3"/>
-              </a:rPr>
-              <a:t>下載 22 版</a:t>
-            </a:r>
-            <a:r>
-              <a:rPr sz="1200" b="0">
-                <a:solidFill>
-                  <a:srgbClr val="8A8A8A"/>
-                </a:solidFill>
-                <a:latin typeface="Calibri"/>
-              </a:rPr>
-              <a:t>   ·   </a:t>
-            </a:r>
-            <a:r>
-              <a:rPr sz="1200" b="0" u="sng">
-                <a:solidFill>
-                  <a:srgbClr val="185FA5"/>
-                </a:solidFill>
-                <a:latin typeface="Courier New"/>
+                <a:latin typeface="Calibri"/>
                 <a:hlinkClick r:id="rId4"/>
               </a:rPr>
-              <a:t>client 相容 ×23</a:t>
+              <a:t>KIP-896</a:t>
             </a:r>
             <a:r>
               <a:rPr sz="1200" b="0">
@@ -3971,7 +4041,7 @@
                 <a:latin typeface="Courier New"/>
                 <a:hlinkClick r:id="rId5"/>
               </a:rPr>
-              <a:t>升級矩陣</a:t>
+              <a:t>版本清單手動+1</a:t>
             </a:r>
             <a:r>
               <a:rPr sz="1200" b="0">
@@ -3990,7 +4060,26 @@
                 <a:latin typeface="Courier New"/>
                 <a:hlinkClick r:id="rId6"/>
               </a:rPr>
-              <a:t>25 MV</a:t>
+              <a:t>養 22 個歷史版本</a:t>
+            </a:r>
+            <a:r>
+              <a:rPr sz="1200" b="0">
+                <a:solidFill>
+                  <a:srgbClr val="8A8A8A"/>
+                </a:solidFill>
+                <a:latin typeface="Calibri"/>
+              </a:rPr>
+              <a:t>   ·   </a:t>
+            </a:r>
+            <a:r>
+              <a:rPr sz="1200" b="0" u="sng">
+                <a:solidFill>
+                  <a:srgbClr val="185FA5"/>
+                </a:solidFill>
+                <a:latin typeface="Courier New"/>
+                <a:hlinkClick r:id="rId7"/>
+              </a:rPr>
+              <a:t>MV 矩陣</a:t>
             </a:r>
           </a:p>
         </p:txBody>

--- a/study/version-control/kafka-version-negotiation.pptx
+++ b/study/version-control/kafka-version-negotiation.pptx
@@ -3597,7 +3597,7 @@
                 </a:solidFill>
                 <a:latin typeface="Calibri"/>
               </a:rPr>
-              <a:t>④ 滾動升級混版：新舊 broker 並存，inter-broker（MV 釘版）＋對 client 都不掉資料</a:t>
+              <a:t>④ 滾動升級混版：新舊 broker 並存，inter-broker（finalized MV 決定）＋對 client 都不掉資料</a:t>
             </a:r>
           </a:p>
         </p:txBody>
@@ -3611,7 +3611,7 @@
         <p:spPr>
           <a:xfrm>
             <a:off x="640080" y="5751576"/>
-            <a:ext cx="10972800" cy="566928"/>
+            <a:ext cx="10972800" cy="877824"/>
           </a:xfrm>
           <a:prstGeom prst="rect">
             <a:avLst/>
@@ -3636,7 +3636,7 @@
                 </a:solidFill>
                 <a:latin typeface="Calibri"/>
               </a:rPr>
-              <a:t>這四條就是「相容承諾」的全部內容——每一條都得有測試長期盯著</a:t>
+              <a:t>這四條是本場最相關的相容承諾——每一條都得有測試長期盯著（tagged fields、第三方 client 等外圍成本另計）</a:t>
             </a:r>
           </a:p>
         </p:txBody>
@@ -4981,7 +4981,7 @@
                 </a:solidFill>
                 <a:latin typeface="Calibri"/>
               </a:rPr>
-              <a:t>「硬送」指 client↔broker：自刻或有 bug 的 client 繞過協商；broker↔broker 版本已由 MV 事先釘住，不會送出對方不懂的版本。</a:t>
+              <a:t>「硬送」指 client↔broker：自刻或有 bug 的 client 繞過協商；partition replication 的版本已由 finalized MV 事先決定，不會送出對方不懂的版本。</a:t>
             </a:r>
           </a:p>
         </p:txBody>
@@ -6286,7 +6286,7 @@
                 </a:solidFill>
                 <a:latin typeface="Calibri"/>
               </a:rPr>
-              <a:t>Part 1：不能「一個版本打天下」（client 長壽、broker 滾動升級）；多數路徑靠協商，唯一不協商的是 partition replication（follower→leader）——上面 Fetch/ListOffsets 等由 MV 釘版（其餘 broker↔broker 仍協商）</a:t>
+              <a:t>Part 1：不能「一個版本打天下」（client 長壽、broker 滾動升級）；多數路徑靠協商，唯一不協商的是 partition replication（follower→leader）——上面 Fetch/ListOffsets 等由 finalized MV 決定（其餘 broker↔broker 仍協商）</a:t>
             </a:r>
           </a:p>
         </p:txBody>
@@ -7353,7 +7353,7 @@
                 </a:solidFill>
                 <a:latin typeface="Calibri"/>
               </a:rPr>
-              <a:t>版本怎麼定：協商，還是由 MV 事先釘版</a:t>
+              <a:t>版本怎麼定：協商，還是由 finalized MV 決定</a:t>
             </a:r>
           </a:p>
         </p:txBody>
@@ -7469,7 +7469,7 @@
                 </a:solidFill>
                 <a:latin typeface="Calibri"/>
               </a:rPr>
-              <a:t>機制二 · 由叢集 MV 事先釘版（KIP-584）：只有 partition replication（follower→leader）這條不協商</a:t>
+              <a:t>機制二 · 由 finalized MV 事先決定（KIP-584）：只有 partition replication（follower→leader）這條不協商</a:t>
             </a:r>
           </a:p>
         </p:txBody>
@@ -7510,7 +7510,7 @@
                 </a:solidFill>
                 <a:latin typeface="Calibri"/>
               </a:rPr>
-              <a:t>協商定版   client↔broker · broker↔controller · Raft · broker↔broker txn markers</a:t>
+              <a:t>協商           client↔broker · broker↔controller · Raft · broker↔broker txn markers</a:t>
             </a:r>
           </a:p>
           <a:p>
@@ -7521,7 +7521,7 @@
                 </a:solidFill>
                 <a:latin typeface="Calibri"/>
               </a:rPr>
-              <a:t>MV 釘版    partition replication（follower→leader，replica fetcher）—— 唯一不協商</a:t>
+              <a:t>finalized MV   partition replication（follower→leader，replica fetcher）—— 唯一不協商</a:t>
             </a:r>
           </a:p>
         </p:txBody>
@@ -8362,7 +8362,7 @@
                 </a:solidFill>
                 <a:latin typeface="Calibri"/>
               </a:rPr>
-              <a:t>Kafka：per-API 協商，replica fetch 交給 MV 釘版。買到單支 API 獨立演進、複製層可線上滾動升級；代價＝協定面積最大、相容性測試按 API × 版本數放大</a:t>
+              <a:t>Kafka：per-API 協商，partition replication 交給 finalized MV 決定。買到單支 API 獨立演進、複製層可線上滾動升級；代價＝協定面積最大、相容性測試按 API × 版本數放大</a:t>
             </a:r>
           </a:p>
         </p:txBody>

--- a/study/version-control/kafka-version-negotiation.pptx
+++ b/study/version-control/kafka-version-negotiation.pptx
@@ -7891,7 +7891,7 @@
                 </a:solidFill>
                 <a:latin typeface="Calibri"/>
               </a:rPr>
-              <a:t>為什麼 partition replication 交給 MV？它要求 follower↔leader 全講同一版、沒法各連線各挑。代價『升級變兩階段』其實是 MV 治理的通性（凡版本由 MV 決定者皆然），非它專屬；協商連線則自動挑上去</a:t>
+              <a:t>為什麼交給 MV，不各連線協商？partition replication 搬的是實際 log data、要維持各 replica 一致——複製協定（截斷、epoch 對齊）得全叢集同一版，混版升級期行為才確定；各連線各挑會破壞一致性。代價是升級變兩階段，這是 MV 治理的通性、非它專屬</a:t>
             </a:r>
           </a:p>
         </p:txBody>
@@ -8666,7 +8666,7 @@
                 </a:solidFill>
                 <a:latin typeface="Calibri"/>
               </a:rPr>
-              <a:t>Kafka 這個選擇有多貴（實測數字）</a:t>
+              <a:t>代價：每支 API 的 handler 都要逐版分岔</a:t>
             </a:r>
           </a:p>
         </p:txBody>
@@ -8680,7 +8680,7 @@
         <p:spPr>
           <a:xfrm>
             <a:off x="640080" y="2148840"/>
-            <a:ext cx="10972800" cy="822959"/>
+            <a:ext cx="10972800" cy="1097280"/>
           </a:xfrm>
           <a:prstGeom prst="rect">
             <a:avLst/>
@@ -8707,7 +8707,7 @@
                 </a:solidFill>
                 <a:latin typeface="Calibri"/>
               </a:rPr>
-              <a:t>90 支 API × 308 個現役 wire 版本 → generator 吹成約 18× 生成碼（~18 萬行）</a:t>
+              <a:t>每支 API 的 broker handler 都逐版分岔，例如 Fetch：</a:t>
             </a:r>
           </a:p>
           <a:p>
@@ -8718,7 +8718,18 @@
                 </a:solidFill>
                 <a:latin typeface="Calibri"/>
               </a:rPr>
-              <a:t>每加一版：改 .json、逐版生 read/write/size、ApiKeys 補版號</a:t>
+              <a:t>  if (version &gt;= 13)  用 topic-id   else   用 topic-name</a:t>
+            </a:r>
+          </a:p>
+          <a:p>
+            <a:r>
+              <a:rPr sz="1350" b="0">
+                <a:solidFill>
+                  <a:srgbClr val="2C2C2A"/>
+                </a:solidFill>
+                <a:latin typeface="Calibri"/>
+              </a:rPr>
+              <a:t>  老版缺的欄位給預設 · 回應一律照「request 的版本」序列化</a:t>
             </a:r>
           </a:p>
         </p:txBody>
@@ -8739,7 +8750,7 @@
         </p:blipFill>
         <p:spPr>
           <a:xfrm>
-            <a:off x="658368" y="3200399"/>
+            <a:off x="658368" y="3474720"/>
             <a:ext cx="274320" cy="274320"/>
           </a:xfrm>
           <a:prstGeom prst="rect">
@@ -8755,8 +8766,8 @@
         </p:nvSpPr>
         <p:spPr>
           <a:xfrm>
-            <a:off x="1078992" y="3172968"/>
-            <a:ext cx="10515600" cy="1188720"/>
+            <a:off x="1078992" y="3447288"/>
+            <a:ext cx="10515600" cy="841248"/>
           </a:xfrm>
           <a:prstGeom prst="rect">
             <a:avLst/>
@@ -8776,7 +8787,7 @@
                 </a:solidFill>
                 <a:latin typeface="Calibri"/>
               </a:rPr>
-              <a:t>broker handler 還得逐版分岔：按協商版本讀/填欄位、回應用『同一版』序列化、老版缺的欄位給預設，連語意差異（如 topic-id 取代 topic-name）都要 if (version≥N)</a:t>
+              <a:t>讀寫欄位、語意差異、預設值全逐版 if (version ≥ N)，散在每支 API 的 handler 裡——加一版就多一堆分支要維護</a:t>
             </a:r>
           </a:p>
         </p:txBody>
@@ -8789,8 +8800,8 @@
         </p:nvSpPr>
         <p:spPr>
           <a:xfrm>
-            <a:off x="640080" y="4507992"/>
-            <a:ext cx="10972800" cy="731520"/>
+            <a:off x="640080" y="4434840"/>
+            <a:ext cx="10972800" cy="438912"/>
           </a:xfrm>
           <a:prstGeom prst="rect">
             <a:avLst/>
@@ -8810,7 +8821,7 @@
                 </a:solidFill>
                 <a:latin typeface="Calibri"/>
               </a:rPr>
-              <a:t>這還只是「生成碼＋handler」；相容性測試是另一條隱形帳單（下兩張細看）——build 全版本 round-trip＋release 養一堆歷史版本。</a:t>
+              <a:t>另一條更大的隱形帳單是相容性測試（下兩張細看）——每個版本、每個歷史 release 都得長期盯著。</a:t>
             </a:r>
           </a:p>
         </p:txBody>
@@ -8823,7 +8834,7 @@
         </p:nvSpPr>
         <p:spPr>
           <a:xfrm>
-            <a:off x="640080" y="5367528"/>
+            <a:off x="640080" y="5001768"/>
             <a:ext cx="10972800" cy="877824"/>
           </a:xfrm>
           <a:prstGeom prst="rect">
@@ -8890,10 +8901,10 @@
                 <a:solidFill>
                   <a:srgbClr val="185FA5"/>
                 </a:solidFill>
-                <a:latin typeface="Calibri"/>
+                <a:latin typeface="Courier New"/>
                 <a:hlinkClick r:id="rId3"/>
               </a:rPr>
-              <a:t>KIP-896</a:t>
+              <a:t>version()&gt;=13</a:t>
             </a:r>
             <a:r>
               <a:rPr sz="1200" b="0">
@@ -8912,7 +8923,7 @@
                 <a:latin typeface="Courier New"/>
                 <a:hlinkClick r:id="rId4"/>
               </a:rPr>
-              <a:t>buildResponseSend</a:t>
+              <a:t>回應=request 版本</a:t>
             </a:r>
             <a:r>
               <a:rPr sz="1200" b="0">
@@ -8931,7 +8942,7 @@
                 <a:latin typeface="Courier New"/>
                 <a:hlinkClick r:id="rId5"/>
               </a:rPr>
-              <a:t>fetch version()&gt;=13</a:t>
+              <a:t>預設值</a:t>
             </a:r>
             <a:r>
               <a:rPr sz="1200" b="0">
@@ -8947,10 +8958,10 @@
                 <a:solidFill>
                   <a:srgbClr val="185FA5"/>
                 </a:solidFill>
-                <a:latin typeface="Courier New"/>
+                <a:latin typeface="Calibri"/>
                 <a:hlinkClick r:id="rId6"/>
               </a:rPr>
-              <a:t>MaxBytes v3+ default</a:t>
+              <a:t>KIP-896</a:t>
             </a:r>
           </a:p>
         </p:txBody>

--- a/study/version-control/kafka-version-negotiation.pptx
+++ b/study/version-control/kafka-version-negotiation.pptx
@@ -7866,7 +7866,7 @@
         <p:spPr>
           <a:xfrm>
             <a:off x="640080" y="5056632"/>
-            <a:ext cx="10972800" cy="1188720"/>
+            <a:ext cx="10972800" cy="1499616"/>
           </a:xfrm>
           <a:prstGeom prst="rect">
             <a:avLst/>
@@ -7891,7 +7891,7 @@
                 </a:solidFill>
                 <a:latin typeface="Calibri"/>
               </a:rPr>
-              <a:t>為什麼交給 MV，不各連線協商？partition replication 搬的是實際 log data、要維持各 replica 一致——複製協定（截斷、epoch 對齊）得全叢集同一版，混版升級期行為才確定；各連線各挑會破壞一致性。代價是升級變兩階段，這是 MV 治理的通性、非它專屬</a:t>
+              <a:t>為什麼交給 MV，不各連線協商？協商能讓 broker 互相『讀得懂』——但讀得懂不代表跨版本行為正確（如 KIP-903 replica-epoch fencing 要全叢集一致生效，才擋得住舊 epoch 的 follower 進 ISR）。MV 讓 operator 一次原子切換、與滾 binary 脫鉤，這就是升級兩階段的由來</a:t>
             </a:r>
           </a:p>
         </p:txBody>
@@ -8362,7 +8362,7 @@
                 </a:solidFill>
                 <a:latin typeface="Calibri"/>
               </a:rPr>
-              <a:t>Kafka：per-API 協商，partition replication 交給 finalized MV 決定。買到單支 API 獨立演進、複製層可線上滾動升級；代價＝協定面積最大、相容性測試按 API × 版本數放大</a:t>
+              <a:t>Kafka：per-API 協商＋partition replication 由 finalized MV 決定——單支 API 獨立演進、複製層線上滾動升級；代價＝協定面積最大</a:t>
             </a:r>
           </a:p>
         </p:txBody>
@@ -8420,7 +8420,7 @@
                 </a:solidFill>
                 <a:latin typeface="Calibri"/>
               </a:rPr>
-              <a:t>MongoDB：全域一個 wire version＋FCV 治理叢集。實作簡單；代價＝粒度粗、無法單支 API 獨立演進（FCV 與 MV 同一套思路）</a:t>
+              <a:t>MongoDB：全域一個 wire version＋FCV 治理叢集——實作簡單；代價＝粒度粗、無法單支 API 獨立演進</a:t>
             </a:r>
           </a:p>
         </p:txBody>
@@ -8458,7 +8458,7 @@
         <p:spPr>
           <a:xfrm>
             <a:off x="1078992" y="4471416"/>
-            <a:ext cx="10515600" cy="841248"/>
+            <a:ext cx="10515600" cy="1188720"/>
           </a:xfrm>
           <a:prstGeom prst="rect">
             <a:avLst/>
@@ -8478,7 +8478,7 @@
                 </a:solidFill>
                 <a:latin typeface="Calibri"/>
               </a:rPr>
-              <a:t>PostgreSQL：協定 v3 逾二十年極穩定；但實體複製鎖 major → 複製層無法線上滾動升級（得停機 pg_upgrade 或另建叢集）</a:t>
+              <a:t>PostgreSQL：協定 v3 極穩定；physical replication 靠 WAL、跨大版不相容 → HA replica 不能就地跨 major 滾，近零停機得改搭 logical replication（bolt-on）</a:t>
             </a:r>
           </a:p>
         </p:txBody>
@@ -8491,7 +8491,7 @@
         </p:nvSpPr>
         <p:spPr>
           <a:xfrm>
-            <a:off x="640080" y="5458968"/>
+            <a:off x="640080" y="5806440"/>
             <a:ext cx="10972800" cy="877824"/>
           </a:xfrm>
           <a:prstGeom prst="rect">
@@ -8517,7 +8517,7 @@
                 </a:solidFill>
                 <a:latin typeface="Calibri"/>
               </a:rPr>
-              <a:t>沒有免費的選擇：Kafka 拿協定複雜度換到細粒度演進＋複製層線上升級——後者正是 PostgreSQL 買不到的</a:t>
+              <a:t>沒有免費：Kafka 複製層內建線上滾動升級，PostgreSQL 得另搭 logical replication 才換得到</a:t>
             </a:r>
           </a:p>
         </p:txBody>
@@ -8581,6 +8581,25 @@
                 <a:hlinkClick r:id="rId6"/>
               </a:rPr>
               <a:t>PostgreSQL protocol</a:t>
+            </a:r>
+            <a:r>
+              <a:rPr sz="1200" b="0">
+                <a:solidFill>
+                  <a:srgbClr val="8A8A8A"/>
+                </a:solidFill>
+                <a:latin typeface="Calibri"/>
+              </a:rPr>
+              <a:t>   ·   </a:t>
+            </a:r>
+            <a:r>
+              <a:rPr sz="1200" b="0" u="sng">
+                <a:solidFill>
+                  <a:srgbClr val="185FA5"/>
+                </a:solidFill>
+                <a:latin typeface="Calibri"/>
+                <a:hlinkClick r:id="rId7"/>
+              </a:rPr>
+              <a:t>PG logical replication</a:t>
             </a:r>
           </a:p>
         </p:txBody>

--- a/study/version-control/kafka-version-negotiation.pptx
+++ b/study/version-control/kafka-version-negotiation.pptx
@@ -22,7 +22,6 @@
     <p:sldId id="270" r:id="rId21"/>
     <p:sldId id="271" r:id="rId22"/>
     <p:sldId id="272" r:id="rId23"/>
-    <p:sldId id="273" r:id="rId24"/>
   </p:sldIdLst>
   <p:sldSz cx="12191695" cy="6858000" type="screen4x3"/>
   <p:notesSz cx="6858000" cy="9144000"/>
@@ -3789,7 +3788,7 @@
                 </a:solidFill>
                 <a:latin typeface="Calibri"/>
               </a:rPr>
-              <a:t>Part 1 · 代價 · 測試</a:t>
+              <a:t>隨堂考 · 核心</a:t>
             </a:r>
           </a:p>
         </p:txBody>
@@ -3803,55 +3802,74 @@
         <p:spPr>
           <a:xfrm>
             <a:off x="640080" y="841248"/>
-            <a:ext cx="10972800" cy="1005840"/>
-          </a:xfrm>
-          <a:prstGeom prst="rect">
-            <a:avLst/>
-          </a:prstGeom>
-          <a:noFill/>
-        </p:spPr>
-        <p:txBody>
-          <a:bodyPr wrap="square">
-            <a:noAutofit/>
-          </a:bodyPr>
-          <a:lstStyle/>
-          <a:p>
-            <a:r>
-              <a:rPr sz="3200" b="1">
+            <a:ext cx="10972800" cy="1188720"/>
+          </a:xfrm>
+          <a:prstGeom prst="rect">
+            <a:avLst/>
+          </a:prstGeom>
+          <a:noFill/>
+        </p:spPr>
+        <p:txBody>
+          <a:bodyPr wrap="square">
+            <a:noAutofit/>
+          </a:bodyPr>
+          <a:lstStyle/>
+          <a:p>
+            <a:r>
+              <a:rPr sz="2600" b="1">
                 <a:solidFill>
                   <a:srgbClr val="1E2024"/>
                 </a:solidFill>
                 <a:latin typeface="Calibri"/>
               </a:rPr>
-              <a:t>守住相容，為什麼越來越貴</a:t>
-            </a:r>
-          </a:p>
-        </p:txBody>
-      </p:sp>
-      <p:pic>
-        <p:nvPicPr>
-          <p:cNvPr id="4" name="Picture 3" descr="arrows-split.png"/>
-          <p:cNvPicPr>
-            <a:picLocks noChangeAspect="1"/>
-          </p:cNvPicPr>
-          <p:nvPr/>
-        </p:nvPicPr>
-        <p:blipFill>
-          <a:blip r:embed="rId2"/>
-          <a:stretch>
-            <a:fillRect/>
-          </a:stretch>
-        </p:blipFill>
-        <p:spPr>
-          <a:xfrm>
-            <a:off x="658368" y="2176272"/>
-            <a:ext cx="274320" cy="274320"/>
-          </a:xfrm>
-          <a:prstGeom prst="rect">
-            <a:avLst/>
-          </a:prstGeom>
-        </p:spPr>
-      </p:pic>
+              <a:t>partition replication（follower→leader）裡，Fetch 的版本怎麼決定？</a:t>
+            </a:r>
+          </a:p>
+        </p:txBody>
+      </p:sp>
+      <p:sp>
+        <p:nvSpPr>
+          <p:cNvPr id="4" name="TextBox 3"/>
+          <p:cNvSpPr txBox="1"/>
+          <p:nvPr/>
+        </p:nvSpPr>
+        <p:spPr>
+          <a:xfrm>
+            <a:off x="822960" y="2331720"/>
+            <a:ext cx="10515600" cy="493776"/>
+          </a:xfrm>
+          <a:prstGeom prst="rect">
+            <a:avLst/>
+          </a:prstGeom>
+          <a:noFill/>
+        </p:spPr>
+        <p:txBody>
+          <a:bodyPr wrap="square">
+            <a:noAutofit/>
+          </a:bodyPr>
+          <a:lstStyle/>
+          <a:p>
+            <a:r>
+              <a:rPr sz="1600" b="0">
+                <a:solidFill>
+                  <a:srgbClr val="1E2024"/>
+                </a:solidFill>
+                <a:latin typeface="Calibri"/>
+              </a:rPr>
+              <a:t>A.  </a:t>
+            </a:r>
+            <a:r>
+              <a:rPr sz="1600" b="0">
+                <a:solidFill>
+                  <a:srgbClr val="1E2024"/>
+                </a:solidFill>
+                <a:latin typeface="Calibri"/>
+              </a:rPr>
+              <a:t>兩 broker ApiVersions 協商取交集</a:t>
+            </a:r>
+          </a:p>
+        </p:txBody>
+      </p:sp>
       <p:sp>
         <p:nvSpPr>
           <p:cNvPr id="5" name="TextBox 4"/>
@@ -3860,7 +3878,7 @@
         </p:nvSpPr>
         <p:spPr>
           <a:xfrm>
-            <a:off x="1078992" y="2148840"/>
+            <a:off x="822960" y="2953512"/>
             <a:ext cx="10515600" cy="493776"/>
           </a:xfrm>
           <a:prstGeom prst="rect">
@@ -3875,41 +3893,69 @@
           <a:lstStyle/>
           <a:p>
             <a:r>
-              <a:rPr sz="1650" b="0">
+              <a:rPr sz="1600" b="0">
                 <a:solidFill>
                   <a:srgbClr val="1E2024"/>
                 </a:solidFill>
                 <a:latin typeface="Calibri"/>
               </a:rPr>
-              <a:t>① 是「API × 版本」、②③④ 是「版本 × 版本」——測試面是乘積，不是加總</a:t>
-            </a:r>
-          </a:p>
-        </p:txBody>
-      </p:sp>
-      <p:pic>
-        <p:nvPicPr>
-          <p:cNvPr id="6" name="Picture 5" descr="point.png"/>
-          <p:cNvPicPr>
-            <a:picLocks noChangeAspect="1"/>
-          </p:cNvPicPr>
-          <p:nvPr/>
-        </p:nvPicPr>
-        <p:blipFill>
-          <a:blip r:embed="rId3"/>
-          <a:stretch>
-            <a:fillRect/>
-          </a:stretch>
-        </p:blipFill>
-        <p:spPr>
-          <a:xfrm>
-            <a:off x="658368" y="2816352"/>
-            <a:ext cx="274320" cy="274320"/>
-          </a:xfrm>
-          <a:prstGeom prst="rect">
-            <a:avLst/>
-          </a:prstGeom>
-        </p:spPr>
-      </p:pic>
+              <a:t>B.  </a:t>
+            </a:r>
+            <a:r>
+              <a:rPr sz="1600" b="0">
+                <a:solidFill>
+                  <a:srgbClr val="1E2024"/>
+                </a:solidFill>
+                <a:latin typeface="Calibri"/>
+              </a:rPr>
+              <a:t>由 finalized metadata.version 決定</a:t>
+            </a:r>
+          </a:p>
+        </p:txBody>
+      </p:sp>
+      <p:sp>
+        <p:nvSpPr>
+          <p:cNvPr id="6" name="TextBox 5"/>
+          <p:cNvSpPr txBox="1"/>
+          <p:nvPr/>
+        </p:nvSpPr>
+        <p:spPr>
+          <a:xfrm>
+            <a:off x="822960" y="3575304"/>
+            <a:ext cx="10515600" cy="493776"/>
+          </a:xfrm>
+          <a:prstGeom prst="rect">
+            <a:avLst/>
+          </a:prstGeom>
+          <a:noFill/>
+        </p:spPr>
+        <p:txBody>
+          <a:bodyPr wrap="square">
+            <a:noAutofit/>
+          </a:bodyPr>
+          <a:lstStyle/>
+          <a:p>
+            <a:r>
+              <a:rPr sz="1600" b="0">
+                <a:solidFill>
+                  <a:srgbClr val="1E2024"/>
+                </a:solidFill>
+                <a:latin typeface="Calibri"/>
+              </a:rPr>
+              <a:t>C.  </a:t>
+            </a:r>
+            <a:r>
+              <a:rPr sz="1600" b="0">
+                <a:solidFill>
+                  <a:srgbClr val="1E2024"/>
+                </a:solidFill>
+                <a:latin typeface="Calibri"/>
+              </a:rPr>
+              <a:t>永遠用最新版</a:t>
+            </a:r>
+          </a:p>
+        </p:txBody>
+      </p:sp>
       <p:sp>
         <p:nvSpPr>
           <p:cNvPr id="7" name="TextBox 6"/>
@@ -3918,28 +3964,37 @@
         </p:nvSpPr>
         <p:spPr>
           <a:xfrm>
-            <a:off x="1078992" y="2788920"/>
-            <a:ext cx="10515600" cy="841248"/>
-          </a:xfrm>
-          <a:prstGeom prst="rect">
-            <a:avLst/>
-          </a:prstGeom>
-          <a:noFill/>
-        </p:spPr>
-        <p:txBody>
-          <a:bodyPr wrap="square">
-            <a:noAutofit/>
-          </a:bodyPr>
-          <a:lstStyle/>
-          <a:p>
-            <a:r>
-              <a:rPr sz="1650" b="0">
+            <a:off x="822960" y="4197096"/>
+            <a:ext cx="10515600" cy="493776"/>
+          </a:xfrm>
+          <a:prstGeom prst="rect">
+            <a:avLst/>
+          </a:prstGeom>
+          <a:noFill/>
+        </p:spPr>
+        <p:txBody>
+          <a:bodyPr wrap="square">
+            <a:noAutofit/>
+          </a:bodyPr>
+          <a:lstStyle/>
+          <a:p>
+            <a:r>
+              <a:rPr sz="1600" b="0">
                 <a:solidFill>
                   <a:srgbClr val="1E2024"/>
                 </a:solidFill>
                 <a:latin typeface="Calibri"/>
               </a:rPr>
-              <a:t>有些自動擴張（新版本免補測試、但每次 build 越跑越久），有些得手動 +1（多養一個歷史版本、多一組參數）</a:t>
+              <a:t>D.  </a:t>
+            </a:r>
+            <a:r>
+              <a:rPr sz="1600" b="0">
+                <a:solidFill>
+                  <a:srgbClr val="1E2024"/>
+                </a:solidFill>
+                <a:latin typeface="Calibri"/>
+              </a:rPr>
+              <a:t>controller 每次指定</a:t>
             </a:r>
           </a:p>
         </p:txBody>
@@ -3952,134 +4007,28 @@
         </p:nvSpPr>
         <p:spPr>
           <a:xfrm>
-            <a:off x="640080" y="3776472"/>
-            <a:ext cx="10972800" cy="566928"/>
-          </a:xfrm>
-          <a:prstGeom prst="rect">
-            <a:avLst/>
-          </a:prstGeom>
-          <a:solidFill>
-            <a:srgbClr val="E9F3DE"/>
-          </a:solidFill>
-          <a:ln>
-            <a:noFill/>
-          </a:ln>
-        </p:spPr>
-        <p:txBody>
-          <a:bodyPr wrap="square" lIns="146304" tIns="82296">
-            <a:noAutofit/>
-          </a:bodyPr>
-          <a:lstStyle/>
-          <a:p>
-            <a:r>
-              <a:rPr sz="1500" b="0">
-                <a:solidFill>
-                  <a:srgbClr val="27500A"/>
-                </a:solidFill>
-                <a:latin typeface="Calibri"/>
-              </a:rPr>
-              <a:t>所以它是只增不減的持續支出——貴到 Kafka 在 KIP-896 得砍掉 2.1 以前的舊版本止血</a:t>
-            </a:r>
-          </a:p>
-        </p:txBody>
-      </p:sp>
-      <p:sp>
-        <p:nvSpPr>
-          <p:cNvPr id="9" name="TextBox 8"/>
-          <p:cNvSpPr txBox="1"/>
-          <p:nvPr/>
-        </p:nvSpPr>
-        <p:spPr>
-          <a:xfrm>
-            <a:off x="640080" y="6400800"/>
-            <a:ext cx="10972800" cy="384048"/>
-          </a:xfrm>
-          <a:prstGeom prst="rect">
-            <a:avLst/>
-          </a:prstGeom>
-          <a:noFill/>
-        </p:spPr>
-        <p:txBody>
-          <a:bodyPr wrap="square">
-            <a:noAutofit/>
-          </a:bodyPr>
-          <a:lstStyle/>
-          <a:p>
-            <a:r>
-              <a:rPr sz="1200" b="1">
+            <a:off x="640080" y="4910327"/>
+            <a:ext cx="10972800" cy="914400"/>
+          </a:xfrm>
+          <a:prstGeom prst="rect">
+            <a:avLst/>
+          </a:prstGeom>
+          <a:noFill/>
+        </p:spPr>
+        <p:txBody>
+          <a:bodyPr wrap="square">
+            <a:noAutofit/>
+          </a:bodyPr>
+          <a:lstStyle/>
+          <a:p>
+            <a:r>
+              <a:rPr sz="1400" b="0">
                 <a:solidFill>
                   <a:srgbClr val="8A8A8A"/>
                 </a:solidFill>
                 <a:latin typeface="Calibri"/>
               </a:rPr>
-              <a:t>REF   </a:t>
-            </a:r>
-            <a:r>
-              <a:rPr sz="1200" b="0" u="sng">
-                <a:solidFill>
-                  <a:srgbClr val="185FA5"/>
-                </a:solidFill>
-                <a:latin typeface="Calibri"/>
-                <a:hlinkClick r:id="rId4"/>
-              </a:rPr>
-              <a:t>KIP-896</a:t>
-            </a:r>
-            <a:r>
-              <a:rPr sz="1200" b="0">
-                <a:solidFill>
-                  <a:srgbClr val="8A8A8A"/>
-                </a:solidFill>
-                <a:latin typeface="Calibri"/>
-              </a:rPr>
-              <a:t>   ·   </a:t>
-            </a:r>
-            <a:r>
-              <a:rPr sz="1200" b="0" u="sng">
-                <a:solidFill>
-                  <a:srgbClr val="185FA5"/>
-                </a:solidFill>
-                <a:latin typeface="Courier New"/>
-                <a:hlinkClick r:id="rId5"/>
-              </a:rPr>
-              <a:t>版本清單手動+1</a:t>
-            </a:r>
-            <a:r>
-              <a:rPr sz="1200" b="0">
-                <a:solidFill>
-                  <a:srgbClr val="8A8A8A"/>
-                </a:solidFill>
-                <a:latin typeface="Calibri"/>
-              </a:rPr>
-              <a:t>   ·   </a:t>
-            </a:r>
-            <a:r>
-              <a:rPr sz="1200" b="0" u="sng">
-                <a:solidFill>
-                  <a:srgbClr val="185FA5"/>
-                </a:solidFill>
-                <a:latin typeface="Courier New"/>
-                <a:hlinkClick r:id="rId6"/>
-              </a:rPr>
-              <a:t>養 22 個歷史版本</a:t>
-            </a:r>
-            <a:r>
-              <a:rPr sz="1200" b="0">
-                <a:solidFill>
-                  <a:srgbClr val="8A8A8A"/>
-                </a:solidFill>
-                <a:latin typeface="Calibri"/>
-              </a:rPr>
-              <a:t>   ·   </a:t>
-            </a:r>
-            <a:r>
-              <a:rPr sz="1200" b="0" u="sng">
-                <a:solidFill>
-                  <a:srgbClr val="185FA5"/>
-                </a:solidFill>
-                <a:latin typeface="Courier New"/>
-                <a:hlinkClick r:id="rId7"/>
-              </a:rPr>
-              <a:t>MV 矩陣</a:t>
+              <a:t>想一想 —— 下一頁公布答案</a:t>
             </a:r>
           </a:p>
         </p:txBody>
@@ -4131,7 +4080,7 @@
                 </a:solidFill>
                 <a:latin typeface="Calibri"/>
               </a:rPr>
-              <a:t>隨堂考 · 核心</a:t>
+              <a:t>隨堂考 · 核心　（正解）</a:t>
             </a:r>
           </a:p>
         </p:txBody>
@@ -4227,31 +4176,36 @@
           <a:prstGeom prst="rect">
             <a:avLst/>
           </a:prstGeom>
-          <a:noFill/>
-        </p:spPr>
-        <p:txBody>
-          <a:bodyPr wrap="square">
-            <a:noAutofit/>
-          </a:bodyPr>
-          <a:lstStyle/>
-          <a:p>
-            <a:r>
-              <a:rPr sz="1600" b="0">
-                <a:solidFill>
-                  <a:srgbClr val="1E2024"/>
+          <a:solidFill>
+            <a:srgbClr val="E9F3DE"/>
+          </a:solidFill>
+          <a:ln>
+            <a:noFill/>
+          </a:ln>
+        </p:spPr>
+        <p:txBody>
+          <a:bodyPr wrap="square" lIns="128016" tIns="54864">
+            <a:noAutofit/>
+          </a:bodyPr>
+          <a:lstStyle/>
+          <a:p>
+            <a:r>
+              <a:rPr sz="1600" b="1">
+                <a:solidFill>
+                  <a:srgbClr val="27500A"/>
                 </a:solidFill>
                 <a:latin typeface="Calibri"/>
               </a:rPr>
               <a:t>B.  </a:t>
             </a:r>
             <a:r>
-              <a:rPr sz="1600" b="0">
-                <a:solidFill>
-                  <a:srgbClr val="1E2024"/>
-                </a:solidFill>
-                <a:latin typeface="Calibri"/>
-              </a:rPr>
-              <a:t>由 finalized metadata.version 決定</a:t>
+              <a:rPr sz="1600" b="1">
+                <a:solidFill>
+                  <a:srgbClr val="27500A"/>
+                </a:solidFill>
+                <a:latin typeface="Calibri"/>
+              </a:rPr>
+              <a:t>由 finalized metadata.version 決定   ✓</a:t>
             </a:r>
           </a:p>
         </p:txBody>
@@ -4365,13 +4319,85 @@
           <a:lstStyle/>
           <a:p>
             <a:r>
+              <a:rPr sz="1400" b="1">
+                <a:solidFill>
+                  <a:srgbClr val="27500A"/>
+                </a:solidFill>
+                <a:latin typeface="Calibri"/>
+              </a:rPr>
+              <a:t>正解 B — </a:t>
+            </a:r>
+            <a:r>
               <a:rPr sz="1400" b="0">
                 <a:solidFill>
+                  <a:srgbClr val="1E2024"/>
+                </a:solidFill>
+                <a:latin typeface="Calibri"/>
+              </a:rPr>
+              <a:t>fetchRequestVersion(MV)：MV 是集中共識，不做 per-connection 協商。</a:t>
+            </a:r>
+          </a:p>
+        </p:txBody>
+      </p:sp>
+      <p:sp>
+        <p:nvSpPr>
+          <p:cNvPr id="9" name="TextBox 8"/>
+          <p:cNvSpPr txBox="1"/>
+          <p:nvPr/>
+        </p:nvSpPr>
+        <p:spPr>
+          <a:xfrm>
+            <a:off x="640080" y="6400800"/>
+            <a:ext cx="10972800" cy="384048"/>
+          </a:xfrm>
+          <a:prstGeom prst="rect">
+            <a:avLst/>
+          </a:prstGeom>
+          <a:noFill/>
+        </p:spPr>
+        <p:txBody>
+          <a:bodyPr wrap="square">
+            <a:noAutofit/>
+          </a:bodyPr>
+          <a:lstStyle/>
+          <a:p>
+            <a:r>
+              <a:rPr sz="1200" b="1">
+                <a:solidFill>
                   <a:srgbClr val="8A8A8A"/>
                 </a:solidFill>
                 <a:latin typeface="Calibri"/>
               </a:rPr>
-              <a:t>想一想 —— 下一頁公布答案</a:t>
+              <a:t>REF   </a:t>
+            </a:r>
+            <a:r>
+              <a:rPr sz="1200" b="0" u="sng">
+                <a:solidFill>
+                  <a:srgbClr val="185FA5"/>
+                </a:solidFill>
+                <a:latin typeface="Courier New"/>
+                <a:hlinkClick r:id="rId2"/>
+              </a:rPr>
+              <a:t>RemoteLeaderEndPoint.scala:215</a:t>
+            </a:r>
+            <a:r>
+              <a:rPr sz="1200" b="0">
+                <a:solidFill>
+                  <a:srgbClr val="8A8A8A"/>
+                </a:solidFill>
+                <a:latin typeface="Calibri"/>
+              </a:rPr>
+              <a:t>   ·   </a:t>
+            </a:r>
+            <a:r>
+              <a:rPr sz="1200" b="0" u="sng">
+                <a:solidFill>
+                  <a:srgbClr val="185FA5"/>
+                </a:solidFill>
+                <a:latin typeface="Courier New"/>
+                <a:hlinkClick r:id="rId3"/>
+              </a:rPr>
+              <a:t>MetadataVersion.java:273</a:t>
             </a:r>
           </a:p>
         </p:txBody>
@@ -4423,7 +4449,7 @@
                 </a:solidFill>
                 <a:latin typeface="Calibri"/>
               </a:rPr>
-              <a:t>隨堂考 · 核心　（正解）</a:t>
+              <a:t>Part 2 · 失敗訊息</a:t>
             </a:r>
           </a:p>
         </p:txBody>
@@ -4437,27 +4463,27 @@
         <p:spPr>
           <a:xfrm>
             <a:off x="640080" y="841248"/>
-            <a:ext cx="10972800" cy="1188720"/>
-          </a:xfrm>
-          <a:prstGeom prst="rect">
-            <a:avLst/>
-          </a:prstGeom>
-          <a:noFill/>
-        </p:spPr>
-        <p:txBody>
-          <a:bodyPr wrap="square">
-            <a:noAutofit/>
-          </a:bodyPr>
-          <a:lstStyle/>
-          <a:p>
-            <a:r>
-              <a:rPr sz="2600" b="1">
+            <a:ext cx="10972800" cy="1005840"/>
+          </a:xfrm>
+          <a:prstGeom prst="rect">
+            <a:avLst/>
+          </a:prstGeom>
+          <a:noFill/>
+        </p:spPr>
+        <p:txBody>
+          <a:bodyPr wrap="square">
+            <a:noAutofit/>
+          </a:bodyPr>
+          <a:lstStyle/>
+          <a:p>
+            <a:r>
+              <a:rPr sz="3200" b="1">
                 <a:solidFill>
                   <a:srgbClr val="1E2024"/>
                 </a:solidFill>
                 <a:latin typeface="Calibri"/>
               </a:rPr>
-              <a:t>partition replication（follower→leader）裡，Fetch 的版本怎麼決定？</a:t>
+              <a:t>通訊當下協商不出版本，會看到什麼</a:t>
             </a:r>
           </a:p>
         </p:txBody>
@@ -4470,7 +4496,94 @@
         </p:nvSpPr>
         <p:spPr>
           <a:xfrm>
-            <a:off x="822960" y="2331720"/>
+            <a:off x="640080" y="2148840"/>
+            <a:ext cx="10972800" cy="1645920"/>
+          </a:xfrm>
+          <a:prstGeom prst="rect">
+            <a:avLst/>
+          </a:prstGeom>
+          <a:solidFill>
+            <a:srgbClr val="F3F1EC"/>
+          </a:solidFill>
+          <a:ln w="6350">
+            <a:solidFill>
+              <a:srgbClr val="E3E0D8"/>
+            </a:solidFill>
+          </a:ln>
+        </p:spPr>
+        <p:txBody>
+          <a:bodyPr wrap="square" lIns="146304" tIns="91440" bIns="91440">
+            <a:noAutofit/>
+          </a:bodyPr>
+          <a:lstStyle/>
+          <a:p>
+            <a:r>
+              <a:rPr sz="1350" b="0">
+                <a:solidFill>
+                  <a:srgbClr val="2C2C2A"/>
+                </a:solidFill>
+                <a:latin typeface="Calibri"/>
+              </a:rPr>
+              <a:t>交集空                       → client 端 UnsupportedVersionException（送出前 abort）</a:t>
+            </a:r>
+          </a:p>
+          <a:p>
+            <a:r>
+              <a:rPr sz="1350" b="0">
+                <a:solidFill>
+                  <a:srgbClr val="2C2C2A"/>
+                </a:solidFill>
+                <a:latin typeface="Calibri"/>
+              </a:rPr>
+              <a:t>client 繞過協商、硬送不支援版本 → broker 丟 UnsupportedVersionException、關閉連線</a:t>
+            </a:r>
+          </a:p>
+          <a:p>
+            <a:r>
+              <a:rPr sz="1350" b="0">
+                <a:solidFill>
+                  <a:srgbClr val="2C2C2A"/>
+                </a:solidFill>
+                <a:latin typeface="Calibri"/>
+              </a:rPr>
+              <a:t>（ApiVersions 例外：回 v0 + UNSUPPORTED_VERSION 錯誤碼）</a:t>
+            </a:r>
+          </a:p>
+        </p:txBody>
+      </p:sp>
+      <p:pic>
+        <p:nvPicPr>
+          <p:cNvPr id="5" name="Picture 4" descr="ban.png"/>
+          <p:cNvPicPr>
+            <a:picLocks noChangeAspect="1"/>
+          </p:cNvPicPr>
+          <p:nvPr/>
+        </p:nvPicPr>
+        <p:blipFill>
+          <a:blip r:embed="rId2"/>
+          <a:stretch>
+            <a:fillRect/>
+          </a:stretch>
+        </p:blipFill>
+        <p:spPr>
+          <a:xfrm>
+            <a:off x="658368" y="4023360"/>
+            <a:ext cx="274320" cy="274320"/>
+          </a:xfrm>
+          <a:prstGeom prst="rect">
+            <a:avLst/>
+          </a:prstGeom>
+        </p:spPr>
+      </p:pic>
+      <p:sp>
+        <p:nvSpPr>
+          <p:cNvPr id="6" name="TextBox 5"/>
+          <p:cNvSpPr txBox="1"/>
+          <p:nvPr/>
+        </p:nvSpPr>
+        <p:spPr>
+          <a:xfrm>
+            <a:off x="1078992" y="3995928"/>
             <a:ext cx="10515600" cy="493776"/>
           </a:xfrm>
           <a:prstGeom prst="rect">
@@ -4485,113 +4598,13 @@
           <a:lstStyle/>
           <a:p>
             <a:r>
-              <a:rPr sz="1600" b="0">
+              <a:rPr sz="1650" b="0">
                 <a:solidFill>
                   <a:srgbClr val="1E2024"/>
                 </a:solidFill>
                 <a:latin typeface="Calibri"/>
               </a:rPr>
-              <a:t>A.  </a:t>
-            </a:r>
-            <a:r>
-              <a:rPr sz="1600" b="0">
-                <a:solidFill>
-                  <a:srgbClr val="1E2024"/>
-                </a:solidFill>
-                <a:latin typeface="Calibri"/>
-              </a:rPr>
-              <a:t>兩 broker ApiVersions 協商取交集</a:t>
-            </a:r>
-          </a:p>
-        </p:txBody>
-      </p:sp>
-      <p:sp>
-        <p:nvSpPr>
-          <p:cNvPr id="5" name="TextBox 4"/>
-          <p:cNvSpPr txBox="1"/>
-          <p:nvPr/>
-        </p:nvSpPr>
-        <p:spPr>
-          <a:xfrm>
-            <a:off x="822960" y="2953512"/>
-            <a:ext cx="10515600" cy="493776"/>
-          </a:xfrm>
-          <a:prstGeom prst="rect">
-            <a:avLst/>
-          </a:prstGeom>
-          <a:solidFill>
-            <a:srgbClr val="E9F3DE"/>
-          </a:solidFill>
-          <a:ln>
-            <a:noFill/>
-          </a:ln>
-        </p:spPr>
-        <p:txBody>
-          <a:bodyPr wrap="square" lIns="128016" tIns="54864">
-            <a:noAutofit/>
-          </a:bodyPr>
-          <a:lstStyle/>
-          <a:p>
-            <a:r>
-              <a:rPr sz="1600" b="1">
-                <a:solidFill>
-                  <a:srgbClr val="27500A"/>
-                </a:solidFill>
-                <a:latin typeface="Calibri"/>
-              </a:rPr>
-              <a:t>B.  </a:t>
-            </a:r>
-            <a:r>
-              <a:rPr sz="1600" b="1">
-                <a:solidFill>
-                  <a:srgbClr val="27500A"/>
-                </a:solidFill>
-                <a:latin typeface="Calibri"/>
-              </a:rPr>
-              <a:t>由 finalized metadata.version 決定   ✓</a:t>
-            </a:r>
-          </a:p>
-        </p:txBody>
-      </p:sp>
-      <p:sp>
-        <p:nvSpPr>
-          <p:cNvPr id="6" name="TextBox 5"/>
-          <p:cNvSpPr txBox="1"/>
-          <p:nvPr/>
-        </p:nvSpPr>
-        <p:spPr>
-          <a:xfrm>
-            <a:off x="822960" y="3575304"/>
-            <a:ext cx="10515600" cy="493776"/>
-          </a:xfrm>
-          <a:prstGeom prst="rect">
-            <a:avLst/>
-          </a:prstGeom>
-          <a:noFill/>
-        </p:spPr>
-        <p:txBody>
-          <a:bodyPr wrap="square">
-            <a:noAutofit/>
-          </a:bodyPr>
-          <a:lstStyle/>
-          <a:p>
-            <a:r>
-              <a:rPr sz="1600" b="0">
-                <a:solidFill>
-                  <a:srgbClr val="1E2024"/>
-                </a:solidFill>
-                <a:latin typeface="Calibri"/>
-              </a:rPr>
-              <a:t>C.  </a:t>
-            </a:r>
-            <a:r>
-              <a:rPr sz="1600" b="0">
-                <a:solidFill>
-                  <a:srgbClr val="1E2024"/>
-                </a:solidFill>
-                <a:latin typeface="Calibri"/>
-              </a:rPr>
-              <a:t>永遠用最新版</a:t>
+              <a:t>多數情況 client 在送出前就本地中止，根本沒上網路</a:t>
             </a:r>
           </a:p>
         </p:txBody>
@@ -4604,37 +4617,28 @@
         </p:nvSpPr>
         <p:spPr>
           <a:xfrm>
-            <a:off x="822960" y="4197096"/>
-            <a:ext cx="10515600" cy="493776"/>
-          </a:xfrm>
-          <a:prstGeom prst="rect">
-            <a:avLst/>
-          </a:prstGeom>
-          <a:noFill/>
-        </p:spPr>
-        <p:txBody>
-          <a:bodyPr wrap="square">
-            <a:noAutofit/>
-          </a:bodyPr>
-          <a:lstStyle/>
-          <a:p>
-            <a:r>
-              <a:rPr sz="1600" b="0">
-                <a:solidFill>
-                  <a:srgbClr val="1E2024"/>
-                </a:solidFill>
-                <a:latin typeface="Calibri"/>
-              </a:rPr>
-              <a:t>D.  </a:t>
-            </a:r>
-            <a:r>
-              <a:rPr sz="1600" b="0">
-                <a:solidFill>
-                  <a:srgbClr val="1E2024"/>
-                </a:solidFill>
-                <a:latin typeface="Calibri"/>
-              </a:rPr>
-              <a:t>controller 每次指定</a:t>
+            <a:off x="640080" y="4636008"/>
+            <a:ext cx="10972800" cy="731520"/>
+          </a:xfrm>
+          <a:prstGeom prst="rect">
+            <a:avLst/>
+          </a:prstGeom>
+          <a:noFill/>
+        </p:spPr>
+        <p:txBody>
+          <a:bodyPr wrap="square">
+            <a:noAutofit/>
+          </a:bodyPr>
+          <a:lstStyle/>
+          <a:p>
+            <a:r>
+              <a:rPr sz="1500" b="0">
+                <a:solidFill>
+                  <a:srgbClr val="5F5E5A"/>
+                </a:solidFill>
+                <a:latin typeface="Calibri"/>
+              </a:rPr>
+              <a:t>「硬送」指 client↔broker：自刻或有 bug 的 client 繞過協商；partition replication 的版本已由 finalized MV 事先決定，不會送出對方不懂的版本。</a:t>
             </a:r>
           </a:p>
         </p:txBody>
@@ -4642,49 +4646,6 @@
       <p:sp>
         <p:nvSpPr>
           <p:cNvPr id="8" name="TextBox 7"/>
-          <p:cNvSpPr txBox="1"/>
-          <p:nvPr/>
-        </p:nvSpPr>
-        <p:spPr>
-          <a:xfrm>
-            <a:off x="640080" y="4910327"/>
-            <a:ext cx="10972800" cy="914400"/>
-          </a:xfrm>
-          <a:prstGeom prst="rect">
-            <a:avLst/>
-          </a:prstGeom>
-          <a:noFill/>
-        </p:spPr>
-        <p:txBody>
-          <a:bodyPr wrap="square">
-            <a:noAutofit/>
-          </a:bodyPr>
-          <a:lstStyle/>
-          <a:p>
-            <a:r>
-              <a:rPr sz="1400" b="1">
-                <a:solidFill>
-                  <a:srgbClr val="27500A"/>
-                </a:solidFill>
-                <a:latin typeface="Calibri"/>
-              </a:rPr>
-              <a:t>正解 B — </a:t>
-            </a:r>
-            <a:r>
-              <a:rPr sz="1400" b="0">
-                <a:solidFill>
-                  <a:srgbClr val="1E2024"/>
-                </a:solidFill>
-                <a:latin typeface="Calibri"/>
-              </a:rPr>
-              <a:t>fetchRequestVersion(MV)：MV 是集中共識，不做 per-connection 協商。</a:t>
-            </a:r>
-          </a:p>
-        </p:txBody>
-      </p:sp>
-      <p:sp>
-        <p:nvSpPr>
-          <p:cNvPr id="9" name="TextBox 8"/>
           <p:cNvSpPr txBox="1"/>
           <p:nvPr/>
         </p:nvSpPr>
@@ -4719,9 +4680,9 @@
                   <a:srgbClr val="185FA5"/>
                 </a:solidFill>
                 <a:latin typeface="Courier New"/>
-                <a:hlinkClick r:id="rId2"/>
-              </a:rPr>
-              <a:t>RemoteLeaderEndPoint.scala:215</a:t>
+                <a:hlinkClick r:id="rId3"/>
+              </a:rPr>
+              <a:t>latestUsableVersion</a:t>
             </a:r>
             <a:r>
               <a:rPr sz="1200" b="0">
@@ -4738,9 +4699,28 @@
                   <a:srgbClr val="185FA5"/>
                 </a:solidFill>
                 <a:latin typeface="Courier New"/>
-                <a:hlinkClick r:id="rId3"/>
-              </a:rPr>
-              <a:t>MetadataVersion.java:273</a:t>
+                <a:hlinkClick r:id="rId4"/>
+              </a:rPr>
+              <a:t>NetworkClient</a:t>
+            </a:r>
+            <a:r>
+              <a:rPr sz="1200" b="0">
+                <a:solidFill>
+                  <a:srgbClr val="8A8A8A"/>
+                </a:solidFill>
+                <a:latin typeface="Calibri"/>
+              </a:rPr>
+              <a:t>   ·   </a:t>
+            </a:r>
+            <a:r>
+              <a:rPr sz="1200" b="0" u="sng">
+                <a:solidFill>
+                  <a:srgbClr val="185FA5"/>
+                </a:solidFill>
+                <a:latin typeface="Courier New"/>
+                <a:hlinkClick r:id="rId5"/>
+              </a:rPr>
+              <a:t>RequestContext</a:t>
             </a:r>
           </a:p>
         </p:txBody>
@@ -4826,21 +4806,79 @@
                 </a:solidFill>
                 <a:latin typeface="Calibri"/>
               </a:rPr>
-              <a:t>通訊當下協商不出版本，會看到什麼</a:t>
-            </a:r>
-          </a:p>
-        </p:txBody>
-      </p:sp>
-      <p:sp>
-        <p:nvSpPr>
-          <p:cNvPr id="4" name="TextBox 3"/>
-          <p:cNvSpPr txBox="1"/>
-          <p:nvPr/>
-        </p:nvSpPr>
-        <p:spPr>
-          <a:xfrm>
-            <a:off x="640080" y="2148840"/>
-            <a:ext cx="10972800" cy="1645920"/>
+              <a:t>版本截斷：為什麼「升一點點」不夠</a:t>
+            </a:r>
+          </a:p>
+        </p:txBody>
+      </p:sp>
+      <p:pic>
+        <p:nvPicPr>
+          <p:cNvPr id="4" name="Picture 3" descr="alert-triangle.png"/>
+          <p:cNvPicPr>
+            <a:picLocks noChangeAspect="1"/>
+          </p:cNvPicPr>
+          <p:nvPr/>
+        </p:nvPicPr>
+        <p:blipFill>
+          <a:blip r:embed="rId2"/>
+          <a:stretch>
+            <a:fillRect/>
+          </a:stretch>
+        </p:blipFill>
+        <p:spPr>
+          <a:xfrm>
+            <a:off x="658368" y="2176272"/>
+            <a:ext cx="274320" cy="274320"/>
+          </a:xfrm>
+          <a:prstGeom prst="rect">
+            <a:avLst/>
+          </a:prstGeom>
+        </p:spPr>
+      </p:pic>
+      <p:sp>
+        <p:nvSpPr>
+          <p:cNvPr id="5" name="TextBox 4"/>
+          <p:cNvSpPr txBox="1"/>
+          <p:nvPr/>
+        </p:nvSpPr>
+        <p:spPr>
+          <a:xfrm>
+            <a:off x="1078992" y="2148840"/>
+            <a:ext cx="10515600" cy="493776"/>
+          </a:xfrm>
+          <a:prstGeom prst="rect">
+            <a:avLst/>
+          </a:prstGeom>
+          <a:noFill/>
+        </p:spPr>
+        <p:txBody>
+          <a:bodyPr wrap="square">
+            <a:noAutofit/>
+          </a:bodyPr>
+          <a:lstStyle/>
+          <a:p>
+            <a:r>
+              <a:rPr sz="1650" b="0">
+                <a:solidFill>
+                  <a:srgbClr val="1E2024"/>
+                </a:solidFill>
+                <a:latin typeface="Calibri"/>
+              </a:rPr>
+              <a:t>前一頁「交集空」最容易被忽略的根因——舊 wire 版本被整批移除</a:t>
+            </a:r>
+          </a:p>
+        </p:txBody>
+      </p:sp>
+      <p:sp>
+        <p:nvSpPr>
+          <p:cNvPr id="6" name="TextBox 5"/>
+          <p:cNvSpPr txBox="1"/>
+          <p:nvPr/>
+        </p:nvSpPr>
+        <p:spPr>
+          <a:xfrm>
+            <a:off x="640080" y="2788920"/>
+            <a:ext cx="10972800" cy="822959"/>
           </a:xfrm>
           <a:prstGeom prst="rect">
             <a:avLst/>
@@ -4867,7 +4905,7 @@
                 </a:solidFill>
                 <a:latin typeface="Calibri"/>
               </a:rPr>
-              <a:t>交集空                       → client 端 UnsupportedVersionException（送出前 abort）</a:t>
+              <a:t>舊 wire API version 被整個移除，min 可 &gt; 0</a:t>
             </a:r>
           </a:p>
           <a:p>
@@ -4878,76 +4916,7 @@
                 </a:solidFill>
                 <a:latin typeface="Calibri"/>
               </a:rPr>
-              <a:t>client 繞過協商、硬送不支援版本 → broker 丟 UnsupportedVersionException、關閉連線</a:t>
-            </a:r>
-          </a:p>
-          <a:p>
-            <a:r>
-              <a:rPr sz="1350" b="0">
-                <a:solidFill>
-                  <a:srgbClr val="2C2C2A"/>
-                </a:solidFill>
-                <a:latin typeface="Calibri"/>
-              </a:rPr>
-              <a:t>（ApiVersions 例外：回 v0 + UNSUPPORTED_VERSION 錯誤碼）</a:t>
-            </a:r>
-          </a:p>
-        </p:txBody>
-      </p:sp>
-      <p:pic>
-        <p:nvPicPr>
-          <p:cNvPr id="5" name="Picture 4" descr="ban.png"/>
-          <p:cNvPicPr>
-            <a:picLocks noChangeAspect="1"/>
-          </p:cNvPicPr>
-          <p:nvPr/>
-        </p:nvPicPr>
-        <p:blipFill>
-          <a:blip r:embed="rId2"/>
-          <a:stretch>
-            <a:fillRect/>
-          </a:stretch>
-        </p:blipFill>
-        <p:spPr>
-          <a:xfrm>
-            <a:off x="658368" y="4023360"/>
-            <a:ext cx="274320" cy="274320"/>
-          </a:xfrm>
-          <a:prstGeom prst="rect">
-            <a:avLst/>
-          </a:prstGeom>
-        </p:spPr>
-      </p:pic>
-      <p:sp>
-        <p:nvSpPr>
-          <p:cNvPr id="6" name="TextBox 5"/>
-          <p:cNvSpPr txBox="1"/>
-          <p:nvPr/>
-        </p:nvSpPr>
-        <p:spPr>
-          <a:xfrm>
-            <a:off x="1078992" y="3995928"/>
-            <a:ext cx="10515600" cy="493776"/>
-          </a:xfrm>
-          <a:prstGeom prst="rect">
-            <a:avLst/>
-          </a:prstGeom>
-          <a:noFill/>
-        </p:spPr>
-        <p:txBody>
-          <a:bodyPr wrap="square">
-            <a:noAutofit/>
-          </a:bodyPr>
-          <a:lstStyle/>
-          <a:p>
-            <a:r>
-              <a:rPr sz="1650" b="0">
-                <a:solidFill>
-                  <a:srgbClr val="1E2024"/>
-                </a:solidFill>
-                <a:latin typeface="Calibri"/>
-              </a:rPr>
-              <a:t>多數情況 client 在送出前就本地中止，根本沒上網路</a:t>
+              <a:t>  Fetch：4–18（v0–3 在 4.0 移除）</a:t>
             </a:r>
           </a:p>
         </p:txBody>
@@ -4960,7 +4929,46 @@
         </p:nvSpPr>
         <p:spPr>
           <a:xfrm>
-            <a:off x="640080" y="4636008"/>
+            <a:off x="640080" y="3813048"/>
+            <a:ext cx="10972800" cy="877824"/>
+          </a:xfrm>
+          <a:prstGeom prst="rect">
+            <a:avLst/>
+          </a:prstGeom>
+          <a:solidFill>
+            <a:srgbClr val="E9F3DE"/>
+          </a:solidFill>
+          <a:ln>
+            <a:noFill/>
+          </a:ln>
+        </p:spPr>
+        <p:txBody>
+          <a:bodyPr wrap="square" lIns="146304" tIns="82296">
+            <a:noAutofit/>
+          </a:bodyPr>
+          <a:lstStyle/>
+          <a:p>
+            <a:r>
+              <a:rPr sz="1500" b="0">
+                <a:solidFill>
+                  <a:srgbClr val="27500A"/>
+                </a:solidFill>
+                <a:latin typeface="Calibri"/>
+              </a:rPr>
+              <a:t>解法：升任一端到 4.0 前，先確認另一端 ≥ 2.1（upgrade guide 明訂雙向要求），否則協商結果沒有可用版本</a:t>
+            </a:r>
+          </a:p>
+        </p:txBody>
+      </p:sp>
+      <p:sp>
+        <p:nvSpPr>
+          <p:cNvPr id="8" name="TextBox 7"/>
+          <p:cNvSpPr txBox="1"/>
+          <p:nvPr/>
+        </p:nvSpPr>
+        <p:spPr>
+          <a:xfrm>
+            <a:off x="640080" y="4873752"/>
             <a:ext cx="10972800" cy="731520"/>
           </a:xfrm>
           <a:prstGeom prst="rect">
@@ -4981,14 +4989,48 @@
                 </a:solidFill>
                 <a:latin typeface="Calibri"/>
               </a:rPr>
-              <a:t>「硬送」指 client↔broker：自刻或有 bug 的 client 繞過協商；partition replication 的版本已由 finalized MV 事先決定，不會送出對方不懂的版本。</a:t>
-            </a:r>
-          </a:p>
-        </p:txBody>
-      </p:sp>
-      <p:sp>
-        <p:nvSpPr>
-          <p:cNvPr id="8" name="TextBox 7"/>
+              <a:t>取捨：0.8.0（2013）起九年保留每個版本——每個舊版本都是活的程式碼與測試面；4.0 用「斷 2018 年前的 client」換「刪九年的碼」，只有 major 版本邊界付得起。</a:t>
+            </a:r>
+          </a:p>
+        </p:txBody>
+      </p:sp>
+      <p:sp>
+        <p:nvSpPr>
+          <p:cNvPr id="9" name="TextBox 8"/>
+          <p:cNvSpPr txBox="1"/>
+          <p:nvPr/>
+        </p:nvSpPr>
+        <p:spPr>
+          <a:xfrm>
+            <a:off x="640080" y="5733288"/>
+            <a:ext cx="10972800" cy="731520"/>
+          </a:xfrm>
+          <a:prstGeom prst="rect">
+            <a:avLst/>
+          </a:prstGeom>
+          <a:noFill/>
+        </p:spPr>
+        <p:txBody>
+          <a:bodyPr wrap="square">
+            <a:noAutofit/>
+          </a:bodyPr>
+          <a:lstStyle/>
+          <a:p>
+            <a:r>
+              <a:rPr sz="1500" b="0">
+                <a:solidFill>
+                  <a:srgbClr val="5F5E5A"/>
+                </a:solidFill>
+                <a:latin typeface="Calibri"/>
+              </a:rPr>
+              <a:t>銜接（非本場）：finalize / 升降當下的錯誤（INVALID_UPDATE_VERSION 等）屬「運行時的版本升降」那場，本場不展開。</a:t>
+            </a:r>
+          </a:p>
+        </p:txBody>
+      </p:sp>
+      <p:sp>
+        <p:nvSpPr>
+          <p:cNvPr id="10" name="TextBox 9"/>
           <p:cNvSpPr txBox="1"/>
           <p:nvPr/>
         </p:nvSpPr>
@@ -5025,7 +5067,7 @@
                 <a:latin typeface="Courier New"/>
                 <a:hlinkClick r:id="rId3"/>
               </a:rPr>
-              <a:t>latestUsableVersion</a:t>
+              <a:t>upgrade.md:229</a:t>
             </a:r>
             <a:r>
               <a:rPr sz="1200" b="0">
@@ -5044,26 +5086,7 @@
                 <a:latin typeface="Courier New"/>
                 <a:hlinkClick r:id="rId4"/>
               </a:rPr>
-              <a:t>NetworkClient</a:t>
-            </a:r>
-            <a:r>
-              <a:rPr sz="1200" b="0">
-                <a:solidFill>
-                  <a:srgbClr val="8A8A8A"/>
-                </a:solidFill>
-                <a:latin typeface="Calibri"/>
-              </a:rPr>
-              <a:t>   ·   </a:t>
-            </a:r>
-            <a:r>
-              <a:rPr sz="1200" b="0" u="sng">
-                <a:solidFill>
-                  <a:srgbClr val="185FA5"/>
-                </a:solidFill>
-                <a:latin typeface="Courier New"/>
-                <a:hlinkClick r:id="rId5"/>
-              </a:rPr>
-              <a:t>RequestContext</a:t>
+              <a:t>FetchRequest.json validVersions</a:t>
             </a:r>
           </a:p>
         </p:txBody>
@@ -5115,7 +5138,7 @@
                 </a:solidFill>
                 <a:latin typeface="Calibri"/>
               </a:rPr>
-              <a:t>Part 2 · 失敗訊息</a:t>
+              <a:t>隨堂考 · 核心</a:t>
             </a:r>
           </a:p>
         </p:txBody>
@@ -5129,55 +5152,74 @@
         <p:spPr>
           <a:xfrm>
             <a:off x="640080" y="841248"/>
-            <a:ext cx="10972800" cy="1005840"/>
-          </a:xfrm>
-          <a:prstGeom prst="rect">
-            <a:avLst/>
-          </a:prstGeom>
-          <a:noFill/>
-        </p:spPr>
-        <p:txBody>
-          <a:bodyPr wrap="square">
-            <a:noAutofit/>
-          </a:bodyPr>
-          <a:lstStyle/>
-          <a:p>
-            <a:r>
-              <a:rPr sz="3200" b="1">
+            <a:ext cx="10972800" cy="1188720"/>
+          </a:xfrm>
+          <a:prstGeom prst="rect">
+            <a:avLst/>
+          </a:prstGeom>
+          <a:noFill/>
+        </p:spPr>
+        <p:txBody>
+          <a:bodyPr wrap="square">
+            <a:noAutofit/>
+          </a:bodyPr>
+          <a:lstStyle/>
+          <a:p>
+            <a:r>
+              <a:rPr sz="2600" b="1">
                 <a:solidFill>
                   <a:srgbClr val="1E2024"/>
                 </a:solidFill>
                 <a:latin typeface="Calibri"/>
               </a:rPr>
-              <a:t>版本截斷：為什麼「升一點點」不夠</a:t>
-            </a:r>
-          </a:p>
-        </p:txBody>
-      </p:sp>
-      <p:pic>
-        <p:nvPicPr>
-          <p:cNvPr id="4" name="Picture 3" descr="alert-triangle.png"/>
-          <p:cNvPicPr>
-            <a:picLocks noChangeAspect="1"/>
-          </p:cNvPicPr>
-          <p:nvPr/>
-        </p:nvPicPr>
-        <p:blipFill>
-          <a:blip r:embed="rId2"/>
-          <a:stretch>
-            <a:fillRect/>
-          </a:stretch>
-        </p:blipFill>
-        <p:spPr>
-          <a:xfrm>
-            <a:off x="658368" y="2176272"/>
-            <a:ext cx="274320" cy="274320"/>
-          </a:xfrm>
-          <a:prstGeom prst="rect">
-            <a:avLst/>
-          </a:prstGeom>
-        </p:spPr>
-      </p:pic>
+              <a:t>client 繞過協商、直接送出 broker 不支援的 API version，會怎樣？</a:t>
+            </a:r>
+          </a:p>
+        </p:txBody>
+      </p:sp>
+      <p:sp>
+        <p:nvSpPr>
+          <p:cNvPr id="4" name="TextBox 3"/>
+          <p:cNvSpPr txBox="1"/>
+          <p:nvPr/>
+        </p:nvSpPr>
+        <p:spPr>
+          <a:xfrm>
+            <a:off x="822960" y="2331720"/>
+            <a:ext cx="10515600" cy="493776"/>
+          </a:xfrm>
+          <a:prstGeom prst="rect">
+            <a:avLst/>
+          </a:prstGeom>
+          <a:noFill/>
+        </p:spPr>
+        <p:txBody>
+          <a:bodyPr wrap="square">
+            <a:noAutofit/>
+          </a:bodyPr>
+          <a:lstStyle/>
+          <a:p>
+            <a:r>
+              <a:rPr sz="1600" b="0">
+                <a:solidFill>
+                  <a:srgbClr val="1E2024"/>
+                </a:solidFill>
+                <a:latin typeface="Calibri"/>
+              </a:rPr>
+              <a:t>A.  </a:t>
+            </a:r>
+            <a:r>
+              <a:rPr sz="1600" b="0">
+                <a:solidFill>
+                  <a:srgbClr val="1E2024"/>
+                </a:solidFill>
+                <a:latin typeface="Calibri"/>
+              </a:rPr>
+              <a:t>一律回 UNSUPPORTED_VERSION 錯誤碼</a:t>
+            </a:r>
+          </a:p>
+        </p:txBody>
+      </p:sp>
       <p:sp>
         <p:nvSpPr>
           <p:cNvPr id="5" name="TextBox 4"/>
@@ -5186,7 +5228,7 @@
         </p:nvSpPr>
         <p:spPr>
           <a:xfrm>
-            <a:off x="1078992" y="2148840"/>
+            <a:off x="822960" y="2953512"/>
             <a:ext cx="10515600" cy="493776"/>
           </a:xfrm>
           <a:prstGeom prst="rect">
@@ -5201,13 +5243,22 @@
           <a:lstStyle/>
           <a:p>
             <a:r>
-              <a:rPr sz="1650" b="0">
+              <a:rPr sz="1600" b="0">
                 <a:solidFill>
                   <a:srgbClr val="1E2024"/>
                 </a:solidFill>
                 <a:latin typeface="Calibri"/>
               </a:rPr>
-              <a:t>前一頁「交集空」最容易被忽略的根因——舊 wire 版本被整批移除</a:t>
+              <a:t>B.  </a:t>
+            </a:r>
+            <a:r>
+              <a:rPr sz="1600" b="0">
+                <a:solidFill>
+                  <a:srgbClr val="1E2024"/>
+                </a:solidFill>
+                <a:latin typeface="Calibri"/>
+              </a:rPr>
+              <a:t>只有 ApiVersions 例外回錯誤碼+支援範圍；其他 API 直接關閉連線</a:t>
             </a:r>
           </a:p>
         </p:txBody>
@@ -5220,46 +5271,37 @@
         </p:nvSpPr>
         <p:spPr>
           <a:xfrm>
-            <a:off x="640080" y="2788920"/>
-            <a:ext cx="10972800" cy="822959"/>
-          </a:xfrm>
-          <a:prstGeom prst="rect">
-            <a:avLst/>
-          </a:prstGeom>
-          <a:solidFill>
-            <a:srgbClr val="F3F1EC"/>
-          </a:solidFill>
-          <a:ln w="6350">
-            <a:solidFill>
-              <a:srgbClr val="E3E0D8"/>
-            </a:solidFill>
-          </a:ln>
-        </p:spPr>
-        <p:txBody>
-          <a:bodyPr wrap="square" lIns="146304" tIns="91440" bIns="91440">
-            <a:noAutofit/>
-          </a:bodyPr>
-          <a:lstStyle/>
-          <a:p>
-            <a:r>
-              <a:rPr sz="1350" b="0">
-                <a:solidFill>
-                  <a:srgbClr val="2C2C2A"/>
-                </a:solidFill>
-                <a:latin typeface="Calibri"/>
-              </a:rPr>
-              <a:t>舊 wire API version 被整個移除，min 可 &gt; 0</a:t>
-            </a:r>
-          </a:p>
-          <a:p>
-            <a:r>
-              <a:rPr sz="1350" b="0">
-                <a:solidFill>
-                  <a:srgbClr val="2C2C2A"/>
-                </a:solidFill>
-                <a:latin typeface="Calibri"/>
-              </a:rPr>
-              <a:t>  Fetch：4–18（v0–3 在 4.0 移除）</a:t>
+            <a:off x="822960" y="3575304"/>
+            <a:ext cx="10515600" cy="493776"/>
+          </a:xfrm>
+          <a:prstGeom prst="rect">
+            <a:avLst/>
+          </a:prstGeom>
+          <a:noFill/>
+        </p:spPr>
+        <p:txBody>
+          <a:bodyPr wrap="square">
+            <a:noAutofit/>
+          </a:bodyPr>
+          <a:lstStyle/>
+          <a:p>
+            <a:r>
+              <a:rPr sz="1600" b="0">
+                <a:solidFill>
+                  <a:srgbClr val="1E2024"/>
+                </a:solidFill>
+                <a:latin typeface="Calibri"/>
+              </a:rPr>
+              <a:t>C.  </a:t>
+            </a:r>
+            <a:r>
+              <a:rPr sz="1600" b="0">
+                <a:solidFill>
+                  <a:srgbClr val="1E2024"/>
+                </a:solidFill>
+                <a:latin typeface="Calibri"/>
+              </a:rPr>
+              <a:t>broker 自動降版處理</a:t>
             </a:r>
           </a:p>
         </p:txBody>
@@ -5272,33 +5314,37 @@
         </p:nvSpPr>
         <p:spPr>
           <a:xfrm>
-            <a:off x="640080" y="3813048"/>
-            <a:ext cx="10972800" cy="877824"/>
-          </a:xfrm>
-          <a:prstGeom prst="rect">
-            <a:avLst/>
-          </a:prstGeom>
-          <a:solidFill>
-            <a:srgbClr val="E9F3DE"/>
-          </a:solidFill>
-          <a:ln>
-            <a:noFill/>
-          </a:ln>
-        </p:spPr>
-        <p:txBody>
-          <a:bodyPr wrap="square" lIns="146304" tIns="82296">
-            <a:noAutofit/>
-          </a:bodyPr>
-          <a:lstStyle/>
-          <a:p>
-            <a:r>
-              <a:rPr sz="1500" b="0">
-                <a:solidFill>
-                  <a:srgbClr val="27500A"/>
-                </a:solidFill>
-                <a:latin typeface="Calibri"/>
-              </a:rPr>
-              <a:t>解法：升任一端到 4.0 前，先確認另一端 ≥ 2.1（upgrade guide 明訂雙向要求），否則協商結果沒有可用版本</a:t>
+            <a:off x="822960" y="4197096"/>
+            <a:ext cx="10515600" cy="493776"/>
+          </a:xfrm>
+          <a:prstGeom prst="rect">
+            <a:avLst/>
+          </a:prstGeom>
+          <a:noFill/>
+        </p:spPr>
+        <p:txBody>
+          <a:bodyPr wrap="square">
+            <a:noAutofit/>
+          </a:bodyPr>
+          <a:lstStyle/>
+          <a:p>
+            <a:r>
+              <a:rPr sz="1600" b="0">
+                <a:solidFill>
+                  <a:srgbClr val="1E2024"/>
+                </a:solidFill>
+                <a:latin typeface="Calibri"/>
+              </a:rPr>
+              <a:t>D.  </a:t>
+            </a:r>
+            <a:r>
+              <a:rPr sz="1600" b="0">
+                <a:solidFill>
+                  <a:srgbClr val="1E2024"/>
+                </a:solidFill>
+                <a:latin typeface="Calibri"/>
+              </a:rPr>
+              <a:t>忽略版本照常處理</a:t>
             </a:r>
           </a:p>
         </p:txBody>
@@ -5311,125 +5357,28 @@
         </p:nvSpPr>
         <p:spPr>
           <a:xfrm>
-            <a:off x="640080" y="4873752"/>
-            <a:ext cx="10972800" cy="731520"/>
-          </a:xfrm>
-          <a:prstGeom prst="rect">
-            <a:avLst/>
-          </a:prstGeom>
-          <a:noFill/>
-        </p:spPr>
-        <p:txBody>
-          <a:bodyPr wrap="square">
-            <a:noAutofit/>
-          </a:bodyPr>
-          <a:lstStyle/>
-          <a:p>
-            <a:r>
-              <a:rPr sz="1500" b="0">
-                <a:solidFill>
-                  <a:srgbClr val="5F5E5A"/>
-                </a:solidFill>
-                <a:latin typeface="Calibri"/>
-              </a:rPr>
-              <a:t>取捨：0.8.0（2013）起九年保留每個版本——每個舊版本都是活的程式碼與測試面；4.0 用「斷 2018 年前的 client」換「刪九年的碼」，只有 major 版本邊界付得起。</a:t>
-            </a:r>
-          </a:p>
-        </p:txBody>
-      </p:sp>
-      <p:sp>
-        <p:nvSpPr>
-          <p:cNvPr id="9" name="TextBox 8"/>
-          <p:cNvSpPr txBox="1"/>
-          <p:nvPr/>
-        </p:nvSpPr>
-        <p:spPr>
-          <a:xfrm>
-            <a:off x="640080" y="5733288"/>
-            <a:ext cx="10972800" cy="731520"/>
-          </a:xfrm>
-          <a:prstGeom prst="rect">
-            <a:avLst/>
-          </a:prstGeom>
-          <a:noFill/>
-        </p:spPr>
-        <p:txBody>
-          <a:bodyPr wrap="square">
-            <a:noAutofit/>
-          </a:bodyPr>
-          <a:lstStyle/>
-          <a:p>
-            <a:r>
-              <a:rPr sz="1500" b="0">
-                <a:solidFill>
-                  <a:srgbClr val="5F5E5A"/>
-                </a:solidFill>
-                <a:latin typeface="Calibri"/>
-              </a:rPr>
-              <a:t>銜接（非本場）：finalize / 升降當下的錯誤（INVALID_UPDATE_VERSION 等）屬「運行時的版本升降」那場，本場不展開。</a:t>
-            </a:r>
-          </a:p>
-        </p:txBody>
-      </p:sp>
-      <p:sp>
-        <p:nvSpPr>
-          <p:cNvPr id="10" name="TextBox 9"/>
-          <p:cNvSpPr txBox="1"/>
-          <p:nvPr/>
-        </p:nvSpPr>
-        <p:spPr>
-          <a:xfrm>
-            <a:off x="640080" y="6400800"/>
-            <a:ext cx="10972800" cy="384048"/>
-          </a:xfrm>
-          <a:prstGeom prst="rect">
-            <a:avLst/>
-          </a:prstGeom>
-          <a:noFill/>
-        </p:spPr>
-        <p:txBody>
-          <a:bodyPr wrap="square">
-            <a:noAutofit/>
-          </a:bodyPr>
-          <a:lstStyle/>
-          <a:p>
-            <a:r>
-              <a:rPr sz="1200" b="1">
+            <a:off x="640080" y="4910327"/>
+            <a:ext cx="10972800" cy="914400"/>
+          </a:xfrm>
+          <a:prstGeom prst="rect">
+            <a:avLst/>
+          </a:prstGeom>
+          <a:noFill/>
+        </p:spPr>
+        <p:txBody>
+          <a:bodyPr wrap="square">
+            <a:noAutofit/>
+          </a:bodyPr>
+          <a:lstStyle/>
+          <a:p>
+            <a:r>
+              <a:rPr sz="1400" b="0">
                 <a:solidFill>
                   <a:srgbClr val="8A8A8A"/>
                 </a:solidFill>
                 <a:latin typeface="Calibri"/>
               </a:rPr>
-              <a:t>REF   </a:t>
-            </a:r>
-            <a:r>
-              <a:rPr sz="1200" b="0" u="sng">
-                <a:solidFill>
-                  <a:srgbClr val="185FA5"/>
-                </a:solidFill>
-                <a:latin typeface="Courier New"/>
-                <a:hlinkClick r:id="rId3"/>
-              </a:rPr>
-              <a:t>upgrade.md:229</a:t>
-            </a:r>
-            <a:r>
-              <a:rPr sz="1200" b="0">
-                <a:solidFill>
-                  <a:srgbClr val="8A8A8A"/>
-                </a:solidFill>
-                <a:latin typeface="Calibri"/>
-              </a:rPr>
-              <a:t>   ·   </a:t>
-            </a:r>
-            <a:r>
-              <a:rPr sz="1200" b="0" u="sng">
-                <a:solidFill>
-                  <a:srgbClr val="185FA5"/>
-                </a:solidFill>
-                <a:latin typeface="Courier New"/>
-                <a:hlinkClick r:id="rId4"/>
-              </a:rPr>
-              <a:t>FetchRequest.json validVersions</a:t>
+              <a:t>想一想 —— 下一頁公布答案</a:t>
             </a:r>
           </a:p>
         </p:txBody>
@@ -5481,7 +5430,7 @@
                 </a:solidFill>
                 <a:latin typeface="Calibri"/>
               </a:rPr>
-              <a:t>隨堂考 · 核心</a:t>
+              <a:t>隨堂考 · 核心　（正解）</a:t>
             </a:r>
           </a:p>
         </p:txBody>
@@ -5577,31 +5526,36 @@
           <a:prstGeom prst="rect">
             <a:avLst/>
           </a:prstGeom>
-          <a:noFill/>
-        </p:spPr>
-        <p:txBody>
-          <a:bodyPr wrap="square">
-            <a:noAutofit/>
-          </a:bodyPr>
-          <a:lstStyle/>
-          <a:p>
-            <a:r>
-              <a:rPr sz="1600" b="0">
-                <a:solidFill>
-                  <a:srgbClr val="1E2024"/>
+          <a:solidFill>
+            <a:srgbClr val="E9F3DE"/>
+          </a:solidFill>
+          <a:ln>
+            <a:noFill/>
+          </a:ln>
+        </p:spPr>
+        <p:txBody>
+          <a:bodyPr wrap="square" lIns="128016" tIns="54864">
+            <a:noAutofit/>
+          </a:bodyPr>
+          <a:lstStyle/>
+          <a:p>
+            <a:r>
+              <a:rPr sz="1600" b="1">
+                <a:solidFill>
+                  <a:srgbClr val="27500A"/>
                 </a:solidFill>
                 <a:latin typeface="Calibri"/>
               </a:rPr>
               <a:t>B.  </a:t>
             </a:r>
             <a:r>
-              <a:rPr sz="1600" b="0">
-                <a:solidFill>
-                  <a:srgbClr val="1E2024"/>
-                </a:solidFill>
-                <a:latin typeface="Calibri"/>
-              </a:rPr>
-              <a:t>只有 ApiVersions 例外回錯誤碼+支援範圍；其他 API 直接關閉連線</a:t>
+              <a:rPr sz="1600" b="1">
+                <a:solidFill>
+                  <a:srgbClr val="27500A"/>
+                </a:solidFill>
+                <a:latin typeface="Calibri"/>
+              </a:rPr>
+              <a:t>只有 ApiVersions 例外回錯誤碼+支援範圍；其他 API 直接關閉連線   ✓</a:t>
             </a:r>
           </a:p>
         </p:txBody>
@@ -5715,13 +5669,85 @@
           <a:lstStyle/>
           <a:p>
             <a:r>
+              <a:rPr sz="1400" b="1">
+                <a:solidFill>
+                  <a:srgbClr val="27500A"/>
+                </a:solidFill>
+                <a:latin typeface="Calibri"/>
+              </a:rPr>
+              <a:t>正解 B — </a:t>
+            </a:r>
+            <a:r>
               <a:rPr sz="1400" b="0">
                 <a:solidFill>
+                  <a:srgbClr val="1E2024"/>
+                </a:solidFill>
+                <a:latin typeface="Calibri"/>
+              </a:rPr>
+              <a:t>ApiVersions 是協商的第一支 request（此時雙方還不知道彼此版本），若它也關閉連線，client 永遠問不到支援範圍，故回 v0+錯誤碼讓 client 重新協商；其他 API 在 RequestContext 解析失敗、SocketServer 關閉連線。</a:t>
+            </a:r>
+          </a:p>
+        </p:txBody>
+      </p:sp>
+      <p:sp>
+        <p:nvSpPr>
+          <p:cNvPr id="9" name="TextBox 8"/>
+          <p:cNvSpPr txBox="1"/>
+          <p:nvPr/>
+        </p:nvSpPr>
+        <p:spPr>
+          <a:xfrm>
+            <a:off x="640080" y="6400800"/>
+            <a:ext cx="10972800" cy="384048"/>
+          </a:xfrm>
+          <a:prstGeom prst="rect">
+            <a:avLst/>
+          </a:prstGeom>
+          <a:noFill/>
+        </p:spPr>
+        <p:txBody>
+          <a:bodyPr wrap="square">
+            <a:noAutofit/>
+          </a:bodyPr>
+          <a:lstStyle/>
+          <a:p>
+            <a:r>
+              <a:rPr sz="1200" b="1">
+                <a:solidFill>
                   <a:srgbClr val="8A8A8A"/>
                 </a:solidFill>
                 <a:latin typeface="Calibri"/>
               </a:rPr>
-              <a:t>想一想 —— 下一頁公布答案</a:t>
+              <a:t>REF   </a:t>
+            </a:r>
+            <a:r>
+              <a:rPr sz="1200" b="0" u="sng">
+                <a:solidFill>
+                  <a:srgbClr val="185FA5"/>
+                </a:solidFill>
+                <a:latin typeface="Courier New"/>
+                <a:hlinkClick r:id="rId2"/>
+              </a:rPr>
+              <a:t>RequestContext.java:112</a:t>
+            </a:r>
+            <a:r>
+              <a:rPr sz="1200" b="0">
+                <a:solidFill>
+                  <a:srgbClr val="8A8A8A"/>
+                </a:solidFill>
+                <a:latin typeface="Calibri"/>
+              </a:rPr>
+              <a:t>   ·   </a:t>
+            </a:r>
+            <a:r>
+              <a:rPr sz="1200" b="0" u="sng">
+                <a:solidFill>
+                  <a:srgbClr val="185FA5"/>
+                </a:solidFill>
+                <a:latin typeface="Courier New"/>
+                <a:hlinkClick r:id="rId3"/>
+              </a:rPr>
+              <a:t>SocketServer.scala:781</a:t>
             </a:r>
           </a:p>
         </p:txBody>
@@ -5773,375 +5799,6 @@
                 </a:solidFill>
                 <a:latin typeface="Calibri"/>
               </a:rPr>
-              <a:t>隨堂考 · 核心　（正解）</a:t>
-            </a:r>
-          </a:p>
-        </p:txBody>
-      </p:sp>
-      <p:sp>
-        <p:nvSpPr>
-          <p:cNvPr id="3" name="TextBox 2"/>
-          <p:cNvSpPr txBox="1"/>
-          <p:nvPr/>
-        </p:nvSpPr>
-        <p:spPr>
-          <a:xfrm>
-            <a:off x="640080" y="841248"/>
-            <a:ext cx="10972800" cy="1188720"/>
-          </a:xfrm>
-          <a:prstGeom prst="rect">
-            <a:avLst/>
-          </a:prstGeom>
-          <a:noFill/>
-        </p:spPr>
-        <p:txBody>
-          <a:bodyPr wrap="square">
-            <a:noAutofit/>
-          </a:bodyPr>
-          <a:lstStyle/>
-          <a:p>
-            <a:r>
-              <a:rPr sz="2600" b="1">
-                <a:solidFill>
-                  <a:srgbClr val="1E2024"/>
-                </a:solidFill>
-                <a:latin typeface="Calibri"/>
-              </a:rPr>
-              <a:t>client 繞過協商、直接送出 broker 不支援的 API version，會怎樣？</a:t>
-            </a:r>
-          </a:p>
-        </p:txBody>
-      </p:sp>
-      <p:sp>
-        <p:nvSpPr>
-          <p:cNvPr id="4" name="TextBox 3"/>
-          <p:cNvSpPr txBox="1"/>
-          <p:nvPr/>
-        </p:nvSpPr>
-        <p:spPr>
-          <a:xfrm>
-            <a:off x="822960" y="2331720"/>
-            <a:ext cx="10515600" cy="493776"/>
-          </a:xfrm>
-          <a:prstGeom prst="rect">
-            <a:avLst/>
-          </a:prstGeom>
-          <a:noFill/>
-        </p:spPr>
-        <p:txBody>
-          <a:bodyPr wrap="square">
-            <a:noAutofit/>
-          </a:bodyPr>
-          <a:lstStyle/>
-          <a:p>
-            <a:r>
-              <a:rPr sz="1600" b="0">
-                <a:solidFill>
-                  <a:srgbClr val="1E2024"/>
-                </a:solidFill>
-                <a:latin typeface="Calibri"/>
-              </a:rPr>
-              <a:t>A.  </a:t>
-            </a:r>
-            <a:r>
-              <a:rPr sz="1600" b="0">
-                <a:solidFill>
-                  <a:srgbClr val="1E2024"/>
-                </a:solidFill>
-                <a:latin typeface="Calibri"/>
-              </a:rPr>
-              <a:t>一律回 UNSUPPORTED_VERSION 錯誤碼</a:t>
-            </a:r>
-          </a:p>
-        </p:txBody>
-      </p:sp>
-      <p:sp>
-        <p:nvSpPr>
-          <p:cNvPr id="5" name="TextBox 4"/>
-          <p:cNvSpPr txBox="1"/>
-          <p:nvPr/>
-        </p:nvSpPr>
-        <p:spPr>
-          <a:xfrm>
-            <a:off x="822960" y="2953512"/>
-            <a:ext cx="10515600" cy="493776"/>
-          </a:xfrm>
-          <a:prstGeom prst="rect">
-            <a:avLst/>
-          </a:prstGeom>
-          <a:solidFill>
-            <a:srgbClr val="E9F3DE"/>
-          </a:solidFill>
-          <a:ln>
-            <a:noFill/>
-          </a:ln>
-        </p:spPr>
-        <p:txBody>
-          <a:bodyPr wrap="square" lIns="128016" tIns="54864">
-            <a:noAutofit/>
-          </a:bodyPr>
-          <a:lstStyle/>
-          <a:p>
-            <a:r>
-              <a:rPr sz="1600" b="1">
-                <a:solidFill>
-                  <a:srgbClr val="27500A"/>
-                </a:solidFill>
-                <a:latin typeface="Calibri"/>
-              </a:rPr>
-              <a:t>B.  </a:t>
-            </a:r>
-            <a:r>
-              <a:rPr sz="1600" b="1">
-                <a:solidFill>
-                  <a:srgbClr val="27500A"/>
-                </a:solidFill>
-                <a:latin typeface="Calibri"/>
-              </a:rPr>
-              <a:t>只有 ApiVersions 例外回錯誤碼+支援範圍；其他 API 直接關閉連線   ✓</a:t>
-            </a:r>
-          </a:p>
-        </p:txBody>
-      </p:sp>
-      <p:sp>
-        <p:nvSpPr>
-          <p:cNvPr id="6" name="TextBox 5"/>
-          <p:cNvSpPr txBox="1"/>
-          <p:nvPr/>
-        </p:nvSpPr>
-        <p:spPr>
-          <a:xfrm>
-            <a:off x="822960" y="3575304"/>
-            <a:ext cx="10515600" cy="493776"/>
-          </a:xfrm>
-          <a:prstGeom prst="rect">
-            <a:avLst/>
-          </a:prstGeom>
-          <a:noFill/>
-        </p:spPr>
-        <p:txBody>
-          <a:bodyPr wrap="square">
-            <a:noAutofit/>
-          </a:bodyPr>
-          <a:lstStyle/>
-          <a:p>
-            <a:r>
-              <a:rPr sz="1600" b="0">
-                <a:solidFill>
-                  <a:srgbClr val="1E2024"/>
-                </a:solidFill>
-                <a:latin typeface="Calibri"/>
-              </a:rPr>
-              <a:t>C.  </a:t>
-            </a:r>
-            <a:r>
-              <a:rPr sz="1600" b="0">
-                <a:solidFill>
-                  <a:srgbClr val="1E2024"/>
-                </a:solidFill>
-                <a:latin typeface="Calibri"/>
-              </a:rPr>
-              <a:t>broker 自動降版處理</a:t>
-            </a:r>
-          </a:p>
-        </p:txBody>
-      </p:sp>
-      <p:sp>
-        <p:nvSpPr>
-          <p:cNvPr id="7" name="TextBox 6"/>
-          <p:cNvSpPr txBox="1"/>
-          <p:nvPr/>
-        </p:nvSpPr>
-        <p:spPr>
-          <a:xfrm>
-            <a:off x="822960" y="4197096"/>
-            <a:ext cx="10515600" cy="493776"/>
-          </a:xfrm>
-          <a:prstGeom prst="rect">
-            <a:avLst/>
-          </a:prstGeom>
-          <a:noFill/>
-        </p:spPr>
-        <p:txBody>
-          <a:bodyPr wrap="square">
-            <a:noAutofit/>
-          </a:bodyPr>
-          <a:lstStyle/>
-          <a:p>
-            <a:r>
-              <a:rPr sz="1600" b="0">
-                <a:solidFill>
-                  <a:srgbClr val="1E2024"/>
-                </a:solidFill>
-                <a:latin typeface="Calibri"/>
-              </a:rPr>
-              <a:t>D.  </a:t>
-            </a:r>
-            <a:r>
-              <a:rPr sz="1600" b="0">
-                <a:solidFill>
-                  <a:srgbClr val="1E2024"/>
-                </a:solidFill>
-                <a:latin typeface="Calibri"/>
-              </a:rPr>
-              <a:t>忽略版本照常處理</a:t>
-            </a:r>
-          </a:p>
-        </p:txBody>
-      </p:sp>
-      <p:sp>
-        <p:nvSpPr>
-          <p:cNvPr id="8" name="TextBox 7"/>
-          <p:cNvSpPr txBox="1"/>
-          <p:nvPr/>
-        </p:nvSpPr>
-        <p:spPr>
-          <a:xfrm>
-            <a:off x="640080" y="4910327"/>
-            <a:ext cx="10972800" cy="914400"/>
-          </a:xfrm>
-          <a:prstGeom prst="rect">
-            <a:avLst/>
-          </a:prstGeom>
-          <a:noFill/>
-        </p:spPr>
-        <p:txBody>
-          <a:bodyPr wrap="square">
-            <a:noAutofit/>
-          </a:bodyPr>
-          <a:lstStyle/>
-          <a:p>
-            <a:r>
-              <a:rPr sz="1400" b="1">
-                <a:solidFill>
-                  <a:srgbClr val="27500A"/>
-                </a:solidFill>
-                <a:latin typeface="Calibri"/>
-              </a:rPr>
-              <a:t>正解 B — </a:t>
-            </a:r>
-            <a:r>
-              <a:rPr sz="1400" b="0">
-                <a:solidFill>
-                  <a:srgbClr val="1E2024"/>
-                </a:solidFill>
-                <a:latin typeface="Calibri"/>
-              </a:rPr>
-              <a:t>ApiVersions 是協商的第一支 request（此時雙方還不知道彼此版本），若它也關閉連線，client 永遠問不到支援範圍，故回 v0+錯誤碼讓 client 重新協商；其他 API 在 RequestContext 解析失敗、SocketServer 關閉連線。</a:t>
-            </a:r>
-          </a:p>
-        </p:txBody>
-      </p:sp>
-      <p:sp>
-        <p:nvSpPr>
-          <p:cNvPr id="9" name="TextBox 8"/>
-          <p:cNvSpPr txBox="1"/>
-          <p:nvPr/>
-        </p:nvSpPr>
-        <p:spPr>
-          <a:xfrm>
-            <a:off x="640080" y="6400800"/>
-            <a:ext cx="10972800" cy="384048"/>
-          </a:xfrm>
-          <a:prstGeom prst="rect">
-            <a:avLst/>
-          </a:prstGeom>
-          <a:noFill/>
-        </p:spPr>
-        <p:txBody>
-          <a:bodyPr wrap="square">
-            <a:noAutofit/>
-          </a:bodyPr>
-          <a:lstStyle/>
-          <a:p>
-            <a:r>
-              <a:rPr sz="1200" b="1">
-                <a:solidFill>
-                  <a:srgbClr val="8A8A8A"/>
-                </a:solidFill>
-                <a:latin typeface="Calibri"/>
-              </a:rPr>
-              <a:t>REF   </a:t>
-            </a:r>
-            <a:r>
-              <a:rPr sz="1200" b="0" u="sng">
-                <a:solidFill>
-                  <a:srgbClr val="185FA5"/>
-                </a:solidFill>
-                <a:latin typeface="Courier New"/>
-                <a:hlinkClick r:id="rId2"/>
-              </a:rPr>
-              <a:t>RequestContext.java:112</a:t>
-            </a:r>
-            <a:r>
-              <a:rPr sz="1200" b="0">
-                <a:solidFill>
-                  <a:srgbClr val="8A8A8A"/>
-                </a:solidFill>
-                <a:latin typeface="Calibri"/>
-              </a:rPr>
-              <a:t>   ·   </a:t>
-            </a:r>
-            <a:r>
-              <a:rPr sz="1200" b="0" u="sng">
-                <a:solidFill>
-                  <a:srgbClr val="185FA5"/>
-                </a:solidFill>
-                <a:latin typeface="Courier New"/>
-                <a:hlinkClick r:id="rId3"/>
-              </a:rPr>
-              <a:t>SocketServer.scala:781</a:t>
-            </a:r>
-          </a:p>
-        </p:txBody>
-      </p:sp>
-    </p:spTree>
-  </p:cSld>
-  <p:clrMapOvr>
-    <a:masterClrMapping/>
-  </p:clrMapOvr>
-</p:sld>
-</file>
-
-<file path=ppt/slides/slide18.xml><?xml version="1.0" encoding="utf-8"?>
-<p:sld xmlns:a="http://schemas.openxmlformats.org/drawingml/2006/main" xmlns:p="http://schemas.openxmlformats.org/presentationml/2006/main" xmlns:r="http://schemas.openxmlformats.org/officeDocument/2006/relationships">
-  <p:cSld>
-    <p:spTree>
-      <p:nvGrpSpPr>
-        <p:cNvPr id="1" name=""/>
-        <p:cNvGrpSpPr/>
-        <p:nvPr/>
-      </p:nvGrpSpPr>
-      <p:grpSpPr/>
-      <p:sp>
-        <p:nvSpPr>
-          <p:cNvPr id="2" name="TextBox 1"/>
-          <p:cNvSpPr txBox="1"/>
-          <p:nvPr/>
-        </p:nvSpPr>
-        <p:spPr>
-          <a:xfrm>
-            <a:off x="640080" y="457200"/>
-            <a:ext cx="10972800" cy="365760"/>
-          </a:xfrm>
-          <a:prstGeom prst="rect">
-            <a:avLst/>
-          </a:prstGeom>
-          <a:noFill/>
-        </p:spPr>
-        <p:txBody>
-          <a:bodyPr wrap="square">
-            <a:noAutofit/>
-          </a:bodyPr>
-          <a:lstStyle/>
-          <a:p>
-            <a:r>
-              <a:rPr sz="1300" b="1">
-                <a:solidFill>
-                  <a:srgbClr val="185FA5"/>
-                </a:solidFill>
-                <a:latin typeface="Calibri"/>
-              </a:rPr>
               <a:t>Recap</a:t>
             </a:r>
           </a:p>
@@ -7866,7 +7523,7 @@
         <p:spPr>
           <a:xfrm>
             <a:off x="640080" y="5056632"/>
-            <a:ext cx="10972800" cy="1499616"/>
+            <a:ext cx="10972800" cy="1188720"/>
           </a:xfrm>
           <a:prstGeom prst="rect">
             <a:avLst/>
@@ -7891,7 +7548,7 @@
                 </a:solidFill>
                 <a:latin typeface="Calibri"/>
               </a:rPr>
-              <a:t>為什麼交給 MV，不各連線協商？協商能讓 broker 互相『讀得懂』——但讀得懂不代表跨版本行為正確（如 KIP-903 replica-epoch fencing 要全叢集一致生效，才擋得住舊 epoch 的 follower 進 ISR）。MV 讓 operator 一次原子切換、與滾 binary 脫鉤，這就是升級兩階段的由來</a:t>
+              <a:t>為什麼交給 MV，不各連線協商？協商能讓 broker 互相『讀得懂』——但讀得懂不代表跨版本行為正確（如 KIP-903 replica-epoch fencing 要全叢集一致生效，才擋得住舊 epoch 的 follower 進 ISR）</a:t>
             </a:r>
           </a:p>
         </p:txBody>
@@ -8840,7 +8497,7 @@
                 </a:solidFill>
                 <a:latin typeface="Calibri"/>
               </a:rPr>
-              <a:t>另一條更大的隱形帳單是相容性測試（下兩張細看）——每個版本、每個歷史 release 都得長期盯著。</a:t>
+              <a:t>另一條更大的隱形帳單是相容性測試（下一張細看）——每個版本、每個歷史 release 都得長期盯著。</a:t>
             </a:r>
           </a:p>
         </p:txBody>

--- a/study/version-control/kafka-version-negotiation.pptx
+++ b/study/version-control/kafka-version-negotiation.pptx
@@ -6779,7 +6779,7 @@
         <p:spPr>
           <a:xfrm>
             <a:off x="640080" y="3136392"/>
-            <a:ext cx="10972800" cy="1645920"/>
+            <a:ext cx="10972800" cy="1097280"/>
           </a:xfrm>
           <a:prstGeom prst="rect">
             <a:avLst/>
@@ -6806,7 +6806,7 @@
                 </a:solidFill>
                 <a:latin typeface="Calibri"/>
               </a:rPr>
-              <a:t>release version   = 我裝了哪版 binary            (per-node)</a:t>
+              <a:t>release version   = 我裝了哪版 binary          (per-node)</a:t>
             </a:r>
           </a:p>
           <a:p>
@@ -6817,7 +6817,7 @@
                 </a:solidFill>
                 <a:latin typeface="Calibri"/>
               </a:rPr>
-              <a:t>metadata.version  = 叢集 finalized 的 feature level (cluster-wide)</a:t>
+              <a:t>metadata.version  = 管理員替全叢集設的功能檔位  (cluster-wide)</a:t>
             </a:r>
           </a:p>
           <a:p>
@@ -6828,7 +6828,7 @@
                 </a:solidFill>
                 <a:latin typeface="Calibri"/>
               </a:rPr>
-              <a:t>wire API version  = 這條連線講第幾版               (per-connection)</a:t>
+              <a:t>wire API version  = 這條連線講第幾版            (per-connection)</a:t>
             </a:r>
           </a:p>
         </p:txBody>
@@ -6841,7 +6841,7 @@
         </p:nvSpPr>
         <p:spPr>
           <a:xfrm>
-            <a:off x="640080" y="4983480"/>
+            <a:off x="640080" y="4434840"/>
             <a:ext cx="10972800" cy="731520"/>
           </a:xfrm>
           <a:prstGeom prst="rect">

--- a/study/version-control/kafka-version-negotiation.pptx
+++ b/study/version-control/kafka-version-negotiation.pptx
@@ -6806,7 +6806,7 @@
                 </a:solidFill>
                 <a:latin typeface="Calibri"/>
               </a:rPr>
-              <a:t>release version   = 我裝了哪版 binary          (per-node)</a:t>
+              <a:t>release version   = 我裝了哪版 binary        (per-node)</a:t>
             </a:r>
           </a:p>
           <a:p>
@@ -6817,7 +6817,7 @@
                 </a:solidFill>
                 <a:latin typeface="Calibri"/>
               </a:rPr>
-              <a:t>metadata.version  = 管理員替全叢集設的功能檔位  (cluster-wide)</a:t>
+              <a:t>metadata.version  = 全叢集當前啟用到哪一級    (cluster-wide)</a:t>
             </a:r>
           </a:p>
           <a:p>
@@ -6828,7 +6828,7 @@
                 </a:solidFill>
                 <a:latin typeface="Calibri"/>
               </a:rPr>
-              <a:t>wire API version  = 這條連線講第幾版            (per-connection)</a:t>
+              <a:t>wire API version  = 這條連線講第幾版          (per-connection)</a:t>
             </a:r>
           </a:p>
         </p:txBody>

--- a/study/version-control/kafka-version-negotiation.pptx
+++ b/study/version-control/kafka-version-negotiation.pptx
@@ -3994,7 +3994,7 @@
                 </a:solidFill>
                 <a:latin typeface="Calibri"/>
               </a:rPr>
-              <a:t>controller 每次指定</a:t>
+              <a:t>由 controller 統一指定</a:t>
             </a:r>
           </a:p>
         </p:txBody>
@@ -4291,7 +4291,7 @@
                 </a:solidFill>
                 <a:latin typeface="Calibri"/>
               </a:rPr>
-              <a:t>controller 每次指定</a:t>
+              <a:t>由 controller 統一指定</a:t>
             </a:r>
           </a:p>
         </p:txBody>

--- a/study/version-control/kafka-version-negotiation.pptx
+++ b/study/version-control/kafka-version-negotiation.pptx
@@ -22,6 +22,7 @@
     <p:sldId id="270" r:id="rId21"/>
     <p:sldId id="271" r:id="rId22"/>
     <p:sldId id="272" r:id="rId23"/>
+    <p:sldId id="273" r:id="rId24"/>
   </p:sldIdLst>
   <p:sldSz cx="12191695" cy="6858000" type="screen4x3"/>
   <p:notesSz cx="6858000" cy="9144000"/>
@@ -3330,7 +3331,7 @@
                 </a:solidFill>
                 <a:latin typeface="Calibri"/>
               </a:rPr>
-              <a:t>Part 1 · 代價 · 測試</a:t>
+              <a:t>Part 1 · 代價</a:t>
             </a:r>
           </a:p>
         </p:txBody>
@@ -3364,14 +3365,77 @@
                 </a:solidFill>
                 <a:latin typeface="Calibri"/>
               </a:rPr>
-              <a:t>「相容」到底要保證哪些事？</a:t>
+              <a:t>代價：每支 API 的 handler 都要逐版分岔</a:t>
+            </a:r>
+          </a:p>
+        </p:txBody>
+      </p:sp>
+      <p:sp>
+        <p:nvSpPr>
+          <p:cNvPr id="4" name="TextBox 3"/>
+          <p:cNvSpPr txBox="1"/>
+          <p:nvPr/>
+        </p:nvSpPr>
+        <p:spPr>
+          <a:xfrm>
+            <a:off x="640080" y="2148840"/>
+            <a:ext cx="10972800" cy="1097280"/>
+          </a:xfrm>
+          <a:prstGeom prst="rect">
+            <a:avLst/>
+          </a:prstGeom>
+          <a:solidFill>
+            <a:srgbClr val="F3F1EC"/>
+          </a:solidFill>
+          <a:ln w="6350">
+            <a:solidFill>
+              <a:srgbClr val="E3E0D8"/>
+            </a:solidFill>
+          </a:ln>
+        </p:spPr>
+        <p:txBody>
+          <a:bodyPr wrap="square" lIns="146304" tIns="91440" bIns="91440">
+            <a:noAutofit/>
+          </a:bodyPr>
+          <a:lstStyle/>
+          <a:p>
+            <a:r>
+              <a:rPr sz="1350" b="0">
+                <a:solidFill>
+                  <a:srgbClr val="2C2C2A"/>
+                </a:solidFill>
+                <a:latin typeface="Calibri"/>
+              </a:rPr>
+              <a:t>每支 API 的 broker handler 都逐版分岔，例如 Fetch：</a:t>
+            </a:r>
+          </a:p>
+          <a:p>
+            <a:r>
+              <a:rPr sz="1350" b="0">
+                <a:solidFill>
+                  <a:srgbClr val="2C2C2A"/>
+                </a:solidFill>
+                <a:latin typeface="Calibri"/>
+              </a:rPr>
+              <a:t>  if (version &gt;= 13)  用 topic-id   else   用 topic-name</a:t>
+            </a:r>
+          </a:p>
+          <a:p>
+            <a:r>
+              <a:rPr sz="1350" b="0">
+                <a:solidFill>
+                  <a:srgbClr val="2C2C2A"/>
+                </a:solidFill>
+                <a:latin typeface="Calibri"/>
+              </a:rPr>
+              <a:t>  老版缺的欄位給預設 · 回應一律照「request 的版本」序列化</a:t>
             </a:r>
           </a:p>
         </p:txBody>
       </p:sp>
       <p:pic>
         <p:nvPicPr>
-          <p:cNvPr id="4" name="Picture 3" descr="arrows-split.png"/>
+          <p:cNvPr id="5" name="Picture 4" descr="arrows-split.png"/>
           <p:cNvPicPr>
             <a:picLocks noChangeAspect="1"/>
           </p:cNvPicPr>
@@ -3385,7 +3449,7 @@
         </p:blipFill>
         <p:spPr>
           <a:xfrm>
-            <a:off x="658368" y="2176272"/>
+            <a:off x="658368" y="3474720"/>
             <a:ext cx="274320" cy="274320"/>
           </a:xfrm>
           <a:prstGeom prst="rect">
@@ -3395,14 +3459,14 @@
       </p:pic>
       <p:sp>
         <p:nvSpPr>
-          <p:cNvPr id="5" name="TextBox 4"/>
-          <p:cNvSpPr txBox="1"/>
-          <p:nvPr/>
-        </p:nvSpPr>
-        <p:spPr>
-          <a:xfrm>
-            <a:off x="1078992" y="2148840"/>
-            <a:ext cx="10515600" cy="493776"/>
+          <p:cNvPr id="6" name="TextBox 5"/>
+          <p:cNvSpPr txBox="1"/>
+          <p:nvPr/>
+        </p:nvSpPr>
+        <p:spPr>
+          <a:xfrm>
+            <a:off x="1078992" y="3447288"/>
+            <a:ext cx="10515600" cy="841248"/>
           </a:xfrm>
           <a:prstGeom prst="rect">
             <a:avLst/>
@@ -3422,35 +3486,11 @@
                 </a:solidFill>
                 <a:latin typeface="Calibri"/>
               </a:rPr>
-              <a:t>① 格式自洽：每個宣稱支援的 wire 版本，自己序列化都要來回讀寫無誤</a:t>
-            </a:r>
-          </a:p>
-        </p:txBody>
-      </p:sp>
-      <p:pic>
-        <p:nvPicPr>
-          <p:cNvPr id="6" name="Picture 5" descr="point.png"/>
-          <p:cNvPicPr>
-            <a:picLocks noChangeAspect="1"/>
-          </p:cNvPicPr>
-          <p:nvPr/>
-        </p:nvPicPr>
-        <p:blipFill>
-          <a:blip r:embed="rId3"/>
-          <a:stretch>
-            <a:fillRect/>
-          </a:stretch>
-        </p:blipFill>
-        <p:spPr>
-          <a:xfrm>
-            <a:off x="658368" y="2816352"/>
-            <a:ext cx="274320" cy="274320"/>
-          </a:xfrm>
-          <a:prstGeom prst="rect">
-            <a:avLst/>
-          </a:prstGeom>
-        </p:spPr>
-      </p:pic>
+              <a:t>讀寫欄位、語意差異、預設值全逐版 if (version ≥ N)，散在每支 API 的 handler 裡——加一版就多一堆分支要維護</a:t>
+            </a:r>
+          </a:p>
+        </p:txBody>
+      </p:sp>
       <p:sp>
         <p:nvSpPr>
           <p:cNvPr id="7" name="TextBox 6"/>
@@ -3459,157 +3499,41 @@
         </p:nvSpPr>
         <p:spPr>
           <a:xfrm>
-            <a:off x="1078992" y="2788920"/>
-            <a:ext cx="10515600" cy="841248"/>
-          </a:xfrm>
-          <a:prstGeom prst="rect">
-            <a:avLst/>
-          </a:prstGeom>
-          <a:noFill/>
-        </p:spPr>
-        <p:txBody>
-          <a:bodyPr wrap="square">
-            <a:noAutofit/>
-          </a:bodyPr>
-          <a:lstStyle/>
-          <a:p>
-            <a:r>
-              <a:rPr sz="1650" b="0">
-                <a:solidFill>
-                  <a:srgbClr val="1E2024"/>
-                </a:solidFill>
-                <a:latin typeface="Calibri"/>
-              </a:rPr>
-              <a:t>② 新 client → 舊 broker：client 肯協商降版、不假設對方有新功能</a:t>
-            </a:r>
-          </a:p>
-        </p:txBody>
-      </p:sp>
-      <p:pic>
-        <p:nvPicPr>
-          <p:cNvPr id="8" name="Picture 7" descr="point.png"/>
-          <p:cNvPicPr>
-            <a:picLocks noChangeAspect="1"/>
-          </p:cNvPicPr>
-          <p:nvPr/>
-        </p:nvPicPr>
-        <p:blipFill>
-          <a:blip r:embed="rId3"/>
-          <a:stretch>
-            <a:fillRect/>
-          </a:stretch>
-        </p:blipFill>
-        <p:spPr>
-          <a:xfrm>
-            <a:off x="658368" y="3803904"/>
-            <a:ext cx="274320" cy="274320"/>
-          </a:xfrm>
-          <a:prstGeom prst="rect">
-            <a:avLst/>
-          </a:prstGeom>
-        </p:spPr>
-      </p:pic>
-      <p:sp>
-        <p:nvSpPr>
-          <p:cNvPr id="9" name="TextBox 8"/>
-          <p:cNvSpPr txBox="1"/>
-          <p:nvPr/>
-        </p:nvSpPr>
-        <p:spPr>
-          <a:xfrm>
-            <a:off x="1078992" y="3776472"/>
-            <a:ext cx="10515600" cy="841248"/>
-          </a:xfrm>
-          <a:prstGeom prst="rect">
-            <a:avLst/>
-          </a:prstGeom>
-          <a:noFill/>
-        </p:spPr>
-        <p:txBody>
-          <a:bodyPr wrap="square">
-            <a:noAutofit/>
-          </a:bodyPr>
-          <a:lstStyle/>
-          <a:p>
-            <a:r>
-              <a:rPr sz="1650" b="0">
-                <a:solidFill>
-                  <a:srgbClr val="1E2024"/>
-                </a:solidFill>
-                <a:latin typeface="Calibri"/>
-              </a:rPr>
-              <a:t>③ 舊 client → 新 broker：broker 保留舊 wire 版本、繼續服務</a:t>
-            </a:r>
-          </a:p>
-        </p:txBody>
-      </p:sp>
-      <p:pic>
-        <p:nvPicPr>
-          <p:cNvPr id="10" name="Picture 9" descr="point.png"/>
-          <p:cNvPicPr>
-            <a:picLocks noChangeAspect="1"/>
-          </p:cNvPicPr>
-          <p:nvPr/>
-        </p:nvPicPr>
-        <p:blipFill>
-          <a:blip r:embed="rId3"/>
-          <a:stretch>
-            <a:fillRect/>
-          </a:stretch>
-        </p:blipFill>
-        <p:spPr>
-          <a:xfrm>
-            <a:off x="658368" y="4791456"/>
-            <a:ext cx="274320" cy="274320"/>
-          </a:xfrm>
-          <a:prstGeom prst="rect">
-            <a:avLst/>
-          </a:prstGeom>
-        </p:spPr>
-      </p:pic>
-      <p:sp>
-        <p:nvSpPr>
-          <p:cNvPr id="11" name="TextBox 10"/>
-          <p:cNvSpPr txBox="1"/>
-          <p:nvPr/>
-        </p:nvSpPr>
-        <p:spPr>
-          <a:xfrm>
-            <a:off x="1078992" y="4764024"/>
-            <a:ext cx="10515600" cy="841248"/>
-          </a:xfrm>
-          <a:prstGeom prst="rect">
-            <a:avLst/>
-          </a:prstGeom>
-          <a:noFill/>
-        </p:spPr>
-        <p:txBody>
-          <a:bodyPr wrap="square">
-            <a:noAutofit/>
-          </a:bodyPr>
-          <a:lstStyle/>
-          <a:p>
-            <a:r>
-              <a:rPr sz="1650" b="0">
-                <a:solidFill>
-                  <a:srgbClr val="1E2024"/>
-                </a:solidFill>
-                <a:latin typeface="Calibri"/>
-              </a:rPr>
-              <a:t>④ 滾動升級混版：新舊 broker 並存，inter-broker（finalized MV 決定）＋對 client 都不掉資料</a:t>
-            </a:r>
-          </a:p>
-        </p:txBody>
-      </p:sp>
-      <p:sp>
-        <p:nvSpPr>
-          <p:cNvPr id="12" name="TextBox 11"/>
-          <p:cNvSpPr txBox="1"/>
-          <p:nvPr/>
-        </p:nvSpPr>
-        <p:spPr>
-          <a:xfrm>
-            <a:off x="640080" y="5751576"/>
+            <a:off x="640080" y="4434840"/>
+            <a:ext cx="10972800" cy="438912"/>
+          </a:xfrm>
+          <a:prstGeom prst="rect">
+            <a:avLst/>
+          </a:prstGeom>
+          <a:noFill/>
+        </p:spPr>
+        <p:txBody>
+          <a:bodyPr wrap="square">
+            <a:noAutofit/>
+          </a:bodyPr>
+          <a:lstStyle/>
+          <a:p>
+            <a:r>
+              <a:rPr sz="1500" b="0">
+                <a:solidFill>
+                  <a:srgbClr val="5F5E5A"/>
+                </a:solidFill>
+                <a:latin typeface="Calibri"/>
+              </a:rPr>
+              <a:t>另一條更大的隱形帳單是相容性測試（下一張細看）——每個版本、每個歷史 release 都得長期盯著。</a:t>
+            </a:r>
+          </a:p>
+        </p:txBody>
+      </p:sp>
+      <p:sp>
+        <p:nvSpPr>
+          <p:cNvPr id="8" name="TextBox 7"/>
+          <p:cNvSpPr txBox="1"/>
+          <p:nvPr/>
+        </p:nvSpPr>
+        <p:spPr>
+          <a:xfrm>
+            <a:off x="640080" y="5001768"/>
             <a:ext cx="10972800" cy="877824"/>
           </a:xfrm>
           <a:prstGeom prst="rect">
@@ -3635,14 +3559,14 @@
                 </a:solidFill>
                 <a:latin typeface="Calibri"/>
               </a:rPr>
-              <a:t>這四條是本場最相關的相容承諾——每一條都得有測試長期盯著（tagged fields、第三方 client 等外圍成本另計）</a:t>
-            </a:r>
-          </a:p>
-        </p:txBody>
-      </p:sp>
-      <p:sp>
-        <p:nvSpPr>
-          <p:cNvPr id="13" name="TextBox 12"/>
+              <a:t>貴到 Kafka 自己在 KIP-896 承認「maintenance cost up, value down」，4.0 砍掉 2.1 以前的舊版本止血</a:t>
+            </a:r>
+          </a:p>
+        </p:txBody>
+      </p:sp>
+      <p:sp>
+        <p:nvSpPr>
+          <p:cNvPr id="9" name="TextBox 8"/>
           <p:cNvSpPr txBox="1"/>
           <p:nvPr/>
         </p:nvSpPr>
@@ -3677,9 +3601,28 @@
                   <a:srgbClr val="185FA5"/>
                 </a:solidFill>
                 <a:latin typeface="Courier New"/>
+                <a:hlinkClick r:id="rId3"/>
+              </a:rPr>
+              <a:t>version()&gt;=13</a:t>
+            </a:r>
+            <a:r>
+              <a:rPr sz="1200" b="0">
+                <a:solidFill>
+                  <a:srgbClr val="8A8A8A"/>
+                </a:solidFill>
+                <a:latin typeface="Calibri"/>
+              </a:rPr>
+              <a:t>   ·   </a:t>
+            </a:r>
+            <a:r>
+              <a:rPr sz="1200" b="0" u="sng">
+                <a:solidFill>
+                  <a:srgbClr val="185FA5"/>
+                </a:solidFill>
+                <a:latin typeface="Courier New"/>
                 <a:hlinkClick r:id="rId4"/>
               </a:rPr>
-              <a:t>①格式自洽</a:t>
+              <a:t>回應=request 版本</a:t>
             </a:r>
             <a:r>
               <a:rPr sz="1200" b="0">
@@ -3698,7 +3641,7 @@
                 <a:latin typeface="Courier New"/>
                 <a:hlinkClick r:id="rId5"/>
               </a:rPr>
-              <a:t>②新→舊</a:t>
+              <a:t>預設值</a:t>
             </a:r>
             <a:r>
               <a:rPr sz="1200" b="0">
@@ -3714,29 +3657,10 @@
                 <a:solidFill>
                   <a:srgbClr val="185FA5"/>
                 </a:solidFill>
-                <a:latin typeface="Courier New"/>
+                <a:latin typeface="Calibri"/>
                 <a:hlinkClick r:id="rId6"/>
               </a:rPr>
-              <a:t>③舊→新</a:t>
-            </a:r>
-            <a:r>
-              <a:rPr sz="1200" b="0">
-                <a:solidFill>
-                  <a:srgbClr val="8A8A8A"/>
-                </a:solidFill>
-                <a:latin typeface="Calibri"/>
-              </a:rPr>
-              <a:t>   ·   </a:t>
-            </a:r>
-            <a:r>
-              <a:rPr sz="1200" b="0" u="sng">
-                <a:solidFill>
-                  <a:srgbClr val="185FA5"/>
-                </a:solidFill>
-                <a:latin typeface="Courier New"/>
-                <a:hlinkClick r:id="rId7"/>
-              </a:rPr>
-              <a:t>④滾動升級</a:t>
+              <a:t>KIP-896</a:t>
             </a:r>
           </a:p>
         </p:txBody>
@@ -3788,7 +3712,7 @@
                 </a:solidFill>
                 <a:latin typeface="Calibri"/>
               </a:rPr>
-              <a:t>隨堂考 · 核心</a:t>
+              <a:t>Part 1 · 代價 · 測試</a:t>
             </a:r>
           </a:p>
         </p:txBody>
@@ -3802,40 +3726,64 @@
         <p:spPr>
           <a:xfrm>
             <a:off x="640080" y="841248"/>
-            <a:ext cx="10972800" cy="1188720"/>
-          </a:xfrm>
-          <a:prstGeom prst="rect">
-            <a:avLst/>
-          </a:prstGeom>
-          <a:noFill/>
-        </p:spPr>
-        <p:txBody>
-          <a:bodyPr wrap="square">
-            <a:noAutofit/>
-          </a:bodyPr>
-          <a:lstStyle/>
-          <a:p>
-            <a:r>
-              <a:rPr sz="2600" b="1">
+            <a:ext cx="10972800" cy="1005840"/>
+          </a:xfrm>
+          <a:prstGeom prst="rect">
+            <a:avLst/>
+          </a:prstGeom>
+          <a:noFill/>
+        </p:spPr>
+        <p:txBody>
+          <a:bodyPr wrap="square">
+            <a:noAutofit/>
+          </a:bodyPr>
+          <a:lstStyle/>
+          <a:p>
+            <a:r>
+              <a:rPr sz="3200" b="1">
                 <a:solidFill>
                   <a:srgbClr val="1E2024"/>
                 </a:solidFill>
                 <a:latin typeface="Calibri"/>
               </a:rPr>
-              <a:t>partition replication（follower→leader）裡，Fetch 的版本怎麼決定？</a:t>
-            </a:r>
-          </a:p>
-        </p:txBody>
-      </p:sp>
-      <p:sp>
-        <p:nvSpPr>
-          <p:cNvPr id="4" name="TextBox 3"/>
-          <p:cNvSpPr txBox="1"/>
-          <p:nvPr/>
-        </p:nvSpPr>
-        <p:spPr>
-          <a:xfrm>
-            <a:off x="822960" y="2331720"/>
+              <a:t>「相容」到底要保證哪些事？</a:t>
+            </a:r>
+          </a:p>
+        </p:txBody>
+      </p:sp>
+      <p:pic>
+        <p:nvPicPr>
+          <p:cNvPr id="4" name="Picture 3" descr="arrows-split.png"/>
+          <p:cNvPicPr>
+            <a:picLocks noChangeAspect="1"/>
+          </p:cNvPicPr>
+          <p:nvPr/>
+        </p:nvPicPr>
+        <p:blipFill>
+          <a:blip r:embed="rId2"/>
+          <a:stretch>
+            <a:fillRect/>
+          </a:stretch>
+        </p:blipFill>
+        <p:spPr>
+          <a:xfrm>
+            <a:off x="658368" y="2176272"/>
+            <a:ext cx="274320" cy="274320"/>
+          </a:xfrm>
+          <a:prstGeom prst="rect">
+            <a:avLst/>
+          </a:prstGeom>
+        </p:spPr>
+      </p:pic>
+      <p:sp>
+        <p:nvSpPr>
+          <p:cNvPr id="5" name="TextBox 4"/>
+          <p:cNvSpPr txBox="1"/>
+          <p:nvPr/>
+        </p:nvSpPr>
+        <p:spPr>
+          <a:xfrm>
+            <a:off x="1078992" y="2148840"/>
             <a:ext cx="10515600" cy="493776"/>
           </a:xfrm>
           <a:prstGeom prst="rect">
@@ -3850,185 +3798,327 @@
           <a:lstStyle/>
           <a:p>
             <a:r>
-              <a:rPr sz="1600" b="0">
+              <a:rPr sz="1650" b="0">
                 <a:solidFill>
                   <a:srgbClr val="1E2024"/>
                 </a:solidFill>
                 <a:latin typeface="Calibri"/>
               </a:rPr>
-              <a:t>A.  </a:t>
-            </a:r>
-            <a:r>
-              <a:rPr sz="1600" b="0">
+              <a:t>① 格式自洽：每個宣稱支援的 wire 版本，自己序列化都要來回讀寫無誤</a:t>
+            </a:r>
+          </a:p>
+        </p:txBody>
+      </p:sp>
+      <p:pic>
+        <p:nvPicPr>
+          <p:cNvPr id="6" name="Picture 5" descr="point.png"/>
+          <p:cNvPicPr>
+            <a:picLocks noChangeAspect="1"/>
+          </p:cNvPicPr>
+          <p:nvPr/>
+        </p:nvPicPr>
+        <p:blipFill>
+          <a:blip r:embed="rId3"/>
+          <a:stretch>
+            <a:fillRect/>
+          </a:stretch>
+        </p:blipFill>
+        <p:spPr>
+          <a:xfrm>
+            <a:off x="658368" y="2816352"/>
+            <a:ext cx="274320" cy="274320"/>
+          </a:xfrm>
+          <a:prstGeom prst="rect">
+            <a:avLst/>
+          </a:prstGeom>
+        </p:spPr>
+      </p:pic>
+      <p:sp>
+        <p:nvSpPr>
+          <p:cNvPr id="7" name="TextBox 6"/>
+          <p:cNvSpPr txBox="1"/>
+          <p:nvPr/>
+        </p:nvSpPr>
+        <p:spPr>
+          <a:xfrm>
+            <a:off x="1078992" y="2788920"/>
+            <a:ext cx="10515600" cy="841248"/>
+          </a:xfrm>
+          <a:prstGeom prst="rect">
+            <a:avLst/>
+          </a:prstGeom>
+          <a:noFill/>
+        </p:spPr>
+        <p:txBody>
+          <a:bodyPr wrap="square">
+            <a:noAutofit/>
+          </a:bodyPr>
+          <a:lstStyle/>
+          <a:p>
+            <a:r>
+              <a:rPr sz="1650" b="0">
                 <a:solidFill>
                   <a:srgbClr val="1E2024"/>
                 </a:solidFill>
                 <a:latin typeface="Calibri"/>
               </a:rPr>
-              <a:t>兩 broker ApiVersions 協商取交集</a:t>
-            </a:r>
-          </a:p>
-        </p:txBody>
-      </p:sp>
-      <p:sp>
-        <p:nvSpPr>
-          <p:cNvPr id="5" name="TextBox 4"/>
-          <p:cNvSpPr txBox="1"/>
-          <p:nvPr/>
-        </p:nvSpPr>
-        <p:spPr>
-          <a:xfrm>
-            <a:off x="822960" y="2953512"/>
-            <a:ext cx="10515600" cy="493776"/>
-          </a:xfrm>
-          <a:prstGeom prst="rect">
-            <a:avLst/>
-          </a:prstGeom>
-          <a:noFill/>
-        </p:spPr>
-        <p:txBody>
-          <a:bodyPr wrap="square">
-            <a:noAutofit/>
-          </a:bodyPr>
-          <a:lstStyle/>
-          <a:p>
-            <a:r>
-              <a:rPr sz="1600" b="0">
+              <a:t>② 新 client → 舊 broker：client 肯協商降版、不假設對方有新功能</a:t>
+            </a:r>
+          </a:p>
+        </p:txBody>
+      </p:sp>
+      <p:pic>
+        <p:nvPicPr>
+          <p:cNvPr id="8" name="Picture 7" descr="point.png"/>
+          <p:cNvPicPr>
+            <a:picLocks noChangeAspect="1"/>
+          </p:cNvPicPr>
+          <p:nvPr/>
+        </p:nvPicPr>
+        <p:blipFill>
+          <a:blip r:embed="rId3"/>
+          <a:stretch>
+            <a:fillRect/>
+          </a:stretch>
+        </p:blipFill>
+        <p:spPr>
+          <a:xfrm>
+            <a:off x="658368" y="3803904"/>
+            <a:ext cx="274320" cy="274320"/>
+          </a:xfrm>
+          <a:prstGeom prst="rect">
+            <a:avLst/>
+          </a:prstGeom>
+        </p:spPr>
+      </p:pic>
+      <p:sp>
+        <p:nvSpPr>
+          <p:cNvPr id="9" name="TextBox 8"/>
+          <p:cNvSpPr txBox="1"/>
+          <p:nvPr/>
+        </p:nvSpPr>
+        <p:spPr>
+          <a:xfrm>
+            <a:off x="1078992" y="3776472"/>
+            <a:ext cx="10515600" cy="841248"/>
+          </a:xfrm>
+          <a:prstGeom prst="rect">
+            <a:avLst/>
+          </a:prstGeom>
+          <a:noFill/>
+        </p:spPr>
+        <p:txBody>
+          <a:bodyPr wrap="square">
+            <a:noAutofit/>
+          </a:bodyPr>
+          <a:lstStyle/>
+          <a:p>
+            <a:r>
+              <a:rPr sz="1650" b="0">
                 <a:solidFill>
                   <a:srgbClr val="1E2024"/>
                 </a:solidFill>
                 <a:latin typeface="Calibri"/>
               </a:rPr>
-              <a:t>B.  </a:t>
-            </a:r>
-            <a:r>
-              <a:rPr sz="1600" b="0">
+              <a:t>③ 舊 client → 新 broker：broker 保留舊 wire 版本、繼續服務</a:t>
+            </a:r>
+          </a:p>
+        </p:txBody>
+      </p:sp>
+      <p:pic>
+        <p:nvPicPr>
+          <p:cNvPr id="10" name="Picture 9" descr="point.png"/>
+          <p:cNvPicPr>
+            <a:picLocks noChangeAspect="1"/>
+          </p:cNvPicPr>
+          <p:nvPr/>
+        </p:nvPicPr>
+        <p:blipFill>
+          <a:blip r:embed="rId3"/>
+          <a:stretch>
+            <a:fillRect/>
+          </a:stretch>
+        </p:blipFill>
+        <p:spPr>
+          <a:xfrm>
+            <a:off x="658368" y="4791456"/>
+            <a:ext cx="274320" cy="274320"/>
+          </a:xfrm>
+          <a:prstGeom prst="rect">
+            <a:avLst/>
+          </a:prstGeom>
+        </p:spPr>
+      </p:pic>
+      <p:sp>
+        <p:nvSpPr>
+          <p:cNvPr id="11" name="TextBox 10"/>
+          <p:cNvSpPr txBox="1"/>
+          <p:nvPr/>
+        </p:nvSpPr>
+        <p:spPr>
+          <a:xfrm>
+            <a:off x="1078992" y="4764024"/>
+            <a:ext cx="10515600" cy="841248"/>
+          </a:xfrm>
+          <a:prstGeom prst="rect">
+            <a:avLst/>
+          </a:prstGeom>
+          <a:noFill/>
+        </p:spPr>
+        <p:txBody>
+          <a:bodyPr wrap="square">
+            <a:noAutofit/>
+          </a:bodyPr>
+          <a:lstStyle/>
+          <a:p>
+            <a:r>
+              <a:rPr sz="1650" b="0">
                 <a:solidFill>
                   <a:srgbClr val="1E2024"/>
                 </a:solidFill>
                 <a:latin typeface="Calibri"/>
               </a:rPr>
-              <a:t>由 finalized metadata.version 決定</a:t>
-            </a:r>
-          </a:p>
-        </p:txBody>
-      </p:sp>
-      <p:sp>
-        <p:nvSpPr>
-          <p:cNvPr id="6" name="TextBox 5"/>
-          <p:cNvSpPr txBox="1"/>
-          <p:nvPr/>
-        </p:nvSpPr>
-        <p:spPr>
-          <a:xfrm>
-            <a:off x="822960" y="3575304"/>
-            <a:ext cx="10515600" cy="493776"/>
-          </a:xfrm>
-          <a:prstGeom prst="rect">
-            <a:avLst/>
-          </a:prstGeom>
-          <a:noFill/>
-        </p:spPr>
-        <p:txBody>
-          <a:bodyPr wrap="square">
-            <a:noAutofit/>
-          </a:bodyPr>
-          <a:lstStyle/>
-          <a:p>
-            <a:r>
-              <a:rPr sz="1600" b="0">
-                <a:solidFill>
-                  <a:srgbClr val="1E2024"/>
-                </a:solidFill>
-                <a:latin typeface="Calibri"/>
-              </a:rPr>
-              <a:t>C.  </a:t>
-            </a:r>
-            <a:r>
-              <a:rPr sz="1600" b="0">
-                <a:solidFill>
-                  <a:srgbClr val="1E2024"/>
-                </a:solidFill>
-                <a:latin typeface="Calibri"/>
-              </a:rPr>
-              <a:t>永遠用最新版</a:t>
-            </a:r>
-          </a:p>
-        </p:txBody>
-      </p:sp>
-      <p:sp>
-        <p:nvSpPr>
-          <p:cNvPr id="7" name="TextBox 6"/>
-          <p:cNvSpPr txBox="1"/>
-          <p:nvPr/>
-        </p:nvSpPr>
-        <p:spPr>
-          <a:xfrm>
-            <a:off x="822960" y="4197096"/>
-            <a:ext cx="10515600" cy="493776"/>
-          </a:xfrm>
-          <a:prstGeom prst="rect">
-            <a:avLst/>
-          </a:prstGeom>
-          <a:noFill/>
-        </p:spPr>
-        <p:txBody>
-          <a:bodyPr wrap="square">
-            <a:noAutofit/>
-          </a:bodyPr>
-          <a:lstStyle/>
-          <a:p>
-            <a:r>
-              <a:rPr sz="1600" b="0">
-                <a:solidFill>
-                  <a:srgbClr val="1E2024"/>
-                </a:solidFill>
-                <a:latin typeface="Calibri"/>
-              </a:rPr>
-              <a:t>D.  </a:t>
-            </a:r>
-            <a:r>
-              <a:rPr sz="1600" b="0">
-                <a:solidFill>
-                  <a:srgbClr val="1E2024"/>
-                </a:solidFill>
-                <a:latin typeface="Calibri"/>
-              </a:rPr>
-              <a:t>由 controller 統一指定</a:t>
-            </a:r>
-          </a:p>
-        </p:txBody>
-      </p:sp>
-      <p:sp>
-        <p:nvSpPr>
-          <p:cNvPr id="8" name="TextBox 7"/>
-          <p:cNvSpPr txBox="1"/>
-          <p:nvPr/>
-        </p:nvSpPr>
-        <p:spPr>
-          <a:xfrm>
-            <a:off x="640080" y="4910327"/>
-            <a:ext cx="10972800" cy="914400"/>
-          </a:xfrm>
-          <a:prstGeom prst="rect">
-            <a:avLst/>
-          </a:prstGeom>
-          <a:noFill/>
-        </p:spPr>
-        <p:txBody>
-          <a:bodyPr wrap="square">
-            <a:noAutofit/>
-          </a:bodyPr>
-          <a:lstStyle/>
-          <a:p>
-            <a:r>
-              <a:rPr sz="1400" b="0">
+              <a:t>④ 滾動升級混版：新舊 broker 並存，inter-broker（finalized MV 決定）＋對 client 都不掉資料</a:t>
+            </a:r>
+          </a:p>
+        </p:txBody>
+      </p:sp>
+      <p:sp>
+        <p:nvSpPr>
+          <p:cNvPr id="12" name="TextBox 11"/>
+          <p:cNvSpPr txBox="1"/>
+          <p:nvPr/>
+        </p:nvSpPr>
+        <p:spPr>
+          <a:xfrm>
+            <a:off x="640080" y="5751576"/>
+            <a:ext cx="10972800" cy="877824"/>
+          </a:xfrm>
+          <a:prstGeom prst="rect">
+            <a:avLst/>
+          </a:prstGeom>
+          <a:solidFill>
+            <a:srgbClr val="E9F3DE"/>
+          </a:solidFill>
+          <a:ln>
+            <a:noFill/>
+          </a:ln>
+        </p:spPr>
+        <p:txBody>
+          <a:bodyPr wrap="square" lIns="146304" tIns="82296">
+            <a:noAutofit/>
+          </a:bodyPr>
+          <a:lstStyle/>
+          <a:p>
+            <a:r>
+              <a:rPr sz="1500" b="0">
+                <a:solidFill>
+                  <a:srgbClr val="27500A"/>
+                </a:solidFill>
+                <a:latin typeface="Calibri"/>
+              </a:rPr>
+              <a:t>這四條是本場最相關的相容承諾——每一條都得有測試長期盯著（tagged fields、第三方 client 等外圍成本另計）</a:t>
+            </a:r>
+          </a:p>
+        </p:txBody>
+      </p:sp>
+      <p:sp>
+        <p:nvSpPr>
+          <p:cNvPr id="13" name="TextBox 12"/>
+          <p:cNvSpPr txBox="1"/>
+          <p:nvPr/>
+        </p:nvSpPr>
+        <p:spPr>
+          <a:xfrm>
+            <a:off x="640080" y="6400800"/>
+            <a:ext cx="10972800" cy="384048"/>
+          </a:xfrm>
+          <a:prstGeom prst="rect">
+            <a:avLst/>
+          </a:prstGeom>
+          <a:noFill/>
+        </p:spPr>
+        <p:txBody>
+          <a:bodyPr wrap="square">
+            <a:noAutofit/>
+          </a:bodyPr>
+          <a:lstStyle/>
+          <a:p>
+            <a:r>
+              <a:rPr sz="1200" b="1">
                 <a:solidFill>
                   <a:srgbClr val="8A8A8A"/>
                 </a:solidFill>
                 <a:latin typeface="Calibri"/>
               </a:rPr>
-              <a:t>想一想 —— 下一頁公布答案</a:t>
+              <a:t>REF   </a:t>
+            </a:r>
+            <a:r>
+              <a:rPr sz="1200" b="0" u="sng">
+                <a:solidFill>
+                  <a:srgbClr val="185FA5"/>
+                </a:solidFill>
+                <a:latin typeface="Courier New"/>
+                <a:hlinkClick r:id="rId4"/>
+              </a:rPr>
+              <a:t>①格式自洽</a:t>
+            </a:r>
+            <a:r>
+              <a:rPr sz="1200" b="0">
+                <a:solidFill>
+                  <a:srgbClr val="8A8A8A"/>
+                </a:solidFill>
+                <a:latin typeface="Calibri"/>
+              </a:rPr>
+              <a:t>   ·   </a:t>
+            </a:r>
+            <a:r>
+              <a:rPr sz="1200" b="0" u="sng">
+                <a:solidFill>
+                  <a:srgbClr val="185FA5"/>
+                </a:solidFill>
+                <a:latin typeface="Courier New"/>
+                <a:hlinkClick r:id="rId5"/>
+              </a:rPr>
+              <a:t>②新→舊</a:t>
+            </a:r>
+            <a:r>
+              <a:rPr sz="1200" b="0">
+                <a:solidFill>
+                  <a:srgbClr val="8A8A8A"/>
+                </a:solidFill>
+                <a:latin typeface="Calibri"/>
+              </a:rPr>
+              <a:t>   ·   </a:t>
+            </a:r>
+            <a:r>
+              <a:rPr sz="1200" b="0" u="sng">
+                <a:solidFill>
+                  <a:srgbClr val="185FA5"/>
+                </a:solidFill>
+                <a:latin typeface="Courier New"/>
+                <a:hlinkClick r:id="rId6"/>
+              </a:rPr>
+              <a:t>③舊→新</a:t>
+            </a:r>
+            <a:r>
+              <a:rPr sz="1200" b="0">
+                <a:solidFill>
+                  <a:srgbClr val="8A8A8A"/>
+                </a:solidFill>
+                <a:latin typeface="Calibri"/>
+              </a:rPr>
+              <a:t>   ·   </a:t>
+            </a:r>
+            <a:r>
+              <a:rPr sz="1200" b="0" u="sng">
+                <a:solidFill>
+                  <a:srgbClr val="185FA5"/>
+                </a:solidFill>
+                <a:latin typeface="Courier New"/>
+                <a:hlinkClick r:id="rId7"/>
+              </a:rPr>
+              <a:t>④滾動升級</a:t>
             </a:r>
           </a:p>
         </p:txBody>
@@ -4080,7 +4170,7 @@
                 </a:solidFill>
                 <a:latin typeface="Calibri"/>
               </a:rPr>
-              <a:t>隨堂考 · 核心　（正解）</a:t>
+              <a:t>隨堂考 · 核心</a:t>
             </a:r>
           </a:p>
         </p:txBody>
@@ -4176,36 +4266,31 @@
           <a:prstGeom prst="rect">
             <a:avLst/>
           </a:prstGeom>
-          <a:solidFill>
-            <a:srgbClr val="E9F3DE"/>
-          </a:solidFill>
-          <a:ln>
-            <a:noFill/>
-          </a:ln>
-        </p:spPr>
-        <p:txBody>
-          <a:bodyPr wrap="square" lIns="128016" tIns="54864">
-            <a:noAutofit/>
-          </a:bodyPr>
-          <a:lstStyle/>
-          <a:p>
-            <a:r>
-              <a:rPr sz="1600" b="1">
-                <a:solidFill>
-                  <a:srgbClr val="27500A"/>
+          <a:noFill/>
+        </p:spPr>
+        <p:txBody>
+          <a:bodyPr wrap="square">
+            <a:noAutofit/>
+          </a:bodyPr>
+          <a:lstStyle/>
+          <a:p>
+            <a:r>
+              <a:rPr sz="1600" b="0">
+                <a:solidFill>
+                  <a:srgbClr val="1E2024"/>
                 </a:solidFill>
                 <a:latin typeface="Calibri"/>
               </a:rPr>
               <a:t>B.  </a:t>
             </a:r>
             <a:r>
-              <a:rPr sz="1600" b="1">
-                <a:solidFill>
-                  <a:srgbClr val="27500A"/>
-                </a:solidFill>
-                <a:latin typeface="Calibri"/>
-              </a:rPr>
-              <a:t>由 finalized metadata.version 決定   ✓</a:t>
+              <a:rPr sz="1600" b="0">
+                <a:solidFill>
+                  <a:srgbClr val="1E2024"/>
+                </a:solidFill>
+                <a:latin typeface="Calibri"/>
+              </a:rPr>
+              <a:t>由 finalized metadata.version 決定</a:t>
             </a:r>
           </a:p>
         </p:txBody>
@@ -4319,85 +4404,13 @@
           <a:lstStyle/>
           <a:p>
             <a:r>
-              <a:rPr sz="1400" b="1">
-                <a:solidFill>
-                  <a:srgbClr val="27500A"/>
-                </a:solidFill>
-                <a:latin typeface="Calibri"/>
-              </a:rPr>
-              <a:t>正解 B — </a:t>
-            </a:r>
-            <a:r>
               <a:rPr sz="1400" b="0">
                 <a:solidFill>
-                  <a:srgbClr val="1E2024"/>
-                </a:solidFill>
-                <a:latin typeface="Calibri"/>
-              </a:rPr>
-              <a:t>fetchRequestVersion(MV)：MV 是集中共識，不做 per-connection 協商。</a:t>
-            </a:r>
-          </a:p>
-        </p:txBody>
-      </p:sp>
-      <p:sp>
-        <p:nvSpPr>
-          <p:cNvPr id="9" name="TextBox 8"/>
-          <p:cNvSpPr txBox="1"/>
-          <p:nvPr/>
-        </p:nvSpPr>
-        <p:spPr>
-          <a:xfrm>
-            <a:off x="640080" y="6400800"/>
-            <a:ext cx="10972800" cy="384048"/>
-          </a:xfrm>
-          <a:prstGeom prst="rect">
-            <a:avLst/>
-          </a:prstGeom>
-          <a:noFill/>
-        </p:spPr>
-        <p:txBody>
-          <a:bodyPr wrap="square">
-            <a:noAutofit/>
-          </a:bodyPr>
-          <a:lstStyle/>
-          <a:p>
-            <a:r>
-              <a:rPr sz="1200" b="1">
-                <a:solidFill>
                   <a:srgbClr val="8A8A8A"/>
                 </a:solidFill>
                 <a:latin typeface="Calibri"/>
               </a:rPr>
-              <a:t>REF   </a:t>
-            </a:r>
-            <a:r>
-              <a:rPr sz="1200" b="0" u="sng">
-                <a:solidFill>
-                  <a:srgbClr val="185FA5"/>
-                </a:solidFill>
-                <a:latin typeface="Courier New"/>
-                <a:hlinkClick r:id="rId2"/>
-              </a:rPr>
-              <a:t>RemoteLeaderEndPoint.scala:215</a:t>
-            </a:r>
-            <a:r>
-              <a:rPr sz="1200" b="0">
-                <a:solidFill>
-                  <a:srgbClr val="8A8A8A"/>
-                </a:solidFill>
-                <a:latin typeface="Calibri"/>
-              </a:rPr>
-              <a:t>   ·   </a:t>
-            </a:r>
-            <a:r>
-              <a:rPr sz="1200" b="0" u="sng">
-                <a:solidFill>
-                  <a:srgbClr val="185FA5"/>
-                </a:solidFill>
-                <a:latin typeface="Courier New"/>
-                <a:hlinkClick r:id="rId3"/>
-              </a:rPr>
-              <a:t>MetadataVersion.java:273</a:t>
+              <a:t>想一想 —— 下一頁公布答案</a:t>
             </a:r>
           </a:p>
         </p:txBody>
@@ -4449,7 +4462,7 @@
                 </a:solidFill>
                 <a:latin typeface="Calibri"/>
               </a:rPr>
-              <a:t>Part 2 · 失敗訊息</a:t>
+              <a:t>隨堂考 · 核心　（正解）</a:t>
             </a:r>
           </a:p>
         </p:txBody>
@@ -4463,27 +4476,27 @@
         <p:spPr>
           <a:xfrm>
             <a:off x="640080" y="841248"/>
-            <a:ext cx="10972800" cy="1005840"/>
-          </a:xfrm>
-          <a:prstGeom prst="rect">
-            <a:avLst/>
-          </a:prstGeom>
-          <a:noFill/>
-        </p:spPr>
-        <p:txBody>
-          <a:bodyPr wrap="square">
-            <a:noAutofit/>
-          </a:bodyPr>
-          <a:lstStyle/>
-          <a:p>
-            <a:r>
-              <a:rPr sz="3200" b="1">
+            <a:ext cx="10972800" cy="1188720"/>
+          </a:xfrm>
+          <a:prstGeom prst="rect">
+            <a:avLst/>
+          </a:prstGeom>
+          <a:noFill/>
+        </p:spPr>
+        <p:txBody>
+          <a:bodyPr wrap="square">
+            <a:noAutofit/>
+          </a:bodyPr>
+          <a:lstStyle/>
+          <a:p>
+            <a:r>
+              <a:rPr sz="2600" b="1">
                 <a:solidFill>
                   <a:srgbClr val="1E2024"/>
                 </a:solidFill>
                 <a:latin typeface="Calibri"/>
               </a:rPr>
-              <a:t>通訊當下協商不出版本，會看到什麼</a:t>
+              <a:t>partition replication（follower→leader）裡，Fetch 的版本怎麼決定？</a:t>
             </a:r>
           </a:p>
         </p:txBody>
@@ -4496,85 +4509,89 @@
         </p:nvSpPr>
         <p:spPr>
           <a:xfrm>
-            <a:off x="640080" y="2148840"/>
-            <a:ext cx="10972800" cy="1645920"/>
+            <a:off x="822960" y="2331720"/>
+            <a:ext cx="10515600" cy="493776"/>
+          </a:xfrm>
+          <a:prstGeom prst="rect">
+            <a:avLst/>
+          </a:prstGeom>
+          <a:noFill/>
+        </p:spPr>
+        <p:txBody>
+          <a:bodyPr wrap="square">
+            <a:noAutofit/>
+          </a:bodyPr>
+          <a:lstStyle/>
+          <a:p>
+            <a:r>
+              <a:rPr sz="1600" b="0">
+                <a:solidFill>
+                  <a:srgbClr val="1E2024"/>
+                </a:solidFill>
+                <a:latin typeface="Calibri"/>
+              </a:rPr>
+              <a:t>A.  </a:t>
+            </a:r>
+            <a:r>
+              <a:rPr sz="1600" b="0">
+                <a:solidFill>
+                  <a:srgbClr val="1E2024"/>
+                </a:solidFill>
+                <a:latin typeface="Calibri"/>
+              </a:rPr>
+              <a:t>兩 broker ApiVersions 協商取交集</a:t>
+            </a:r>
+          </a:p>
+        </p:txBody>
+      </p:sp>
+      <p:sp>
+        <p:nvSpPr>
+          <p:cNvPr id="5" name="TextBox 4"/>
+          <p:cNvSpPr txBox="1"/>
+          <p:nvPr/>
+        </p:nvSpPr>
+        <p:spPr>
+          <a:xfrm>
+            <a:off x="822960" y="2953512"/>
+            <a:ext cx="10515600" cy="493776"/>
           </a:xfrm>
           <a:prstGeom prst="rect">
             <a:avLst/>
           </a:prstGeom>
           <a:solidFill>
-            <a:srgbClr val="F3F1EC"/>
+            <a:srgbClr val="E9F3DE"/>
           </a:solidFill>
-          <a:ln w="6350">
-            <a:solidFill>
-              <a:srgbClr val="E3E0D8"/>
-            </a:solidFill>
+          <a:ln>
+            <a:noFill/>
           </a:ln>
         </p:spPr>
         <p:txBody>
-          <a:bodyPr wrap="square" lIns="146304" tIns="91440" bIns="91440">
-            <a:noAutofit/>
-          </a:bodyPr>
-          <a:lstStyle/>
-          <a:p>
-            <a:r>
-              <a:rPr sz="1350" b="0">
-                <a:solidFill>
-                  <a:srgbClr val="2C2C2A"/>
-                </a:solidFill>
-                <a:latin typeface="Calibri"/>
-              </a:rPr>
-              <a:t>交集空                       → client 端 UnsupportedVersionException（送出前 abort）</a:t>
-            </a:r>
-          </a:p>
-          <a:p>
-            <a:r>
-              <a:rPr sz="1350" b="0">
-                <a:solidFill>
-                  <a:srgbClr val="2C2C2A"/>
-                </a:solidFill>
-                <a:latin typeface="Calibri"/>
-              </a:rPr>
-              <a:t>client 繞過協商、硬送不支援版本 → broker 丟 UnsupportedVersionException、關閉連線</a:t>
-            </a:r>
-          </a:p>
-          <a:p>
-            <a:r>
-              <a:rPr sz="1350" b="0">
-                <a:solidFill>
-                  <a:srgbClr val="2C2C2A"/>
-                </a:solidFill>
-                <a:latin typeface="Calibri"/>
-              </a:rPr>
-              <a:t>（ApiVersions 例外：回 v0 + UNSUPPORTED_VERSION 錯誤碼）</a:t>
-            </a:r>
-          </a:p>
-        </p:txBody>
-      </p:sp>
-      <p:pic>
-        <p:nvPicPr>
-          <p:cNvPr id="5" name="Picture 4" descr="ban.png"/>
-          <p:cNvPicPr>
-            <a:picLocks noChangeAspect="1"/>
-          </p:cNvPicPr>
-          <p:nvPr/>
-        </p:nvPicPr>
-        <p:blipFill>
-          <a:blip r:embed="rId2"/>
-          <a:stretch>
-            <a:fillRect/>
-          </a:stretch>
-        </p:blipFill>
-        <p:spPr>
-          <a:xfrm>
-            <a:off x="658368" y="4023360"/>
-            <a:ext cx="274320" cy="274320"/>
-          </a:xfrm>
-          <a:prstGeom prst="rect">
-            <a:avLst/>
-          </a:prstGeom>
-        </p:spPr>
-      </p:pic>
+          <a:bodyPr wrap="square" lIns="128016" tIns="54864">
+            <a:noAutofit/>
+          </a:bodyPr>
+          <a:lstStyle/>
+          <a:p>
+            <a:r>
+              <a:rPr sz="1600" b="1">
+                <a:solidFill>
+                  <a:srgbClr val="27500A"/>
+                </a:solidFill>
+                <a:latin typeface="Calibri"/>
+              </a:rPr>
+              <a:t>B.  </a:t>
+            </a:r>
+            <a:r>
+              <a:rPr sz="1600" b="1">
+                <a:solidFill>
+                  <a:srgbClr val="27500A"/>
+                </a:solidFill>
+                <a:latin typeface="Calibri"/>
+              </a:rPr>
+              <a:t>由 finalized metadata.version 決定   ✓</a:t>
+            </a:r>
+          </a:p>
+        </p:txBody>
+      </p:sp>
       <p:sp>
         <p:nvSpPr>
           <p:cNvPr id="6" name="TextBox 5"/>
@@ -4583,7 +4600,7 @@
         </p:nvSpPr>
         <p:spPr>
           <a:xfrm>
-            <a:off x="1078992" y="3995928"/>
+            <a:off x="822960" y="3575304"/>
             <a:ext cx="10515600" cy="493776"/>
           </a:xfrm>
           <a:prstGeom prst="rect">
@@ -4598,13 +4615,22 @@
           <a:lstStyle/>
           <a:p>
             <a:r>
-              <a:rPr sz="1650" b="0">
+              <a:rPr sz="1600" b="0">
                 <a:solidFill>
                   <a:srgbClr val="1E2024"/>
                 </a:solidFill>
                 <a:latin typeface="Calibri"/>
               </a:rPr>
-              <a:t>多數情況 client 在送出前就本地中止，根本沒上網路</a:t>
+              <a:t>C.  </a:t>
+            </a:r>
+            <a:r>
+              <a:rPr sz="1600" b="0">
+                <a:solidFill>
+                  <a:srgbClr val="1E2024"/>
+                </a:solidFill>
+                <a:latin typeface="Calibri"/>
+              </a:rPr>
+              <a:t>永遠用最新版</a:t>
             </a:r>
           </a:p>
         </p:txBody>
@@ -4617,28 +4643,37 @@
         </p:nvSpPr>
         <p:spPr>
           <a:xfrm>
-            <a:off x="640080" y="4636008"/>
-            <a:ext cx="10972800" cy="731520"/>
-          </a:xfrm>
-          <a:prstGeom prst="rect">
-            <a:avLst/>
-          </a:prstGeom>
-          <a:noFill/>
-        </p:spPr>
-        <p:txBody>
-          <a:bodyPr wrap="square">
-            <a:noAutofit/>
-          </a:bodyPr>
-          <a:lstStyle/>
-          <a:p>
-            <a:r>
-              <a:rPr sz="1500" b="0">
-                <a:solidFill>
-                  <a:srgbClr val="5F5E5A"/>
-                </a:solidFill>
-                <a:latin typeface="Calibri"/>
-              </a:rPr>
-              <a:t>「硬送」指 client↔broker：自刻或有 bug 的 client 繞過協商；partition replication 的版本已由 finalized MV 事先決定，不會送出對方不懂的版本。</a:t>
+            <a:off x="822960" y="4197096"/>
+            <a:ext cx="10515600" cy="493776"/>
+          </a:xfrm>
+          <a:prstGeom prst="rect">
+            <a:avLst/>
+          </a:prstGeom>
+          <a:noFill/>
+        </p:spPr>
+        <p:txBody>
+          <a:bodyPr wrap="square">
+            <a:noAutofit/>
+          </a:bodyPr>
+          <a:lstStyle/>
+          <a:p>
+            <a:r>
+              <a:rPr sz="1600" b="0">
+                <a:solidFill>
+                  <a:srgbClr val="1E2024"/>
+                </a:solidFill>
+                <a:latin typeface="Calibri"/>
+              </a:rPr>
+              <a:t>D.  </a:t>
+            </a:r>
+            <a:r>
+              <a:rPr sz="1600" b="0">
+                <a:solidFill>
+                  <a:srgbClr val="1E2024"/>
+                </a:solidFill>
+                <a:latin typeface="Calibri"/>
+              </a:rPr>
+              <a:t>由 controller 統一指定</a:t>
             </a:r>
           </a:p>
         </p:txBody>
@@ -4646,6 +4681,49 @@
       <p:sp>
         <p:nvSpPr>
           <p:cNvPr id="8" name="TextBox 7"/>
+          <p:cNvSpPr txBox="1"/>
+          <p:nvPr/>
+        </p:nvSpPr>
+        <p:spPr>
+          <a:xfrm>
+            <a:off x="640080" y="4910327"/>
+            <a:ext cx="10972800" cy="914400"/>
+          </a:xfrm>
+          <a:prstGeom prst="rect">
+            <a:avLst/>
+          </a:prstGeom>
+          <a:noFill/>
+        </p:spPr>
+        <p:txBody>
+          <a:bodyPr wrap="square">
+            <a:noAutofit/>
+          </a:bodyPr>
+          <a:lstStyle/>
+          <a:p>
+            <a:r>
+              <a:rPr sz="1400" b="1">
+                <a:solidFill>
+                  <a:srgbClr val="27500A"/>
+                </a:solidFill>
+                <a:latin typeface="Calibri"/>
+              </a:rPr>
+              <a:t>正解 B — </a:t>
+            </a:r>
+            <a:r>
+              <a:rPr sz="1400" b="0">
+                <a:solidFill>
+                  <a:srgbClr val="1E2024"/>
+                </a:solidFill>
+                <a:latin typeface="Calibri"/>
+              </a:rPr>
+              <a:t>fetchRequestVersion(MV)：MV 是集中共識，不做 per-connection 協商。</a:t>
+            </a:r>
+          </a:p>
+        </p:txBody>
+      </p:sp>
+      <p:sp>
+        <p:nvSpPr>
+          <p:cNvPr id="9" name="TextBox 8"/>
           <p:cNvSpPr txBox="1"/>
           <p:nvPr/>
         </p:nvSpPr>
@@ -4680,47 +4758,28 @@
                   <a:srgbClr val="185FA5"/>
                 </a:solidFill>
                 <a:latin typeface="Courier New"/>
+                <a:hlinkClick r:id="rId2"/>
+              </a:rPr>
+              <a:t>RemoteLeaderEndPoint.scala:215</a:t>
+            </a:r>
+            <a:r>
+              <a:rPr sz="1200" b="0">
+                <a:solidFill>
+                  <a:srgbClr val="8A8A8A"/>
+                </a:solidFill>
+                <a:latin typeface="Calibri"/>
+              </a:rPr>
+              <a:t>   ·   </a:t>
+            </a:r>
+            <a:r>
+              <a:rPr sz="1200" b="0" u="sng">
+                <a:solidFill>
+                  <a:srgbClr val="185FA5"/>
+                </a:solidFill>
+                <a:latin typeface="Courier New"/>
                 <a:hlinkClick r:id="rId3"/>
               </a:rPr>
-              <a:t>latestUsableVersion</a:t>
-            </a:r>
-            <a:r>
-              <a:rPr sz="1200" b="0">
-                <a:solidFill>
-                  <a:srgbClr val="8A8A8A"/>
-                </a:solidFill>
-                <a:latin typeface="Calibri"/>
-              </a:rPr>
-              <a:t>   ·   </a:t>
-            </a:r>
-            <a:r>
-              <a:rPr sz="1200" b="0" u="sng">
-                <a:solidFill>
-                  <a:srgbClr val="185FA5"/>
-                </a:solidFill>
-                <a:latin typeface="Courier New"/>
-                <a:hlinkClick r:id="rId4"/>
-              </a:rPr>
-              <a:t>NetworkClient</a:t>
-            </a:r>
-            <a:r>
-              <a:rPr sz="1200" b="0">
-                <a:solidFill>
-                  <a:srgbClr val="8A8A8A"/>
-                </a:solidFill>
-                <a:latin typeface="Calibri"/>
-              </a:rPr>
-              <a:t>   ·   </a:t>
-            </a:r>
-            <a:r>
-              <a:rPr sz="1200" b="0" u="sng">
-                <a:solidFill>
-                  <a:srgbClr val="185FA5"/>
-                </a:solidFill>
-                <a:latin typeface="Courier New"/>
-                <a:hlinkClick r:id="rId5"/>
-              </a:rPr>
-              <a:t>RequestContext</a:t>
+              <a:t>MetadataVersion.java:273</a:t>
             </a:r>
           </a:p>
         </p:txBody>
@@ -4806,79 +4865,21 @@
                 </a:solidFill>
                 <a:latin typeface="Calibri"/>
               </a:rPr>
-              <a:t>版本截斷：為什麼「升一點點」不夠</a:t>
-            </a:r>
-          </a:p>
-        </p:txBody>
-      </p:sp>
-      <p:pic>
-        <p:nvPicPr>
-          <p:cNvPr id="4" name="Picture 3" descr="alert-triangle.png"/>
-          <p:cNvPicPr>
-            <a:picLocks noChangeAspect="1"/>
-          </p:cNvPicPr>
-          <p:nvPr/>
-        </p:nvPicPr>
-        <p:blipFill>
-          <a:blip r:embed="rId2"/>
-          <a:stretch>
-            <a:fillRect/>
-          </a:stretch>
-        </p:blipFill>
-        <p:spPr>
-          <a:xfrm>
-            <a:off x="658368" y="2176272"/>
-            <a:ext cx="274320" cy="274320"/>
-          </a:xfrm>
-          <a:prstGeom prst="rect">
-            <a:avLst/>
-          </a:prstGeom>
-        </p:spPr>
-      </p:pic>
-      <p:sp>
-        <p:nvSpPr>
-          <p:cNvPr id="5" name="TextBox 4"/>
-          <p:cNvSpPr txBox="1"/>
-          <p:nvPr/>
-        </p:nvSpPr>
-        <p:spPr>
-          <a:xfrm>
-            <a:off x="1078992" y="2148840"/>
-            <a:ext cx="10515600" cy="493776"/>
-          </a:xfrm>
-          <a:prstGeom prst="rect">
-            <a:avLst/>
-          </a:prstGeom>
-          <a:noFill/>
-        </p:spPr>
-        <p:txBody>
-          <a:bodyPr wrap="square">
-            <a:noAutofit/>
-          </a:bodyPr>
-          <a:lstStyle/>
-          <a:p>
-            <a:r>
-              <a:rPr sz="1650" b="0">
-                <a:solidFill>
-                  <a:srgbClr val="1E2024"/>
-                </a:solidFill>
-                <a:latin typeface="Calibri"/>
-              </a:rPr>
-              <a:t>前一頁「交集空」最容易被忽略的根因——舊 wire 版本被整批移除</a:t>
-            </a:r>
-          </a:p>
-        </p:txBody>
-      </p:sp>
-      <p:sp>
-        <p:nvSpPr>
-          <p:cNvPr id="6" name="TextBox 5"/>
-          <p:cNvSpPr txBox="1"/>
-          <p:nvPr/>
-        </p:nvSpPr>
-        <p:spPr>
-          <a:xfrm>
-            <a:off x="640080" y="2788920"/>
-            <a:ext cx="10972800" cy="822959"/>
+              <a:t>通訊當下協商不出版本，會看到什麼</a:t>
+            </a:r>
+          </a:p>
+        </p:txBody>
+      </p:sp>
+      <p:sp>
+        <p:nvSpPr>
+          <p:cNvPr id="4" name="TextBox 3"/>
+          <p:cNvSpPr txBox="1"/>
+          <p:nvPr/>
+        </p:nvSpPr>
+        <p:spPr>
+          <a:xfrm>
+            <a:off x="640080" y="2148840"/>
+            <a:ext cx="10972800" cy="1645920"/>
           </a:xfrm>
           <a:prstGeom prst="rect">
             <a:avLst/>
@@ -4905,7 +4906,7 @@
                 </a:solidFill>
                 <a:latin typeface="Calibri"/>
               </a:rPr>
-              <a:t>舊 wire API version 被整個移除，min 可 &gt; 0</a:t>
+              <a:t>交集空                       → client 端 UnsupportedVersionException（送出前 abort）</a:t>
             </a:r>
           </a:p>
           <a:p>
@@ -4916,7 +4917,76 @@
                 </a:solidFill>
                 <a:latin typeface="Calibri"/>
               </a:rPr>
-              <a:t>  Fetch：4–18（v0–3 在 4.0 移除）</a:t>
+              <a:t>client 繞過協商、硬送不支援版本 → broker 丟 UnsupportedVersionException、關閉連線</a:t>
+            </a:r>
+          </a:p>
+          <a:p>
+            <a:r>
+              <a:rPr sz="1350" b="0">
+                <a:solidFill>
+                  <a:srgbClr val="2C2C2A"/>
+                </a:solidFill>
+                <a:latin typeface="Calibri"/>
+              </a:rPr>
+              <a:t>（ApiVersions 例外：回 v0 + UNSUPPORTED_VERSION 錯誤碼）</a:t>
+            </a:r>
+          </a:p>
+        </p:txBody>
+      </p:sp>
+      <p:pic>
+        <p:nvPicPr>
+          <p:cNvPr id="5" name="Picture 4" descr="ban.png"/>
+          <p:cNvPicPr>
+            <a:picLocks noChangeAspect="1"/>
+          </p:cNvPicPr>
+          <p:nvPr/>
+        </p:nvPicPr>
+        <p:blipFill>
+          <a:blip r:embed="rId2"/>
+          <a:stretch>
+            <a:fillRect/>
+          </a:stretch>
+        </p:blipFill>
+        <p:spPr>
+          <a:xfrm>
+            <a:off x="658368" y="4023360"/>
+            <a:ext cx="274320" cy="274320"/>
+          </a:xfrm>
+          <a:prstGeom prst="rect">
+            <a:avLst/>
+          </a:prstGeom>
+        </p:spPr>
+      </p:pic>
+      <p:sp>
+        <p:nvSpPr>
+          <p:cNvPr id="6" name="TextBox 5"/>
+          <p:cNvSpPr txBox="1"/>
+          <p:nvPr/>
+        </p:nvSpPr>
+        <p:spPr>
+          <a:xfrm>
+            <a:off x="1078992" y="3995928"/>
+            <a:ext cx="10515600" cy="493776"/>
+          </a:xfrm>
+          <a:prstGeom prst="rect">
+            <a:avLst/>
+          </a:prstGeom>
+          <a:noFill/>
+        </p:spPr>
+        <p:txBody>
+          <a:bodyPr wrap="square">
+            <a:noAutofit/>
+          </a:bodyPr>
+          <a:lstStyle/>
+          <a:p>
+            <a:r>
+              <a:rPr sz="1650" b="0">
+                <a:solidFill>
+                  <a:srgbClr val="1E2024"/>
+                </a:solidFill>
+                <a:latin typeface="Calibri"/>
+              </a:rPr>
+              <a:t>多數情況 client 在送出前就本地中止，根本沒上網路</a:t>
             </a:r>
           </a:p>
         </p:txBody>
@@ -4929,21 +4999,16 @@
         </p:nvSpPr>
         <p:spPr>
           <a:xfrm>
-            <a:off x="640080" y="3813048"/>
-            <a:ext cx="10972800" cy="877824"/>
-          </a:xfrm>
-          <a:prstGeom prst="rect">
-            <a:avLst/>
-          </a:prstGeom>
-          <a:solidFill>
-            <a:srgbClr val="E9F3DE"/>
-          </a:solidFill>
-          <a:ln>
-            <a:noFill/>
-          </a:ln>
-        </p:spPr>
-        <p:txBody>
-          <a:bodyPr wrap="square" lIns="146304" tIns="82296">
+            <a:off x="640080" y="4636008"/>
+            <a:ext cx="10972800" cy="731520"/>
+          </a:xfrm>
+          <a:prstGeom prst="rect">
+            <a:avLst/>
+          </a:prstGeom>
+          <a:noFill/>
+        </p:spPr>
+        <p:txBody>
+          <a:bodyPr wrap="square">
             <a:noAutofit/>
           </a:bodyPr>
           <a:lstStyle/>
@@ -4951,11 +5016,11 @@
             <a:r>
               <a:rPr sz="1500" b="0">
                 <a:solidFill>
-                  <a:srgbClr val="27500A"/>
-                </a:solidFill>
-                <a:latin typeface="Calibri"/>
-              </a:rPr>
-              <a:t>解法：升任一端到 4.0 前，先確認另一端 ≥ 2.1（upgrade guide 明訂雙向要求），否則協商結果沒有可用版本</a:t>
+                  <a:srgbClr val="5F5E5A"/>
+                </a:solidFill>
+                <a:latin typeface="Calibri"/>
+              </a:rPr>
+              <a:t>「硬送」指 client↔broker：自刻或有 bug 的 client 繞過協商；partition replication 的版本已由 finalized MV 事先決定，不會送出對方不懂的版本。</a:t>
             </a:r>
           </a:p>
         </p:txBody>
@@ -4963,74 +5028,6 @@
       <p:sp>
         <p:nvSpPr>
           <p:cNvPr id="8" name="TextBox 7"/>
-          <p:cNvSpPr txBox="1"/>
-          <p:nvPr/>
-        </p:nvSpPr>
-        <p:spPr>
-          <a:xfrm>
-            <a:off x="640080" y="4873752"/>
-            <a:ext cx="10972800" cy="731520"/>
-          </a:xfrm>
-          <a:prstGeom prst="rect">
-            <a:avLst/>
-          </a:prstGeom>
-          <a:noFill/>
-        </p:spPr>
-        <p:txBody>
-          <a:bodyPr wrap="square">
-            <a:noAutofit/>
-          </a:bodyPr>
-          <a:lstStyle/>
-          <a:p>
-            <a:r>
-              <a:rPr sz="1500" b="0">
-                <a:solidFill>
-                  <a:srgbClr val="5F5E5A"/>
-                </a:solidFill>
-                <a:latin typeface="Calibri"/>
-              </a:rPr>
-              <a:t>取捨：0.8.0（2013）起九年保留每個版本——每個舊版本都是活的程式碼與測試面；4.0 用「斷 2018 年前的 client」換「刪九年的碼」，只有 major 版本邊界付得起。</a:t>
-            </a:r>
-          </a:p>
-        </p:txBody>
-      </p:sp>
-      <p:sp>
-        <p:nvSpPr>
-          <p:cNvPr id="9" name="TextBox 8"/>
-          <p:cNvSpPr txBox="1"/>
-          <p:nvPr/>
-        </p:nvSpPr>
-        <p:spPr>
-          <a:xfrm>
-            <a:off x="640080" y="5733288"/>
-            <a:ext cx="10972800" cy="731520"/>
-          </a:xfrm>
-          <a:prstGeom prst="rect">
-            <a:avLst/>
-          </a:prstGeom>
-          <a:noFill/>
-        </p:spPr>
-        <p:txBody>
-          <a:bodyPr wrap="square">
-            <a:noAutofit/>
-          </a:bodyPr>
-          <a:lstStyle/>
-          <a:p>
-            <a:r>
-              <a:rPr sz="1500" b="0">
-                <a:solidFill>
-                  <a:srgbClr val="5F5E5A"/>
-                </a:solidFill>
-                <a:latin typeface="Calibri"/>
-              </a:rPr>
-              <a:t>銜接（非本場）：finalize / 升降當下的錯誤（INVALID_UPDATE_VERSION 等）屬「運行時的版本升降」那場，本場不展開。</a:t>
-            </a:r>
-          </a:p>
-        </p:txBody>
-      </p:sp>
-      <p:sp>
-        <p:nvSpPr>
-          <p:cNvPr id="10" name="TextBox 9"/>
           <p:cNvSpPr txBox="1"/>
           <p:nvPr/>
         </p:nvSpPr>
@@ -5067,7 +5064,7 @@
                 <a:latin typeface="Courier New"/>
                 <a:hlinkClick r:id="rId3"/>
               </a:rPr>
-              <a:t>upgrade.md:229</a:t>
+              <a:t>latestUsableVersion</a:t>
             </a:r>
             <a:r>
               <a:rPr sz="1200" b="0">
@@ -5086,7 +5083,26 @@
                 <a:latin typeface="Courier New"/>
                 <a:hlinkClick r:id="rId4"/>
               </a:rPr>
-              <a:t>FetchRequest.json validVersions</a:t>
+              <a:t>NetworkClient</a:t>
+            </a:r>
+            <a:r>
+              <a:rPr sz="1200" b="0">
+                <a:solidFill>
+                  <a:srgbClr val="8A8A8A"/>
+                </a:solidFill>
+                <a:latin typeface="Calibri"/>
+              </a:rPr>
+              <a:t>   ·   </a:t>
+            </a:r>
+            <a:r>
+              <a:rPr sz="1200" b="0" u="sng">
+                <a:solidFill>
+                  <a:srgbClr val="185FA5"/>
+                </a:solidFill>
+                <a:latin typeface="Courier New"/>
+                <a:hlinkClick r:id="rId5"/>
+              </a:rPr>
+              <a:t>RequestContext</a:t>
             </a:r>
           </a:p>
         </p:txBody>
@@ -5138,7 +5154,7 @@
                 </a:solidFill>
                 <a:latin typeface="Calibri"/>
               </a:rPr>
-              <a:t>隨堂考 · 核心</a:t>
+              <a:t>Part 2 · 失敗訊息</a:t>
             </a:r>
           </a:p>
         </p:txBody>
@@ -5152,40 +5168,64 @@
         <p:spPr>
           <a:xfrm>
             <a:off x="640080" y="841248"/>
-            <a:ext cx="10972800" cy="1188720"/>
-          </a:xfrm>
-          <a:prstGeom prst="rect">
-            <a:avLst/>
-          </a:prstGeom>
-          <a:noFill/>
-        </p:spPr>
-        <p:txBody>
-          <a:bodyPr wrap="square">
-            <a:noAutofit/>
-          </a:bodyPr>
-          <a:lstStyle/>
-          <a:p>
-            <a:r>
-              <a:rPr sz="2600" b="1">
+            <a:ext cx="10972800" cy="1005840"/>
+          </a:xfrm>
+          <a:prstGeom prst="rect">
+            <a:avLst/>
+          </a:prstGeom>
+          <a:noFill/>
+        </p:spPr>
+        <p:txBody>
+          <a:bodyPr wrap="square">
+            <a:noAutofit/>
+          </a:bodyPr>
+          <a:lstStyle/>
+          <a:p>
+            <a:r>
+              <a:rPr sz="3200" b="1">
                 <a:solidFill>
                   <a:srgbClr val="1E2024"/>
                 </a:solidFill>
                 <a:latin typeface="Calibri"/>
               </a:rPr>
-              <a:t>client 繞過協商、直接送出 broker 不支援的 API version，會怎樣？</a:t>
-            </a:r>
-          </a:p>
-        </p:txBody>
-      </p:sp>
-      <p:sp>
-        <p:nvSpPr>
-          <p:cNvPr id="4" name="TextBox 3"/>
-          <p:cNvSpPr txBox="1"/>
-          <p:nvPr/>
-        </p:nvSpPr>
-        <p:spPr>
-          <a:xfrm>
-            <a:off x="822960" y="2331720"/>
+              <a:t>版本截斷：為什麼「升一點點」不夠</a:t>
+            </a:r>
+          </a:p>
+        </p:txBody>
+      </p:sp>
+      <p:pic>
+        <p:nvPicPr>
+          <p:cNvPr id="4" name="Picture 3" descr="alert-triangle.png"/>
+          <p:cNvPicPr>
+            <a:picLocks noChangeAspect="1"/>
+          </p:cNvPicPr>
+          <p:nvPr/>
+        </p:nvPicPr>
+        <p:blipFill>
+          <a:blip r:embed="rId2"/>
+          <a:stretch>
+            <a:fillRect/>
+          </a:stretch>
+        </p:blipFill>
+        <p:spPr>
+          <a:xfrm>
+            <a:off x="658368" y="2176272"/>
+            <a:ext cx="274320" cy="274320"/>
+          </a:xfrm>
+          <a:prstGeom prst="rect">
+            <a:avLst/>
+          </a:prstGeom>
+        </p:spPr>
+      </p:pic>
+      <p:sp>
+        <p:nvSpPr>
+          <p:cNvPr id="5" name="TextBox 4"/>
+          <p:cNvSpPr txBox="1"/>
+          <p:nvPr/>
+        </p:nvSpPr>
+        <p:spPr>
+          <a:xfrm>
+            <a:off x="1078992" y="2148840"/>
             <a:ext cx="10515600" cy="493776"/>
           </a:xfrm>
           <a:prstGeom prst="rect">
@@ -5200,65 +5240,13 @@
           <a:lstStyle/>
           <a:p>
             <a:r>
-              <a:rPr sz="1600" b="0">
+              <a:rPr sz="1650" b="0">
                 <a:solidFill>
                   <a:srgbClr val="1E2024"/>
                 </a:solidFill>
                 <a:latin typeface="Calibri"/>
               </a:rPr>
-              <a:t>A.  </a:t>
-            </a:r>
-            <a:r>
-              <a:rPr sz="1600" b="0">
-                <a:solidFill>
-                  <a:srgbClr val="1E2024"/>
-                </a:solidFill>
-                <a:latin typeface="Calibri"/>
-              </a:rPr>
-              <a:t>一律回 UNSUPPORTED_VERSION 錯誤碼</a:t>
-            </a:r>
-          </a:p>
-        </p:txBody>
-      </p:sp>
-      <p:sp>
-        <p:nvSpPr>
-          <p:cNvPr id="5" name="TextBox 4"/>
-          <p:cNvSpPr txBox="1"/>
-          <p:nvPr/>
-        </p:nvSpPr>
-        <p:spPr>
-          <a:xfrm>
-            <a:off x="822960" y="2953512"/>
-            <a:ext cx="10515600" cy="493776"/>
-          </a:xfrm>
-          <a:prstGeom prst="rect">
-            <a:avLst/>
-          </a:prstGeom>
-          <a:noFill/>
-        </p:spPr>
-        <p:txBody>
-          <a:bodyPr wrap="square">
-            <a:noAutofit/>
-          </a:bodyPr>
-          <a:lstStyle/>
-          <a:p>
-            <a:r>
-              <a:rPr sz="1600" b="0">
-                <a:solidFill>
-                  <a:srgbClr val="1E2024"/>
-                </a:solidFill>
-                <a:latin typeface="Calibri"/>
-              </a:rPr>
-              <a:t>B.  </a:t>
-            </a:r>
-            <a:r>
-              <a:rPr sz="1600" b="0">
-                <a:solidFill>
-                  <a:srgbClr val="1E2024"/>
-                </a:solidFill>
-                <a:latin typeface="Calibri"/>
-              </a:rPr>
-              <a:t>只有 ApiVersions 例外回錯誤碼+支援範圍；其他 API 直接關閉連線</a:t>
+              <a:t>前一頁「交集空」最容易被忽略的根因——舊 wire 版本被整批移除</a:t>
             </a:r>
           </a:p>
         </p:txBody>
@@ -5271,37 +5259,46 @@
         </p:nvSpPr>
         <p:spPr>
           <a:xfrm>
-            <a:off x="822960" y="3575304"/>
-            <a:ext cx="10515600" cy="493776"/>
-          </a:xfrm>
-          <a:prstGeom prst="rect">
-            <a:avLst/>
-          </a:prstGeom>
-          <a:noFill/>
-        </p:spPr>
-        <p:txBody>
-          <a:bodyPr wrap="square">
-            <a:noAutofit/>
-          </a:bodyPr>
-          <a:lstStyle/>
-          <a:p>
-            <a:r>
-              <a:rPr sz="1600" b="0">
-                <a:solidFill>
-                  <a:srgbClr val="1E2024"/>
-                </a:solidFill>
-                <a:latin typeface="Calibri"/>
-              </a:rPr>
-              <a:t>C.  </a:t>
-            </a:r>
-            <a:r>
-              <a:rPr sz="1600" b="0">
-                <a:solidFill>
-                  <a:srgbClr val="1E2024"/>
-                </a:solidFill>
-                <a:latin typeface="Calibri"/>
-              </a:rPr>
-              <a:t>broker 自動降版處理</a:t>
+            <a:off x="640080" y="2788920"/>
+            <a:ext cx="10972800" cy="822959"/>
+          </a:xfrm>
+          <a:prstGeom prst="rect">
+            <a:avLst/>
+          </a:prstGeom>
+          <a:solidFill>
+            <a:srgbClr val="F3F1EC"/>
+          </a:solidFill>
+          <a:ln w="6350">
+            <a:solidFill>
+              <a:srgbClr val="E3E0D8"/>
+            </a:solidFill>
+          </a:ln>
+        </p:spPr>
+        <p:txBody>
+          <a:bodyPr wrap="square" lIns="146304" tIns="91440" bIns="91440">
+            <a:noAutofit/>
+          </a:bodyPr>
+          <a:lstStyle/>
+          <a:p>
+            <a:r>
+              <a:rPr sz="1350" b="0">
+                <a:solidFill>
+                  <a:srgbClr val="2C2C2A"/>
+                </a:solidFill>
+                <a:latin typeface="Calibri"/>
+              </a:rPr>
+              <a:t>舊 wire API version 被整個移除，min 可 &gt; 0</a:t>
+            </a:r>
+          </a:p>
+          <a:p>
+            <a:r>
+              <a:rPr sz="1350" b="0">
+                <a:solidFill>
+                  <a:srgbClr val="2C2C2A"/>
+                </a:solidFill>
+                <a:latin typeface="Calibri"/>
+              </a:rPr>
+              <a:t>  Fetch：4–18（v0–3 在 4.0 移除）</a:t>
             </a:r>
           </a:p>
         </p:txBody>
@@ -5314,37 +5311,33 @@
         </p:nvSpPr>
         <p:spPr>
           <a:xfrm>
-            <a:off x="822960" y="4197096"/>
-            <a:ext cx="10515600" cy="493776"/>
-          </a:xfrm>
-          <a:prstGeom prst="rect">
-            <a:avLst/>
-          </a:prstGeom>
-          <a:noFill/>
-        </p:spPr>
-        <p:txBody>
-          <a:bodyPr wrap="square">
-            <a:noAutofit/>
-          </a:bodyPr>
-          <a:lstStyle/>
-          <a:p>
-            <a:r>
-              <a:rPr sz="1600" b="0">
-                <a:solidFill>
-                  <a:srgbClr val="1E2024"/>
-                </a:solidFill>
-                <a:latin typeface="Calibri"/>
-              </a:rPr>
-              <a:t>D.  </a:t>
-            </a:r>
-            <a:r>
-              <a:rPr sz="1600" b="0">
-                <a:solidFill>
-                  <a:srgbClr val="1E2024"/>
-                </a:solidFill>
-                <a:latin typeface="Calibri"/>
-              </a:rPr>
-              <a:t>忽略版本照常處理</a:t>
+            <a:off x="640080" y="3813048"/>
+            <a:ext cx="10972800" cy="877824"/>
+          </a:xfrm>
+          <a:prstGeom prst="rect">
+            <a:avLst/>
+          </a:prstGeom>
+          <a:solidFill>
+            <a:srgbClr val="E9F3DE"/>
+          </a:solidFill>
+          <a:ln>
+            <a:noFill/>
+          </a:ln>
+        </p:spPr>
+        <p:txBody>
+          <a:bodyPr wrap="square" lIns="146304" tIns="82296">
+            <a:noAutofit/>
+          </a:bodyPr>
+          <a:lstStyle/>
+          <a:p>
+            <a:r>
+              <a:rPr sz="1500" b="0">
+                <a:solidFill>
+                  <a:srgbClr val="27500A"/>
+                </a:solidFill>
+                <a:latin typeface="Calibri"/>
+              </a:rPr>
+              <a:t>解法：升任一端到 4.0 前，先確認另一端 ≥ 2.1（upgrade guide 明訂雙向要求），否則協商結果沒有可用版本</a:t>
             </a:r>
           </a:p>
         </p:txBody>
@@ -5357,28 +5350,125 @@
         </p:nvSpPr>
         <p:spPr>
           <a:xfrm>
-            <a:off x="640080" y="4910327"/>
-            <a:ext cx="10972800" cy="914400"/>
-          </a:xfrm>
-          <a:prstGeom prst="rect">
-            <a:avLst/>
-          </a:prstGeom>
-          <a:noFill/>
-        </p:spPr>
-        <p:txBody>
-          <a:bodyPr wrap="square">
-            <a:noAutofit/>
-          </a:bodyPr>
-          <a:lstStyle/>
-          <a:p>
-            <a:r>
-              <a:rPr sz="1400" b="0">
+            <a:off x="640080" y="4873752"/>
+            <a:ext cx="10972800" cy="731520"/>
+          </a:xfrm>
+          <a:prstGeom prst="rect">
+            <a:avLst/>
+          </a:prstGeom>
+          <a:noFill/>
+        </p:spPr>
+        <p:txBody>
+          <a:bodyPr wrap="square">
+            <a:noAutofit/>
+          </a:bodyPr>
+          <a:lstStyle/>
+          <a:p>
+            <a:r>
+              <a:rPr sz="1500" b="0">
+                <a:solidFill>
+                  <a:srgbClr val="5F5E5A"/>
+                </a:solidFill>
+                <a:latin typeface="Calibri"/>
+              </a:rPr>
+              <a:t>取捨：0.8.0（2013）起九年保留每個版本——每個舊版本都是活的程式碼與測試面；4.0 用「斷 2018 年前的 client」換「刪九年的碼」，只有 major 版本邊界付得起。</a:t>
+            </a:r>
+          </a:p>
+        </p:txBody>
+      </p:sp>
+      <p:sp>
+        <p:nvSpPr>
+          <p:cNvPr id="9" name="TextBox 8"/>
+          <p:cNvSpPr txBox="1"/>
+          <p:nvPr/>
+        </p:nvSpPr>
+        <p:spPr>
+          <a:xfrm>
+            <a:off x="640080" y="5733288"/>
+            <a:ext cx="10972800" cy="731520"/>
+          </a:xfrm>
+          <a:prstGeom prst="rect">
+            <a:avLst/>
+          </a:prstGeom>
+          <a:noFill/>
+        </p:spPr>
+        <p:txBody>
+          <a:bodyPr wrap="square">
+            <a:noAutofit/>
+          </a:bodyPr>
+          <a:lstStyle/>
+          <a:p>
+            <a:r>
+              <a:rPr sz="1500" b="0">
+                <a:solidFill>
+                  <a:srgbClr val="5F5E5A"/>
+                </a:solidFill>
+                <a:latin typeface="Calibri"/>
+              </a:rPr>
+              <a:t>銜接（非本場）：finalize / 升降當下的錯誤（INVALID_UPDATE_VERSION 等）屬「運行時的版本升降」那場，本場不展開。</a:t>
+            </a:r>
+          </a:p>
+        </p:txBody>
+      </p:sp>
+      <p:sp>
+        <p:nvSpPr>
+          <p:cNvPr id="10" name="TextBox 9"/>
+          <p:cNvSpPr txBox="1"/>
+          <p:nvPr/>
+        </p:nvSpPr>
+        <p:spPr>
+          <a:xfrm>
+            <a:off x="640080" y="6400800"/>
+            <a:ext cx="10972800" cy="384048"/>
+          </a:xfrm>
+          <a:prstGeom prst="rect">
+            <a:avLst/>
+          </a:prstGeom>
+          <a:noFill/>
+        </p:spPr>
+        <p:txBody>
+          <a:bodyPr wrap="square">
+            <a:noAutofit/>
+          </a:bodyPr>
+          <a:lstStyle/>
+          <a:p>
+            <a:r>
+              <a:rPr sz="1200" b="1">
                 <a:solidFill>
                   <a:srgbClr val="8A8A8A"/>
                 </a:solidFill>
                 <a:latin typeface="Calibri"/>
               </a:rPr>
-              <a:t>想一想 —— 下一頁公布答案</a:t>
+              <a:t>REF   </a:t>
+            </a:r>
+            <a:r>
+              <a:rPr sz="1200" b="0" u="sng">
+                <a:solidFill>
+                  <a:srgbClr val="185FA5"/>
+                </a:solidFill>
+                <a:latin typeface="Courier New"/>
+                <a:hlinkClick r:id="rId3"/>
+              </a:rPr>
+              <a:t>upgrade.md:229</a:t>
+            </a:r>
+            <a:r>
+              <a:rPr sz="1200" b="0">
+                <a:solidFill>
+                  <a:srgbClr val="8A8A8A"/>
+                </a:solidFill>
+                <a:latin typeface="Calibri"/>
+              </a:rPr>
+              <a:t>   ·   </a:t>
+            </a:r>
+            <a:r>
+              <a:rPr sz="1200" b="0" u="sng">
+                <a:solidFill>
+                  <a:srgbClr val="185FA5"/>
+                </a:solidFill>
+                <a:latin typeface="Courier New"/>
+                <a:hlinkClick r:id="rId4"/>
+              </a:rPr>
+              <a:t>FetchRequest.json validVersions</a:t>
             </a:r>
           </a:p>
         </p:txBody>
@@ -5430,7 +5520,7 @@
                 </a:solidFill>
                 <a:latin typeface="Calibri"/>
               </a:rPr>
-              <a:t>隨堂考 · 核心　（正解）</a:t>
+              <a:t>隨堂考 · 核心</a:t>
             </a:r>
           </a:p>
         </p:txBody>
@@ -5526,36 +5616,31 @@
           <a:prstGeom prst="rect">
             <a:avLst/>
           </a:prstGeom>
-          <a:solidFill>
-            <a:srgbClr val="E9F3DE"/>
-          </a:solidFill>
-          <a:ln>
-            <a:noFill/>
-          </a:ln>
-        </p:spPr>
-        <p:txBody>
-          <a:bodyPr wrap="square" lIns="128016" tIns="54864">
-            <a:noAutofit/>
-          </a:bodyPr>
-          <a:lstStyle/>
-          <a:p>
-            <a:r>
-              <a:rPr sz="1600" b="1">
-                <a:solidFill>
-                  <a:srgbClr val="27500A"/>
+          <a:noFill/>
+        </p:spPr>
+        <p:txBody>
+          <a:bodyPr wrap="square">
+            <a:noAutofit/>
+          </a:bodyPr>
+          <a:lstStyle/>
+          <a:p>
+            <a:r>
+              <a:rPr sz="1600" b="0">
+                <a:solidFill>
+                  <a:srgbClr val="1E2024"/>
                 </a:solidFill>
                 <a:latin typeface="Calibri"/>
               </a:rPr>
               <a:t>B.  </a:t>
             </a:r>
             <a:r>
-              <a:rPr sz="1600" b="1">
-                <a:solidFill>
-                  <a:srgbClr val="27500A"/>
-                </a:solidFill>
-                <a:latin typeface="Calibri"/>
-              </a:rPr>
-              <a:t>只有 ApiVersions 例外回錯誤碼+支援範圍；其他 API 直接關閉連線   ✓</a:t>
+              <a:rPr sz="1600" b="0">
+                <a:solidFill>
+                  <a:srgbClr val="1E2024"/>
+                </a:solidFill>
+                <a:latin typeface="Calibri"/>
+              </a:rPr>
+              <a:t>只有 ApiVersions 例外回錯誤碼+支援範圍；其他 API 直接關閉連線</a:t>
             </a:r>
           </a:p>
         </p:txBody>
@@ -5669,85 +5754,13 @@
           <a:lstStyle/>
           <a:p>
             <a:r>
-              <a:rPr sz="1400" b="1">
-                <a:solidFill>
-                  <a:srgbClr val="27500A"/>
-                </a:solidFill>
-                <a:latin typeface="Calibri"/>
-              </a:rPr>
-              <a:t>正解 B — </a:t>
-            </a:r>
-            <a:r>
               <a:rPr sz="1400" b="0">
                 <a:solidFill>
-                  <a:srgbClr val="1E2024"/>
-                </a:solidFill>
-                <a:latin typeface="Calibri"/>
-              </a:rPr>
-              <a:t>ApiVersions 是協商的第一支 request（此時雙方還不知道彼此版本），若它也關閉連線，client 永遠問不到支援範圍，故回 v0+錯誤碼讓 client 重新協商；其他 API 在 RequestContext 解析失敗、SocketServer 關閉連線。</a:t>
-            </a:r>
-          </a:p>
-        </p:txBody>
-      </p:sp>
-      <p:sp>
-        <p:nvSpPr>
-          <p:cNvPr id="9" name="TextBox 8"/>
-          <p:cNvSpPr txBox="1"/>
-          <p:nvPr/>
-        </p:nvSpPr>
-        <p:spPr>
-          <a:xfrm>
-            <a:off x="640080" y="6400800"/>
-            <a:ext cx="10972800" cy="384048"/>
-          </a:xfrm>
-          <a:prstGeom prst="rect">
-            <a:avLst/>
-          </a:prstGeom>
-          <a:noFill/>
-        </p:spPr>
-        <p:txBody>
-          <a:bodyPr wrap="square">
-            <a:noAutofit/>
-          </a:bodyPr>
-          <a:lstStyle/>
-          <a:p>
-            <a:r>
-              <a:rPr sz="1200" b="1">
-                <a:solidFill>
                   <a:srgbClr val="8A8A8A"/>
                 </a:solidFill>
                 <a:latin typeface="Calibri"/>
               </a:rPr>
-              <a:t>REF   </a:t>
-            </a:r>
-            <a:r>
-              <a:rPr sz="1200" b="0" u="sng">
-                <a:solidFill>
-                  <a:srgbClr val="185FA5"/>
-                </a:solidFill>
-                <a:latin typeface="Courier New"/>
-                <a:hlinkClick r:id="rId2"/>
-              </a:rPr>
-              <a:t>RequestContext.java:112</a:t>
-            </a:r>
-            <a:r>
-              <a:rPr sz="1200" b="0">
-                <a:solidFill>
-                  <a:srgbClr val="8A8A8A"/>
-                </a:solidFill>
-                <a:latin typeface="Calibri"/>
-              </a:rPr>
-              <a:t>   ·   </a:t>
-            </a:r>
-            <a:r>
-              <a:rPr sz="1200" b="0" u="sng">
-                <a:solidFill>
-                  <a:srgbClr val="185FA5"/>
-                </a:solidFill>
-                <a:latin typeface="Courier New"/>
-                <a:hlinkClick r:id="rId3"/>
-              </a:rPr>
-              <a:t>SocketServer.scala:781</a:t>
+              <a:t>想一想 —— 下一頁公布答案</a:t>
             </a:r>
           </a:p>
         </p:txBody>
@@ -5799,6 +5812,375 @@
                 </a:solidFill>
                 <a:latin typeface="Calibri"/>
               </a:rPr>
+              <a:t>隨堂考 · 核心　（正解）</a:t>
+            </a:r>
+          </a:p>
+        </p:txBody>
+      </p:sp>
+      <p:sp>
+        <p:nvSpPr>
+          <p:cNvPr id="3" name="TextBox 2"/>
+          <p:cNvSpPr txBox="1"/>
+          <p:nvPr/>
+        </p:nvSpPr>
+        <p:spPr>
+          <a:xfrm>
+            <a:off x="640080" y="841248"/>
+            <a:ext cx="10972800" cy="1188720"/>
+          </a:xfrm>
+          <a:prstGeom prst="rect">
+            <a:avLst/>
+          </a:prstGeom>
+          <a:noFill/>
+        </p:spPr>
+        <p:txBody>
+          <a:bodyPr wrap="square">
+            <a:noAutofit/>
+          </a:bodyPr>
+          <a:lstStyle/>
+          <a:p>
+            <a:r>
+              <a:rPr sz="2600" b="1">
+                <a:solidFill>
+                  <a:srgbClr val="1E2024"/>
+                </a:solidFill>
+                <a:latin typeface="Calibri"/>
+              </a:rPr>
+              <a:t>client 繞過協商、直接送出 broker 不支援的 API version，會怎樣？</a:t>
+            </a:r>
+          </a:p>
+        </p:txBody>
+      </p:sp>
+      <p:sp>
+        <p:nvSpPr>
+          <p:cNvPr id="4" name="TextBox 3"/>
+          <p:cNvSpPr txBox="1"/>
+          <p:nvPr/>
+        </p:nvSpPr>
+        <p:spPr>
+          <a:xfrm>
+            <a:off x="822960" y="2331720"/>
+            <a:ext cx="10515600" cy="493776"/>
+          </a:xfrm>
+          <a:prstGeom prst="rect">
+            <a:avLst/>
+          </a:prstGeom>
+          <a:noFill/>
+        </p:spPr>
+        <p:txBody>
+          <a:bodyPr wrap="square">
+            <a:noAutofit/>
+          </a:bodyPr>
+          <a:lstStyle/>
+          <a:p>
+            <a:r>
+              <a:rPr sz="1600" b="0">
+                <a:solidFill>
+                  <a:srgbClr val="1E2024"/>
+                </a:solidFill>
+                <a:latin typeface="Calibri"/>
+              </a:rPr>
+              <a:t>A.  </a:t>
+            </a:r>
+            <a:r>
+              <a:rPr sz="1600" b="0">
+                <a:solidFill>
+                  <a:srgbClr val="1E2024"/>
+                </a:solidFill>
+                <a:latin typeface="Calibri"/>
+              </a:rPr>
+              <a:t>一律回 UNSUPPORTED_VERSION 錯誤碼</a:t>
+            </a:r>
+          </a:p>
+        </p:txBody>
+      </p:sp>
+      <p:sp>
+        <p:nvSpPr>
+          <p:cNvPr id="5" name="TextBox 4"/>
+          <p:cNvSpPr txBox="1"/>
+          <p:nvPr/>
+        </p:nvSpPr>
+        <p:spPr>
+          <a:xfrm>
+            <a:off x="822960" y="2953512"/>
+            <a:ext cx="10515600" cy="493776"/>
+          </a:xfrm>
+          <a:prstGeom prst="rect">
+            <a:avLst/>
+          </a:prstGeom>
+          <a:solidFill>
+            <a:srgbClr val="E9F3DE"/>
+          </a:solidFill>
+          <a:ln>
+            <a:noFill/>
+          </a:ln>
+        </p:spPr>
+        <p:txBody>
+          <a:bodyPr wrap="square" lIns="128016" tIns="54864">
+            <a:noAutofit/>
+          </a:bodyPr>
+          <a:lstStyle/>
+          <a:p>
+            <a:r>
+              <a:rPr sz="1600" b="1">
+                <a:solidFill>
+                  <a:srgbClr val="27500A"/>
+                </a:solidFill>
+                <a:latin typeface="Calibri"/>
+              </a:rPr>
+              <a:t>B.  </a:t>
+            </a:r>
+            <a:r>
+              <a:rPr sz="1600" b="1">
+                <a:solidFill>
+                  <a:srgbClr val="27500A"/>
+                </a:solidFill>
+                <a:latin typeface="Calibri"/>
+              </a:rPr>
+              <a:t>只有 ApiVersions 例外回錯誤碼+支援範圍；其他 API 直接關閉連線   ✓</a:t>
+            </a:r>
+          </a:p>
+        </p:txBody>
+      </p:sp>
+      <p:sp>
+        <p:nvSpPr>
+          <p:cNvPr id="6" name="TextBox 5"/>
+          <p:cNvSpPr txBox="1"/>
+          <p:nvPr/>
+        </p:nvSpPr>
+        <p:spPr>
+          <a:xfrm>
+            <a:off x="822960" y="3575304"/>
+            <a:ext cx="10515600" cy="493776"/>
+          </a:xfrm>
+          <a:prstGeom prst="rect">
+            <a:avLst/>
+          </a:prstGeom>
+          <a:noFill/>
+        </p:spPr>
+        <p:txBody>
+          <a:bodyPr wrap="square">
+            <a:noAutofit/>
+          </a:bodyPr>
+          <a:lstStyle/>
+          <a:p>
+            <a:r>
+              <a:rPr sz="1600" b="0">
+                <a:solidFill>
+                  <a:srgbClr val="1E2024"/>
+                </a:solidFill>
+                <a:latin typeface="Calibri"/>
+              </a:rPr>
+              <a:t>C.  </a:t>
+            </a:r>
+            <a:r>
+              <a:rPr sz="1600" b="0">
+                <a:solidFill>
+                  <a:srgbClr val="1E2024"/>
+                </a:solidFill>
+                <a:latin typeface="Calibri"/>
+              </a:rPr>
+              <a:t>broker 自動降版處理</a:t>
+            </a:r>
+          </a:p>
+        </p:txBody>
+      </p:sp>
+      <p:sp>
+        <p:nvSpPr>
+          <p:cNvPr id="7" name="TextBox 6"/>
+          <p:cNvSpPr txBox="1"/>
+          <p:nvPr/>
+        </p:nvSpPr>
+        <p:spPr>
+          <a:xfrm>
+            <a:off x="822960" y="4197096"/>
+            <a:ext cx="10515600" cy="493776"/>
+          </a:xfrm>
+          <a:prstGeom prst="rect">
+            <a:avLst/>
+          </a:prstGeom>
+          <a:noFill/>
+        </p:spPr>
+        <p:txBody>
+          <a:bodyPr wrap="square">
+            <a:noAutofit/>
+          </a:bodyPr>
+          <a:lstStyle/>
+          <a:p>
+            <a:r>
+              <a:rPr sz="1600" b="0">
+                <a:solidFill>
+                  <a:srgbClr val="1E2024"/>
+                </a:solidFill>
+                <a:latin typeface="Calibri"/>
+              </a:rPr>
+              <a:t>D.  </a:t>
+            </a:r>
+            <a:r>
+              <a:rPr sz="1600" b="0">
+                <a:solidFill>
+                  <a:srgbClr val="1E2024"/>
+                </a:solidFill>
+                <a:latin typeface="Calibri"/>
+              </a:rPr>
+              <a:t>忽略版本照常處理</a:t>
+            </a:r>
+          </a:p>
+        </p:txBody>
+      </p:sp>
+      <p:sp>
+        <p:nvSpPr>
+          <p:cNvPr id="8" name="TextBox 7"/>
+          <p:cNvSpPr txBox="1"/>
+          <p:nvPr/>
+        </p:nvSpPr>
+        <p:spPr>
+          <a:xfrm>
+            <a:off x="640080" y="4910327"/>
+            <a:ext cx="10972800" cy="914400"/>
+          </a:xfrm>
+          <a:prstGeom prst="rect">
+            <a:avLst/>
+          </a:prstGeom>
+          <a:noFill/>
+        </p:spPr>
+        <p:txBody>
+          <a:bodyPr wrap="square">
+            <a:noAutofit/>
+          </a:bodyPr>
+          <a:lstStyle/>
+          <a:p>
+            <a:r>
+              <a:rPr sz="1400" b="1">
+                <a:solidFill>
+                  <a:srgbClr val="27500A"/>
+                </a:solidFill>
+                <a:latin typeface="Calibri"/>
+              </a:rPr>
+              <a:t>正解 B — </a:t>
+            </a:r>
+            <a:r>
+              <a:rPr sz="1400" b="0">
+                <a:solidFill>
+                  <a:srgbClr val="1E2024"/>
+                </a:solidFill>
+                <a:latin typeface="Calibri"/>
+              </a:rPr>
+              <a:t>ApiVersions 是協商的第一支 request（此時雙方還不知道彼此版本），若它也關閉連線，client 永遠問不到支援範圍，故回 v0+錯誤碼讓 client 重新協商；其他 API 在 RequestContext 解析失敗、SocketServer 關閉連線。</a:t>
+            </a:r>
+          </a:p>
+        </p:txBody>
+      </p:sp>
+      <p:sp>
+        <p:nvSpPr>
+          <p:cNvPr id="9" name="TextBox 8"/>
+          <p:cNvSpPr txBox="1"/>
+          <p:nvPr/>
+        </p:nvSpPr>
+        <p:spPr>
+          <a:xfrm>
+            <a:off x="640080" y="6400800"/>
+            <a:ext cx="10972800" cy="384048"/>
+          </a:xfrm>
+          <a:prstGeom prst="rect">
+            <a:avLst/>
+          </a:prstGeom>
+          <a:noFill/>
+        </p:spPr>
+        <p:txBody>
+          <a:bodyPr wrap="square">
+            <a:noAutofit/>
+          </a:bodyPr>
+          <a:lstStyle/>
+          <a:p>
+            <a:r>
+              <a:rPr sz="1200" b="1">
+                <a:solidFill>
+                  <a:srgbClr val="8A8A8A"/>
+                </a:solidFill>
+                <a:latin typeface="Calibri"/>
+              </a:rPr>
+              <a:t>REF   </a:t>
+            </a:r>
+            <a:r>
+              <a:rPr sz="1200" b="0" u="sng">
+                <a:solidFill>
+                  <a:srgbClr val="185FA5"/>
+                </a:solidFill>
+                <a:latin typeface="Courier New"/>
+                <a:hlinkClick r:id="rId2"/>
+              </a:rPr>
+              <a:t>RequestContext.java:112</a:t>
+            </a:r>
+            <a:r>
+              <a:rPr sz="1200" b="0">
+                <a:solidFill>
+                  <a:srgbClr val="8A8A8A"/>
+                </a:solidFill>
+                <a:latin typeface="Calibri"/>
+              </a:rPr>
+              <a:t>   ·   </a:t>
+            </a:r>
+            <a:r>
+              <a:rPr sz="1200" b="0" u="sng">
+                <a:solidFill>
+                  <a:srgbClr val="185FA5"/>
+                </a:solidFill>
+                <a:latin typeface="Courier New"/>
+                <a:hlinkClick r:id="rId3"/>
+              </a:rPr>
+              <a:t>SocketServer.scala:781</a:t>
+            </a:r>
+          </a:p>
+        </p:txBody>
+      </p:sp>
+    </p:spTree>
+  </p:cSld>
+  <p:clrMapOvr>
+    <a:masterClrMapping/>
+  </p:clrMapOvr>
+</p:sld>
+</file>
+
+<file path=ppt/slides/slide18.xml><?xml version="1.0" encoding="utf-8"?>
+<p:sld xmlns:a="http://schemas.openxmlformats.org/drawingml/2006/main" xmlns:p="http://schemas.openxmlformats.org/presentationml/2006/main" xmlns:r="http://schemas.openxmlformats.org/officeDocument/2006/relationships">
+  <p:cSld>
+    <p:spTree>
+      <p:nvGrpSpPr>
+        <p:cNvPr id="1" name=""/>
+        <p:cNvGrpSpPr/>
+        <p:nvPr/>
+      </p:nvGrpSpPr>
+      <p:grpSpPr/>
+      <p:sp>
+        <p:nvSpPr>
+          <p:cNvPr id="2" name="TextBox 1"/>
+          <p:cNvSpPr txBox="1"/>
+          <p:nvPr/>
+        </p:nvSpPr>
+        <p:spPr>
+          <a:xfrm>
+            <a:off x="640080" y="457200"/>
+            <a:ext cx="10972800" cy="365760"/>
+          </a:xfrm>
+          <a:prstGeom prst="rect">
+            <a:avLst/>
+          </a:prstGeom>
+          <a:noFill/>
+        </p:spPr>
+        <p:txBody>
+          <a:bodyPr wrap="square">
+            <a:noAutofit/>
+          </a:bodyPr>
+          <a:lstStyle/>
+          <a:p>
+            <a:r>
+              <a:rPr sz="1300" b="1">
+                <a:solidFill>
+                  <a:srgbClr val="185FA5"/>
+                </a:solidFill>
+                <a:latin typeface="Calibri"/>
+              </a:rPr>
               <a:t>Recap</a:t>
             </a:r>
           </a:p>
@@ -7701,7 +8083,7 @@
                 </a:solidFill>
                 <a:latin typeface="Calibri"/>
               </a:rPr>
-              <a:t>Part 1 · 舉例</a:t>
+              <a:t>Part 1 · 架構 (c)</a:t>
             </a:r>
           </a:p>
         </p:txBody>
@@ -7714,69 +8096,35 @@
         </p:nvSpPr>
         <p:spPr>
           <a:xfrm>
-            <a:off x="640080" y="822960"/>
-            <a:ext cx="10972800" cy="640080"/>
-          </a:xfrm>
-          <a:prstGeom prst="rect">
-            <a:avLst/>
-          </a:prstGeom>
-          <a:noFill/>
-        </p:spPr>
-        <p:txBody>
-          <a:bodyPr wrap="square">
-            <a:noAutofit/>
-          </a:bodyPr>
-          <a:lstStyle/>
-          <a:p>
-            <a:r>
-              <a:rPr sz="2900" b="1">
+            <a:off x="640080" y="841248"/>
+            <a:ext cx="10972800" cy="1005840"/>
+          </a:xfrm>
+          <a:prstGeom prst="rect">
+            <a:avLst/>
+          </a:prstGeom>
+          <a:noFill/>
+        </p:spPr>
+        <p:txBody>
+          <a:bodyPr wrap="square">
+            <a:noAutofit/>
+          </a:bodyPr>
+          <a:lstStyle/>
+          <a:p>
+            <a:r>
+              <a:rPr sz="3200" b="1">
                 <a:solidFill>
                   <a:srgbClr val="1E2024"/>
                 </a:solidFill>
                 <a:latin typeface="Calibri"/>
               </a:rPr>
-              <a:t>以一支 Fetch 為例：consumer 協商、replica 由 MV</a:t>
-            </a:r>
-          </a:p>
-        </p:txBody>
-      </p:sp>
-      <p:sp>
-        <p:nvSpPr>
-          <p:cNvPr id="4" name="TextBox 3"/>
-          <p:cNvSpPr txBox="1"/>
-          <p:nvPr/>
-        </p:nvSpPr>
-        <p:spPr>
-          <a:xfrm>
-            <a:off x="640080" y="1481328"/>
-            <a:ext cx="10972800" cy="365760"/>
-          </a:xfrm>
-          <a:prstGeom prst="rect">
-            <a:avLst/>
-          </a:prstGeom>
-          <a:noFill/>
-        </p:spPr>
-        <p:txBody>
-          <a:bodyPr wrap="square">
-            <a:noAutofit/>
-          </a:bodyPr>
-          <a:lstStyle/>
-          <a:p>
-            <a:r>
-              <a:rPr sz="1400" b="0">
-                <a:solidFill>
-                  <a:srgbClr val="5F5E5A"/>
-                </a:solidFill>
-                <a:latin typeface="Calibri"/>
-              </a:rPr>
-              <a:t>同一支 Fetch 兩種身分：consumer fetch 走 client↔broker、replica fetch 走 broker↔broker</a:t>
+              <a:t>為什麼 client 用協商、不用 MV？</a:t>
             </a:r>
           </a:p>
         </p:txBody>
       </p:sp>
       <p:pic>
         <p:nvPicPr>
-          <p:cNvPr id="5" name="Picture 4" descr="s2a-rangeline.png"/>
+          <p:cNvPr id="4" name="Picture 3" descr="arrows-split.png"/>
           <p:cNvPicPr>
             <a:picLocks noChangeAspect="1"/>
           </p:cNvPicPr>
@@ -7790,8 +8138,8 @@
         </p:blipFill>
         <p:spPr>
           <a:xfrm>
-            <a:off x="1664208" y="1965960"/>
-            <a:ext cx="8869680" cy="4097792"/>
+            <a:off x="658368" y="2176272"/>
+            <a:ext cx="274320" cy="274320"/>
           </a:xfrm>
           <a:prstGeom prst="rect">
             <a:avLst/>
@@ -7800,7 +8148,138 @@
       </p:pic>
       <p:sp>
         <p:nvSpPr>
-          <p:cNvPr id="6" name="TextBox 5"/>
+          <p:cNvPr id="5" name="TextBox 4"/>
+          <p:cNvSpPr txBox="1"/>
+          <p:nvPr/>
+        </p:nvSpPr>
+        <p:spPr>
+          <a:xfrm>
+            <a:off x="1078992" y="2148840"/>
+            <a:ext cx="10515600" cy="1188720"/>
+          </a:xfrm>
+          <a:prstGeom prst="rect">
+            <a:avLst/>
+          </a:prstGeom>
+          <a:noFill/>
+        </p:spPr>
+        <p:txBody>
+          <a:bodyPr wrap="square">
+            <a:noAutofit/>
+          </a:bodyPr>
+          <a:lstStyle/>
+          <a:p>
+            <a:r>
+              <a:rPr sz="1650" b="0">
+                <a:solidFill>
+                  <a:srgbClr val="1E2024"/>
+                </a:solidFill>
+                <a:latin typeface="Calibri"/>
+              </a:rPr>
+              <a:t>為什麼不用 MV？MV 是叢集內部、operator 協調、全叢集單一值——但 client 是外部函式庫（沒 metadata log）、幾十種實作各自升級（operator 叫不動）、點對點也不需全體同版</a:t>
+            </a:r>
+          </a:p>
+        </p:txBody>
+      </p:sp>
+      <p:pic>
+        <p:nvPicPr>
+          <p:cNvPr id="6" name="Picture 5" descr="point.png"/>
+          <p:cNvPicPr>
+            <a:picLocks noChangeAspect="1"/>
+          </p:cNvPicPr>
+          <p:nvPr/>
+        </p:nvPicPr>
+        <p:blipFill>
+          <a:blip r:embed="rId3"/>
+          <a:stretch>
+            <a:fillRect/>
+          </a:stretch>
+        </p:blipFill>
+        <p:spPr>
+          <a:xfrm>
+            <a:off x="658368" y="3511296"/>
+            <a:ext cx="274320" cy="274320"/>
+          </a:xfrm>
+          <a:prstGeom prst="rect">
+            <a:avLst/>
+          </a:prstGeom>
+        </p:spPr>
+      </p:pic>
+      <p:sp>
+        <p:nvSpPr>
+          <p:cNvPr id="7" name="TextBox 6"/>
+          <p:cNvSpPr txBox="1"/>
+          <p:nvPr/>
+        </p:nvSpPr>
+        <p:spPr>
+          <a:xfrm>
+            <a:off x="1078992" y="3483864"/>
+            <a:ext cx="10515600" cy="1188720"/>
+          </a:xfrm>
+          <a:prstGeom prst="rect">
+            <a:avLst/>
+          </a:prstGeom>
+          <a:noFill/>
+        </p:spPr>
+        <p:txBody>
+          <a:bodyPr wrap="square">
+            <a:noAutofit/>
+          </a:bodyPr>
+          <a:lstStyle/>
+          <a:p>
+            <a:r>
+              <a:rPr sz="1650" b="0">
+                <a:solidFill>
+                  <a:srgbClr val="1E2024"/>
+                </a:solidFill>
+                <a:latin typeface="Calibri"/>
+              </a:rPr>
+              <a:t>為什麼要一來一往？對方哪台、哪版事先不知，滾動升級中還一直變——只能連上當下問 broker（它才是自己能力的權威）；一次握手拿全 API 能力圖，之後每支第一次就送對版</a:t>
+            </a:r>
+          </a:p>
+        </p:txBody>
+      </p:sp>
+      <p:sp>
+        <p:nvSpPr>
+          <p:cNvPr id="8" name="TextBox 7"/>
+          <p:cNvSpPr txBox="1"/>
+          <p:nvPr/>
+        </p:nvSpPr>
+        <p:spPr>
+          <a:xfrm>
+            <a:off x="640080" y="4818888"/>
+            <a:ext cx="10972800" cy="877824"/>
+          </a:xfrm>
+          <a:prstGeom prst="rect">
+            <a:avLst/>
+          </a:prstGeom>
+          <a:solidFill>
+            <a:srgbClr val="E9F3DE"/>
+          </a:solidFill>
+          <a:ln>
+            <a:noFill/>
+          </a:ln>
+        </p:spPr>
+        <p:txBody>
+          <a:bodyPr wrap="square" lIns="146304" tIns="82296">
+            <a:noAutofit/>
+          </a:bodyPr>
+          <a:lstStyle/>
+          <a:p>
+            <a:r>
+              <a:rPr sz="1500" b="0">
+                <a:solidFill>
+                  <a:srgbClr val="27500A"/>
+                </a:solidFill>
+                <a:latin typeface="Calibri"/>
+              </a:rPr>
+              <a:t>一句話：client 平面沒有中央協調者 → 只能在連線接觸點動態發現（協商）；inter-broker 有 operator 協調 → 才用 MV。用哪個，是『有沒有中央協調者』決定的，不是隨意選</a:t>
+            </a:r>
+          </a:p>
+        </p:txBody>
+      </p:sp>
+      <p:sp>
+        <p:nvSpPr>
+          <p:cNvPr id="9" name="TextBox 8"/>
           <p:cNvSpPr txBox="1"/>
           <p:nvPr/>
         </p:nvSpPr>
@@ -7835,9 +8314,9 @@
                   <a:srgbClr val="185FA5"/>
                 </a:solidFill>
                 <a:latin typeface="Courier New"/>
-                <a:hlinkClick r:id="rId3"/>
-              </a:rPr>
-              <a:t>forConsumer/forReplica</a:t>
+                <a:hlinkClick r:id="rId4"/>
+              </a:rPr>
+              <a:t>client decides</a:t>
             </a:r>
             <a:r>
               <a:rPr sz="1200" b="0">
@@ -7853,29 +8332,29 @@
                 <a:solidFill>
                   <a:srgbClr val="185FA5"/>
                 </a:solidFill>
+                <a:latin typeface="Calibri"/>
+                <a:hlinkClick r:id="rId5"/>
+              </a:rPr>
+              <a:t>KIP-35</a:t>
+            </a:r>
+            <a:r>
+              <a:rPr sz="1200" b="0">
+                <a:solidFill>
+                  <a:srgbClr val="8A8A8A"/>
+                </a:solidFill>
+                <a:latin typeface="Calibri"/>
+              </a:rPr>
+              <a:t>   ·   </a:t>
+            </a:r>
+            <a:r>
+              <a:rPr sz="1200" b="0" u="sng">
+                <a:solidFill>
+                  <a:srgbClr val="185FA5"/>
+                </a:solidFill>
                 <a:latin typeface="Courier New"/>
-                <a:hlinkClick r:id="rId4"/>
-              </a:rPr>
-              <a:t>fetchRequestVersion</a:t>
-            </a:r>
-            <a:r>
-              <a:rPr sz="1200" b="0">
-                <a:solidFill>
-                  <a:srgbClr val="8A8A8A"/>
-                </a:solidFill>
-                <a:latin typeface="Calibri"/>
-              </a:rPr>
-              <a:t>   ·   </a:t>
-            </a:r>
-            <a:r>
-              <a:rPr sz="1200" b="0" u="sng">
-                <a:solidFill>
-                  <a:srgbClr val="185FA5"/>
-                </a:solidFill>
-                <a:latin typeface="Courier New"/>
-                <a:hlinkClick r:id="rId5"/>
-              </a:rPr>
-              <a:t>validVersions</a:t>
+                <a:hlinkClick r:id="rId6"/>
+              </a:rPr>
+              <a:t>highest both</a:t>
             </a:r>
           </a:p>
         </p:txBody>
@@ -7927,7 +8406,7 @@
                 </a:solidFill>
                 <a:latin typeface="Calibri"/>
               </a:rPr>
-              <a:t>Part 1 · 對照</a:t>
+              <a:t>Part 1 · 舉例</a:t>
             </a:r>
           </a:p>
         </p:txBody>
@@ -7940,35 +8419,69 @@
         </p:nvSpPr>
         <p:spPr>
           <a:xfrm>
-            <a:off x="640080" y="841248"/>
-            <a:ext cx="10972800" cy="1005840"/>
-          </a:xfrm>
-          <a:prstGeom prst="rect">
-            <a:avLst/>
-          </a:prstGeom>
-          <a:noFill/>
-        </p:spPr>
-        <p:txBody>
-          <a:bodyPr wrap="square">
-            <a:noAutofit/>
-          </a:bodyPr>
-          <a:lstStyle/>
-          <a:p>
-            <a:r>
-              <a:rPr sz="3200" b="1">
+            <a:off x="640080" y="822960"/>
+            <a:ext cx="10972800" cy="640080"/>
+          </a:xfrm>
+          <a:prstGeom prst="rect">
+            <a:avLst/>
+          </a:prstGeom>
+          <a:noFill/>
+        </p:spPr>
+        <p:txBody>
+          <a:bodyPr wrap="square">
+            <a:noAutofit/>
+          </a:bodyPr>
+          <a:lstStyle/>
+          <a:p>
+            <a:r>
+              <a:rPr sz="2900" b="1">
                 <a:solidFill>
                   <a:srgbClr val="1E2024"/>
                 </a:solidFill>
                 <a:latin typeface="Calibri"/>
               </a:rPr>
-              <a:t>同一道題，別家怎麼答——各付什麼代價</a:t>
+              <a:t>以一支 Fetch 為例：consumer 協商、replica 由 MV</a:t>
+            </a:r>
+          </a:p>
+        </p:txBody>
+      </p:sp>
+      <p:sp>
+        <p:nvSpPr>
+          <p:cNvPr id="4" name="TextBox 3"/>
+          <p:cNvSpPr txBox="1"/>
+          <p:nvPr/>
+        </p:nvSpPr>
+        <p:spPr>
+          <a:xfrm>
+            <a:off x="640080" y="1481328"/>
+            <a:ext cx="10972800" cy="365760"/>
+          </a:xfrm>
+          <a:prstGeom prst="rect">
+            <a:avLst/>
+          </a:prstGeom>
+          <a:noFill/>
+        </p:spPr>
+        <p:txBody>
+          <a:bodyPr wrap="square">
+            <a:noAutofit/>
+          </a:bodyPr>
+          <a:lstStyle/>
+          <a:p>
+            <a:r>
+              <a:rPr sz="1400" b="0">
+                <a:solidFill>
+                  <a:srgbClr val="5F5E5A"/>
+                </a:solidFill>
+                <a:latin typeface="Calibri"/>
+              </a:rPr>
+              <a:t>同一支 Fetch 兩種身分：consumer fetch 走 client↔broker、replica fetch 走 broker↔broker</a:t>
             </a:r>
           </a:p>
         </p:txBody>
       </p:sp>
       <p:pic>
         <p:nvPicPr>
-          <p:cNvPr id="4" name="Picture 3" descr="arrows-split.png"/>
+          <p:cNvPr id="5" name="Picture 4" descr="s2a-rangeline.png"/>
           <p:cNvPicPr>
             <a:picLocks noChangeAspect="1"/>
           </p:cNvPicPr>
@@ -7982,8 +8495,8 @@
         </p:blipFill>
         <p:spPr>
           <a:xfrm>
-            <a:off x="658368" y="2176272"/>
-            <a:ext cx="274320" cy="274320"/>
+            <a:off x="1664208" y="1965960"/>
+            <a:ext cx="8869680" cy="4097792"/>
           </a:xfrm>
           <a:prstGeom prst="rect">
             <a:avLst/>
@@ -7992,196 +8505,7 @@
       </p:pic>
       <p:sp>
         <p:nvSpPr>
-          <p:cNvPr id="5" name="TextBox 4"/>
-          <p:cNvSpPr txBox="1"/>
-          <p:nvPr/>
-        </p:nvSpPr>
-        <p:spPr>
-          <a:xfrm>
-            <a:off x="1078992" y="2148840"/>
-            <a:ext cx="10515600" cy="1188720"/>
-          </a:xfrm>
-          <a:prstGeom prst="rect">
-            <a:avLst/>
-          </a:prstGeom>
-          <a:noFill/>
-        </p:spPr>
-        <p:txBody>
-          <a:bodyPr wrap="square">
-            <a:noAutofit/>
-          </a:bodyPr>
-          <a:lstStyle/>
-          <a:p>
-            <a:r>
-              <a:rPr sz="1650" b="0">
-                <a:solidFill>
-                  <a:srgbClr val="1E2024"/>
-                </a:solidFill>
-                <a:latin typeface="Calibri"/>
-              </a:rPr>
-              <a:t>Kafka：per-API 協商＋partition replication 由 finalized MV 決定——單支 API 獨立演進、複製層線上滾動升級；代價＝協定面積最大</a:t>
-            </a:r>
-          </a:p>
-        </p:txBody>
-      </p:sp>
-      <p:pic>
-        <p:nvPicPr>
-          <p:cNvPr id="6" name="Picture 5" descr="database.png"/>
-          <p:cNvPicPr>
-            <a:picLocks noChangeAspect="1"/>
-          </p:cNvPicPr>
-          <p:nvPr/>
-        </p:nvPicPr>
-        <p:blipFill>
-          <a:blip r:embed="rId3"/>
-          <a:stretch>
-            <a:fillRect/>
-          </a:stretch>
-        </p:blipFill>
-        <p:spPr>
-          <a:xfrm>
-            <a:off x="658368" y="3511296"/>
-            <a:ext cx="274320" cy="274320"/>
-          </a:xfrm>
-          <a:prstGeom prst="rect">
-            <a:avLst/>
-          </a:prstGeom>
-        </p:spPr>
-      </p:pic>
-      <p:sp>
-        <p:nvSpPr>
-          <p:cNvPr id="7" name="TextBox 6"/>
-          <p:cNvSpPr txBox="1"/>
-          <p:nvPr/>
-        </p:nvSpPr>
-        <p:spPr>
-          <a:xfrm>
-            <a:off x="1078992" y="3483864"/>
-            <a:ext cx="10515600" cy="841248"/>
-          </a:xfrm>
-          <a:prstGeom prst="rect">
-            <a:avLst/>
-          </a:prstGeom>
-          <a:noFill/>
-        </p:spPr>
-        <p:txBody>
-          <a:bodyPr wrap="square">
-            <a:noAutofit/>
-          </a:bodyPr>
-          <a:lstStyle/>
-          <a:p>
-            <a:r>
-              <a:rPr sz="1650" b="0">
-                <a:solidFill>
-                  <a:srgbClr val="1E2024"/>
-                </a:solidFill>
-                <a:latin typeface="Calibri"/>
-              </a:rPr>
-              <a:t>MongoDB：全域一個 wire version＋FCV 治理叢集——實作簡單；代價＝粒度粗、無法單支 API 獨立演進</a:t>
-            </a:r>
-          </a:p>
-        </p:txBody>
-      </p:sp>
-      <p:pic>
-        <p:nvPicPr>
-          <p:cNvPr id="8" name="Picture 7" descr="leaf.png"/>
-          <p:cNvPicPr>
-            <a:picLocks noChangeAspect="1"/>
-          </p:cNvPicPr>
-          <p:nvPr/>
-        </p:nvPicPr>
-        <p:blipFill>
-          <a:blip r:embed="rId4"/>
-          <a:stretch>
-            <a:fillRect/>
-          </a:stretch>
-        </p:blipFill>
-        <p:spPr>
-          <a:xfrm>
-            <a:off x="658368" y="4498848"/>
-            <a:ext cx="274320" cy="274320"/>
-          </a:xfrm>
-          <a:prstGeom prst="rect">
-            <a:avLst/>
-          </a:prstGeom>
-        </p:spPr>
-      </p:pic>
-      <p:sp>
-        <p:nvSpPr>
-          <p:cNvPr id="9" name="TextBox 8"/>
-          <p:cNvSpPr txBox="1"/>
-          <p:nvPr/>
-        </p:nvSpPr>
-        <p:spPr>
-          <a:xfrm>
-            <a:off x="1078992" y="4471416"/>
-            <a:ext cx="10515600" cy="1188720"/>
-          </a:xfrm>
-          <a:prstGeom prst="rect">
-            <a:avLst/>
-          </a:prstGeom>
-          <a:noFill/>
-        </p:spPr>
-        <p:txBody>
-          <a:bodyPr wrap="square">
-            <a:noAutofit/>
-          </a:bodyPr>
-          <a:lstStyle/>
-          <a:p>
-            <a:r>
-              <a:rPr sz="1650" b="0">
-                <a:solidFill>
-                  <a:srgbClr val="1E2024"/>
-                </a:solidFill>
-                <a:latin typeface="Calibri"/>
-              </a:rPr>
-              <a:t>PostgreSQL：協定 v3 極穩定；physical replication 靠 WAL、跨大版不相容 → HA replica 不能就地跨 major 滾，近零停機得改搭 logical replication（bolt-on）</a:t>
-            </a:r>
-          </a:p>
-        </p:txBody>
-      </p:sp>
-      <p:sp>
-        <p:nvSpPr>
-          <p:cNvPr id="10" name="TextBox 9"/>
-          <p:cNvSpPr txBox="1"/>
-          <p:nvPr/>
-        </p:nvSpPr>
-        <p:spPr>
-          <a:xfrm>
-            <a:off x="640080" y="5806440"/>
-            <a:ext cx="10972800" cy="877824"/>
-          </a:xfrm>
-          <a:prstGeom prst="rect">
-            <a:avLst/>
-          </a:prstGeom>
-          <a:solidFill>
-            <a:srgbClr val="E9F3DE"/>
-          </a:solidFill>
-          <a:ln>
-            <a:noFill/>
-          </a:ln>
-        </p:spPr>
-        <p:txBody>
-          <a:bodyPr wrap="square" lIns="146304" tIns="82296">
-            <a:noAutofit/>
-          </a:bodyPr>
-          <a:lstStyle/>
-          <a:p>
-            <a:r>
-              <a:rPr sz="1500" b="0">
-                <a:solidFill>
-                  <a:srgbClr val="27500A"/>
-                </a:solidFill>
-                <a:latin typeface="Calibri"/>
-              </a:rPr>
-              <a:t>沒有免費：Kafka 複製層內建線上滾動升級，PostgreSQL 得另搭 logical replication 才換得到</a:t>
-            </a:r>
-          </a:p>
-        </p:txBody>
-      </p:sp>
-      <p:sp>
-        <p:nvSpPr>
-          <p:cNvPr id="11" name="TextBox 10"/>
+          <p:cNvPr id="6" name="TextBox 5"/>
           <p:cNvSpPr txBox="1"/>
           <p:nvPr/>
         </p:nvSpPr>
@@ -8215,48 +8539,48 @@
                 <a:solidFill>
                   <a:srgbClr val="185FA5"/>
                 </a:solidFill>
-                <a:latin typeface="Calibri"/>
+                <a:latin typeface="Courier New"/>
+                <a:hlinkClick r:id="rId3"/>
+              </a:rPr>
+              <a:t>forConsumer/forReplica</a:t>
+            </a:r>
+            <a:r>
+              <a:rPr sz="1200" b="0">
+                <a:solidFill>
+                  <a:srgbClr val="8A8A8A"/>
+                </a:solidFill>
+                <a:latin typeface="Calibri"/>
+              </a:rPr>
+              <a:t>   ·   </a:t>
+            </a:r>
+            <a:r>
+              <a:rPr sz="1200" b="0" u="sng">
+                <a:solidFill>
+                  <a:srgbClr val="185FA5"/>
+                </a:solidFill>
+                <a:latin typeface="Courier New"/>
+                <a:hlinkClick r:id="rId4"/>
+              </a:rPr>
+              <a:t>fetchRequestVersion</a:t>
+            </a:r>
+            <a:r>
+              <a:rPr sz="1200" b="0">
+                <a:solidFill>
+                  <a:srgbClr val="8A8A8A"/>
+                </a:solidFill>
+                <a:latin typeface="Calibri"/>
+              </a:rPr>
+              <a:t>   ·   </a:t>
+            </a:r>
+            <a:r>
+              <a:rPr sz="1200" b="0" u="sng">
+                <a:solidFill>
+                  <a:srgbClr val="185FA5"/>
+                </a:solidFill>
+                <a:latin typeface="Courier New"/>
                 <a:hlinkClick r:id="rId5"/>
               </a:rPr>
-              <a:t>MongoDB hello / FCV</a:t>
-            </a:r>
-            <a:r>
-              <a:rPr sz="1200" b="0">
-                <a:solidFill>
-                  <a:srgbClr val="8A8A8A"/>
-                </a:solidFill>
-                <a:latin typeface="Calibri"/>
-              </a:rPr>
-              <a:t>   ·   </a:t>
-            </a:r>
-            <a:r>
-              <a:rPr sz="1200" b="0" u="sng">
-                <a:solidFill>
-                  <a:srgbClr val="185FA5"/>
-                </a:solidFill>
-                <a:latin typeface="Calibri"/>
-                <a:hlinkClick r:id="rId6"/>
-              </a:rPr>
-              <a:t>PostgreSQL protocol</a:t>
-            </a:r>
-            <a:r>
-              <a:rPr sz="1200" b="0">
-                <a:solidFill>
-                  <a:srgbClr val="8A8A8A"/>
-                </a:solidFill>
-                <a:latin typeface="Calibri"/>
-              </a:rPr>
-              <a:t>   ·   </a:t>
-            </a:r>
-            <a:r>
-              <a:rPr sz="1200" b="0" u="sng">
-                <a:solidFill>
-                  <a:srgbClr val="185FA5"/>
-                </a:solidFill>
-                <a:latin typeface="Calibri"/>
-                <a:hlinkClick r:id="rId7"/>
-              </a:rPr>
-              <a:t>PG logical replication</a:t>
+              <a:t>validVersions</a:t>
             </a:r>
           </a:p>
         </p:txBody>
@@ -8308,7 +8632,7 @@
                 </a:solidFill>
                 <a:latin typeface="Calibri"/>
               </a:rPr>
-              <a:t>Part 1 · 代價</a:t>
+              <a:t>Part 1 · 對照</a:t>
             </a:r>
           </a:p>
         </p:txBody>
@@ -8342,77 +8666,14 @@
                 </a:solidFill>
                 <a:latin typeface="Calibri"/>
               </a:rPr>
-              <a:t>代價：每支 API 的 handler 都要逐版分岔</a:t>
-            </a:r>
-          </a:p>
-        </p:txBody>
-      </p:sp>
-      <p:sp>
-        <p:nvSpPr>
-          <p:cNvPr id="4" name="TextBox 3"/>
-          <p:cNvSpPr txBox="1"/>
-          <p:nvPr/>
-        </p:nvSpPr>
-        <p:spPr>
-          <a:xfrm>
-            <a:off x="640080" y="2148840"/>
-            <a:ext cx="10972800" cy="1097280"/>
-          </a:xfrm>
-          <a:prstGeom prst="rect">
-            <a:avLst/>
-          </a:prstGeom>
-          <a:solidFill>
-            <a:srgbClr val="F3F1EC"/>
-          </a:solidFill>
-          <a:ln w="6350">
-            <a:solidFill>
-              <a:srgbClr val="E3E0D8"/>
-            </a:solidFill>
-          </a:ln>
-        </p:spPr>
-        <p:txBody>
-          <a:bodyPr wrap="square" lIns="146304" tIns="91440" bIns="91440">
-            <a:noAutofit/>
-          </a:bodyPr>
-          <a:lstStyle/>
-          <a:p>
-            <a:r>
-              <a:rPr sz="1350" b="0">
-                <a:solidFill>
-                  <a:srgbClr val="2C2C2A"/>
-                </a:solidFill>
-                <a:latin typeface="Calibri"/>
-              </a:rPr>
-              <a:t>每支 API 的 broker handler 都逐版分岔，例如 Fetch：</a:t>
-            </a:r>
-          </a:p>
-          <a:p>
-            <a:r>
-              <a:rPr sz="1350" b="0">
-                <a:solidFill>
-                  <a:srgbClr val="2C2C2A"/>
-                </a:solidFill>
-                <a:latin typeface="Calibri"/>
-              </a:rPr>
-              <a:t>  if (version &gt;= 13)  用 topic-id   else   用 topic-name</a:t>
-            </a:r>
-          </a:p>
-          <a:p>
-            <a:r>
-              <a:rPr sz="1350" b="0">
-                <a:solidFill>
-                  <a:srgbClr val="2C2C2A"/>
-                </a:solidFill>
-                <a:latin typeface="Calibri"/>
-              </a:rPr>
-              <a:t>  老版缺的欄位給預設 · 回應一律照「request 的版本」序列化</a:t>
+              <a:t>同一道題，別家怎麼答——各付什麼代價</a:t>
             </a:r>
           </a:p>
         </p:txBody>
       </p:sp>
       <p:pic>
         <p:nvPicPr>
-          <p:cNvPr id="5" name="Picture 4" descr="arrows-split.png"/>
+          <p:cNvPr id="4" name="Picture 3" descr="arrows-split.png"/>
           <p:cNvPicPr>
             <a:picLocks noChangeAspect="1"/>
           </p:cNvPicPr>
@@ -8426,7 +8687,7 @@
         </p:blipFill>
         <p:spPr>
           <a:xfrm>
-            <a:off x="658368" y="3474720"/>
+            <a:off x="658368" y="2176272"/>
             <a:ext cx="274320" cy="274320"/>
           </a:xfrm>
           <a:prstGeom prst="rect">
@@ -8436,13 +8697,71 @@
       </p:pic>
       <p:sp>
         <p:nvSpPr>
-          <p:cNvPr id="6" name="TextBox 5"/>
-          <p:cNvSpPr txBox="1"/>
-          <p:nvPr/>
-        </p:nvSpPr>
-        <p:spPr>
-          <a:xfrm>
-            <a:off x="1078992" y="3447288"/>
+          <p:cNvPr id="5" name="TextBox 4"/>
+          <p:cNvSpPr txBox="1"/>
+          <p:nvPr/>
+        </p:nvSpPr>
+        <p:spPr>
+          <a:xfrm>
+            <a:off x="1078992" y="2148840"/>
+            <a:ext cx="10515600" cy="1188720"/>
+          </a:xfrm>
+          <a:prstGeom prst="rect">
+            <a:avLst/>
+          </a:prstGeom>
+          <a:noFill/>
+        </p:spPr>
+        <p:txBody>
+          <a:bodyPr wrap="square">
+            <a:noAutofit/>
+          </a:bodyPr>
+          <a:lstStyle/>
+          <a:p>
+            <a:r>
+              <a:rPr sz="1650" b="0">
+                <a:solidFill>
+                  <a:srgbClr val="1E2024"/>
+                </a:solidFill>
+                <a:latin typeface="Calibri"/>
+              </a:rPr>
+              <a:t>Kafka：per-API 協商＋partition replication 由 finalized MV 決定——單支 API 獨立演進、複製層線上滾動升級；代價＝協定面積最大</a:t>
+            </a:r>
+          </a:p>
+        </p:txBody>
+      </p:sp>
+      <p:pic>
+        <p:nvPicPr>
+          <p:cNvPr id="6" name="Picture 5" descr="database.png"/>
+          <p:cNvPicPr>
+            <a:picLocks noChangeAspect="1"/>
+          </p:cNvPicPr>
+          <p:nvPr/>
+        </p:nvPicPr>
+        <p:blipFill>
+          <a:blip r:embed="rId3"/>
+          <a:stretch>
+            <a:fillRect/>
+          </a:stretch>
+        </p:blipFill>
+        <p:spPr>
+          <a:xfrm>
+            <a:off x="658368" y="3511296"/>
+            <a:ext cx="274320" cy="274320"/>
+          </a:xfrm>
+          <a:prstGeom prst="rect">
+            <a:avLst/>
+          </a:prstGeom>
+        </p:spPr>
+      </p:pic>
+      <p:sp>
+        <p:nvSpPr>
+          <p:cNvPr id="7" name="TextBox 6"/>
+          <p:cNvSpPr txBox="1"/>
+          <p:nvPr/>
+        </p:nvSpPr>
+        <p:spPr>
+          <a:xfrm>
+            <a:off x="1078992" y="3483864"/>
             <a:ext cx="10515600" cy="841248"/>
           </a:xfrm>
           <a:prstGeom prst="rect">
@@ -8463,54 +8782,78 @@
                 </a:solidFill>
                 <a:latin typeface="Calibri"/>
               </a:rPr>
-              <a:t>讀寫欄位、語意差異、預設值全逐版 if (version ≥ N)，散在每支 API 的 handler 裡——加一版就多一堆分支要維護</a:t>
-            </a:r>
-          </a:p>
-        </p:txBody>
-      </p:sp>
-      <p:sp>
-        <p:nvSpPr>
-          <p:cNvPr id="7" name="TextBox 6"/>
-          <p:cNvSpPr txBox="1"/>
-          <p:nvPr/>
-        </p:nvSpPr>
-        <p:spPr>
-          <a:xfrm>
-            <a:off x="640080" y="4434840"/>
-            <a:ext cx="10972800" cy="438912"/>
-          </a:xfrm>
-          <a:prstGeom prst="rect">
-            <a:avLst/>
-          </a:prstGeom>
-          <a:noFill/>
-        </p:spPr>
-        <p:txBody>
-          <a:bodyPr wrap="square">
-            <a:noAutofit/>
-          </a:bodyPr>
-          <a:lstStyle/>
-          <a:p>
-            <a:r>
-              <a:rPr sz="1500" b="0">
-                <a:solidFill>
-                  <a:srgbClr val="5F5E5A"/>
-                </a:solidFill>
-                <a:latin typeface="Calibri"/>
-              </a:rPr>
-              <a:t>另一條更大的隱形帳單是相容性測試（下一張細看）——每個版本、每個歷史 release 都得長期盯著。</a:t>
-            </a:r>
-          </a:p>
-        </p:txBody>
-      </p:sp>
-      <p:sp>
-        <p:nvSpPr>
-          <p:cNvPr id="8" name="TextBox 7"/>
-          <p:cNvSpPr txBox="1"/>
-          <p:nvPr/>
-        </p:nvSpPr>
-        <p:spPr>
-          <a:xfrm>
-            <a:off x="640080" y="5001768"/>
+              <a:t>MongoDB：全域一個 wire version＋FCV 治理叢集——實作簡單；代價＝粒度粗、無法單支 API 獨立演進</a:t>
+            </a:r>
+          </a:p>
+        </p:txBody>
+      </p:sp>
+      <p:pic>
+        <p:nvPicPr>
+          <p:cNvPr id="8" name="Picture 7" descr="leaf.png"/>
+          <p:cNvPicPr>
+            <a:picLocks noChangeAspect="1"/>
+          </p:cNvPicPr>
+          <p:nvPr/>
+        </p:nvPicPr>
+        <p:blipFill>
+          <a:blip r:embed="rId4"/>
+          <a:stretch>
+            <a:fillRect/>
+          </a:stretch>
+        </p:blipFill>
+        <p:spPr>
+          <a:xfrm>
+            <a:off x="658368" y="4498848"/>
+            <a:ext cx="274320" cy="274320"/>
+          </a:xfrm>
+          <a:prstGeom prst="rect">
+            <a:avLst/>
+          </a:prstGeom>
+        </p:spPr>
+      </p:pic>
+      <p:sp>
+        <p:nvSpPr>
+          <p:cNvPr id="9" name="TextBox 8"/>
+          <p:cNvSpPr txBox="1"/>
+          <p:nvPr/>
+        </p:nvSpPr>
+        <p:spPr>
+          <a:xfrm>
+            <a:off x="1078992" y="4471416"/>
+            <a:ext cx="10515600" cy="1188720"/>
+          </a:xfrm>
+          <a:prstGeom prst="rect">
+            <a:avLst/>
+          </a:prstGeom>
+          <a:noFill/>
+        </p:spPr>
+        <p:txBody>
+          <a:bodyPr wrap="square">
+            <a:noAutofit/>
+          </a:bodyPr>
+          <a:lstStyle/>
+          <a:p>
+            <a:r>
+              <a:rPr sz="1650" b="0">
+                <a:solidFill>
+                  <a:srgbClr val="1E2024"/>
+                </a:solidFill>
+                <a:latin typeface="Calibri"/>
+              </a:rPr>
+              <a:t>PostgreSQL：協定 v3 極穩定；physical replication 靠 WAL、跨大版不相容 → HA replica 不能就地跨 major 滾，近零停機得改搭 logical replication（bolt-on）</a:t>
+            </a:r>
+          </a:p>
+        </p:txBody>
+      </p:sp>
+      <p:sp>
+        <p:nvSpPr>
+          <p:cNvPr id="10" name="TextBox 9"/>
+          <p:cNvSpPr txBox="1"/>
+          <p:nvPr/>
+        </p:nvSpPr>
+        <p:spPr>
+          <a:xfrm>
+            <a:off x="640080" y="5806440"/>
             <a:ext cx="10972800" cy="877824"/>
           </a:xfrm>
           <a:prstGeom prst="rect">
@@ -8536,14 +8879,14 @@
                 </a:solidFill>
                 <a:latin typeface="Calibri"/>
               </a:rPr>
-              <a:t>貴到 Kafka 自己在 KIP-896 承認「maintenance cost up, value down」，4.0 砍掉 2.1 以前的舊版本止血</a:t>
-            </a:r>
-          </a:p>
-        </p:txBody>
-      </p:sp>
-      <p:sp>
-        <p:nvSpPr>
-          <p:cNvPr id="9" name="TextBox 8"/>
+              <a:t>沒有免費：Kafka 複製層內建線上滾動升級，PostgreSQL 得另搭 logical replication 才換得到</a:t>
+            </a:r>
+          </a:p>
+        </p:txBody>
+      </p:sp>
+      <p:sp>
+        <p:nvSpPr>
+          <p:cNvPr id="11" name="TextBox 10"/>
           <p:cNvSpPr txBox="1"/>
           <p:nvPr/>
         </p:nvSpPr>
@@ -8577,10 +8920,10 @@
                 <a:solidFill>
                   <a:srgbClr val="185FA5"/>
                 </a:solidFill>
-                <a:latin typeface="Courier New"/>
-                <a:hlinkClick r:id="rId3"/>
-              </a:rPr>
-              <a:t>version()&gt;=13</a:t>
+                <a:latin typeface="Calibri"/>
+                <a:hlinkClick r:id="rId5"/>
+              </a:rPr>
+              <a:t>MongoDB hello / FCV</a:t>
             </a:r>
             <a:r>
               <a:rPr sz="1200" b="0">
@@ -8596,10 +8939,10 @@
                 <a:solidFill>
                   <a:srgbClr val="185FA5"/>
                 </a:solidFill>
-                <a:latin typeface="Courier New"/>
-                <a:hlinkClick r:id="rId4"/>
-              </a:rPr>
-              <a:t>回應=request 版本</a:t>
+                <a:latin typeface="Calibri"/>
+                <a:hlinkClick r:id="rId6"/>
+              </a:rPr>
+              <a:t>PostgreSQL protocol</a:t>
             </a:r>
             <a:r>
               <a:rPr sz="1200" b="0">
@@ -8615,29 +8958,10 @@
                 <a:solidFill>
                   <a:srgbClr val="185FA5"/>
                 </a:solidFill>
-                <a:latin typeface="Courier New"/>
-                <a:hlinkClick r:id="rId5"/>
-              </a:rPr>
-              <a:t>預設值</a:t>
-            </a:r>
-            <a:r>
-              <a:rPr sz="1200" b="0">
-                <a:solidFill>
-                  <a:srgbClr val="8A8A8A"/>
-                </a:solidFill>
-                <a:latin typeface="Calibri"/>
-              </a:rPr>
-              <a:t>   ·   </a:t>
-            </a:r>
-            <a:r>
-              <a:rPr sz="1200" b="0" u="sng">
-                <a:solidFill>
-                  <a:srgbClr val="185FA5"/>
-                </a:solidFill>
-                <a:latin typeface="Calibri"/>
-                <a:hlinkClick r:id="rId6"/>
-              </a:rPr>
-              <a:t>KIP-896</a:t>
+                <a:latin typeface="Calibri"/>
+                <a:hlinkClick r:id="rId7"/>
+              </a:rPr>
+              <a:t>PG logical replication</a:t>
             </a:r>
           </a:p>
         </p:txBody>
